--- a/Introduccion a la Ingenieria/Clases/Clase 5 - El rol del ingeniero en el contexto ambiental/Presentacion.pptx
+++ b/Introduccion a la Ingenieria/Clases/Clase 5 - El rol del ingeniero en el contexto ambiental/Presentacion.pptx
@@ -19,6 +19,16 @@
     <p:sldId id="267" r:id="rId18"/>
     <p:sldId id="268" r:id="rId19"/>
     <p:sldId id="269" r:id="rId20"/>
+    <p:sldId id="270" r:id="rId21"/>
+    <p:sldId id="271" r:id="rId22"/>
+    <p:sldId id="272" r:id="rId23"/>
+    <p:sldId id="273" r:id="rId24"/>
+    <p:sldId id="274" r:id="rId25"/>
+    <p:sldId id="275" r:id="rId26"/>
+    <p:sldId id="276" r:id="rId27"/>
+    <p:sldId id="277" r:id="rId28"/>
+    <p:sldId id="278" r:id="rId29"/>
+    <p:sldId id="279" r:id="rId30"/>
   </p:sldIdLst>
   <p:sldSz cx="12191695" cy="6858000" type="screen4x3"/>
   <p:notesSz cx="6858000" cy="9144000"/>
@@ -4153,7 +4163,7 @@
         <p:spPr>
           <a:xfrm>
             <a:off x="0" y="0"/>
-            <a:ext cx="12191695" cy="1170432"/>
+            <a:ext cx="12191695" cy="960120"/>
           </a:xfrm>
           <a:prstGeom prst="rect">
             <a:avLst/>
@@ -4195,7 +4205,7 @@
         </p:nvSpPr>
         <p:spPr>
           <a:xfrm>
-            <a:off x="0" y="1170432"/>
+            <a:off x="0" y="960120"/>
             <a:ext cx="12191695" cy="41148"/>
           </a:xfrm>
           <a:prstGeom prst="rect">
@@ -4239,7 +4249,7 @@
         <p:spPr>
           <a:xfrm>
             <a:off x="457200" y="164592"/>
-            <a:ext cx="11277295" cy="384048"/>
+            <a:ext cx="11277295" cy="502920"/>
           </a:xfrm>
           <a:prstGeom prst="rect">
             <a:avLst/>
@@ -4259,7 +4269,7 @@
                 </a:solidFill>
                 <a:latin typeface="Calibri"/>
               </a:rPr>
-              <a:t>Taller de hoy: Huella del sistema</a:t>
+              <a:t>La pregunta de entrada: darle materia a algo que parece no tenerla</a:t>
             </a:r>
           </a:p>
         </p:txBody>
@@ -4272,8 +4282,8 @@
         </p:nvSpPr>
         <p:spPr>
           <a:xfrm>
-            <a:off x="457200" y="566928"/>
-            <a:ext cx="11277295" cy="411480"/>
+            <a:off x="457200" y="1170432"/>
+            <a:ext cx="11277295" cy="5230368"/>
           </a:xfrm>
           <a:prstGeom prst="rect">
             <a:avLst/>
@@ -4286,927 +4296,122 @@
           </a:bodyPr>
           <a:lstStyle/>
           <a:p>
-            <a:r>
-              <a:rPr sz="1400" b="0" i="0">
-                <a:solidFill>
-                  <a:srgbClr val="B8D8EE"/>
-                </a:solidFill>
-                <a:latin typeface="Calibri"/>
-              </a:rPr>
-              <a:t>17 min en equipos · cada equipo, el sistema de su propio proyecto · diagrama de huella + 2 decisiones + 1 indicador</a:t>
-            </a:r>
-          </a:p>
-        </p:txBody>
-      </p:sp>
-      <p:sp>
-        <p:nvSpPr>
-          <p:cNvPr id="6" name="Rounded Rectangle 5"/>
-          <p:cNvSpPr/>
-          <p:nvPr/>
-        </p:nvSpPr>
-        <p:spPr>
-          <a:xfrm>
-            <a:off x="457200" y="1472184"/>
-            <a:ext cx="11277295" cy="566928"/>
-          </a:xfrm>
-          <a:prstGeom prst="roundRect">
-            <a:avLst>
-              <a:gd name="adj" fmla="val 12000"/>
-            </a:avLst>
-          </a:prstGeom>
-          <a:solidFill>
-            <a:srgbClr val="F2F2F2"/>
-          </a:solidFill>
-          <a:ln>
-            <a:noFill/>
-          </a:ln>
-        </p:spPr>
-        <p:style>
-          <a:lnRef idx="1">
-            <a:schemeClr val="accent1"/>
-          </a:lnRef>
-          <a:fillRef idx="3">
-            <a:schemeClr val="accent1"/>
-          </a:fillRef>
-          <a:effectRef idx="2">
-            <a:schemeClr val="accent1"/>
-          </a:effectRef>
-          <a:fontRef idx="minor">
-            <a:schemeClr val="lt1"/>
-          </a:fontRef>
-        </p:style>
-        <p:txBody>
-          <a:bodyPr rtlCol="0" anchor="ctr"/>
-          <a:lstStyle/>
-          <a:p>
-            <a:pPr algn="ctr"/>
-          </a:p>
-        </p:txBody>
-      </p:sp>
-      <p:sp>
-        <p:nvSpPr>
-          <p:cNvPr id="7" name="Rectangle 6"/>
-          <p:cNvSpPr/>
-          <p:nvPr/>
-        </p:nvSpPr>
-        <p:spPr>
-          <a:xfrm>
-            <a:off x="640080" y="1618487"/>
-            <a:ext cx="274320" cy="274320"/>
-          </a:xfrm>
-          <a:prstGeom prst="rect">
-            <a:avLst/>
-          </a:prstGeom>
-          <a:solidFill>
-            <a:srgbClr val="FFFFFF"/>
-          </a:solidFill>
-          <a:ln>
-            <a:solidFill>
-              <a:srgbClr val="333333"/>
-            </a:solidFill>
-          </a:ln>
-        </p:spPr>
-        <p:style>
-          <a:lnRef idx="1">
-            <a:schemeClr val="accent1"/>
-          </a:lnRef>
-          <a:fillRef idx="3">
-            <a:schemeClr val="accent1"/>
-          </a:fillRef>
-          <a:effectRef idx="2">
-            <a:schemeClr val="accent1"/>
-          </a:effectRef>
-          <a:fontRef idx="minor">
-            <a:schemeClr val="lt1"/>
-          </a:fontRef>
-        </p:style>
-        <p:txBody>
-          <a:bodyPr rtlCol="0" anchor="ctr"/>
-          <a:lstStyle/>
-          <a:p>
-            <a:pPr algn="ctr"/>
-          </a:p>
-        </p:txBody>
-      </p:sp>
-      <p:sp>
-        <p:nvSpPr>
-          <p:cNvPr id="8" name="Rectangle 7"/>
-          <p:cNvSpPr/>
-          <p:nvPr/>
-        </p:nvSpPr>
-        <p:spPr>
-          <a:xfrm>
-            <a:off x="640080" y="1618487"/>
-            <a:ext cx="73152" cy="274320"/>
-          </a:xfrm>
-          <a:prstGeom prst="rect">
-            <a:avLst/>
-          </a:prstGeom>
-          <a:solidFill>
-            <a:srgbClr val="269CCB"/>
-          </a:solidFill>
-          <a:ln>
-            <a:noFill/>
-          </a:ln>
-        </p:spPr>
-        <p:style>
-          <a:lnRef idx="1">
-            <a:schemeClr val="accent1"/>
-          </a:lnRef>
-          <a:fillRef idx="3">
-            <a:schemeClr val="accent1"/>
-          </a:fillRef>
-          <a:effectRef idx="2">
-            <a:schemeClr val="accent1"/>
-          </a:effectRef>
-          <a:fontRef idx="minor">
-            <a:schemeClr val="lt1"/>
-          </a:fontRef>
-        </p:style>
-        <p:txBody>
-          <a:bodyPr rtlCol="0" anchor="ctr"/>
-          <a:lstStyle/>
-          <a:p>
-            <a:pPr algn="ctr"/>
-          </a:p>
-        </p:txBody>
-      </p:sp>
-      <p:sp>
-        <p:nvSpPr>
-          <p:cNvPr id="9" name="TextBox 8"/>
-          <p:cNvSpPr txBox="1"/>
-          <p:nvPr/>
-        </p:nvSpPr>
-        <p:spPr>
-          <a:xfrm>
-            <a:off x="1097280" y="1563624"/>
-            <a:ext cx="10362895" cy="402336"/>
-          </a:xfrm>
-          <a:prstGeom prst="rect">
-            <a:avLst/>
-          </a:prstGeom>
-          <a:noFill/>
-        </p:spPr>
-        <p:txBody>
-          <a:bodyPr wrap="square" anchor="ctr"/>
-          <a:lstStyle/>
-          <a:p>
-            <a:r>
-              <a:rPr sz="1500" b="1" i="0">
-                <a:solidFill>
-                  <a:srgbClr val="333333"/>
-                </a:solidFill>
-                <a:latin typeface="Calibri"/>
-              </a:rPr>
-              <a:t>EL RECORRIDO DIBUJADO</a:t>
-            </a:r>
-            <a:r>
-              <a:rPr sz="1500" b="0" i="0">
-                <a:solidFill>
-                  <a:srgbClr val="333333"/>
-                </a:solidFill>
-                <a:latin typeface="Calibri"/>
-              </a:rPr>
-              <a:t> — El camino completo con flechas: dispositivo del usuario → red → servidor → almacenamiento, y todo lo que se prende para que el sistema funcione.</a:t>
-            </a:r>
-          </a:p>
-        </p:txBody>
-      </p:sp>
-      <p:sp>
-        <p:nvSpPr>
-          <p:cNvPr id="10" name="Rounded Rectangle 9"/>
-          <p:cNvSpPr/>
-          <p:nvPr/>
-        </p:nvSpPr>
-        <p:spPr>
-          <a:xfrm>
-            <a:off x="457200" y="2148839"/>
-            <a:ext cx="11277295" cy="566928"/>
-          </a:xfrm>
-          <a:prstGeom prst="roundRect">
-            <a:avLst>
-              <a:gd name="adj" fmla="val 12000"/>
-            </a:avLst>
-          </a:prstGeom>
-          <a:solidFill>
-            <a:srgbClr val="F2F2F2"/>
-          </a:solidFill>
-          <a:ln>
-            <a:noFill/>
-          </a:ln>
-        </p:spPr>
-        <p:style>
-          <a:lnRef idx="1">
-            <a:schemeClr val="accent1"/>
-          </a:lnRef>
-          <a:fillRef idx="3">
-            <a:schemeClr val="accent1"/>
-          </a:fillRef>
-          <a:effectRef idx="2">
-            <a:schemeClr val="accent1"/>
-          </a:effectRef>
-          <a:fontRef idx="minor">
-            <a:schemeClr val="lt1"/>
-          </a:fontRef>
-        </p:style>
-        <p:txBody>
-          <a:bodyPr rtlCol="0" anchor="ctr"/>
-          <a:lstStyle/>
-          <a:p>
-            <a:pPr algn="ctr"/>
-          </a:p>
-        </p:txBody>
-      </p:sp>
-      <p:sp>
-        <p:nvSpPr>
-          <p:cNvPr id="11" name="Rectangle 10"/>
-          <p:cNvSpPr/>
-          <p:nvPr/>
-        </p:nvSpPr>
-        <p:spPr>
-          <a:xfrm>
-            <a:off x="640080" y="2295144"/>
-            <a:ext cx="274320" cy="274320"/>
-          </a:xfrm>
-          <a:prstGeom prst="rect">
-            <a:avLst/>
-          </a:prstGeom>
-          <a:solidFill>
-            <a:srgbClr val="FFFFFF"/>
-          </a:solidFill>
-          <a:ln>
-            <a:solidFill>
-              <a:srgbClr val="333333"/>
-            </a:solidFill>
-          </a:ln>
-        </p:spPr>
-        <p:style>
-          <a:lnRef idx="1">
-            <a:schemeClr val="accent1"/>
-          </a:lnRef>
-          <a:fillRef idx="3">
-            <a:schemeClr val="accent1"/>
-          </a:fillRef>
-          <a:effectRef idx="2">
-            <a:schemeClr val="accent1"/>
-          </a:effectRef>
-          <a:fontRef idx="minor">
-            <a:schemeClr val="lt1"/>
-          </a:fontRef>
-        </p:style>
-        <p:txBody>
-          <a:bodyPr rtlCol="0" anchor="ctr"/>
-          <a:lstStyle/>
-          <a:p>
-            <a:pPr algn="ctr"/>
-          </a:p>
-        </p:txBody>
-      </p:sp>
-      <p:sp>
-        <p:nvSpPr>
-          <p:cNvPr id="12" name="Rectangle 11"/>
-          <p:cNvSpPr/>
-          <p:nvPr/>
-        </p:nvSpPr>
-        <p:spPr>
-          <a:xfrm>
-            <a:off x="640080" y="2295144"/>
-            <a:ext cx="73152" cy="274320"/>
-          </a:xfrm>
-          <a:prstGeom prst="rect">
-            <a:avLst/>
-          </a:prstGeom>
-          <a:solidFill>
-            <a:srgbClr val="269CCB"/>
-          </a:solidFill>
-          <a:ln>
-            <a:noFill/>
-          </a:ln>
-        </p:spPr>
-        <p:style>
-          <a:lnRef idx="1">
-            <a:schemeClr val="accent1"/>
-          </a:lnRef>
-          <a:fillRef idx="3">
-            <a:schemeClr val="accent1"/>
-          </a:fillRef>
-          <a:effectRef idx="2">
-            <a:schemeClr val="accent1"/>
-          </a:effectRef>
-          <a:fontRef idx="minor">
-            <a:schemeClr val="lt1"/>
-          </a:fontRef>
-        </p:style>
-        <p:txBody>
-          <a:bodyPr rtlCol="0" anchor="ctr"/>
-          <a:lstStyle/>
-          <a:p>
-            <a:pPr algn="ctr"/>
-          </a:p>
-        </p:txBody>
-      </p:sp>
-      <p:sp>
-        <p:nvSpPr>
-          <p:cNvPr id="13" name="TextBox 12"/>
-          <p:cNvSpPr txBox="1"/>
-          <p:nvPr/>
-        </p:nvSpPr>
-        <p:spPr>
-          <a:xfrm>
-            <a:off x="1097280" y="2240279"/>
-            <a:ext cx="10362895" cy="402336"/>
-          </a:xfrm>
-          <a:prstGeom prst="rect">
-            <a:avLst/>
-          </a:prstGeom>
-          <a:noFill/>
-        </p:spPr>
-        <p:txBody>
-          <a:bodyPr wrap="square" anchor="ctr"/>
-          <a:lstStyle/>
-          <a:p>
-            <a:r>
-              <a:rPr sz="1500" b="1" i="0">
-                <a:solidFill>
-                  <a:srgbClr val="333333"/>
-                </a:solidFill>
-                <a:latin typeface="Calibri"/>
-              </a:rPr>
-              <a:t>LO QUE SE REPITE</a:t>
-            </a:r>
-            <a:r>
-              <a:rPr sz="1500" b="0" i="0">
-                <a:solidFill>
-                  <a:srgbClr val="333333"/>
-                </a:solidFill>
-                <a:latin typeface="Calibri"/>
-              </a:rPr>
-              <a:t> — Qué operación ocurre </a:t>
-            </a:r>
-            <a:r>
-              <a:rPr sz="1500" b="1" i="0">
-                <a:solidFill>
-                  <a:srgbClr val="333333"/>
-                </a:solidFill>
-                <a:latin typeface="Calibri"/>
-              </a:rPr>
-              <a:t>muchas veces al día</a:t>
-            </a:r>
-            <a:r>
-              <a:rPr sz="1500" b="0" i="0">
-                <a:solidFill>
-                  <a:srgbClr val="333333"/>
-                </a:solidFill>
-                <a:latin typeface="Calibri"/>
-              </a:rPr>
-              <a:t> en su sistema, y una estimación gruesa de cuántas veces. Lo que pasa una vez no mueve nada.</a:t>
-            </a:r>
-          </a:p>
-        </p:txBody>
-      </p:sp>
-      <p:sp>
-        <p:nvSpPr>
-          <p:cNvPr id="14" name="Rounded Rectangle 13"/>
-          <p:cNvSpPr/>
-          <p:nvPr/>
-        </p:nvSpPr>
-        <p:spPr>
-          <a:xfrm>
-            <a:off x="457200" y="2825496"/>
-            <a:ext cx="11277295" cy="566928"/>
-          </a:xfrm>
-          <a:prstGeom prst="roundRect">
-            <a:avLst>
-              <a:gd name="adj" fmla="val 12000"/>
-            </a:avLst>
-          </a:prstGeom>
-          <a:solidFill>
-            <a:srgbClr val="F2F2F2"/>
-          </a:solidFill>
-          <a:ln>
-            <a:noFill/>
-          </a:ln>
-        </p:spPr>
-        <p:style>
-          <a:lnRef idx="1">
-            <a:schemeClr val="accent1"/>
-          </a:lnRef>
-          <a:fillRef idx="3">
-            <a:schemeClr val="accent1"/>
-          </a:fillRef>
-          <a:effectRef idx="2">
-            <a:schemeClr val="accent1"/>
-          </a:effectRef>
-          <a:fontRef idx="minor">
-            <a:schemeClr val="lt1"/>
-          </a:fontRef>
-        </p:style>
-        <p:txBody>
-          <a:bodyPr rtlCol="0" anchor="ctr"/>
-          <a:lstStyle/>
-          <a:p>
-            <a:pPr algn="ctr"/>
-          </a:p>
-        </p:txBody>
-      </p:sp>
-      <p:sp>
-        <p:nvSpPr>
-          <p:cNvPr id="15" name="Rectangle 14"/>
-          <p:cNvSpPr/>
-          <p:nvPr/>
-        </p:nvSpPr>
-        <p:spPr>
-          <a:xfrm>
-            <a:off x="640080" y="2971800"/>
-            <a:ext cx="274320" cy="274320"/>
-          </a:xfrm>
-          <a:prstGeom prst="rect">
-            <a:avLst/>
-          </a:prstGeom>
-          <a:solidFill>
-            <a:srgbClr val="FFFFFF"/>
-          </a:solidFill>
-          <a:ln>
-            <a:solidFill>
-              <a:srgbClr val="333333"/>
-            </a:solidFill>
-          </a:ln>
-        </p:spPr>
-        <p:style>
-          <a:lnRef idx="1">
-            <a:schemeClr val="accent1"/>
-          </a:lnRef>
-          <a:fillRef idx="3">
-            <a:schemeClr val="accent1"/>
-          </a:fillRef>
-          <a:effectRef idx="2">
-            <a:schemeClr val="accent1"/>
-          </a:effectRef>
-          <a:fontRef idx="minor">
-            <a:schemeClr val="lt1"/>
-          </a:fontRef>
-        </p:style>
-        <p:txBody>
-          <a:bodyPr rtlCol="0" anchor="ctr"/>
-          <a:lstStyle/>
-          <a:p>
-            <a:pPr algn="ctr"/>
-          </a:p>
-        </p:txBody>
-      </p:sp>
-      <p:sp>
-        <p:nvSpPr>
-          <p:cNvPr id="16" name="Rectangle 15"/>
-          <p:cNvSpPr/>
-          <p:nvPr/>
-        </p:nvSpPr>
-        <p:spPr>
-          <a:xfrm>
-            <a:off x="640080" y="2971800"/>
-            <a:ext cx="73152" cy="274320"/>
-          </a:xfrm>
-          <a:prstGeom prst="rect">
-            <a:avLst/>
-          </a:prstGeom>
-          <a:solidFill>
-            <a:srgbClr val="269CCB"/>
-          </a:solidFill>
-          <a:ln>
-            <a:noFill/>
-          </a:ln>
-        </p:spPr>
-        <p:style>
-          <a:lnRef idx="1">
-            <a:schemeClr val="accent1"/>
-          </a:lnRef>
-          <a:fillRef idx="3">
-            <a:schemeClr val="accent1"/>
-          </a:fillRef>
-          <a:effectRef idx="2">
-            <a:schemeClr val="accent1"/>
-          </a:effectRef>
-          <a:fontRef idx="minor">
-            <a:schemeClr val="lt1"/>
-          </a:fontRef>
-        </p:style>
-        <p:txBody>
-          <a:bodyPr rtlCol="0" anchor="ctr"/>
-          <a:lstStyle/>
-          <a:p>
-            <a:pPr algn="ctr"/>
-          </a:p>
-        </p:txBody>
-      </p:sp>
-      <p:sp>
-        <p:nvSpPr>
-          <p:cNvPr id="17" name="TextBox 16"/>
-          <p:cNvSpPr txBox="1"/>
-          <p:nvPr/>
-        </p:nvSpPr>
-        <p:spPr>
-          <a:xfrm>
-            <a:off x="1097280" y="2916936"/>
-            <a:ext cx="10362895" cy="402336"/>
-          </a:xfrm>
-          <a:prstGeom prst="rect">
-            <a:avLst/>
-          </a:prstGeom>
-          <a:noFill/>
-        </p:spPr>
-        <p:txBody>
-          <a:bodyPr wrap="square" anchor="ctr"/>
-          <a:lstStyle/>
-          <a:p>
-            <a:r>
-              <a:rPr sz="1500" b="1" i="0">
-                <a:solidFill>
-                  <a:srgbClr val="333333"/>
-                </a:solidFill>
-                <a:latin typeface="Calibri"/>
-              </a:rPr>
-              <a:t>LA ETAPA QUE MÁS PESA</a:t>
-            </a:r>
-            <a:r>
-              <a:rPr sz="1500" b="0" i="0">
-                <a:solidFill>
-                  <a:srgbClr val="333333"/>
-                </a:solidFill>
-                <a:latin typeface="Calibri"/>
-              </a:rPr>
-              <a:t> — Una sola etapa, con la razón. No hace falta un cálculo exacto: hace falta saber dónde apretar.</a:t>
-            </a:r>
-          </a:p>
-        </p:txBody>
-      </p:sp>
-      <p:sp>
-        <p:nvSpPr>
-          <p:cNvPr id="18" name="Rounded Rectangle 17"/>
-          <p:cNvSpPr/>
-          <p:nvPr/>
-        </p:nvSpPr>
-        <p:spPr>
-          <a:xfrm>
-            <a:off x="457200" y="3502152"/>
-            <a:ext cx="11277295" cy="566928"/>
-          </a:xfrm>
-          <a:prstGeom prst="roundRect">
-            <a:avLst>
-              <a:gd name="adj" fmla="val 12000"/>
-            </a:avLst>
-          </a:prstGeom>
-          <a:solidFill>
-            <a:srgbClr val="F2F2F2"/>
-          </a:solidFill>
-          <a:ln>
-            <a:noFill/>
-          </a:ln>
-        </p:spPr>
-        <p:style>
-          <a:lnRef idx="1">
-            <a:schemeClr val="accent1"/>
-          </a:lnRef>
-          <a:fillRef idx="3">
-            <a:schemeClr val="accent1"/>
-          </a:fillRef>
-          <a:effectRef idx="2">
-            <a:schemeClr val="accent1"/>
-          </a:effectRef>
-          <a:fontRef idx="minor">
-            <a:schemeClr val="lt1"/>
-          </a:fontRef>
-        </p:style>
-        <p:txBody>
-          <a:bodyPr rtlCol="0" anchor="ctr"/>
-          <a:lstStyle/>
-          <a:p>
-            <a:pPr algn="ctr"/>
-          </a:p>
-        </p:txBody>
-      </p:sp>
-      <p:sp>
-        <p:nvSpPr>
-          <p:cNvPr id="19" name="Rectangle 18"/>
-          <p:cNvSpPr/>
-          <p:nvPr/>
-        </p:nvSpPr>
-        <p:spPr>
-          <a:xfrm>
-            <a:off x="640080" y="3648456"/>
-            <a:ext cx="274320" cy="274320"/>
-          </a:xfrm>
-          <a:prstGeom prst="rect">
-            <a:avLst/>
-          </a:prstGeom>
-          <a:solidFill>
-            <a:srgbClr val="FFFFFF"/>
-          </a:solidFill>
-          <a:ln>
-            <a:solidFill>
-              <a:srgbClr val="333333"/>
-            </a:solidFill>
-          </a:ln>
-        </p:spPr>
-        <p:style>
-          <a:lnRef idx="1">
-            <a:schemeClr val="accent1"/>
-          </a:lnRef>
-          <a:fillRef idx="3">
-            <a:schemeClr val="accent1"/>
-          </a:fillRef>
-          <a:effectRef idx="2">
-            <a:schemeClr val="accent1"/>
-          </a:effectRef>
-          <a:fontRef idx="minor">
-            <a:schemeClr val="lt1"/>
-          </a:fontRef>
-        </p:style>
-        <p:txBody>
-          <a:bodyPr rtlCol="0" anchor="ctr"/>
-          <a:lstStyle/>
-          <a:p>
-            <a:pPr algn="ctr"/>
-          </a:p>
-        </p:txBody>
-      </p:sp>
-      <p:sp>
-        <p:nvSpPr>
-          <p:cNvPr id="20" name="Rectangle 19"/>
-          <p:cNvSpPr/>
-          <p:nvPr/>
-        </p:nvSpPr>
-        <p:spPr>
-          <a:xfrm>
-            <a:off x="640080" y="3648456"/>
-            <a:ext cx="73152" cy="274320"/>
-          </a:xfrm>
-          <a:prstGeom prst="rect">
-            <a:avLst/>
-          </a:prstGeom>
-          <a:solidFill>
-            <a:srgbClr val="269CCB"/>
-          </a:solidFill>
-          <a:ln>
-            <a:noFill/>
-          </a:ln>
-        </p:spPr>
-        <p:style>
-          <a:lnRef idx="1">
-            <a:schemeClr val="accent1"/>
-          </a:lnRef>
-          <a:fillRef idx="3">
-            <a:schemeClr val="accent1"/>
-          </a:fillRef>
-          <a:effectRef idx="2">
-            <a:schemeClr val="accent1"/>
-          </a:effectRef>
-          <a:fontRef idx="minor">
-            <a:schemeClr val="lt1"/>
-          </a:fontRef>
-        </p:style>
-        <p:txBody>
-          <a:bodyPr rtlCol="0" anchor="ctr"/>
-          <a:lstStyle/>
-          <a:p>
-            <a:pPr algn="ctr"/>
-          </a:p>
-        </p:txBody>
-      </p:sp>
-      <p:sp>
-        <p:nvSpPr>
-          <p:cNvPr id="21" name="TextBox 20"/>
-          <p:cNvSpPr txBox="1"/>
-          <p:nvPr/>
-        </p:nvSpPr>
-        <p:spPr>
-          <a:xfrm>
-            <a:off x="1097280" y="3593592"/>
-            <a:ext cx="10362895" cy="402336"/>
-          </a:xfrm>
-          <a:prstGeom prst="rect">
-            <a:avLst/>
-          </a:prstGeom>
-          <a:noFill/>
-        </p:spPr>
-        <p:txBody>
-          <a:bodyPr wrap="square" anchor="ctr"/>
-          <a:lstStyle/>
-          <a:p>
-            <a:r>
-              <a:rPr sz="1500" b="1" i="0">
-                <a:solidFill>
-                  <a:srgbClr val="333333"/>
-                </a:solidFill>
-                <a:latin typeface="Calibri"/>
-              </a:rPr>
-              <a:t>DOS DECISIONES DE DISEÑO</a:t>
-            </a:r>
-            <a:r>
-              <a:rPr sz="1500" b="0" i="0">
-                <a:solidFill>
-                  <a:srgbClr val="333333"/>
-                </a:solidFill>
-                <a:latin typeface="Calibri"/>
-              </a:rPr>
-              <a:t> — Dos cosas que </a:t>
-            </a:r>
-            <a:r>
-              <a:rPr sz="1500" b="1" i="0">
-                <a:solidFill>
-                  <a:srgbClr val="333333"/>
-                </a:solidFill>
-                <a:latin typeface="Calibri"/>
-              </a:rPr>
-              <a:t>ustedes</a:t>
-            </a:r>
-            <a:r>
-              <a:rPr sz="1500" b="0" i="0">
-                <a:solidFill>
-                  <a:srgbClr val="333333"/>
-                </a:solidFill>
-                <a:latin typeface="Calibri"/>
-              </a:rPr>
-              <a:t> pueden decidir en su sistema para bajar esa etapa. De diseño, no de comportamiento del usuario.</a:t>
-            </a:r>
-          </a:p>
-        </p:txBody>
-      </p:sp>
-      <p:sp>
-        <p:nvSpPr>
-          <p:cNvPr id="22" name="Rounded Rectangle 21"/>
-          <p:cNvSpPr/>
-          <p:nvPr/>
-        </p:nvSpPr>
-        <p:spPr>
-          <a:xfrm>
-            <a:off x="457200" y="4178808"/>
-            <a:ext cx="11277295" cy="566928"/>
-          </a:xfrm>
-          <a:prstGeom prst="roundRect">
-            <a:avLst>
-              <a:gd name="adj" fmla="val 12000"/>
-            </a:avLst>
-          </a:prstGeom>
-          <a:solidFill>
-            <a:srgbClr val="F2F2F2"/>
-          </a:solidFill>
-          <a:ln>
-            <a:noFill/>
-          </a:ln>
-        </p:spPr>
-        <p:style>
-          <a:lnRef idx="1">
-            <a:schemeClr val="accent1"/>
-          </a:lnRef>
-          <a:fillRef idx="3">
-            <a:schemeClr val="accent1"/>
-          </a:fillRef>
-          <a:effectRef idx="2">
-            <a:schemeClr val="accent1"/>
-          </a:effectRef>
-          <a:fontRef idx="minor">
-            <a:schemeClr val="lt1"/>
-          </a:fontRef>
-        </p:style>
-        <p:txBody>
-          <a:bodyPr rtlCol="0" anchor="ctr"/>
-          <a:lstStyle/>
-          <a:p>
-            <a:pPr algn="ctr"/>
-          </a:p>
-        </p:txBody>
-      </p:sp>
-      <p:sp>
-        <p:nvSpPr>
-          <p:cNvPr id="23" name="Rectangle 22"/>
-          <p:cNvSpPr/>
-          <p:nvPr/>
-        </p:nvSpPr>
-        <p:spPr>
-          <a:xfrm>
-            <a:off x="640080" y="4325112"/>
-            <a:ext cx="274320" cy="274320"/>
-          </a:xfrm>
-          <a:prstGeom prst="rect">
-            <a:avLst/>
-          </a:prstGeom>
-          <a:solidFill>
-            <a:srgbClr val="FFFFFF"/>
-          </a:solidFill>
-          <a:ln>
-            <a:solidFill>
-              <a:srgbClr val="333333"/>
-            </a:solidFill>
-          </a:ln>
-        </p:spPr>
-        <p:style>
-          <a:lnRef idx="1">
-            <a:schemeClr val="accent1"/>
-          </a:lnRef>
-          <a:fillRef idx="3">
-            <a:schemeClr val="accent1"/>
-          </a:fillRef>
-          <a:effectRef idx="2">
-            <a:schemeClr val="accent1"/>
-          </a:effectRef>
-          <a:fontRef idx="minor">
-            <a:schemeClr val="lt1"/>
-          </a:fontRef>
-        </p:style>
-        <p:txBody>
-          <a:bodyPr rtlCol="0" anchor="ctr"/>
-          <a:lstStyle/>
-          <a:p>
-            <a:pPr algn="ctr"/>
-          </a:p>
-        </p:txBody>
-      </p:sp>
-      <p:sp>
-        <p:nvSpPr>
-          <p:cNvPr id="24" name="Rectangle 23"/>
-          <p:cNvSpPr/>
-          <p:nvPr/>
-        </p:nvSpPr>
-        <p:spPr>
-          <a:xfrm>
-            <a:off x="640080" y="4325112"/>
-            <a:ext cx="73152" cy="274320"/>
-          </a:xfrm>
-          <a:prstGeom prst="rect">
-            <a:avLst/>
-          </a:prstGeom>
-          <a:solidFill>
-            <a:srgbClr val="269CCB"/>
-          </a:solidFill>
-          <a:ln>
-            <a:noFill/>
-          </a:ln>
-        </p:spPr>
-        <p:style>
-          <a:lnRef idx="1">
-            <a:schemeClr val="accent1"/>
-          </a:lnRef>
-          <a:fillRef idx="3">
-            <a:schemeClr val="accent1"/>
-          </a:fillRef>
-          <a:effectRef idx="2">
-            <a:schemeClr val="accent1"/>
-          </a:effectRef>
-          <a:fontRef idx="minor">
-            <a:schemeClr val="lt1"/>
-          </a:fontRef>
-        </p:style>
-        <p:txBody>
-          <a:bodyPr rtlCol="0" anchor="ctr"/>
-          <a:lstStyle/>
-          <a:p>
-            <a:pPr algn="ctr"/>
-          </a:p>
-        </p:txBody>
-      </p:sp>
-      <p:sp>
-        <p:nvSpPr>
-          <p:cNvPr id="25" name="TextBox 24"/>
-          <p:cNvSpPr txBox="1"/>
-          <p:nvPr/>
-        </p:nvSpPr>
-        <p:spPr>
-          <a:xfrm>
-            <a:off x="1097280" y="4270248"/>
-            <a:ext cx="10362895" cy="402336"/>
-          </a:xfrm>
-          <a:prstGeom prst="rect">
-            <a:avLst/>
-          </a:prstGeom>
-          <a:noFill/>
-        </p:spPr>
-        <p:txBody>
-          <a:bodyPr wrap="square" anchor="ctr"/>
-          <a:lstStyle/>
-          <a:p>
-            <a:r>
-              <a:rPr sz="1500" b="1" i="0">
-                <a:solidFill>
-                  <a:srgbClr val="333333"/>
-                </a:solidFill>
-                <a:latin typeface="Calibri"/>
-              </a:rPr>
-              <a:t>EL INDICADOR</a:t>
-            </a:r>
-            <a:r>
-              <a:rPr sz="1500" b="0" i="0">
-                <a:solidFill>
-                  <a:srgbClr val="333333"/>
-                </a:solidFill>
-                <a:latin typeface="Calibri"/>
-              </a:rPr>
-              <a:t> — Un número que se pueda medir al final del semestre para saber si la decisión funcionó. Con su unidad.</a:t>
-            </a:r>
-          </a:p>
-        </p:txBody>
-      </p:sp>
-      <p:sp>
-        <p:nvSpPr>
-          <p:cNvPr id="26" name="TextBox 25"/>
+            <a:pPr>
+              <a:spcAft>
+                <a:spcPts val="800"/>
+              </a:spcAft>
+            </a:pPr>
+            <a:r>
+              <a:rPr sz="2000" b="0" i="0">
+                <a:solidFill>
+                  <a:srgbClr val="333333"/>
+                </a:solidFill>
+                <a:latin typeface="Calibri"/>
+              </a:rPr>
+              <a:t>–   «¿Dónde está la nube?» funciona porque casi nadie ha visto un centro de datos y porque la metáfora está diseñada para que no se piense en el edificio.</a:t>
+            </a:r>
+          </a:p>
+          <a:p>
+            <a:pPr>
+              <a:spcAft>
+                <a:spcPts val="800"/>
+              </a:spcAft>
+            </a:pPr>
+            <a:r>
+              <a:rPr sz="2000" b="0" i="0">
+                <a:solidFill>
+                  <a:srgbClr val="333333"/>
+                </a:solidFill>
+                <a:latin typeface="Calibri"/>
+              </a:rPr>
+              <a:t>–   La segunda parte —cuánta agua se bebió una consulta a un asistente de IA— incomoda a propósito y hay que manejarla con cuidado: la respuesta honesta es que **depende del centro de datos</a:t>
+            </a:r>
+          </a:p>
+          <a:p>
+            <a:pPr>
+              <a:spcAft>
+                <a:spcPts val="800"/>
+              </a:spcAft>
+            </a:pPr>
+            <a:r>
+              <a:rPr sz="2000" b="0" i="0">
+                <a:solidFill>
+                  <a:srgbClr val="333333"/>
+                </a:solidFill>
+                <a:latin typeface="Calibri"/>
+              </a:rPr>
+              <a:t>–   Del modelo, del clima y del año**, y que las cifras que circulan varían por órdenes de magnitud.</a:t>
+            </a:r>
+          </a:p>
+          <a:p>
+            <a:pPr>
+              <a:spcAft>
+                <a:spcPts val="800"/>
+              </a:spcAft>
+            </a:pPr>
+            <a:r>
+              <a:rPr sz="2000" b="0" i="0">
+                <a:solidFill>
+                  <a:srgbClr val="333333"/>
+                </a:solidFill>
+                <a:latin typeface="Calibri"/>
+              </a:rPr>
+              <a:t>–   Eso no debilita la clase: es la clase.</a:t>
+            </a:r>
+          </a:p>
+          <a:p>
+            <a:pPr>
+              <a:spcAft>
+                <a:spcPts val="800"/>
+              </a:spcAft>
+            </a:pPr>
+            <a:r>
+              <a:rPr sz="2000" b="0" i="0">
+                <a:solidFill>
+                  <a:srgbClr val="333333"/>
+                </a:solidFill>
+                <a:latin typeface="Calibri"/>
+              </a:rPr>
+              <a:t>–   El objetivo no es que se lleven un número, es que entiendan que hay agua y electricidad detrás de algo que se siente inmaterial, y que quien afirme un número tiene que decir de dónde salió.</a:t>
+            </a:r>
+          </a:p>
+          <a:p>
+            <a:pPr>
+              <a:spcAft>
+                <a:spcPts val="800"/>
+              </a:spcAft>
+            </a:pPr>
+            <a:r>
+              <a:rPr sz="2000" b="0" i="0">
+                <a:solidFill>
+                  <a:srgbClr val="333333"/>
+                </a:solidFill>
+                <a:latin typeface="Calibri"/>
+              </a:rPr>
+              <a:t>–   Recoja las respuestas en el muro y no las corrija.</a:t>
+            </a:r>
+          </a:p>
+          <a:p>
+            <a:pPr>
+              <a:spcAft>
+                <a:spcPts val="800"/>
+              </a:spcAft>
+            </a:pPr>
+            <a:r>
+              <a:rPr sz="2000" b="0" i="0">
+                <a:solidFill>
+                  <a:srgbClr val="333333"/>
+                </a:solidFill>
+                <a:latin typeface="Calibri"/>
+              </a:rPr>
+              <a:t>–   En el minuto 20, al llegar al PUE y al enfriamiento, vuelva al muro: alguien va a haber escrito «en internet» o «en un servidor», y ahí se muestra que el servidor está en un edificio que consume tanto en enfriarse como en computar.</a:t>
+            </a:r>
+          </a:p>
+        </p:txBody>
+      </p:sp>
+      <p:sp>
+        <p:nvSpPr>
+          <p:cNvPr id="6" name="TextBox 5"/>
           <p:cNvSpPr txBox="1"/>
           <p:nvPr/>
         </p:nvSpPr>
@@ -5274,7 +4479,7 @@
         <p:spPr>
           <a:xfrm>
             <a:off x="0" y="0"/>
-            <a:ext cx="12191695" cy="1170432"/>
+            <a:ext cx="12191695" cy="960120"/>
           </a:xfrm>
           <a:prstGeom prst="rect">
             <a:avLst/>
@@ -5316,7 +4521,7 @@
         </p:nvSpPr>
         <p:spPr>
           <a:xfrm>
-            <a:off x="0" y="1170432"/>
+            <a:off x="0" y="960120"/>
             <a:ext cx="12191695" cy="41148"/>
           </a:xfrm>
           <a:prstGeom prst="rect">
@@ -5360,7 +4565,7 @@
         <p:spPr>
           <a:xfrm>
             <a:off x="457200" y="164592"/>
-            <a:ext cx="11277295" cy="384048"/>
+            <a:ext cx="11277295" cy="502920"/>
           </a:xfrm>
           <a:prstGeom prst="rect">
             <a:avLst/>
@@ -5380,7 +4585,7 @@
                 </a:solidFill>
                 <a:latin typeface="Calibri"/>
               </a:rPr>
-              <a:t>Cómo se expone en 3 minutos</a:t>
+              <a:t>Las cuatro etapas y por qué la fabricación cambia la recomendación (1/2)</a:t>
             </a:r>
           </a:p>
         </p:txBody>
@@ -5393,8 +4598,8 @@
         </p:nvSpPr>
         <p:spPr>
           <a:xfrm>
-            <a:off x="457200" y="566928"/>
-            <a:ext cx="11277295" cy="411480"/>
+            <a:off x="457200" y="1170432"/>
+            <a:ext cx="11277295" cy="5230368"/>
           </a:xfrm>
           <a:prstGeom prst="rect">
             <a:avLst/>
@@ -5407,876 +4612,153 @@
           </a:bodyPr>
           <a:lstStyle/>
           <a:p>
-            <a:r>
-              <a:rPr sz="1400" b="0" i="0">
-                <a:solidFill>
-                  <a:srgbClr val="B8D8EE"/>
-                </a:solidFill>
-                <a:latin typeface="Calibri"/>
-              </a:rPr>
-              <a:t>Habla el vocero con la pantalla ya compartida · cronómetro en pantalla · se corta al llegar a cero</a:t>
-            </a:r>
-          </a:p>
-        </p:txBody>
-      </p:sp>
-      <p:sp>
-        <p:nvSpPr>
-          <p:cNvPr id="6" name="Rounded Rectangle 5"/>
-          <p:cNvSpPr/>
-          <p:nvPr/>
-        </p:nvSpPr>
-        <p:spPr>
-          <a:xfrm>
-            <a:off x="457200" y="1444752"/>
-            <a:ext cx="11277295" cy="908913"/>
-          </a:xfrm>
-          <a:prstGeom prst="roundRect">
-            <a:avLst>
-              <a:gd name="adj" fmla="val 12000"/>
-            </a:avLst>
-          </a:prstGeom>
-          <a:solidFill>
-            <a:srgbClr val="F2F2F2"/>
-          </a:solidFill>
-          <a:ln>
-            <a:noFill/>
-          </a:ln>
-        </p:spPr>
-        <p:style>
-          <a:lnRef idx="1">
-            <a:schemeClr val="accent1"/>
-          </a:lnRef>
-          <a:fillRef idx="3">
-            <a:schemeClr val="accent1"/>
-          </a:fillRef>
-          <a:effectRef idx="2">
-            <a:schemeClr val="accent1"/>
-          </a:effectRef>
-          <a:fontRef idx="minor">
-            <a:schemeClr val="lt1"/>
-          </a:fontRef>
-        </p:style>
-        <p:txBody>
-          <a:bodyPr rtlCol="0" anchor="ctr"/>
-          <a:lstStyle/>
-          <a:p>
-            <a:pPr algn="ctr"/>
-          </a:p>
-        </p:txBody>
-      </p:sp>
-      <p:sp>
-        <p:nvSpPr>
-          <p:cNvPr id="7" name="Rounded Rectangle 6"/>
-          <p:cNvSpPr/>
-          <p:nvPr/>
-        </p:nvSpPr>
-        <p:spPr>
-          <a:xfrm>
-            <a:off x="594360" y="1679752"/>
-            <a:ext cx="438912" cy="438912"/>
-          </a:xfrm>
-          <a:prstGeom prst="roundRect">
-            <a:avLst>
-              <a:gd name="adj" fmla="val 12000"/>
-            </a:avLst>
-          </a:prstGeom>
-          <a:solidFill>
-            <a:srgbClr val="095292"/>
-          </a:solidFill>
-          <a:ln>
-            <a:noFill/>
-          </a:ln>
-        </p:spPr>
-        <p:style>
-          <a:lnRef idx="1">
-            <a:schemeClr val="accent1"/>
-          </a:lnRef>
-          <a:fillRef idx="3">
-            <a:schemeClr val="accent1"/>
-          </a:fillRef>
-          <a:effectRef idx="2">
-            <a:schemeClr val="accent1"/>
-          </a:effectRef>
-          <a:fontRef idx="minor">
-            <a:schemeClr val="lt1"/>
-          </a:fontRef>
-        </p:style>
-        <p:txBody>
-          <a:bodyPr rtlCol="0" anchor="ctr"/>
-          <a:lstStyle/>
-          <a:p>
-            <a:pPr algn="ctr"/>
-          </a:p>
-        </p:txBody>
-      </p:sp>
-      <p:sp>
-        <p:nvSpPr>
-          <p:cNvPr id="8" name="TextBox 7"/>
-          <p:cNvSpPr txBox="1"/>
-          <p:nvPr/>
-        </p:nvSpPr>
-        <p:spPr>
-          <a:xfrm>
-            <a:off x="594360" y="1679752"/>
-            <a:ext cx="438912" cy="438912"/>
-          </a:xfrm>
-          <a:prstGeom prst="rect">
-            <a:avLst/>
-          </a:prstGeom>
-          <a:noFill/>
-        </p:spPr>
-        <p:txBody>
-          <a:bodyPr wrap="square" anchor="ctr"/>
-          <a:lstStyle/>
-          <a:p>
-            <a:pPr algn="ctr"/>
-            <a:r>
-              <a:rPr sz="1600" b="1" i="0">
-                <a:solidFill>
-                  <a:srgbClr val="FFFFFF"/>
-                </a:solidFill>
-                <a:latin typeface="Calibri"/>
-              </a:rPr>
-              <a:t>1</a:t>
-            </a:r>
-          </a:p>
-        </p:txBody>
-      </p:sp>
-      <p:sp>
-        <p:nvSpPr>
-          <p:cNvPr id="9" name="TextBox 8"/>
-          <p:cNvSpPr txBox="1"/>
-          <p:nvPr/>
-        </p:nvSpPr>
-        <p:spPr>
-          <a:xfrm>
-            <a:off x="1188720" y="1536192"/>
-            <a:ext cx="10271455" cy="744321"/>
-          </a:xfrm>
-          <a:prstGeom prst="rect">
-            <a:avLst/>
-          </a:prstGeom>
-          <a:noFill/>
-        </p:spPr>
-        <p:txBody>
-          <a:bodyPr wrap="square" anchor="ctr"/>
-          <a:lstStyle/>
-          <a:p>
-            <a:r>
-              <a:rPr sz="1500" b="1" i="0">
-                <a:solidFill>
-                  <a:srgbClr val="095292"/>
-                </a:solidFill>
-                <a:latin typeface="Calibri"/>
-              </a:rPr>
-              <a:t>40 s · El recorrido</a:t>
-            </a:r>
-          </a:p>
-          <a:p>
             <a:pPr>
-              <a:spcBef>
-                <a:spcPts val="200"/>
-              </a:spcBef>
+              <a:spcAft>
+                <a:spcPts val="800"/>
+              </a:spcAft>
             </a:pPr>
             <a:r>
-              <a:rPr sz="1300" b="0" i="0">
-                <a:solidFill>
-                  <a:srgbClr val="333333"/>
-                </a:solidFill>
-                <a:latin typeface="Calibri"/>
-              </a:rPr>
-              <a:t>El diagrama, recorrido con el cursor. Dónde está cada etapa.</a:t>
-            </a:r>
-          </a:p>
-        </p:txBody>
-      </p:sp>
-      <p:sp>
-        <p:nvSpPr>
-          <p:cNvPr id="10" name="Rounded Rectangle 9"/>
-          <p:cNvSpPr/>
-          <p:nvPr/>
-        </p:nvSpPr>
-        <p:spPr>
-          <a:xfrm>
-            <a:off x="457200" y="2445105"/>
-            <a:ext cx="11277295" cy="908913"/>
-          </a:xfrm>
-          <a:prstGeom prst="roundRect">
-            <a:avLst>
-              <a:gd name="adj" fmla="val 12000"/>
-            </a:avLst>
-          </a:prstGeom>
-          <a:solidFill>
-            <a:srgbClr val="E8F4FA"/>
-          </a:solidFill>
-          <a:ln>
-            <a:noFill/>
-          </a:ln>
-        </p:spPr>
-        <p:style>
-          <a:lnRef idx="1">
-            <a:schemeClr val="accent1"/>
-          </a:lnRef>
-          <a:fillRef idx="3">
-            <a:schemeClr val="accent1"/>
-          </a:fillRef>
-          <a:effectRef idx="2">
-            <a:schemeClr val="accent1"/>
-          </a:effectRef>
-          <a:fontRef idx="minor">
-            <a:schemeClr val="lt1"/>
-          </a:fontRef>
-        </p:style>
-        <p:txBody>
-          <a:bodyPr rtlCol="0" anchor="ctr"/>
-          <a:lstStyle/>
-          <a:p>
-            <a:pPr algn="ctr"/>
-          </a:p>
-        </p:txBody>
-      </p:sp>
-      <p:sp>
-        <p:nvSpPr>
-          <p:cNvPr id="11" name="Rounded Rectangle 10"/>
-          <p:cNvSpPr/>
-          <p:nvPr/>
-        </p:nvSpPr>
-        <p:spPr>
-          <a:xfrm>
-            <a:off x="594360" y="2680106"/>
-            <a:ext cx="438912" cy="438912"/>
-          </a:xfrm>
-          <a:prstGeom prst="roundRect">
-            <a:avLst>
-              <a:gd name="adj" fmla="val 12000"/>
-            </a:avLst>
-          </a:prstGeom>
-          <a:solidFill>
-            <a:srgbClr val="095292"/>
-          </a:solidFill>
-          <a:ln>
-            <a:noFill/>
-          </a:ln>
-        </p:spPr>
-        <p:style>
-          <a:lnRef idx="1">
-            <a:schemeClr val="accent1"/>
-          </a:lnRef>
-          <a:fillRef idx="3">
-            <a:schemeClr val="accent1"/>
-          </a:fillRef>
-          <a:effectRef idx="2">
-            <a:schemeClr val="accent1"/>
-          </a:effectRef>
-          <a:fontRef idx="minor">
-            <a:schemeClr val="lt1"/>
-          </a:fontRef>
-        </p:style>
-        <p:txBody>
-          <a:bodyPr rtlCol="0" anchor="ctr"/>
-          <a:lstStyle/>
-          <a:p>
-            <a:pPr algn="ctr"/>
-          </a:p>
-        </p:txBody>
-      </p:sp>
-      <p:sp>
-        <p:nvSpPr>
-          <p:cNvPr id="12" name="TextBox 11"/>
-          <p:cNvSpPr txBox="1"/>
-          <p:nvPr/>
-        </p:nvSpPr>
-        <p:spPr>
-          <a:xfrm>
-            <a:off x="594360" y="2680106"/>
-            <a:ext cx="438912" cy="438912"/>
-          </a:xfrm>
-          <a:prstGeom prst="rect">
-            <a:avLst/>
-          </a:prstGeom>
-          <a:noFill/>
-        </p:spPr>
-        <p:txBody>
-          <a:bodyPr wrap="square" anchor="ctr"/>
-          <a:lstStyle/>
-          <a:p>
-            <a:pPr algn="ctr"/>
-            <a:r>
-              <a:rPr sz="1600" b="1" i="0">
-                <a:solidFill>
-                  <a:srgbClr val="FFFFFF"/>
-                </a:solidFill>
-                <a:latin typeface="Calibri"/>
-              </a:rPr>
-              <a:t>2</a:t>
-            </a:r>
-          </a:p>
-        </p:txBody>
-      </p:sp>
-      <p:sp>
-        <p:nvSpPr>
-          <p:cNvPr id="13" name="TextBox 12"/>
-          <p:cNvSpPr txBox="1"/>
-          <p:nvPr/>
-        </p:nvSpPr>
-        <p:spPr>
-          <a:xfrm>
-            <a:off x="1188720" y="2536545"/>
-            <a:ext cx="10271455" cy="744321"/>
-          </a:xfrm>
-          <a:prstGeom prst="rect">
-            <a:avLst/>
-          </a:prstGeom>
-          <a:noFill/>
-        </p:spPr>
-        <p:txBody>
-          <a:bodyPr wrap="square" anchor="ctr"/>
-          <a:lstStyle/>
-          <a:p>
-            <a:r>
-              <a:rPr sz="1500" b="1" i="0">
-                <a:solidFill>
-                  <a:srgbClr val="095292"/>
-                </a:solidFill>
-                <a:latin typeface="Calibri"/>
-              </a:rPr>
-              <a:t>30 s · Lo que se repite</a:t>
+              <a:rPr sz="2000" b="0" i="0">
+                <a:solidFill>
+                  <a:srgbClr val="333333"/>
+                </a:solidFill>
+                <a:latin typeface="Calibri"/>
+              </a:rPr>
+              <a:t>–   La huella material de un sistema de software se reparte en cuatro etapas y conviene recorrerlas con un ejemplo único: una aplicación de citas médicas usada desde el celular. </a:t>
+            </a:r>
+            <a:r>
+              <a:rPr sz="2000" b="1" i="0">
+                <a:solidFill>
+                  <a:srgbClr val="333333"/>
+                </a:solidFill>
+                <a:latin typeface="Calibri"/>
+              </a:rPr>
+              <a:t>Fabricación.</a:t>
+            </a:r>
+            <a:r>
+              <a:rPr sz="2000" b="0" i="0">
+                <a:solidFill>
+                  <a:srgbClr val="333333"/>
+                </a:solidFill>
+                <a:latin typeface="Calibri"/>
+              </a:rPr>
+              <a:t> El celular del paciente</a:t>
             </a:r>
           </a:p>
           <a:p>
             <a:pPr>
-              <a:spcBef>
-                <a:spcPts val="200"/>
-              </a:spcBef>
+              <a:spcAft>
+                <a:spcPts val="800"/>
+              </a:spcAft>
             </a:pPr>
             <a:r>
-              <a:rPr sz="1300" b="0" i="0">
-                <a:solidFill>
-                  <a:srgbClr val="333333"/>
-                </a:solidFill>
-                <a:latin typeface="Calibri"/>
-              </a:rPr>
-              <a:t>La operación repetida y cuántas veces al día.</a:t>
-            </a:r>
-          </a:p>
-        </p:txBody>
-      </p:sp>
-      <p:sp>
-        <p:nvSpPr>
-          <p:cNvPr id="14" name="Rounded Rectangle 13"/>
-          <p:cNvSpPr/>
-          <p:nvPr/>
-        </p:nvSpPr>
-        <p:spPr>
-          <a:xfrm>
-            <a:off x="457200" y="3445459"/>
-            <a:ext cx="11277295" cy="908913"/>
-          </a:xfrm>
-          <a:prstGeom prst="roundRect">
-            <a:avLst>
-              <a:gd name="adj" fmla="val 12000"/>
-            </a:avLst>
-          </a:prstGeom>
-          <a:solidFill>
-            <a:srgbClr val="F2F2F2"/>
-          </a:solidFill>
-          <a:ln>
-            <a:noFill/>
-          </a:ln>
-        </p:spPr>
-        <p:style>
-          <a:lnRef idx="1">
-            <a:schemeClr val="accent1"/>
-          </a:lnRef>
-          <a:fillRef idx="3">
-            <a:schemeClr val="accent1"/>
-          </a:fillRef>
-          <a:effectRef idx="2">
-            <a:schemeClr val="accent1"/>
-          </a:effectRef>
-          <a:fontRef idx="minor">
-            <a:schemeClr val="lt1"/>
-          </a:fontRef>
-        </p:style>
-        <p:txBody>
-          <a:bodyPr rtlCol="0" anchor="ctr"/>
-          <a:lstStyle/>
-          <a:p>
-            <a:pPr algn="ctr"/>
-          </a:p>
-        </p:txBody>
-      </p:sp>
-      <p:sp>
-        <p:nvSpPr>
-          <p:cNvPr id="15" name="Rounded Rectangle 14"/>
-          <p:cNvSpPr/>
-          <p:nvPr/>
-        </p:nvSpPr>
-        <p:spPr>
-          <a:xfrm>
-            <a:off x="594360" y="3680460"/>
-            <a:ext cx="438912" cy="438912"/>
-          </a:xfrm>
-          <a:prstGeom prst="roundRect">
-            <a:avLst>
-              <a:gd name="adj" fmla="val 12000"/>
-            </a:avLst>
-          </a:prstGeom>
-          <a:solidFill>
-            <a:srgbClr val="095292"/>
-          </a:solidFill>
-          <a:ln>
-            <a:noFill/>
-          </a:ln>
-        </p:spPr>
-        <p:style>
-          <a:lnRef idx="1">
-            <a:schemeClr val="accent1"/>
-          </a:lnRef>
-          <a:fillRef idx="3">
-            <a:schemeClr val="accent1"/>
-          </a:fillRef>
-          <a:effectRef idx="2">
-            <a:schemeClr val="accent1"/>
-          </a:effectRef>
-          <a:fontRef idx="minor">
-            <a:schemeClr val="lt1"/>
-          </a:fontRef>
-        </p:style>
-        <p:txBody>
-          <a:bodyPr rtlCol="0" anchor="ctr"/>
-          <a:lstStyle/>
-          <a:p>
-            <a:pPr algn="ctr"/>
-          </a:p>
-        </p:txBody>
-      </p:sp>
-      <p:sp>
-        <p:nvSpPr>
-          <p:cNvPr id="16" name="TextBox 15"/>
-          <p:cNvSpPr txBox="1"/>
-          <p:nvPr/>
-        </p:nvSpPr>
-        <p:spPr>
-          <a:xfrm>
-            <a:off x="594360" y="3680460"/>
-            <a:ext cx="438912" cy="438912"/>
-          </a:xfrm>
-          <a:prstGeom prst="rect">
-            <a:avLst/>
-          </a:prstGeom>
-          <a:noFill/>
-        </p:spPr>
-        <p:txBody>
-          <a:bodyPr wrap="square" anchor="ctr"/>
-          <a:lstStyle/>
-          <a:p>
-            <a:pPr algn="ctr"/>
-            <a:r>
-              <a:rPr sz="1600" b="1" i="0">
-                <a:solidFill>
-                  <a:srgbClr val="FFFFFF"/>
-                </a:solidFill>
-                <a:latin typeface="Calibri"/>
-              </a:rPr>
-              <a:t>3</a:t>
-            </a:r>
-          </a:p>
-        </p:txBody>
-      </p:sp>
-      <p:sp>
-        <p:nvSpPr>
-          <p:cNvPr id="17" name="TextBox 16"/>
-          <p:cNvSpPr txBox="1"/>
-          <p:nvPr/>
-        </p:nvSpPr>
-        <p:spPr>
-          <a:xfrm>
-            <a:off x="1188720" y="3536899"/>
-            <a:ext cx="10271455" cy="744321"/>
-          </a:xfrm>
-          <a:prstGeom prst="rect">
-            <a:avLst/>
-          </a:prstGeom>
-          <a:noFill/>
-        </p:spPr>
-        <p:txBody>
-          <a:bodyPr wrap="square" anchor="ctr"/>
-          <a:lstStyle/>
-          <a:p>
-            <a:r>
-              <a:rPr sz="1500" b="1" i="0">
-                <a:solidFill>
-                  <a:srgbClr val="095292"/>
-                </a:solidFill>
-                <a:latin typeface="Calibri"/>
-              </a:rPr>
-              <a:t>50 s · La etapa que más pesa</a:t>
+              <a:rPr sz="2000" b="0" i="0">
+                <a:solidFill>
+                  <a:srgbClr val="333333"/>
+                </a:solidFill>
+                <a:latin typeface="Calibri"/>
+              </a:rPr>
+              <a:t>–   El computador de la secretaria y los servidores donde corre el sistema tuvieron que ser fabricados: minería de metales —incluidos varios escasos y con extracción problemática—, ensamblaje y transporte.</a:t>
             </a:r>
           </a:p>
           <a:p>
             <a:pPr>
-              <a:spcBef>
-                <a:spcPts val="200"/>
-              </a:spcBef>
+              <a:spcAft>
+                <a:spcPts val="800"/>
+              </a:spcAft>
             </a:pPr>
             <a:r>
-              <a:rPr sz="1300" b="0" i="0">
-                <a:solidFill>
-                  <a:srgbClr val="333333"/>
-                </a:solidFill>
-                <a:latin typeface="Calibri"/>
-              </a:rPr>
-              <a:t>Cuál y por qué. Es el minuto obligatorio.</a:t>
-            </a:r>
-          </a:p>
-        </p:txBody>
-      </p:sp>
-      <p:sp>
-        <p:nvSpPr>
-          <p:cNvPr id="18" name="Rounded Rectangle 17"/>
-          <p:cNvSpPr/>
-          <p:nvPr/>
-        </p:nvSpPr>
-        <p:spPr>
-          <a:xfrm>
-            <a:off x="457200" y="4445812"/>
-            <a:ext cx="11277295" cy="908913"/>
-          </a:xfrm>
-          <a:prstGeom prst="roundRect">
-            <a:avLst>
-              <a:gd name="adj" fmla="val 12000"/>
-            </a:avLst>
-          </a:prstGeom>
-          <a:solidFill>
-            <a:srgbClr val="E8F4FA"/>
-          </a:solidFill>
-          <a:ln>
-            <a:noFill/>
-          </a:ln>
-        </p:spPr>
-        <p:style>
-          <a:lnRef idx="1">
-            <a:schemeClr val="accent1"/>
-          </a:lnRef>
-          <a:fillRef idx="3">
-            <a:schemeClr val="accent1"/>
-          </a:fillRef>
-          <a:effectRef idx="2">
-            <a:schemeClr val="accent1"/>
-          </a:effectRef>
-          <a:fontRef idx="minor">
-            <a:schemeClr val="lt1"/>
-          </a:fontRef>
-        </p:style>
-        <p:txBody>
-          <a:bodyPr rtlCol="0" anchor="ctr"/>
-          <a:lstStyle/>
-          <a:p>
-            <a:pPr algn="ctr"/>
-          </a:p>
-        </p:txBody>
-      </p:sp>
-      <p:sp>
-        <p:nvSpPr>
-          <p:cNvPr id="19" name="Rounded Rectangle 18"/>
-          <p:cNvSpPr/>
-          <p:nvPr/>
-        </p:nvSpPr>
-        <p:spPr>
-          <a:xfrm>
-            <a:off x="594360" y="4680813"/>
-            <a:ext cx="438912" cy="438912"/>
-          </a:xfrm>
-          <a:prstGeom prst="roundRect">
-            <a:avLst>
-              <a:gd name="adj" fmla="val 12000"/>
-            </a:avLst>
-          </a:prstGeom>
-          <a:solidFill>
-            <a:srgbClr val="095292"/>
-          </a:solidFill>
-          <a:ln>
-            <a:noFill/>
-          </a:ln>
-        </p:spPr>
-        <p:style>
-          <a:lnRef idx="1">
-            <a:schemeClr val="accent1"/>
-          </a:lnRef>
-          <a:fillRef idx="3">
-            <a:schemeClr val="accent1"/>
-          </a:fillRef>
-          <a:effectRef idx="2">
-            <a:schemeClr val="accent1"/>
-          </a:effectRef>
-          <a:fontRef idx="minor">
-            <a:schemeClr val="lt1"/>
-          </a:fontRef>
-        </p:style>
-        <p:txBody>
-          <a:bodyPr rtlCol="0" anchor="ctr"/>
-          <a:lstStyle/>
-          <a:p>
-            <a:pPr algn="ctr"/>
-          </a:p>
-        </p:txBody>
-      </p:sp>
-      <p:sp>
-        <p:nvSpPr>
-          <p:cNvPr id="20" name="TextBox 19"/>
-          <p:cNvSpPr txBox="1"/>
-          <p:nvPr/>
-        </p:nvSpPr>
-        <p:spPr>
-          <a:xfrm>
-            <a:off x="594360" y="4680813"/>
-            <a:ext cx="438912" cy="438912"/>
-          </a:xfrm>
-          <a:prstGeom prst="rect">
-            <a:avLst/>
-          </a:prstGeom>
-          <a:noFill/>
-        </p:spPr>
-        <p:txBody>
-          <a:bodyPr wrap="square" anchor="ctr"/>
-          <a:lstStyle/>
-          <a:p>
-            <a:pPr algn="ctr"/>
-            <a:r>
-              <a:rPr sz="1600" b="1" i="0">
-                <a:solidFill>
-                  <a:srgbClr val="FFFFFF"/>
-                </a:solidFill>
-                <a:latin typeface="Calibri"/>
-              </a:rPr>
-              <a:t>4</a:t>
-            </a:r>
-          </a:p>
-        </p:txBody>
-      </p:sp>
-      <p:sp>
-        <p:nvSpPr>
-          <p:cNvPr id="21" name="TextBox 20"/>
-          <p:cNvSpPr txBox="1"/>
-          <p:nvPr/>
-        </p:nvSpPr>
-        <p:spPr>
-          <a:xfrm>
-            <a:off x="1188720" y="4537252"/>
-            <a:ext cx="10271455" cy="744321"/>
-          </a:xfrm>
-          <a:prstGeom prst="rect">
-            <a:avLst/>
-          </a:prstGeom>
-          <a:noFill/>
-        </p:spPr>
-        <p:txBody>
-          <a:bodyPr wrap="square" anchor="ctr"/>
-          <a:lstStyle/>
-          <a:p>
-            <a:r>
-              <a:rPr sz="1500" b="1" i="0">
-                <a:solidFill>
-                  <a:srgbClr val="095292"/>
-                </a:solidFill>
-                <a:latin typeface="Calibri"/>
-              </a:rPr>
-              <a:t>50 s · Las dos decisiones y el indicador</a:t>
+              <a:rPr sz="2000" b="0" i="0">
+                <a:solidFill>
+                  <a:srgbClr val="333333"/>
+                </a:solidFill>
+                <a:latin typeface="Calibri"/>
+              </a:rPr>
+              <a:t>–   Este es el punto que más sorprende y el más importante para las decisiones: </a:t>
+            </a:r>
+            <a:r>
+              <a:rPr sz="2000" b="1" i="0">
+                <a:solidFill>
+                  <a:srgbClr val="333333"/>
+                </a:solidFill>
+                <a:latin typeface="Calibri"/>
+              </a:rPr>
+              <a:t>en muchos dispositivos personales la mayor parte de la huella de toda su vida ya está gastada cuando se enciende por primera vez</a:t>
+            </a:r>
+            <a:r>
+              <a:rPr sz="2000" b="0" i="0">
+                <a:solidFill>
+                  <a:srgbClr val="333333"/>
+                </a:solidFill>
+                <a:latin typeface="Calibri"/>
+              </a:rPr>
+              <a:t>.</a:t>
             </a:r>
           </a:p>
           <a:p>
             <a:pPr>
-              <a:spcBef>
-                <a:spcPts val="200"/>
-              </a:spcBef>
+              <a:spcAft>
+                <a:spcPts val="800"/>
+              </a:spcAft>
             </a:pPr>
             <a:r>
-              <a:rPr sz="1300" b="0" i="0">
-                <a:solidFill>
-                  <a:srgbClr val="333333"/>
-                </a:solidFill>
-                <a:latin typeface="Calibri"/>
-              </a:rPr>
-              <a:t>Qué van a cambiar y cómo se sabrá si sirvió.</a:t>
-            </a:r>
-          </a:p>
-        </p:txBody>
-      </p:sp>
-      <p:sp>
-        <p:nvSpPr>
-          <p:cNvPr id="22" name="Rounded Rectangle 21"/>
-          <p:cNvSpPr/>
-          <p:nvPr/>
-        </p:nvSpPr>
-        <p:spPr>
-          <a:xfrm>
-            <a:off x="457200" y="5446166"/>
-            <a:ext cx="11277295" cy="908913"/>
-          </a:xfrm>
-          <a:prstGeom prst="roundRect">
-            <a:avLst>
-              <a:gd name="adj" fmla="val 12000"/>
-            </a:avLst>
-          </a:prstGeom>
-          <a:solidFill>
-            <a:srgbClr val="F2F2F2"/>
-          </a:solidFill>
-          <a:ln>
-            <a:noFill/>
-          </a:ln>
-        </p:spPr>
-        <p:style>
-          <a:lnRef idx="1">
-            <a:schemeClr val="accent1"/>
-          </a:lnRef>
-          <a:fillRef idx="3">
-            <a:schemeClr val="accent1"/>
-          </a:fillRef>
-          <a:effectRef idx="2">
-            <a:schemeClr val="accent1"/>
-          </a:effectRef>
-          <a:fontRef idx="minor">
-            <a:schemeClr val="lt1"/>
-          </a:fontRef>
-        </p:style>
-        <p:txBody>
-          <a:bodyPr rtlCol="0" anchor="ctr"/>
-          <a:lstStyle/>
-          <a:p>
-            <a:pPr algn="ctr"/>
-          </a:p>
-        </p:txBody>
-      </p:sp>
-      <p:sp>
-        <p:nvSpPr>
-          <p:cNvPr id="23" name="Rounded Rectangle 22"/>
-          <p:cNvSpPr/>
-          <p:nvPr/>
-        </p:nvSpPr>
-        <p:spPr>
-          <a:xfrm>
-            <a:off x="594360" y="5681167"/>
-            <a:ext cx="438912" cy="438912"/>
-          </a:xfrm>
-          <a:prstGeom prst="roundRect">
-            <a:avLst>
-              <a:gd name="adj" fmla="val 12000"/>
-            </a:avLst>
-          </a:prstGeom>
-          <a:solidFill>
-            <a:srgbClr val="095292"/>
-          </a:solidFill>
-          <a:ln>
-            <a:noFill/>
-          </a:ln>
-        </p:spPr>
-        <p:style>
-          <a:lnRef idx="1">
-            <a:schemeClr val="accent1"/>
-          </a:lnRef>
-          <a:fillRef idx="3">
-            <a:schemeClr val="accent1"/>
-          </a:fillRef>
-          <a:effectRef idx="2">
-            <a:schemeClr val="accent1"/>
-          </a:effectRef>
-          <a:fontRef idx="minor">
-            <a:schemeClr val="lt1"/>
-          </a:fontRef>
-        </p:style>
-        <p:txBody>
-          <a:bodyPr rtlCol="0" anchor="ctr"/>
-          <a:lstStyle/>
-          <a:p>
-            <a:pPr algn="ctr"/>
-          </a:p>
-        </p:txBody>
-      </p:sp>
-      <p:sp>
-        <p:nvSpPr>
-          <p:cNvPr id="24" name="TextBox 23"/>
-          <p:cNvSpPr txBox="1"/>
-          <p:nvPr/>
-        </p:nvSpPr>
-        <p:spPr>
-          <a:xfrm>
-            <a:off x="594360" y="5681167"/>
-            <a:ext cx="438912" cy="438912"/>
-          </a:xfrm>
-          <a:prstGeom prst="rect">
-            <a:avLst/>
-          </a:prstGeom>
-          <a:noFill/>
-        </p:spPr>
-        <p:txBody>
-          <a:bodyPr wrap="square" anchor="ctr"/>
-          <a:lstStyle/>
-          <a:p>
-            <a:pPr algn="ctr"/>
-            <a:r>
-              <a:rPr sz="1600" b="1" i="0">
-                <a:solidFill>
-                  <a:srgbClr val="FFFFFF"/>
-                </a:solidFill>
-                <a:latin typeface="Calibri"/>
-              </a:rPr>
-              <a:t>5</a:t>
-            </a:r>
-          </a:p>
-        </p:txBody>
-      </p:sp>
-      <p:sp>
-        <p:nvSpPr>
-          <p:cNvPr id="25" name="TextBox 24"/>
-          <p:cNvSpPr txBox="1"/>
-          <p:nvPr/>
-        </p:nvSpPr>
-        <p:spPr>
-          <a:xfrm>
-            <a:off x="1188720" y="5537606"/>
-            <a:ext cx="10271455" cy="744321"/>
-          </a:xfrm>
-          <a:prstGeom prst="rect">
-            <a:avLst/>
-          </a:prstGeom>
-          <a:noFill/>
-        </p:spPr>
-        <p:txBody>
-          <a:bodyPr wrap="square" anchor="ctr"/>
-          <a:lstStyle/>
-          <a:p>
-            <a:r>
-              <a:rPr sz="1500" b="1" i="0">
-                <a:solidFill>
-                  <a:srgbClr val="095292"/>
-                </a:solidFill>
-                <a:latin typeface="Calibri"/>
-              </a:rPr>
-              <a:t>10 s · La fuente</a:t>
+              <a:rPr sz="2000" b="0" i="0">
+                <a:solidFill>
+                  <a:srgbClr val="333333"/>
+                </a:solidFill>
+                <a:latin typeface="Calibri"/>
+              </a:rPr>
+              <a:t>–   La consecuencia es contraintuitiva: optimizar el consumo de batería es útil, pero </a:t>
+            </a:r>
+            <a:r>
+              <a:rPr sz="2000" b="1" i="0">
+                <a:solidFill>
+                  <a:srgbClr val="333333"/>
+                </a:solidFill>
+                <a:latin typeface="Calibri"/>
+              </a:rPr>
+              <a:t>alargar la vida útil del aparato pesa mucho más</a:t>
             </a:r>
           </a:p>
           <a:p>
             <a:pPr>
-              <a:spcBef>
-                <a:spcPts val="200"/>
-              </a:spcBef>
+              <a:spcAft>
+                <a:spcPts val="800"/>
+              </a:spcAft>
             </a:pPr>
             <a:r>
-              <a:rPr sz="1300" b="0" i="0">
-                <a:solidFill>
-                  <a:srgbClr val="333333"/>
-                </a:solidFill>
-                <a:latin typeface="Calibri"/>
-              </a:rPr>
-              <a:t>De dónde salió cualquier cifra que hayan dicho.</a:t>
-            </a:r>
-          </a:p>
-        </p:txBody>
-      </p:sp>
-      <p:sp>
-        <p:nvSpPr>
-          <p:cNvPr id="26" name="TextBox 25"/>
+              <a:rPr sz="2000" b="0" i="0">
+                <a:solidFill>
+                  <a:srgbClr val="333333"/>
+                </a:solidFill>
+                <a:latin typeface="Calibri"/>
+              </a:rPr>
+              <a:t>–   Y eso depende de decisiones de software. </a:t>
+            </a:r>
+            <a:r>
+              <a:rPr sz="2000" b="1" i="0">
+                <a:solidFill>
+                  <a:srgbClr val="333333"/>
+                </a:solidFill>
+                <a:latin typeface="Calibri"/>
+              </a:rPr>
+              <a:t>Uso.</a:t>
+            </a:r>
+            <a:r>
+              <a:rPr sz="2000" b="0" i="0">
+                <a:solidFill>
+                  <a:srgbClr val="333333"/>
+                </a:solidFill>
+                <a:latin typeface="Calibri"/>
+              </a:rPr>
+              <a:t> Electricidad del dispositivo, del servidor y —esto es lo que se olvida— del enfriamiento del centro de datos.</a:t>
+            </a:r>
+          </a:p>
+        </p:txBody>
+      </p:sp>
+      <p:sp>
+        <p:nvSpPr>
+          <p:cNvPr id="6" name="TextBox 5"/>
           <p:cNvSpPr txBox="1"/>
           <p:nvPr/>
         </p:nvSpPr>
@@ -6450,7 +4932,7 @@
                 </a:solidFill>
                 <a:latin typeface="Calibri"/>
               </a:rPr>
-              <a:t>Para la Clase 6</a:t>
+              <a:t>Las cuatro etapas y por qué la fabricación cambia la recomendación (2/2)</a:t>
             </a:r>
           </a:p>
         </p:txBody>
@@ -6489,7 +4971,7 @@
                 </a:solidFill>
                 <a:latin typeface="Calibri"/>
               </a:rPr>
-              <a:t>–   </a:t>
+              <a:t>–   Aquí entra el PUE. </a:t>
             </a:r>
             <a:r>
               <a:rPr sz="2000" b="1" i="0">
@@ -6498,7 +4980,7 @@
                 </a:solidFill>
                 <a:latin typeface="Calibri"/>
               </a:rPr>
-              <a:t>Trabajo dirigido:</a:t>
+              <a:t>Red.</a:t>
             </a:r>
             <a:r>
               <a:rPr sz="2000" b="0" i="0">
@@ -6507,7 +4989,7 @@
                 </a:solidFill>
                 <a:latin typeface="Calibri"/>
               </a:rPr>
-              <a:t> Revisión de casos de impacto ambiental — un caso documentado de impacto ambiental de infraestructura digital, con fuente, año y alcance declarados.</a:t>
+              <a:t> Cada byte que viaja pasa por antenas, cables, enrutadores y equipos que consumen.</a:t>
             </a:r>
           </a:p>
           <a:p>
@@ -6523,7 +5005,7 @@
                 </a:solidFill>
                 <a:latin typeface="Calibri"/>
               </a:rPr>
-              <a:t>–   </a:t>
+              <a:t>–   No es gratis y crece con el volumen: una pantalla que carga imágenes en tamaño original mil veces al día mueve un múltiplo de lo necesario. </a:t>
             </a:r>
             <a:r>
               <a:rPr sz="2000" b="1" i="0">
@@ -6532,7 +5014,7 @@
                 </a:solidFill>
                 <a:latin typeface="Calibri"/>
               </a:rPr>
-              <a:t>Trabajo independiente:</a:t>
+              <a:t>Fin de vida.</a:t>
             </a:r>
             <a:r>
               <a:rPr sz="2000" b="0" i="0">
@@ -6541,7 +5023,7 @@
                 </a:solidFill>
                 <a:latin typeface="Calibri"/>
               </a:rPr>
-              <a:t> Informe sobre sostenibilidad: una página con la huella de su sistema, las dos decisiones y el indicador, en la carpeta del equipo.</a:t>
+              <a:t> El aparato se vuelve residuo electrónico.</a:t>
             </a:r>
           </a:p>
           <a:p>
@@ -6557,43 +5039,7 @@
                 </a:solidFill>
                 <a:latin typeface="Calibri"/>
               </a:rPr>
-              <a:t>–   </a:t>
-            </a:r>
-            <a:r>
-              <a:rPr sz="2000" b="1" i="0">
-                <a:solidFill>
-                  <a:srgbClr val="333333"/>
-                </a:solidFill>
-                <a:latin typeface="Calibri"/>
-              </a:rPr>
-              <a:t>Clase 6 · Análisis de problemas tecnológicos del entorno</a:t>
-            </a:r>
-            <a:r>
-              <a:rPr sz="2000" b="0" i="0">
-                <a:solidFill>
-                  <a:srgbClr val="333333"/>
-                </a:solidFill>
-                <a:latin typeface="Calibri"/>
-              </a:rPr>
-              <a:t> — </a:t>
-            </a:r>
-            <a:r>
-              <a:rPr sz="2000" b="1" i="0">
-                <a:solidFill>
-                  <a:srgbClr val="333333"/>
-                </a:solidFill>
-                <a:latin typeface="Calibri"/>
-              </a:rPr>
-              <a:t>cierra el corte 1</a:t>
-            </a:r>
-            <a:r>
-              <a:rPr sz="2000" b="0" i="0">
-                <a:solidFill>
-                  <a:srgbClr val="333333"/>
-                </a:solidFill>
-                <a:latin typeface="Calibri"/>
-              </a:rPr>
-              <a:t>: se arma la ficha del problema del proyecto del semestre y hay evaluación de corte en la plataforma del curso al final de la sesión.</a:t>
+              <a:t>–   Tiene metales recuperables y sustancias peligrosas, y cuando no se recoge formalmente se desarma a mano, quemando plásticos, con daño directo a las personas que lo hacen.</a:t>
             </a:r>
           </a:p>
           <a:p>
@@ -6609,61 +5055,7 @@
                 </a:solidFill>
                 <a:latin typeface="Calibri"/>
               </a:rPr>
-              <a:t>–   </a:t>
-            </a:r>
-            <a:r>
-              <a:rPr sz="2000" b="1" i="0">
-                <a:solidFill>
-                  <a:srgbClr val="333333"/>
-                </a:solidFill>
-                <a:latin typeface="Calibri"/>
-              </a:rPr>
-              <a:t>Aviso:</a:t>
-            </a:r>
-            <a:r>
-              <a:rPr sz="2000" b="0" i="0">
-                <a:solidFill>
-                  <a:srgbClr val="333333"/>
-                </a:solidFill>
-                <a:latin typeface="Calibri"/>
-              </a:rPr>
-              <a:t> La sesión 6 cierra el corte. Traigan </a:t>
-            </a:r>
-            <a:r>
-              <a:rPr sz="2000" b="1" i="0">
-                <a:solidFill>
-                  <a:srgbClr val="333333"/>
-                </a:solidFill>
-                <a:latin typeface="Calibri"/>
-              </a:rPr>
-              <a:t>el problema de la sesión 1, la ficha de sistema de la sesión 3, la regla ética de la sesión 4 y el indicador de hoy</a:t>
-            </a:r>
-            <a:r>
-              <a:rPr sz="2000" b="0" i="0">
-                <a:solidFill>
-                  <a:srgbClr val="333333"/>
-                </a:solidFill>
-                <a:latin typeface="Calibri"/>
-              </a:rPr>
-              <a:t>: la ficha del problema se arma con esas cuatro cosas y se entrega en clase. Y lean el documento </a:t>
-            </a:r>
-            <a:r>
-              <a:rPr sz="2000" b="1" i="0">
-                <a:solidFill>
-                  <a:srgbClr val="333333"/>
-                </a:solidFill>
-                <a:latin typeface="Calibri"/>
-              </a:rPr>
-              <a:t>«Evaluación del Corte 1 — cómo prepararse»</a:t>
-            </a:r>
-            <a:r>
-              <a:rPr sz="2000" b="0" i="0">
-                <a:solidFill>
-                  <a:srgbClr val="333333"/>
-                </a:solidFill>
-                <a:latin typeface="Calibri"/>
-              </a:rPr>
-              <a:t>: trae qué repasar de cada sesión para los 20 minutos de evaluación del final.</a:t>
+              <a:t>–   El punto pedagógico de la diapositiva es que las palabras «software» y «nube» están construidas para que uno no piense en nada de esto.</a:t>
             </a:r>
           </a:p>
           <a:p>
@@ -6679,25 +5071,7 @@
                 </a:solidFill>
                 <a:latin typeface="Calibri"/>
               </a:rPr>
-              <a:t>–   </a:t>
-            </a:r>
-            <a:r>
-              <a:rPr sz="2000" b="1" i="0">
-                <a:solidFill>
-                  <a:srgbClr val="333333"/>
-                </a:solidFill>
-                <a:latin typeface="Calibri"/>
-              </a:rPr>
-              <a:t>Antes de salir:</a:t>
-            </a:r>
-            <a:r>
-              <a:rPr sz="2000" b="0" i="0">
-                <a:solidFill>
-                  <a:srgbClr val="333333"/>
-                </a:solidFill>
-                <a:latin typeface="Calibri"/>
-              </a:rPr>
-              <a:t> el enlace del documento del equipo en el chat, con permiso de lectura para el docente, y el nombre del vocero de hoy.</a:t>
+              <a:t>–   Nombrar las cuatro etapas es lo que permite discutir el tema con seriedad.</a:t>
             </a:r>
           </a:p>
         </p:txBody>
@@ -6772,13 +5146,13 @@
         <p:spPr>
           <a:xfrm>
             <a:off x="0" y="0"/>
-            <a:ext cx="12191695" cy="164592"/>
+            <a:ext cx="12191695" cy="960120"/>
           </a:xfrm>
           <a:prstGeom prst="rect">
             <a:avLst/>
           </a:prstGeom>
           <a:solidFill>
-            <a:srgbClr val="269CCB"/>
+            <a:srgbClr val="095292"/>
           </a:solidFill>
           <a:ln>
             <a:noFill/>
@@ -6806,30 +5180,49 @@
           </a:p>
         </p:txBody>
       </p:sp>
-      <p:pic>
-        <p:nvPicPr>
-          <p:cNvPr id="3" name="Picture 2" descr="logo_uniajc_color.png"/>
-          <p:cNvPicPr>
-            <a:picLocks noChangeAspect="1"/>
-          </p:cNvPicPr>
-          <p:nvPr/>
-        </p:nvPicPr>
-        <p:blipFill>
-          <a:blip r:embed="rId2"/>
-          <a:stretch>
-            <a:fillRect/>
-          </a:stretch>
-        </p:blipFill>
-        <p:spPr>
-          <a:xfrm>
-            <a:off x="10271455" y="5998464"/>
-            <a:ext cx="1463040" cy="643233"/>
-          </a:xfrm>
-          <a:prstGeom prst="rect">
-            <a:avLst/>
-          </a:prstGeom>
-        </p:spPr>
-      </p:pic>
+      <p:sp>
+        <p:nvSpPr>
+          <p:cNvPr id="3" name="Rectangle 2"/>
+          <p:cNvSpPr/>
+          <p:nvPr/>
+        </p:nvSpPr>
+        <p:spPr>
+          <a:xfrm>
+            <a:off x="0" y="960120"/>
+            <a:ext cx="12191695" cy="41148"/>
+          </a:xfrm>
+          <a:prstGeom prst="rect">
+            <a:avLst/>
+          </a:prstGeom>
+          <a:solidFill>
+            <a:srgbClr val="FFD000"/>
+          </a:solidFill>
+          <a:ln>
+            <a:noFill/>
+          </a:ln>
+        </p:spPr>
+        <p:style>
+          <a:lnRef idx="1">
+            <a:schemeClr val="accent1"/>
+          </a:lnRef>
+          <a:fillRef idx="3">
+            <a:schemeClr val="accent1"/>
+          </a:fillRef>
+          <a:effectRef idx="2">
+            <a:schemeClr val="accent1"/>
+          </a:effectRef>
+          <a:fontRef idx="minor">
+            <a:schemeClr val="lt1"/>
+          </a:fontRef>
+        </p:style>
+        <p:txBody>
+          <a:bodyPr rtlCol="0" anchor="ctr"/>
+          <a:lstStyle/>
+          <a:p>
+            <a:pPr algn="ctr"/>
+          </a:p>
+        </p:txBody>
+      </p:sp>
       <p:sp>
         <p:nvSpPr>
           <p:cNvPr id="4" name="TextBox 3"/>
@@ -6838,41 +5231,8 @@
         </p:nvSpPr>
         <p:spPr>
           <a:xfrm>
-            <a:off x="457200" y="1737360"/>
-            <a:ext cx="11277295" cy="1097280"/>
-          </a:xfrm>
-          <a:prstGeom prst="rect">
-            <a:avLst/>
-          </a:prstGeom>
-          <a:noFill/>
-        </p:spPr>
-        <p:txBody>
-          <a:bodyPr wrap="square" anchor="ctr"/>
-          <a:lstStyle/>
-          <a:p>
-            <a:pPr algn="ctr"/>
-            <a:r>
-              <a:rPr sz="3400" b="1" i="0">
-                <a:solidFill>
-                  <a:srgbClr val="095292"/>
-                </a:solidFill>
-                <a:latin typeface="Calibri"/>
-              </a:rPr>
-              <a:t>Nos vemos en la sesión 6 — cierra el corte 1</a:t>
-            </a:r>
-          </a:p>
-        </p:txBody>
-      </p:sp>
-      <p:sp>
-        <p:nvSpPr>
-          <p:cNvPr id="5" name="TextBox 4"/>
-          <p:cNvSpPr txBox="1"/>
-          <p:nvPr/>
-        </p:nvSpPr>
-        <p:spPr>
-          <a:xfrm>
-            <a:off x="457200" y="3017520"/>
-            <a:ext cx="11277295" cy="1645920"/>
+            <a:off x="457200" y="164592"/>
+            <a:ext cx="11277295" cy="502920"/>
           </a:xfrm>
           <a:prstGeom prst="rect">
             <a:avLst/>
@@ -6885,49 +5245,28 @@
           </a:bodyPr>
           <a:lstStyle/>
           <a:p>
-            <a:pPr algn="ctr">
-              <a:spcAft>
-                <a:spcPts val="600"/>
-              </a:spcAft>
-            </a:pPr>
-            <a:r>
-              <a:rPr sz="1600" b="0" i="0">
-                <a:solidFill>
-                  <a:srgbClr val="333333"/>
-                </a:solidFill>
-                <a:latin typeface="Calibri"/>
-              </a:rPr>
-              <a:t>El rol del ingeniero en el contexto ambiental · Clase 5</a:t>
-            </a:r>
-          </a:p>
-          <a:p>
-            <a:pPr algn="ctr">
-              <a:spcAft>
-                <a:spcPts val="600"/>
-              </a:spcAft>
-            </a:pPr>
-            <a:r>
-              <a:rPr sz="1600" b="0" i="0">
-                <a:solidFill>
-                  <a:srgbClr val="333333"/>
-                </a:solidFill>
-                <a:latin typeface="Calibri"/>
-              </a:rPr>
-              <a:t>FI300101 · UNIAJC · Ingeniería de Sistemas</a:t>
-            </a:r>
-          </a:p>
-        </p:txBody>
-      </p:sp>
-      <p:sp>
-        <p:nvSpPr>
-          <p:cNvPr id="6" name="TextBox 5"/>
+            <a:r>
+              <a:rPr sz="2600" b="1" i="0">
+                <a:solidFill>
+                  <a:srgbClr val="FFFFFF"/>
+                </a:solidFill>
+                <a:latin typeface="Calibri"/>
+              </a:rPr>
+              <a:t>PUE, agua, RAEE y obsolescencia: los cuatro conceptos que hay que dejar (1/3)</a:t>
+            </a:r>
+          </a:p>
+        </p:txBody>
+      </p:sp>
+      <p:sp>
+        <p:nvSpPr>
+          <p:cNvPr id="5" name="TextBox 4"/>
           <p:cNvSpPr txBox="1"/>
           <p:nvPr/>
         </p:nvSpPr>
         <p:spPr>
           <a:xfrm>
-            <a:off x="457200" y="4754880"/>
-            <a:ext cx="11277295" cy="640080"/>
+            <a:off x="457200" y="1170432"/>
+            <a:ext cx="11277295" cy="5230368"/>
           </a:xfrm>
           <a:prstGeom prst="rect">
             <a:avLst/>
@@ -6940,15 +5279,1902 @@
           </a:bodyPr>
           <a:lstStyle/>
           <a:p>
+            <a:pPr>
+              <a:spcAft>
+                <a:spcPts val="800"/>
+              </a:spcAft>
+            </a:pPr>
+            <a:r>
+              <a:rPr sz="2000" b="0" i="0">
+                <a:solidFill>
+                  <a:srgbClr val="333333"/>
+                </a:solidFill>
+                <a:latin typeface="Calibri"/>
+              </a:rPr>
+              <a:t>–   </a:t>
+            </a:r>
+            <a:r>
+              <a:rPr sz="2000" b="1" i="0">
+                <a:solidFill>
+                  <a:srgbClr val="333333"/>
+                </a:solidFill>
+                <a:latin typeface="Calibri"/>
+              </a:rPr>
+              <a:t>PUE (Power Usage Effectiveness).</a:t>
+            </a:r>
+            <a:r>
+              <a:rPr sz="2000" b="0" i="0">
+                <a:solidFill>
+                  <a:srgbClr val="333333"/>
+                </a:solidFill>
+                <a:latin typeface="Calibri"/>
+              </a:rPr>
+              <a:t> Es la energía total que entra al centro de datos dividida por la energía que efectivamente llega a los servidores.</a:t>
+            </a:r>
+          </a:p>
+          <a:p>
+            <a:pPr>
+              <a:spcAft>
+                <a:spcPts val="800"/>
+              </a:spcAft>
+            </a:pPr>
+            <a:r>
+              <a:rPr sz="2000" b="0" i="0">
+                <a:solidFill>
+                  <a:srgbClr val="333333"/>
+                </a:solidFill>
+                <a:latin typeface="Calibri"/>
+              </a:rPr>
+              <a:t>–   Si fuera 1.0, todo lo que entra se usa en computar.</a:t>
+            </a:r>
+          </a:p>
+          <a:p>
+            <a:pPr>
+              <a:spcAft>
+                <a:spcPts val="800"/>
+              </a:spcAft>
+            </a:pPr>
+            <a:r>
+              <a:rPr sz="2000" b="0" i="0">
+                <a:solidFill>
+                  <a:srgbClr val="333333"/>
+                </a:solidFill>
+                <a:latin typeface="Calibri"/>
+              </a:rPr>
+              <a:t>–   Un PUE de 1.6 significa que por cada vatio de cómputo se gastan 0,6 en enfriar, iluminar y en pérdidas.</a:t>
+            </a:r>
+          </a:p>
+          <a:p>
+            <a:pPr>
+              <a:spcAft>
+                <a:spcPts val="800"/>
+              </a:spcAft>
+            </a:pPr>
+            <a:r>
+              <a:rPr sz="2000" b="0" i="0">
+                <a:solidFill>
+                  <a:srgbClr val="333333"/>
+                </a:solidFill>
+                <a:latin typeface="Calibri"/>
+              </a:rPr>
+              <a:t>–   Los centros de datos grandes y modernos operan bastante mejor que el promedio de las salas de servidores de empresa, que suelen estar en el rango de 1.5 a 1.6 según las encuestas del sector.</a:t>
+            </a:r>
+          </a:p>
+          <a:p>
+            <a:pPr>
+              <a:spcAft>
+                <a:spcPts val="800"/>
+              </a:spcAft>
+            </a:pPr>
+            <a:r>
+              <a:rPr sz="2000" b="0" i="0">
+                <a:solidFill>
+                  <a:srgbClr val="333333"/>
+                </a:solidFill>
+                <a:latin typeface="Calibri"/>
+              </a:rPr>
+              <a:t>–   La idea que hay que dejar no es el número exacto: es que </a:t>
+            </a:r>
+            <a:r>
+              <a:rPr sz="2000" b="1" i="0">
+                <a:solidFill>
+                  <a:srgbClr val="333333"/>
+                </a:solidFill>
+                <a:latin typeface="Calibri"/>
+              </a:rPr>
+              <a:t>una parte grande de la energía de un centro de datos no computa nada</a:t>
+            </a:r>
+            <a:r>
+              <a:rPr sz="2000" b="0" i="0">
+                <a:solidFill>
+                  <a:srgbClr val="333333"/>
+                </a:solidFill>
+                <a:latin typeface="Calibri"/>
+              </a:rPr>
+              <a:t>, y que existe una métrica con nombre para medirlo.</a:t>
+            </a:r>
+          </a:p>
+          <a:p>
+            <a:pPr>
+              <a:spcAft>
+                <a:spcPts val="800"/>
+              </a:spcAft>
+            </a:pPr>
+            <a:r>
+              <a:rPr sz="2000" b="0" i="0">
+                <a:solidFill>
+                  <a:srgbClr val="333333"/>
+                </a:solidFill>
+                <a:latin typeface="Calibri"/>
+              </a:rPr>
+              <a:t>–   Un ingeniero que sabe que el PUE existe puede preguntar por él. </a:t>
+            </a:r>
+            <a:r>
+              <a:rPr sz="2000" b="1" i="0">
+                <a:solidFill>
+                  <a:srgbClr val="333333"/>
+                </a:solidFill>
+                <a:latin typeface="Calibri"/>
+              </a:rPr>
+              <a:t>El agua.</a:t>
+            </a:r>
+            <a:r>
+              <a:rPr sz="2000" b="0" i="0">
+                <a:solidFill>
+                  <a:srgbClr val="333333"/>
+                </a:solidFill>
+                <a:latin typeface="Calibri"/>
+              </a:rPr>
+              <a:t> Enfriar con evaporación de agua es más barato en electricidad que enfriar con máquinas, así que muchos centros de datos usan agua.</a:t>
+            </a:r>
+          </a:p>
+        </p:txBody>
+      </p:sp>
+      <p:sp>
+        <p:nvSpPr>
+          <p:cNvPr id="6" name="TextBox 5"/>
+          <p:cNvSpPr txBox="1"/>
+          <p:nvPr/>
+        </p:nvSpPr>
+        <p:spPr>
+          <a:xfrm>
+            <a:off x="11185855" y="6473952"/>
+            <a:ext cx="640080" cy="274320"/>
+          </a:xfrm>
+          <a:prstGeom prst="rect">
+            <a:avLst/>
+          </a:prstGeom>
+          <a:noFill/>
+        </p:spPr>
+        <p:txBody>
+          <a:bodyPr wrap="square">
+            <a:spAutoFit/>
+          </a:bodyPr>
+          <a:lstStyle/>
+          <a:p>
+            <a:pPr algn="r"/>
+            <a:r>
+              <a:rPr sz="1100" b="0" i="0">
+                <a:solidFill>
+                  <a:srgbClr val="666666"/>
+                </a:solidFill>
+                <a:latin typeface="Calibri"/>
+              </a:rPr>
+              <a:t>14</a:t>
+            </a:r>
+          </a:p>
+        </p:txBody>
+      </p:sp>
+    </p:spTree>
+  </p:cSld>
+  <p:clrMapOvr>
+    <a:masterClrMapping/>
+  </p:clrMapOvr>
+</p:sld>
+</file>
+
+<file path=ppt/slides/slide15.xml><?xml version="1.0" encoding="utf-8"?>
+<p:sld xmlns:a="http://schemas.openxmlformats.org/drawingml/2006/main" xmlns:p="http://schemas.openxmlformats.org/presentationml/2006/main" xmlns:r="http://schemas.openxmlformats.org/officeDocument/2006/relationships">
+  <p:cSld>
+    <p:bg>
+      <p:bgPr>
+        <a:solidFill>
+          <a:srgbClr val="FFFFFF"/>
+        </a:solidFill>
+        <a:effectLst/>
+      </p:bgPr>
+    </p:bg>
+    <p:spTree>
+      <p:nvGrpSpPr>
+        <p:cNvPr id="1" name=""/>
+        <p:cNvGrpSpPr/>
+        <p:nvPr/>
+      </p:nvGrpSpPr>
+      <p:grpSpPr/>
+      <p:sp>
+        <p:nvSpPr>
+          <p:cNvPr id="2" name="Rectangle 1"/>
+          <p:cNvSpPr/>
+          <p:nvPr/>
+        </p:nvSpPr>
+        <p:spPr>
+          <a:xfrm>
+            <a:off x="0" y="0"/>
+            <a:ext cx="12191695" cy="960120"/>
+          </a:xfrm>
+          <a:prstGeom prst="rect">
+            <a:avLst/>
+          </a:prstGeom>
+          <a:solidFill>
+            <a:srgbClr val="095292"/>
+          </a:solidFill>
+          <a:ln>
+            <a:noFill/>
+          </a:ln>
+        </p:spPr>
+        <p:style>
+          <a:lnRef idx="1">
+            <a:schemeClr val="accent1"/>
+          </a:lnRef>
+          <a:fillRef idx="3">
+            <a:schemeClr val="accent1"/>
+          </a:fillRef>
+          <a:effectRef idx="2">
+            <a:schemeClr val="accent1"/>
+          </a:effectRef>
+          <a:fontRef idx="minor">
+            <a:schemeClr val="lt1"/>
+          </a:fontRef>
+        </p:style>
+        <p:txBody>
+          <a:bodyPr rtlCol="0" anchor="ctr"/>
+          <a:lstStyle/>
+          <a:p>
             <a:pPr algn="ctr"/>
+          </a:p>
+        </p:txBody>
+      </p:sp>
+      <p:sp>
+        <p:nvSpPr>
+          <p:cNvPr id="3" name="Rectangle 2"/>
+          <p:cNvSpPr/>
+          <p:nvPr/>
+        </p:nvSpPr>
+        <p:spPr>
+          <a:xfrm>
+            <a:off x="0" y="960120"/>
+            <a:ext cx="12191695" cy="41148"/>
+          </a:xfrm>
+          <a:prstGeom prst="rect">
+            <a:avLst/>
+          </a:prstGeom>
+          <a:solidFill>
+            <a:srgbClr val="FFD000"/>
+          </a:solidFill>
+          <a:ln>
+            <a:noFill/>
+          </a:ln>
+        </p:spPr>
+        <p:style>
+          <a:lnRef idx="1">
+            <a:schemeClr val="accent1"/>
+          </a:lnRef>
+          <a:fillRef idx="3">
+            <a:schemeClr val="accent1"/>
+          </a:fillRef>
+          <a:effectRef idx="2">
+            <a:schemeClr val="accent1"/>
+          </a:effectRef>
+          <a:fontRef idx="minor">
+            <a:schemeClr val="lt1"/>
+          </a:fontRef>
+        </p:style>
+        <p:txBody>
+          <a:bodyPr rtlCol="0" anchor="ctr"/>
+          <a:lstStyle/>
+          <a:p>
+            <a:pPr algn="ctr"/>
+          </a:p>
+        </p:txBody>
+      </p:sp>
+      <p:sp>
+        <p:nvSpPr>
+          <p:cNvPr id="4" name="TextBox 3"/>
+          <p:cNvSpPr txBox="1"/>
+          <p:nvPr/>
+        </p:nvSpPr>
+        <p:spPr>
+          <a:xfrm>
+            <a:off x="457200" y="164592"/>
+            <a:ext cx="11277295" cy="502920"/>
+          </a:xfrm>
+          <a:prstGeom prst="rect">
+            <a:avLst/>
+          </a:prstGeom>
+          <a:noFill/>
+        </p:spPr>
+        <p:txBody>
+          <a:bodyPr wrap="square">
+            <a:spAutoFit/>
+          </a:bodyPr>
+          <a:lstStyle/>
+          <a:p>
+            <a:r>
+              <a:rPr sz="2600" b="1" i="0">
+                <a:solidFill>
+                  <a:srgbClr val="FFFFFF"/>
+                </a:solidFill>
+                <a:latin typeface="Calibri"/>
+              </a:rPr>
+              <a:t>PUE, agua, RAEE y obsolescencia: los cuatro conceptos que hay que dejar (2/3)</a:t>
+            </a:r>
+          </a:p>
+        </p:txBody>
+      </p:sp>
+      <p:sp>
+        <p:nvSpPr>
+          <p:cNvPr id="5" name="TextBox 4"/>
+          <p:cNvSpPr txBox="1"/>
+          <p:nvPr/>
+        </p:nvSpPr>
+        <p:spPr>
+          <a:xfrm>
+            <a:off x="457200" y="1170432"/>
+            <a:ext cx="11277295" cy="5230368"/>
+          </a:xfrm>
+          <a:prstGeom prst="rect">
+            <a:avLst/>
+          </a:prstGeom>
+          <a:noFill/>
+        </p:spPr>
+        <p:txBody>
+          <a:bodyPr wrap="square">
+            <a:spAutoFit/>
+          </a:bodyPr>
+          <a:lstStyle/>
+          <a:p>
+            <a:pPr>
+              <a:spcAft>
+                <a:spcPts val="800"/>
+              </a:spcAft>
+            </a:pPr>
+            <a:r>
+              <a:rPr sz="2000" b="0" i="0">
+                <a:solidFill>
+                  <a:srgbClr val="333333"/>
+                </a:solidFill>
+                <a:latin typeface="Calibri"/>
+              </a:rPr>
+              <a:t>–   Eso traslada el costo: baja la factura de luz y sube el consumo de una cuenca que normalmente abastece a población.</a:t>
+            </a:r>
+          </a:p>
+          <a:p>
+            <a:pPr>
+              <a:spcAft>
+                <a:spcPts val="800"/>
+              </a:spcAft>
+            </a:pPr>
+            <a:r>
+              <a:rPr sz="2000" b="0" i="0">
+                <a:solidFill>
+                  <a:srgbClr val="333333"/>
+                </a:solidFill>
+                <a:latin typeface="Calibri"/>
+              </a:rPr>
+              <a:t>–   Es un buen ejemplo de algo que el curso repite: </a:t>
+            </a:r>
             <a:r>
               <a:rPr sz="2000" b="1" i="0">
                 <a:solidFill>
-                  <a:srgbClr val="269CCB"/>
-                </a:solidFill>
-                <a:latin typeface="Calibri"/>
-              </a:rPr>
-              <a:t>El software no es inmaterial: pesa, consume y termina en basura</a:t>
+                  <a:srgbClr val="333333"/>
+                </a:solidFill>
+                <a:latin typeface="Calibri"/>
+              </a:rPr>
+              <a:t>optimizar una variable suele mover el problema a otra</a:t>
+            </a:r>
+            <a:r>
+              <a:rPr sz="2000" b="0" i="0">
+                <a:solidFill>
+                  <a:srgbClr val="333333"/>
+                </a:solidFill>
+                <a:latin typeface="Calibri"/>
+              </a:rPr>
+              <a:t>, y el ingeniero tiene que saber a cuál.</a:t>
+            </a:r>
+          </a:p>
+          <a:p>
+            <a:pPr>
+              <a:spcAft>
+                <a:spcPts val="800"/>
+              </a:spcAft>
+            </a:pPr>
+            <a:r>
+              <a:rPr sz="2000" b="0" i="0">
+                <a:solidFill>
+                  <a:srgbClr val="333333"/>
+                </a:solidFill>
+                <a:latin typeface="Calibri"/>
+              </a:rPr>
+              <a:t>–   Hay métricas para esto (WUE, litros por kilovatio-hora), y aquí también vale la advertencia de las cifras. </a:t>
+            </a:r>
+            <a:r>
+              <a:rPr sz="2000" b="1" i="0">
+                <a:solidFill>
+                  <a:srgbClr val="333333"/>
+                </a:solidFill>
+                <a:latin typeface="Calibri"/>
+              </a:rPr>
+              <a:t>RAEE y la Ley 1672 de 2013.</a:t>
+            </a:r>
+            <a:r>
+              <a:rPr sz="2000" b="0" i="0">
+                <a:solidFill>
+                  <a:srgbClr val="333333"/>
+                </a:solidFill>
+                <a:latin typeface="Calibri"/>
+              </a:rPr>
+              <a:t> Es la norma colombiana que fija los lineamientos para la gestión de residuos de aparatos eléctricos y electrónicos.</a:t>
+            </a:r>
+          </a:p>
+          <a:p>
+            <a:pPr>
+              <a:spcAft>
+                <a:spcPts val="800"/>
+              </a:spcAft>
+            </a:pPr>
+            <a:r>
+              <a:rPr sz="2000" b="0" i="0">
+                <a:solidFill>
+                  <a:srgbClr val="333333"/>
+                </a:solidFill>
+                <a:latin typeface="Calibri"/>
+              </a:rPr>
+              <a:t>–   Lo que hay que poder decir: </a:t>
+            </a:r>
+            <a:r>
+              <a:rPr sz="2000" b="1" i="0">
+                <a:solidFill>
+                  <a:srgbClr val="333333"/>
+                </a:solidFill>
+                <a:latin typeface="Calibri"/>
+              </a:rPr>
+              <a:t>obliga a los productores</a:t>
+            </a:r>
+            <a:r>
+              <a:rPr sz="2000" b="0" i="0">
+                <a:solidFill>
+                  <a:srgbClr val="333333"/>
+                </a:solidFill>
+                <a:latin typeface="Calibri"/>
+              </a:rPr>
+              <a:t> a establecer sistemas de recolección y gestión, y </a:t>
+            </a:r>
+            <a:r>
+              <a:rPr sz="2000" b="1" i="0">
+                <a:solidFill>
+                  <a:srgbClr val="333333"/>
+                </a:solidFill>
+                <a:latin typeface="Calibri"/>
+              </a:rPr>
+              <a:t>establece el deber del usuario</a:t>
+            </a:r>
+            <a:r>
+              <a:rPr sz="2000" b="0" i="0">
+                <a:solidFill>
+                  <a:srgbClr val="333333"/>
+                </a:solidFill>
+                <a:latin typeface="Calibri"/>
+              </a:rPr>
+              <a:t> de entregar el aparato en esos puntos en vez de tirarlo a la basura común.</a:t>
+            </a:r>
+          </a:p>
+          <a:p>
+            <a:pPr>
+              <a:spcAft>
+                <a:spcPts val="800"/>
+              </a:spcAft>
+            </a:pPr>
+            <a:r>
+              <a:rPr sz="2000" b="0" i="0">
+                <a:solidFill>
+                  <a:srgbClr val="333333"/>
+                </a:solidFill>
+                <a:latin typeface="Calibri"/>
+              </a:rPr>
+              <a:t>–   Los informes globales de residuos electrónicos (Global E-waste Monitor, de UNITAR e ITU) reportan decenas de millones de toneladas al año y una tasa de recolección formal baja: el orden de magnitud es que </a:t>
+            </a:r>
+            <a:r>
+              <a:rPr sz="2000" b="1" i="0">
+                <a:solidFill>
+                  <a:srgbClr val="333333"/>
+                </a:solidFill>
+                <a:latin typeface="Calibri"/>
+              </a:rPr>
+              <a:t>la mayor parte no se recoge</a:t>
+            </a:r>
+            <a:r>
+              <a:rPr sz="2000" b="0" i="0">
+                <a:solidFill>
+                  <a:srgbClr val="333333"/>
+                </a:solidFill>
+                <a:latin typeface="Calibri"/>
+              </a:rPr>
+              <a:t>.</a:t>
+            </a:r>
+          </a:p>
+        </p:txBody>
+      </p:sp>
+      <p:sp>
+        <p:nvSpPr>
+          <p:cNvPr id="6" name="TextBox 5"/>
+          <p:cNvSpPr txBox="1"/>
+          <p:nvPr/>
+        </p:nvSpPr>
+        <p:spPr>
+          <a:xfrm>
+            <a:off x="11185855" y="6473952"/>
+            <a:ext cx="640080" cy="274320"/>
+          </a:xfrm>
+          <a:prstGeom prst="rect">
+            <a:avLst/>
+          </a:prstGeom>
+          <a:noFill/>
+        </p:spPr>
+        <p:txBody>
+          <a:bodyPr wrap="square">
+            <a:spAutoFit/>
+          </a:bodyPr>
+          <a:lstStyle/>
+          <a:p>
+            <a:pPr algn="r"/>
+            <a:r>
+              <a:rPr sz="1100" b="0" i="0">
+                <a:solidFill>
+                  <a:srgbClr val="666666"/>
+                </a:solidFill>
+                <a:latin typeface="Calibri"/>
+              </a:rPr>
+              <a:t>15</a:t>
+            </a:r>
+          </a:p>
+        </p:txBody>
+      </p:sp>
+    </p:spTree>
+  </p:cSld>
+  <p:clrMapOvr>
+    <a:masterClrMapping/>
+  </p:clrMapOvr>
+</p:sld>
+</file>
+
+<file path=ppt/slides/slide16.xml><?xml version="1.0" encoding="utf-8"?>
+<p:sld xmlns:a="http://schemas.openxmlformats.org/drawingml/2006/main" xmlns:p="http://schemas.openxmlformats.org/presentationml/2006/main" xmlns:r="http://schemas.openxmlformats.org/officeDocument/2006/relationships">
+  <p:cSld>
+    <p:bg>
+      <p:bgPr>
+        <a:solidFill>
+          <a:srgbClr val="FFFFFF"/>
+        </a:solidFill>
+        <a:effectLst/>
+      </p:bgPr>
+    </p:bg>
+    <p:spTree>
+      <p:nvGrpSpPr>
+        <p:cNvPr id="1" name=""/>
+        <p:cNvGrpSpPr/>
+        <p:nvPr/>
+      </p:nvGrpSpPr>
+      <p:grpSpPr/>
+      <p:sp>
+        <p:nvSpPr>
+          <p:cNvPr id="2" name="Rectangle 1"/>
+          <p:cNvSpPr/>
+          <p:nvPr/>
+        </p:nvSpPr>
+        <p:spPr>
+          <a:xfrm>
+            <a:off x="0" y="0"/>
+            <a:ext cx="12191695" cy="960120"/>
+          </a:xfrm>
+          <a:prstGeom prst="rect">
+            <a:avLst/>
+          </a:prstGeom>
+          <a:solidFill>
+            <a:srgbClr val="095292"/>
+          </a:solidFill>
+          <a:ln>
+            <a:noFill/>
+          </a:ln>
+        </p:spPr>
+        <p:style>
+          <a:lnRef idx="1">
+            <a:schemeClr val="accent1"/>
+          </a:lnRef>
+          <a:fillRef idx="3">
+            <a:schemeClr val="accent1"/>
+          </a:fillRef>
+          <a:effectRef idx="2">
+            <a:schemeClr val="accent1"/>
+          </a:effectRef>
+          <a:fontRef idx="minor">
+            <a:schemeClr val="lt1"/>
+          </a:fontRef>
+        </p:style>
+        <p:txBody>
+          <a:bodyPr rtlCol="0" anchor="ctr"/>
+          <a:lstStyle/>
+          <a:p>
+            <a:pPr algn="ctr"/>
+          </a:p>
+        </p:txBody>
+      </p:sp>
+      <p:sp>
+        <p:nvSpPr>
+          <p:cNvPr id="3" name="Rectangle 2"/>
+          <p:cNvSpPr/>
+          <p:nvPr/>
+        </p:nvSpPr>
+        <p:spPr>
+          <a:xfrm>
+            <a:off x="0" y="960120"/>
+            <a:ext cx="12191695" cy="41148"/>
+          </a:xfrm>
+          <a:prstGeom prst="rect">
+            <a:avLst/>
+          </a:prstGeom>
+          <a:solidFill>
+            <a:srgbClr val="FFD000"/>
+          </a:solidFill>
+          <a:ln>
+            <a:noFill/>
+          </a:ln>
+        </p:spPr>
+        <p:style>
+          <a:lnRef idx="1">
+            <a:schemeClr val="accent1"/>
+          </a:lnRef>
+          <a:fillRef idx="3">
+            <a:schemeClr val="accent1"/>
+          </a:fillRef>
+          <a:effectRef idx="2">
+            <a:schemeClr val="accent1"/>
+          </a:effectRef>
+          <a:fontRef idx="minor">
+            <a:schemeClr val="lt1"/>
+          </a:fontRef>
+        </p:style>
+        <p:txBody>
+          <a:bodyPr rtlCol="0" anchor="ctr"/>
+          <a:lstStyle/>
+          <a:p>
+            <a:pPr algn="ctr"/>
+          </a:p>
+        </p:txBody>
+      </p:sp>
+      <p:sp>
+        <p:nvSpPr>
+          <p:cNvPr id="4" name="TextBox 3"/>
+          <p:cNvSpPr txBox="1"/>
+          <p:nvPr/>
+        </p:nvSpPr>
+        <p:spPr>
+          <a:xfrm>
+            <a:off x="457200" y="164592"/>
+            <a:ext cx="11277295" cy="502920"/>
+          </a:xfrm>
+          <a:prstGeom prst="rect">
+            <a:avLst/>
+          </a:prstGeom>
+          <a:noFill/>
+        </p:spPr>
+        <p:txBody>
+          <a:bodyPr wrap="square">
+            <a:spAutoFit/>
+          </a:bodyPr>
+          <a:lstStyle/>
+          <a:p>
+            <a:r>
+              <a:rPr sz="2600" b="1" i="0">
+                <a:solidFill>
+                  <a:srgbClr val="FFFFFF"/>
+                </a:solidFill>
+                <a:latin typeface="Calibri"/>
+              </a:rPr>
+              <a:t>PUE, agua, RAEE y obsolescencia: los cuatro conceptos que hay que dejar (3/3)</a:t>
+            </a:r>
+          </a:p>
+        </p:txBody>
+      </p:sp>
+      <p:sp>
+        <p:nvSpPr>
+          <p:cNvPr id="5" name="TextBox 4"/>
+          <p:cNvSpPr txBox="1"/>
+          <p:nvPr/>
+        </p:nvSpPr>
+        <p:spPr>
+          <a:xfrm>
+            <a:off x="457200" y="1170432"/>
+            <a:ext cx="11277295" cy="5230368"/>
+          </a:xfrm>
+          <a:prstGeom prst="rect">
+            <a:avLst/>
+          </a:prstGeom>
+          <a:noFill/>
+        </p:spPr>
+        <p:txBody>
+          <a:bodyPr wrap="square">
+            <a:spAutoFit/>
+          </a:bodyPr>
+          <a:lstStyle/>
+          <a:p>
+            <a:pPr>
+              <a:spcAft>
+                <a:spcPts val="800"/>
+              </a:spcAft>
+            </a:pPr>
+            <a:r>
+              <a:rPr sz="2000" b="0" i="0">
+                <a:solidFill>
+                  <a:srgbClr val="333333"/>
+                </a:solidFill>
+                <a:latin typeface="Calibri"/>
+              </a:rPr>
+              <a:t>–   Si un equipo cita una cifra exacta, exija la edición del informe y el año, porque cambia entre ediciones. </a:t>
+            </a:r>
+            <a:r>
+              <a:rPr sz="2000" b="1" i="0">
+                <a:solidFill>
+                  <a:srgbClr val="333333"/>
+                </a:solidFill>
+                <a:latin typeface="Calibri"/>
+              </a:rPr>
+              <a:t>Obsolescencia inducida por software.</a:t>
+            </a:r>
+            <a:r>
+              <a:rPr sz="2000" b="0" i="0">
+                <a:solidFill>
+                  <a:srgbClr val="333333"/>
+                </a:solidFill>
+                <a:latin typeface="Calibri"/>
+              </a:rPr>
+              <a:t> Es el concepto que más les sirve porque está bajo su control profesional.</a:t>
+            </a:r>
+          </a:p>
+          <a:p>
+            <a:pPr>
+              <a:spcAft>
+                <a:spcPts val="800"/>
+              </a:spcAft>
+            </a:pPr>
+            <a:r>
+              <a:rPr sz="2000" b="0" i="0">
+                <a:solidFill>
+                  <a:srgbClr val="333333"/>
+                </a:solidFill>
+                <a:latin typeface="Calibri"/>
+              </a:rPr>
+              <a:t>–   Cuando una nueva versión de una aplicación —o de un sistema operativo— deja de funcionar en dispositivos que servían, el software convierte en basura un aparato que estaba bien.</a:t>
+            </a:r>
+          </a:p>
+          <a:p>
+            <a:pPr>
+              <a:spcAft>
+                <a:spcPts val="800"/>
+              </a:spcAft>
+            </a:pPr>
+            <a:r>
+              <a:rPr sz="2000" b="0" i="0">
+                <a:solidFill>
+                  <a:srgbClr val="333333"/>
+                </a:solidFill>
+                <a:latin typeface="Calibri"/>
+              </a:rPr>
+              <a:t>–   No hace falta discutir si hay intención: el efecto es material y medible.</a:t>
+            </a:r>
+          </a:p>
+          <a:p>
+            <a:pPr>
+              <a:spcAft>
+                <a:spcPts val="800"/>
+              </a:spcAft>
+            </a:pPr>
+            <a:r>
+              <a:rPr sz="2000" b="0" i="0">
+                <a:solidFill>
+                  <a:srgbClr val="333333"/>
+                </a:solidFill>
+                <a:latin typeface="Calibri"/>
+              </a:rPr>
+              <a:t>–   Y la contracara es una decisión concreta que un equipo de este curso puede tomar: </a:t>
+            </a:r>
+            <a:r>
+              <a:rPr sz="2000" b="1" i="0">
+                <a:solidFill>
+                  <a:srgbClr val="333333"/>
+                </a:solidFill>
+                <a:latin typeface="Calibri"/>
+              </a:rPr>
+              <a:t>sostener el soporte para dispositivos viejos</a:t>
+            </a:r>
+            <a:r>
+              <a:rPr sz="2000" b="0" i="0">
+                <a:solidFill>
+                  <a:srgbClr val="333333"/>
+                </a:solidFill>
+                <a:latin typeface="Calibri"/>
+              </a:rPr>
+              <a:t>, que además es lo correcto para el contexto de la universidad, donde muchos estudiantes trabajan con equipos de varios años.</a:t>
+            </a:r>
+          </a:p>
+        </p:txBody>
+      </p:sp>
+      <p:sp>
+        <p:nvSpPr>
+          <p:cNvPr id="6" name="TextBox 5"/>
+          <p:cNvSpPr txBox="1"/>
+          <p:nvPr/>
+        </p:nvSpPr>
+        <p:spPr>
+          <a:xfrm>
+            <a:off x="11185855" y="6473952"/>
+            <a:ext cx="640080" cy="274320"/>
+          </a:xfrm>
+          <a:prstGeom prst="rect">
+            <a:avLst/>
+          </a:prstGeom>
+          <a:noFill/>
+        </p:spPr>
+        <p:txBody>
+          <a:bodyPr wrap="square">
+            <a:spAutoFit/>
+          </a:bodyPr>
+          <a:lstStyle/>
+          <a:p>
+            <a:pPr algn="r"/>
+            <a:r>
+              <a:rPr sz="1100" b="0" i="0">
+                <a:solidFill>
+                  <a:srgbClr val="666666"/>
+                </a:solidFill>
+                <a:latin typeface="Calibri"/>
+              </a:rPr>
+              <a:t>16</a:t>
+            </a:r>
+          </a:p>
+        </p:txBody>
+      </p:sp>
+    </p:spTree>
+  </p:cSld>
+  <p:clrMapOvr>
+    <a:masterClrMapping/>
+  </p:clrMapOvr>
+</p:sld>
+</file>
+
+<file path=ppt/slides/slide17.xml><?xml version="1.0" encoding="utf-8"?>
+<p:sld xmlns:a="http://schemas.openxmlformats.org/drawingml/2006/main" xmlns:p="http://schemas.openxmlformats.org/presentationml/2006/main" xmlns:r="http://schemas.openxmlformats.org/officeDocument/2006/relationships">
+  <p:cSld>
+    <p:bg>
+      <p:bgPr>
+        <a:solidFill>
+          <a:srgbClr val="FFFFFF"/>
+        </a:solidFill>
+        <a:effectLst/>
+      </p:bgPr>
+    </p:bg>
+    <p:spTree>
+      <p:nvGrpSpPr>
+        <p:cNvPr id="1" name=""/>
+        <p:cNvGrpSpPr/>
+        <p:nvPr/>
+      </p:nvGrpSpPr>
+      <p:grpSpPr/>
+      <p:sp>
+        <p:nvSpPr>
+          <p:cNvPr id="2" name="Rectangle 1"/>
+          <p:cNvSpPr/>
+          <p:nvPr/>
+        </p:nvSpPr>
+        <p:spPr>
+          <a:xfrm>
+            <a:off x="0" y="0"/>
+            <a:ext cx="12191695" cy="960120"/>
+          </a:xfrm>
+          <a:prstGeom prst="rect">
+            <a:avLst/>
+          </a:prstGeom>
+          <a:solidFill>
+            <a:srgbClr val="095292"/>
+          </a:solidFill>
+          <a:ln>
+            <a:noFill/>
+          </a:ln>
+        </p:spPr>
+        <p:style>
+          <a:lnRef idx="1">
+            <a:schemeClr val="accent1"/>
+          </a:lnRef>
+          <a:fillRef idx="3">
+            <a:schemeClr val="accent1"/>
+          </a:fillRef>
+          <a:effectRef idx="2">
+            <a:schemeClr val="accent1"/>
+          </a:effectRef>
+          <a:fontRef idx="minor">
+            <a:schemeClr val="lt1"/>
+          </a:fontRef>
+        </p:style>
+        <p:txBody>
+          <a:bodyPr rtlCol="0" anchor="ctr"/>
+          <a:lstStyle/>
+          <a:p>
+            <a:pPr algn="ctr"/>
+          </a:p>
+        </p:txBody>
+      </p:sp>
+      <p:sp>
+        <p:nvSpPr>
+          <p:cNvPr id="3" name="Rectangle 2"/>
+          <p:cNvSpPr/>
+          <p:nvPr/>
+        </p:nvSpPr>
+        <p:spPr>
+          <a:xfrm>
+            <a:off x="0" y="960120"/>
+            <a:ext cx="12191695" cy="41148"/>
+          </a:xfrm>
+          <a:prstGeom prst="rect">
+            <a:avLst/>
+          </a:prstGeom>
+          <a:solidFill>
+            <a:srgbClr val="FFD000"/>
+          </a:solidFill>
+          <a:ln>
+            <a:noFill/>
+          </a:ln>
+        </p:spPr>
+        <p:style>
+          <a:lnRef idx="1">
+            <a:schemeClr val="accent1"/>
+          </a:lnRef>
+          <a:fillRef idx="3">
+            <a:schemeClr val="accent1"/>
+          </a:fillRef>
+          <a:effectRef idx="2">
+            <a:schemeClr val="accent1"/>
+          </a:effectRef>
+          <a:fontRef idx="minor">
+            <a:schemeClr val="lt1"/>
+          </a:fontRef>
+        </p:style>
+        <p:txBody>
+          <a:bodyPr rtlCol="0" anchor="ctr"/>
+          <a:lstStyle/>
+          <a:p>
+            <a:pPr algn="ctr"/>
+          </a:p>
+        </p:txBody>
+      </p:sp>
+      <p:sp>
+        <p:nvSpPr>
+          <p:cNvPr id="4" name="TextBox 3"/>
+          <p:cNvSpPr txBox="1"/>
+          <p:nvPr/>
+        </p:nvSpPr>
+        <p:spPr>
+          <a:xfrm>
+            <a:off x="457200" y="164592"/>
+            <a:ext cx="11277295" cy="502920"/>
+          </a:xfrm>
+          <a:prstGeom prst="rect">
+            <a:avLst/>
+          </a:prstGeom>
+          <a:noFill/>
+        </p:spPr>
+        <p:txBody>
+          <a:bodyPr wrap="square">
+            <a:spAutoFit/>
+          </a:bodyPr>
+          <a:lstStyle/>
+          <a:p>
+            <a:r>
+              <a:rPr sz="2600" b="1" i="0">
+                <a:solidFill>
+                  <a:srgbClr val="FFFFFF"/>
+                </a:solidFill>
+                <a:latin typeface="Calibri"/>
+              </a:rPr>
+              <a:t>De la conciencia a la decisión: la diapositiva que convierte el tema en ingeniería (1/2)</a:t>
+            </a:r>
+          </a:p>
+        </p:txBody>
+      </p:sp>
+      <p:sp>
+        <p:nvSpPr>
+          <p:cNvPr id="5" name="TextBox 4"/>
+          <p:cNvSpPr txBox="1"/>
+          <p:nvPr/>
+        </p:nvSpPr>
+        <p:spPr>
+          <a:xfrm>
+            <a:off x="457200" y="1170432"/>
+            <a:ext cx="11277295" cy="5230368"/>
+          </a:xfrm>
+          <a:prstGeom prst="rect">
+            <a:avLst/>
+          </a:prstGeom>
+          <a:noFill/>
+        </p:spPr>
+        <p:txBody>
+          <a:bodyPr wrap="square">
+            <a:spAutoFit/>
+          </a:bodyPr>
+          <a:lstStyle/>
+          <a:p>
+            <a:pPr>
+              <a:spcAft>
+                <a:spcPts val="800"/>
+              </a:spcAft>
+            </a:pPr>
+            <a:r>
+              <a:rPr sz="2000" b="0" i="0">
+                <a:solidFill>
+                  <a:srgbClr val="333333"/>
+                </a:solidFill>
+                <a:latin typeface="Calibri"/>
+              </a:rPr>
+              <a:t>–   Esta es la diapositiva que salva la clase de volverse un discurso.</a:t>
+            </a:r>
+          </a:p>
+          <a:p>
+            <a:pPr>
+              <a:spcAft>
+                <a:spcPts val="800"/>
+              </a:spcAft>
+            </a:pPr>
+            <a:r>
+              <a:rPr sz="2000" b="0" i="0">
+                <a:solidFill>
+                  <a:srgbClr val="333333"/>
+                </a:solidFill>
+                <a:latin typeface="Calibri"/>
+              </a:rPr>
+              <a:t>–   Las cinco parejas son decisiones reales de diseño, y en las cinco la versión de la derecha </a:t>
+            </a:r>
+            <a:r>
+              <a:rPr sz="2000" b="1" i="0">
+                <a:solidFill>
+                  <a:srgbClr val="333333"/>
+                </a:solidFill>
+                <a:latin typeface="Calibri"/>
+              </a:rPr>
+              <a:t>cumple la misma función</a:t>
+            </a:r>
+            <a:r>
+              <a:rPr sz="2000" b="0" i="0">
+                <a:solidFill>
+                  <a:srgbClr val="333333"/>
+                </a:solidFill>
+                <a:latin typeface="Calibri"/>
+              </a:rPr>
+              <a:t>.</a:t>
+            </a:r>
+          </a:p>
+          <a:p>
+            <a:pPr>
+              <a:spcAft>
+                <a:spcPts val="800"/>
+              </a:spcAft>
+            </a:pPr>
+            <a:r>
+              <a:rPr sz="2000" b="0" i="0">
+                <a:solidFill>
+                  <a:srgbClr val="333333"/>
+                </a:solidFill>
+                <a:latin typeface="Calibri"/>
+              </a:rPr>
+              <a:t>–   Eso hay que decirlo explícitamente: no se está pidiendo sacrificar calidad por ambiente, se está pidiendo no desperdiciar.</a:t>
+            </a:r>
+          </a:p>
+          <a:p>
+            <a:pPr>
+              <a:spcAft>
+                <a:spcPts val="800"/>
+              </a:spcAft>
+            </a:pPr>
+            <a:r>
+              <a:rPr sz="2000" b="0" i="0">
+                <a:solidFill>
+                  <a:srgbClr val="333333"/>
+                </a:solidFill>
+                <a:latin typeface="Calibri"/>
+              </a:rPr>
+              <a:t>–   La primera —pedir la ubicación cada cinco segundos o cada cinco minutos— es la más fácil de entender y toca batería y red a la vez.</a:t>
+            </a:r>
+          </a:p>
+          <a:p>
+            <a:pPr>
+              <a:spcAft>
+                <a:spcPts val="800"/>
+              </a:spcAft>
+            </a:pPr>
+            <a:r>
+              <a:rPr sz="2000" b="0" i="0">
+                <a:solidFill>
+                  <a:srgbClr val="333333"/>
+                </a:solidFill>
+                <a:latin typeface="Calibri"/>
+              </a:rPr>
+              <a:t>–   La tercera —guardar el resultado en vez de recalcular el reporte completo en cada consulta— es la que más sorprende</a:t>
+            </a:r>
+          </a:p>
+          <a:p>
+            <a:pPr>
+              <a:spcAft>
+                <a:spcPts val="800"/>
+              </a:spcAft>
+            </a:pPr>
+            <a:r>
+              <a:rPr sz="2000" b="0" i="0">
+                <a:solidFill>
+                  <a:srgbClr val="333333"/>
+                </a:solidFill>
+                <a:latin typeface="Calibri"/>
+              </a:rPr>
+              <a:t>–   Porque el estudiante todavía no tiene la intuición de que el cómputo cuesta energía; sirve para conectar con la sesión 7 y con la idea de que la eficiencia no es coquetería de programador.</a:t>
+            </a:r>
+          </a:p>
+          <a:p>
+            <a:pPr>
+              <a:spcAft>
+                <a:spcPts val="800"/>
+              </a:spcAft>
+            </a:pPr>
+            <a:r>
+              <a:rPr sz="2000" b="0" i="0">
+                <a:solidFill>
+                  <a:srgbClr val="333333"/>
+                </a:solidFill>
+                <a:latin typeface="Calibri"/>
+              </a:rPr>
+              <a:t>–   La cuarta —sostener dispositivos viejos— es la de mayor impacto real por lo dicho sobre la fabricación.</a:t>
+            </a:r>
+          </a:p>
+        </p:txBody>
+      </p:sp>
+      <p:sp>
+        <p:nvSpPr>
+          <p:cNvPr id="6" name="TextBox 5"/>
+          <p:cNvSpPr txBox="1"/>
+          <p:nvPr/>
+        </p:nvSpPr>
+        <p:spPr>
+          <a:xfrm>
+            <a:off x="11185855" y="6473952"/>
+            <a:ext cx="640080" cy="274320"/>
+          </a:xfrm>
+          <a:prstGeom prst="rect">
+            <a:avLst/>
+          </a:prstGeom>
+          <a:noFill/>
+        </p:spPr>
+        <p:txBody>
+          <a:bodyPr wrap="square">
+            <a:spAutoFit/>
+          </a:bodyPr>
+          <a:lstStyle/>
+          <a:p>
+            <a:pPr algn="r"/>
+            <a:r>
+              <a:rPr sz="1100" b="0" i="0">
+                <a:solidFill>
+                  <a:srgbClr val="666666"/>
+                </a:solidFill>
+                <a:latin typeface="Calibri"/>
+              </a:rPr>
+              <a:t>17</a:t>
+            </a:r>
+          </a:p>
+        </p:txBody>
+      </p:sp>
+    </p:spTree>
+  </p:cSld>
+  <p:clrMapOvr>
+    <a:masterClrMapping/>
+  </p:clrMapOvr>
+</p:sld>
+</file>
+
+<file path=ppt/slides/slide18.xml><?xml version="1.0" encoding="utf-8"?>
+<p:sld xmlns:a="http://schemas.openxmlformats.org/drawingml/2006/main" xmlns:p="http://schemas.openxmlformats.org/presentationml/2006/main" xmlns:r="http://schemas.openxmlformats.org/officeDocument/2006/relationships">
+  <p:cSld>
+    <p:bg>
+      <p:bgPr>
+        <a:solidFill>
+          <a:srgbClr val="FFFFFF"/>
+        </a:solidFill>
+        <a:effectLst/>
+      </p:bgPr>
+    </p:bg>
+    <p:spTree>
+      <p:nvGrpSpPr>
+        <p:cNvPr id="1" name=""/>
+        <p:cNvGrpSpPr/>
+        <p:nvPr/>
+      </p:nvGrpSpPr>
+      <p:grpSpPr/>
+      <p:sp>
+        <p:nvSpPr>
+          <p:cNvPr id="2" name="Rectangle 1"/>
+          <p:cNvSpPr/>
+          <p:nvPr/>
+        </p:nvSpPr>
+        <p:spPr>
+          <a:xfrm>
+            <a:off x="0" y="0"/>
+            <a:ext cx="12191695" cy="960120"/>
+          </a:xfrm>
+          <a:prstGeom prst="rect">
+            <a:avLst/>
+          </a:prstGeom>
+          <a:solidFill>
+            <a:srgbClr val="095292"/>
+          </a:solidFill>
+          <a:ln>
+            <a:noFill/>
+          </a:ln>
+        </p:spPr>
+        <p:style>
+          <a:lnRef idx="1">
+            <a:schemeClr val="accent1"/>
+          </a:lnRef>
+          <a:fillRef idx="3">
+            <a:schemeClr val="accent1"/>
+          </a:fillRef>
+          <a:effectRef idx="2">
+            <a:schemeClr val="accent1"/>
+          </a:effectRef>
+          <a:fontRef idx="minor">
+            <a:schemeClr val="lt1"/>
+          </a:fontRef>
+        </p:style>
+        <p:txBody>
+          <a:bodyPr rtlCol="0" anchor="ctr"/>
+          <a:lstStyle/>
+          <a:p>
+            <a:pPr algn="ctr"/>
+          </a:p>
+        </p:txBody>
+      </p:sp>
+      <p:sp>
+        <p:nvSpPr>
+          <p:cNvPr id="3" name="Rectangle 2"/>
+          <p:cNvSpPr/>
+          <p:nvPr/>
+        </p:nvSpPr>
+        <p:spPr>
+          <a:xfrm>
+            <a:off x="0" y="960120"/>
+            <a:ext cx="12191695" cy="41148"/>
+          </a:xfrm>
+          <a:prstGeom prst="rect">
+            <a:avLst/>
+          </a:prstGeom>
+          <a:solidFill>
+            <a:srgbClr val="FFD000"/>
+          </a:solidFill>
+          <a:ln>
+            <a:noFill/>
+          </a:ln>
+        </p:spPr>
+        <p:style>
+          <a:lnRef idx="1">
+            <a:schemeClr val="accent1"/>
+          </a:lnRef>
+          <a:fillRef idx="3">
+            <a:schemeClr val="accent1"/>
+          </a:fillRef>
+          <a:effectRef idx="2">
+            <a:schemeClr val="accent1"/>
+          </a:effectRef>
+          <a:fontRef idx="minor">
+            <a:schemeClr val="lt1"/>
+          </a:fontRef>
+        </p:style>
+        <p:txBody>
+          <a:bodyPr rtlCol="0" anchor="ctr"/>
+          <a:lstStyle/>
+          <a:p>
+            <a:pPr algn="ctr"/>
+          </a:p>
+        </p:txBody>
+      </p:sp>
+      <p:sp>
+        <p:nvSpPr>
+          <p:cNvPr id="4" name="TextBox 3"/>
+          <p:cNvSpPr txBox="1"/>
+          <p:nvPr/>
+        </p:nvSpPr>
+        <p:spPr>
+          <a:xfrm>
+            <a:off x="457200" y="164592"/>
+            <a:ext cx="11277295" cy="502920"/>
+          </a:xfrm>
+          <a:prstGeom prst="rect">
+            <a:avLst/>
+          </a:prstGeom>
+          <a:noFill/>
+        </p:spPr>
+        <p:txBody>
+          <a:bodyPr wrap="square">
+            <a:spAutoFit/>
+          </a:bodyPr>
+          <a:lstStyle/>
+          <a:p>
+            <a:r>
+              <a:rPr sz="2600" b="1" i="0">
+                <a:solidFill>
+                  <a:srgbClr val="FFFFFF"/>
+                </a:solidFill>
+                <a:latin typeface="Calibri"/>
+              </a:rPr>
+              <a:t>De la conciencia a la decisión: la diapositiva que convierte el tema en ingeniería (2/2)</a:t>
+            </a:r>
+          </a:p>
+        </p:txBody>
+      </p:sp>
+      <p:sp>
+        <p:nvSpPr>
+          <p:cNvPr id="5" name="TextBox 4"/>
+          <p:cNvSpPr txBox="1"/>
+          <p:nvPr/>
+        </p:nvSpPr>
+        <p:spPr>
+          <a:xfrm>
+            <a:off x="457200" y="1170432"/>
+            <a:ext cx="11277295" cy="5230368"/>
+          </a:xfrm>
+          <a:prstGeom prst="rect">
+            <a:avLst/>
+          </a:prstGeom>
+          <a:noFill/>
+        </p:spPr>
+        <p:txBody>
+          <a:bodyPr wrap="square">
+            <a:spAutoFit/>
+          </a:bodyPr>
+          <a:lstStyle/>
+          <a:p>
+            <a:pPr>
+              <a:spcAft>
+                <a:spcPts val="800"/>
+              </a:spcAft>
+            </a:pPr>
+            <a:r>
+              <a:rPr sz="2000" b="0" i="0">
+                <a:solidFill>
+                  <a:srgbClr val="333333"/>
+                </a:solidFill>
+                <a:latin typeface="Calibri"/>
+              </a:rPr>
+              <a:t>–   Y la quinta es la más contemporánea y hay que decirla sin miedo: </a:t>
+            </a:r>
+            <a:r>
+              <a:rPr sz="2000" b="1" i="0">
+                <a:solidFill>
+                  <a:srgbClr val="333333"/>
+                </a:solidFill>
+                <a:latin typeface="Calibri"/>
+              </a:rPr>
+              <a:t>agregarle un asistente de IA a una función que resolvía una condición simple gasta energía en cada llamada, para siempre</a:t>
+            </a:r>
+            <a:r>
+              <a:rPr sz="2000" b="0" i="0">
+                <a:solidFill>
+                  <a:srgbClr val="333333"/>
+                </a:solidFill>
+                <a:latin typeface="Calibri"/>
+              </a:rPr>
+              <a:t>.</a:t>
+            </a:r>
+          </a:p>
+          <a:p>
+            <a:pPr>
+              <a:spcAft>
+                <a:spcPts val="800"/>
+              </a:spcAft>
+            </a:pPr>
+            <a:r>
+              <a:rPr sz="2000" b="0" i="0">
+                <a:solidFill>
+                  <a:srgbClr val="333333"/>
+                </a:solidFill>
+                <a:latin typeface="Calibri"/>
+              </a:rPr>
+              <a:t>–   Es una decisión de arquitectura, y hoy se toma con frecuencia por moda.</a:t>
+            </a:r>
+          </a:p>
+          <a:p>
+            <a:pPr>
+              <a:spcAft>
+                <a:spcPts val="800"/>
+              </a:spcAft>
+            </a:pPr>
+            <a:r>
+              <a:rPr sz="2000" b="0" i="0">
+                <a:solidFill>
+                  <a:srgbClr val="333333"/>
+                </a:solidFill>
+                <a:latin typeface="Calibri"/>
+              </a:rPr>
+              <a:t>–   El método de cinco pasos es el del taller.</a:t>
+            </a:r>
+          </a:p>
+          <a:p>
+            <a:pPr>
+              <a:spcAft>
+                <a:spcPts val="800"/>
+              </a:spcAft>
+            </a:pPr>
+            <a:r>
+              <a:rPr sz="2000" b="0" i="0">
+                <a:solidFill>
+                  <a:srgbClr val="333333"/>
+                </a:solidFill>
+                <a:latin typeface="Calibri"/>
+              </a:rPr>
+              <a:t>–   El paso 2 —buscar lo que se repite— es el que enseña a estimar: lo que ocurre una vez no mueve la aguja, lo que ocurre mil veces al día sí.</a:t>
+            </a:r>
+          </a:p>
+          <a:p>
+            <a:pPr>
+              <a:spcAft>
+                <a:spcPts val="800"/>
+              </a:spcAft>
+            </a:pPr>
+            <a:r>
+              <a:rPr sz="2000" b="0" i="0">
+                <a:solidFill>
+                  <a:srgbClr val="333333"/>
+                </a:solidFill>
+                <a:latin typeface="Calibri"/>
+              </a:rPr>
+              <a:t>–   Y el paso 5 —definir un indicador medible— es el que separa una intención de una decisión de ingeniería.</a:t>
+            </a:r>
+          </a:p>
+          <a:p>
+            <a:pPr>
+              <a:spcAft>
+                <a:spcPts val="800"/>
+              </a:spcAft>
+            </a:pPr>
+            <a:r>
+              <a:rPr sz="2000" b="0" i="0">
+                <a:solidFill>
+                  <a:srgbClr val="333333"/>
+                </a:solidFill>
+                <a:latin typeface="Calibri"/>
+              </a:rPr>
+              <a:t>–   «Vamos a ser sostenibles» no se puede verificar</a:t>
+            </a:r>
+          </a:p>
+          <a:p>
+            <a:pPr>
+              <a:spcAft>
+                <a:spcPts val="800"/>
+              </a:spcAft>
+            </a:pPr>
+            <a:r>
+              <a:rPr sz="2000" b="0" i="0">
+                <a:solidFill>
+                  <a:srgbClr val="333333"/>
+                </a:solidFill>
+                <a:latin typeface="Calibri"/>
+              </a:rPr>
+              <a:t>–   «vamos a mover menos de 200 KB por consulta» sí, y en la Clase 16 se puede mirar si se cumplió.</a:t>
+            </a:r>
+          </a:p>
+        </p:txBody>
+      </p:sp>
+      <p:sp>
+        <p:nvSpPr>
+          <p:cNvPr id="6" name="TextBox 5"/>
+          <p:cNvSpPr txBox="1"/>
+          <p:nvPr/>
+        </p:nvSpPr>
+        <p:spPr>
+          <a:xfrm>
+            <a:off x="11185855" y="6473952"/>
+            <a:ext cx="640080" cy="274320"/>
+          </a:xfrm>
+          <a:prstGeom prst="rect">
+            <a:avLst/>
+          </a:prstGeom>
+          <a:noFill/>
+        </p:spPr>
+        <p:txBody>
+          <a:bodyPr wrap="square">
+            <a:spAutoFit/>
+          </a:bodyPr>
+          <a:lstStyle/>
+          <a:p>
+            <a:pPr algn="r"/>
+            <a:r>
+              <a:rPr sz="1100" b="0" i="0">
+                <a:solidFill>
+                  <a:srgbClr val="666666"/>
+                </a:solidFill>
+                <a:latin typeface="Calibri"/>
+              </a:rPr>
+              <a:t>18</a:t>
+            </a:r>
+          </a:p>
+        </p:txBody>
+      </p:sp>
+    </p:spTree>
+  </p:cSld>
+  <p:clrMapOvr>
+    <a:masterClrMapping/>
+  </p:clrMapOvr>
+</p:sld>
+</file>
+
+<file path=ppt/slides/slide19.xml><?xml version="1.0" encoding="utf-8"?>
+<p:sld xmlns:a="http://schemas.openxmlformats.org/drawingml/2006/main" xmlns:p="http://schemas.openxmlformats.org/presentationml/2006/main" xmlns:r="http://schemas.openxmlformats.org/officeDocument/2006/relationships">
+  <p:cSld>
+    <p:bg>
+      <p:bgPr>
+        <a:solidFill>
+          <a:srgbClr val="FFFFFF"/>
+        </a:solidFill>
+        <a:effectLst/>
+      </p:bgPr>
+    </p:bg>
+    <p:spTree>
+      <p:nvGrpSpPr>
+        <p:cNvPr id="1" name=""/>
+        <p:cNvGrpSpPr/>
+        <p:nvPr/>
+      </p:nvGrpSpPr>
+      <p:grpSpPr/>
+      <p:sp>
+        <p:nvSpPr>
+          <p:cNvPr id="2" name="Rectangle 1"/>
+          <p:cNvSpPr/>
+          <p:nvPr/>
+        </p:nvSpPr>
+        <p:spPr>
+          <a:xfrm>
+            <a:off x="0" y="0"/>
+            <a:ext cx="12191695" cy="960120"/>
+          </a:xfrm>
+          <a:prstGeom prst="rect">
+            <a:avLst/>
+          </a:prstGeom>
+          <a:solidFill>
+            <a:srgbClr val="095292"/>
+          </a:solidFill>
+          <a:ln>
+            <a:noFill/>
+          </a:ln>
+        </p:spPr>
+        <p:style>
+          <a:lnRef idx="1">
+            <a:schemeClr val="accent1"/>
+          </a:lnRef>
+          <a:fillRef idx="3">
+            <a:schemeClr val="accent1"/>
+          </a:fillRef>
+          <a:effectRef idx="2">
+            <a:schemeClr val="accent1"/>
+          </a:effectRef>
+          <a:fontRef idx="minor">
+            <a:schemeClr val="lt1"/>
+          </a:fontRef>
+        </p:style>
+        <p:txBody>
+          <a:bodyPr rtlCol="0" anchor="ctr"/>
+          <a:lstStyle/>
+          <a:p>
+            <a:pPr algn="ctr"/>
+          </a:p>
+        </p:txBody>
+      </p:sp>
+      <p:sp>
+        <p:nvSpPr>
+          <p:cNvPr id="3" name="Rectangle 2"/>
+          <p:cNvSpPr/>
+          <p:nvPr/>
+        </p:nvSpPr>
+        <p:spPr>
+          <a:xfrm>
+            <a:off x="0" y="960120"/>
+            <a:ext cx="12191695" cy="41148"/>
+          </a:xfrm>
+          <a:prstGeom prst="rect">
+            <a:avLst/>
+          </a:prstGeom>
+          <a:solidFill>
+            <a:srgbClr val="FFD000"/>
+          </a:solidFill>
+          <a:ln>
+            <a:noFill/>
+          </a:ln>
+        </p:spPr>
+        <p:style>
+          <a:lnRef idx="1">
+            <a:schemeClr val="accent1"/>
+          </a:lnRef>
+          <a:fillRef idx="3">
+            <a:schemeClr val="accent1"/>
+          </a:fillRef>
+          <a:effectRef idx="2">
+            <a:schemeClr val="accent1"/>
+          </a:effectRef>
+          <a:fontRef idx="minor">
+            <a:schemeClr val="lt1"/>
+          </a:fontRef>
+        </p:style>
+        <p:txBody>
+          <a:bodyPr rtlCol="0" anchor="ctr"/>
+          <a:lstStyle/>
+          <a:p>
+            <a:pPr algn="ctr"/>
+          </a:p>
+        </p:txBody>
+      </p:sp>
+      <p:sp>
+        <p:nvSpPr>
+          <p:cNvPr id="4" name="TextBox 3"/>
+          <p:cNvSpPr txBox="1"/>
+          <p:nvPr/>
+        </p:nvSpPr>
+        <p:spPr>
+          <a:xfrm>
+            <a:off x="457200" y="164592"/>
+            <a:ext cx="11277295" cy="502920"/>
+          </a:xfrm>
+          <a:prstGeom prst="rect">
+            <a:avLst/>
+          </a:prstGeom>
+          <a:noFill/>
+        </p:spPr>
+        <p:txBody>
+          <a:bodyPr wrap="square">
+            <a:spAutoFit/>
+          </a:bodyPr>
+          <a:lstStyle/>
+          <a:p>
+            <a:r>
+              <a:rPr sz="2600" b="1" i="0">
+                <a:solidFill>
+                  <a:srgbClr val="FFFFFF"/>
+                </a:solidFill>
+                <a:latin typeface="Calibri"/>
+              </a:rPr>
+              <a:t>Colombia, y la honestidad con las cifras (1/2)</a:t>
+            </a:r>
+          </a:p>
+        </p:txBody>
+      </p:sp>
+      <p:sp>
+        <p:nvSpPr>
+          <p:cNvPr id="5" name="TextBox 4"/>
+          <p:cNvSpPr txBox="1"/>
+          <p:nvPr/>
+        </p:nvSpPr>
+        <p:spPr>
+          <a:xfrm>
+            <a:off x="457200" y="1170432"/>
+            <a:ext cx="11277295" cy="5230368"/>
+          </a:xfrm>
+          <a:prstGeom prst="rect">
+            <a:avLst/>
+          </a:prstGeom>
+          <a:noFill/>
+        </p:spPr>
+        <p:txBody>
+          <a:bodyPr wrap="square">
+            <a:spAutoFit/>
+          </a:bodyPr>
+          <a:lstStyle/>
+          <a:p>
+            <a:pPr>
+              <a:spcAft>
+                <a:spcPts val="800"/>
+              </a:spcAft>
+            </a:pPr>
+            <a:r>
+              <a:rPr sz="2000" b="0" i="0">
+                <a:solidFill>
+                  <a:srgbClr val="333333"/>
+                </a:solidFill>
+                <a:latin typeface="Calibri"/>
+              </a:rPr>
+              <a:t>–   El dato local más útil es la composición de la matriz eléctrica.</a:t>
+            </a:r>
+          </a:p>
+          <a:p>
+            <a:pPr>
+              <a:spcAft>
+                <a:spcPts val="800"/>
+              </a:spcAft>
+            </a:pPr>
+            <a:r>
+              <a:rPr sz="2000" b="0" i="0">
+                <a:solidFill>
+                  <a:srgbClr val="333333"/>
+                </a:solidFill>
+                <a:latin typeface="Calibri"/>
+              </a:rPr>
+              <a:t>–   Una parte importante de la generación en Colombia es hidráulica, lo que significa que un kilovatio-hora consumido aquí tiene un factor de emisiones distinto —menor— que en un país con generación a carbón.</a:t>
+            </a:r>
+          </a:p>
+          <a:p>
+            <a:pPr>
+              <a:spcAft>
+                <a:spcPts val="800"/>
+              </a:spcAft>
+            </a:pPr>
+            <a:r>
+              <a:rPr sz="2000" b="0" i="0">
+                <a:solidFill>
+                  <a:srgbClr val="333333"/>
+                </a:solidFill>
+                <a:latin typeface="Calibri"/>
+              </a:rPr>
+              <a:t>–   La consecuencia metodológica es la que hay que enseñar: </a:t>
+            </a:r>
+            <a:r>
+              <a:rPr sz="2000" b="1" i="0">
+                <a:solidFill>
+                  <a:srgbClr val="333333"/>
+                </a:solidFill>
+                <a:latin typeface="Calibri"/>
+              </a:rPr>
+              <a:t>no se copian factores de emisión de otro país</a:t>
+            </a:r>
+            <a:r>
+              <a:rPr sz="2000" b="0" i="0">
+                <a:solidFill>
+                  <a:srgbClr val="333333"/>
+                </a:solidFill>
+                <a:latin typeface="Calibri"/>
+              </a:rPr>
+              <a:t>; se usa el factor local, y el operador del sistema (XM) publica datos de generación.</a:t>
+            </a:r>
+          </a:p>
+          <a:p>
+            <a:pPr>
+              <a:spcAft>
+                <a:spcPts val="800"/>
+              </a:spcAft>
+            </a:pPr>
+            <a:r>
+              <a:rPr sz="2000" b="0" i="0">
+                <a:solidFill>
+                  <a:srgbClr val="333333"/>
+                </a:solidFill>
+                <a:latin typeface="Calibri"/>
+              </a:rPr>
+              <a:t>–   Un equipo que cite una fuente colombiana en vez de un blog extranjero ya está haciendo ingeniería.</a:t>
+            </a:r>
+          </a:p>
+          <a:p>
+            <a:pPr>
+              <a:spcAft>
+                <a:spcPts val="800"/>
+              </a:spcAft>
+            </a:pPr>
+            <a:r>
+              <a:rPr sz="2000" b="0" i="0">
+                <a:solidFill>
+                  <a:srgbClr val="333333"/>
+                </a:solidFill>
+                <a:latin typeface="Calibri"/>
+              </a:rPr>
+              <a:t>–   La contracara es igual de importante y menos conocida: cuando el fenómeno de El Niño reduce los aportes a los embalses, entran las plantas térmicas y el factor de emisiones del país sube.</a:t>
+            </a:r>
+          </a:p>
+          <a:p>
+            <a:pPr>
+              <a:spcAft>
+                <a:spcPts val="800"/>
+              </a:spcAft>
+            </a:pPr>
+            <a:r>
+              <a:rPr sz="2000" b="0" i="0">
+                <a:solidFill>
+                  <a:srgbClr val="333333"/>
+                </a:solidFill>
+                <a:latin typeface="Calibri"/>
+              </a:rPr>
+              <a:t>–   Es decir, </a:t>
+            </a:r>
+            <a:r>
+              <a:rPr sz="2000" b="1" i="0">
+                <a:solidFill>
+                  <a:srgbClr val="333333"/>
+                </a:solidFill>
+                <a:latin typeface="Calibri"/>
+              </a:rPr>
+              <a:t>la misma aplicación, sin cambiar una línea de código, emite más en un año seco</a:t>
+            </a:r>
+            <a:r>
+              <a:rPr sz="2000" b="0" i="0">
+                <a:solidFill>
+                  <a:srgbClr val="333333"/>
+                </a:solidFill>
+                <a:latin typeface="Calibri"/>
+              </a:rPr>
+              <a:t>.</a:t>
+            </a:r>
+          </a:p>
+          <a:p>
+            <a:pPr>
+              <a:spcAft>
+                <a:spcPts val="800"/>
+              </a:spcAft>
+            </a:pPr>
+            <a:r>
+              <a:rPr sz="2000" b="0" i="0">
+                <a:solidFill>
+                  <a:srgbClr val="333333"/>
+                </a:solidFill>
+                <a:latin typeface="Calibri"/>
+              </a:rPr>
+              <a:t>–   Eso enseña algo que vale para todo el curso: la huella de un sistema no es una propiedad del sistema, es una propiedad del sistema en su contexto.</a:t>
+            </a:r>
+          </a:p>
+          <a:p>
+            <a:pPr>
+              <a:spcAft>
+                <a:spcPts val="800"/>
+              </a:spcAft>
+            </a:pPr>
+            <a:r>
+              <a:rPr sz="2000" b="0" i="0">
+                <a:solidFill>
+                  <a:srgbClr val="333333"/>
+                </a:solidFill>
+                <a:latin typeface="Calibri"/>
+              </a:rPr>
+              <a:t>–   La diapositiva de las trampas es la más importante para el rigor y conviene dedicarle tiempo real.</a:t>
+            </a:r>
+          </a:p>
+        </p:txBody>
+      </p:sp>
+      <p:sp>
+        <p:nvSpPr>
+          <p:cNvPr id="6" name="TextBox 5"/>
+          <p:cNvSpPr txBox="1"/>
+          <p:nvPr/>
+        </p:nvSpPr>
+        <p:spPr>
+          <a:xfrm>
+            <a:off x="11185855" y="6473952"/>
+            <a:ext cx="640080" cy="274320"/>
+          </a:xfrm>
+          <a:prstGeom prst="rect">
+            <a:avLst/>
+          </a:prstGeom>
+          <a:noFill/>
+        </p:spPr>
+        <p:txBody>
+          <a:bodyPr wrap="square">
+            <a:spAutoFit/>
+          </a:bodyPr>
+          <a:lstStyle/>
+          <a:p>
+            <a:pPr algn="r"/>
+            <a:r>
+              <a:rPr sz="1100" b="0" i="0">
+                <a:solidFill>
+                  <a:srgbClr val="666666"/>
+                </a:solidFill>
+                <a:latin typeface="Calibri"/>
+              </a:rPr>
+              <a:t>19</a:t>
             </a:r>
           </a:p>
         </p:txBody>
@@ -7835,6 +8061,3209 @@
                 <a:latin typeface="Calibri"/>
               </a:rPr>
               <a:t>2</a:t>
+            </a:r>
+          </a:p>
+        </p:txBody>
+      </p:sp>
+    </p:spTree>
+  </p:cSld>
+  <p:clrMapOvr>
+    <a:masterClrMapping/>
+  </p:clrMapOvr>
+</p:sld>
+</file>
+
+<file path=ppt/slides/slide20.xml><?xml version="1.0" encoding="utf-8"?>
+<p:sld xmlns:a="http://schemas.openxmlformats.org/drawingml/2006/main" xmlns:p="http://schemas.openxmlformats.org/presentationml/2006/main" xmlns:r="http://schemas.openxmlformats.org/officeDocument/2006/relationships">
+  <p:cSld>
+    <p:bg>
+      <p:bgPr>
+        <a:solidFill>
+          <a:srgbClr val="FFFFFF"/>
+        </a:solidFill>
+        <a:effectLst/>
+      </p:bgPr>
+    </p:bg>
+    <p:spTree>
+      <p:nvGrpSpPr>
+        <p:cNvPr id="1" name=""/>
+        <p:cNvGrpSpPr/>
+        <p:nvPr/>
+      </p:nvGrpSpPr>
+      <p:grpSpPr/>
+      <p:sp>
+        <p:nvSpPr>
+          <p:cNvPr id="2" name="Rectangle 1"/>
+          <p:cNvSpPr/>
+          <p:nvPr/>
+        </p:nvSpPr>
+        <p:spPr>
+          <a:xfrm>
+            <a:off x="0" y="0"/>
+            <a:ext cx="12191695" cy="960120"/>
+          </a:xfrm>
+          <a:prstGeom prst="rect">
+            <a:avLst/>
+          </a:prstGeom>
+          <a:solidFill>
+            <a:srgbClr val="095292"/>
+          </a:solidFill>
+          <a:ln>
+            <a:noFill/>
+          </a:ln>
+        </p:spPr>
+        <p:style>
+          <a:lnRef idx="1">
+            <a:schemeClr val="accent1"/>
+          </a:lnRef>
+          <a:fillRef idx="3">
+            <a:schemeClr val="accent1"/>
+          </a:fillRef>
+          <a:effectRef idx="2">
+            <a:schemeClr val="accent1"/>
+          </a:effectRef>
+          <a:fontRef idx="minor">
+            <a:schemeClr val="lt1"/>
+          </a:fontRef>
+        </p:style>
+        <p:txBody>
+          <a:bodyPr rtlCol="0" anchor="ctr"/>
+          <a:lstStyle/>
+          <a:p>
+            <a:pPr algn="ctr"/>
+          </a:p>
+        </p:txBody>
+      </p:sp>
+      <p:sp>
+        <p:nvSpPr>
+          <p:cNvPr id="3" name="Rectangle 2"/>
+          <p:cNvSpPr/>
+          <p:nvPr/>
+        </p:nvSpPr>
+        <p:spPr>
+          <a:xfrm>
+            <a:off x="0" y="960120"/>
+            <a:ext cx="12191695" cy="41148"/>
+          </a:xfrm>
+          <a:prstGeom prst="rect">
+            <a:avLst/>
+          </a:prstGeom>
+          <a:solidFill>
+            <a:srgbClr val="FFD000"/>
+          </a:solidFill>
+          <a:ln>
+            <a:noFill/>
+          </a:ln>
+        </p:spPr>
+        <p:style>
+          <a:lnRef idx="1">
+            <a:schemeClr val="accent1"/>
+          </a:lnRef>
+          <a:fillRef idx="3">
+            <a:schemeClr val="accent1"/>
+          </a:fillRef>
+          <a:effectRef idx="2">
+            <a:schemeClr val="accent1"/>
+          </a:effectRef>
+          <a:fontRef idx="minor">
+            <a:schemeClr val="lt1"/>
+          </a:fontRef>
+        </p:style>
+        <p:txBody>
+          <a:bodyPr rtlCol="0" anchor="ctr"/>
+          <a:lstStyle/>
+          <a:p>
+            <a:pPr algn="ctr"/>
+          </a:p>
+        </p:txBody>
+      </p:sp>
+      <p:sp>
+        <p:nvSpPr>
+          <p:cNvPr id="4" name="TextBox 3"/>
+          <p:cNvSpPr txBox="1"/>
+          <p:nvPr/>
+        </p:nvSpPr>
+        <p:spPr>
+          <a:xfrm>
+            <a:off x="457200" y="164592"/>
+            <a:ext cx="11277295" cy="502920"/>
+          </a:xfrm>
+          <a:prstGeom prst="rect">
+            <a:avLst/>
+          </a:prstGeom>
+          <a:noFill/>
+        </p:spPr>
+        <p:txBody>
+          <a:bodyPr wrap="square">
+            <a:spAutoFit/>
+          </a:bodyPr>
+          <a:lstStyle/>
+          <a:p>
+            <a:r>
+              <a:rPr sz="2600" b="1" i="0">
+                <a:solidFill>
+                  <a:srgbClr val="FFFFFF"/>
+                </a:solidFill>
+                <a:latin typeface="Calibri"/>
+              </a:rPr>
+              <a:t>Colombia, y la honestidad con las cifras (2/2)</a:t>
+            </a:r>
+          </a:p>
+        </p:txBody>
+      </p:sp>
+      <p:sp>
+        <p:nvSpPr>
+          <p:cNvPr id="5" name="TextBox 4"/>
+          <p:cNvSpPr txBox="1"/>
+          <p:nvPr/>
+        </p:nvSpPr>
+        <p:spPr>
+          <a:xfrm>
+            <a:off x="457200" y="1170432"/>
+            <a:ext cx="11277295" cy="5230368"/>
+          </a:xfrm>
+          <a:prstGeom prst="rect">
+            <a:avLst/>
+          </a:prstGeom>
+          <a:noFill/>
+        </p:spPr>
+        <p:txBody>
+          <a:bodyPr wrap="square">
+            <a:spAutoFit/>
+          </a:bodyPr>
+          <a:lstStyle/>
+          <a:p>
+            <a:pPr>
+              <a:spcAft>
+                <a:spcPts val="800"/>
+              </a:spcAft>
+            </a:pPr>
+            <a:r>
+              <a:rPr sz="1900" b="0" i="0">
+                <a:solidFill>
+                  <a:srgbClr val="333333"/>
+                </a:solidFill>
+                <a:latin typeface="Calibri"/>
+              </a:rPr>
+              <a:t>–   Las cifras ambientales del sector digital son un campo donde circulan números espectaculares sin alcance definido: litros de agua por consulta a un modelo de lenguaje, gramos de CO₂ por búsqueda, porcentajes del consumo mundial de electricidad.</a:t>
+            </a:r>
+          </a:p>
+          <a:p>
+            <a:pPr>
+              <a:spcAft>
+                <a:spcPts val="800"/>
+              </a:spcAft>
+            </a:pPr>
+            <a:r>
+              <a:rPr sz="1900" b="0" i="0">
+                <a:solidFill>
+                  <a:srgbClr val="333333"/>
+                </a:solidFill>
+                <a:latin typeface="Calibri"/>
+              </a:rPr>
+              <a:t>–   Muchos provienen de estimaciones legítimas pero con supuestos muy específicos, y se citan luego como hechos universales.</a:t>
+            </a:r>
+          </a:p>
+          <a:p>
+            <a:pPr>
+              <a:spcAft>
+                <a:spcPts val="800"/>
+              </a:spcAft>
+            </a:pPr>
+            <a:r>
+              <a:rPr sz="1900" b="0" i="0">
+                <a:solidFill>
+                  <a:srgbClr val="333333"/>
+                </a:solidFill>
+                <a:latin typeface="Calibri"/>
+              </a:rPr>
+              <a:t>–   La regla del curso a partir de hoy es simple y se aplica en la rúbrica: </a:t>
+            </a:r>
+            <a:r>
+              <a:rPr sz="1900" b="1" i="0">
+                <a:solidFill>
+                  <a:srgbClr val="333333"/>
+                </a:solidFill>
+                <a:latin typeface="Calibri"/>
+              </a:rPr>
+              <a:t>cifra con fuente, año y alcance, o no va</a:t>
+            </a:r>
+            <a:r>
+              <a:rPr sz="1900" b="0" i="0">
+                <a:solidFill>
+                  <a:srgbClr val="333333"/>
+                </a:solidFill>
+                <a:latin typeface="Calibri"/>
+              </a:rPr>
+              <a:t>.</a:t>
+            </a:r>
+          </a:p>
+          <a:p>
+            <a:pPr>
+              <a:spcAft>
+                <a:spcPts val="800"/>
+              </a:spcAft>
+            </a:pPr>
+            <a:r>
+              <a:rPr sz="1900" b="0" i="0">
+                <a:solidFill>
+                  <a:srgbClr val="333333"/>
+                </a:solidFill>
+                <a:latin typeface="Calibri"/>
+              </a:rPr>
+              <a:t>–   Y hay que decir en voz alta lo que sí se puede afirmar sin exagerar: que la huella existe, que tiene cuatro etapas, que se puede reducir con decisiones de diseño y que casi nadie la mide.</a:t>
+            </a:r>
+          </a:p>
+          <a:p>
+            <a:pPr>
+              <a:spcAft>
+                <a:spcPts val="800"/>
+              </a:spcAft>
+            </a:pPr>
+            <a:r>
+              <a:rPr sz="1900" b="0" i="0">
+                <a:solidFill>
+                  <a:srgbClr val="333333"/>
+                </a:solidFill>
+                <a:latin typeface="Calibri"/>
+              </a:rPr>
+              <a:t>–   Con eso alcanza para trabajar con seriedad, y es mucho más defendible que un número impresionante mal citado.</a:t>
+            </a:r>
+          </a:p>
+          <a:p>
+            <a:pPr>
+              <a:spcAft>
+                <a:spcPts val="800"/>
+              </a:spcAft>
+            </a:pPr>
+            <a:r>
+              <a:rPr sz="1900" b="0" i="0">
+                <a:solidFill>
+                  <a:srgbClr val="333333"/>
+                </a:solidFill>
+                <a:latin typeface="Calibri"/>
+              </a:rPr>
+              <a:t>–   Sobre la comparación «lo digital contra el papel»: alguien la va a proponer y la respuesta correcta es que depende del número de usos y de si obliga a comprar dispositivos.</a:t>
+            </a:r>
+          </a:p>
+          <a:p>
+            <a:pPr>
+              <a:spcAft>
+                <a:spcPts val="800"/>
+              </a:spcAft>
+            </a:pPr>
+            <a:r>
+              <a:rPr sz="1900" b="0" i="0">
+                <a:solidFill>
+                  <a:srgbClr val="333333"/>
+                </a:solidFill>
+                <a:latin typeface="Calibri"/>
+              </a:rPr>
+              <a:t>–   Un documento leído una vez en un computador nuevo no gana contra una hoja; el mismo documento leído por trescientas personas en aparatos que ya existen, sí.</a:t>
+            </a:r>
+          </a:p>
+          <a:p>
+            <a:pPr>
+              <a:spcAft>
+                <a:spcPts val="800"/>
+              </a:spcAft>
+            </a:pPr>
+            <a:r>
+              <a:rPr sz="1900" b="0" i="0">
+                <a:solidFill>
+                  <a:srgbClr val="333333"/>
+                </a:solidFill>
+                <a:latin typeface="Calibri"/>
+              </a:rPr>
+              <a:t>–   La lección es que </a:t>
+            </a:r>
+            <a:r>
+              <a:rPr sz="1900" b="1" i="0">
+                <a:solidFill>
+                  <a:srgbClr val="333333"/>
+                </a:solidFill>
+                <a:latin typeface="Calibri"/>
+              </a:rPr>
+              <a:t>comparar sin decir qué se comparó no es un argumento</a:t>
+            </a:r>
+            <a:r>
+              <a:rPr sz="1900" b="0" i="0">
+                <a:solidFill>
+                  <a:srgbClr val="333333"/>
+                </a:solidFill>
+                <a:latin typeface="Calibri"/>
+              </a:rPr>
+              <a:t>.</a:t>
+            </a:r>
+          </a:p>
+        </p:txBody>
+      </p:sp>
+      <p:sp>
+        <p:nvSpPr>
+          <p:cNvPr id="6" name="TextBox 5"/>
+          <p:cNvSpPr txBox="1"/>
+          <p:nvPr/>
+        </p:nvSpPr>
+        <p:spPr>
+          <a:xfrm>
+            <a:off x="11185855" y="6473952"/>
+            <a:ext cx="640080" cy="274320"/>
+          </a:xfrm>
+          <a:prstGeom prst="rect">
+            <a:avLst/>
+          </a:prstGeom>
+          <a:noFill/>
+        </p:spPr>
+        <p:txBody>
+          <a:bodyPr wrap="square">
+            <a:spAutoFit/>
+          </a:bodyPr>
+          <a:lstStyle/>
+          <a:p>
+            <a:pPr algn="r"/>
+            <a:r>
+              <a:rPr sz="1100" b="0" i="0">
+                <a:solidFill>
+                  <a:srgbClr val="666666"/>
+                </a:solidFill>
+                <a:latin typeface="Calibri"/>
+              </a:rPr>
+              <a:t>20</a:t>
+            </a:r>
+          </a:p>
+        </p:txBody>
+      </p:sp>
+    </p:spTree>
+  </p:cSld>
+  <p:clrMapOvr>
+    <a:masterClrMapping/>
+  </p:clrMapOvr>
+</p:sld>
+</file>
+
+<file path=ppt/slides/slide21.xml><?xml version="1.0" encoding="utf-8"?>
+<p:sld xmlns:a="http://schemas.openxmlformats.org/drawingml/2006/main" xmlns:p="http://schemas.openxmlformats.org/presentationml/2006/main" xmlns:r="http://schemas.openxmlformats.org/officeDocument/2006/relationships">
+  <p:cSld>
+    <p:bg>
+      <p:bgPr>
+        <a:solidFill>
+          <a:srgbClr val="FFFFFF"/>
+        </a:solidFill>
+        <a:effectLst/>
+      </p:bgPr>
+    </p:bg>
+    <p:spTree>
+      <p:nvGrpSpPr>
+        <p:cNvPr id="1" name=""/>
+        <p:cNvGrpSpPr/>
+        <p:nvPr/>
+      </p:nvGrpSpPr>
+      <p:grpSpPr/>
+      <p:sp>
+        <p:nvSpPr>
+          <p:cNvPr id="2" name="Rectangle 1"/>
+          <p:cNvSpPr/>
+          <p:nvPr/>
+        </p:nvSpPr>
+        <p:spPr>
+          <a:xfrm>
+            <a:off x="0" y="0"/>
+            <a:ext cx="12191695" cy="1170432"/>
+          </a:xfrm>
+          <a:prstGeom prst="rect">
+            <a:avLst/>
+          </a:prstGeom>
+          <a:solidFill>
+            <a:srgbClr val="095292"/>
+          </a:solidFill>
+          <a:ln>
+            <a:noFill/>
+          </a:ln>
+        </p:spPr>
+        <p:style>
+          <a:lnRef idx="1">
+            <a:schemeClr val="accent1"/>
+          </a:lnRef>
+          <a:fillRef idx="3">
+            <a:schemeClr val="accent1"/>
+          </a:fillRef>
+          <a:effectRef idx="2">
+            <a:schemeClr val="accent1"/>
+          </a:effectRef>
+          <a:fontRef idx="minor">
+            <a:schemeClr val="lt1"/>
+          </a:fontRef>
+        </p:style>
+        <p:txBody>
+          <a:bodyPr rtlCol="0" anchor="ctr"/>
+          <a:lstStyle/>
+          <a:p>
+            <a:pPr algn="ctr"/>
+          </a:p>
+        </p:txBody>
+      </p:sp>
+      <p:sp>
+        <p:nvSpPr>
+          <p:cNvPr id="3" name="Rectangle 2"/>
+          <p:cNvSpPr/>
+          <p:nvPr/>
+        </p:nvSpPr>
+        <p:spPr>
+          <a:xfrm>
+            <a:off x="0" y="1170432"/>
+            <a:ext cx="12191695" cy="41148"/>
+          </a:xfrm>
+          <a:prstGeom prst="rect">
+            <a:avLst/>
+          </a:prstGeom>
+          <a:solidFill>
+            <a:srgbClr val="FFD000"/>
+          </a:solidFill>
+          <a:ln>
+            <a:noFill/>
+          </a:ln>
+        </p:spPr>
+        <p:style>
+          <a:lnRef idx="1">
+            <a:schemeClr val="accent1"/>
+          </a:lnRef>
+          <a:fillRef idx="3">
+            <a:schemeClr val="accent1"/>
+          </a:fillRef>
+          <a:effectRef idx="2">
+            <a:schemeClr val="accent1"/>
+          </a:effectRef>
+          <a:fontRef idx="minor">
+            <a:schemeClr val="lt1"/>
+          </a:fontRef>
+        </p:style>
+        <p:txBody>
+          <a:bodyPr rtlCol="0" anchor="ctr"/>
+          <a:lstStyle/>
+          <a:p>
+            <a:pPr algn="ctr"/>
+          </a:p>
+        </p:txBody>
+      </p:sp>
+      <p:sp>
+        <p:nvSpPr>
+          <p:cNvPr id="4" name="TextBox 3"/>
+          <p:cNvSpPr txBox="1"/>
+          <p:nvPr/>
+        </p:nvSpPr>
+        <p:spPr>
+          <a:xfrm>
+            <a:off x="457200" y="164592"/>
+            <a:ext cx="11277295" cy="384048"/>
+          </a:xfrm>
+          <a:prstGeom prst="rect">
+            <a:avLst/>
+          </a:prstGeom>
+          <a:noFill/>
+        </p:spPr>
+        <p:txBody>
+          <a:bodyPr wrap="square">
+            <a:spAutoFit/>
+          </a:bodyPr>
+          <a:lstStyle/>
+          <a:p>
+            <a:r>
+              <a:rPr sz="2600" b="1" i="0">
+                <a:solidFill>
+                  <a:srgbClr val="FFFFFF"/>
+                </a:solidFill>
+                <a:latin typeface="Calibri"/>
+              </a:rPr>
+              <a:t>Taller de hoy: Huella del sistema</a:t>
+            </a:r>
+          </a:p>
+        </p:txBody>
+      </p:sp>
+      <p:sp>
+        <p:nvSpPr>
+          <p:cNvPr id="5" name="TextBox 4"/>
+          <p:cNvSpPr txBox="1"/>
+          <p:nvPr/>
+        </p:nvSpPr>
+        <p:spPr>
+          <a:xfrm>
+            <a:off x="457200" y="566928"/>
+            <a:ext cx="11277295" cy="411480"/>
+          </a:xfrm>
+          <a:prstGeom prst="rect">
+            <a:avLst/>
+          </a:prstGeom>
+          <a:noFill/>
+        </p:spPr>
+        <p:txBody>
+          <a:bodyPr wrap="square">
+            <a:spAutoFit/>
+          </a:bodyPr>
+          <a:lstStyle/>
+          <a:p>
+            <a:r>
+              <a:rPr sz="1400" b="0" i="0">
+                <a:solidFill>
+                  <a:srgbClr val="B8D8EE"/>
+                </a:solidFill>
+                <a:latin typeface="Calibri"/>
+              </a:rPr>
+              <a:t>17 min en equipos · cada equipo, el sistema de su propio proyecto · diagrama de huella + 2 decisiones + 1 indicador</a:t>
+            </a:r>
+          </a:p>
+        </p:txBody>
+      </p:sp>
+      <p:sp>
+        <p:nvSpPr>
+          <p:cNvPr id="6" name="Rounded Rectangle 5"/>
+          <p:cNvSpPr/>
+          <p:nvPr/>
+        </p:nvSpPr>
+        <p:spPr>
+          <a:xfrm>
+            <a:off x="457200" y="1472184"/>
+            <a:ext cx="11277295" cy="566928"/>
+          </a:xfrm>
+          <a:prstGeom prst="roundRect">
+            <a:avLst>
+              <a:gd name="adj" fmla="val 12000"/>
+            </a:avLst>
+          </a:prstGeom>
+          <a:solidFill>
+            <a:srgbClr val="F2F2F2"/>
+          </a:solidFill>
+          <a:ln>
+            <a:noFill/>
+          </a:ln>
+        </p:spPr>
+        <p:style>
+          <a:lnRef idx="1">
+            <a:schemeClr val="accent1"/>
+          </a:lnRef>
+          <a:fillRef idx="3">
+            <a:schemeClr val="accent1"/>
+          </a:fillRef>
+          <a:effectRef idx="2">
+            <a:schemeClr val="accent1"/>
+          </a:effectRef>
+          <a:fontRef idx="minor">
+            <a:schemeClr val="lt1"/>
+          </a:fontRef>
+        </p:style>
+        <p:txBody>
+          <a:bodyPr rtlCol="0" anchor="ctr"/>
+          <a:lstStyle/>
+          <a:p>
+            <a:pPr algn="ctr"/>
+          </a:p>
+        </p:txBody>
+      </p:sp>
+      <p:sp>
+        <p:nvSpPr>
+          <p:cNvPr id="7" name="Rectangle 6"/>
+          <p:cNvSpPr/>
+          <p:nvPr/>
+        </p:nvSpPr>
+        <p:spPr>
+          <a:xfrm>
+            <a:off x="640080" y="1618487"/>
+            <a:ext cx="274320" cy="274320"/>
+          </a:xfrm>
+          <a:prstGeom prst="rect">
+            <a:avLst/>
+          </a:prstGeom>
+          <a:solidFill>
+            <a:srgbClr val="FFFFFF"/>
+          </a:solidFill>
+          <a:ln>
+            <a:solidFill>
+              <a:srgbClr val="333333"/>
+            </a:solidFill>
+          </a:ln>
+        </p:spPr>
+        <p:style>
+          <a:lnRef idx="1">
+            <a:schemeClr val="accent1"/>
+          </a:lnRef>
+          <a:fillRef idx="3">
+            <a:schemeClr val="accent1"/>
+          </a:fillRef>
+          <a:effectRef idx="2">
+            <a:schemeClr val="accent1"/>
+          </a:effectRef>
+          <a:fontRef idx="minor">
+            <a:schemeClr val="lt1"/>
+          </a:fontRef>
+        </p:style>
+        <p:txBody>
+          <a:bodyPr rtlCol="0" anchor="ctr"/>
+          <a:lstStyle/>
+          <a:p>
+            <a:pPr algn="ctr"/>
+          </a:p>
+        </p:txBody>
+      </p:sp>
+      <p:sp>
+        <p:nvSpPr>
+          <p:cNvPr id="8" name="Rectangle 7"/>
+          <p:cNvSpPr/>
+          <p:nvPr/>
+        </p:nvSpPr>
+        <p:spPr>
+          <a:xfrm>
+            <a:off x="640080" y="1618487"/>
+            <a:ext cx="73152" cy="274320"/>
+          </a:xfrm>
+          <a:prstGeom prst="rect">
+            <a:avLst/>
+          </a:prstGeom>
+          <a:solidFill>
+            <a:srgbClr val="269CCB"/>
+          </a:solidFill>
+          <a:ln>
+            <a:noFill/>
+          </a:ln>
+        </p:spPr>
+        <p:style>
+          <a:lnRef idx="1">
+            <a:schemeClr val="accent1"/>
+          </a:lnRef>
+          <a:fillRef idx="3">
+            <a:schemeClr val="accent1"/>
+          </a:fillRef>
+          <a:effectRef idx="2">
+            <a:schemeClr val="accent1"/>
+          </a:effectRef>
+          <a:fontRef idx="minor">
+            <a:schemeClr val="lt1"/>
+          </a:fontRef>
+        </p:style>
+        <p:txBody>
+          <a:bodyPr rtlCol="0" anchor="ctr"/>
+          <a:lstStyle/>
+          <a:p>
+            <a:pPr algn="ctr"/>
+          </a:p>
+        </p:txBody>
+      </p:sp>
+      <p:sp>
+        <p:nvSpPr>
+          <p:cNvPr id="9" name="TextBox 8"/>
+          <p:cNvSpPr txBox="1"/>
+          <p:nvPr/>
+        </p:nvSpPr>
+        <p:spPr>
+          <a:xfrm>
+            <a:off x="1097280" y="1563624"/>
+            <a:ext cx="10362895" cy="402336"/>
+          </a:xfrm>
+          <a:prstGeom prst="rect">
+            <a:avLst/>
+          </a:prstGeom>
+          <a:noFill/>
+        </p:spPr>
+        <p:txBody>
+          <a:bodyPr wrap="square" anchor="ctr"/>
+          <a:lstStyle/>
+          <a:p>
+            <a:r>
+              <a:rPr sz="1500" b="1" i="0">
+                <a:solidFill>
+                  <a:srgbClr val="333333"/>
+                </a:solidFill>
+                <a:latin typeface="Calibri"/>
+              </a:rPr>
+              <a:t>EL RECORRIDO DIBUJADO</a:t>
+            </a:r>
+            <a:r>
+              <a:rPr sz="1500" b="0" i="0">
+                <a:solidFill>
+                  <a:srgbClr val="333333"/>
+                </a:solidFill>
+                <a:latin typeface="Calibri"/>
+              </a:rPr>
+              <a:t> — El camino completo con flechas: dispositivo del usuario → red → servidor → almacenamiento, y todo lo que se prende para que el sistema funcione.</a:t>
+            </a:r>
+          </a:p>
+        </p:txBody>
+      </p:sp>
+      <p:sp>
+        <p:nvSpPr>
+          <p:cNvPr id="10" name="Rounded Rectangle 9"/>
+          <p:cNvSpPr/>
+          <p:nvPr/>
+        </p:nvSpPr>
+        <p:spPr>
+          <a:xfrm>
+            <a:off x="457200" y="2148839"/>
+            <a:ext cx="11277295" cy="566928"/>
+          </a:xfrm>
+          <a:prstGeom prst="roundRect">
+            <a:avLst>
+              <a:gd name="adj" fmla="val 12000"/>
+            </a:avLst>
+          </a:prstGeom>
+          <a:solidFill>
+            <a:srgbClr val="F2F2F2"/>
+          </a:solidFill>
+          <a:ln>
+            <a:noFill/>
+          </a:ln>
+        </p:spPr>
+        <p:style>
+          <a:lnRef idx="1">
+            <a:schemeClr val="accent1"/>
+          </a:lnRef>
+          <a:fillRef idx="3">
+            <a:schemeClr val="accent1"/>
+          </a:fillRef>
+          <a:effectRef idx="2">
+            <a:schemeClr val="accent1"/>
+          </a:effectRef>
+          <a:fontRef idx="minor">
+            <a:schemeClr val="lt1"/>
+          </a:fontRef>
+        </p:style>
+        <p:txBody>
+          <a:bodyPr rtlCol="0" anchor="ctr"/>
+          <a:lstStyle/>
+          <a:p>
+            <a:pPr algn="ctr"/>
+          </a:p>
+        </p:txBody>
+      </p:sp>
+      <p:sp>
+        <p:nvSpPr>
+          <p:cNvPr id="11" name="Rectangle 10"/>
+          <p:cNvSpPr/>
+          <p:nvPr/>
+        </p:nvSpPr>
+        <p:spPr>
+          <a:xfrm>
+            <a:off x="640080" y="2295144"/>
+            <a:ext cx="274320" cy="274320"/>
+          </a:xfrm>
+          <a:prstGeom prst="rect">
+            <a:avLst/>
+          </a:prstGeom>
+          <a:solidFill>
+            <a:srgbClr val="FFFFFF"/>
+          </a:solidFill>
+          <a:ln>
+            <a:solidFill>
+              <a:srgbClr val="333333"/>
+            </a:solidFill>
+          </a:ln>
+        </p:spPr>
+        <p:style>
+          <a:lnRef idx="1">
+            <a:schemeClr val="accent1"/>
+          </a:lnRef>
+          <a:fillRef idx="3">
+            <a:schemeClr val="accent1"/>
+          </a:fillRef>
+          <a:effectRef idx="2">
+            <a:schemeClr val="accent1"/>
+          </a:effectRef>
+          <a:fontRef idx="minor">
+            <a:schemeClr val="lt1"/>
+          </a:fontRef>
+        </p:style>
+        <p:txBody>
+          <a:bodyPr rtlCol="0" anchor="ctr"/>
+          <a:lstStyle/>
+          <a:p>
+            <a:pPr algn="ctr"/>
+          </a:p>
+        </p:txBody>
+      </p:sp>
+      <p:sp>
+        <p:nvSpPr>
+          <p:cNvPr id="12" name="Rectangle 11"/>
+          <p:cNvSpPr/>
+          <p:nvPr/>
+        </p:nvSpPr>
+        <p:spPr>
+          <a:xfrm>
+            <a:off x="640080" y="2295144"/>
+            <a:ext cx="73152" cy="274320"/>
+          </a:xfrm>
+          <a:prstGeom prst="rect">
+            <a:avLst/>
+          </a:prstGeom>
+          <a:solidFill>
+            <a:srgbClr val="269CCB"/>
+          </a:solidFill>
+          <a:ln>
+            <a:noFill/>
+          </a:ln>
+        </p:spPr>
+        <p:style>
+          <a:lnRef idx="1">
+            <a:schemeClr val="accent1"/>
+          </a:lnRef>
+          <a:fillRef idx="3">
+            <a:schemeClr val="accent1"/>
+          </a:fillRef>
+          <a:effectRef idx="2">
+            <a:schemeClr val="accent1"/>
+          </a:effectRef>
+          <a:fontRef idx="minor">
+            <a:schemeClr val="lt1"/>
+          </a:fontRef>
+        </p:style>
+        <p:txBody>
+          <a:bodyPr rtlCol="0" anchor="ctr"/>
+          <a:lstStyle/>
+          <a:p>
+            <a:pPr algn="ctr"/>
+          </a:p>
+        </p:txBody>
+      </p:sp>
+      <p:sp>
+        <p:nvSpPr>
+          <p:cNvPr id="13" name="TextBox 12"/>
+          <p:cNvSpPr txBox="1"/>
+          <p:nvPr/>
+        </p:nvSpPr>
+        <p:spPr>
+          <a:xfrm>
+            <a:off x="1097280" y="2240279"/>
+            <a:ext cx="10362895" cy="402336"/>
+          </a:xfrm>
+          <a:prstGeom prst="rect">
+            <a:avLst/>
+          </a:prstGeom>
+          <a:noFill/>
+        </p:spPr>
+        <p:txBody>
+          <a:bodyPr wrap="square" anchor="ctr"/>
+          <a:lstStyle/>
+          <a:p>
+            <a:r>
+              <a:rPr sz="1500" b="1" i="0">
+                <a:solidFill>
+                  <a:srgbClr val="333333"/>
+                </a:solidFill>
+                <a:latin typeface="Calibri"/>
+              </a:rPr>
+              <a:t>LO QUE SE REPITE</a:t>
+            </a:r>
+            <a:r>
+              <a:rPr sz="1500" b="0" i="0">
+                <a:solidFill>
+                  <a:srgbClr val="333333"/>
+                </a:solidFill>
+                <a:latin typeface="Calibri"/>
+              </a:rPr>
+              <a:t> — Qué operación ocurre </a:t>
+            </a:r>
+            <a:r>
+              <a:rPr sz="1500" b="1" i="0">
+                <a:solidFill>
+                  <a:srgbClr val="333333"/>
+                </a:solidFill>
+                <a:latin typeface="Calibri"/>
+              </a:rPr>
+              <a:t>muchas veces al día</a:t>
+            </a:r>
+            <a:r>
+              <a:rPr sz="1500" b="0" i="0">
+                <a:solidFill>
+                  <a:srgbClr val="333333"/>
+                </a:solidFill>
+                <a:latin typeface="Calibri"/>
+              </a:rPr>
+              <a:t> en su sistema, y una estimación gruesa de cuántas veces. Lo que pasa una vez no mueve nada.</a:t>
+            </a:r>
+          </a:p>
+        </p:txBody>
+      </p:sp>
+      <p:sp>
+        <p:nvSpPr>
+          <p:cNvPr id="14" name="Rounded Rectangle 13"/>
+          <p:cNvSpPr/>
+          <p:nvPr/>
+        </p:nvSpPr>
+        <p:spPr>
+          <a:xfrm>
+            <a:off x="457200" y="2825496"/>
+            <a:ext cx="11277295" cy="566928"/>
+          </a:xfrm>
+          <a:prstGeom prst="roundRect">
+            <a:avLst>
+              <a:gd name="adj" fmla="val 12000"/>
+            </a:avLst>
+          </a:prstGeom>
+          <a:solidFill>
+            <a:srgbClr val="F2F2F2"/>
+          </a:solidFill>
+          <a:ln>
+            <a:noFill/>
+          </a:ln>
+        </p:spPr>
+        <p:style>
+          <a:lnRef idx="1">
+            <a:schemeClr val="accent1"/>
+          </a:lnRef>
+          <a:fillRef idx="3">
+            <a:schemeClr val="accent1"/>
+          </a:fillRef>
+          <a:effectRef idx="2">
+            <a:schemeClr val="accent1"/>
+          </a:effectRef>
+          <a:fontRef idx="minor">
+            <a:schemeClr val="lt1"/>
+          </a:fontRef>
+        </p:style>
+        <p:txBody>
+          <a:bodyPr rtlCol="0" anchor="ctr"/>
+          <a:lstStyle/>
+          <a:p>
+            <a:pPr algn="ctr"/>
+          </a:p>
+        </p:txBody>
+      </p:sp>
+      <p:sp>
+        <p:nvSpPr>
+          <p:cNvPr id="15" name="Rectangle 14"/>
+          <p:cNvSpPr/>
+          <p:nvPr/>
+        </p:nvSpPr>
+        <p:spPr>
+          <a:xfrm>
+            <a:off x="640080" y="2971800"/>
+            <a:ext cx="274320" cy="274320"/>
+          </a:xfrm>
+          <a:prstGeom prst="rect">
+            <a:avLst/>
+          </a:prstGeom>
+          <a:solidFill>
+            <a:srgbClr val="FFFFFF"/>
+          </a:solidFill>
+          <a:ln>
+            <a:solidFill>
+              <a:srgbClr val="333333"/>
+            </a:solidFill>
+          </a:ln>
+        </p:spPr>
+        <p:style>
+          <a:lnRef idx="1">
+            <a:schemeClr val="accent1"/>
+          </a:lnRef>
+          <a:fillRef idx="3">
+            <a:schemeClr val="accent1"/>
+          </a:fillRef>
+          <a:effectRef idx="2">
+            <a:schemeClr val="accent1"/>
+          </a:effectRef>
+          <a:fontRef idx="minor">
+            <a:schemeClr val="lt1"/>
+          </a:fontRef>
+        </p:style>
+        <p:txBody>
+          <a:bodyPr rtlCol="0" anchor="ctr"/>
+          <a:lstStyle/>
+          <a:p>
+            <a:pPr algn="ctr"/>
+          </a:p>
+        </p:txBody>
+      </p:sp>
+      <p:sp>
+        <p:nvSpPr>
+          <p:cNvPr id="16" name="Rectangle 15"/>
+          <p:cNvSpPr/>
+          <p:nvPr/>
+        </p:nvSpPr>
+        <p:spPr>
+          <a:xfrm>
+            <a:off x="640080" y="2971800"/>
+            <a:ext cx="73152" cy="274320"/>
+          </a:xfrm>
+          <a:prstGeom prst="rect">
+            <a:avLst/>
+          </a:prstGeom>
+          <a:solidFill>
+            <a:srgbClr val="269CCB"/>
+          </a:solidFill>
+          <a:ln>
+            <a:noFill/>
+          </a:ln>
+        </p:spPr>
+        <p:style>
+          <a:lnRef idx="1">
+            <a:schemeClr val="accent1"/>
+          </a:lnRef>
+          <a:fillRef idx="3">
+            <a:schemeClr val="accent1"/>
+          </a:fillRef>
+          <a:effectRef idx="2">
+            <a:schemeClr val="accent1"/>
+          </a:effectRef>
+          <a:fontRef idx="minor">
+            <a:schemeClr val="lt1"/>
+          </a:fontRef>
+        </p:style>
+        <p:txBody>
+          <a:bodyPr rtlCol="0" anchor="ctr"/>
+          <a:lstStyle/>
+          <a:p>
+            <a:pPr algn="ctr"/>
+          </a:p>
+        </p:txBody>
+      </p:sp>
+      <p:sp>
+        <p:nvSpPr>
+          <p:cNvPr id="17" name="TextBox 16"/>
+          <p:cNvSpPr txBox="1"/>
+          <p:nvPr/>
+        </p:nvSpPr>
+        <p:spPr>
+          <a:xfrm>
+            <a:off x="1097280" y="2916936"/>
+            <a:ext cx="10362895" cy="402336"/>
+          </a:xfrm>
+          <a:prstGeom prst="rect">
+            <a:avLst/>
+          </a:prstGeom>
+          <a:noFill/>
+        </p:spPr>
+        <p:txBody>
+          <a:bodyPr wrap="square" anchor="ctr"/>
+          <a:lstStyle/>
+          <a:p>
+            <a:r>
+              <a:rPr sz="1500" b="1" i="0">
+                <a:solidFill>
+                  <a:srgbClr val="333333"/>
+                </a:solidFill>
+                <a:latin typeface="Calibri"/>
+              </a:rPr>
+              <a:t>LA ETAPA QUE MÁS PESA</a:t>
+            </a:r>
+            <a:r>
+              <a:rPr sz="1500" b="0" i="0">
+                <a:solidFill>
+                  <a:srgbClr val="333333"/>
+                </a:solidFill>
+                <a:latin typeface="Calibri"/>
+              </a:rPr>
+              <a:t> — Una sola etapa, con la razón. No hace falta un cálculo exacto: hace falta saber dónde apretar.</a:t>
+            </a:r>
+          </a:p>
+        </p:txBody>
+      </p:sp>
+      <p:sp>
+        <p:nvSpPr>
+          <p:cNvPr id="18" name="Rounded Rectangle 17"/>
+          <p:cNvSpPr/>
+          <p:nvPr/>
+        </p:nvSpPr>
+        <p:spPr>
+          <a:xfrm>
+            <a:off x="457200" y="3502152"/>
+            <a:ext cx="11277295" cy="566928"/>
+          </a:xfrm>
+          <a:prstGeom prst="roundRect">
+            <a:avLst>
+              <a:gd name="adj" fmla="val 12000"/>
+            </a:avLst>
+          </a:prstGeom>
+          <a:solidFill>
+            <a:srgbClr val="F2F2F2"/>
+          </a:solidFill>
+          <a:ln>
+            <a:noFill/>
+          </a:ln>
+        </p:spPr>
+        <p:style>
+          <a:lnRef idx="1">
+            <a:schemeClr val="accent1"/>
+          </a:lnRef>
+          <a:fillRef idx="3">
+            <a:schemeClr val="accent1"/>
+          </a:fillRef>
+          <a:effectRef idx="2">
+            <a:schemeClr val="accent1"/>
+          </a:effectRef>
+          <a:fontRef idx="minor">
+            <a:schemeClr val="lt1"/>
+          </a:fontRef>
+        </p:style>
+        <p:txBody>
+          <a:bodyPr rtlCol="0" anchor="ctr"/>
+          <a:lstStyle/>
+          <a:p>
+            <a:pPr algn="ctr"/>
+          </a:p>
+        </p:txBody>
+      </p:sp>
+      <p:sp>
+        <p:nvSpPr>
+          <p:cNvPr id="19" name="Rectangle 18"/>
+          <p:cNvSpPr/>
+          <p:nvPr/>
+        </p:nvSpPr>
+        <p:spPr>
+          <a:xfrm>
+            <a:off x="640080" y="3648456"/>
+            <a:ext cx="274320" cy="274320"/>
+          </a:xfrm>
+          <a:prstGeom prst="rect">
+            <a:avLst/>
+          </a:prstGeom>
+          <a:solidFill>
+            <a:srgbClr val="FFFFFF"/>
+          </a:solidFill>
+          <a:ln>
+            <a:solidFill>
+              <a:srgbClr val="333333"/>
+            </a:solidFill>
+          </a:ln>
+        </p:spPr>
+        <p:style>
+          <a:lnRef idx="1">
+            <a:schemeClr val="accent1"/>
+          </a:lnRef>
+          <a:fillRef idx="3">
+            <a:schemeClr val="accent1"/>
+          </a:fillRef>
+          <a:effectRef idx="2">
+            <a:schemeClr val="accent1"/>
+          </a:effectRef>
+          <a:fontRef idx="minor">
+            <a:schemeClr val="lt1"/>
+          </a:fontRef>
+        </p:style>
+        <p:txBody>
+          <a:bodyPr rtlCol="0" anchor="ctr"/>
+          <a:lstStyle/>
+          <a:p>
+            <a:pPr algn="ctr"/>
+          </a:p>
+        </p:txBody>
+      </p:sp>
+      <p:sp>
+        <p:nvSpPr>
+          <p:cNvPr id="20" name="Rectangle 19"/>
+          <p:cNvSpPr/>
+          <p:nvPr/>
+        </p:nvSpPr>
+        <p:spPr>
+          <a:xfrm>
+            <a:off x="640080" y="3648456"/>
+            <a:ext cx="73152" cy="274320"/>
+          </a:xfrm>
+          <a:prstGeom prst="rect">
+            <a:avLst/>
+          </a:prstGeom>
+          <a:solidFill>
+            <a:srgbClr val="269CCB"/>
+          </a:solidFill>
+          <a:ln>
+            <a:noFill/>
+          </a:ln>
+        </p:spPr>
+        <p:style>
+          <a:lnRef idx="1">
+            <a:schemeClr val="accent1"/>
+          </a:lnRef>
+          <a:fillRef idx="3">
+            <a:schemeClr val="accent1"/>
+          </a:fillRef>
+          <a:effectRef idx="2">
+            <a:schemeClr val="accent1"/>
+          </a:effectRef>
+          <a:fontRef idx="minor">
+            <a:schemeClr val="lt1"/>
+          </a:fontRef>
+        </p:style>
+        <p:txBody>
+          <a:bodyPr rtlCol="0" anchor="ctr"/>
+          <a:lstStyle/>
+          <a:p>
+            <a:pPr algn="ctr"/>
+          </a:p>
+        </p:txBody>
+      </p:sp>
+      <p:sp>
+        <p:nvSpPr>
+          <p:cNvPr id="21" name="TextBox 20"/>
+          <p:cNvSpPr txBox="1"/>
+          <p:nvPr/>
+        </p:nvSpPr>
+        <p:spPr>
+          <a:xfrm>
+            <a:off x="1097280" y="3593592"/>
+            <a:ext cx="10362895" cy="402336"/>
+          </a:xfrm>
+          <a:prstGeom prst="rect">
+            <a:avLst/>
+          </a:prstGeom>
+          <a:noFill/>
+        </p:spPr>
+        <p:txBody>
+          <a:bodyPr wrap="square" anchor="ctr"/>
+          <a:lstStyle/>
+          <a:p>
+            <a:r>
+              <a:rPr sz="1500" b="1" i="0">
+                <a:solidFill>
+                  <a:srgbClr val="333333"/>
+                </a:solidFill>
+                <a:latin typeface="Calibri"/>
+              </a:rPr>
+              <a:t>DOS DECISIONES DE DISEÑO</a:t>
+            </a:r>
+            <a:r>
+              <a:rPr sz="1500" b="0" i="0">
+                <a:solidFill>
+                  <a:srgbClr val="333333"/>
+                </a:solidFill>
+                <a:latin typeface="Calibri"/>
+              </a:rPr>
+              <a:t> — Dos cosas que </a:t>
+            </a:r>
+            <a:r>
+              <a:rPr sz="1500" b="1" i="0">
+                <a:solidFill>
+                  <a:srgbClr val="333333"/>
+                </a:solidFill>
+                <a:latin typeface="Calibri"/>
+              </a:rPr>
+              <a:t>ustedes</a:t>
+            </a:r>
+            <a:r>
+              <a:rPr sz="1500" b="0" i="0">
+                <a:solidFill>
+                  <a:srgbClr val="333333"/>
+                </a:solidFill>
+                <a:latin typeface="Calibri"/>
+              </a:rPr>
+              <a:t> pueden decidir en su sistema para bajar esa etapa. De diseño, no de comportamiento del usuario.</a:t>
+            </a:r>
+          </a:p>
+        </p:txBody>
+      </p:sp>
+      <p:sp>
+        <p:nvSpPr>
+          <p:cNvPr id="22" name="Rounded Rectangle 21"/>
+          <p:cNvSpPr/>
+          <p:nvPr/>
+        </p:nvSpPr>
+        <p:spPr>
+          <a:xfrm>
+            <a:off x="457200" y="4178808"/>
+            <a:ext cx="11277295" cy="566928"/>
+          </a:xfrm>
+          <a:prstGeom prst="roundRect">
+            <a:avLst>
+              <a:gd name="adj" fmla="val 12000"/>
+            </a:avLst>
+          </a:prstGeom>
+          <a:solidFill>
+            <a:srgbClr val="F2F2F2"/>
+          </a:solidFill>
+          <a:ln>
+            <a:noFill/>
+          </a:ln>
+        </p:spPr>
+        <p:style>
+          <a:lnRef idx="1">
+            <a:schemeClr val="accent1"/>
+          </a:lnRef>
+          <a:fillRef idx="3">
+            <a:schemeClr val="accent1"/>
+          </a:fillRef>
+          <a:effectRef idx="2">
+            <a:schemeClr val="accent1"/>
+          </a:effectRef>
+          <a:fontRef idx="minor">
+            <a:schemeClr val="lt1"/>
+          </a:fontRef>
+        </p:style>
+        <p:txBody>
+          <a:bodyPr rtlCol="0" anchor="ctr"/>
+          <a:lstStyle/>
+          <a:p>
+            <a:pPr algn="ctr"/>
+          </a:p>
+        </p:txBody>
+      </p:sp>
+      <p:sp>
+        <p:nvSpPr>
+          <p:cNvPr id="23" name="Rectangle 22"/>
+          <p:cNvSpPr/>
+          <p:nvPr/>
+        </p:nvSpPr>
+        <p:spPr>
+          <a:xfrm>
+            <a:off x="640080" y="4325112"/>
+            <a:ext cx="274320" cy="274320"/>
+          </a:xfrm>
+          <a:prstGeom prst="rect">
+            <a:avLst/>
+          </a:prstGeom>
+          <a:solidFill>
+            <a:srgbClr val="FFFFFF"/>
+          </a:solidFill>
+          <a:ln>
+            <a:solidFill>
+              <a:srgbClr val="333333"/>
+            </a:solidFill>
+          </a:ln>
+        </p:spPr>
+        <p:style>
+          <a:lnRef idx="1">
+            <a:schemeClr val="accent1"/>
+          </a:lnRef>
+          <a:fillRef idx="3">
+            <a:schemeClr val="accent1"/>
+          </a:fillRef>
+          <a:effectRef idx="2">
+            <a:schemeClr val="accent1"/>
+          </a:effectRef>
+          <a:fontRef idx="minor">
+            <a:schemeClr val="lt1"/>
+          </a:fontRef>
+        </p:style>
+        <p:txBody>
+          <a:bodyPr rtlCol="0" anchor="ctr"/>
+          <a:lstStyle/>
+          <a:p>
+            <a:pPr algn="ctr"/>
+          </a:p>
+        </p:txBody>
+      </p:sp>
+      <p:sp>
+        <p:nvSpPr>
+          <p:cNvPr id="24" name="Rectangle 23"/>
+          <p:cNvSpPr/>
+          <p:nvPr/>
+        </p:nvSpPr>
+        <p:spPr>
+          <a:xfrm>
+            <a:off x="640080" y="4325112"/>
+            <a:ext cx="73152" cy="274320"/>
+          </a:xfrm>
+          <a:prstGeom prst="rect">
+            <a:avLst/>
+          </a:prstGeom>
+          <a:solidFill>
+            <a:srgbClr val="269CCB"/>
+          </a:solidFill>
+          <a:ln>
+            <a:noFill/>
+          </a:ln>
+        </p:spPr>
+        <p:style>
+          <a:lnRef idx="1">
+            <a:schemeClr val="accent1"/>
+          </a:lnRef>
+          <a:fillRef idx="3">
+            <a:schemeClr val="accent1"/>
+          </a:fillRef>
+          <a:effectRef idx="2">
+            <a:schemeClr val="accent1"/>
+          </a:effectRef>
+          <a:fontRef idx="minor">
+            <a:schemeClr val="lt1"/>
+          </a:fontRef>
+        </p:style>
+        <p:txBody>
+          <a:bodyPr rtlCol="0" anchor="ctr"/>
+          <a:lstStyle/>
+          <a:p>
+            <a:pPr algn="ctr"/>
+          </a:p>
+        </p:txBody>
+      </p:sp>
+      <p:sp>
+        <p:nvSpPr>
+          <p:cNvPr id="25" name="TextBox 24"/>
+          <p:cNvSpPr txBox="1"/>
+          <p:nvPr/>
+        </p:nvSpPr>
+        <p:spPr>
+          <a:xfrm>
+            <a:off x="1097280" y="4270248"/>
+            <a:ext cx="10362895" cy="402336"/>
+          </a:xfrm>
+          <a:prstGeom prst="rect">
+            <a:avLst/>
+          </a:prstGeom>
+          <a:noFill/>
+        </p:spPr>
+        <p:txBody>
+          <a:bodyPr wrap="square" anchor="ctr"/>
+          <a:lstStyle/>
+          <a:p>
+            <a:r>
+              <a:rPr sz="1500" b="1" i="0">
+                <a:solidFill>
+                  <a:srgbClr val="333333"/>
+                </a:solidFill>
+                <a:latin typeface="Calibri"/>
+              </a:rPr>
+              <a:t>EL INDICADOR</a:t>
+            </a:r>
+            <a:r>
+              <a:rPr sz="1500" b="0" i="0">
+                <a:solidFill>
+                  <a:srgbClr val="333333"/>
+                </a:solidFill>
+                <a:latin typeface="Calibri"/>
+              </a:rPr>
+              <a:t> — Un número que se pueda medir al final del semestre para saber si la decisión funcionó. Con su unidad.</a:t>
+            </a:r>
+          </a:p>
+        </p:txBody>
+      </p:sp>
+      <p:sp>
+        <p:nvSpPr>
+          <p:cNvPr id="26" name="TextBox 25"/>
+          <p:cNvSpPr txBox="1"/>
+          <p:nvPr/>
+        </p:nvSpPr>
+        <p:spPr>
+          <a:xfrm>
+            <a:off x="11185855" y="6473952"/>
+            <a:ext cx="640080" cy="274320"/>
+          </a:xfrm>
+          <a:prstGeom prst="rect">
+            <a:avLst/>
+          </a:prstGeom>
+          <a:noFill/>
+        </p:spPr>
+        <p:txBody>
+          <a:bodyPr wrap="square">
+            <a:spAutoFit/>
+          </a:bodyPr>
+          <a:lstStyle/>
+          <a:p>
+            <a:pPr algn="r"/>
+            <a:r>
+              <a:rPr sz="1100" b="0" i="0">
+                <a:solidFill>
+                  <a:srgbClr val="666666"/>
+                </a:solidFill>
+                <a:latin typeface="Calibri"/>
+              </a:rPr>
+              <a:t>21</a:t>
+            </a:r>
+          </a:p>
+        </p:txBody>
+      </p:sp>
+    </p:spTree>
+  </p:cSld>
+  <p:clrMapOvr>
+    <a:masterClrMapping/>
+  </p:clrMapOvr>
+</p:sld>
+</file>
+
+<file path=ppt/slides/slide22.xml><?xml version="1.0" encoding="utf-8"?>
+<p:sld xmlns:a="http://schemas.openxmlformats.org/drawingml/2006/main" xmlns:p="http://schemas.openxmlformats.org/presentationml/2006/main" xmlns:r="http://schemas.openxmlformats.org/officeDocument/2006/relationships">
+  <p:cSld>
+    <p:bg>
+      <p:bgPr>
+        <a:solidFill>
+          <a:srgbClr val="FFFFFF"/>
+        </a:solidFill>
+        <a:effectLst/>
+      </p:bgPr>
+    </p:bg>
+    <p:spTree>
+      <p:nvGrpSpPr>
+        <p:cNvPr id="1" name=""/>
+        <p:cNvGrpSpPr/>
+        <p:nvPr/>
+      </p:nvGrpSpPr>
+      <p:grpSpPr/>
+      <p:sp>
+        <p:nvSpPr>
+          <p:cNvPr id="2" name="Rectangle 1"/>
+          <p:cNvSpPr/>
+          <p:nvPr/>
+        </p:nvSpPr>
+        <p:spPr>
+          <a:xfrm>
+            <a:off x="0" y="0"/>
+            <a:ext cx="12191695" cy="1170432"/>
+          </a:xfrm>
+          <a:prstGeom prst="rect">
+            <a:avLst/>
+          </a:prstGeom>
+          <a:solidFill>
+            <a:srgbClr val="095292"/>
+          </a:solidFill>
+          <a:ln>
+            <a:noFill/>
+          </a:ln>
+        </p:spPr>
+        <p:style>
+          <a:lnRef idx="1">
+            <a:schemeClr val="accent1"/>
+          </a:lnRef>
+          <a:fillRef idx="3">
+            <a:schemeClr val="accent1"/>
+          </a:fillRef>
+          <a:effectRef idx="2">
+            <a:schemeClr val="accent1"/>
+          </a:effectRef>
+          <a:fontRef idx="minor">
+            <a:schemeClr val="lt1"/>
+          </a:fontRef>
+        </p:style>
+        <p:txBody>
+          <a:bodyPr rtlCol="0" anchor="ctr"/>
+          <a:lstStyle/>
+          <a:p>
+            <a:pPr algn="ctr"/>
+          </a:p>
+        </p:txBody>
+      </p:sp>
+      <p:sp>
+        <p:nvSpPr>
+          <p:cNvPr id="3" name="Rectangle 2"/>
+          <p:cNvSpPr/>
+          <p:nvPr/>
+        </p:nvSpPr>
+        <p:spPr>
+          <a:xfrm>
+            <a:off x="0" y="1170432"/>
+            <a:ext cx="12191695" cy="41148"/>
+          </a:xfrm>
+          <a:prstGeom prst="rect">
+            <a:avLst/>
+          </a:prstGeom>
+          <a:solidFill>
+            <a:srgbClr val="FFD000"/>
+          </a:solidFill>
+          <a:ln>
+            <a:noFill/>
+          </a:ln>
+        </p:spPr>
+        <p:style>
+          <a:lnRef idx="1">
+            <a:schemeClr val="accent1"/>
+          </a:lnRef>
+          <a:fillRef idx="3">
+            <a:schemeClr val="accent1"/>
+          </a:fillRef>
+          <a:effectRef idx="2">
+            <a:schemeClr val="accent1"/>
+          </a:effectRef>
+          <a:fontRef idx="minor">
+            <a:schemeClr val="lt1"/>
+          </a:fontRef>
+        </p:style>
+        <p:txBody>
+          <a:bodyPr rtlCol="0" anchor="ctr"/>
+          <a:lstStyle/>
+          <a:p>
+            <a:pPr algn="ctr"/>
+          </a:p>
+        </p:txBody>
+      </p:sp>
+      <p:sp>
+        <p:nvSpPr>
+          <p:cNvPr id="4" name="TextBox 3"/>
+          <p:cNvSpPr txBox="1"/>
+          <p:nvPr/>
+        </p:nvSpPr>
+        <p:spPr>
+          <a:xfrm>
+            <a:off x="457200" y="164592"/>
+            <a:ext cx="11277295" cy="384048"/>
+          </a:xfrm>
+          <a:prstGeom prst="rect">
+            <a:avLst/>
+          </a:prstGeom>
+          <a:noFill/>
+        </p:spPr>
+        <p:txBody>
+          <a:bodyPr wrap="square">
+            <a:spAutoFit/>
+          </a:bodyPr>
+          <a:lstStyle/>
+          <a:p>
+            <a:r>
+              <a:rPr sz="2600" b="1" i="0">
+                <a:solidFill>
+                  <a:srgbClr val="FFFFFF"/>
+                </a:solidFill>
+                <a:latin typeface="Calibri"/>
+              </a:rPr>
+              <a:t>Cómo se expone en 3 minutos</a:t>
+            </a:r>
+          </a:p>
+        </p:txBody>
+      </p:sp>
+      <p:sp>
+        <p:nvSpPr>
+          <p:cNvPr id="5" name="TextBox 4"/>
+          <p:cNvSpPr txBox="1"/>
+          <p:nvPr/>
+        </p:nvSpPr>
+        <p:spPr>
+          <a:xfrm>
+            <a:off x="457200" y="566928"/>
+            <a:ext cx="11277295" cy="411480"/>
+          </a:xfrm>
+          <a:prstGeom prst="rect">
+            <a:avLst/>
+          </a:prstGeom>
+          <a:noFill/>
+        </p:spPr>
+        <p:txBody>
+          <a:bodyPr wrap="square">
+            <a:spAutoFit/>
+          </a:bodyPr>
+          <a:lstStyle/>
+          <a:p>
+            <a:r>
+              <a:rPr sz="1400" b="0" i="0">
+                <a:solidFill>
+                  <a:srgbClr val="B8D8EE"/>
+                </a:solidFill>
+                <a:latin typeface="Calibri"/>
+              </a:rPr>
+              <a:t>Habla el vocero con la pantalla ya compartida · cronómetro en pantalla · se corta al llegar a cero</a:t>
+            </a:r>
+          </a:p>
+        </p:txBody>
+      </p:sp>
+      <p:sp>
+        <p:nvSpPr>
+          <p:cNvPr id="6" name="Rounded Rectangle 5"/>
+          <p:cNvSpPr/>
+          <p:nvPr/>
+        </p:nvSpPr>
+        <p:spPr>
+          <a:xfrm>
+            <a:off x="457200" y="1444752"/>
+            <a:ext cx="11277295" cy="908913"/>
+          </a:xfrm>
+          <a:prstGeom prst="roundRect">
+            <a:avLst>
+              <a:gd name="adj" fmla="val 12000"/>
+            </a:avLst>
+          </a:prstGeom>
+          <a:solidFill>
+            <a:srgbClr val="F2F2F2"/>
+          </a:solidFill>
+          <a:ln>
+            <a:noFill/>
+          </a:ln>
+        </p:spPr>
+        <p:style>
+          <a:lnRef idx="1">
+            <a:schemeClr val="accent1"/>
+          </a:lnRef>
+          <a:fillRef idx="3">
+            <a:schemeClr val="accent1"/>
+          </a:fillRef>
+          <a:effectRef idx="2">
+            <a:schemeClr val="accent1"/>
+          </a:effectRef>
+          <a:fontRef idx="minor">
+            <a:schemeClr val="lt1"/>
+          </a:fontRef>
+        </p:style>
+        <p:txBody>
+          <a:bodyPr rtlCol="0" anchor="ctr"/>
+          <a:lstStyle/>
+          <a:p>
+            <a:pPr algn="ctr"/>
+          </a:p>
+        </p:txBody>
+      </p:sp>
+      <p:sp>
+        <p:nvSpPr>
+          <p:cNvPr id="7" name="Rounded Rectangle 6"/>
+          <p:cNvSpPr/>
+          <p:nvPr/>
+        </p:nvSpPr>
+        <p:spPr>
+          <a:xfrm>
+            <a:off x="594360" y="1679752"/>
+            <a:ext cx="438912" cy="438912"/>
+          </a:xfrm>
+          <a:prstGeom prst="roundRect">
+            <a:avLst>
+              <a:gd name="adj" fmla="val 12000"/>
+            </a:avLst>
+          </a:prstGeom>
+          <a:solidFill>
+            <a:srgbClr val="095292"/>
+          </a:solidFill>
+          <a:ln>
+            <a:noFill/>
+          </a:ln>
+        </p:spPr>
+        <p:style>
+          <a:lnRef idx="1">
+            <a:schemeClr val="accent1"/>
+          </a:lnRef>
+          <a:fillRef idx="3">
+            <a:schemeClr val="accent1"/>
+          </a:fillRef>
+          <a:effectRef idx="2">
+            <a:schemeClr val="accent1"/>
+          </a:effectRef>
+          <a:fontRef idx="minor">
+            <a:schemeClr val="lt1"/>
+          </a:fontRef>
+        </p:style>
+        <p:txBody>
+          <a:bodyPr rtlCol="0" anchor="ctr"/>
+          <a:lstStyle/>
+          <a:p>
+            <a:pPr algn="ctr"/>
+          </a:p>
+        </p:txBody>
+      </p:sp>
+      <p:sp>
+        <p:nvSpPr>
+          <p:cNvPr id="8" name="TextBox 7"/>
+          <p:cNvSpPr txBox="1"/>
+          <p:nvPr/>
+        </p:nvSpPr>
+        <p:spPr>
+          <a:xfrm>
+            <a:off x="594360" y="1679752"/>
+            <a:ext cx="438912" cy="438912"/>
+          </a:xfrm>
+          <a:prstGeom prst="rect">
+            <a:avLst/>
+          </a:prstGeom>
+          <a:noFill/>
+        </p:spPr>
+        <p:txBody>
+          <a:bodyPr wrap="square" anchor="ctr"/>
+          <a:lstStyle/>
+          <a:p>
+            <a:pPr algn="ctr"/>
+            <a:r>
+              <a:rPr sz="1600" b="1" i="0">
+                <a:solidFill>
+                  <a:srgbClr val="FFFFFF"/>
+                </a:solidFill>
+                <a:latin typeface="Calibri"/>
+              </a:rPr>
+              <a:t>1</a:t>
+            </a:r>
+          </a:p>
+        </p:txBody>
+      </p:sp>
+      <p:sp>
+        <p:nvSpPr>
+          <p:cNvPr id="9" name="TextBox 8"/>
+          <p:cNvSpPr txBox="1"/>
+          <p:nvPr/>
+        </p:nvSpPr>
+        <p:spPr>
+          <a:xfrm>
+            <a:off x="1188720" y="1536192"/>
+            <a:ext cx="10271455" cy="744321"/>
+          </a:xfrm>
+          <a:prstGeom prst="rect">
+            <a:avLst/>
+          </a:prstGeom>
+          <a:noFill/>
+        </p:spPr>
+        <p:txBody>
+          <a:bodyPr wrap="square" anchor="ctr"/>
+          <a:lstStyle/>
+          <a:p>
+            <a:r>
+              <a:rPr sz="1500" b="1" i="0">
+                <a:solidFill>
+                  <a:srgbClr val="095292"/>
+                </a:solidFill>
+                <a:latin typeface="Calibri"/>
+              </a:rPr>
+              <a:t>40 s · El recorrido</a:t>
+            </a:r>
+          </a:p>
+          <a:p>
+            <a:pPr>
+              <a:spcBef>
+                <a:spcPts val="200"/>
+              </a:spcBef>
+            </a:pPr>
+            <a:r>
+              <a:rPr sz="1300" b="0" i="0">
+                <a:solidFill>
+                  <a:srgbClr val="333333"/>
+                </a:solidFill>
+                <a:latin typeface="Calibri"/>
+              </a:rPr>
+              <a:t>El diagrama, recorrido con el cursor. Dónde está cada etapa.</a:t>
+            </a:r>
+          </a:p>
+        </p:txBody>
+      </p:sp>
+      <p:sp>
+        <p:nvSpPr>
+          <p:cNvPr id="10" name="Rounded Rectangle 9"/>
+          <p:cNvSpPr/>
+          <p:nvPr/>
+        </p:nvSpPr>
+        <p:spPr>
+          <a:xfrm>
+            <a:off x="457200" y="2445105"/>
+            <a:ext cx="11277295" cy="908913"/>
+          </a:xfrm>
+          <a:prstGeom prst="roundRect">
+            <a:avLst>
+              <a:gd name="adj" fmla="val 12000"/>
+            </a:avLst>
+          </a:prstGeom>
+          <a:solidFill>
+            <a:srgbClr val="E8F4FA"/>
+          </a:solidFill>
+          <a:ln>
+            <a:noFill/>
+          </a:ln>
+        </p:spPr>
+        <p:style>
+          <a:lnRef idx="1">
+            <a:schemeClr val="accent1"/>
+          </a:lnRef>
+          <a:fillRef idx="3">
+            <a:schemeClr val="accent1"/>
+          </a:fillRef>
+          <a:effectRef idx="2">
+            <a:schemeClr val="accent1"/>
+          </a:effectRef>
+          <a:fontRef idx="minor">
+            <a:schemeClr val="lt1"/>
+          </a:fontRef>
+        </p:style>
+        <p:txBody>
+          <a:bodyPr rtlCol="0" anchor="ctr"/>
+          <a:lstStyle/>
+          <a:p>
+            <a:pPr algn="ctr"/>
+          </a:p>
+        </p:txBody>
+      </p:sp>
+      <p:sp>
+        <p:nvSpPr>
+          <p:cNvPr id="11" name="Rounded Rectangle 10"/>
+          <p:cNvSpPr/>
+          <p:nvPr/>
+        </p:nvSpPr>
+        <p:spPr>
+          <a:xfrm>
+            <a:off x="594360" y="2680106"/>
+            <a:ext cx="438912" cy="438912"/>
+          </a:xfrm>
+          <a:prstGeom prst="roundRect">
+            <a:avLst>
+              <a:gd name="adj" fmla="val 12000"/>
+            </a:avLst>
+          </a:prstGeom>
+          <a:solidFill>
+            <a:srgbClr val="095292"/>
+          </a:solidFill>
+          <a:ln>
+            <a:noFill/>
+          </a:ln>
+        </p:spPr>
+        <p:style>
+          <a:lnRef idx="1">
+            <a:schemeClr val="accent1"/>
+          </a:lnRef>
+          <a:fillRef idx="3">
+            <a:schemeClr val="accent1"/>
+          </a:fillRef>
+          <a:effectRef idx="2">
+            <a:schemeClr val="accent1"/>
+          </a:effectRef>
+          <a:fontRef idx="minor">
+            <a:schemeClr val="lt1"/>
+          </a:fontRef>
+        </p:style>
+        <p:txBody>
+          <a:bodyPr rtlCol="0" anchor="ctr"/>
+          <a:lstStyle/>
+          <a:p>
+            <a:pPr algn="ctr"/>
+          </a:p>
+        </p:txBody>
+      </p:sp>
+      <p:sp>
+        <p:nvSpPr>
+          <p:cNvPr id="12" name="TextBox 11"/>
+          <p:cNvSpPr txBox="1"/>
+          <p:nvPr/>
+        </p:nvSpPr>
+        <p:spPr>
+          <a:xfrm>
+            <a:off x="594360" y="2680106"/>
+            <a:ext cx="438912" cy="438912"/>
+          </a:xfrm>
+          <a:prstGeom prst="rect">
+            <a:avLst/>
+          </a:prstGeom>
+          <a:noFill/>
+        </p:spPr>
+        <p:txBody>
+          <a:bodyPr wrap="square" anchor="ctr"/>
+          <a:lstStyle/>
+          <a:p>
+            <a:pPr algn="ctr"/>
+            <a:r>
+              <a:rPr sz="1600" b="1" i="0">
+                <a:solidFill>
+                  <a:srgbClr val="FFFFFF"/>
+                </a:solidFill>
+                <a:latin typeface="Calibri"/>
+              </a:rPr>
+              <a:t>2</a:t>
+            </a:r>
+          </a:p>
+        </p:txBody>
+      </p:sp>
+      <p:sp>
+        <p:nvSpPr>
+          <p:cNvPr id="13" name="TextBox 12"/>
+          <p:cNvSpPr txBox="1"/>
+          <p:nvPr/>
+        </p:nvSpPr>
+        <p:spPr>
+          <a:xfrm>
+            <a:off x="1188720" y="2536545"/>
+            <a:ext cx="10271455" cy="744321"/>
+          </a:xfrm>
+          <a:prstGeom prst="rect">
+            <a:avLst/>
+          </a:prstGeom>
+          <a:noFill/>
+        </p:spPr>
+        <p:txBody>
+          <a:bodyPr wrap="square" anchor="ctr"/>
+          <a:lstStyle/>
+          <a:p>
+            <a:r>
+              <a:rPr sz="1500" b="1" i="0">
+                <a:solidFill>
+                  <a:srgbClr val="095292"/>
+                </a:solidFill>
+                <a:latin typeface="Calibri"/>
+              </a:rPr>
+              <a:t>30 s · Lo que se repite</a:t>
+            </a:r>
+          </a:p>
+          <a:p>
+            <a:pPr>
+              <a:spcBef>
+                <a:spcPts val="200"/>
+              </a:spcBef>
+            </a:pPr>
+            <a:r>
+              <a:rPr sz="1300" b="0" i="0">
+                <a:solidFill>
+                  <a:srgbClr val="333333"/>
+                </a:solidFill>
+                <a:latin typeface="Calibri"/>
+              </a:rPr>
+              <a:t>La operación repetida y cuántas veces al día.</a:t>
+            </a:r>
+          </a:p>
+        </p:txBody>
+      </p:sp>
+      <p:sp>
+        <p:nvSpPr>
+          <p:cNvPr id="14" name="Rounded Rectangle 13"/>
+          <p:cNvSpPr/>
+          <p:nvPr/>
+        </p:nvSpPr>
+        <p:spPr>
+          <a:xfrm>
+            <a:off x="457200" y="3445459"/>
+            <a:ext cx="11277295" cy="908913"/>
+          </a:xfrm>
+          <a:prstGeom prst="roundRect">
+            <a:avLst>
+              <a:gd name="adj" fmla="val 12000"/>
+            </a:avLst>
+          </a:prstGeom>
+          <a:solidFill>
+            <a:srgbClr val="F2F2F2"/>
+          </a:solidFill>
+          <a:ln>
+            <a:noFill/>
+          </a:ln>
+        </p:spPr>
+        <p:style>
+          <a:lnRef idx="1">
+            <a:schemeClr val="accent1"/>
+          </a:lnRef>
+          <a:fillRef idx="3">
+            <a:schemeClr val="accent1"/>
+          </a:fillRef>
+          <a:effectRef idx="2">
+            <a:schemeClr val="accent1"/>
+          </a:effectRef>
+          <a:fontRef idx="minor">
+            <a:schemeClr val="lt1"/>
+          </a:fontRef>
+        </p:style>
+        <p:txBody>
+          <a:bodyPr rtlCol="0" anchor="ctr"/>
+          <a:lstStyle/>
+          <a:p>
+            <a:pPr algn="ctr"/>
+          </a:p>
+        </p:txBody>
+      </p:sp>
+      <p:sp>
+        <p:nvSpPr>
+          <p:cNvPr id="15" name="Rounded Rectangle 14"/>
+          <p:cNvSpPr/>
+          <p:nvPr/>
+        </p:nvSpPr>
+        <p:spPr>
+          <a:xfrm>
+            <a:off x="594360" y="3680460"/>
+            <a:ext cx="438912" cy="438912"/>
+          </a:xfrm>
+          <a:prstGeom prst="roundRect">
+            <a:avLst>
+              <a:gd name="adj" fmla="val 12000"/>
+            </a:avLst>
+          </a:prstGeom>
+          <a:solidFill>
+            <a:srgbClr val="095292"/>
+          </a:solidFill>
+          <a:ln>
+            <a:noFill/>
+          </a:ln>
+        </p:spPr>
+        <p:style>
+          <a:lnRef idx="1">
+            <a:schemeClr val="accent1"/>
+          </a:lnRef>
+          <a:fillRef idx="3">
+            <a:schemeClr val="accent1"/>
+          </a:fillRef>
+          <a:effectRef idx="2">
+            <a:schemeClr val="accent1"/>
+          </a:effectRef>
+          <a:fontRef idx="minor">
+            <a:schemeClr val="lt1"/>
+          </a:fontRef>
+        </p:style>
+        <p:txBody>
+          <a:bodyPr rtlCol="0" anchor="ctr"/>
+          <a:lstStyle/>
+          <a:p>
+            <a:pPr algn="ctr"/>
+          </a:p>
+        </p:txBody>
+      </p:sp>
+      <p:sp>
+        <p:nvSpPr>
+          <p:cNvPr id="16" name="TextBox 15"/>
+          <p:cNvSpPr txBox="1"/>
+          <p:nvPr/>
+        </p:nvSpPr>
+        <p:spPr>
+          <a:xfrm>
+            <a:off x="594360" y="3680460"/>
+            <a:ext cx="438912" cy="438912"/>
+          </a:xfrm>
+          <a:prstGeom prst="rect">
+            <a:avLst/>
+          </a:prstGeom>
+          <a:noFill/>
+        </p:spPr>
+        <p:txBody>
+          <a:bodyPr wrap="square" anchor="ctr"/>
+          <a:lstStyle/>
+          <a:p>
+            <a:pPr algn="ctr"/>
+            <a:r>
+              <a:rPr sz="1600" b="1" i="0">
+                <a:solidFill>
+                  <a:srgbClr val="FFFFFF"/>
+                </a:solidFill>
+                <a:latin typeface="Calibri"/>
+              </a:rPr>
+              <a:t>3</a:t>
+            </a:r>
+          </a:p>
+        </p:txBody>
+      </p:sp>
+      <p:sp>
+        <p:nvSpPr>
+          <p:cNvPr id="17" name="TextBox 16"/>
+          <p:cNvSpPr txBox="1"/>
+          <p:nvPr/>
+        </p:nvSpPr>
+        <p:spPr>
+          <a:xfrm>
+            <a:off x="1188720" y="3536899"/>
+            <a:ext cx="10271455" cy="744321"/>
+          </a:xfrm>
+          <a:prstGeom prst="rect">
+            <a:avLst/>
+          </a:prstGeom>
+          <a:noFill/>
+        </p:spPr>
+        <p:txBody>
+          <a:bodyPr wrap="square" anchor="ctr"/>
+          <a:lstStyle/>
+          <a:p>
+            <a:r>
+              <a:rPr sz="1500" b="1" i="0">
+                <a:solidFill>
+                  <a:srgbClr val="095292"/>
+                </a:solidFill>
+                <a:latin typeface="Calibri"/>
+              </a:rPr>
+              <a:t>50 s · La etapa que más pesa</a:t>
+            </a:r>
+          </a:p>
+          <a:p>
+            <a:pPr>
+              <a:spcBef>
+                <a:spcPts val="200"/>
+              </a:spcBef>
+            </a:pPr>
+            <a:r>
+              <a:rPr sz="1300" b="0" i="0">
+                <a:solidFill>
+                  <a:srgbClr val="333333"/>
+                </a:solidFill>
+                <a:latin typeface="Calibri"/>
+              </a:rPr>
+              <a:t>Cuál y por qué. Es el minuto obligatorio.</a:t>
+            </a:r>
+          </a:p>
+        </p:txBody>
+      </p:sp>
+      <p:sp>
+        <p:nvSpPr>
+          <p:cNvPr id="18" name="Rounded Rectangle 17"/>
+          <p:cNvSpPr/>
+          <p:nvPr/>
+        </p:nvSpPr>
+        <p:spPr>
+          <a:xfrm>
+            <a:off x="457200" y="4445812"/>
+            <a:ext cx="11277295" cy="908913"/>
+          </a:xfrm>
+          <a:prstGeom prst="roundRect">
+            <a:avLst>
+              <a:gd name="adj" fmla="val 12000"/>
+            </a:avLst>
+          </a:prstGeom>
+          <a:solidFill>
+            <a:srgbClr val="E8F4FA"/>
+          </a:solidFill>
+          <a:ln>
+            <a:noFill/>
+          </a:ln>
+        </p:spPr>
+        <p:style>
+          <a:lnRef idx="1">
+            <a:schemeClr val="accent1"/>
+          </a:lnRef>
+          <a:fillRef idx="3">
+            <a:schemeClr val="accent1"/>
+          </a:fillRef>
+          <a:effectRef idx="2">
+            <a:schemeClr val="accent1"/>
+          </a:effectRef>
+          <a:fontRef idx="minor">
+            <a:schemeClr val="lt1"/>
+          </a:fontRef>
+        </p:style>
+        <p:txBody>
+          <a:bodyPr rtlCol="0" anchor="ctr"/>
+          <a:lstStyle/>
+          <a:p>
+            <a:pPr algn="ctr"/>
+          </a:p>
+        </p:txBody>
+      </p:sp>
+      <p:sp>
+        <p:nvSpPr>
+          <p:cNvPr id="19" name="Rounded Rectangle 18"/>
+          <p:cNvSpPr/>
+          <p:nvPr/>
+        </p:nvSpPr>
+        <p:spPr>
+          <a:xfrm>
+            <a:off x="594360" y="4680813"/>
+            <a:ext cx="438912" cy="438912"/>
+          </a:xfrm>
+          <a:prstGeom prst="roundRect">
+            <a:avLst>
+              <a:gd name="adj" fmla="val 12000"/>
+            </a:avLst>
+          </a:prstGeom>
+          <a:solidFill>
+            <a:srgbClr val="095292"/>
+          </a:solidFill>
+          <a:ln>
+            <a:noFill/>
+          </a:ln>
+        </p:spPr>
+        <p:style>
+          <a:lnRef idx="1">
+            <a:schemeClr val="accent1"/>
+          </a:lnRef>
+          <a:fillRef idx="3">
+            <a:schemeClr val="accent1"/>
+          </a:fillRef>
+          <a:effectRef idx="2">
+            <a:schemeClr val="accent1"/>
+          </a:effectRef>
+          <a:fontRef idx="minor">
+            <a:schemeClr val="lt1"/>
+          </a:fontRef>
+        </p:style>
+        <p:txBody>
+          <a:bodyPr rtlCol="0" anchor="ctr"/>
+          <a:lstStyle/>
+          <a:p>
+            <a:pPr algn="ctr"/>
+          </a:p>
+        </p:txBody>
+      </p:sp>
+      <p:sp>
+        <p:nvSpPr>
+          <p:cNvPr id="20" name="TextBox 19"/>
+          <p:cNvSpPr txBox="1"/>
+          <p:nvPr/>
+        </p:nvSpPr>
+        <p:spPr>
+          <a:xfrm>
+            <a:off x="594360" y="4680813"/>
+            <a:ext cx="438912" cy="438912"/>
+          </a:xfrm>
+          <a:prstGeom prst="rect">
+            <a:avLst/>
+          </a:prstGeom>
+          <a:noFill/>
+        </p:spPr>
+        <p:txBody>
+          <a:bodyPr wrap="square" anchor="ctr"/>
+          <a:lstStyle/>
+          <a:p>
+            <a:pPr algn="ctr"/>
+            <a:r>
+              <a:rPr sz="1600" b="1" i="0">
+                <a:solidFill>
+                  <a:srgbClr val="FFFFFF"/>
+                </a:solidFill>
+                <a:latin typeface="Calibri"/>
+              </a:rPr>
+              <a:t>4</a:t>
+            </a:r>
+          </a:p>
+        </p:txBody>
+      </p:sp>
+      <p:sp>
+        <p:nvSpPr>
+          <p:cNvPr id="21" name="TextBox 20"/>
+          <p:cNvSpPr txBox="1"/>
+          <p:nvPr/>
+        </p:nvSpPr>
+        <p:spPr>
+          <a:xfrm>
+            <a:off x="1188720" y="4537252"/>
+            <a:ext cx="10271455" cy="744321"/>
+          </a:xfrm>
+          <a:prstGeom prst="rect">
+            <a:avLst/>
+          </a:prstGeom>
+          <a:noFill/>
+        </p:spPr>
+        <p:txBody>
+          <a:bodyPr wrap="square" anchor="ctr"/>
+          <a:lstStyle/>
+          <a:p>
+            <a:r>
+              <a:rPr sz="1500" b="1" i="0">
+                <a:solidFill>
+                  <a:srgbClr val="095292"/>
+                </a:solidFill>
+                <a:latin typeface="Calibri"/>
+              </a:rPr>
+              <a:t>50 s · Las dos decisiones y el indicador</a:t>
+            </a:r>
+          </a:p>
+          <a:p>
+            <a:pPr>
+              <a:spcBef>
+                <a:spcPts val="200"/>
+              </a:spcBef>
+            </a:pPr>
+            <a:r>
+              <a:rPr sz="1300" b="0" i="0">
+                <a:solidFill>
+                  <a:srgbClr val="333333"/>
+                </a:solidFill>
+                <a:latin typeface="Calibri"/>
+              </a:rPr>
+              <a:t>Qué van a cambiar y cómo se sabrá si sirvió.</a:t>
+            </a:r>
+          </a:p>
+        </p:txBody>
+      </p:sp>
+      <p:sp>
+        <p:nvSpPr>
+          <p:cNvPr id="22" name="Rounded Rectangle 21"/>
+          <p:cNvSpPr/>
+          <p:nvPr/>
+        </p:nvSpPr>
+        <p:spPr>
+          <a:xfrm>
+            <a:off x="457200" y="5446166"/>
+            <a:ext cx="11277295" cy="908913"/>
+          </a:xfrm>
+          <a:prstGeom prst="roundRect">
+            <a:avLst>
+              <a:gd name="adj" fmla="val 12000"/>
+            </a:avLst>
+          </a:prstGeom>
+          <a:solidFill>
+            <a:srgbClr val="F2F2F2"/>
+          </a:solidFill>
+          <a:ln>
+            <a:noFill/>
+          </a:ln>
+        </p:spPr>
+        <p:style>
+          <a:lnRef idx="1">
+            <a:schemeClr val="accent1"/>
+          </a:lnRef>
+          <a:fillRef idx="3">
+            <a:schemeClr val="accent1"/>
+          </a:fillRef>
+          <a:effectRef idx="2">
+            <a:schemeClr val="accent1"/>
+          </a:effectRef>
+          <a:fontRef idx="minor">
+            <a:schemeClr val="lt1"/>
+          </a:fontRef>
+        </p:style>
+        <p:txBody>
+          <a:bodyPr rtlCol="0" anchor="ctr"/>
+          <a:lstStyle/>
+          <a:p>
+            <a:pPr algn="ctr"/>
+          </a:p>
+        </p:txBody>
+      </p:sp>
+      <p:sp>
+        <p:nvSpPr>
+          <p:cNvPr id="23" name="Rounded Rectangle 22"/>
+          <p:cNvSpPr/>
+          <p:nvPr/>
+        </p:nvSpPr>
+        <p:spPr>
+          <a:xfrm>
+            <a:off x="594360" y="5681167"/>
+            <a:ext cx="438912" cy="438912"/>
+          </a:xfrm>
+          <a:prstGeom prst="roundRect">
+            <a:avLst>
+              <a:gd name="adj" fmla="val 12000"/>
+            </a:avLst>
+          </a:prstGeom>
+          <a:solidFill>
+            <a:srgbClr val="095292"/>
+          </a:solidFill>
+          <a:ln>
+            <a:noFill/>
+          </a:ln>
+        </p:spPr>
+        <p:style>
+          <a:lnRef idx="1">
+            <a:schemeClr val="accent1"/>
+          </a:lnRef>
+          <a:fillRef idx="3">
+            <a:schemeClr val="accent1"/>
+          </a:fillRef>
+          <a:effectRef idx="2">
+            <a:schemeClr val="accent1"/>
+          </a:effectRef>
+          <a:fontRef idx="minor">
+            <a:schemeClr val="lt1"/>
+          </a:fontRef>
+        </p:style>
+        <p:txBody>
+          <a:bodyPr rtlCol="0" anchor="ctr"/>
+          <a:lstStyle/>
+          <a:p>
+            <a:pPr algn="ctr"/>
+          </a:p>
+        </p:txBody>
+      </p:sp>
+      <p:sp>
+        <p:nvSpPr>
+          <p:cNvPr id="24" name="TextBox 23"/>
+          <p:cNvSpPr txBox="1"/>
+          <p:nvPr/>
+        </p:nvSpPr>
+        <p:spPr>
+          <a:xfrm>
+            <a:off x="594360" y="5681167"/>
+            <a:ext cx="438912" cy="438912"/>
+          </a:xfrm>
+          <a:prstGeom prst="rect">
+            <a:avLst/>
+          </a:prstGeom>
+          <a:noFill/>
+        </p:spPr>
+        <p:txBody>
+          <a:bodyPr wrap="square" anchor="ctr"/>
+          <a:lstStyle/>
+          <a:p>
+            <a:pPr algn="ctr"/>
+            <a:r>
+              <a:rPr sz="1600" b="1" i="0">
+                <a:solidFill>
+                  <a:srgbClr val="FFFFFF"/>
+                </a:solidFill>
+                <a:latin typeface="Calibri"/>
+              </a:rPr>
+              <a:t>5</a:t>
+            </a:r>
+          </a:p>
+        </p:txBody>
+      </p:sp>
+      <p:sp>
+        <p:nvSpPr>
+          <p:cNvPr id="25" name="TextBox 24"/>
+          <p:cNvSpPr txBox="1"/>
+          <p:nvPr/>
+        </p:nvSpPr>
+        <p:spPr>
+          <a:xfrm>
+            <a:off x="1188720" y="5537606"/>
+            <a:ext cx="10271455" cy="744321"/>
+          </a:xfrm>
+          <a:prstGeom prst="rect">
+            <a:avLst/>
+          </a:prstGeom>
+          <a:noFill/>
+        </p:spPr>
+        <p:txBody>
+          <a:bodyPr wrap="square" anchor="ctr"/>
+          <a:lstStyle/>
+          <a:p>
+            <a:r>
+              <a:rPr sz="1500" b="1" i="0">
+                <a:solidFill>
+                  <a:srgbClr val="095292"/>
+                </a:solidFill>
+                <a:latin typeface="Calibri"/>
+              </a:rPr>
+              <a:t>10 s · La fuente</a:t>
+            </a:r>
+          </a:p>
+          <a:p>
+            <a:pPr>
+              <a:spcBef>
+                <a:spcPts val="200"/>
+              </a:spcBef>
+            </a:pPr>
+            <a:r>
+              <a:rPr sz="1300" b="0" i="0">
+                <a:solidFill>
+                  <a:srgbClr val="333333"/>
+                </a:solidFill>
+                <a:latin typeface="Calibri"/>
+              </a:rPr>
+              <a:t>De dónde salió cualquier cifra que hayan dicho.</a:t>
+            </a:r>
+          </a:p>
+        </p:txBody>
+      </p:sp>
+      <p:sp>
+        <p:nvSpPr>
+          <p:cNvPr id="26" name="TextBox 25"/>
+          <p:cNvSpPr txBox="1"/>
+          <p:nvPr/>
+        </p:nvSpPr>
+        <p:spPr>
+          <a:xfrm>
+            <a:off x="11185855" y="6473952"/>
+            <a:ext cx="640080" cy="274320"/>
+          </a:xfrm>
+          <a:prstGeom prst="rect">
+            <a:avLst/>
+          </a:prstGeom>
+          <a:noFill/>
+        </p:spPr>
+        <p:txBody>
+          <a:bodyPr wrap="square">
+            <a:spAutoFit/>
+          </a:bodyPr>
+          <a:lstStyle/>
+          <a:p>
+            <a:pPr algn="r"/>
+            <a:r>
+              <a:rPr sz="1100" b="0" i="0">
+                <a:solidFill>
+                  <a:srgbClr val="666666"/>
+                </a:solidFill>
+                <a:latin typeface="Calibri"/>
+              </a:rPr>
+              <a:t>22</a:t>
+            </a:r>
+          </a:p>
+        </p:txBody>
+      </p:sp>
+    </p:spTree>
+  </p:cSld>
+  <p:clrMapOvr>
+    <a:masterClrMapping/>
+  </p:clrMapOvr>
+</p:sld>
+</file>
+
+<file path=ppt/slides/slide23.xml><?xml version="1.0" encoding="utf-8"?>
+<p:sld xmlns:a="http://schemas.openxmlformats.org/drawingml/2006/main" xmlns:p="http://schemas.openxmlformats.org/presentationml/2006/main" xmlns:r="http://schemas.openxmlformats.org/officeDocument/2006/relationships">
+  <p:cSld>
+    <p:bg>
+      <p:bgPr>
+        <a:solidFill>
+          <a:srgbClr val="FFFFFF"/>
+        </a:solidFill>
+        <a:effectLst/>
+      </p:bgPr>
+    </p:bg>
+    <p:spTree>
+      <p:nvGrpSpPr>
+        <p:cNvPr id="1" name=""/>
+        <p:cNvGrpSpPr/>
+        <p:nvPr/>
+      </p:nvGrpSpPr>
+      <p:grpSpPr/>
+      <p:sp>
+        <p:nvSpPr>
+          <p:cNvPr id="2" name="Rectangle 1"/>
+          <p:cNvSpPr/>
+          <p:nvPr/>
+        </p:nvSpPr>
+        <p:spPr>
+          <a:xfrm>
+            <a:off x="0" y="0"/>
+            <a:ext cx="12191695" cy="960120"/>
+          </a:xfrm>
+          <a:prstGeom prst="rect">
+            <a:avLst/>
+          </a:prstGeom>
+          <a:solidFill>
+            <a:srgbClr val="095292"/>
+          </a:solidFill>
+          <a:ln>
+            <a:noFill/>
+          </a:ln>
+        </p:spPr>
+        <p:style>
+          <a:lnRef idx="1">
+            <a:schemeClr val="accent1"/>
+          </a:lnRef>
+          <a:fillRef idx="3">
+            <a:schemeClr val="accent1"/>
+          </a:fillRef>
+          <a:effectRef idx="2">
+            <a:schemeClr val="accent1"/>
+          </a:effectRef>
+          <a:fontRef idx="minor">
+            <a:schemeClr val="lt1"/>
+          </a:fontRef>
+        </p:style>
+        <p:txBody>
+          <a:bodyPr rtlCol="0" anchor="ctr"/>
+          <a:lstStyle/>
+          <a:p>
+            <a:pPr algn="ctr"/>
+          </a:p>
+        </p:txBody>
+      </p:sp>
+      <p:sp>
+        <p:nvSpPr>
+          <p:cNvPr id="3" name="Rectangle 2"/>
+          <p:cNvSpPr/>
+          <p:nvPr/>
+        </p:nvSpPr>
+        <p:spPr>
+          <a:xfrm>
+            <a:off x="0" y="960120"/>
+            <a:ext cx="12191695" cy="41148"/>
+          </a:xfrm>
+          <a:prstGeom prst="rect">
+            <a:avLst/>
+          </a:prstGeom>
+          <a:solidFill>
+            <a:srgbClr val="FFD000"/>
+          </a:solidFill>
+          <a:ln>
+            <a:noFill/>
+          </a:ln>
+        </p:spPr>
+        <p:style>
+          <a:lnRef idx="1">
+            <a:schemeClr val="accent1"/>
+          </a:lnRef>
+          <a:fillRef idx="3">
+            <a:schemeClr val="accent1"/>
+          </a:fillRef>
+          <a:effectRef idx="2">
+            <a:schemeClr val="accent1"/>
+          </a:effectRef>
+          <a:fontRef idx="minor">
+            <a:schemeClr val="lt1"/>
+          </a:fontRef>
+        </p:style>
+        <p:txBody>
+          <a:bodyPr rtlCol="0" anchor="ctr"/>
+          <a:lstStyle/>
+          <a:p>
+            <a:pPr algn="ctr"/>
+          </a:p>
+        </p:txBody>
+      </p:sp>
+      <p:sp>
+        <p:nvSpPr>
+          <p:cNvPr id="4" name="TextBox 3"/>
+          <p:cNvSpPr txBox="1"/>
+          <p:nvPr/>
+        </p:nvSpPr>
+        <p:spPr>
+          <a:xfrm>
+            <a:off x="457200" y="164592"/>
+            <a:ext cx="11277295" cy="502920"/>
+          </a:xfrm>
+          <a:prstGeom prst="rect">
+            <a:avLst/>
+          </a:prstGeom>
+          <a:noFill/>
+        </p:spPr>
+        <p:txBody>
+          <a:bodyPr wrap="square">
+            <a:spAutoFit/>
+          </a:bodyPr>
+          <a:lstStyle/>
+          <a:p>
+            <a:r>
+              <a:rPr sz="2600" b="1" i="0">
+                <a:solidFill>
+                  <a:srgbClr val="FFFFFF"/>
+                </a:solidFill>
+                <a:latin typeface="Calibri"/>
+              </a:rPr>
+              <a:t>Para la Clase 6</a:t>
+            </a:r>
+          </a:p>
+        </p:txBody>
+      </p:sp>
+      <p:sp>
+        <p:nvSpPr>
+          <p:cNvPr id="5" name="TextBox 4"/>
+          <p:cNvSpPr txBox="1"/>
+          <p:nvPr/>
+        </p:nvSpPr>
+        <p:spPr>
+          <a:xfrm>
+            <a:off x="457200" y="1170432"/>
+            <a:ext cx="11277295" cy="5230368"/>
+          </a:xfrm>
+          <a:prstGeom prst="rect">
+            <a:avLst/>
+          </a:prstGeom>
+          <a:noFill/>
+        </p:spPr>
+        <p:txBody>
+          <a:bodyPr wrap="square">
+            <a:spAutoFit/>
+          </a:bodyPr>
+          <a:lstStyle/>
+          <a:p>
+            <a:pPr>
+              <a:spcAft>
+                <a:spcPts val="800"/>
+              </a:spcAft>
+            </a:pPr>
+            <a:r>
+              <a:rPr sz="2000" b="0" i="0">
+                <a:solidFill>
+                  <a:srgbClr val="333333"/>
+                </a:solidFill>
+                <a:latin typeface="Calibri"/>
+              </a:rPr>
+              <a:t>–   </a:t>
+            </a:r>
+            <a:r>
+              <a:rPr sz="2000" b="1" i="0">
+                <a:solidFill>
+                  <a:srgbClr val="333333"/>
+                </a:solidFill>
+                <a:latin typeface="Calibri"/>
+              </a:rPr>
+              <a:t>Trabajo dirigido:</a:t>
+            </a:r>
+            <a:r>
+              <a:rPr sz="2000" b="0" i="0">
+                <a:solidFill>
+                  <a:srgbClr val="333333"/>
+                </a:solidFill>
+                <a:latin typeface="Calibri"/>
+              </a:rPr>
+              <a:t> Revisión de casos de impacto ambiental — un caso documentado de impacto ambiental de infraestructura digital, con fuente, año y alcance declarados.</a:t>
+            </a:r>
+          </a:p>
+          <a:p>
+            <a:pPr>
+              <a:spcAft>
+                <a:spcPts val="800"/>
+              </a:spcAft>
+            </a:pPr>
+            <a:r>
+              <a:rPr sz="2000" b="0" i="0">
+                <a:solidFill>
+                  <a:srgbClr val="333333"/>
+                </a:solidFill>
+                <a:latin typeface="Calibri"/>
+              </a:rPr>
+              <a:t>–   </a:t>
+            </a:r>
+            <a:r>
+              <a:rPr sz="2000" b="1" i="0">
+                <a:solidFill>
+                  <a:srgbClr val="333333"/>
+                </a:solidFill>
+                <a:latin typeface="Calibri"/>
+              </a:rPr>
+              <a:t>Trabajo independiente:</a:t>
+            </a:r>
+            <a:r>
+              <a:rPr sz="2000" b="0" i="0">
+                <a:solidFill>
+                  <a:srgbClr val="333333"/>
+                </a:solidFill>
+                <a:latin typeface="Calibri"/>
+              </a:rPr>
+              <a:t> Informe sobre sostenibilidad: una página con la huella de su sistema, las dos decisiones y el indicador, en la carpeta del equipo.</a:t>
+            </a:r>
+          </a:p>
+          <a:p>
+            <a:pPr>
+              <a:spcAft>
+                <a:spcPts val="800"/>
+              </a:spcAft>
+            </a:pPr>
+            <a:r>
+              <a:rPr sz="2000" b="0" i="0">
+                <a:solidFill>
+                  <a:srgbClr val="333333"/>
+                </a:solidFill>
+                <a:latin typeface="Calibri"/>
+              </a:rPr>
+              <a:t>–   </a:t>
+            </a:r>
+            <a:r>
+              <a:rPr sz="2000" b="1" i="0">
+                <a:solidFill>
+                  <a:srgbClr val="333333"/>
+                </a:solidFill>
+                <a:latin typeface="Calibri"/>
+              </a:rPr>
+              <a:t>Clase 6 · Análisis de problemas tecnológicos del entorno</a:t>
+            </a:r>
+            <a:r>
+              <a:rPr sz="2000" b="0" i="0">
+                <a:solidFill>
+                  <a:srgbClr val="333333"/>
+                </a:solidFill>
+                <a:latin typeface="Calibri"/>
+              </a:rPr>
+              <a:t> — </a:t>
+            </a:r>
+            <a:r>
+              <a:rPr sz="2000" b="1" i="0">
+                <a:solidFill>
+                  <a:srgbClr val="333333"/>
+                </a:solidFill>
+                <a:latin typeface="Calibri"/>
+              </a:rPr>
+              <a:t>cierra el corte 1</a:t>
+            </a:r>
+            <a:r>
+              <a:rPr sz="2000" b="0" i="0">
+                <a:solidFill>
+                  <a:srgbClr val="333333"/>
+                </a:solidFill>
+                <a:latin typeface="Calibri"/>
+              </a:rPr>
+              <a:t>: se arma la ficha del problema del proyecto del semestre y hay evaluación de corte en la plataforma del curso al final de la sesión.</a:t>
+            </a:r>
+          </a:p>
+          <a:p>
+            <a:pPr>
+              <a:spcAft>
+                <a:spcPts val="800"/>
+              </a:spcAft>
+            </a:pPr>
+            <a:r>
+              <a:rPr sz="2000" b="0" i="0">
+                <a:solidFill>
+                  <a:srgbClr val="333333"/>
+                </a:solidFill>
+                <a:latin typeface="Calibri"/>
+              </a:rPr>
+              <a:t>–   </a:t>
+            </a:r>
+            <a:r>
+              <a:rPr sz="2000" b="1" i="0">
+                <a:solidFill>
+                  <a:srgbClr val="333333"/>
+                </a:solidFill>
+                <a:latin typeface="Calibri"/>
+              </a:rPr>
+              <a:t>Aviso:</a:t>
+            </a:r>
+            <a:r>
+              <a:rPr sz="2000" b="0" i="0">
+                <a:solidFill>
+                  <a:srgbClr val="333333"/>
+                </a:solidFill>
+                <a:latin typeface="Calibri"/>
+              </a:rPr>
+              <a:t> La sesión 6 cierra el corte. Traigan </a:t>
+            </a:r>
+            <a:r>
+              <a:rPr sz="2000" b="1" i="0">
+                <a:solidFill>
+                  <a:srgbClr val="333333"/>
+                </a:solidFill>
+                <a:latin typeface="Calibri"/>
+              </a:rPr>
+              <a:t>el problema de la sesión 1, la ficha de sistema de la sesión 3, la regla ética de la sesión 4 y el indicador de hoy</a:t>
+            </a:r>
+            <a:r>
+              <a:rPr sz="2000" b="0" i="0">
+                <a:solidFill>
+                  <a:srgbClr val="333333"/>
+                </a:solidFill>
+                <a:latin typeface="Calibri"/>
+              </a:rPr>
+              <a:t>: la ficha del problema se arma con esas cuatro cosas y se entrega en clase. Y lean el documento </a:t>
+            </a:r>
+            <a:r>
+              <a:rPr sz="2000" b="1" i="0">
+                <a:solidFill>
+                  <a:srgbClr val="333333"/>
+                </a:solidFill>
+                <a:latin typeface="Calibri"/>
+              </a:rPr>
+              <a:t>«Evaluación del Corte 1 — cómo prepararse»</a:t>
+            </a:r>
+            <a:r>
+              <a:rPr sz="2000" b="0" i="0">
+                <a:solidFill>
+                  <a:srgbClr val="333333"/>
+                </a:solidFill>
+                <a:latin typeface="Calibri"/>
+              </a:rPr>
+              <a:t>: trae qué repasar de cada sesión para los 20 minutos de evaluación del final.</a:t>
+            </a:r>
+          </a:p>
+          <a:p>
+            <a:pPr>
+              <a:spcAft>
+                <a:spcPts val="800"/>
+              </a:spcAft>
+            </a:pPr>
+            <a:r>
+              <a:rPr sz="2000" b="0" i="0">
+                <a:solidFill>
+                  <a:srgbClr val="333333"/>
+                </a:solidFill>
+                <a:latin typeface="Calibri"/>
+              </a:rPr>
+              <a:t>–   </a:t>
+            </a:r>
+            <a:r>
+              <a:rPr sz="2000" b="1" i="0">
+                <a:solidFill>
+                  <a:srgbClr val="333333"/>
+                </a:solidFill>
+                <a:latin typeface="Calibri"/>
+              </a:rPr>
+              <a:t>Antes de salir:</a:t>
+            </a:r>
+            <a:r>
+              <a:rPr sz="2000" b="0" i="0">
+                <a:solidFill>
+                  <a:srgbClr val="333333"/>
+                </a:solidFill>
+                <a:latin typeface="Calibri"/>
+              </a:rPr>
+              <a:t> el enlace del documento del equipo en el chat, con permiso de lectura para el docente, y el nombre del vocero de hoy.</a:t>
+            </a:r>
+          </a:p>
+        </p:txBody>
+      </p:sp>
+      <p:sp>
+        <p:nvSpPr>
+          <p:cNvPr id="6" name="TextBox 5"/>
+          <p:cNvSpPr txBox="1"/>
+          <p:nvPr/>
+        </p:nvSpPr>
+        <p:spPr>
+          <a:xfrm>
+            <a:off x="11185855" y="6473952"/>
+            <a:ext cx="640080" cy="274320"/>
+          </a:xfrm>
+          <a:prstGeom prst="rect">
+            <a:avLst/>
+          </a:prstGeom>
+          <a:noFill/>
+        </p:spPr>
+        <p:txBody>
+          <a:bodyPr wrap="square">
+            <a:spAutoFit/>
+          </a:bodyPr>
+          <a:lstStyle/>
+          <a:p>
+            <a:pPr algn="r"/>
+            <a:r>
+              <a:rPr sz="1100" b="0" i="0">
+                <a:solidFill>
+                  <a:srgbClr val="666666"/>
+                </a:solidFill>
+                <a:latin typeface="Calibri"/>
+              </a:rPr>
+              <a:t>23</a:t>
+            </a:r>
+          </a:p>
+        </p:txBody>
+      </p:sp>
+    </p:spTree>
+  </p:cSld>
+  <p:clrMapOvr>
+    <a:masterClrMapping/>
+  </p:clrMapOvr>
+</p:sld>
+</file>
+
+<file path=ppt/slides/slide24.xml><?xml version="1.0" encoding="utf-8"?>
+<p:sld xmlns:a="http://schemas.openxmlformats.org/drawingml/2006/main" xmlns:p="http://schemas.openxmlformats.org/presentationml/2006/main" xmlns:r="http://schemas.openxmlformats.org/officeDocument/2006/relationships">
+  <p:cSld>
+    <p:bg>
+      <p:bgPr>
+        <a:solidFill>
+          <a:srgbClr val="FFFFFF"/>
+        </a:solidFill>
+        <a:effectLst/>
+      </p:bgPr>
+    </p:bg>
+    <p:spTree>
+      <p:nvGrpSpPr>
+        <p:cNvPr id="1" name=""/>
+        <p:cNvGrpSpPr/>
+        <p:nvPr/>
+      </p:nvGrpSpPr>
+      <p:grpSpPr/>
+      <p:sp>
+        <p:nvSpPr>
+          <p:cNvPr id="2" name="Rectangle 1"/>
+          <p:cNvSpPr/>
+          <p:nvPr/>
+        </p:nvSpPr>
+        <p:spPr>
+          <a:xfrm>
+            <a:off x="0" y="0"/>
+            <a:ext cx="12191695" cy="164592"/>
+          </a:xfrm>
+          <a:prstGeom prst="rect">
+            <a:avLst/>
+          </a:prstGeom>
+          <a:solidFill>
+            <a:srgbClr val="269CCB"/>
+          </a:solidFill>
+          <a:ln>
+            <a:noFill/>
+          </a:ln>
+        </p:spPr>
+        <p:style>
+          <a:lnRef idx="1">
+            <a:schemeClr val="accent1"/>
+          </a:lnRef>
+          <a:fillRef idx="3">
+            <a:schemeClr val="accent1"/>
+          </a:fillRef>
+          <a:effectRef idx="2">
+            <a:schemeClr val="accent1"/>
+          </a:effectRef>
+          <a:fontRef idx="minor">
+            <a:schemeClr val="lt1"/>
+          </a:fontRef>
+        </p:style>
+        <p:txBody>
+          <a:bodyPr rtlCol="0" anchor="ctr"/>
+          <a:lstStyle/>
+          <a:p>
+            <a:pPr algn="ctr"/>
+          </a:p>
+        </p:txBody>
+      </p:sp>
+      <p:pic>
+        <p:nvPicPr>
+          <p:cNvPr id="3" name="Picture 2" descr="logo_uniajc_color.png"/>
+          <p:cNvPicPr>
+            <a:picLocks noChangeAspect="1"/>
+          </p:cNvPicPr>
+          <p:nvPr/>
+        </p:nvPicPr>
+        <p:blipFill>
+          <a:blip r:embed="rId2"/>
+          <a:stretch>
+            <a:fillRect/>
+          </a:stretch>
+        </p:blipFill>
+        <p:spPr>
+          <a:xfrm>
+            <a:off x="10271455" y="5998464"/>
+            <a:ext cx="1463040" cy="643233"/>
+          </a:xfrm>
+          <a:prstGeom prst="rect">
+            <a:avLst/>
+          </a:prstGeom>
+        </p:spPr>
+      </p:pic>
+      <p:sp>
+        <p:nvSpPr>
+          <p:cNvPr id="4" name="TextBox 3"/>
+          <p:cNvSpPr txBox="1"/>
+          <p:nvPr/>
+        </p:nvSpPr>
+        <p:spPr>
+          <a:xfrm>
+            <a:off x="457200" y="1737360"/>
+            <a:ext cx="11277295" cy="1097280"/>
+          </a:xfrm>
+          <a:prstGeom prst="rect">
+            <a:avLst/>
+          </a:prstGeom>
+          <a:noFill/>
+        </p:spPr>
+        <p:txBody>
+          <a:bodyPr wrap="square" anchor="ctr"/>
+          <a:lstStyle/>
+          <a:p>
+            <a:pPr algn="ctr"/>
+            <a:r>
+              <a:rPr sz="3400" b="1" i="0">
+                <a:solidFill>
+                  <a:srgbClr val="095292"/>
+                </a:solidFill>
+                <a:latin typeface="Calibri"/>
+              </a:rPr>
+              <a:t>Nos vemos en la sesión 6 — cierra el corte 1</a:t>
+            </a:r>
+          </a:p>
+        </p:txBody>
+      </p:sp>
+      <p:sp>
+        <p:nvSpPr>
+          <p:cNvPr id="5" name="TextBox 4"/>
+          <p:cNvSpPr txBox="1"/>
+          <p:nvPr/>
+        </p:nvSpPr>
+        <p:spPr>
+          <a:xfrm>
+            <a:off x="457200" y="3017520"/>
+            <a:ext cx="11277295" cy="1645920"/>
+          </a:xfrm>
+          <a:prstGeom prst="rect">
+            <a:avLst/>
+          </a:prstGeom>
+          <a:noFill/>
+        </p:spPr>
+        <p:txBody>
+          <a:bodyPr wrap="square">
+            <a:spAutoFit/>
+          </a:bodyPr>
+          <a:lstStyle/>
+          <a:p>
+            <a:pPr algn="ctr">
+              <a:spcAft>
+                <a:spcPts val="600"/>
+              </a:spcAft>
+            </a:pPr>
+            <a:r>
+              <a:rPr sz="1600" b="0" i="0">
+                <a:solidFill>
+                  <a:srgbClr val="333333"/>
+                </a:solidFill>
+                <a:latin typeface="Calibri"/>
+              </a:rPr>
+              <a:t>El rol del ingeniero en el contexto ambiental · Clase 5</a:t>
+            </a:r>
+          </a:p>
+          <a:p>
+            <a:pPr algn="ctr">
+              <a:spcAft>
+                <a:spcPts val="600"/>
+              </a:spcAft>
+            </a:pPr>
+            <a:r>
+              <a:rPr sz="1600" b="0" i="0">
+                <a:solidFill>
+                  <a:srgbClr val="333333"/>
+                </a:solidFill>
+                <a:latin typeface="Calibri"/>
+              </a:rPr>
+              <a:t>FI300101 · UNIAJC · Ingeniería de Sistemas</a:t>
+            </a:r>
+          </a:p>
+        </p:txBody>
+      </p:sp>
+      <p:sp>
+        <p:nvSpPr>
+          <p:cNvPr id="6" name="TextBox 5"/>
+          <p:cNvSpPr txBox="1"/>
+          <p:nvPr/>
+        </p:nvSpPr>
+        <p:spPr>
+          <a:xfrm>
+            <a:off x="457200" y="4754880"/>
+            <a:ext cx="11277295" cy="640080"/>
+          </a:xfrm>
+          <a:prstGeom prst="rect">
+            <a:avLst/>
+          </a:prstGeom>
+          <a:noFill/>
+        </p:spPr>
+        <p:txBody>
+          <a:bodyPr wrap="square">
+            <a:spAutoFit/>
+          </a:bodyPr>
+          <a:lstStyle/>
+          <a:p>
+            <a:pPr algn="ctr"/>
+            <a:r>
+              <a:rPr sz="2000" b="1" i="0">
+                <a:solidFill>
+                  <a:srgbClr val="269CCB"/>
+                </a:solidFill>
+                <a:latin typeface="Calibri"/>
+              </a:rPr>
+              <a:t>El software no es inmaterial: pesa, consume y termina en basura</a:t>
             </a:r>
           </a:p>
         </p:txBody>

--- a/Introduccion a la Ingenieria/Clases/Clase 5 - El rol del ingeniero en el contexto ambiental/Presentacion.pptx
+++ b/Introduccion a la Ingenieria/Clases/Clase 5 - El rol del ingeniero en el contexto ambiental/Presentacion.pptx
@@ -29,6 +29,7 @@
     <p:sldId id="277" r:id="rId28"/>
     <p:sldId id="278" r:id="rId29"/>
     <p:sldId id="279" r:id="rId30"/>
+    <p:sldId id="280" r:id="rId31"/>
   </p:sldIdLst>
   <p:sldSz cx="12191695" cy="6858000" type="screen4x3"/>
   <p:notesSz cx="6858000" cy="9144000"/>
@@ -4269,7 +4270,7 @@
                 </a:solidFill>
                 <a:latin typeface="Calibri"/>
               </a:rPr>
-              <a:t>La pregunta de entrada: darle materia a algo que parece no tenerla</a:t>
+              <a:t>La pregunta de entrada: darle materia a algo que parece no tenerla (1/2)</a:t>
             </a:r>
           </a:p>
         </p:txBody>
@@ -4341,70 +4342,6 @@
                 <a:latin typeface="Calibri"/>
               </a:rPr>
               <a:t>–   Del modelo, del clima y del año**, y que las cifras que circulan varían por órdenes de magnitud.</a:t>
-            </a:r>
-          </a:p>
-          <a:p>
-            <a:pPr>
-              <a:spcAft>
-                <a:spcPts val="800"/>
-              </a:spcAft>
-            </a:pPr>
-            <a:r>
-              <a:rPr sz="2000" b="0" i="0">
-                <a:solidFill>
-                  <a:srgbClr val="333333"/>
-                </a:solidFill>
-                <a:latin typeface="Calibri"/>
-              </a:rPr>
-              <a:t>–   Eso no debilita la clase: es la clase.</a:t>
-            </a:r>
-          </a:p>
-          <a:p>
-            <a:pPr>
-              <a:spcAft>
-                <a:spcPts val="800"/>
-              </a:spcAft>
-            </a:pPr>
-            <a:r>
-              <a:rPr sz="2000" b="0" i="0">
-                <a:solidFill>
-                  <a:srgbClr val="333333"/>
-                </a:solidFill>
-                <a:latin typeface="Calibri"/>
-              </a:rPr>
-              <a:t>–   El objetivo no es que se lleven un número, es que entiendan que hay agua y electricidad detrás de algo que se siente inmaterial, y que quien afirme un número tiene que decir de dónde salió.</a:t>
-            </a:r>
-          </a:p>
-          <a:p>
-            <a:pPr>
-              <a:spcAft>
-                <a:spcPts val="800"/>
-              </a:spcAft>
-            </a:pPr>
-            <a:r>
-              <a:rPr sz="2000" b="0" i="0">
-                <a:solidFill>
-                  <a:srgbClr val="333333"/>
-                </a:solidFill>
-                <a:latin typeface="Calibri"/>
-              </a:rPr>
-              <a:t>–   Recoja las respuestas en el muro y no las corrija.</a:t>
-            </a:r>
-          </a:p>
-          <a:p>
-            <a:pPr>
-              <a:spcAft>
-                <a:spcPts val="800"/>
-              </a:spcAft>
-            </a:pPr>
-            <a:r>
-              <a:rPr sz="2000" b="0" i="0">
-                <a:solidFill>
-                  <a:srgbClr val="333333"/>
-                </a:solidFill>
-                <a:latin typeface="Calibri"/>
-              </a:rPr>
-              <a:t>–   En el minuto 20, al llegar al PUE y al enfriamiento, vuelva al muro: alguien va a haber escrito «en internet» o «en un servidor», y ahí se muestra que el servidor está en un edificio que consume tanto en enfriarse como en computar.</a:t>
             </a:r>
           </a:p>
         </p:txBody>
@@ -4585,7 +4522,7 @@
                 </a:solidFill>
                 <a:latin typeface="Calibri"/>
               </a:rPr>
-              <a:t>Las cuatro etapas y por qué la fabricación cambia la recomendación (1/2)</a:t>
+              <a:t>La pregunta de entrada: darle materia a algo que parece no tenerla (2/2)</a:t>
             </a:r>
           </a:p>
         </p:txBody>
@@ -4624,25 +4561,7 @@
                 </a:solidFill>
                 <a:latin typeface="Calibri"/>
               </a:rPr>
-              <a:t>–   La huella material de un sistema de software se reparte en cuatro etapas y conviene recorrerlas con un ejemplo único: una aplicación de citas médicas usada desde el celular. </a:t>
-            </a:r>
-            <a:r>
-              <a:rPr sz="2000" b="1" i="0">
-                <a:solidFill>
-                  <a:srgbClr val="333333"/>
-                </a:solidFill>
-                <a:latin typeface="Calibri"/>
-              </a:rPr>
-              <a:t>Fabricación.</a:t>
-            </a:r>
-            <a:r>
-              <a:rPr sz="2000" b="0" i="0">
-                <a:solidFill>
-                  <a:srgbClr val="333333"/>
-                </a:solidFill>
-                <a:latin typeface="Calibri"/>
-              </a:rPr>
-              <a:t> El celular del paciente</a:t>
+              <a:t>–   El objetivo no es que se lleven un número, es que entiendan que hay agua y electricidad detrás de algo que se siente inmaterial, y que quien afirme un número tiene que decir de dónde salió.</a:t>
             </a:r>
           </a:p>
           <a:p>
@@ -4658,100 +4577,7 @@
                 </a:solidFill>
                 <a:latin typeface="Calibri"/>
               </a:rPr>
-              <a:t>–   El computador de la secretaria y los servidores donde corre el sistema tuvieron que ser fabricados: minería de metales —incluidos varios escasos y con extracción problemática—, ensamblaje y transporte.</a:t>
-            </a:r>
-          </a:p>
-          <a:p>
-            <a:pPr>
-              <a:spcAft>
-                <a:spcPts val="800"/>
-              </a:spcAft>
-            </a:pPr>
-            <a:r>
-              <a:rPr sz="2000" b="0" i="0">
-                <a:solidFill>
-                  <a:srgbClr val="333333"/>
-                </a:solidFill>
-                <a:latin typeface="Calibri"/>
-              </a:rPr>
-              <a:t>–   Este es el punto que más sorprende y el más importante para las decisiones: </a:t>
-            </a:r>
-            <a:r>
-              <a:rPr sz="2000" b="1" i="0">
-                <a:solidFill>
-                  <a:srgbClr val="333333"/>
-                </a:solidFill>
-                <a:latin typeface="Calibri"/>
-              </a:rPr>
-              <a:t>en muchos dispositivos personales la mayor parte de la huella de toda su vida ya está gastada cuando se enciende por primera vez</a:t>
-            </a:r>
-            <a:r>
-              <a:rPr sz="2000" b="0" i="0">
-                <a:solidFill>
-                  <a:srgbClr val="333333"/>
-                </a:solidFill>
-                <a:latin typeface="Calibri"/>
-              </a:rPr>
-              <a:t>.</a:t>
-            </a:r>
-          </a:p>
-          <a:p>
-            <a:pPr>
-              <a:spcAft>
-                <a:spcPts val="800"/>
-              </a:spcAft>
-            </a:pPr>
-            <a:r>
-              <a:rPr sz="2000" b="0" i="0">
-                <a:solidFill>
-                  <a:srgbClr val="333333"/>
-                </a:solidFill>
-                <a:latin typeface="Calibri"/>
-              </a:rPr>
-              <a:t>–   La consecuencia es contraintuitiva: optimizar el consumo de batería es útil, pero </a:t>
-            </a:r>
-            <a:r>
-              <a:rPr sz="2000" b="1" i="0">
-                <a:solidFill>
-                  <a:srgbClr val="333333"/>
-                </a:solidFill>
-                <a:latin typeface="Calibri"/>
-              </a:rPr>
-              <a:t>alargar la vida útil del aparato pesa mucho más</a:t>
-            </a:r>
-          </a:p>
-          <a:p>
-            <a:pPr>
-              <a:spcAft>
-                <a:spcPts val="800"/>
-              </a:spcAft>
-            </a:pPr>
-            <a:r>
-              <a:rPr sz="2000" b="0" i="0">
-                <a:solidFill>
-                  <a:srgbClr val="333333"/>
-                </a:solidFill>
-                <a:latin typeface="Calibri"/>
-              </a:rPr>
-              <a:t>–   Y eso depende de decisiones de software. </a:t>
-            </a:r>
-            <a:r>
-              <a:rPr sz="2000" b="1" i="0">
-                <a:solidFill>
-                  <a:srgbClr val="333333"/>
-                </a:solidFill>
-                <a:latin typeface="Calibri"/>
-              </a:rPr>
-              <a:t>Uso.</a:t>
-            </a:r>
-            <a:r>
-              <a:rPr sz="2000" b="0" i="0">
-                <a:solidFill>
-                  <a:srgbClr val="333333"/>
-                </a:solidFill>
-                <a:latin typeface="Calibri"/>
-              </a:rPr>
-              <a:t> Electricidad del dispositivo, del servidor y —esto es lo que se olvida— del enfriamiento del centro de datos.</a:t>
+              <a:t>–   En el minuto 20, al llegar al PUE y al enfriamiento, vuelva al muro: alguien va a haber escrito «en internet» o «en un servidor», y ahí se muestra que el servidor está en un edificio que consume tanto en enfriarse como en computar.</a:t>
             </a:r>
           </a:p>
         </p:txBody>
@@ -4932,7 +4758,7 @@
                 </a:solidFill>
                 <a:latin typeface="Calibri"/>
               </a:rPr>
-              <a:t>Las cuatro etapas y por qué la fabricación cambia la recomendación (2/2)</a:t>
+              <a:t>Las cuatro etapas y por qué la fabricación cambia la recomendación (1/2)</a:t>
             </a:r>
           </a:p>
         </p:txBody>
@@ -4971,7 +4797,7 @@
                 </a:solidFill>
                 <a:latin typeface="Calibri"/>
               </a:rPr>
-              <a:t>–   Aquí entra el PUE. </a:t>
+              <a:t>–   La huella material de un sistema de software se reparte en cuatro etapas y conviene recorrerlas con un ejemplo único: una aplicación de citas médicas usada desde el celular. </a:t>
             </a:r>
             <a:r>
               <a:rPr sz="2000" b="1" i="0">
@@ -4980,7 +4806,7 @@
                 </a:solidFill>
                 <a:latin typeface="Calibri"/>
               </a:rPr>
-              <a:t>Red.</a:t>
+              <a:t>Fabricación.</a:t>
             </a:r>
             <a:r>
               <a:rPr sz="2000" b="0" i="0">
@@ -4989,7 +4815,7 @@
                 </a:solidFill>
                 <a:latin typeface="Calibri"/>
               </a:rPr>
-              <a:t> Cada byte que viaja pasa por antenas, cables, enrutadores y equipos que consumen.</a:t>
+              <a:t> El celular del paciente</a:t>
             </a:r>
           </a:p>
           <a:p>
@@ -5005,25 +4831,7 @@
                 </a:solidFill>
                 <a:latin typeface="Calibri"/>
               </a:rPr>
-              <a:t>–   No es gratis y crece con el volumen: una pantalla que carga imágenes en tamaño original mil veces al día mueve un múltiplo de lo necesario. </a:t>
-            </a:r>
-            <a:r>
-              <a:rPr sz="2000" b="1" i="0">
-                <a:solidFill>
-                  <a:srgbClr val="333333"/>
-                </a:solidFill>
-                <a:latin typeface="Calibri"/>
-              </a:rPr>
-              <a:t>Fin de vida.</a:t>
-            </a:r>
-            <a:r>
-              <a:rPr sz="2000" b="0" i="0">
-                <a:solidFill>
-                  <a:srgbClr val="333333"/>
-                </a:solidFill>
-                <a:latin typeface="Calibri"/>
-              </a:rPr>
-              <a:t> El aparato se vuelve residuo electrónico.</a:t>
+              <a:t>–   El computador de la secretaria y los servidores donde corre el sistema tuvieron que ser fabricados: minería de metales —incluidos varios escasos y con extracción problemática—, ensamblaje y transporte.</a:t>
             </a:r>
           </a:p>
           <a:p>
@@ -5039,7 +4847,25 @@
                 </a:solidFill>
                 <a:latin typeface="Calibri"/>
               </a:rPr>
-              <a:t>–   Tiene metales recuperables y sustancias peligrosas, y cuando no se recoge formalmente se desarma a mano, quemando plásticos, con daño directo a las personas que lo hacen.</a:t>
+              <a:t>–   Este es el punto que más sorprende y el más importante para las decisiones: </a:t>
+            </a:r>
+            <a:r>
+              <a:rPr sz="2000" b="1" i="0">
+                <a:solidFill>
+                  <a:srgbClr val="333333"/>
+                </a:solidFill>
+                <a:latin typeface="Calibri"/>
+              </a:rPr>
+              <a:t>en muchos dispositivos personales la mayor parte de la huella de toda su vida ya está gastada cuando se enciende por primera vez</a:t>
+            </a:r>
+            <a:r>
+              <a:rPr sz="2000" b="0" i="0">
+                <a:solidFill>
+                  <a:srgbClr val="333333"/>
+                </a:solidFill>
+                <a:latin typeface="Calibri"/>
+              </a:rPr>
+              <a:t>.</a:t>
             </a:r>
           </a:p>
           <a:p>
@@ -5055,23 +4881,16 @@
                 </a:solidFill>
                 <a:latin typeface="Calibri"/>
               </a:rPr>
-              <a:t>–   El punto pedagógico de la diapositiva es que las palabras «software» y «nube» están construidas para que uno no piense en nada de esto.</a:t>
-            </a:r>
-          </a:p>
-          <a:p>
-            <a:pPr>
-              <a:spcAft>
-                <a:spcPts val="800"/>
-              </a:spcAft>
-            </a:pPr>
-            <a:r>
-              <a:rPr sz="2000" b="0" i="0">
-                <a:solidFill>
-                  <a:srgbClr val="333333"/>
-                </a:solidFill>
-                <a:latin typeface="Calibri"/>
-              </a:rPr>
-              <a:t>–   Nombrar las cuatro etapas es lo que permite discutir el tema con seriedad.</a:t>
+              <a:t>–   La consecuencia es contraintuitiva: optimizar el consumo de batería es útil, pero </a:t>
+            </a:r>
+            <a:r>
+              <a:rPr sz="2000" b="1" i="0">
+                <a:solidFill>
+                  <a:srgbClr val="333333"/>
+                </a:solidFill>
+                <a:latin typeface="Calibri"/>
+              </a:rPr>
+              <a:t>alargar la vida útil del aparato pesa mucho más</a:t>
             </a:r>
           </a:p>
         </p:txBody>
@@ -5252,7 +5071,7 @@
                 </a:solidFill>
                 <a:latin typeface="Calibri"/>
               </a:rPr>
-              <a:t>PUE, agua, RAEE y obsolescencia: los cuatro conceptos que hay que dejar (1/3)</a:t>
+              <a:t>Las cuatro etapas y por qué la fabricación cambia la recomendación (2/2)</a:t>
             </a:r>
           </a:p>
         </p:txBody>
@@ -5291,7 +5110,7 @@
                 </a:solidFill>
                 <a:latin typeface="Calibri"/>
               </a:rPr>
-              <a:t>–   </a:t>
+              <a:t>–   Y eso depende de decisiones de software. </a:t>
             </a:r>
             <a:r>
               <a:rPr sz="2000" b="1" i="0">
@@ -5300,7 +5119,7 @@
                 </a:solidFill>
                 <a:latin typeface="Calibri"/>
               </a:rPr>
-              <a:t>PUE (Power Usage Effectiveness).</a:t>
+              <a:t>Uso.</a:t>
             </a:r>
             <a:r>
               <a:rPr sz="2000" b="0" i="0">
@@ -5309,7 +5128,7 @@
                 </a:solidFill>
                 <a:latin typeface="Calibri"/>
               </a:rPr>
-              <a:t> Es la energía total que entra al centro de datos dividida por la energía que efectivamente llega a los servidores.</a:t>
+              <a:t> Electricidad del dispositivo, del servidor y —esto es lo que se olvida— del enfriamiento del centro de datos.</a:t>
             </a:r>
           </a:p>
           <a:p>
@@ -5325,7 +5144,25 @@
                 </a:solidFill>
                 <a:latin typeface="Calibri"/>
               </a:rPr>
-              <a:t>–   Si fuera 1.0, todo lo que entra se usa en computar.</a:t>
+              <a:t>–   No es gratis y crece con el volumen: una pantalla que carga imágenes en tamaño original mil veces al día mueve un múltiplo de lo necesario. </a:t>
+            </a:r>
+            <a:r>
+              <a:rPr sz="2000" b="1" i="0">
+                <a:solidFill>
+                  <a:srgbClr val="333333"/>
+                </a:solidFill>
+                <a:latin typeface="Calibri"/>
+              </a:rPr>
+              <a:t>Fin de vida.</a:t>
+            </a:r>
+            <a:r>
+              <a:rPr sz="2000" b="0" i="0">
+                <a:solidFill>
+                  <a:srgbClr val="333333"/>
+                </a:solidFill>
+                <a:latin typeface="Calibri"/>
+              </a:rPr>
+              <a:t> El aparato se vuelve residuo electrónico.</a:t>
             </a:r>
           </a:p>
           <a:p>
@@ -5341,7 +5178,7 @@
                 </a:solidFill>
                 <a:latin typeface="Calibri"/>
               </a:rPr>
-              <a:t>–   Un PUE de 1.6 significa que por cada vatio de cómputo se gastan 0,6 en enfriar, iluminar y en pérdidas.</a:t>
+              <a:t>–   Tiene metales recuperables y sustancias peligrosas, y cuando no se recoge formalmente se desarma a mano, quemando plásticos, con daño directo a las personas que lo hacen.</a:t>
             </a:r>
           </a:p>
           <a:p>
@@ -5357,7 +5194,7 @@
                 </a:solidFill>
                 <a:latin typeface="Calibri"/>
               </a:rPr>
-              <a:t>–   Los centros de datos grandes y modernos operan bastante mejor que el promedio de las salas de servidores de empresa, que suelen estar en el rango de 1.5 a 1.6 según las encuestas del sector.</a:t>
+              <a:t>–   El punto pedagógico de la diapositiva es que las palabras «software» y «nube» están construidas para que uno no piense en nada de esto.</a:t>
             </a:r>
           </a:p>
           <a:p>
@@ -5373,59 +5210,7 @@
                 </a:solidFill>
                 <a:latin typeface="Calibri"/>
               </a:rPr>
-              <a:t>–   La idea que hay que dejar no es el número exacto: es que </a:t>
-            </a:r>
-            <a:r>
-              <a:rPr sz="2000" b="1" i="0">
-                <a:solidFill>
-                  <a:srgbClr val="333333"/>
-                </a:solidFill>
-                <a:latin typeface="Calibri"/>
-              </a:rPr>
-              <a:t>una parte grande de la energía de un centro de datos no computa nada</a:t>
-            </a:r>
-            <a:r>
-              <a:rPr sz="2000" b="0" i="0">
-                <a:solidFill>
-                  <a:srgbClr val="333333"/>
-                </a:solidFill>
-                <a:latin typeface="Calibri"/>
-              </a:rPr>
-              <a:t>, y que existe una métrica con nombre para medirlo.</a:t>
-            </a:r>
-          </a:p>
-          <a:p>
-            <a:pPr>
-              <a:spcAft>
-                <a:spcPts val="800"/>
-              </a:spcAft>
-            </a:pPr>
-            <a:r>
-              <a:rPr sz="2000" b="0" i="0">
-                <a:solidFill>
-                  <a:srgbClr val="333333"/>
-                </a:solidFill>
-                <a:latin typeface="Calibri"/>
-              </a:rPr>
-              <a:t>–   Un ingeniero que sabe que el PUE existe puede preguntar por él. </a:t>
-            </a:r>
-            <a:r>
-              <a:rPr sz="2000" b="1" i="0">
-                <a:solidFill>
-                  <a:srgbClr val="333333"/>
-                </a:solidFill>
-                <a:latin typeface="Calibri"/>
-              </a:rPr>
-              <a:t>El agua.</a:t>
-            </a:r>
-            <a:r>
-              <a:rPr sz="2000" b="0" i="0">
-                <a:solidFill>
-                  <a:srgbClr val="333333"/>
-                </a:solidFill>
-                <a:latin typeface="Calibri"/>
-              </a:rPr>
-              <a:t> Enfriar con evaporación de agua es más barato en electricidad que enfriar con máquinas, así que muchos centros de datos usan agua.</a:t>
+              <a:t>–   Nombrar las cuatro etapas es lo que permite discutir el tema con seriedad.</a:t>
             </a:r>
           </a:p>
         </p:txBody>
@@ -5606,7 +5391,7 @@
                 </a:solidFill>
                 <a:latin typeface="Calibri"/>
               </a:rPr>
-              <a:t>PUE, agua, RAEE y obsolescencia: los cuatro conceptos que hay que dejar (2/3)</a:t>
+              <a:t>PUE, agua, RAEE y obsolescencia: los cuatro conceptos que hay que dejar (1/3)</a:t>
             </a:r>
           </a:p>
         </p:txBody>
@@ -5645,7 +5430,25 @@
                 </a:solidFill>
                 <a:latin typeface="Calibri"/>
               </a:rPr>
-              <a:t>–   Eso traslada el costo: baja la factura de luz y sube el consumo de una cuenca que normalmente abastece a población.</a:t>
+              <a:t>–   </a:t>
+            </a:r>
+            <a:r>
+              <a:rPr sz="2000" b="1" i="0">
+                <a:solidFill>
+                  <a:srgbClr val="333333"/>
+                </a:solidFill>
+                <a:latin typeface="Calibri"/>
+              </a:rPr>
+              <a:t>PUE (Power Usage Effectiveness).</a:t>
+            </a:r>
+            <a:r>
+              <a:rPr sz="2000" b="0" i="0">
+                <a:solidFill>
+                  <a:srgbClr val="333333"/>
+                </a:solidFill>
+                <a:latin typeface="Calibri"/>
+              </a:rPr>
+              <a:t> Es la energía total que entra al centro de datos dividida por la energía que efectivamente llega a los servidores.</a:t>
             </a:r>
           </a:p>
           <a:p>
@@ -5661,25 +5464,7 @@
                 </a:solidFill>
                 <a:latin typeface="Calibri"/>
               </a:rPr>
-              <a:t>–   Es un buen ejemplo de algo que el curso repite: </a:t>
-            </a:r>
-            <a:r>
-              <a:rPr sz="2000" b="1" i="0">
-                <a:solidFill>
-                  <a:srgbClr val="333333"/>
-                </a:solidFill>
-                <a:latin typeface="Calibri"/>
-              </a:rPr>
-              <a:t>optimizar una variable suele mover el problema a otra</a:t>
-            </a:r>
-            <a:r>
-              <a:rPr sz="2000" b="0" i="0">
-                <a:solidFill>
-                  <a:srgbClr val="333333"/>
-                </a:solidFill>
-                <a:latin typeface="Calibri"/>
-              </a:rPr>
-              <a:t>, y el ingeniero tiene que saber a cuál.</a:t>
+              <a:t>–   Si fuera 1.0, todo lo que entra se usa en computar.</a:t>
             </a:r>
           </a:p>
           <a:p>
@@ -5695,25 +5480,7 @@
                 </a:solidFill>
                 <a:latin typeface="Calibri"/>
               </a:rPr>
-              <a:t>–   Hay métricas para esto (WUE, litros por kilovatio-hora), y aquí también vale la advertencia de las cifras. </a:t>
-            </a:r>
-            <a:r>
-              <a:rPr sz="2000" b="1" i="0">
-                <a:solidFill>
-                  <a:srgbClr val="333333"/>
-                </a:solidFill>
-                <a:latin typeface="Calibri"/>
-              </a:rPr>
-              <a:t>RAEE y la Ley 1672 de 2013.</a:t>
-            </a:r>
-            <a:r>
-              <a:rPr sz="2000" b="0" i="0">
-                <a:solidFill>
-                  <a:srgbClr val="333333"/>
-                </a:solidFill>
-                <a:latin typeface="Calibri"/>
-              </a:rPr>
-              <a:t> Es la norma colombiana que fija los lineamientos para la gestión de residuos de aparatos eléctricos y electrónicos.</a:t>
+              <a:t>–   Un PUE de 1.6 significa que por cada vatio de cómputo se gastan 0,6 en enfriar, iluminar y en pérdidas.</a:t>
             </a:r>
           </a:p>
           <a:p>
@@ -5729,43 +5496,7 @@
                 </a:solidFill>
                 <a:latin typeface="Calibri"/>
               </a:rPr>
-              <a:t>–   Lo que hay que poder decir: </a:t>
-            </a:r>
-            <a:r>
-              <a:rPr sz="2000" b="1" i="0">
-                <a:solidFill>
-                  <a:srgbClr val="333333"/>
-                </a:solidFill>
-                <a:latin typeface="Calibri"/>
-              </a:rPr>
-              <a:t>obliga a los productores</a:t>
-            </a:r>
-            <a:r>
-              <a:rPr sz="2000" b="0" i="0">
-                <a:solidFill>
-                  <a:srgbClr val="333333"/>
-                </a:solidFill>
-                <a:latin typeface="Calibri"/>
-              </a:rPr>
-              <a:t> a establecer sistemas de recolección y gestión, y </a:t>
-            </a:r>
-            <a:r>
-              <a:rPr sz="2000" b="1" i="0">
-                <a:solidFill>
-                  <a:srgbClr val="333333"/>
-                </a:solidFill>
-                <a:latin typeface="Calibri"/>
-              </a:rPr>
-              <a:t>establece el deber del usuario</a:t>
-            </a:r>
-            <a:r>
-              <a:rPr sz="2000" b="0" i="0">
-                <a:solidFill>
-                  <a:srgbClr val="333333"/>
-                </a:solidFill>
-                <a:latin typeface="Calibri"/>
-              </a:rPr>
-              <a:t> de entregar el aparato en esos puntos en vez de tirarlo a la basura común.</a:t>
+              <a:t>–   Los centros de datos grandes y modernos operan bastante mejor que el promedio de las salas de servidores de empresa, que suelen estar en el rango de 1.5 a 1.6 según las encuestas del sector.</a:t>
             </a:r>
           </a:p>
           <a:p>
@@ -5781,7 +5512,7 @@
                 </a:solidFill>
                 <a:latin typeface="Calibri"/>
               </a:rPr>
-              <a:t>–   Los informes globales de residuos electrónicos (Global E-waste Monitor, de UNITAR e ITU) reportan decenas de millones de toneladas al año y una tasa de recolección formal baja: el orden de magnitud es que </a:t>
+              <a:t>–   La idea que hay que dejar no es el número exacto: es que </a:t>
             </a:r>
             <a:r>
               <a:rPr sz="2000" b="1" i="0">
@@ -5790,7 +5521,7 @@
                 </a:solidFill>
                 <a:latin typeface="Calibri"/>
               </a:rPr>
-              <a:t>la mayor parte no se recoge</a:t>
+              <a:t>una parte grande de la energía de un centro de datos no computa nada</a:t>
             </a:r>
             <a:r>
               <a:rPr sz="2000" b="0" i="0">
@@ -5799,7 +5530,41 @@
                 </a:solidFill>
                 <a:latin typeface="Calibri"/>
               </a:rPr>
-              <a:t>.</a:t>
+              <a:t>, y que existe una métrica con nombre para medirlo.</a:t>
+            </a:r>
+          </a:p>
+          <a:p>
+            <a:pPr>
+              <a:spcAft>
+                <a:spcPts val="800"/>
+              </a:spcAft>
+            </a:pPr>
+            <a:r>
+              <a:rPr sz="2000" b="0" i="0">
+                <a:solidFill>
+                  <a:srgbClr val="333333"/>
+                </a:solidFill>
+                <a:latin typeface="Calibri"/>
+              </a:rPr>
+              <a:t>–   Un ingeniero que sabe que el PUE existe puede preguntar por él. </a:t>
+            </a:r>
+            <a:r>
+              <a:rPr sz="2000" b="1" i="0">
+                <a:solidFill>
+                  <a:srgbClr val="333333"/>
+                </a:solidFill>
+                <a:latin typeface="Calibri"/>
+              </a:rPr>
+              <a:t>El agua.</a:t>
+            </a:r>
+            <a:r>
+              <a:rPr sz="2000" b="0" i="0">
+                <a:solidFill>
+                  <a:srgbClr val="333333"/>
+                </a:solidFill>
+                <a:latin typeface="Calibri"/>
+              </a:rPr>
+              <a:t> Enfriar con evaporación de agua es más barato en electricidad que enfriar con máquinas, así que muchos centros de datos usan agua.</a:t>
             </a:r>
           </a:p>
         </p:txBody>
@@ -5980,7 +5745,7 @@
                 </a:solidFill>
                 <a:latin typeface="Calibri"/>
               </a:rPr>
-              <a:t>PUE, agua, RAEE y obsolescencia: los cuatro conceptos que hay que dejar (3/3)</a:t>
+              <a:t>PUE, agua, RAEE y obsolescencia: los cuatro conceptos que hay que dejar (2/3)</a:t>
             </a:r>
           </a:p>
         </p:txBody>
@@ -6019,7 +5784,7 @@
                 </a:solidFill>
                 <a:latin typeface="Calibri"/>
               </a:rPr>
-              <a:t>–   Si un equipo cita una cifra exacta, exija la edición del informe y el año, porque cambia entre ediciones. </a:t>
+              <a:t>–   Es un buen ejemplo de algo que el curso repite: </a:t>
             </a:r>
             <a:r>
               <a:rPr sz="2000" b="1" i="0">
@@ -6028,7 +5793,7 @@
                 </a:solidFill>
                 <a:latin typeface="Calibri"/>
               </a:rPr>
-              <a:t>Obsolescencia inducida por software.</a:t>
+              <a:t>optimizar una variable suele mover el problema a otra</a:t>
             </a:r>
             <a:r>
               <a:rPr sz="2000" b="0" i="0">
@@ -6037,7 +5802,7 @@
                 </a:solidFill>
                 <a:latin typeface="Calibri"/>
               </a:rPr>
-              <a:t> Es el concepto que más les sirve porque está bajo su control profesional.</a:t>
+              <a:t>, y el ingeniero tiene que saber a cuál.</a:t>
             </a:r>
           </a:p>
           <a:p>
@@ -6053,7 +5818,25 @@
                 </a:solidFill>
                 <a:latin typeface="Calibri"/>
               </a:rPr>
-              <a:t>–   Cuando una nueva versión de una aplicación —o de un sistema operativo— deja de funcionar en dispositivos que servían, el software convierte en basura un aparato que estaba bien.</a:t>
+              <a:t>–   Hay métricas para esto (WUE, litros por kilovatio-hora), y aquí también vale la advertencia de las cifras. </a:t>
+            </a:r>
+            <a:r>
+              <a:rPr sz="2000" b="1" i="0">
+                <a:solidFill>
+                  <a:srgbClr val="333333"/>
+                </a:solidFill>
+                <a:latin typeface="Calibri"/>
+              </a:rPr>
+              <a:t>RAEE y la Ley 1672 de 2013.</a:t>
+            </a:r>
+            <a:r>
+              <a:rPr sz="2000" b="0" i="0">
+                <a:solidFill>
+                  <a:srgbClr val="333333"/>
+                </a:solidFill>
+                <a:latin typeface="Calibri"/>
+              </a:rPr>
+              <a:t> Es la norma colombiana que fija los lineamientos para la gestión de residuos de aparatos eléctricos y electrónicos.</a:t>
             </a:r>
           </a:p>
           <a:p>
@@ -6069,7 +5852,25 @@
                 </a:solidFill>
                 <a:latin typeface="Calibri"/>
               </a:rPr>
-              <a:t>–   No hace falta discutir si hay intención: el efecto es material y medible.</a:t>
+              <a:t>–   Los informes globales de residuos electrónicos (Global E-waste Monitor, de UNITAR e ITU) reportan decenas de millones de toneladas al año y una tasa de recolección formal baja: el orden de magnitud es que </a:t>
+            </a:r>
+            <a:r>
+              <a:rPr sz="2000" b="1" i="0">
+                <a:solidFill>
+                  <a:srgbClr val="333333"/>
+                </a:solidFill>
+                <a:latin typeface="Calibri"/>
+              </a:rPr>
+              <a:t>la mayor parte no se recoge</a:t>
+            </a:r>
+            <a:r>
+              <a:rPr sz="2000" b="0" i="0">
+                <a:solidFill>
+                  <a:srgbClr val="333333"/>
+                </a:solidFill>
+                <a:latin typeface="Calibri"/>
+              </a:rPr>
+              <a:t>.</a:t>
             </a:r>
           </a:p>
           <a:p>
@@ -6085,7 +5886,7 @@
                 </a:solidFill>
                 <a:latin typeface="Calibri"/>
               </a:rPr>
-              <a:t>–   Y la contracara es una decisión concreta que un equipo de este curso puede tomar: </a:t>
+              <a:t>–   Si un equipo cita una cifra exacta, exija la edición del informe y el año, porque cambia entre ediciones. </a:t>
             </a:r>
             <a:r>
               <a:rPr sz="2000" b="1" i="0">
@@ -6094,7 +5895,7 @@
                 </a:solidFill>
                 <a:latin typeface="Calibri"/>
               </a:rPr>
-              <a:t>sostener el soporte para dispositivos viejos</a:t>
+              <a:t>Obsolescencia inducida por software.</a:t>
             </a:r>
             <a:r>
               <a:rPr sz="2000" b="0" i="0">
@@ -6103,7 +5904,7 @@
                 </a:solidFill>
                 <a:latin typeface="Calibri"/>
               </a:rPr>
-              <a:t>, que además es lo correcto para el contexto de la universidad, donde muchos estudiantes trabajan con equipos de varios años.</a:t>
+              <a:t> Es el concepto que más les sirve porque está bajo su control profesional.</a:t>
             </a:r>
           </a:p>
         </p:txBody>
@@ -6284,7 +6085,7 @@
                 </a:solidFill>
                 <a:latin typeface="Calibri"/>
               </a:rPr>
-              <a:t>De la conciencia a la decisión: la diapositiva que convierte el tema en ingeniería (1/2)</a:t>
+              <a:t>PUE, agua, RAEE y obsolescencia: los cuatro conceptos que hay que dejar (3/3)</a:t>
             </a:r>
           </a:p>
         </p:txBody>
@@ -6323,7 +6124,7 @@
                 </a:solidFill>
                 <a:latin typeface="Calibri"/>
               </a:rPr>
-              <a:t>–   Esta es la diapositiva que salva la clase de volverse un discurso.</a:t>
+              <a:t>–   No hace falta discutir si hay intención: el efecto es material y medible.</a:t>
             </a:r>
           </a:p>
           <a:p>
@@ -6339,7 +6140,7 @@
                 </a:solidFill>
                 <a:latin typeface="Calibri"/>
               </a:rPr>
-              <a:t>–   Las cinco parejas son decisiones reales de diseño, y en las cinco la versión de la derecha </a:t>
+              <a:t>–   Y la contracara es una decisión concreta que un equipo de este curso puede tomar: </a:t>
             </a:r>
             <a:r>
               <a:rPr sz="2000" b="1" i="0">
@@ -6348,7 +6149,7 @@
                 </a:solidFill>
                 <a:latin typeface="Calibri"/>
               </a:rPr>
-              <a:t>cumple la misma función</a:t>
+              <a:t>sostener el soporte para dispositivos viejos</a:t>
             </a:r>
             <a:r>
               <a:rPr sz="2000" b="0" i="0">
@@ -6357,87 +6158,7 @@
                 </a:solidFill>
                 <a:latin typeface="Calibri"/>
               </a:rPr>
-              <a:t>.</a:t>
-            </a:r>
-          </a:p>
-          <a:p>
-            <a:pPr>
-              <a:spcAft>
-                <a:spcPts val="800"/>
-              </a:spcAft>
-            </a:pPr>
-            <a:r>
-              <a:rPr sz="2000" b="0" i="0">
-                <a:solidFill>
-                  <a:srgbClr val="333333"/>
-                </a:solidFill>
-                <a:latin typeface="Calibri"/>
-              </a:rPr>
-              <a:t>–   Eso hay que decirlo explícitamente: no se está pidiendo sacrificar calidad por ambiente, se está pidiendo no desperdiciar.</a:t>
-            </a:r>
-          </a:p>
-          <a:p>
-            <a:pPr>
-              <a:spcAft>
-                <a:spcPts val="800"/>
-              </a:spcAft>
-            </a:pPr>
-            <a:r>
-              <a:rPr sz="2000" b="0" i="0">
-                <a:solidFill>
-                  <a:srgbClr val="333333"/>
-                </a:solidFill>
-                <a:latin typeface="Calibri"/>
-              </a:rPr>
-              <a:t>–   La primera —pedir la ubicación cada cinco segundos o cada cinco minutos— es la más fácil de entender y toca batería y red a la vez.</a:t>
-            </a:r>
-          </a:p>
-          <a:p>
-            <a:pPr>
-              <a:spcAft>
-                <a:spcPts val="800"/>
-              </a:spcAft>
-            </a:pPr>
-            <a:r>
-              <a:rPr sz="2000" b="0" i="0">
-                <a:solidFill>
-                  <a:srgbClr val="333333"/>
-                </a:solidFill>
-                <a:latin typeface="Calibri"/>
-              </a:rPr>
-              <a:t>–   La tercera —guardar el resultado en vez de recalcular el reporte completo en cada consulta— es la que más sorprende</a:t>
-            </a:r>
-          </a:p>
-          <a:p>
-            <a:pPr>
-              <a:spcAft>
-                <a:spcPts val="800"/>
-              </a:spcAft>
-            </a:pPr>
-            <a:r>
-              <a:rPr sz="2000" b="0" i="0">
-                <a:solidFill>
-                  <a:srgbClr val="333333"/>
-                </a:solidFill>
-                <a:latin typeface="Calibri"/>
-              </a:rPr>
-              <a:t>–   Porque el estudiante todavía no tiene la intuición de que el cómputo cuesta energía; sirve para conectar con la sesión 7 y con la idea de que la eficiencia no es coquetería de programador.</a:t>
-            </a:r>
-          </a:p>
-          <a:p>
-            <a:pPr>
-              <a:spcAft>
-                <a:spcPts val="800"/>
-              </a:spcAft>
-            </a:pPr>
-            <a:r>
-              <a:rPr sz="2000" b="0" i="0">
-                <a:solidFill>
-                  <a:srgbClr val="333333"/>
-                </a:solidFill>
-                <a:latin typeface="Calibri"/>
-              </a:rPr>
-              <a:t>–   La cuarta —sostener dispositivos viejos— es la de mayor impacto real por lo dicho sobre la fabricación.</a:t>
+              <a:t>, que además es lo correcto para el contexto de la universidad, donde muchos estudiantes trabajan con equipos de varios años.</a:t>
             </a:r>
           </a:p>
         </p:txBody>
@@ -6618,7 +6339,7 @@
                 </a:solidFill>
                 <a:latin typeface="Calibri"/>
               </a:rPr>
-              <a:t>De la conciencia a la decisión: la diapositiva que convierte el tema en ingeniería (2/2)</a:t>
+              <a:t>De la conciencia a la decisión: la diapositiva que convierte el tema en ingeniería (1/2)</a:t>
             </a:r>
           </a:p>
         </p:txBody>
@@ -6657,25 +6378,7 @@
                 </a:solidFill>
                 <a:latin typeface="Calibri"/>
               </a:rPr>
-              <a:t>–   Y la quinta es la más contemporánea y hay que decirla sin miedo: </a:t>
-            </a:r>
-            <a:r>
-              <a:rPr sz="2000" b="1" i="0">
-                <a:solidFill>
-                  <a:srgbClr val="333333"/>
-                </a:solidFill>
-                <a:latin typeface="Calibri"/>
-              </a:rPr>
-              <a:t>agregarle un asistente de IA a una función que resolvía una condición simple gasta energía en cada llamada, para siempre</a:t>
-            </a:r>
-            <a:r>
-              <a:rPr sz="2000" b="0" i="0">
-                <a:solidFill>
-                  <a:srgbClr val="333333"/>
-                </a:solidFill>
-                <a:latin typeface="Calibri"/>
-              </a:rPr>
-              <a:t>.</a:t>
+              <a:t>–   Esta es la diapositiva que salva la clase de volverse un discurso.</a:t>
             </a:r>
           </a:p>
           <a:p>
@@ -6691,7 +6394,25 @@
                 </a:solidFill>
                 <a:latin typeface="Calibri"/>
               </a:rPr>
-              <a:t>–   Es una decisión de arquitectura, y hoy se toma con frecuencia por moda.</a:t>
+              <a:t>–   Las cinco parejas son decisiones reales de diseño, y en las cinco la versión de la derecha </a:t>
+            </a:r>
+            <a:r>
+              <a:rPr sz="2000" b="1" i="0">
+                <a:solidFill>
+                  <a:srgbClr val="333333"/>
+                </a:solidFill>
+                <a:latin typeface="Calibri"/>
+              </a:rPr>
+              <a:t>cumple la misma función</a:t>
+            </a:r>
+            <a:r>
+              <a:rPr sz="2000" b="0" i="0">
+                <a:solidFill>
+                  <a:srgbClr val="333333"/>
+                </a:solidFill>
+                <a:latin typeface="Calibri"/>
+              </a:rPr>
+              <a:t>.</a:t>
             </a:r>
           </a:p>
           <a:p>
@@ -6707,7 +6428,7 @@
                 </a:solidFill>
                 <a:latin typeface="Calibri"/>
               </a:rPr>
-              <a:t>–   El método de cinco pasos es el del taller.</a:t>
+              <a:t>–   La primera —pedir la ubicación cada cinco segundos o cada cinco minutos— es la más fácil de entender y toca batería y red a la vez.</a:t>
             </a:r>
           </a:p>
           <a:p>
@@ -6723,7 +6444,7 @@
                 </a:solidFill>
                 <a:latin typeface="Calibri"/>
               </a:rPr>
-              <a:t>–   El paso 2 —buscar lo que se repite— es el que enseña a estimar: lo que ocurre una vez no mueve la aguja, lo que ocurre mil veces al día sí.</a:t>
+              <a:t>–   La cuarta —sostener dispositivos viejos— es la de mayor impacto real por lo dicho sobre la fabricación.</a:t>
             </a:r>
           </a:p>
           <a:p>
@@ -6739,15 +6460,17 @@
                 </a:solidFill>
                 <a:latin typeface="Calibri"/>
               </a:rPr>
-              <a:t>–   Y el paso 5 —definir un indicador medible— es el que separa una intención de una decisión de ingeniería.</a:t>
-            </a:r>
-          </a:p>
-          <a:p>
-            <a:pPr>
-              <a:spcAft>
-                <a:spcPts val="800"/>
-              </a:spcAft>
-            </a:pPr>
+              <a:t>–   Y la quinta es la más contemporánea y hay que decirla sin miedo: </a:t>
+            </a:r>
+            <a:r>
+              <a:rPr sz="2000" b="1" i="0">
+                <a:solidFill>
+                  <a:srgbClr val="333333"/>
+                </a:solidFill>
+                <a:latin typeface="Calibri"/>
+              </a:rPr>
+              <a:t>agregarle un asistente de IA a una función que resolvía una condición simple gasta energía en cada llamada, para siempre</a:t>
+            </a:r>
             <a:r>
               <a:rPr sz="2000" b="0" i="0">
                 <a:solidFill>
@@ -6755,23 +6478,7 @@
                 </a:solidFill>
                 <a:latin typeface="Calibri"/>
               </a:rPr>
-              <a:t>–   «Vamos a ser sostenibles» no se puede verificar</a:t>
-            </a:r>
-          </a:p>
-          <a:p>
-            <a:pPr>
-              <a:spcAft>
-                <a:spcPts val="800"/>
-              </a:spcAft>
-            </a:pPr>
-            <a:r>
-              <a:rPr sz="2000" b="0" i="0">
-                <a:solidFill>
-                  <a:srgbClr val="333333"/>
-                </a:solidFill>
-                <a:latin typeface="Calibri"/>
-              </a:rPr>
-              <a:t>–   «vamos a mover menos de 200 KB por consulta» sí, y en la Clase 16 se puede mirar si se cumplió.</a:t>
+              <a:t>.</a:t>
             </a:r>
           </a:p>
         </p:txBody>
@@ -6952,7 +6659,7 @@
                 </a:solidFill>
                 <a:latin typeface="Calibri"/>
               </a:rPr>
-              <a:t>Colombia, y la honestidad con las cifras (1/2)</a:t>
+              <a:t>De la conciencia a la decisión: la diapositiva que convierte el tema en ingeniería (2/2)</a:t>
             </a:r>
           </a:p>
         </p:txBody>
@@ -6991,7 +6698,7 @@
                 </a:solidFill>
                 <a:latin typeface="Calibri"/>
               </a:rPr>
-              <a:t>–   El dato local más útil es la composición de la matriz eléctrica.</a:t>
+              <a:t>–   Es una decisión de arquitectura, y hoy se toma con frecuencia por moda.</a:t>
             </a:r>
           </a:p>
           <a:p>
@@ -7007,7 +6714,7 @@
                 </a:solidFill>
                 <a:latin typeface="Calibri"/>
               </a:rPr>
-              <a:t>–   Una parte importante de la generación en Colombia es hidráulica, lo que significa que un kilovatio-hora consumido aquí tiene un factor de emisiones distinto —menor— que en un país con generación a carbón.</a:t>
+              <a:t>–   El método de cinco pasos es el del taller.</a:t>
             </a:r>
           </a:p>
           <a:p>
@@ -7023,25 +6730,7 @@
                 </a:solidFill>
                 <a:latin typeface="Calibri"/>
               </a:rPr>
-              <a:t>–   La consecuencia metodológica es la que hay que enseñar: </a:t>
-            </a:r>
-            <a:r>
-              <a:rPr sz="2000" b="1" i="0">
-                <a:solidFill>
-                  <a:srgbClr val="333333"/>
-                </a:solidFill>
-                <a:latin typeface="Calibri"/>
-              </a:rPr>
-              <a:t>no se copian factores de emisión de otro país</a:t>
-            </a:r>
-            <a:r>
-              <a:rPr sz="2000" b="0" i="0">
-                <a:solidFill>
-                  <a:srgbClr val="333333"/>
-                </a:solidFill>
-                <a:latin typeface="Calibri"/>
-              </a:rPr>
-              <a:t>; se usa el factor local, y el operador del sistema (XM) publica datos de generación.</a:t>
+              <a:t>–   El paso 2 —buscar lo que se repite— es el que enseña a estimar: lo que ocurre una vez no mueve la aguja, lo que ocurre mil veces al día sí.</a:t>
             </a:r>
           </a:p>
           <a:p>
@@ -7057,7 +6746,7 @@
                 </a:solidFill>
                 <a:latin typeface="Calibri"/>
               </a:rPr>
-              <a:t>–   Un equipo que cite una fuente colombiana en vez de un blog extranjero ya está haciendo ingeniería.</a:t>
+              <a:t>–   Y el paso 5 —definir un indicador medible— es el que separa una intención de una decisión de ingeniería.</a:t>
             </a:r>
           </a:p>
           <a:p>
@@ -7073,7 +6762,7 @@
                 </a:solidFill>
                 <a:latin typeface="Calibri"/>
               </a:rPr>
-              <a:t>–   La contracara es igual de importante y menos conocida: cuando el fenómeno de El Niño reduce los aportes a los embalses, entran las plantas térmicas y el factor de emisiones del país sube.</a:t>
+              <a:t>–   «Vamos a ser sostenibles» no se puede verificar</a:t>
             </a:r>
           </a:p>
           <a:p>
@@ -7089,57 +6778,7 @@
                 </a:solidFill>
                 <a:latin typeface="Calibri"/>
               </a:rPr>
-              <a:t>–   Es decir, </a:t>
-            </a:r>
-            <a:r>
-              <a:rPr sz="2000" b="1" i="0">
-                <a:solidFill>
-                  <a:srgbClr val="333333"/>
-                </a:solidFill>
-                <a:latin typeface="Calibri"/>
-              </a:rPr>
-              <a:t>la misma aplicación, sin cambiar una línea de código, emite más en un año seco</a:t>
-            </a:r>
-            <a:r>
-              <a:rPr sz="2000" b="0" i="0">
-                <a:solidFill>
-                  <a:srgbClr val="333333"/>
-                </a:solidFill>
-                <a:latin typeface="Calibri"/>
-              </a:rPr>
-              <a:t>.</a:t>
-            </a:r>
-          </a:p>
-          <a:p>
-            <a:pPr>
-              <a:spcAft>
-                <a:spcPts val="800"/>
-              </a:spcAft>
-            </a:pPr>
-            <a:r>
-              <a:rPr sz="2000" b="0" i="0">
-                <a:solidFill>
-                  <a:srgbClr val="333333"/>
-                </a:solidFill>
-                <a:latin typeface="Calibri"/>
-              </a:rPr>
-              <a:t>–   Eso enseña algo que vale para todo el curso: la huella de un sistema no es una propiedad del sistema, es una propiedad del sistema en su contexto.</a:t>
-            </a:r>
-          </a:p>
-          <a:p>
-            <a:pPr>
-              <a:spcAft>
-                <a:spcPts val="800"/>
-              </a:spcAft>
-            </a:pPr>
-            <a:r>
-              <a:rPr sz="2000" b="0" i="0">
-                <a:solidFill>
-                  <a:srgbClr val="333333"/>
-                </a:solidFill>
-                <a:latin typeface="Calibri"/>
-              </a:rPr>
-              <a:t>–   La diapositiva de las trampas es la más importante para el rigor y conviene dedicarle tiempo real.</a:t>
+              <a:t>–   «vamos a mover menos de 200 KB por consulta» sí, y en la Clase 16 se puede mirar si se cumplió.</a:t>
             </a:r>
           </a:p>
         </p:txBody>
@@ -8206,7 +7845,7 @@
                 </a:solidFill>
                 <a:latin typeface="Calibri"/>
               </a:rPr>
-              <a:t>Colombia, y la honestidad con las cifras (2/2)</a:t>
+              <a:t>Colombia, y la honestidad con las cifras (1/2)</a:t>
             </a:r>
           </a:p>
         </p:txBody>
@@ -8239,13 +7878,13 @@
               </a:spcAft>
             </a:pPr>
             <a:r>
-              <a:rPr sz="1900" b="0" i="0">
-                <a:solidFill>
-                  <a:srgbClr val="333333"/>
-                </a:solidFill>
-                <a:latin typeface="Calibri"/>
-              </a:rPr>
-              <a:t>–   Las cifras ambientales del sector digital son un campo donde circulan números espectaculares sin alcance definido: litros de agua por consulta a un modelo de lenguaje, gramos de CO₂ por búsqueda, porcentajes del consumo mundial de electricidad.</a:t>
+              <a:rPr sz="2000" b="0" i="0">
+                <a:solidFill>
+                  <a:srgbClr val="333333"/>
+                </a:solidFill>
+                <a:latin typeface="Calibri"/>
+              </a:rPr>
+              <a:t>–   El dato local más útil es la composición de la matriz eléctrica.</a:t>
             </a:r>
           </a:p>
           <a:p>
@@ -8255,13 +7894,13 @@
               </a:spcAft>
             </a:pPr>
             <a:r>
-              <a:rPr sz="1900" b="0" i="0">
-                <a:solidFill>
-                  <a:srgbClr val="333333"/>
-                </a:solidFill>
-                <a:latin typeface="Calibri"/>
-              </a:rPr>
-              <a:t>–   Muchos provienen de estimaciones legítimas pero con supuestos muy específicos, y se citan luego como hechos universales.</a:t>
+              <a:rPr sz="2000" b="0" i="0">
+                <a:solidFill>
+                  <a:srgbClr val="333333"/>
+                </a:solidFill>
+                <a:latin typeface="Calibri"/>
+              </a:rPr>
+              <a:t>–   Una parte importante de la generación en Colombia es hidráulica, lo que significa que un kilovatio-hora consumido aquí tiene un factor de emisiones distinto —menor— que en un país con generación a carbón.</a:t>
             </a:r>
           </a:p>
           <a:p>
@@ -8271,31 +7910,13 @@
               </a:spcAft>
             </a:pPr>
             <a:r>
-              <a:rPr sz="1900" b="0" i="0">
-                <a:solidFill>
-                  <a:srgbClr val="333333"/>
-                </a:solidFill>
-                <a:latin typeface="Calibri"/>
-              </a:rPr>
-              <a:t>–   La regla del curso a partir de hoy es simple y se aplica en la rúbrica: </a:t>
-            </a:r>
-            <a:r>
-              <a:rPr sz="1900" b="1" i="0">
-                <a:solidFill>
-                  <a:srgbClr val="333333"/>
-                </a:solidFill>
-                <a:latin typeface="Calibri"/>
-              </a:rPr>
-              <a:t>cifra con fuente, año y alcance, o no va</a:t>
-            </a:r>
-            <a:r>
-              <a:rPr sz="1900" b="0" i="0">
-                <a:solidFill>
-                  <a:srgbClr val="333333"/>
-                </a:solidFill>
-                <a:latin typeface="Calibri"/>
-              </a:rPr>
-              <a:t>.</a:t>
+              <a:rPr sz="2000" b="0" i="0">
+                <a:solidFill>
+                  <a:srgbClr val="333333"/>
+                </a:solidFill>
+                <a:latin typeface="Calibri"/>
+              </a:rPr>
+              <a:t>–   La contracara es igual de importante y menos conocida: cuando el fenómeno de El Niño reduce los aportes a los embalses, entran las plantas térmicas y el factor de emisiones del país sube.</a:t>
             </a:r>
           </a:p>
           <a:p>
@@ -8305,13 +7926,31 @@
               </a:spcAft>
             </a:pPr>
             <a:r>
-              <a:rPr sz="1900" b="0" i="0">
-                <a:solidFill>
-                  <a:srgbClr val="333333"/>
-                </a:solidFill>
-                <a:latin typeface="Calibri"/>
-              </a:rPr>
-              <a:t>–   Y hay que decir en voz alta lo que sí se puede afirmar sin exagerar: que la huella existe, que tiene cuatro etapas, que se puede reducir con decisiones de diseño y que casi nadie la mide.</a:t>
+              <a:rPr sz="2000" b="0" i="0">
+                <a:solidFill>
+                  <a:srgbClr val="333333"/>
+                </a:solidFill>
+                <a:latin typeface="Calibri"/>
+              </a:rPr>
+              <a:t>–   Es decir, </a:t>
+            </a:r>
+            <a:r>
+              <a:rPr sz="2000" b="1" i="0">
+                <a:solidFill>
+                  <a:srgbClr val="333333"/>
+                </a:solidFill>
+                <a:latin typeface="Calibri"/>
+              </a:rPr>
+              <a:t>la misma aplicación, sin cambiar una línea de código, emite más en un año seco</a:t>
+            </a:r>
+            <a:r>
+              <a:rPr sz="2000" b="0" i="0">
+                <a:solidFill>
+                  <a:srgbClr val="333333"/>
+                </a:solidFill>
+                <a:latin typeface="Calibri"/>
+              </a:rPr>
+              <a:t>.</a:t>
             </a:r>
           </a:p>
           <a:p>
@@ -8321,13 +7960,13 @@
               </a:spcAft>
             </a:pPr>
             <a:r>
-              <a:rPr sz="1900" b="0" i="0">
-                <a:solidFill>
-                  <a:srgbClr val="333333"/>
-                </a:solidFill>
-                <a:latin typeface="Calibri"/>
-              </a:rPr>
-              <a:t>–   Con eso alcanza para trabajar con seriedad, y es mucho más defendible que un número impresionante mal citado.</a:t>
+              <a:rPr sz="2000" b="0" i="0">
+                <a:solidFill>
+                  <a:srgbClr val="333333"/>
+                </a:solidFill>
+                <a:latin typeface="Calibri"/>
+              </a:rPr>
+              <a:t>–   La diapositiva de las trampas es la más importante para el rigor y conviene dedicarle tiempo real.</a:t>
             </a:r>
           </a:p>
           <a:p>
@@ -8337,63 +7976,13 @@
               </a:spcAft>
             </a:pPr>
             <a:r>
-              <a:rPr sz="1900" b="0" i="0">
-                <a:solidFill>
-                  <a:srgbClr val="333333"/>
-                </a:solidFill>
-                <a:latin typeface="Calibri"/>
-              </a:rPr>
-              <a:t>–   Sobre la comparación «lo digital contra el papel»: alguien la va a proponer y la respuesta correcta es que depende del número de usos y de si obliga a comprar dispositivos.</a:t>
-            </a:r>
-          </a:p>
-          <a:p>
-            <a:pPr>
-              <a:spcAft>
-                <a:spcPts val="800"/>
-              </a:spcAft>
-            </a:pPr>
-            <a:r>
-              <a:rPr sz="1900" b="0" i="0">
-                <a:solidFill>
-                  <a:srgbClr val="333333"/>
-                </a:solidFill>
-                <a:latin typeface="Calibri"/>
-              </a:rPr>
-              <a:t>–   Un documento leído una vez en un computador nuevo no gana contra una hoja; el mismo documento leído por trescientas personas en aparatos que ya existen, sí.</a:t>
-            </a:r>
-          </a:p>
-          <a:p>
-            <a:pPr>
-              <a:spcAft>
-                <a:spcPts val="800"/>
-              </a:spcAft>
-            </a:pPr>
-            <a:r>
-              <a:rPr sz="1900" b="0" i="0">
-                <a:solidFill>
-                  <a:srgbClr val="333333"/>
-                </a:solidFill>
-                <a:latin typeface="Calibri"/>
-              </a:rPr>
-              <a:t>–   La lección es que </a:t>
-            </a:r>
-            <a:r>
-              <a:rPr sz="1900" b="1" i="0">
-                <a:solidFill>
-                  <a:srgbClr val="333333"/>
-                </a:solidFill>
-                <a:latin typeface="Calibri"/>
-              </a:rPr>
-              <a:t>comparar sin decir qué se comparó no es un argumento</a:t>
-            </a:r>
-            <a:r>
-              <a:rPr sz="1900" b="0" i="0">
-                <a:solidFill>
-                  <a:srgbClr val="333333"/>
-                </a:solidFill>
-                <a:latin typeface="Calibri"/>
-              </a:rPr>
-              <a:t>.</a:t>
+              <a:rPr sz="2000" b="0" i="0">
+                <a:solidFill>
+                  <a:srgbClr val="333333"/>
+                </a:solidFill>
+                <a:latin typeface="Calibri"/>
+              </a:rPr>
+              <a:t>–   Las cifras ambientales del sector digital son un campo donde circulan números espectaculares sin alcance definido: litros de agua por consulta a un modelo de lenguaje, gramos de CO₂ por búsqueda, porcentajes del consumo mundial de electricidad.</a:t>
             </a:r>
           </a:p>
         </p:txBody>
@@ -8468,7 +8057,7 @@
         <p:spPr>
           <a:xfrm>
             <a:off x="0" y="0"/>
-            <a:ext cx="12191695" cy="1170432"/>
+            <a:ext cx="12191695" cy="960120"/>
           </a:xfrm>
           <a:prstGeom prst="rect">
             <a:avLst/>
@@ -8510,7 +8099,7 @@
         </p:nvSpPr>
         <p:spPr>
           <a:xfrm>
-            <a:off x="0" y="1170432"/>
+            <a:off x="0" y="960120"/>
             <a:ext cx="12191695" cy="41148"/>
           </a:xfrm>
           <a:prstGeom prst="rect">
@@ -8554,7 +8143,7 @@
         <p:spPr>
           <a:xfrm>
             <a:off x="457200" y="164592"/>
-            <a:ext cx="11277295" cy="384048"/>
+            <a:ext cx="11277295" cy="502920"/>
           </a:xfrm>
           <a:prstGeom prst="rect">
             <a:avLst/>
@@ -8574,7 +8163,7 @@
                 </a:solidFill>
                 <a:latin typeface="Calibri"/>
               </a:rPr>
-              <a:t>Taller de hoy: Huella del sistema</a:t>
+              <a:t>Colombia, y la honestidad con las cifras (2/2)</a:t>
             </a:r>
           </a:p>
         </p:txBody>
@@ -8587,8 +8176,8 @@
         </p:nvSpPr>
         <p:spPr>
           <a:xfrm>
-            <a:off x="457200" y="566928"/>
-            <a:ext cx="11277295" cy="411480"/>
+            <a:off x="457200" y="1170432"/>
+            <a:ext cx="11277295" cy="5230368"/>
           </a:xfrm>
           <a:prstGeom prst="rect">
             <a:avLst/>
@@ -8601,927 +8190,126 @@
           </a:bodyPr>
           <a:lstStyle/>
           <a:p>
-            <a:r>
-              <a:rPr sz="1400" b="0" i="0">
-                <a:solidFill>
-                  <a:srgbClr val="B8D8EE"/>
-                </a:solidFill>
-                <a:latin typeface="Calibri"/>
-              </a:rPr>
-              <a:t>17 min en equipos · cada equipo, el sistema de su propio proyecto · diagrama de huella + 2 decisiones + 1 indicador</a:t>
-            </a:r>
-          </a:p>
-        </p:txBody>
-      </p:sp>
-      <p:sp>
-        <p:nvSpPr>
-          <p:cNvPr id="6" name="Rounded Rectangle 5"/>
-          <p:cNvSpPr/>
-          <p:nvPr/>
-        </p:nvSpPr>
-        <p:spPr>
-          <a:xfrm>
-            <a:off x="457200" y="1472184"/>
-            <a:ext cx="11277295" cy="566928"/>
-          </a:xfrm>
-          <a:prstGeom prst="roundRect">
-            <a:avLst>
-              <a:gd name="adj" fmla="val 12000"/>
-            </a:avLst>
-          </a:prstGeom>
-          <a:solidFill>
-            <a:srgbClr val="F2F2F2"/>
-          </a:solidFill>
-          <a:ln>
-            <a:noFill/>
-          </a:ln>
-        </p:spPr>
-        <p:style>
-          <a:lnRef idx="1">
-            <a:schemeClr val="accent1"/>
-          </a:lnRef>
-          <a:fillRef idx="3">
-            <a:schemeClr val="accent1"/>
-          </a:fillRef>
-          <a:effectRef idx="2">
-            <a:schemeClr val="accent1"/>
-          </a:effectRef>
-          <a:fontRef idx="minor">
-            <a:schemeClr val="lt1"/>
-          </a:fontRef>
-        </p:style>
-        <p:txBody>
-          <a:bodyPr rtlCol="0" anchor="ctr"/>
-          <a:lstStyle/>
-          <a:p>
-            <a:pPr algn="ctr"/>
-          </a:p>
-        </p:txBody>
-      </p:sp>
-      <p:sp>
-        <p:nvSpPr>
-          <p:cNvPr id="7" name="Rectangle 6"/>
-          <p:cNvSpPr/>
-          <p:nvPr/>
-        </p:nvSpPr>
-        <p:spPr>
-          <a:xfrm>
-            <a:off x="640080" y="1618487"/>
-            <a:ext cx="274320" cy="274320"/>
-          </a:xfrm>
-          <a:prstGeom prst="rect">
-            <a:avLst/>
-          </a:prstGeom>
-          <a:solidFill>
-            <a:srgbClr val="FFFFFF"/>
-          </a:solidFill>
-          <a:ln>
-            <a:solidFill>
-              <a:srgbClr val="333333"/>
-            </a:solidFill>
-          </a:ln>
-        </p:spPr>
-        <p:style>
-          <a:lnRef idx="1">
-            <a:schemeClr val="accent1"/>
-          </a:lnRef>
-          <a:fillRef idx="3">
-            <a:schemeClr val="accent1"/>
-          </a:fillRef>
-          <a:effectRef idx="2">
-            <a:schemeClr val="accent1"/>
-          </a:effectRef>
-          <a:fontRef idx="minor">
-            <a:schemeClr val="lt1"/>
-          </a:fontRef>
-        </p:style>
-        <p:txBody>
-          <a:bodyPr rtlCol="0" anchor="ctr"/>
-          <a:lstStyle/>
-          <a:p>
-            <a:pPr algn="ctr"/>
-          </a:p>
-        </p:txBody>
-      </p:sp>
-      <p:sp>
-        <p:nvSpPr>
-          <p:cNvPr id="8" name="Rectangle 7"/>
-          <p:cNvSpPr/>
-          <p:nvPr/>
-        </p:nvSpPr>
-        <p:spPr>
-          <a:xfrm>
-            <a:off x="640080" y="1618487"/>
-            <a:ext cx="73152" cy="274320"/>
-          </a:xfrm>
-          <a:prstGeom prst="rect">
-            <a:avLst/>
-          </a:prstGeom>
-          <a:solidFill>
-            <a:srgbClr val="269CCB"/>
-          </a:solidFill>
-          <a:ln>
-            <a:noFill/>
-          </a:ln>
-        </p:spPr>
-        <p:style>
-          <a:lnRef idx="1">
-            <a:schemeClr val="accent1"/>
-          </a:lnRef>
-          <a:fillRef idx="3">
-            <a:schemeClr val="accent1"/>
-          </a:fillRef>
-          <a:effectRef idx="2">
-            <a:schemeClr val="accent1"/>
-          </a:effectRef>
-          <a:fontRef idx="minor">
-            <a:schemeClr val="lt1"/>
-          </a:fontRef>
-        </p:style>
-        <p:txBody>
-          <a:bodyPr rtlCol="0" anchor="ctr"/>
-          <a:lstStyle/>
-          <a:p>
-            <a:pPr algn="ctr"/>
-          </a:p>
-        </p:txBody>
-      </p:sp>
-      <p:sp>
-        <p:nvSpPr>
-          <p:cNvPr id="9" name="TextBox 8"/>
-          <p:cNvSpPr txBox="1"/>
-          <p:nvPr/>
-        </p:nvSpPr>
-        <p:spPr>
-          <a:xfrm>
-            <a:off x="1097280" y="1563624"/>
-            <a:ext cx="10362895" cy="402336"/>
-          </a:xfrm>
-          <a:prstGeom prst="rect">
-            <a:avLst/>
-          </a:prstGeom>
-          <a:noFill/>
-        </p:spPr>
-        <p:txBody>
-          <a:bodyPr wrap="square" anchor="ctr"/>
-          <a:lstStyle/>
-          <a:p>
-            <a:r>
-              <a:rPr sz="1500" b="1" i="0">
-                <a:solidFill>
-                  <a:srgbClr val="333333"/>
-                </a:solidFill>
-                <a:latin typeface="Calibri"/>
-              </a:rPr>
-              <a:t>EL RECORRIDO DIBUJADO</a:t>
-            </a:r>
-            <a:r>
-              <a:rPr sz="1500" b="0" i="0">
-                <a:solidFill>
-                  <a:srgbClr val="333333"/>
-                </a:solidFill>
-                <a:latin typeface="Calibri"/>
-              </a:rPr>
-              <a:t> — El camino completo con flechas: dispositivo del usuario → red → servidor → almacenamiento, y todo lo que se prende para que el sistema funcione.</a:t>
-            </a:r>
-          </a:p>
-        </p:txBody>
-      </p:sp>
-      <p:sp>
-        <p:nvSpPr>
-          <p:cNvPr id="10" name="Rounded Rectangle 9"/>
-          <p:cNvSpPr/>
-          <p:nvPr/>
-        </p:nvSpPr>
-        <p:spPr>
-          <a:xfrm>
-            <a:off x="457200" y="2148839"/>
-            <a:ext cx="11277295" cy="566928"/>
-          </a:xfrm>
-          <a:prstGeom prst="roundRect">
-            <a:avLst>
-              <a:gd name="adj" fmla="val 12000"/>
-            </a:avLst>
-          </a:prstGeom>
-          <a:solidFill>
-            <a:srgbClr val="F2F2F2"/>
-          </a:solidFill>
-          <a:ln>
-            <a:noFill/>
-          </a:ln>
-        </p:spPr>
-        <p:style>
-          <a:lnRef idx="1">
-            <a:schemeClr val="accent1"/>
-          </a:lnRef>
-          <a:fillRef idx="3">
-            <a:schemeClr val="accent1"/>
-          </a:fillRef>
-          <a:effectRef idx="2">
-            <a:schemeClr val="accent1"/>
-          </a:effectRef>
-          <a:fontRef idx="minor">
-            <a:schemeClr val="lt1"/>
-          </a:fontRef>
-        </p:style>
-        <p:txBody>
-          <a:bodyPr rtlCol="0" anchor="ctr"/>
-          <a:lstStyle/>
-          <a:p>
-            <a:pPr algn="ctr"/>
-          </a:p>
-        </p:txBody>
-      </p:sp>
-      <p:sp>
-        <p:nvSpPr>
-          <p:cNvPr id="11" name="Rectangle 10"/>
-          <p:cNvSpPr/>
-          <p:nvPr/>
-        </p:nvSpPr>
-        <p:spPr>
-          <a:xfrm>
-            <a:off x="640080" y="2295144"/>
-            <a:ext cx="274320" cy="274320"/>
-          </a:xfrm>
-          <a:prstGeom prst="rect">
-            <a:avLst/>
-          </a:prstGeom>
-          <a:solidFill>
-            <a:srgbClr val="FFFFFF"/>
-          </a:solidFill>
-          <a:ln>
-            <a:solidFill>
-              <a:srgbClr val="333333"/>
-            </a:solidFill>
-          </a:ln>
-        </p:spPr>
-        <p:style>
-          <a:lnRef idx="1">
-            <a:schemeClr val="accent1"/>
-          </a:lnRef>
-          <a:fillRef idx="3">
-            <a:schemeClr val="accent1"/>
-          </a:fillRef>
-          <a:effectRef idx="2">
-            <a:schemeClr val="accent1"/>
-          </a:effectRef>
-          <a:fontRef idx="minor">
-            <a:schemeClr val="lt1"/>
-          </a:fontRef>
-        </p:style>
-        <p:txBody>
-          <a:bodyPr rtlCol="0" anchor="ctr"/>
-          <a:lstStyle/>
-          <a:p>
-            <a:pPr algn="ctr"/>
-          </a:p>
-        </p:txBody>
-      </p:sp>
-      <p:sp>
-        <p:nvSpPr>
-          <p:cNvPr id="12" name="Rectangle 11"/>
-          <p:cNvSpPr/>
-          <p:nvPr/>
-        </p:nvSpPr>
-        <p:spPr>
-          <a:xfrm>
-            <a:off x="640080" y="2295144"/>
-            <a:ext cx="73152" cy="274320"/>
-          </a:xfrm>
-          <a:prstGeom prst="rect">
-            <a:avLst/>
-          </a:prstGeom>
-          <a:solidFill>
-            <a:srgbClr val="269CCB"/>
-          </a:solidFill>
-          <a:ln>
-            <a:noFill/>
-          </a:ln>
-        </p:spPr>
-        <p:style>
-          <a:lnRef idx="1">
-            <a:schemeClr val="accent1"/>
-          </a:lnRef>
-          <a:fillRef idx="3">
-            <a:schemeClr val="accent1"/>
-          </a:fillRef>
-          <a:effectRef idx="2">
-            <a:schemeClr val="accent1"/>
-          </a:effectRef>
-          <a:fontRef idx="minor">
-            <a:schemeClr val="lt1"/>
-          </a:fontRef>
-        </p:style>
-        <p:txBody>
-          <a:bodyPr rtlCol="0" anchor="ctr"/>
-          <a:lstStyle/>
-          <a:p>
-            <a:pPr algn="ctr"/>
-          </a:p>
-        </p:txBody>
-      </p:sp>
-      <p:sp>
-        <p:nvSpPr>
-          <p:cNvPr id="13" name="TextBox 12"/>
-          <p:cNvSpPr txBox="1"/>
-          <p:nvPr/>
-        </p:nvSpPr>
-        <p:spPr>
-          <a:xfrm>
-            <a:off x="1097280" y="2240279"/>
-            <a:ext cx="10362895" cy="402336"/>
-          </a:xfrm>
-          <a:prstGeom prst="rect">
-            <a:avLst/>
-          </a:prstGeom>
-          <a:noFill/>
-        </p:spPr>
-        <p:txBody>
-          <a:bodyPr wrap="square" anchor="ctr"/>
-          <a:lstStyle/>
-          <a:p>
-            <a:r>
-              <a:rPr sz="1500" b="1" i="0">
-                <a:solidFill>
-                  <a:srgbClr val="333333"/>
-                </a:solidFill>
-                <a:latin typeface="Calibri"/>
-              </a:rPr>
-              <a:t>LO QUE SE REPITE</a:t>
-            </a:r>
-            <a:r>
-              <a:rPr sz="1500" b="0" i="0">
-                <a:solidFill>
-                  <a:srgbClr val="333333"/>
-                </a:solidFill>
-                <a:latin typeface="Calibri"/>
-              </a:rPr>
-              <a:t> — Qué operación ocurre </a:t>
-            </a:r>
-            <a:r>
-              <a:rPr sz="1500" b="1" i="0">
-                <a:solidFill>
-                  <a:srgbClr val="333333"/>
-                </a:solidFill>
-                <a:latin typeface="Calibri"/>
-              </a:rPr>
-              <a:t>muchas veces al día</a:t>
-            </a:r>
-            <a:r>
-              <a:rPr sz="1500" b="0" i="0">
-                <a:solidFill>
-                  <a:srgbClr val="333333"/>
-                </a:solidFill>
-                <a:latin typeface="Calibri"/>
-              </a:rPr>
-              <a:t> en su sistema, y una estimación gruesa de cuántas veces. Lo que pasa una vez no mueve nada.</a:t>
-            </a:r>
-          </a:p>
-        </p:txBody>
-      </p:sp>
-      <p:sp>
-        <p:nvSpPr>
-          <p:cNvPr id="14" name="Rounded Rectangle 13"/>
-          <p:cNvSpPr/>
-          <p:nvPr/>
-        </p:nvSpPr>
-        <p:spPr>
-          <a:xfrm>
-            <a:off x="457200" y="2825496"/>
-            <a:ext cx="11277295" cy="566928"/>
-          </a:xfrm>
-          <a:prstGeom prst="roundRect">
-            <a:avLst>
-              <a:gd name="adj" fmla="val 12000"/>
-            </a:avLst>
-          </a:prstGeom>
-          <a:solidFill>
-            <a:srgbClr val="F2F2F2"/>
-          </a:solidFill>
-          <a:ln>
-            <a:noFill/>
-          </a:ln>
-        </p:spPr>
-        <p:style>
-          <a:lnRef idx="1">
-            <a:schemeClr val="accent1"/>
-          </a:lnRef>
-          <a:fillRef idx="3">
-            <a:schemeClr val="accent1"/>
-          </a:fillRef>
-          <a:effectRef idx="2">
-            <a:schemeClr val="accent1"/>
-          </a:effectRef>
-          <a:fontRef idx="minor">
-            <a:schemeClr val="lt1"/>
-          </a:fontRef>
-        </p:style>
-        <p:txBody>
-          <a:bodyPr rtlCol="0" anchor="ctr"/>
-          <a:lstStyle/>
-          <a:p>
-            <a:pPr algn="ctr"/>
-          </a:p>
-        </p:txBody>
-      </p:sp>
-      <p:sp>
-        <p:nvSpPr>
-          <p:cNvPr id="15" name="Rectangle 14"/>
-          <p:cNvSpPr/>
-          <p:nvPr/>
-        </p:nvSpPr>
-        <p:spPr>
-          <a:xfrm>
-            <a:off x="640080" y="2971800"/>
-            <a:ext cx="274320" cy="274320"/>
-          </a:xfrm>
-          <a:prstGeom prst="rect">
-            <a:avLst/>
-          </a:prstGeom>
-          <a:solidFill>
-            <a:srgbClr val="FFFFFF"/>
-          </a:solidFill>
-          <a:ln>
-            <a:solidFill>
-              <a:srgbClr val="333333"/>
-            </a:solidFill>
-          </a:ln>
-        </p:spPr>
-        <p:style>
-          <a:lnRef idx="1">
-            <a:schemeClr val="accent1"/>
-          </a:lnRef>
-          <a:fillRef idx="3">
-            <a:schemeClr val="accent1"/>
-          </a:fillRef>
-          <a:effectRef idx="2">
-            <a:schemeClr val="accent1"/>
-          </a:effectRef>
-          <a:fontRef idx="minor">
-            <a:schemeClr val="lt1"/>
-          </a:fontRef>
-        </p:style>
-        <p:txBody>
-          <a:bodyPr rtlCol="0" anchor="ctr"/>
-          <a:lstStyle/>
-          <a:p>
-            <a:pPr algn="ctr"/>
-          </a:p>
-        </p:txBody>
-      </p:sp>
-      <p:sp>
-        <p:nvSpPr>
-          <p:cNvPr id="16" name="Rectangle 15"/>
-          <p:cNvSpPr/>
-          <p:nvPr/>
-        </p:nvSpPr>
-        <p:spPr>
-          <a:xfrm>
-            <a:off x="640080" y="2971800"/>
-            <a:ext cx="73152" cy="274320"/>
-          </a:xfrm>
-          <a:prstGeom prst="rect">
-            <a:avLst/>
-          </a:prstGeom>
-          <a:solidFill>
-            <a:srgbClr val="269CCB"/>
-          </a:solidFill>
-          <a:ln>
-            <a:noFill/>
-          </a:ln>
-        </p:spPr>
-        <p:style>
-          <a:lnRef idx="1">
-            <a:schemeClr val="accent1"/>
-          </a:lnRef>
-          <a:fillRef idx="3">
-            <a:schemeClr val="accent1"/>
-          </a:fillRef>
-          <a:effectRef idx="2">
-            <a:schemeClr val="accent1"/>
-          </a:effectRef>
-          <a:fontRef idx="minor">
-            <a:schemeClr val="lt1"/>
-          </a:fontRef>
-        </p:style>
-        <p:txBody>
-          <a:bodyPr rtlCol="0" anchor="ctr"/>
-          <a:lstStyle/>
-          <a:p>
-            <a:pPr algn="ctr"/>
-          </a:p>
-        </p:txBody>
-      </p:sp>
-      <p:sp>
-        <p:nvSpPr>
-          <p:cNvPr id="17" name="TextBox 16"/>
-          <p:cNvSpPr txBox="1"/>
-          <p:nvPr/>
-        </p:nvSpPr>
-        <p:spPr>
-          <a:xfrm>
-            <a:off x="1097280" y="2916936"/>
-            <a:ext cx="10362895" cy="402336"/>
-          </a:xfrm>
-          <a:prstGeom prst="rect">
-            <a:avLst/>
-          </a:prstGeom>
-          <a:noFill/>
-        </p:spPr>
-        <p:txBody>
-          <a:bodyPr wrap="square" anchor="ctr"/>
-          <a:lstStyle/>
-          <a:p>
-            <a:r>
-              <a:rPr sz="1500" b="1" i="0">
-                <a:solidFill>
-                  <a:srgbClr val="333333"/>
-                </a:solidFill>
-                <a:latin typeface="Calibri"/>
-              </a:rPr>
-              <a:t>LA ETAPA QUE MÁS PESA</a:t>
-            </a:r>
-            <a:r>
-              <a:rPr sz="1500" b="0" i="0">
-                <a:solidFill>
-                  <a:srgbClr val="333333"/>
-                </a:solidFill>
-                <a:latin typeface="Calibri"/>
-              </a:rPr>
-              <a:t> — Una sola etapa, con la razón. No hace falta un cálculo exacto: hace falta saber dónde apretar.</a:t>
-            </a:r>
-          </a:p>
-        </p:txBody>
-      </p:sp>
-      <p:sp>
-        <p:nvSpPr>
-          <p:cNvPr id="18" name="Rounded Rectangle 17"/>
-          <p:cNvSpPr/>
-          <p:nvPr/>
-        </p:nvSpPr>
-        <p:spPr>
-          <a:xfrm>
-            <a:off x="457200" y="3502152"/>
-            <a:ext cx="11277295" cy="566928"/>
-          </a:xfrm>
-          <a:prstGeom prst="roundRect">
-            <a:avLst>
-              <a:gd name="adj" fmla="val 12000"/>
-            </a:avLst>
-          </a:prstGeom>
-          <a:solidFill>
-            <a:srgbClr val="F2F2F2"/>
-          </a:solidFill>
-          <a:ln>
-            <a:noFill/>
-          </a:ln>
-        </p:spPr>
-        <p:style>
-          <a:lnRef idx="1">
-            <a:schemeClr val="accent1"/>
-          </a:lnRef>
-          <a:fillRef idx="3">
-            <a:schemeClr val="accent1"/>
-          </a:fillRef>
-          <a:effectRef idx="2">
-            <a:schemeClr val="accent1"/>
-          </a:effectRef>
-          <a:fontRef idx="minor">
-            <a:schemeClr val="lt1"/>
-          </a:fontRef>
-        </p:style>
-        <p:txBody>
-          <a:bodyPr rtlCol="0" anchor="ctr"/>
-          <a:lstStyle/>
-          <a:p>
-            <a:pPr algn="ctr"/>
-          </a:p>
-        </p:txBody>
-      </p:sp>
-      <p:sp>
-        <p:nvSpPr>
-          <p:cNvPr id="19" name="Rectangle 18"/>
-          <p:cNvSpPr/>
-          <p:nvPr/>
-        </p:nvSpPr>
-        <p:spPr>
-          <a:xfrm>
-            <a:off x="640080" y="3648456"/>
-            <a:ext cx="274320" cy="274320"/>
-          </a:xfrm>
-          <a:prstGeom prst="rect">
-            <a:avLst/>
-          </a:prstGeom>
-          <a:solidFill>
-            <a:srgbClr val="FFFFFF"/>
-          </a:solidFill>
-          <a:ln>
-            <a:solidFill>
-              <a:srgbClr val="333333"/>
-            </a:solidFill>
-          </a:ln>
-        </p:spPr>
-        <p:style>
-          <a:lnRef idx="1">
-            <a:schemeClr val="accent1"/>
-          </a:lnRef>
-          <a:fillRef idx="3">
-            <a:schemeClr val="accent1"/>
-          </a:fillRef>
-          <a:effectRef idx="2">
-            <a:schemeClr val="accent1"/>
-          </a:effectRef>
-          <a:fontRef idx="minor">
-            <a:schemeClr val="lt1"/>
-          </a:fontRef>
-        </p:style>
-        <p:txBody>
-          <a:bodyPr rtlCol="0" anchor="ctr"/>
-          <a:lstStyle/>
-          <a:p>
-            <a:pPr algn="ctr"/>
-          </a:p>
-        </p:txBody>
-      </p:sp>
-      <p:sp>
-        <p:nvSpPr>
-          <p:cNvPr id="20" name="Rectangle 19"/>
-          <p:cNvSpPr/>
-          <p:nvPr/>
-        </p:nvSpPr>
-        <p:spPr>
-          <a:xfrm>
-            <a:off x="640080" y="3648456"/>
-            <a:ext cx="73152" cy="274320"/>
-          </a:xfrm>
-          <a:prstGeom prst="rect">
-            <a:avLst/>
-          </a:prstGeom>
-          <a:solidFill>
-            <a:srgbClr val="269CCB"/>
-          </a:solidFill>
-          <a:ln>
-            <a:noFill/>
-          </a:ln>
-        </p:spPr>
-        <p:style>
-          <a:lnRef idx="1">
-            <a:schemeClr val="accent1"/>
-          </a:lnRef>
-          <a:fillRef idx="3">
-            <a:schemeClr val="accent1"/>
-          </a:fillRef>
-          <a:effectRef idx="2">
-            <a:schemeClr val="accent1"/>
-          </a:effectRef>
-          <a:fontRef idx="minor">
-            <a:schemeClr val="lt1"/>
-          </a:fontRef>
-        </p:style>
-        <p:txBody>
-          <a:bodyPr rtlCol="0" anchor="ctr"/>
-          <a:lstStyle/>
-          <a:p>
-            <a:pPr algn="ctr"/>
-          </a:p>
-        </p:txBody>
-      </p:sp>
-      <p:sp>
-        <p:nvSpPr>
-          <p:cNvPr id="21" name="TextBox 20"/>
-          <p:cNvSpPr txBox="1"/>
-          <p:nvPr/>
-        </p:nvSpPr>
-        <p:spPr>
-          <a:xfrm>
-            <a:off x="1097280" y="3593592"/>
-            <a:ext cx="10362895" cy="402336"/>
-          </a:xfrm>
-          <a:prstGeom prst="rect">
-            <a:avLst/>
-          </a:prstGeom>
-          <a:noFill/>
-        </p:spPr>
-        <p:txBody>
-          <a:bodyPr wrap="square" anchor="ctr"/>
-          <a:lstStyle/>
-          <a:p>
-            <a:r>
-              <a:rPr sz="1500" b="1" i="0">
-                <a:solidFill>
-                  <a:srgbClr val="333333"/>
-                </a:solidFill>
-                <a:latin typeface="Calibri"/>
-              </a:rPr>
-              <a:t>DOS DECISIONES DE DISEÑO</a:t>
-            </a:r>
-            <a:r>
-              <a:rPr sz="1500" b="0" i="0">
-                <a:solidFill>
-                  <a:srgbClr val="333333"/>
-                </a:solidFill>
-                <a:latin typeface="Calibri"/>
-              </a:rPr>
-              <a:t> — Dos cosas que </a:t>
-            </a:r>
-            <a:r>
-              <a:rPr sz="1500" b="1" i="0">
-                <a:solidFill>
-                  <a:srgbClr val="333333"/>
-                </a:solidFill>
-                <a:latin typeface="Calibri"/>
-              </a:rPr>
-              <a:t>ustedes</a:t>
-            </a:r>
-            <a:r>
-              <a:rPr sz="1500" b="0" i="0">
-                <a:solidFill>
-                  <a:srgbClr val="333333"/>
-                </a:solidFill>
-                <a:latin typeface="Calibri"/>
-              </a:rPr>
-              <a:t> pueden decidir en su sistema para bajar esa etapa. De diseño, no de comportamiento del usuario.</a:t>
-            </a:r>
-          </a:p>
-        </p:txBody>
-      </p:sp>
-      <p:sp>
-        <p:nvSpPr>
-          <p:cNvPr id="22" name="Rounded Rectangle 21"/>
-          <p:cNvSpPr/>
-          <p:nvPr/>
-        </p:nvSpPr>
-        <p:spPr>
-          <a:xfrm>
-            <a:off x="457200" y="4178808"/>
-            <a:ext cx="11277295" cy="566928"/>
-          </a:xfrm>
-          <a:prstGeom prst="roundRect">
-            <a:avLst>
-              <a:gd name="adj" fmla="val 12000"/>
-            </a:avLst>
-          </a:prstGeom>
-          <a:solidFill>
-            <a:srgbClr val="F2F2F2"/>
-          </a:solidFill>
-          <a:ln>
-            <a:noFill/>
-          </a:ln>
-        </p:spPr>
-        <p:style>
-          <a:lnRef idx="1">
-            <a:schemeClr val="accent1"/>
-          </a:lnRef>
-          <a:fillRef idx="3">
-            <a:schemeClr val="accent1"/>
-          </a:fillRef>
-          <a:effectRef idx="2">
-            <a:schemeClr val="accent1"/>
-          </a:effectRef>
-          <a:fontRef idx="minor">
-            <a:schemeClr val="lt1"/>
-          </a:fontRef>
-        </p:style>
-        <p:txBody>
-          <a:bodyPr rtlCol="0" anchor="ctr"/>
-          <a:lstStyle/>
-          <a:p>
-            <a:pPr algn="ctr"/>
-          </a:p>
-        </p:txBody>
-      </p:sp>
-      <p:sp>
-        <p:nvSpPr>
-          <p:cNvPr id="23" name="Rectangle 22"/>
-          <p:cNvSpPr/>
-          <p:nvPr/>
-        </p:nvSpPr>
-        <p:spPr>
-          <a:xfrm>
-            <a:off x="640080" y="4325112"/>
-            <a:ext cx="274320" cy="274320"/>
-          </a:xfrm>
-          <a:prstGeom prst="rect">
-            <a:avLst/>
-          </a:prstGeom>
-          <a:solidFill>
-            <a:srgbClr val="FFFFFF"/>
-          </a:solidFill>
-          <a:ln>
-            <a:solidFill>
-              <a:srgbClr val="333333"/>
-            </a:solidFill>
-          </a:ln>
-        </p:spPr>
-        <p:style>
-          <a:lnRef idx="1">
-            <a:schemeClr val="accent1"/>
-          </a:lnRef>
-          <a:fillRef idx="3">
-            <a:schemeClr val="accent1"/>
-          </a:fillRef>
-          <a:effectRef idx="2">
-            <a:schemeClr val="accent1"/>
-          </a:effectRef>
-          <a:fontRef idx="minor">
-            <a:schemeClr val="lt1"/>
-          </a:fontRef>
-        </p:style>
-        <p:txBody>
-          <a:bodyPr rtlCol="0" anchor="ctr"/>
-          <a:lstStyle/>
-          <a:p>
-            <a:pPr algn="ctr"/>
-          </a:p>
-        </p:txBody>
-      </p:sp>
-      <p:sp>
-        <p:nvSpPr>
-          <p:cNvPr id="24" name="Rectangle 23"/>
-          <p:cNvSpPr/>
-          <p:nvPr/>
-        </p:nvSpPr>
-        <p:spPr>
-          <a:xfrm>
-            <a:off x="640080" y="4325112"/>
-            <a:ext cx="73152" cy="274320"/>
-          </a:xfrm>
-          <a:prstGeom prst="rect">
-            <a:avLst/>
-          </a:prstGeom>
-          <a:solidFill>
-            <a:srgbClr val="269CCB"/>
-          </a:solidFill>
-          <a:ln>
-            <a:noFill/>
-          </a:ln>
-        </p:spPr>
-        <p:style>
-          <a:lnRef idx="1">
-            <a:schemeClr val="accent1"/>
-          </a:lnRef>
-          <a:fillRef idx="3">
-            <a:schemeClr val="accent1"/>
-          </a:fillRef>
-          <a:effectRef idx="2">
-            <a:schemeClr val="accent1"/>
-          </a:effectRef>
-          <a:fontRef idx="minor">
-            <a:schemeClr val="lt1"/>
-          </a:fontRef>
-        </p:style>
-        <p:txBody>
-          <a:bodyPr rtlCol="0" anchor="ctr"/>
-          <a:lstStyle/>
-          <a:p>
-            <a:pPr algn="ctr"/>
-          </a:p>
-        </p:txBody>
-      </p:sp>
-      <p:sp>
-        <p:nvSpPr>
-          <p:cNvPr id="25" name="TextBox 24"/>
-          <p:cNvSpPr txBox="1"/>
-          <p:nvPr/>
-        </p:nvSpPr>
-        <p:spPr>
-          <a:xfrm>
-            <a:off x="1097280" y="4270248"/>
-            <a:ext cx="10362895" cy="402336"/>
-          </a:xfrm>
-          <a:prstGeom prst="rect">
-            <a:avLst/>
-          </a:prstGeom>
-          <a:noFill/>
-        </p:spPr>
-        <p:txBody>
-          <a:bodyPr wrap="square" anchor="ctr"/>
-          <a:lstStyle/>
-          <a:p>
-            <a:r>
-              <a:rPr sz="1500" b="1" i="0">
-                <a:solidFill>
-                  <a:srgbClr val="333333"/>
-                </a:solidFill>
-                <a:latin typeface="Calibri"/>
-              </a:rPr>
-              <a:t>EL INDICADOR</a:t>
-            </a:r>
-            <a:r>
-              <a:rPr sz="1500" b="0" i="0">
-                <a:solidFill>
-                  <a:srgbClr val="333333"/>
-                </a:solidFill>
-                <a:latin typeface="Calibri"/>
-              </a:rPr>
-              <a:t> — Un número que se pueda medir al final del semestre para saber si la decisión funcionó. Con su unidad.</a:t>
-            </a:r>
-          </a:p>
-        </p:txBody>
-      </p:sp>
-      <p:sp>
-        <p:nvSpPr>
-          <p:cNvPr id="26" name="TextBox 25"/>
+            <a:pPr>
+              <a:spcAft>
+                <a:spcPts val="800"/>
+              </a:spcAft>
+            </a:pPr>
+            <a:r>
+              <a:rPr sz="2000" b="0" i="0">
+                <a:solidFill>
+                  <a:srgbClr val="333333"/>
+                </a:solidFill>
+                <a:latin typeface="Calibri"/>
+              </a:rPr>
+              <a:t>–   La regla del curso a partir de hoy es simple y se aplica en la rúbrica: </a:t>
+            </a:r>
+            <a:r>
+              <a:rPr sz="2000" b="1" i="0">
+                <a:solidFill>
+                  <a:srgbClr val="333333"/>
+                </a:solidFill>
+                <a:latin typeface="Calibri"/>
+              </a:rPr>
+              <a:t>cifra con fuente, año y alcance, o no va</a:t>
+            </a:r>
+            <a:r>
+              <a:rPr sz="2000" b="0" i="0">
+                <a:solidFill>
+                  <a:srgbClr val="333333"/>
+                </a:solidFill>
+                <a:latin typeface="Calibri"/>
+              </a:rPr>
+              <a:t>.</a:t>
+            </a:r>
+          </a:p>
+          <a:p>
+            <a:pPr>
+              <a:spcAft>
+                <a:spcPts val="800"/>
+              </a:spcAft>
+            </a:pPr>
+            <a:r>
+              <a:rPr sz="2000" b="0" i="0">
+                <a:solidFill>
+                  <a:srgbClr val="333333"/>
+                </a:solidFill>
+                <a:latin typeface="Calibri"/>
+              </a:rPr>
+              <a:t>–   Y hay que decir en voz alta lo que sí se puede afirmar sin exagerar: que la huella existe, que tiene cuatro etapas, que se puede reducir con decisiones de diseño y que casi nadie la mide.</a:t>
+            </a:r>
+          </a:p>
+          <a:p>
+            <a:pPr>
+              <a:spcAft>
+                <a:spcPts val="800"/>
+              </a:spcAft>
+            </a:pPr>
+            <a:r>
+              <a:rPr sz="2000" b="0" i="0">
+                <a:solidFill>
+                  <a:srgbClr val="333333"/>
+                </a:solidFill>
+                <a:latin typeface="Calibri"/>
+              </a:rPr>
+              <a:t>–   Con eso alcanza para trabajar con seriedad, y es mucho más defendible que un número impresionante mal citado.</a:t>
+            </a:r>
+          </a:p>
+          <a:p>
+            <a:pPr>
+              <a:spcAft>
+                <a:spcPts val="800"/>
+              </a:spcAft>
+            </a:pPr>
+            <a:r>
+              <a:rPr sz="2000" b="0" i="0">
+                <a:solidFill>
+                  <a:srgbClr val="333333"/>
+                </a:solidFill>
+                <a:latin typeface="Calibri"/>
+              </a:rPr>
+              <a:t>–   Sobre la comparación «lo digital contra el papel»: alguien la va a proponer y la respuesta correcta es que depende del número de usos y de si obliga a comprar dispositivos.</a:t>
+            </a:r>
+          </a:p>
+          <a:p>
+            <a:pPr>
+              <a:spcAft>
+                <a:spcPts val="800"/>
+              </a:spcAft>
+            </a:pPr>
+            <a:r>
+              <a:rPr sz="2000" b="0" i="0">
+                <a:solidFill>
+                  <a:srgbClr val="333333"/>
+                </a:solidFill>
+                <a:latin typeface="Calibri"/>
+              </a:rPr>
+              <a:t>–   La lección es que </a:t>
+            </a:r>
+            <a:r>
+              <a:rPr sz="2000" b="1" i="0">
+                <a:solidFill>
+                  <a:srgbClr val="333333"/>
+                </a:solidFill>
+                <a:latin typeface="Calibri"/>
+              </a:rPr>
+              <a:t>comparar sin decir qué se comparó no es un argumento</a:t>
+            </a:r>
+            <a:r>
+              <a:rPr sz="2000" b="0" i="0">
+                <a:solidFill>
+                  <a:srgbClr val="333333"/>
+                </a:solidFill>
+                <a:latin typeface="Calibri"/>
+              </a:rPr>
+              <a:t>.</a:t>
+            </a:r>
+          </a:p>
+        </p:txBody>
+      </p:sp>
+      <p:sp>
+        <p:nvSpPr>
+          <p:cNvPr id="6" name="TextBox 5"/>
           <p:cNvSpPr txBox="1"/>
           <p:nvPr/>
         </p:nvSpPr>
@@ -9695,7 +8483,7 @@
                 </a:solidFill>
                 <a:latin typeface="Calibri"/>
               </a:rPr>
-              <a:t>Cómo se expone en 3 minutos</a:t>
+              <a:t>Taller de hoy: Huella del sistema</a:t>
             </a:r>
           </a:p>
         </p:txBody>
@@ -9729,7 +8517,7 @@
                 </a:solidFill>
                 <a:latin typeface="Calibri"/>
               </a:rPr>
-              <a:t>Habla el vocero con la pantalla ya compartida · cronómetro en pantalla · se corta al llegar a cero</a:t>
+              <a:t>17 min en equipos · cada equipo, el sistema de su propio proyecto · diagrama de huella + 2 decisiones + 1 indicador</a:t>
             </a:r>
           </a:p>
         </p:txBody>
@@ -9742,8 +8530,8 @@
         </p:nvSpPr>
         <p:spPr>
           <a:xfrm>
-            <a:off x="457200" y="1444752"/>
-            <a:ext cx="11277295" cy="908913"/>
+            <a:off x="457200" y="1472184"/>
+            <a:ext cx="11277295" cy="566928"/>
           </a:xfrm>
           <a:prstGeom prst="roundRect">
             <a:avLst>
@@ -9781,25 +8569,25 @@
       </p:sp>
       <p:sp>
         <p:nvSpPr>
-          <p:cNvPr id="7" name="Rounded Rectangle 6"/>
+          <p:cNvPr id="7" name="Rectangle 6"/>
           <p:cNvSpPr/>
           <p:nvPr/>
         </p:nvSpPr>
         <p:spPr>
           <a:xfrm>
-            <a:off x="594360" y="1679752"/>
-            <a:ext cx="438912" cy="438912"/>
-          </a:xfrm>
-          <a:prstGeom prst="roundRect">
-            <a:avLst>
-              <a:gd name="adj" fmla="val 12000"/>
-            </a:avLst>
+            <a:off x="640080" y="1618487"/>
+            <a:ext cx="274320" cy="274320"/>
+          </a:xfrm>
+          <a:prstGeom prst="rect">
+            <a:avLst/>
           </a:prstGeom>
           <a:solidFill>
-            <a:srgbClr val="095292"/>
+            <a:srgbClr val="FFFFFF"/>
           </a:solidFill>
           <a:ln>
-            <a:noFill/>
+            <a:solidFill>
+              <a:srgbClr val="333333"/>
+            </a:solidFill>
           </a:ln>
         </p:spPr>
         <p:style>
@@ -9826,103 +8614,20 @@
       </p:sp>
       <p:sp>
         <p:nvSpPr>
-          <p:cNvPr id="8" name="TextBox 7"/>
-          <p:cNvSpPr txBox="1"/>
-          <p:nvPr/>
-        </p:nvSpPr>
-        <p:spPr>
-          <a:xfrm>
-            <a:off x="594360" y="1679752"/>
-            <a:ext cx="438912" cy="438912"/>
-          </a:xfrm>
-          <a:prstGeom prst="rect">
-            <a:avLst/>
-          </a:prstGeom>
-          <a:noFill/>
-        </p:spPr>
-        <p:txBody>
-          <a:bodyPr wrap="square" anchor="ctr"/>
-          <a:lstStyle/>
-          <a:p>
-            <a:pPr algn="ctr"/>
-            <a:r>
-              <a:rPr sz="1600" b="1" i="0">
-                <a:solidFill>
-                  <a:srgbClr val="FFFFFF"/>
-                </a:solidFill>
-                <a:latin typeface="Calibri"/>
-              </a:rPr>
-              <a:t>1</a:t>
-            </a:r>
-          </a:p>
-        </p:txBody>
-      </p:sp>
-      <p:sp>
-        <p:nvSpPr>
-          <p:cNvPr id="9" name="TextBox 8"/>
-          <p:cNvSpPr txBox="1"/>
-          <p:nvPr/>
-        </p:nvSpPr>
-        <p:spPr>
-          <a:xfrm>
-            <a:off x="1188720" y="1536192"/>
-            <a:ext cx="10271455" cy="744321"/>
-          </a:xfrm>
-          <a:prstGeom prst="rect">
-            <a:avLst/>
-          </a:prstGeom>
-          <a:noFill/>
-        </p:spPr>
-        <p:txBody>
-          <a:bodyPr wrap="square" anchor="ctr"/>
-          <a:lstStyle/>
-          <a:p>
-            <a:r>
-              <a:rPr sz="1500" b="1" i="0">
-                <a:solidFill>
-                  <a:srgbClr val="095292"/>
-                </a:solidFill>
-                <a:latin typeface="Calibri"/>
-              </a:rPr>
-              <a:t>40 s · El recorrido</a:t>
-            </a:r>
-          </a:p>
-          <a:p>
-            <a:pPr>
-              <a:spcBef>
-                <a:spcPts val="200"/>
-              </a:spcBef>
-            </a:pPr>
-            <a:r>
-              <a:rPr sz="1300" b="0" i="0">
-                <a:solidFill>
-                  <a:srgbClr val="333333"/>
-                </a:solidFill>
-                <a:latin typeface="Calibri"/>
-              </a:rPr>
-              <a:t>El diagrama, recorrido con el cursor. Dónde está cada etapa.</a:t>
-            </a:r>
-          </a:p>
-        </p:txBody>
-      </p:sp>
-      <p:sp>
-        <p:nvSpPr>
-          <p:cNvPr id="10" name="Rounded Rectangle 9"/>
+          <p:cNvPr id="8" name="Rectangle 7"/>
           <p:cNvSpPr/>
           <p:nvPr/>
         </p:nvSpPr>
         <p:spPr>
           <a:xfrm>
-            <a:off x="457200" y="2445105"/>
-            <a:ext cx="11277295" cy="908913"/>
-          </a:xfrm>
-          <a:prstGeom prst="roundRect">
-            <a:avLst>
-              <a:gd name="adj" fmla="val 12000"/>
-            </a:avLst>
+            <a:off x="640080" y="1618487"/>
+            <a:ext cx="73152" cy="274320"/>
+          </a:xfrm>
+          <a:prstGeom prst="rect">
+            <a:avLst/>
           </a:prstGeom>
           <a:solidFill>
-            <a:srgbClr val="E8F4FA"/>
+            <a:srgbClr val="269CCB"/>
           </a:solidFill>
           <a:ln>
             <a:noFill/>
@@ -9952,140 +8657,55 @@
       </p:sp>
       <p:sp>
         <p:nvSpPr>
-          <p:cNvPr id="11" name="Rounded Rectangle 10"/>
+          <p:cNvPr id="9" name="TextBox 8"/>
+          <p:cNvSpPr txBox="1"/>
+          <p:nvPr/>
+        </p:nvSpPr>
+        <p:spPr>
+          <a:xfrm>
+            <a:off x="1097280" y="1563624"/>
+            <a:ext cx="10362895" cy="402336"/>
+          </a:xfrm>
+          <a:prstGeom prst="rect">
+            <a:avLst/>
+          </a:prstGeom>
+          <a:noFill/>
+        </p:spPr>
+        <p:txBody>
+          <a:bodyPr wrap="square" anchor="ctr"/>
+          <a:lstStyle/>
+          <a:p>
+            <a:r>
+              <a:rPr sz="1500" b="1" i="0">
+                <a:solidFill>
+                  <a:srgbClr val="333333"/>
+                </a:solidFill>
+                <a:latin typeface="Calibri"/>
+              </a:rPr>
+              <a:t>EL RECORRIDO DIBUJADO</a:t>
+            </a:r>
+            <a:r>
+              <a:rPr sz="1500" b="0" i="0">
+                <a:solidFill>
+                  <a:srgbClr val="333333"/>
+                </a:solidFill>
+                <a:latin typeface="Calibri"/>
+              </a:rPr>
+              <a:t> — El camino completo con flechas: dispositivo del usuario → red → servidor → almacenamiento, y todo lo que se prende para que el sistema funcione.</a:t>
+            </a:r>
+          </a:p>
+        </p:txBody>
+      </p:sp>
+      <p:sp>
+        <p:nvSpPr>
+          <p:cNvPr id="10" name="Rounded Rectangle 9"/>
           <p:cNvSpPr/>
           <p:nvPr/>
         </p:nvSpPr>
         <p:spPr>
           <a:xfrm>
-            <a:off x="594360" y="2680106"/>
-            <a:ext cx="438912" cy="438912"/>
-          </a:xfrm>
-          <a:prstGeom prst="roundRect">
-            <a:avLst>
-              <a:gd name="adj" fmla="val 12000"/>
-            </a:avLst>
-          </a:prstGeom>
-          <a:solidFill>
-            <a:srgbClr val="095292"/>
-          </a:solidFill>
-          <a:ln>
-            <a:noFill/>
-          </a:ln>
-        </p:spPr>
-        <p:style>
-          <a:lnRef idx="1">
-            <a:schemeClr val="accent1"/>
-          </a:lnRef>
-          <a:fillRef idx="3">
-            <a:schemeClr val="accent1"/>
-          </a:fillRef>
-          <a:effectRef idx="2">
-            <a:schemeClr val="accent1"/>
-          </a:effectRef>
-          <a:fontRef idx="minor">
-            <a:schemeClr val="lt1"/>
-          </a:fontRef>
-        </p:style>
-        <p:txBody>
-          <a:bodyPr rtlCol="0" anchor="ctr"/>
-          <a:lstStyle/>
-          <a:p>
-            <a:pPr algn="ctr"/>
-          </a:p>
-        </p:txBody>
-      </p:sp>
-      <p:sp>
-        <p:nvSpPr>
-          <p:cNvPr id="12" name="TextBox 11"/>
-          <p:cNvSpPr txBox="1"/>
-          <p:nvPr/>
-        </p:nvSpPr>
-        <p:spPr>
-          <a:xfrm>
-            <a:off x="594360" y="2680106"/>
-            <a:ext cx="438912" cy="438912"/>
-          </a:xfrm>
-          <a:prstGeom prst="rect">
-            <a:avLst/>
-          </a:prstGeom>
-          <a:noFill/>
-        </p:spPr>
-        <p:txBody>
-          <a:bodyPr wrap="square" anchor="ctr"/>
-          <a:lstStyle/>
-          <a:p>
-            <a:pPr algn="ctr"/>
-            <a:r>
-              <a:rPr sz="1600" b="1" i="0">
-                <a:solidFill>
-                  <a:srgbClr val="FFFFFF"/>
-                </a:solidFill>
-                <a:latin typeface="Calibri"/>
-              </a:rPr>
-              <a:t>2</a:t>
-            </a:r>
-          </a:p>
-        </p:txBody>
-      </p:sp>
-      <p:sp>
-        <p:nvSpPr>
-          <p:cNvPr id="13" name="TextBox 12"/>
-          <p:cNvSpPr txBox="1"/>
-          <p:nvPr/>
-        </p:nvSpPr>
-        <p:spPr>
-          <a:xfrm>
-            <a:off x="1188720" y="2536545"/>
-            <a:ext cx="10271455" cy="744321"/>
-          </a:xfrm>
-          <a:prstGeom prst="rect">
-            <a:avLst/>
-          </a:prstGeom>
-          <a:noFill/>
-        </p:spPr>
-        <p:txBody>
-          <a:bodyPr wrap="square" anchor="ctr"/>
-          <a:lstStyle/>
-          <a:p>
-            <a:r>
-              <a:rPr sz="1500" b="1" i="0">
-                <a:solidFill>
-                  <a:srgbClr val="095292"/>
-                </a:solidFill>
-                <a:latin typeface="Calibri"/>
-              </a:rPr>
-              <a:t>30 s · Lo que se repite</a:t>
-            </a:r>
-          </a:p>
-          <a:p>
-            <a:pPr>
-              <a:spcBef>
-                <a:spcPts val="200"/>
-              </a:spcBef>
-            </a:pPr>
-            <a:r>
-              <a:rPr sz="1300" b="0" i="0">
-                <a:solidFill>
-                  <a:srgbClr val="333333"/>
-                </a:solidFill>
-                <a:latin typeface="Calibri"/>
-              </a:rPr>
-              <a:t>La operación repetida y cuántas veces al día.</a:t>
-            </a:r>
-          </a:p>
-        </p:txBody>
-      </p:sp>
-      <p:sp>
-        <p:nvSpPr>
-          <p:cNvPr id="14" name="Rounded Rectangle 13"/>
-          <p:cNvSpPr/>
-          <p:nvPr/>
-        </p:nvSpPr>
-        <p:spPr>
-          <a:xfrm>
-            <a:off x="457200" y="3445459"/>
-            <a:ext cx="11277295" cy="908913"/>
+            <a:off x="457200" y="2148839"/>
+            <a:ext cx="11277295" cy="566928"/>
           </a:xfrm>
           <a:prstGeom prst="roundRect">
             <a:avLst>
@@ -10123,25 +8743,25 @@
       </p:sp>
       <p:sp>
         <p:nvSpPr>
-          <p:cNvPr id="15" name="Rounded Rectangle 14"/>
+          <p:cNvPr id="11" name="Rectangle 10"/>
           <p:cNvSpPr/>
           <p:nvPr/>
         </p:nvSpPr>
         <p:spPr>
           <a:xfrm>
-            <a:off x="594360" y="3680460"/>
-            <a:ext cx="438912" cy="438912"/>
-          </a:xfrm>
-          <a:prstGeom prst="roundRect">
-            <a:avLst>
-              <a:gd name="adj" fmla="val 12000"/>
-            </a:avLst>
+            <a:off x="640080" y="2295144"/>
+            <a:ext cx="274320" cy="274320"/>
+          </a:xfrm>
+          <a:prstGeom prst="rect">
+            <a:avLst/>
           </a:prstGeom>
           <a:solidFill>
-            <a:srgbClr val="095292"/>
+            <a:srgbClr val="FFFFFF"/>
           </a:solidFill>
           <a:ln>
-            <a:noFill/>
+            <a:solidFill>
+              <a:srgbClr val="333333"/>
+            </a:solidFill>
           </a:ln>
         </p:spPr>
         <p:style>
@@ -10168,103 +8788,20 @@
       </p:sp>
       <p:sp>
         <p:nvSpPr>
-          <p:cNvPr id="16" name="TextBox 15"/>
-          <p:cNvSpPr txBox="1"/>
-          <p:nvPr/>
-        </p:nvSpPr>
-        <p:spPr>
-          <a:xfrm>
-            <a:off x="594360" y="3680460"/>
-            <a:ext cx="438912" cy="438912"/>
-          </a:xfrm>
-          <a:prstGeom prst="rect">
-            <a:avLst/>
-          </a:prstGeom>
-          <a:noFill/>
-        </p:spPr>
-        <p:txBody>
-          <a:bodyPr wrap="square" anchor="ctr"/>
-          <a:lstStyle/>
-          <a:p>
-            <a:pPr algn="ctr"/>
-            <a:r>
-              <a:rPr sz="1600" b="1" i="0">
-                <a:solidFill>
-                  <a:srgbClr val="FFFFFF"/>
-                </a:solidFill>
-                <a:latin typeface="Calibri"/>
-              </a:rPr>
-              <a:t>3</a:t>
-            </a:r>
-          </a:p>
-        </p:txBody>
-      </p:sp>
-      <p:sp>
-        <p:nvSpPr>
-          <p:cNvPr id="17" name="TextBox 16"/>
-          <p:cNvSpPr txBox="1"/>
-          <p:nvPr/>
-        </p:nvSpPr>
-        <p:spPr>
-          <a:xfrm>
-            <a:off x="1188720" y="3536899"/>
-            <a:ext cx="10271455" cy="744321"/>
-          </a:xfrm>
-          <a:prstGeom prst="rect">
-            <a:avLst/>
-          </a:prstGeom>
-          <a:noFill/>
-        </p:spPr>
-        <p:txBody>
-          <a:bodyPr wrap="square" anchor="ctr"/>
-          <a:lstStyle/>
-          <a:p>
-            <a:r>
-              <a:rPr sz="1500" b="1" i="0">
-                <a:solidFill>
-                  <a:srgbClr val="095292"/>
-                </a:solidFill>
-                <a:latin typeface="Calibri"/>
-              </a:rPr>
-              <a:t>50 s · La etapa que más pesa</a:t>
-            </a:r>
-          </a:p>
-          <a:p>
-            <a:pPr>
-              <a:spcBef>
-                <a:spcPts val="200"/>
-              </a:spcBef>
-            </a:pPr>
-            <a:r>
-              <a:rPr sz="1300" b="0" i="0">
-                <a:solidFill>
-                  <a:srgbClr val="333333"/>
-                </a:solidFill>
-                <a:latin typeface="Calibri"/>
-              </a:rPr>
-              <a:t>Cuál y por qué. Es el minuto obligatorio.</a:t>
-            </a:r>
-          </a:p>
-        </p:txBody>
-      </p:sp>
-      <p:sp>
-        <p:nvSpPr>
-          <p:cNvPr id="18" name="Rounded Rectangle 17"/>
+          <p:cNvPr id="12" name="Rectangle 11"/>
           <p:cNvSpPr/>
           <p:nvPr/>
         </p:nvSpPr>
         <p:spPr>
           <a:xfrm>
-            <a:off x="457200" y="4445812"/>
-            <a:ext cx="11277295" cy="908913"/>
-          </a:xfrm>
-          <a:prstGeom prst="roundRect">
-            <a:avLst>
-              <a:gd name="adj" fmla="val 12000"/>
-            </a:avLst>
+            <a:off x="640080" y="2295144"/>
+            <a:ext cx="73152" cy="274320"/>
+          </a:xfrm>
+          <a:prstGeom prst="rect">
+            <a:avLst/>
           </a:prstGeom>
           <a:solidFill>
-            <a:srgbClr val="E8F4FA"/>
+            <a:srgbClr val="269CCB"/>
           </a:solidFill>
           <a:ln>
             <a:noFill/>
@@ -10294,140 +8831,73 @@
       </p:sp>
       <p:sp>
         <p:nvSpPr>
-          <p:cNvPr id="19" name="Rounded Rectangle 18"/>
+          <p:cNvPr id="13" name="TextBox 12"/>
+          <p:cNvSpPr txBox="1"/>
+          <p:nvPr/>
+        </p:nvSpPr>
+        <p:spPr>
+          <a:xfrm>
+            <a:off x="1097280" y="2240279"/>
+            <a:ext cx="10362895" cy="402336"/>
+          </a:xfrm>
+          <a:prstGeom prst="rect">
+            <a:avLst/>
+          </a:prstGeom>
+          <a:noFill/>
+        </p:spPr>
+        <p:txBody>
+          <a:bodyPr wrap="square" anchor="ctr"/>
+          <a:lstStyle/>
+          <a:p>
+            <a:r>
+              <a:rPr sz="1500" b="1" i="0">
+                <a:solidFill>
+                  <a:srgbClr val="333333"/>
+                </a:solidFill>
+                <a:latin typeface="Calibri"/>
+              </a:rPr>
+              <a:t>LO QUE SE REPITE</a:t>
+            </a:r>
+            <a:r>
+              <a:rPr sz="1500" b="0" i="0">
+                <a:solidFill>
+                  <a:srgbClr val="333333"/>
+                </a:solidFill>
+                <a:latin typeface="Calibri"/>
+              </a:rPr>
+              <a:t> — Qué operación ocurre </a:t>
+            </a:r>
+            <a:r>
+              <a:rPr sz="1500" b="1" i="0">
+                <a:solidFill>
+                  <a:srgbClr val="333333"/>
+                </a:solidFill>
+                <a:latin typeface="Calibri"/>
+              </a:rPr>
+              <a:t>muchas veces al día</a:t>
+            </a:r>
+            <a:r>
+              <a:rPr sz="1500" b="0" i="0">
+                <a:solidFill>
+                  <a:srgbClr val="333333"/>
+                </a:solidFill>
+                <a:latin typeface="Calibri"/>
+              </a:rPr>
+              <a:t> en su sistema, y una estimación gruesa de cuántas veces. Lo que pasa una vez no mueve nada.</a:t>
+            </a:r>
+          </a:p>
+        </p:txBody>
+      </p:sp>
+      <p:sp>
+        <p:nvSpPr>
+          <p:cNvPr id="14" name="Rounded Rectangle 13"/>
           <p:cNvSpPr/>
           <p:nvPr/>
         </p:nvSpPr>
         <p:spPr>
           <a:xfrm>
-            <a:off x="594360" y="4680813"/>
-            <a:ext cx="438912" cy="438912"/>
-          </a:xfrm>
-          <a:prstGeom prst="roundRect">
-            <a:avLst>
-              <a:gd name="adj" fmla="val 12000"/>
-            </a:avLst>
-          </a:prstGeom>
-          <a:solidFill>
-            <a:srgbClr val="095292"/>
-          </a:solidFill>
-          <a:ln>
-            <a:noFill/>
-          </a:ln>
-        </p:spPr>
-        <p:style>
-          <a:lnRef idx="1">
-            <a:schemeClr val="accent1"/>
-          </a:lnRef>
-          <a:fillRef idx="3">
-            <a:schemeClr val="accent1"/>
-          </a:fillRef>
-          <a:effectRef idx="2">
-            <a:schemeClr val="accent1"/>
-          </a:effectRef>
-          <a:fontRef idx="minor">
-            <a:schemeClr val="lt1"/>
-          </a:fontRef>
-        </p:style>
-        <p:txBody>
-          <a:bodyPr rtlCol="0" anchor="ctr"/>
-          <a:lstStyle/>
-          <a:p>
-            <a:pPr algn="ctr"/>
-          </a:p>
-        </p:txBody>
-      </p:sp>
-      <p:sp>
-        <p:nvSpPr>
-          <p:cNvPr id="20" name="TextBox 19"/>
-          <p:cNvSpPr txBox="1"/>
-          <p:nvPr/>
-        </p:nvSpPr>
-        <p:spPr>
-          <a:xfrm>
-            <a:off x="594360" y="4680813"/>
-            <a:ext cx="438912" cy="438912"/>
-          </a:xfrm>
-          <a:prstGeom prst="rect">
-            <a:avLst/>
-          </a:prstGeom>
-          <a:noFill/>
-        </p:spPr>
-        <p:txBody>
-          <a:bodyPr wrap="square" anchor="ctr"/>
-          <a:lstStyle/>
-          <a:p>
-            <a:pPr algn="ctr"/>
-            <a:r>
-              <a:rPr sz="1600" b="1" i="0">
-                <a:solidFill>
-                  <a:srgbClr val="FFFFFF"/>
-                </a:solidFill>
-                <a:latin typeface="Calibri"/>
-              </a:rPr>
-              <a:t>4</a:t>
-            </a:r>
-          </a:p>
-        </p:txBody>
-      </p:sp>
-      <p:sp>
-        <p:nvSpPr>
-          <p:cNvPr id="21" name="TextBox 20"/>
-          <p:cNvSpPr txBox="1"/>
-          <p:nvPr/>
-        </p:nvSpPr>
-        <p:spPr>
-          <a:xfrm>
-            <a:off x="1188720" y="4537252"/>
-            <a:ext cx="10271455" cy="744321"/>
-          </a:xfrm>
-          <a:prstGeom prst="rect">
-            <a:avLst/>
-          </a:prstGeom>
-          <a:noFill/>
-        </p:spPr>
-        <p:txBody>
-          <a:bodyPr wrap="square" anchor="ctr"/>
-          <a:lstStyle/>
-          <a:p>
-            <a:r>
-              <a:rPr sz="1500" b="1" i="0">
-                <a:solidFill>
-                  <a:srgbClr val="095292"/>
-                </a:solidFill>
-                <a:latin typeface="Calibri"/>
-              </a:rPr>
-              <a:t>50 s · Las dos decisiones y el indicador</a:t>
-            </a:r>
-          </a:p>
-          <a:p>
-            <a:pPr>
-              <a:spcBef>
-                <a:spcPts val="200"/>
-              </a:spcBef>
-            </a:pPr>
-            <a:r>
-              <a:rPr sz="1300" b="0" i="0">
-                <a:solidFill>
-                  <a:srgbClr val="333333"/>
-                </a:solidFill>
-                <a:latin typeface="Calibri"/>
-              </a:rPr>
-              <a:t>Qué van a cambiar y cómo se sabrá si sirvió.</a:t>
-            </a:r>
-          </a:p>
-        </p:txBody>
-      </p:sp>
-      <p:sp>
-        <p:nvSpPr>
-          <p:cNvPr id="22" name="Rounded Rectangle 21"/>
-          <p:cNvSpPr/>
-          <p:nvPr/>
-        </p:nvSpPr>
-        <p:spPr>
-          <a:xfrm>
-            <a:off x="457200" y="5446166"/>
-            <a:ext cx="11277295" cy="908913"/>
+            <a:off x="457200" y="2825496"/>
+            <a:ext cx="11277295" cy="566928"/>
           </a:xfrm>
           <a:prstGeom prst="roundRect">
             <a:avLst>
@@ -10465,25 +8935,25 @@
       </p:sp>
       <p:sp>
         <p:nvSpPr>
-          <p:cNvPr id="23" name="Rounded Rectangle 22"/>
+          <p:cNvPr id="15" name="Rectangle 14"/>
           <p:cNvSpPr/>
           <p:nvPr/>
         </p:nvSpPr>
         <p:spPr>
           <a:xfrm>
-            <a:off x="594360" y="5681167"/>
-            <a:ext cx="438912" cy="438912"/>
-          </a:xfrm>
-          <a:prstGeom prst="roundRect">
-            <a:avLst>
-              <a:gd name="adj" fmla="val 12000"/>
-            </a:avLst>
+            <a:off x="640080" y="2971800"/>
+            <a:ext cx="274320" cy="274320"/>
+          </a:xfrm>
+          <a:prstGeom prst="rect">
+            <a:avLst/>
           </a:prstGeom>
           <a:solidFill>
-            <a:srgbClr val="095292"/>
+            <a:srgbClr val="FFFFFF"/>
           </a:solidFill>
           <a:ln>
-            <a:noFill/>
+            <a:solidFill>
+              <a:srgbClr val="333333"/>
+            </a:solidFill>
           </a:ln>
         </p:spPr>
         <p:style>
@@ -10510,14 +8980,57 @@
       </p:sp>
       <p:sp>
         <p:nvSpPr>
-          <p:cNvPr id="24" name="TextBox 23"/>
+          <p:cNvPr id="16" name="Rectangle 15"/>
+          <p:cNvSpPr/>
+          <p:nvPr/>
+        </p:nvSpPr>
+        <p:spPr>
+          <a:xfrm>
+            <a:off x="640080" y="2971800"/>
+            <a:ext cx="73152" cy="274320"/>
+          </a:xfrm>
+          <a:prstGeom prst="rect">
+            <a:avLst/>
+          </a:prstGeom>
+          <a:solidFill>
+            <a:srgbClr val="269CCB"/>
+          </a:solidFill>
+          <a:ln>
+            <a:noFill/>
+          </a:ln>
+        </p:spPr>
+        <p:style>
+          <a:lnRef idx="1">
+            <a:schemeClr val="accent1"/>
+          </a:lnRef>
+          <a:fillRef idx="3">
+            <a:schemeClr val="accent1"/>
+          </a:fillRef>
+          <a:effectRef idx="2">
+            <a:schemeClr val="accent1"/>
+          </a:effectRef>
+          <a:fontRef idx="minor">
+            <a:schemeClr val="lt1"/>
+          </a:fontRef>
+        </p:style>
+        <p:txBody>
+          <a:bodyPr rtlCol="0" anchor="ctr"/>
+          <a:lstStyle/>
+          <a:p>
+            <a:pPr algn="ctr"/>
+          </a:p>
+        </p:txBody>
+      </p:sp>
+      <p:sp>
+        <p:nvSpPr>
+          <p:cNvPr id="17" name="TextBox 16"/>
           <p:cNvSpPr txBox="1"/>
           <p:nvPr/>
         </p:nvSpPr>
         <p:spPr>
           <a:xfrm>
-            <a:off x="594360" y="5681167"/>
-            <a:ext cx="438912" cy="438912"/>
+            <a:off x="1097280" y="2916936"/>
+            <a:ext cx="10362895" cy="402336"/>
           </a:xfrm>
           <a:prstGeom prst="rect">
             <a:avLst/>
@@ -10528,16 +9041,349 @@
           <a:bodyPr wrap="square" anchor="ctr"/>
           <a:lstStyle/>
           <a:p>
+            <a:r>
+              <a:rPr sz="1500" b="1" i="0">
+                <a:solidFill>
+                  <a:srgbClr val="333333"/>
+                </a:solidFill>
+                <a:latin typeface="Calibri"/>
+              </a:rPr>
+              <a:t>LA ETAPA QUE MÁS PESA</a:t>
+            </a:r>
+            <a:r>
+              <a:rPr sz="1500" b="0" i="0">
+                <a:solidFill>
+                  <a:srgbClr val="333333"/>
+                </a:solidFill>
+                <a:latin typeface="Calibri"/>
+              </a:rPr>
+              <a:t> — Una sola etapa, con la razón. No hace falta un cálculo exacto: hace falta saber dónde apretar.</a:t>
+            </a:r>
+          </a:p>
+        </p:txBody>
+      </p:sp>
+      <p:sp>
+        <p:nvSpPr>
+          <p:cNvPr id="18" name="Rounded Rectangle 17"/>
+          <p:cNvSpPr/>
+          <p:nvPr/>
+        </p:nvSpPr>
+        <p:spPr>
+          <a:xfrm>
+            <a:off x="457200" y="3502152"/>
+            <a:ext cx="11277295" cy="566928"/>
+          </a:xfrm>
+          <a:prstGeom prst="roundRect">
+            <a:avLst>
+              <a:gd name="adj" fmla="val 12000"/>
+            </a:avLst>
+          </a:prstGeom>
+          <a:solidFill>
+            <a:srgbClr val="F2F2F2"/>
+          </a:solidFill>
+          <a:ln>
+            <a:noFill/>
+          </a:ln>
+        </p:spPr>
+        <p:style>
+          <a:lnRef idx="1">
+            <a:schemeClr val="accent1"/>
+          </a:lnRef>
+          <a:fillRef idx="3">
+            <a:schemeClr val="accent1"/>
+          </a:fillRef>
+          <a:effectRef idx="2">
+            <a:schemeClr val="accent1"/>
+          </a:effectRef>
+          <a:fontRef idx="minor">
+            <a:schemeClr val="lt1"/>
+          </a:fontRef>
+        </p:style>
+        <p:txBody>
+          <a:bodyPr rtlCol="0" anchor="ctr"/>
+          <a:lstStyle/>
+          <a:p>
             <a:pPr algn="ctr"/>
-            <a:r>
-              <a:rPr sz="1600" b="1" i="0">
-                <a:solidFill>
-                  <a:srgbClr val="FFFFFF"/>
-                </a:solidFill>
-                <a:latin typeface="Calibri"/>
-              </a:rPr>
-              <a:t>5</a:t>
-            </a:r>
+          </a:p>
+        </p:txBody>
+      </p:sp>
+      <p:sp>
+        <p:nvSpPr>
+          <p:cNvPr id="19" name="Rectangle 18"/>
+          <p:cNvSpPr/>
+          <p:nvPr/>
+        </p:nvSpPr>
+        <p:spPr>
+          <a:xfrm>
+            <a:off x="640080" y="3648456"/>
+            <a:ext cx="274320" cy="274320"/>
+          </a:xfrm>
+          <a:prstGeom prst="rect">
+            <a:avLst/>
+          </a:prstGeom>
+          <a:solidFill>
+            <a:srgbClr val="FFFFFF"/>
+          </a:solidFill>
+          <a:ln>
+            <a:solidFill>
+              <a:srgbClr val="333333"/>
+            </a:solidFill>
+          </a:ln>
+        </p:spPr>
+        <p:style>
+          <a:lnRef idx="1">
+            <a:schemeClr val="accent1"/>
+          </a:lnRef>
+          <a:fillRef idx="3">
+            <a:schemeClr val="accent1"/>
+          </a:fillRef>
+          <a:effectRef idx="2">
+            <a:schemeClr val="accent1"/>
+          </a:effectRef>
+          <a:fontRef idx="minor">
+            <a:schemeClr val="lt1"/>
+          </a:fontRef>
+        </p:style>
+        <p:txBody>
+          <a:bodyPr rtlCol="0" anchor="ctr"/>
+          <a:lstStyle/>
+          <a:p>
+            <a:pPr algn="ctr"/>
+          </a:p>
+        </p:txBody>
+      </p:sp>
+      <p:sp>
+        <p:nvSpPr>
+          <p:cNvPr id="20" name="Rectangle 19"/>
+          <p:cNvSpPr/>
+          <p:nvPr/>
+        </p:nvSpPr>
+        <p:spPr>
+          <a:xfrm>
+            <a:off x="640080" y="3648456"/>
+            <a:ext cx="73152" cy="274320"/>
+          </a:xfrm>
+          <a:prstGeom prst="rect">
+            <a:avLst/>
+          </a:prstGeom>
+          <a:solidFill>
+            <a:srgbClr val="269CCB"/>
+          </a:solidFill>
+          <a:ln>
+            <a:noFill/>
+          </a:ln>
+        </p:spPr>
+        <p:style>
+          <a:lnRef idx="1">
+            <a:schemeClr val="accent1"/>
+          </a:lnRef>
+          <a:fillRef idx="3">
+            <a:schemeClr val="accent1"/>
+          </a:fillRef>
+          <a:effectRef idx="2">
+            <a:schemeClr val="accent1"/>
+          </a:effectRef>
+          <a:fontRef idx="minor">
+            <a:schemeClr val="lt1"/>
+          </a:fontRef>
+        </p:style>
+        <p:txBody>
+          <a:bodyPr rtlCol="0" anchor="ctr"/>
+          <a:lstStyle/>
+          <a:p>
+            <a:pPr algn="ctr"/>
+          </a:p>
+        </p:txBody>
+      </p:sp>
+      <p:sp>
+        <p:nvSpPr>
+          <p:cNvPr id="21" name="TextBox 20"/>
+          <p:cNvSpPr txBox="1"/>
+          <p:nvPr/>
+        </p:nvSpPr>
+        <p:spPr>
+          <a:xfrm>
+            <a:off x="1097280" y="3593592"/>
+            <a:ext cx="10362895" cy="402336"/>
+          </a:xfrm>
+          <a:prstGeom prst="rect">
+            <a:avLst/>
+          </a:prstGeom>
+          <a:noFill/>
+        </p:spPr>
+        <p:txBody>
+          <a:bodyPr wrap="square" anchor="ctr"/>
+          <a:lstStyle/>
+          <a:p>
+            <a:r>
+              <a:rPr sz="1500" b="1" i="0">
+                <a:solidFill>
+                  <a:srgbClr val="333333"/>
+                </a:solidFill>
+                <a:latin typeface="Calibri"/>
+              </a:rPr>
+              <a:t>DOS DECISIONES DE DISEÑO</a:t>
+            </a:r>
+            <a:r>
+              <a:rPr sz="1500" b="0" i="0">
+                <a:solidFill>
+                  <a:srgbClr val="333333"/>
+                </a:solidFill>
+                <a:latin typeface="Calibri"/>
+              </a:rPr>
+              <a:t> — Dos cosas que </a:t>
+            </a:r>
+            <a:r>
+              <a:rPr sz="1500" b="1" i="0">
+                <a:solidFill>
+                  <a:srgbClr val="333333"/>
+                </a:solidFill>
+                <a:latin typeface="Calibri"/>
+              </a:rPr>
+              <a:t>ustedes</a:t>
+            </a:r>
+            <a:r>
+              <a:rPr sz="1500" b="0" i="0">
+                <a:solidFill>
+                  <a:srgbClr val="333333"/>
+                </a:solidFill>
+                <a:latin typeface="Calibri"/>
+              </a:rPr>
+              <a:t> pueden decidir en su sistema para bajar esa etapa. De diseño, no de comportamiento del usuario.</a:t>
+            </a:r>
+          </a:p>
+        </p:txBody>
+      </p:sp>
+      <p:sp>
+        <p:nvSpPr>
+          <p:cNvPr id="22" name="Rounded Rectangle 21"/>
+          <p:cNvSpPr/>
+          <p:nvPr/>
+        </p:nvSpPr>
+        <p:spPr>
+          <a:xfrm>
+            <a:off x="457200" y="4178808"/>
+            <a:ext cx="11277295" cy="566928"/>
+          </a:xfrm>
+          <a:prstGeom prst="roundRect">
+            <a:avLst>
+              <a:gd name="adj" fmla="val 12000"/>
+            </a:avLst>
+          </a:prstGeom>
+          <a:solidFill>
+            <a:srgbClr val="F2F2F2"/>
+          </a:solidFill>
+          <a:ln>
+            <a:noFill/>
+          </a:ln>
+        </p:spPr>
+        <p:style>
+          <a:lnRef idx="1">
+            <a:schemeClr val="accent1"/>
+          </a:lnRef>
+          <a:fillRef idx="3">
+            <a:schemeClr val="accent1"/>
+          </a:fillRef>
+          <a:effectRef idx="2">
+            <a:schemeClr val="accent1"/>
+          </a:effectRef>
+          <a:fontRef idx="minor">
+            <a:schemeClr val="lt1"/>
+          </a:fontRef>
+        </p:style>
+        <p:txBody>
+          <a:bodyPr rtlCol="0" anchor="ctr"/>
+          <a:lstStyle/>
+          <a:p>
+            <a:pPr algn="ctr"/>
+          </a:p>
+        </p:txBody>
+      </p:sp>
+      <p:sp>
+        <p:nvSpPr>
+          <p:cNvPr id="23" name="Rectangle 22"/>
+          <p:cNvSpPr/>
+          <p:nvPr/>
+        </p:nvSpPr>
+        <p:spPr>
+          <a:xfrm>
+            <a:off x="640080" y="4325112"/>
+            <a:ext cx="274320" cy="274320"/>
+          </a:xfrm>
+          <a:prstGeom prst="rect">
+            <a:avLst/>
+          </a:prstGeom>
+          <a:solidFill>
+            <a:srgbClr val="FFFFFF"/>
+          </a:solidFill>
+          <a:ln>
+            <a:solidFill>
+              <a:srgbClr val="333333"/>
+            </a:solidFill>
+          </a:ln>
+        </p:spPr>
+        <p:style>
+          <a:lnRef idx="1">
+            <a:schemeClr val="accent1"/>
+          </a:lnRef>
+          <a:fillRef idx="3">
+            <a:schemeClr val="accent1"/>
+          </a:fillRef>
+          <a:effectRef idx="2">
+            <a:schemeClr val="accent1"/>
+          </a:effectRef>
+          <a:fontRef idx="minor">
+            <a:schemeClr val="lt1"/>
+          </a:fontRef>
+        </p:style>
+        <p:txBody>
+          <a:bodyPr rtlCol="0" anchor="ctr"/>
+          <a:lstStyle/>
+          <a:p>
+            <a:pPr algn="ctr"/>
+          </a:p>
+        </p:txBody>
+      </p:sp>
+      <p:sp>
+        <p:nvSpPr>
+          <p:cNvPr id="24" name="Rectangle 23"/>
+          <p:cNvSpPr/>
+          <p:nvPr/>
+        </p:nvSpPr>
+        <p:spPr>
+          <a:xfrm>
+            <a:off x="640080" y="4325112"/>
+            <a:ext cx="73152" cy="274320"/>
+          </a:xfrm>
+          <a:prstGeom prst="rect">
+            <a:avLst/>
+          </a:prstGeom>
+          <a:solidFill>
+            <a:srgbClr val="269CCB"/>
+          </a:solidFill>
+          <a:ln>
+            <a:noFill/>
+          </a:ln>
+        </p:spPr>
+        <p:style>
+          <a:lnRef idx="1">
+            <a:schemeClr val="accent1"/>
+          </a:lnRef>
+          <a:fillRef idx="3">
+            <a:schemeClr val="accent1"/>
+          </a:fillRef>
+          <a:effectRef idx="2">
+            <a:schemeClr val="accent1"/>
+          </a:effectRef>
+          <a:fontRef idx="minor">
+            <a:schemeClr val="lt1"/>
+          </a:fontRef>
+        </p:style>
+        <p:txBody>
+          <a:bodyPr rtlCol="0" anchor="ctr"/>
+          <a:lstStyle/>
+          <a:p>
+            <a:pPr algn="ctr"/>
           </a:p>
         </p:txBody>
       </p:sp>
@@ -10549,8 +9395,8 @@
         </p:nvSpPr>
         <p:spPr>
           <a:xfrm>
-            <a:off x="1188720" y="5537606"/>
-            <a:ext cx="10271455" cy="744321"/>
+            <a:off x="1097280" y="4270248"/>
+            <a:ext cx="10362895" cy="402336"/>
           </a:xfrm>
           <a:prstGeom prst="rect">
             <a:avLst/>
@@ -10564,27 +9410,20 @@
             <a:r>
               <a:rPr sz="1500" b="1" i="0">
                 <a:solidFill>
-                  <a:srgbClr val="095292"/>
-                </a:solidFill>
-                <a:latin typeface="Calibri"/>
-              </a:rPr>
-              <a:t>10 s · La fuente</a:t>
-            </a:r>
-          </a:p>
-          <a:p>
-            <a:pPr>
-              <a:spcBef>
-                <a:spcPts val="200"/>
-              </a:spcBef>
-            </a:pPr>
-            <a:r>
-              <a:rPr sz="1300" b="0" i="0">
-                <a:solidFill>
-                  <a:srgbClr val="333333"/>
-                </a:solidFill>
-                <a:latin typeface="Calibri"/>
-              </a:rPr>
-              <a:t>De dónde salió cualquier cifra que hayan dicho.</a:t>
+                  <a:srgbClr val="333333"/>
+                </a:solidFill>
+                <a:latin typeface="Calibri"/>
+              </a:rPr>
+              <a:t>EL INDICADOR</a:t>
+            </a:r>
+            <a:r>
+              <a:rPr sz="1500" b="0" i="0">
+                <a:solidFill>
+                  <a:srgbClr val="333333"/>
+                </a:solidFill>
+                <a:latin typeface="Calibri"/>
+              </a:rPr>
+              <a:t> — Un número que se pueda medir al final del semestre para saber si la decisión funcionó. Con su unidad.</a:t>
             </a:r>
           </a:p>
         </p:txBody>
@@ -10659,7 +9498,7 @@
         <p:spPr>
           <a:xfrm>
             <a:off x="0" y="0"/>
-            <a:ext cx="12191695" cy="960120"/>
+            <a:ext cx="12191695" cy="1170432"/>
           </a:xfrm>
           <a:prstGeom prst="rect">
             <a:avLst/>
@@ -10701,7 +9540,7 @@
         </p:nvSpPr>
         <p:spPr>
           <a:xfrm>
-            <a:off x="0" y="960120"/>
+            <a:off x="0" y="1170432"/>
             <a:ext cx="12191695" cy="41148"/>
           </a:xfrm>
           <a:prstGeom prst="rect">
@@ -10745,7 +9584,7 @@
         <p:spPr>
           <a:xfrm>
             <a:off x="457200" y="164592"/>
-            <a:ext cx="11277295" cy="502920"/>
+            <a:ext cx="11277295" cy="384048"/>
           </a:xfrm>
           <a:prstGeom prst="rect">
             <a:avLst/>
@@ -10765,7 +9604,7 @@
                 </a:solidFill>
                 <a:latin typeface="Calibri"/>
               </a:rPr>
-              <a:t>Para la Clase 6</a:t>
+              <a:t>Cómo se expone en 3 minutos</a:t>
             </a:r>
           </a:p>
         </p:txBody>
@@ -10778,8 +9617,8 @@
         </p:nvSpPr>
         <p:spPr>
           <a:xfrm>
-            <a:off x="457200" y="1170432"/>
-            <a:ext cx="11277295" cy="5230368"/>
+            <a:off x="457200" y="566928"/>
+            <a:ext cx="11277295" cy="411480"/>
           </a:xfrm>
           <a:prstGeom prst="rect">
             <a:avLst/>
@@ -10792,234 +9631,876 @@
           </a:bodyPr>
           <a:lstStyle/>
           <a:p>
+            <a:r>
+              <a:rPr sz="1400" b="0" i="0">
+                <a:solidFill>
+                  <a:srgbClr val="B8D8EE"/>
+                </a:solidFill>
+                <a:latin typeface="Calibri"/>
+              </a:rPr>
+              <a:t>Habla el vocero con la pantalla ya compartida · cronómetro en pantalla · se corta al llegar a cero</a:t>
+            </a:r>
+          </a:p>
+        </p:txBody>
+      </p:sp>
+      <p:sp>
+        <p:nvSpPr>
+          <p:cNvPr id="6" name="Rounded Rectangle 5"/>
+          <p:cNvSpPr/>
+          <p:nvPr/>
+        </p:nvSpPr>
+        <p:spPr>
+          <a:xfrm>
+            <a:off x="457200" y="1444752"/>
+            <a:ext cx="11277295" cy="908913"/>
+          </a:xfrm>
+          <a:prstGeom prst="roundRect">
+            <a:avLst>
+              <a:gd name="adj" fmla="val 12000"/>
+            </a:avLst>
+          </a:prstGeom>
+          <a:solidFill>
+            <a:srgbClr val="F2F2F2"/>
+          </a:solidFill>
+          <a:ln>
+            <a:noFill/>
+          </a:ln>
+        </p:spPr>
+        <p:style>
+          <a:lnRef idx="1">
+            <a:schemeClr val="accent1"/>
+          </a:lnRef>
+          <a:fillRef idx="3">
+            <a:schemeClr val="accent1"/>
+          </a:fillRef>
+          <a:effectRef idx="2">
+            <a:schemeClr val="accent1"/>
+          </a:effectRef>
+          <a:fontRef idx="minor">
+            <a:schemeClr val="lt1"/>
+          </a:fontRef>
+        </p:style>
+        <p:txBody>
+          <a:bodyPr rtlCol="0" anchor="ctr"/>
+          <a:lstStyle/>
+          <a:p>
+            <a:pPr algn="ctr"/>
+          </a:p>
+        </p:txBody>
+      </p:sp>
+      <p:sp>
+        <p:nvSpPr>
+          <p:cNvPr id="7" name="Rounded Rectangle 6"/>
+          <p:cNvSpPr/>
+          <p:nvPr/>
+        </p:nvSpPr>
+        <p:spPr>
+          <a:xfrm>
+            <a:off x="594360" y="1679752"/>
+            <a:ext cx="438912" cy="438912"/>
+          </a:xfrm>
+          <a:prstGeom prst="roundRect">
+            <a:avLst>
+              <a:gd name="adj" fmla="val 12000"/>
+            </a:avLst>
+          </a:prstGeom>
+          <a:solidFill>
+            <a:srgbClr val="095292"/>
+          </a:solidFill>
+          <a:ln>
+            <a:noFill/>
+          </a:ln>
+        </p:spPr>
+        <p:style>
+          <a:lnRef idx="1">
+            <a:schemeClr val="accent1"/>
+          </a:lnRef>
+          <a:fillRef idx="3">
+            <a:schemeClr val="accent1"/>
+          </a:fillRef>
+          <a:effectRef idx="2">
+            <a:schemeClr val="accent1"/>
+          </a:effectRef>
+          <a:fontRef idx="minor">
+            <a:schemeClr val="lt1"/>
+          </a:fontRef>
+        </p:style>
+        <p:txBody>
+          <a:bodyPr rtlCol="0" anchor="ctr"/>
+          <a:lstStyle/>
+          <a:p>
+            <a:pPr algn="ctr"/>
+          </a:p>
+        </p:txBody>
+      </p:sp>
+      <p:sp>
+        <p:nvSpPr>
+          <p:cNvPr id="8" name="TextBox 7"/>
+          <p:cNvSpPr txBox="1"/>
+          <p:nvPr/>
+        </p:nvSpPr>
+        <p:spPr>
+          <a:xfrm>
+            <a:off x="594360" y="1679752"/>
+            <a:ext cx="438912" cy="438912"/>
+          </a:xfrm>
+          <a:prstGeom prst="rect">
+            <a:avLst/>
+          </a:prstGeom>
+          <a:noFill/>
+        </p:spPr>
+        <p:txBody>
+          <a:bodyPr wrap="square" anchor="ctr"/>
+          <a:lstStyle/>
+          <a:p>
+            <a:pPr algn="ctr"/>
+            <a:r>
+              <a:rPr sz="1600" b="1" i="0">
+                <a:solidFill>
+                  <a:srgbClr val="FFFFFF"/>
+                </a:solidFill>
+                <a:latin typeface="Calibri"/>
+              </a:rPr>
+              <a:t>1</a:t>
+            </a:r>
+          </a:p>
+        </p:txBody>
+      </p:sp>
+      <p:sp>
+        <p:nvSpPr>
+          <p:cNvPr id="9" name="TextBox 8"/>
+          <p:cNvSpPr txBox="1"/>
+          <p:nvPr/>
+        </p:nvSpPr>
+        <p:spPr>
+          <a:xfrm>
+            <a:off x="1188720" y="1536192"/>
+            <a:ext cx="10271455" cy="744321"/>
+          </a:xfrm>
+          <a:prstGeom prst="rect">
+            <a:avLst/>
+          </a:prstGeom>
+          <a:noFill/>
+        </p:spPr>
+        <p:txBody>
+          <a:bodyPr wrap="square" anchor="ctr"/>
+          <a:lstStyle/>
+          <a:p>
+            <a:r>
+              <a:rPr sz="1500" b="1" i="0">
+                <a:solidFill>
+                  <a:srgbClr val="095292"/>
+                </a:solidFill>
+                <a:latin typeface="Calibri"/>
+              </a:rPr>
+              <a:t>40 s · El recorrido</a:t>
+            </a:r>
+          </a:p>
+          <a:p>
             <a:pPr>
-              <a:spcAft>
-                <a:spcPts val="800"/>
-              </a:spcAft>
+              <a:spcBef>
+                <a:spcPts val="200"/>
+              </a:spcBef>
             </a:pPr>
             <a:r>
-              <a:rPr sz="2000" b="0" i="0">
-                <a:solidFill>
-                  <a:srgbClr val="333333"/>
-                </a:solidFill>
-                <a:latin typeface="Calibri"/>
-              </a:rPr>
-              <a:t>–   </a:t>
-            </a:r>
-            <a:r>
-              <a:rPr sz="2000" b="1" i="0">
-                <a:solidFill>
-                  <a:srgbClr val="333333"/>
-                </a:solidFill>
-                <a:latin typeface="Calibri"/>
-              </a:rPr>
-              <a:t>Trabajo dirigido:</a:t>
-            </a:r>
-            <a:r>
-              <a:rPr sz="2000" b="0" i="0">
-                <a:solidFill>
-                  <a:srgbClr val="333333"/>
-                </a:solidFill>
-                <a:latin typeface="Calibri"/>
-              </a:rPr>
-              <a:t> Revisión de casos de impacto ambiental — un caso documentado de impacto ambiental de infraestructura digital, con fuente, año y alcance declarados.</a:t>
+              <a:rPr sz="1300" b="0" i="0">
+                <a:solidFill>
+                  <a:srgbClr val="333333"/>
+                </a:solidFill>
+                <a:latin typeface="Calibri"/>
+              </a:rPr>
+              <a:t>El diagrama, recorrido con el cursor. Dónde está cada etapa.</a:t>
+            </a:r>
+          </a:p>
+        </p:txBody>
+      </p:sp>
+      <p:sp>
+        <p:nvSpPr>
+          <p:cNvPr id="10" name="Rounded Rectangle 9"/>
+          <p:cNvSpPr/>
+          <p:nvPr/>
+        </p:nvSpPr>
+        <p:spPr>
+          <a:xfrm>
+            <a:off x="457200" y="2445105"/>
+            <a:ext cx="11277295" cy="908913"/>
+          </a:xfrm>
+          <a:prstGeom prst="roundRect">
+            <a:avLst>
+              <a:gd name="adj" fmla="val 12000"/>
+            </a:avLst>
+          </a:prstGeom>
+          <a:solidFill>
+            <a:srgbClr val="E8F4FA"/>
+          </a:solidFill>
+          <a:ln>
+            <a:noFill/>
+          </a:ln>
+        </p:spPr>
+        <p:style>
+          <a:lnRef idx="1">
+            <a:schemeClr val="accent1"/>
+          </a:lnRef>
+          <a:fillRef idx="3">
+            <a:schemeClr val="accent1"/>
+          </a:fillRef>
+          <a:effectRef idx="2">
+            <a:schemeClr val="accent1"/>
+          </a:effectRef>
+          <a:fontRef idx="minor">
+            <a:schemeClr val="lt1"/>
+          </a:fontRef>
+        </p:style>
+        <p:txBody>
+          <a:bodyPr rtlCol="0" anchor="ctr"/>
+          <a:lstStyle/>
+          <a:p>
+            <a:pPr algn="ctr"/>
+          </a:p>
+        </p:txBody>
+      </p:sp>
+      <p:sp>
+        <p:nvSpPr>
+          <p:cNvPr id="11" name="Rounded Rectangle 10"/>
+          <p:cNvSpPr/>
+          <p:nvPr/>
+        </p:nvSpPr>
+        <p:spPr>
+          <a:xfrm>
+            <a:off x="594360" y="2680106"/>
+            <a:ext cx="438912" cy="438912"/>
+          </a:xfrm>
+          <a:prstGeom prst="roundRect">
+            <a:avLst>
+              <a:gd name="adj" fmla="val 12000"/>
+            </a:avLst>
+          </a:prstGeom>
+          <a:solidFill>
+            <a:srgbClr val="095292"/>
+          </a:solidFill>
+          <a:ln>
+            <a:noFill/>
+          </a:ln>
+        </p:spPr>
+        <p:style>
+          <a:lnRef idx="1">
+            <a:schemeClr val="accent1"/>
+          </a:lnRef>
+          <a:fillRef idx="3">
+            <a:schemeClr val="accent1"/>
+          </a:fillRef>
+          <a:effectRef idx="2">
+            <a:schemeClr val="accent1"/>
+          </a:effectRef>
+          <a:fontRef idx="minor">
+            <a:schemeClr val="lt1"/>
+          </a:fontRef>
+        </p:style>
+        <p:txBody>
+          <a:bodyPr rtlCol="0" anchor="ctr"/>
+          <a:lstStyle/>
+          <a:p>
+            <a:pPr algn="ctr"/>
+          </a:p>
+        </p:txBody>
+      </p:sp>
+      <p:sp>
+        <p:nvSpPr>
+          <p:cNvPr id="12" name="TextBox 11"/>
+          <p:cNvSpPr txBox="1"/>
+          <p:nvPr/>
+        </p:nvSpPr>
+        <p:spPr>
+          <a:xfrm>
+            <a:off x="594360" y="2680106"/>
+            <a:ext cx="438912" cy="438912"/>
+          </a:xfrm>
+          <a:prstGeom prst="rect">
+            <a:avLst/>
+          </a:prstGeom>
+          <a:noFill/>
+        </p:spPr>
+        <p:txBody>
+          <a:bodyPr wrap="square" anchor="ctr"/>
+          <a:lstStyle/>
+          <a:p>
+            <a:pPr algn="ctr"/>
+            <a:r>
+              <a:rPr sz="1600" b="1" i="0">
+                <a:solidFill>
+                  <a:srgbClr val="FFFFFF"/>
+                </a:solidFill>
+                <a:latin typeface="Calibri"/>
+              </a:rPr>
+              <a:t>2</a:t>
+            </a:r>
+          </a:p>
+        </p:txBody>
+      </p:sp>
+      <p:sp>
+        <p:nvSpPr>
+          <p:cNvPr id="13" name="TextBox 12"/>
+          <p:cNvSpPr txBox="1"/>
+          <p:nvPr/>
+        </p:nvSpPr>
+        <p:spPr>
+          <a:xfrm>
+            <a:off x="1188720" y="2536545"/>
+            <a:ext cx="10271455" cy="744321"/>
+          </a:xfrm>
+          <a:prstGeom prst="rect">
+            <a:avLst/>
+          </a:prstGeom>
+          <a:noFill/>
+        </p:spPr>
+        <p:txBody>
+          <a:bodyPr wrap="square" anchor="ctr"/>
+          <a:lstStyle/>
+          <a:p>
+            <a:r>
+              <a:rPr sz="1500" b="1" i="0">
+                <a:solidFill>
+                  <a:srgbClr val="095292"/>
+                </a:solidFill>
+                <a:latin typeface="Calibri"/>
+              </a:rPr>
+              <a:t>30 s · Lo que se repite</a:t>
             </a:r>
           </a:p>
           <a:p>
             <a:pPr>
-              <a:spcAft>
-                <a:spcPts val="800"/>
-              </a:spcAft>
+              <a:spcBef>
+                <a:spcPts val="200"/>
+              </a:spcBef>
             </a:pPr>
             <a:r>
-              <a:rPr sz="2000" b="0" i="0">
-                <a:solidFill>
-                  <a:srgbClr val="333333"/>
-                </a:solidFill>
-                <a:latin typeface="Calibri"/>
-              </a:rPr>
-              <a:t>–   </a:t>
-            </a:r>
-            <a:r>
-              <a:rPr sz="2000" b="1" i="0">
-                <a:solidFill>
-                  <a:srgbClr val="333333"/>
-                </a:solidFill>
-                <a:latin typeface="Calibri"/>
-              </a:rPr>
-              <a:t>Trabajo independiente:</a:t>
-            </a:r>
-            <a:r>
-              <a:rPr sz="2000" b="0" i="0">
-                <a:solidFill>
-                  <a:srgbClr val="333333"/>
-                </a:solidFill>
-                <a:latin typeface="Calibri"/>
-              </a:rPr>
-              <a:t> Informe sobre sostenibilidad: una página con la huella de su sistema, las dos decisiones y el indicador, en la carpeta del equipo.</a:t>
+              <a:rPr sz="1300" b="0" i="0">
+                <a:solidFill>
+                  <a:srgbClr val="333333"/>
+                </a:solidFill>
+                <a:latin typeface="Calibri"/>
+              </a:rPr>
+              <a:t>La operación repetida y cuántas veces al día.</a:t>
+            </a:r>
+          </a:p>
+        </p:txBody>
+      </p:sp>
+      <p:sp>
+        <p:nvSpPr>
+          <p:cNvPr id="14" name="Rounded Rectangle 13"/>
+          <p:cNvSpPr/>
+          <p:nvPr/>
+        </p:nvSpPr>
+        <p:spPr>
+          <a:xfrm>
+            <a:off x="457200" y="3445459"/>
+            <a:ext cx="11277295" cy="908913"/>
+          </a:xfrm>
+          <a:prstGeom prst="roundRect">
+            <a:avLst>
+              <a:gd name="adj" fmla="val 12000"/>
+            </a:avLst>
+          </a:prstGeom>
+          <a:solidFill>
+            <a:srgbClr val="F2F2F2"/>
+          </a:solidFill>
+          <a:ln>
+            <a:noFill/>
+          </a:ln>
+        </p:spPr>
+        <p:style>
+          <a:lnRef idx="1">
+            <a:schemeClr val="accent1"/>
+          </a:lnRef>
+          <a:fillRef idx="3">
+            <a:schemeClr val="accent1"/>
+          </a:fillRef>
+          <a:effectRef idx="2">
+            <a:schemeClr val="accent1"/>
+          </a:effectRef>
+          <a:fontRef idx="minor">
+            <a:schemeClr val="lt1"/>
+          </a:fontRef>
+        </p:style>
+        <p:txBody>
+          <a:bodyPr rtlCol="0" anchor="ctr"/>
+          <a:lstStyle/>
+          <a:p>
+            <a:pPr algn="ctr"/>
+          </a:p>
+        </p:txBody>
+      </p:sp>
+      <p:sp>
+        <p:nvSpPr>
+          <p:cNvPr id="15" name="Rounded Rectangle 14"/>
+          <p:cNvSpPr/>
+          <p:nvPr/>
+        </p:nvSpPr>
+        <p:spPr>
+          <a:xfrm>
+            <a:off x="594360" y="3680460"/>
+            <a:ext cx="438912" cy="438912"/>
+          </a:xfrm>
+          <a:prstGeom prst="roundRect">
+            <a:avLst>
+              <a:gd name="adj" fmla="val 12000"/>
+            </a:avLst>
+          </a:prstGeom>
+          <a:solidFill>
+            <a:srgbClr val="095292"/>
+          </a:solidFill>
+          <a:ln>
+            <a:noFill/>
+          </a:ln>
+        </p:spPr>
+        <p:style>
+          <a:lnRef idx="1">
+            <a:schemeClr val="accent1"/>
+          </a:lnRef>
+          <a:fillRef idx="3">
+            <a:schemeClr val="accent1"/>
+          </a:fillRef>
+          <a:effectRef idx="2">
+            <a:schemeClr val="accent1"/>
+          </a:effectRef>
+          <a:fontRef idx="minor">
+            <a:schemeClr val="lt1"/>
+          </a:fontRef>
+        </p:style>
+        <p:txBody>
+          <a:bodyPr rtlCol="0" anchor="ctr"/>
+          <a:lstStyle/>
+          <a:p>
+            <a:pPr algn="ctr"/>
+          </a:p>
+        </p:txBody>
+      </p:sp>
+      <p:sp>
+        <p:nvSpPr>
+          <p:cNvPr id="16" name="TextBox 15"/>
+          <p:cNvSpPr txBox="1"/>
+          <p:nvPr/>
+        </p:nvSpPr>
+        <p:spPr>
+          <a:xfrm>
+            <a:off x="594360" y="3680460"/>
+            <a:ext cx="438912" cy="438912"/>
+          </a:xfrm>
+          <a:prstGeom prst="rect">
+            <a:avLst/>
+          </a:prstGeom>
+          <a:noFill/>
+        </p:spPr>
+        <p:txBody>
+          <a:bodyPr wrap="square" anchor="ctr"/>
+          <a:lstStyle/>
+          <a:p>
+            <a:pPr algn="ctr"/>
+            <a:r>
+              <a:rPr sz="1600" b="1" i="0">
+                <a:solidFill>
+                  <a:srgbClr val="FFFFFF"/>
+                </a:solidFill>
+                <a:latin typeface="Calibri"/>
+              </a:rPr>
+              <a:t>3</a:t>
+            </a:r>
+          </a:p>
+        </p:txBody>
+      </p:sp>
+      <p:sp>
+        <p:nvSpPr>
+          <p:cNvPr id="17" name="TextBox 16"/>
+          <p:cNvSpPr txBox="1"/>
+          <p:nvPr/>
+        </p:nvSpPr>
+        <p:spPr>
+          <a:xfrm>
+            <a:off x="1188720" y="3536899"/>
+            <a:ext cx="10271455" cy="744321"/>
+          </a:xfrm>
+          <a:prstGeom prst="rect">
+            <a:avLst/>
+          </a:prstGeom>
+          <a:noFill/>
+        </p:spPr>
+        <p:txBody>
+          <a:bodyPr wrap="square" anchor="ctr"/>
+          <a:lstStyle/>
+          <a:p>
+            <a:r>
+              <a:rPr sz="1500" b="1" i="0">
+                <a:solidFill>
+                  <a:srgbClr val="095292"/>
+                </a:solidFill>
+                <a:latin typeface="Calibri"/>
+              </a:rPr>
+              <a:t>50 s · La etapa que más pesa</a:t>
             </a:r>
           </a:p>
           <a:p>
             <a:pPr>
-              <a:spcAft>
-                <a:spcPts val="800"/>
-              </a:spcAft>
+              <a:spcBef>
+                <a:spcPts val="200"/>
+              </a:spcBef>
             </a:pPr>
             <a:r>
-              <a:rPr sz="2000" b="0" i="0">
-                <a:solidFill>
-                  <a:srgbClr val="333333"/>
-                </a:solidFill>
-                <a:latin typeface="Calibri"/>
-              </a:rPr>
-              <a:t>–   </a:t>
-            </a:r>
-            <a:r>
-              <a:rPr sz="2000" b="1" i="0">
-                <a:solidFill>
-                  <a:srgbClr val="333333"/>
-                </a:solidFill>
-                <a:latin typeface="Calibri"/>
-              </a:rPr>
-              <a:t>Clase 6 · Análisis de problemas tecnológicos del entorno</a:t>
-            </a:r>
-            <a:r>
-              <a:rPr sz="2000" b="0" i="0">
-                <a:solidFill>
-                  <a:srgbClr val="333333"/>
-                </a:solidFill>
-                <a:latin typeface="Calibri"/>
-              </a:rPr>
-              <a:t> — </a:t>
-            </a:r>
-            <a:r>
-              <a:rPr sz="2000" b="1" i="0">
-                <a:solidFill>
-                  <a:srgbClr val="333333"/>
-                </a:solidFill>
-                <a:latin typeface="Calibri"/>
-              </a:rPr>
-              <a:t>cierra el corte 1</a:t>
-            </a:r>
-            <a:r>
-              <a:rPr sz="2000" b="0" i="0">
-                <a:solidFill>
-                  <a:srgbClr val="333333"/>
-                </a:solidFill>
-                <a:latin typeface="Calibri"/>
-              </a:rPr>
-              <a:t>: se arma la ficha del problema del proyecto del semestre y hay evaluación de corte en la plataforma del curso al final de la sesión.</a:t>
+              <a:rPr sz="1300" b="0" i="0">
+                <a:solidFill>
+                  <a:srgbClr val="333333"/>
+                </a:solidFill>
+                <a:latin typeface="Calibri"/>
+              </a:rPr>
+              <a:t>Cuál y por qué. Es el minuto obligatorio.</a:t>
+            </a:r>
+          </a:p>
+        </p:txBody>
+      </p:sp>
+      <p:sp>
+        <p:nvSpPr>
+          <p:cNvPr id="18" name="Rounded Rectangle 17"/>
+          <p:cNvSpPr/>
+          <p:nvPr/>
+        </p:nvSpPr>
+        <p:spPr>
+          <a:xfrm>
+            <a:off x="457200" y="4445812"/>
+            <a:ext cx="11277295" cy="908913"/>
+          </a:xfrm>
+          <a:prstGeom prst="roundRect">
+            <a:avLst>
+              <a:gd name="adj" fmla="val 12000"/>
+            </a:avLst>
+          </a:prstGeom>
+          <a:solidFill>
+            <a:srgbClr val="E8F4FA"/>
+          </a:solidFill>
+          <a:ln>
+            <a:noFill/>
+          </a:ln>
+        </p:spPr>
+        <p:style>
+          <a:lnRef idx="1">
+            <a:schemeClr val="accent1"/>
+          </a:lnRef>
+          <a:fillRef idx="3">
+            <a:schemeClr val="accent1"/>
+          </a:fillRef>
+          <a:effectRef idx="2">
+            <a:schemeClr val="accent1"/>
+          </a:effectRef>
+          <a:fontRef idx="minor">
+            <a:schemeClr val="lt1"/>
+          </a:fontRef>
+        </p:style>
+        <p:txBody>
+          <a:bodyPr rtlCol="0" anchor="ctr"/>
+          <a:lstStyle/>
+          <a:p>
+            <a:pPr algn="ctr"/>
+          </a:p>
+        </p:txBody>
+      </p:sp>
+      <p:sp>
+        <p:nvSpPr>
+          <p:cNvPr id="19" name="Rounded Rectangle 18"/>
+          <p:cNvSpPr/>
+          <p:nvPr/>
+        </p:nvSpPr>
+        <p:spPr>
+          <a:xfrm>
+            <a:off x="594360" y="4680813"/>
+            <a:ext cx="438912" cy="438912"/>
+          </a:xfrm>
+          <a:prstGeom prst="roundRect">
+            <a:avLst>
+              <a:gd name="adj" fmla="val 12000"/>
+            </a:avLst>
+          </a:prstGeom>
+          <a:solidFill>
+            <a:srgbClr val="095292"/>
+          </a:solidFill>
+          <a:ln>
+            <a:noFill/>
+          </a:ln>
+        </p:spPr>
+        <p:style>
+          <a:lnRef idx="1">
+            <a:schemeClr val="accent1"/>
+          </a:lnRef>
+          <a:fillRef idx="3">
+            <a:schemeClr val="accent1"/>
+          </a:fillRef>
+          <a:effectRef idx="2">
+            <a:schemeClr val="accent1"/>
+          </a:effectRef>
+          <a:fontRef idx="minor">
+            <a:schemeClr val="lt1"/>
+          </a:fontRef>
+        </p:style>
+        <p:txBody>
+          <a:bodyPr rtlCol="0" anchor="ctr"/>
+          <a:lstStyle/>
+          <a:p>
+            <a:pPr algn="ctr"/>
+          </a:p>
+        </p:txBody>
+      </p:sp>
+      <p:sp>
+        <p:nvSpPr>
+          <p:cNvPr id="20" name="TextBox 19"/>
+          <p:cNvSpPr txBox="1"/>
+          <p:nvPr/>
+        </p:nvSpPr>
+        <p:spPr>
+          <a:xfrm>
+            <a:off x="594360" y="4680813"/>
+            <a:ext cx="438912" cy="438912"/>
+          </a:xfrm>
+          <a:prstGeom prst="rect">
+            <a:avLst/>
+          </a:prstGeom>
+          <a:noFill/>
+        </p:spPr>
+        <p:txBody>
+          <a:bodyPr wrap="square" anchor="ctr"/>
+          <a:lstStyle/>
+          <a:p>
+            <a:pPr algn="ctr"/>
+            <a:r>
+              <a:rPr sz="1600" b="1" i="0">
+                <a:solidFill>
+                  <a:srgbClr val="FFFFFF"/>
+                </a:solidFill>
+                <a:latin typeface="Calibri"/>
+              </a:rPr>
+              <a:t>4</a:t>
+            </a:r>
+          </a:p>
+        </p:txBody>
+      </p:sp>
+      <p:sp>
+        <p:nvSpPr>
+          <p:cNvPr id="21" name="TextBox 20"/>
+          <p:cNvSpPr txBox="1"/>
+          <p:nvPr/>
+        </p:nvSpPr>
+        <p:spPr>
+          <a:xfrm>
+            <a:off x="1188720" y="4537252"/>
+            <a:ext cx="10271455" cy="744321"/>
+          </a:xfrm>
+          <a:prstGeom prst="rect">
+            <a:avLst/>
+          </a:prstGeom>
+          <a:noFill/>
+        </p:spPr>
+        <p:txBody>
+          <a:bodyPr wrap="square" anchor="ctr"/>
+          <a:lstStyle/>
+          <a:p>
+            <a:r>
+              <a:rPr sz="1500" b="1" i="0">
+                <a:solidFill>
+                  <a:srgbClr val="095292"/>
+                </a:solidFill>
+                <a:latin typeface="Calibri"/>
+              </a:rPr>
+              <a:t>50 s · Las dos decisiones y el indicador</a:t>
             </a:r>
           </a:p>
           <a:p>
             <a:pPr>
-              <a:spcAft>
-                <a:spcPts val="800"/>
-              </a:spcAft>
+              <a:spcBef>
+                <a:spcPts val="200"/>
+              </a:spcBef>
             </a:pPr>
             <a:r>
-              <a:rPr sz="2000" b="0" i="0">
-                <a:solidFill>
-                  <a:srgbClr val="333333"/>
-                </a:solidFill>
-                <a:latin typeface="Calibri"/>
-              </a:rPr>
-              <a:t>–   </a:t>
-            </a:r>
-            <a:r>
-              <a:rPr sz="2000" b="1" i="0">
-                <a:solidFill>
-                  <a:srgbClr val="333333"/>
-                </a:solidFill>
-                <a:latin typeface="Calibri"/>
-              </a:rPr>
-              <a:t>Aviso:</a:t>
-            </a:r>
-            <a:r>
-              <a:rPr sz="2000" b="0" i="0">
-                <a:solidFill>
-                  <a:srgbClr val="333333"/>
-                </a:solidFill>
-                <a:latin typeface="Calibri"/>
-              </a:rPr>
-              <a:t> La sesión 6 cierra el corte. Traigan </a:t>
-            </a:r>
-            <a:r>
-              <a:rPr sz="2000" b="1" i="0">
-                <a:solidFill>
-                  <a:srgbClr val="333333"/>
-                </a:solidFill>
-                <a:latin typeface="Calibri"/>
-              </a:rPr>
-              <a:t>el problema de la sesión 1, la ficha de sistema de la sesión 3, la regla ética de la sesión 4 y el indicador de hoy</a:t>
-            </a:r>
-            <a:r>
-              <a:rPr sz="2000" b="0" i="0">
-                <a:solidFill>
-                  <a:srgbClr val="333333"/>
-                </a:solidFill>
-                <a:latin typeface="Calibri"/>
-              </a:rPr>
-              <a:t>: la ficha del problema se arma con esas cuatro cosas y se entrega en clase. Y lean el documento </a:t>
-            </a:r>
-            <a:r>
-              <a:rPr sz="2000" b="1" i="0">
-                <a:solidFill>
-                  <a:srgbClr val="333333"/>
-                </a:solidFill>
-                <a:latin typeface="Calibri"/>
-              </a:rPr>
-              <a:t>«Evaluación del Corte 1 — cómo prepararse»</a:t>
-            </a:r>
-            <a:r>
-              <a:rPr sz="2000" b="0" i="0">
-                <a:solidFill>
-                  <a:srgbClr val="333333"/>
-                </a:solidFill>
-                <a:latin typeface="Calibri"/>
-              </a:rPr>
-              <a:t>: trae qué repasar de cada sesión para los 20 minutos de evaluación del final.</a:t>
+              <a:rPr sz="1300" b="0" i="0">
+                <a:solidFill>
+                  <a:srgbClr val="333333"/>
+                </a:solidFill>
+                <a:latin typeface="Calibri"/>
+              </a:rPr>
+              <a:t>Qué van a cambiar y cómo se sabrá si sirvió.</a:t>
+            </a:r>
+          </a:p>
+        </p:txBody>
+      </p:sp>
+      <p:sp>
+        <p:nvSpPr>
+          <p:cNvPr id="22" name="Rounded Rectangle 21"/>
+          <p:cNvSpPr/>
+          <p:nvPr/>
+        </p:nvSpPr>
+        <p:spPr>
+          <a:xfrm>
+            <a:off x="457200" y="5446166"/>
+            <a:ext cx="11277295" cy="908913"/>
+          </a:xfrm>
+          <a:prstGeom prst="roundRect">
+            <a:avLst>
+              <a:gd name="adj" fmla="val 12000"/>
+            </a:avLst>
+          </a:prstGeom>
+          <a:solidFill>
+            <a:srgbClr val="F2F2F2"/>
+          </a:solidFill>
+          <a:ln>
+            <a:noFill/>
+          </a:ln>
+        </p:spPr>
+        <p:style>
+          <a:lnRef idx="1">
+            <a:schemeClr val="accent1"/>
+          </a:lnRef>
+          <a:fillRef idx="3">
+            <a:schemeClr val="accent1"/>
+          </a:fillRef>
+          <a:effectRef idx="2">
+            <a:schemeClr val="accent1"/>
+          </a:effectRef>
+          <a:fontRef idx="minor">
+            <a:schemeClr val="lt1"/>
+          </a:fontRef>
+        </p:style>
+        <p:txBody>
+          <a:bodyPr rtlCol="0" anchor="ctr"/>
+          <a:lstStyle/>
+          <a:p>
+            <a:pPr algn="ctr"/>
+          </a:p>
+        </p:txBody>
+      </p:sp>
+      <p:sp>
+        <p:nvSpPr>
+          <p:cNvPr id="23" name="Rounded Rectangle 22"/>
+          <p:cNvSpPr/>
+          <p:nvPr/>
+        </p:nvSpPr>
+        <p:spPr>
+          <a:xfrm>
+            <a:off x="594360" y="5681167"/>
+            <a:ext cx="438912" cy="438912"/>
+          </a:xfrm>
+          <a:prstGeom prst="roundRect">
+            <a:avLst>
+              <a:gd name="adj" fmla="val 12000"/>
+            </a:avLst>
+          </a:prstGeom>
+          <a:solidFill>
+            <a:srgbClr val="095292"/>
+          </a:solidFill>
+          <a:ln>
+            <a:noFill/>
+          </a:ln>
+        </p:spPr>
+        <p:style>
+          <a:lnRef idx="1">
+            <a:schemeClr val="accent1"/>
+          </a:lnRef>
+          <a:fillRef idx="3">
+            <a:schemeClr val="accent1"/>
+          </a:fillRef>
+          <a:effectRef idx="2">
+            <a:schemeClr val="accent1"/>
+          </a:effectRef>
+          <a:fontRef idx="minor">
+            <a:schemeClr val="lt1"/>
+          </a:fontRef>
+        </p:style>
+        <p:txBody>
+          <a:bodyPr rtlCol="0" anchor="ctr"/>
+          <a:lstStyle/>
+          <a:p>
+            <a:pPr algn="ctr"/>
+          </a:p>
+        </p:txBody>
+      </p:sp>
+      <p:sp>
+        <p:nvSpPr>
+          <p:cNvPr id="24" name="TextBox 23"/>
+          <p:cNvSpPr txBox="1"/>
+          <p:nvPr/>
+        </p:nvSpPr>
+        <p:spPr>
+          <a:xfrm>
+            <a:off x="594360" y="5681167"/>
+            <a:ext cx="438912" cy="438912"/>
+          </a:xfrm>
+          <a:prstGeom prst="rect">
+            <a:avLst/>
+          </a:prstGeom>
+          <a:noFill/>
+        </p:spPr>
+        <p:txBody>
+          <a:bodyPr wrap="square" anchor="ctr"/>
+          <a:lstStyle/>
+          <a:p>
+            <a:pPr algn="ctr"/>
+            <a:r>
+              <a:rPr sz="1600" b="1" i="0">
+                <a:solidFill>
+                  <a:srgbClr val="FFFFFF"/>
+                </a:solidFill>
+                <a:latin typeface="Calibri"/>
+              </a:rPr>
+              <a:t>5</a:t>
+            </a:r>
+          </a:p>
+        </p:txBody>
+      </p:sp>
+      <p:sp>
+        <p:nvSpPr>
+          <p:cNvPr id="25" name="TextBox 24"/>
+          <p:cNvSpPr txBox="1"/>
+          <p:nvPr/>
+        </p:nvSpPr>
+        <p:spPr>
+          <a:xfrm>
+            <a:off x="1188720" y="5537606"/>
+            <a:ext cx="10271455" cy="744321"/>
+          </a:xfrm>
+          <a:prstGeom prst="rect">
+            <a:avLst/>
+          </a:prstGeom>
+          <a:noFill/>
+        </p:spPr>
+        <p:txBody>
+          <a:bodyPr wrap="square" anchor="ctr"/>
+          <a:lstStyle/>
+          <a:p>
+            <a:r>
+              <a:rPr sz="1500" b="1" i="0">
+                <a:solidFill>
+                  <a:srgbClr val="095292"/>
+                </a:solidFill>
+                <a:latin typeface="Calibri"/>
+              </a:rPr>
+              <a:t>10 s · La fuente</a:t>
             </a:r>
           </a:p>
           <a:p>
             <a:pPr>
-              <a:spcAft>
-                <a:spcPts val="800"/>
-              </a:spcAft>
+              <a:spcBef>
+                <a:spcPts val="200"/>
+              </a:spcBef>
             </a:pPr>
             <a:r>
-              <a:rPr sz="2000" b="0" i="0">
-                <a:solidFill>
-                  <a:srgbClr val="333333"/>
-                </a:solidFill>
-                <a:latin typeface="Calibri"/>
-              </a:rPr>
-              <a:t>–   </a:t>
-            </a:r>
-            <a:r>
-              <a:rPr sz="2000" b="1" i="0">
-                <a:solidFill>
-                  <a:srgbClr val="333333"/>
-                </a:solidFill>
-                <a:latin typeface="Calibri"/>
-              </a:rPr>
-              <a:t>Antes de salir:</a:t>
-            </a:r>
-            <a:r>
-              <a:rPr sz="2000" b="0" i="0">
-                <a:solidFill>
-                  <a:srgbClr val="333333"/>
-                </a:solidFill>
-                <a:latin typeface="Calibri"/>
-              </a:rPr>
-              <a:t> el enlace del documento del equipo en el chat, con permiso de lectura para el docente, y el nombre del vocero de hoy.</a:t>
-            </a:r>
-          </a:p>
-        </p:txBody>
-      </p:sp>
-      <p:sp>
-        <p:nvSpPr>
-          <p:cNvPr id="6" name="TextBox 5"/>
+              <a:rPr sz="1300" b="0" i="0">
+                <a:solidFill>
+                  <a:srgbClr val="333333"/>
+                </a:solidFill>
+                <a:latin typeface="Calibri"/>
+              </a:rPr>
+              <a:t>De dónde salió cualquier cifra que hayan dicho.</a:t>
+            </a:r>
+          </a:p>
+        </p:txBody>
+      </p:sp>
+      <p:sp>
+        <p:nvSpPr>
+          <p:cNvPr id="26" name="TextBox 25"/>
           <p:cNvSpPr txBox="1"/>
           <p:nvPr/>
         </p:nvSpPr>
@@ -11061,6 +10542,434 @@
 </file>
 
 <file path=ppt/slides/slide24.xml><?xml version="1.0" encoding="utf-8"?>
+<p:sld xmlns:a="http://schemas.openxmlformats.org/drawingml/2006/main" xmlns:p="http://schemas.openxmlformats.org/presentationml/2006/main" xmlns:r="http://schemas.openxmlformats.org/officeDocument/2006/relationships">
+  <p:cSld>
+    <p:bg>
+      <p:bgPr>
+        <a:solidFill>
+          <a:srgbClr val="FFFFFF"/>
+        </a:solidFill>
+        <a:effectLst/>
+      </p:bgPr>
+    </p:bg>
+    <p:spTree>
+      <p:nvGrpSpPr>
+        <p:cNvPr id="1" name=""/>
+        <p:cNvGrpSpPr/>
+        <p:nvPr/>
+      </p:nvGrpSpPr>
+      <p:grpSpPr/>
+      <p:sp>
+        <p:nvSpPr>
+          <p:cNvPr id="2" name="Rectangle 1"/>
+          <p:cNvSpPr/>
+          <p:nvPr/>
+        </p:nvSpPr>
+        <p:spPr>
+          <a:xfrm>
+            <a:off x="0" y="0"/>
+            <a:ext cx="12191695" cy="960120"/>
+          </a:xfrm>
+          <a:prstGeom prst="rect">
+            <a:avLst/>
+          </a:prstGeom>
+          <a:solidFill>
+            <a:srgbClr val="095292"/>
+          </a:solidFill>
+          <a:ln>
+            <a:noFill/>
+          </a:ln>
+        </p:spPr>
+        <p:style>
+          <a:lnRef idx="1">
+            <a:schemeClr val="accent1"/>
+          </a:lnRef>
+          <a:fillRef idx="3">
+            <a:schemeClr val="accent1"/>
+          </a:fillRef>
+          <a:effectRef idx="2">
+            <a:schemeClr val="accent1"/>
+          </a:effectRef>
+          <a:fontRef idx="minor">
+            <a:schemeClr val="lt1"/>
+          </a:fontRef>
+        </p:style>
+        <p:txBody>
+          <a:bodyPr rtlCol="0" anchor="ctr"/>
+          <a:lstStyle/>
+          <a:p>
+            <a:pPr algn="ctr"/>
+          </a:p>
+        </p:txBody>
+      </p:sp>
+      <p:sp>
+        <p:nvSpPr>
+          <p:cNvPr id="3" name="Rectangle 2"/>
+          <p:cNvSpPr/>
+          <p:nvPr/>
+        </p:nvSpPr>
+        <p:spPr>
+          <a:xfrm>
+            <a:off x="0" y="960120"/>
+            <a:ext cx="12191695" cy="41148"/>
+          </a:xfrm>
+          <a:prstGeom prst="rect">
+            <a:avLst/>
+          </a:prstGeom>
+          <a:solidFill>
+            <a:srgbClr val="FFD000"/>
+          </a:solidFill>
+          <a:ln>
+            <a:noFill/>
+          </a:ln>
+        </p:spPr>
+        <p:style>
+          <a:lnRef idx="1">
+            <a:schemeClr val="accent1"/>
+          </a:lnRef>
+          <a:fillRef idx="3">
+            <a:schemeClr val="accent1"/>
+          </a:fillRef>
+          <a:effectRef idx="2">
+            <a:schemeClr val="accent1"/>
+          </a:effectRef>
+          <a:fontRef idx="minor">
+            <a:schemeClr val="lt1"/>
+          </a:fontRef>
+        </p:style>
+        <p:txBody>
+          <a:bodyPr rtlCol="0" anchor="ctr"/>
+          <a:lstStyle/>
+          <a:p>
+            <a:pPr algn="ctr"/>
+          </a:p>
+        </p:txBody>
+      </p:sp>
+      <p:sp>
+        <p:nvSpPr>
+          <p:cNvPr id="4" name="TextBox 3"/>
+          <p:cNvSpPr txBox="1"/>
+          <p:nvPr/>
+        </p:nvSpPr>
+        <p:spPr>
+          <a:xfrm>
+            <a:off x="457200" y="164592"/>
+            <a:ext cx="11277295" cy="502920"/>
+          </a:xfrm>
+          <a:prstGeom prst="rect">
+            <a:avLst/>
+          </a:prstGeom>
+          <a:noFill/>
+        </p:spPr>
+        <p:txBody>
+          <a:bodyPr wrap="square">
+            <a:spAutoFit/>
+          </a:bodyPr>
+          <a:lstStyle/>
+          <a:p>
+            <a:r>
+              <a:rPr sz="2600" b="1" i="0">
+                <a:solidFill>
+                  <a:srgbClr val="FFFFFF"/>
+                </a:solidFill>
+                <a:latin typeface="Calibri"/>
+              </a:rPr>
+              <a:t>Para la Clase 6</a:t>
+            </a:r>
+          </a:p>
+        </p:txBody>
+      </p:sp>
+      <p:sp>
+        <p:nvSpPr>
+          <p:cNvPr id="5" name="TextBox 4"/>
+          <p:cNvSpPr txBox="1"/>
+          <p:nvPr/>
+        </p:nvSpPr>
+        <p:spPr>
+          <a:xfrm>
+            <a:off x="457200" y="1170432"/>
+            <a:ext cx="11277295" cy="5230368"/>
+          </a:xfrm>
+          <a:prstGeom prst="rect">
+            <a:avLst/>
+          </a:prstGeom>
+          <a:noFill/>
+        </p:spPr>
+        <p:txBody>
+          <a:bodyPr wrap="square">
+            <a:spAutoFit/>
+          </a:bodyPr>
+          <a:lstStyle/>
+          <a:p>
+            <a:pPr>
+              <a:spcAft>
+                <a:spcPts val="800"/>
+              </a:spcAft>
+            </a:pPr>
+            <a:r>
+              <a:rPr sz="2000" b="0" i="0">
+                <a:solidFill>
+                  <a:srgbClr val="333333"/>
+                </a:solidFill>
+                <a:latin typeface="Calibri"/>
+              </a:rPr>
+              <a:t>–   </a:t>
+            </a:r>
+            <a:r>
+              <a:rPr sz="2000" b="1" i="0">
+                <a:solidFill>
+                  <a:srgbClr val="333333"/>
+                </a:solidFill>
+                <a:latin typeface="Calibri"/>
+              </a:rPr>
+              <a:t>Trabajo dirigido:</a:t>
+            </a:r>
+            <a:r>
+              <a:rPr sz="2000" b="0" i="0">
+                <a:solidFill>
+                  <a:srgbClr val="333333"/>
+                </a:solidFill>
+                <a:latin typeface="Calibri"/>
+              </a:rPr>
+              <a:t> Revisión de casos de impacto ambiental — un caso documentado de impacto ambiental de infraestructura digital, con fuente, año y alcance declarados.</a:t>
+            </a:r>
+          </a:p>
+          <a:p>
+            <a:pPr>
+              <a:spcAft>
+                <a:spcPts val="800"/>
+              </a:spcAft>
+            </a:pPr>
+            <a:r>
+              <a:rPr sz="2000" b="0" i="0">
+                <a:solidFill>
+                  <a:srgbClr val="333333"/>
+                </a:solidFill>
+                <a:latin typeface="Calibri"/>
+              </a:rPr>
+              <a:t>–   </a:t>
+            </a:r>
+            <a:r>
+              <a:rPr sz="2000" b="1" i="0">
+                <a:solidFill>
+                  <a:srgbClr val="333333"/>
+                </a:solidFill>
+                <a:latin typeface="Calibri"/>
+              </a:rPr>
+              <a:t>Trabajo independiente:</a:t>
+            </a:r>
+            <a:r>
+              <a:rPr sz="2000" b="0" i="0">
+                <a:solidFill>
+                  <a:srgbClr val="333333"/>
+                </a:solidFill>
+                <a:latin typeface="Calibri"/>
+              </a:rPr>
+              <a:t> Informe sobre sostenibilidad: una página con la huella de su sistema, las dos decisiones y el indicador, en la carpeta del equipo.</a:t>
+            </a:r>
+          </a:p>
+          <a:p>
+            <a:pPr>
+              <a:spcAft>
+                <a:spcPts val="800"/>
+              </a:spcAft>
+            </a:pPr>
+            <a:r>
+              <a:rPr sz="2000" b="0" i="0">
+                <a:solidFill>
+                  <a:srgbClr val="333333"/>
+                </a:solidFill>
+                <a:latin typeface="Calibri"/>
+              </a:rPr>
+              <a:t>–   </a:t>
+            </a:r>
+            <a:r>
+              <a:rPr sz="2000" b="1" i="0">
+                <a:solidFill>
+                  <a:srgbClr val="333333"/>
+                </a:solidFill>
+                <a:latin typeface="Calibri"/>
+              </a:rPr>
+              <a:t>Clase 6 · Análisis de problemas tecnológicos del entorno</a:t>
+            </a:r>
+            <a:r>
+              <a:rPr sz="2000" b="0" i="0">
+                <a:solidFill>
+                  <a:srgbClr val="333333"/>
+                </a:solidFill>
+                <a:latin typeface="Calibri"/>
+              </a:rPr>
+              <a:t> — </a:t>
+            </a:r>
+            <a:r>
+              <a:rPr sz="2000" b="1" i="0">
+                <a:solidFill>
+                  <a:srgbClr val="333333"/>
+                </a:solidFill>
+                <a:latin typeface="Calibri"/>
+              </a:rPr>
+              <a:t>cierra el corte 1</a:t>
+            </a:r>
+            <a:r>
+              <a:rPr sz="2000" b="0" i="0">
+                <a:solidFill>
+                  <a:srgbClr val="333333"/>
+                </a:solidFill>
+                <a:latin typeface="Calibri"/>
+              </a:rPr>
+              <a:t>: se arma la ficha del problema del proyecto del semestre y hay evaluación de corte en la plataforma del curso al final de la sesión.</a:t>
+            </a:r>
+          </a:p>
+          <a:p>
+            <a:pPr>
+              <a:spcAft>
+                <a:spcPts val="800"/>
+              </a:spcAft>
+            </a:pPr>
+            <a:r>
+              <a:rPr sz="2000" b="0" i="0">
+                <a:solidFill>
+                  <a:srgbClr val="333333"/>
+                </a:solidFill>
+                <a:latin typeface="Calibri"/>
+              </a:rPr>
+              <a:t>–   </a:t>
+            </a:r>
+            <a:r>
+              <a:rPr sz="2000" b="1" i="0">
+                <a:solidFill>
+                  <a:srgbClr val="333333"/>
+                </a:solidFill>
+                <a:latin typeface="Calibri"/>
+              </a:rPr>
+              <a:t>Aviso:</a:t>
+            </a:r>
+            <a:r>
+              <a:rPr sz="2000" b="0" i="0">
+                <a:solidFill>
+                  <a:srgbClr val="333333"/>
+                </a:solidFill>
+                <a:latin typeface="Calibri"/>
+              </a:rPr>
+              <a:t> La sesión 6 cierra el corte. Traigan </a:t>
+            </a:r>
+            <a:r>
+              <a:rPr sz="2000" b="1" i="0">
+                <a:solidFill>
+                  <a:srgbClr val="333333"/>
+                </a:solidFill>
+                <a:latin typeface="Calibri"/>
+              </a:rPr>
+              <a:t>el problema de la sesión 1, la ficha de sistema de la sesión 3, la regla ética de la sesión 4 y el indicador de hoy</a:t>
+            </a:r>
+            <a:r>
+              <a:rPr sz="2000" b="0" i="0">
+                <a:solidFill>
+                  <a:srgbClr val="333333"/>
+                </a:solidFill>
+                <a:latin typeface="Calibri"/>
+              </a:rPr>
+              <a:t>: la ficha del problema se arma con esas cuatro cosas y se entrega en clase. Y lean el documento </a:t>
+            </a:r>
+            <a:r>
+              <a:rPr sz="2000" b="1" i="0">
+                <a:solidFill>
+                  <a:srgbClr val="333333"/>
+                </a:solidFill>
+                <a:latin typeface="Calibri"/>
+              </a:rPr>
+              <a:t>«Evaluación del Corte 1 — cómo prepararse»</a:t>
+            </a:r>
+            <a:r>
+              <a:rPr sz="2000" b="0" i="0">
+                <a:solidFill>
+                  <a:srgbClr val="333333"/>
+                </a:solidFill>
+                <a:latin typeface="Calibri"/>
+              </a:rPr>
+              <a:t>: trae qué repasar de cada sesión para los 20 minutos de evaluación del final.</a:t>
+            </a:r>
+          </a:p>
+          <a:p>
+            <a:pPr>
+              <a:spcAft>
+                <a:spcPts val="800"/>
+              </a:spcAft>
+            </a:pPr>
+            <a:r>
+              <a:rPr sz="2000" b="0" i="0">
+                <a:solidFill>
+                  <a:srgbClr val="333333"/>
+                </a:solidFill>
+                <a:latin typeface="Calibri"/>
+              </a:rPr>
+              <a:t>–   </a:t>
+            </a:r>
+            <a:r>
+              <a:rPr sz="2000" b="1" i="0">
+                <a:solidFill>
+                  <a:srgbClr val="333333"/>
+                </a:solidFill>
+                <a:latin typeface="Calibri"/>
+              </a:rPr>
+              <a:t>Antes de salir:</a:t>
+            </a:r>
+            <a:r>
+              <a:rPr sz="2000" b="0" i="0">
+                <a:solidFill>
+                  <a:srgbClr val="333333"/>
+                </a:solidFill>
+                <a:latin typeface="Calibri"/>
+              </a:rPr>
+              <a:t> el enlace del documento del equipo en el chat, con permiso de lectura para el docente, y el nombre del vocero de hoy.</a:t>
+            </a:r>
+          </a:p>
+        </p:txBody>
+      </p:sp>
+      <p:sp>
+        <p:nvSpPr>
+          <p:cNvPr id="6" name="TextBox 5"/>
+          <p:cNvSpPr txBox="1"/>
+          <p:nvPr/>
+        </p:nvSpPr>
+        <p:spPr>
+          <a:xfrm>
+            <a:off x="11185855" y="6473952"/>
+            <a:ext cx="640080" cy="274320"/>
+          </a:xfrm>
+          <a:prstGeom prst="rect">
+            <a:avLst/>
+          </a:prstGeom>
+          <a:noFill/>
+        </p:spPr>
+        <p:txBody>
+          <a:bodyPr wrap="square">
+            <a:spAutoFit/>
+          </a:bodyPr>
+          <a:lstStyle/>
+          <a:p>
+            <a:pPr algn="r"/>
+            <a:r>
+              <a:rPr sz="1100" b="0" i="0">
+                <a:solidFill>
+                  <a:srgbClr val="666666"/>
+                </a:solidFill>
+                <a:latin typeface="Calibri"/>
+              </a:rPr>
+              <a:t>24</a:t>
+            </a:r>
+          </a:p>
+        </p:txBody>
+      </p:sp>
+    </p:spTree>
+  </p:cSld>
+  <p:clrMapOvr>
+    <a:masterClrMapping/>
+  </p:clrMapOvr>
+</p:sld>
+</file>
+
+<file path=ppt/slides/slide25.xml><?xml version="1.0" encoding="utf-8"?>
 <p:sld xmlns:a="http://schemas.openxmlformats.org/drawingml/2006/main" xmlns:p="http://schemas.openxmlformats.org/presentationml/2006/main" xmlns:r="http://schemas.openxmlformats.org/officeDocument/2006/relationships">
   <p:cSld>
     <p:bg>

--- a/Introduccion a la Ingenieria/Clases/Clase 5 - El rol del ingeniero en el contexto ambiental/Presentacion.pptx
+++ b/Introduccion a la Ingenieria/Clases/Clase 5 - El rol del ingeniero en el contexto ambiental/Presentacion.pptx
@@ -30,6 +30,8 @@
     <p:sldId id="278" r:id="rId29"/>
     <p:sldId id="279" r:id="rId30"/>
     <p:sldId id="280" r:id="rId31"/>
+    <p:sldId id="281" r:id="rId32"/>
+    <p:sldId id="282" r:id="rId33"/>
   </p:sldIdLst>
   <p:sldSz cx="12191695" cy="6858000" type="screen4x3"/>
   <p:notesSz cx="6858000" cy="9144000"/>
@@ -8377,7 +8379,7 @@
         <p:spPr>
           <a:xfrm>
             <a:off x="0" y="0"/>
-            <a:ext cx="12191695" cy="1170432"/>
+            <a:ext cx="12191695" cy="960120"/>
           </a:xfrm>
           <a:prstGeom prst="rect">
             <a:avLst/>
@@ -8419,7 +8421,7 @@
         </p:nvSpPr>
         <p:spPr>
           <a:xfrm>
-            <a:off x="0" y="1170432"/>
+            <a:off x="0" y="960120"/>
             <a:ext cx="12191695" cy="41148"/>
           </a:xfrm>
           <a:prstGeom prst="rect">
@@ -8463,7 +8465,7 @@
         <p:spPr>
           <a:xfrm>
             <a:off x="457200" y="164592"/>
-            <a:ext cx="11277295" cy="384048"/>
+            <a:ext cx="11277295" cy="502920"/>
           </a:xfrm>
           <a:prstGeom prst="rect">
             <a:avLst/>
@@ -8483,55 +8485,21 @@
                 </a:solidFill>
                 <a:latin typeface="Calibri"/>
               </a:rPr>
-              <a:t>Taller de hoy: Huella del sistema</a:t>
-            </a:r>
-          </a:p>
-        </p:txBody>
-      </p:sp>
-      <p:sp>
-        <p:nvSpPr>
-          <p:cNvPr id="5" name="TextBox 4"/>
-          <p:cNvSpPr txBox="1"/>
-          <p:nvPr/>
-        </p:nvSpPr>
-        <p:spPr>
-          <a:xfrm>
-            <a:off x="457200" y="566928"/>
-            <a:ext cx="11277295" cy="411480"/>
-          </a:xfrm>
-          <a:prstGeom prst="rect">
-            <a:avLst/>
-          </a:prstGeom>
-          <a:noFill/>
-        </p:spPr>
-        <p:txBody>
-          <a:bodyPr wrap="square">
-            <a:spAutoFit/>
-          </a:bodyPr>
-          <a:lstStyle/>
-          <a:p>
-            <a:r>
-              <a:rPr sz="1400" b="0" i="0">
-                <a:solidFill>
-                  <a:srgbClr val="B8D8EE"/>
-                </a:solidFill>
-                <a:latin typeface="Calibri"/>
-              </a:rPr>
-              <a:t>17 min en equipos · cada equipo, el sistema de su propio proyecto · diagrama de huella + 2 decisiones + 1 indicador</a:t>
-            </a:r>
-          </a:p>
-        </p:txBody>
-      </p:sp>
-      <p:sp>
-        <p:nvSpPr>
-          <p:cNvPr id="6" name="Rounded Rectangle 5"/>
+              <a:t>Plantilla del entregable: los 5 bloques</a:t>
+            </a:r>
+          </a:p>
+        </p:txBody>
+      </p:sp>
+      <p:sp>
+        <p:nvSpPr>
+          <p:cNvPr id="5" name="Rounded Rectangle 4"/>
           <p:cNvSpPr/>
           <p:nvPr/>
         </p:nvSpPr>
         <p:spPr>
           <a:xfrm>
-            <a:off x="457200" y="1472184"/>
-            <a:ext cx="11277295" cy="566928"/>
+            <a:off x="457200" y="1261872"/>
+            <a:ext cx="11277295" cy="5093208"/>
           </a:xfrm>
           <a:prstGeom prst="roundRect">
             <a:avLst>
@@ -8539,7 +8507,7 @@
             </a:avLst>
           </a:prstGeom>
           <a:solidFill>
-            <a:srgbClr val="F2F2F2"/>
+            <a:srgbClr val="1E2A38"/>
           </a:solidFill>
           <a:ln>
             <a:noFill/>
@@ -8569,25 +8537,23 @@
       </p:sp>
       <p:sp>
         <p:nvSpPr>
-          <p:cNvPr id="7" name="Rectangle 6"/>
+          <p:cNvPr id="6" name="Rectangle 5"/>
           <p:cNvSpPr/>
           <p:nvPr/>
         </p:nvSpPr>
         <p:spPr>
           <a:xfrm>
-            <a:off x="640080" y="1618487"/>
-            <a:ext cx="274320" cy="274320"/>
+            <a:off x="457200" y="1261872"/>
+            <a:ext cx="11277295" cy="320040"/>
           </a:xfrm>
           <a:prstGeom prst="rect">
             <a:avLst/>
           </a:prstGeom>
           <a:solidFill>
-            <a:srgbClr val="FFFFFF"/>
+            <a:srgbClr val="095292"/>
           </a:solidFill>
           <a:ln>
-            <a:solidFill>
-              <a:srgbClr val="333333"/>
-            </a:solidFill>
+            <a:noFill/>
           </a:ln>
         </p:spPr>
         <p:style>
@@ -8614,823 +8580,222 @@
       </p:sp>
       <p:sp>
         <p:nvSpPr>
-          <p:cNvPr id="8" name="Rectangle 7"/>
-          <p:cNvSpPr/>
-          <p:nvPr/>
-        </p:nvSpPr>
-        <p:spPr>
-          <a:xfrm>
-            <a:off x="640080" y="1618487"/>
-            <a:ext cx="73152" cy="274320"/>
-          </a:xfrm>
-          <a:prstGeom prst="rect">
-            <a:avLst/>
-          </a:prstGeom>
-          <a:solidFill>
-            <a:srgbClr val="269CCB"/>
-          </a:solidFill>
-          <a:ln>
-            <a:noFill/>
-          </a:ln>
-        </p:spPr>
-        <p:style>
-          <a:lnRef idx="1">
-            <a:schemeClr val="accent1"/>
-          </a:lnRef>
-          <a:fillRef idx="3">
-            <a:schemeClr val="accent1"/>
-          </a:fillRef>
-          <a:effectRef idx="2">
-            <a:schemeClr val="accent1"/>
-          </a:effectRef>
-          <a:fontRef idx="minor">
-            <a:schemeClr val="lt1"/>
-          </a:fontRef>
-        </p:style>
-        <p:txBody>
-          <a:bodyPr rtlCol="0" anchor="ctr"/>
-          <a:lstStyle/>
-          <a:p>
-            <a:pPr algn="ctr"/>
+          <p:cNvPr id="7" name="TextBox 6"/>
+          <p:cNvSpPr txBox="1"/>
+          <p:nvPr/>
+        </p:nvSpPr>
+        <p:spPr>
+          <a:xfrm>
+            <a:off x="685800" y="1307592"/>
+            <a:ext cx="10820095" cy="256032"/>
+          </a:xfrm>
+          <a:prstGeom prst="rect">
+            <a:avLst/>
+          </a:prstGeom>
+          <a:noFill/>
+        </p:spPr>
+        <p:txBody>
+          <a:bodyPr wrap="square" anchor="ctr"/>
+          <a:lstStyle/>
+          <a:p>
+            <a:r>
+              <a:rPr sz="1000" b="1" i="0">
+                <a:solidFill>
+                  <a:srgbClr val="269CCB"/>
+                </a:solidFill>
+                <a:latin typeface="Calibri"/>
+              </a:rPr>
+              <a:t>● ● ●</a:t>
+            </a:r>
+          </a:p>
+        </p:txBody>
+      </p:sp>
+      <p:sp>
+        <p:nvSpPr>
+          <p:cNvPr id="8" name="TextBox 7"/>
+          <p:cNvSpPr txBox="1"/>
+          <p:nvPr/>
+        </p:nvSpPr>
+        <p:spPr>
+          <a:xfrm>
+            <a:off x="777240" y="1719072"/>
+            <a:ext cx="10637215" cy="4453128"/>
+          </a:xfrm>
+          <a:prstGeom prst="rect">
+            <a:avLst/>
+          </a:prstGeom>
+          <a:noFill/>
+        </p:spPr>
+        <p:txBody>
+          <a:bodyPr wrap="square">
+            <a:spAutoFit/>
+          </a:bodyPr>
+          <a:lstStyle/>
+          <a:p>
+            <a:pPr>
+              <a:spcAft>
+                <a:spcPts val="400"/>
+              </a:spcAft>
+            </a:pPr>
+            <a:r>
+              <a:rPr sz="1400" b="0" i="0">
+                <a:solidFill>
+                  <a:srgbClr val="FFFFFF"/>
+                </a:solidFill>
+                <a:latin typeface="Calibri"/>
+              </a:rPr>
+              <a:t># Huella del sistema</a:t>
+            </a:r>
+          </a:p>
+          <a:p>
+            <a:pPr>
+              <a:spcAft>
+                <a:spcPts val="400"/>
+              </a:spcAft>
+            </a:pPr>
+            <a:r>
+              <a:rPr sz="1400" b="0" i="0">
+                <a:solidFill>
+                  <a:srgbClr val="FFFFFF"/>
+                </a:solidFill>
+                <a:latin typeface="Calibri"/>
+              </a:rPr>
+              <a:t># Documento del equipo · un bloque por titulo, sin cambiar los nombres</a:t>
+            </a:r>
+          </a:p>
+          <a:p>
+            <a:pPr>
+              <a:spcAft>
+                <a:spcPts val="400"/>
+              </a:spcAft>
+            </a:pPr>
+            <a:r>
+              <a:rPr sz="1400" b="0" i="0">
+                <a:solidFill>
+                  <a:srgbClr val="FFFFFF"/>
+                </a:solidFill>
+                <a:latin typeface="Calibri"/>
+              </a:rPr>
+              <a:t/>
+            </a:r>
+          </a:p>
+          <a:p>
+            <a:pPr>
+              <a:spcAft>
+                <a:spcPts val="400"/>
+              </a:spcAft>
+            </a:pPr>
+            <a:r>
+              <a:rPr sz="1400" b="0" i="0">
+                <a:solidFill>
+                  <a:srgbClr val="FFFFFF"/>
+                </a:solidFill>
+                <a:latin typeface="Calibri"/>
+              </a:rPr>
+              <a:t>## 1. EL RECORRIDO DIBUJADO</a:t>
+            </a:r>
+          </a:p>
+          <a:p>
+            <a:pPr>
+              <a:spcAft>
+                <a:spcPts val="400"/>
+              </a:spcAft>
+            </a:pPr>
+            <a:r>
+              <a:rPr sz="1400" b="0" i="0">
+                <a:solidFill>
+                  <a:srgbClr val="FFFFFF"/>
+                </a:solidFill>
+                <a:latin typeface="Calibri"/>
+              </a:rPr>
+              <a:t>## 2. LO QUE SE REPITE</a:t>
+            </a:r>
+          </a:p>
+          <a:p>
+            <a:pPr>
+              <a:spcAft>
+                <a:spcPts val="400"/>
+              </a:spcAft>
+            </a:pPr>
+            <a:r>
+              <a:rPr sz="1400" b="0" i="0">
+                <a:solidFill>
+                  <a:srgbClr val="FFFFFF"/>
+                </a:solidFill>
+                <a:latin typeface="Calibri"/>
+              </a:rPr>
+              <a:t>## 3. LA ETAPA QUE MÁS PESA</a:t>
+            </a:r>
+          </a:p>
+          <a:p>
+            <a:pPr>
+              <a:spcAft>
+                <a:spcPts val="400"/>
+              </a:spcAft>
+            </a:pPr>
+            <a:r>
+              <a:rPr sz="1400" b="0" i="0">
+                <a:solidFill>
+                  <a:srgbClr val="FFFFFF"/>
+                </a:solidFill>
+                <a:latin typeface="Calibri"/>
+              </a:rPr>
+              <a:t>## 4. DOS DECISIONES DE DISEÑO</a:t>
+            </a:r>
+          </a:p>
+          <a:p>
+            <a:pPr>
+              <a:spcAft>
+                <a:spcPts val="400"/>
+              </a:spcAft>
+            </a:pPr>
+            <a:r>
+              <a:rPr sz="1400" b="0" i="0">
+                <a:solidFill>
+                  <a:srgbClr val="FFFFFF"/>
+                </a:solidFill>
+                <a:latin typeface="Calibri"/>
+              </a:rPr>
+              <a:t>## 5. EL INDICADOR</a:t>
+            </a:r>
+          </a:p>
+          <a:p>
+            <a:pPr>
+              <a:spcAft>
+                <a:spcPts val="400"/>
+              </a:spcAft>
+            </a:pPr>
+            <a:r>
+              <a:rPr sz="1400" b="0" i="0">
+                <a:solidFill>
+                  <a:srgbClr val="FFFFFF"/>
+                </a:solidFill>
+                <a:latin typeface="Calibri"/>
+              </a:rPr>
+              <a:t/>
+            </a:r>
+          </a:p>
+          <a:p>
+            <a:pPr>
+              <a:spcAft>
+                <a:spcPts val="400"/>
+              </a:spcAft>
+            </a:pPr>
+            <a:r>
+              <a:rPr sz="1400" b="0" i="0">
+                <a:solidFill>
+                  <a:srgbClr val="FFFFFF"/>
+                </a:solidFill>
+                <a:latin typeface="Calibri"/>
+              </a:rPr>
+              <a:t># Los titulos van TAL CUAL: son con los que se califica.</a:t>
+            </a:r>
           </a:p>
         </p:txBody>
       </p:sp>
       <p:sp>
         <p:nvSpPr>
           <p:cNvPr id="9" name="TextBox 8"/>
-          <p:cNvSpPr txBox="1"/>
-          <p:nvPr/>
-        </p:nvSpPr>
-        <p:spPr>
-          <a:xfrm>
-            <a:off x="1097280" y="1563624"/>
-            <a:ext cx="10362895" cy="402336"/>
-          </a:xfrm>
-          <a:prstGeom prst="rect">
-            <a:avLst/>
-          </a:prstGeom>
-          <a:noFill/>
-        </p:spPr>
-        <p:txBody>
-          <a:bodyPr wrap="square" anchor="ctr"/>
-          <a:lstStyle/>
-          <a:p>
-            <a:r>
-              <a:rPr sz="1500" b="1" i="0">
-                <a:solidFill>
-                  <a:srgbClr val="333333"/>
-                </a:solidFill>
-                <a:latin typeface="Calibri"/>
-              </a:rPr>
-              <a:t>EL RECORRIDO DIBUJADO</a:t>
-            </a:r>
-            <a:r>
-              <a:rPr sz="1500" b="0" i="0">
-                <a:solidFill>
-                  <a:srgbClr val="333333"/>
-                </a:solidFill>
-                <a:latin typeface="Calibri"/>
-              </a:rPr>
-              <a:t> — El camino completo con flechas: dispositivo del usuario → red → servidor → almacenamiento, y todo lo que se prende para que el sistema funcione.</a:t>
-            </a:r>
-          </a:p>
-        </p:txBody>
-      </p:sp>
-      <p:sp>
-        <p:nvSpPr>
-          <p:cNvPr id="10" name="Rounded Rectangle 9"/>
-          <p:cNvSpPr/>
-          <p:nvPr/>
-        </p:nvSpPr>
-        <p:spPr>
-          <a:xfrm>
-            <a:off x="457200" y="2148839"/>
-            <a:ext cx="11277295" cy="566928"/>
-          </a:xfrm>
-          <a:prstGeom prst="roundRect">
-            <a:avLst>
-              <a:gd name="adj" fmla="val 12000"/>
-            </a:avLst>
-          </a:prstGeom>
-          <a:solidFill>
-            <a:srgbClr val="F2F2F2"/>
-          </a:solidFill>
-          <a:ln>
-            <a:noFill/>
-          </a:ln>
-        </p:spPr>
-        <p:style>
-          <a:lnRef idx="1">
-            <a:schemeClr val="accent1"/>
-          </a:lnRef>
-          <a:fillRef idx="3">
-            <a:schemeClr val="accent1"/>
-          </a:fillRef>
-          <a:effectRef idx="2">
-            <a:schemeClr val="accent1"/>
-          </a:effectRef>
-          <a:fontRef idx="minor">
-            <a:schemeClr val="lt1"/>
-          </a:fontRef>
-        </p:style>
-        <p:txBody>
-          <a:bodyPr rtlCol="0" anchor="ctr"/>
-          <a:lstStyle/>
-          <a:p>
-            <a:pPr algn="ctr"/>
-          </a:p>
-        </p:txBody>
-      </p:sp>
-      <p:sp>
-        <p:nvSpPr>
-          <p:cNvPr id="11" name="Rectangle 10"/>
-          <p:cNvSpPr/>
-          <p:nvPr/>
-        </p:nvSpPr>
-        <p:spPr>
-          <a:xfrm>
-            <a:off x="640080" y="2295144"/>
-            <a:ext cx="274320" cy="274320"/>
-          </a:xfrm>
-          <a:prstGeom prst="rect">
-            <a:avLst/>
-          </a:prstGeom>
-          <a:solidFill>
-            <a:srgbClr val="FFFFFF"/>
-          </a:solidFill>
-          <a:ln>
-            <a:solidFill>
-              <a:srgbClr val="333333"/>
-            </a:solidFill>
-          </a:ln>
-        </p:spPr>
-        <p:style>
-          <a:lnRef idx="1">
-            <a:schemeClr val="accent1"/>
-          </a:lnRef>
-          <a:fillRef idx="3">
-            <a:schemeClr val="accent1"/>
-          </a:fillRef>
-          <a:effectRef idx="2">
-            <a:schemeClr val="accent1"/>
-          </a:effectRef>
-          <a:fontRef idx="minor">
-            <a:schemeClr val="lt1"/>
-          </a:fontRef>
-        </p:style>
-        <p:txBody>
-          <a:bodyPr rtlCol="0" anchor="ctr"/>
-          <a:lstStyle/>
-          <a:p>
-            <a:pPr algn="ctr"/>
-          </a:p>
-        </p:txBody>
-      </p:sp>
-      <p:sp>
-        <p:nvSpPr>
-          <p:cNvPr id="12" name="Rectangle 11"/>
-          <p:cNvSpPr/>
-          <p:nvPr/>
-        </p:nvSpPr>
-        <p:spPr>
-          <a:xfrm>
-            <a:off x="640080" y="2295144"/>
-            <a:ext cx="73152" cy="274320"/>
-          </a:xfrm>
-          <a:prstGeom prst="rect">
-            <a:avLst/>
-          </a:prstGeom>
-          <a:solidFill>
-            <a:srgbClr val="269CCB"/>
-          </a:solidFill>
-          <a:ln>
-            <a:noFill/>
-          </a:ln>
-        </p:spPr>
-        <p:style>
-          <a:lnRef idx="1">
-            <a:schemeClr val="accent1"/>
-          </a:lnRef>
-          <a:fillRef idx="3">
-            <a:schemeClr val="accent1"/>
-          </a:fillRef>
-          <a:effectRef idx="2">
-            <a:schemeClr val="accent1"/>
-          </a:effectRef>
-          <a:fontRef idx="minor">
-            <a:schemeClr val="lt1"/>
-          </a:fontRef>
-        </p:style>
-        <p:txBody>
-          <a:bodyPr rtlCol="0" anchor="ctr"/>
-          <a:lstStyle/>
-          <a:p>
-            <a:pPr algn="ctr"/>
-          </a:p>
-        </p:txBody>
-      </p:sp>
-      <p:sp>
-        <p:nvSpPr>
-          <p:cNvPr id="13" name="TextBox 12"/>
-          <p:cNvSpPr txBox="1"/>
-          <p:nvPr/>
-        </p:nvSpPr>
-        <p:spPr>
-          <a:xfrm>
-            <a:off x="1097280" y="2240279"/>
-            <a:ext cx="10362895" cy="402336"/>
-          </a:xfrm>
-          <a:prstGeom prst="rect">
-            <a:avLst/>
-          </a:prstGeom>
-          <a:noFill/>
-        </p:spPr>
-        <p:txBody>
-          <a:bodyPr wrap="square" anchor="ctr"/>
-          <a:lstStyle/>
-          <a:p>
-            <a:r>
-              <a:rPr sz="1500" b="1" i="0">
-                <a:solidFill>
-                  <a:srgbClr val="333333"/>
-                </a:solidFill>
-                <a:latin typeface="Calibri"/>
-              </a:rPr>
-              <a:t>LO QUE SE REPITE</a:t>
-            </a:r>
-            <a:r>
-              <a:rPr sz="1500" b="0" i="0">
-                <a:solidFill>
-                  <a:srgbClr val="333333"/>
-                </a:solidFill>
-                <a:latin typeface="Calibri"/>
-              </a:rPr>
-              <a:t> — Qué operación ocurre </a:t>
-            </a:r>
-            <a:r>
-              <a:rPr sz="1500" b="1" i="0">
-                <a:solidFill>
-                  <a:srgbClr val="333333"/>
-                </a:solidFill>
-                <a:latin typeface="Calibri"/>
-              </a:rPr>
-              <a:t>muchas veces al día</a:t>
-            </a:r>
-            <a:r>
-              <a:rPr sz="1500" b="0" i="0">
-                <a:solidFill>
-                  <a:srgbClr val="333333"/>
-                </a:solidFill>
-                <a:latin typeface="Calibri"/>
-              </a:rPr>
-              <a:t> en su sistema, y una estimación gruesa de cuántas veces. Lo que pasa una vez no mueve nada.</a:t>
-            </a:r>
-          </a:p>
-        </p:txBody>
-      </p:sp>
-      <p:sp>
-        <p:nvSpPr>
-          <p:cNvPr id="14" name="Rounded Rectangle 13"/>
-          <p:cNvSpPr/>
-          <p:nvPr/>
-        </p:nvSpPr>
-        <p:spPr>
-          <a:xfrm>
-            <a:off x="457200" y="2825496"/>
-            <a:ext cx="11277295" cy="566928"/>
-          </a:xfrm>
-          <a:prstGeom prst="roundRect">
-            <a:avLst>
-              <a:gd name="adj" fmla="val 12000"/>
-            </a:avLst>
-          </a:prstGeom>
-          <a:solidFill>
-            <a:srgbClr val="F2F2F2"/>
-          </a:solidFill>
-          <a:ln>
-            <a:noFill/>
-          </a:ln>
-        </p:spPr>
-        <p:style>
-          <a:lnRef idx="1">
-            <a:schemeClr val="accent1"/>
-          </a:lnRef>
-          <a:fillRef idx="3">
-            <a:schemeClr val="accent1"/>
-          </a:fillRef>
-          <a:effectRef idx="2">
-            <a:schemeClr val="accent1"/>
-          </a:effectRef>
-          <a:fontRef idx="minor">
-            <a:schemeClr val="lt1"/>
-          </a:fontRef>
-        </p:style>
-        <p:txBody>
-          <a:bodyPr rtlCol="0" anchor="ctr"/>
-          <a:lstStyle/>
-          <a:p>
-            <a:pPr algn="ctr"/>
-          </a:p>
-        </p:txBody>
-      </p:sp>
-      <p:sp>
-        <p:nvSpPr>
-          <p:cNvPr id="15" name="Rectangle 14"/>
-          <p:cNvSpPr/>
-          <p:nvPr/>
-        </p:nvSpPr>
-        <p:spPr>
-          <a:xfrm>
-            <a:off x="640080" y="2971800"/>
-            <a:ext cx="274320" cy="274320"/>
-          </a:xfrm>
-          <a:prstGeom prst="rect">
-            <a:avLst/>
-          </a:prstGeom>
-          <a:solidFill>
-            <a:srgbClr val="FFFFFF"/>
-          </a:solidFill>
-          <a:ln>
-            <a:solidFill>
-              <a:srgbClr val="333333"/>
-            </a:solidFill>
-          </a:ln>
-        </p:spPr>
-        <p:style>
-          <a:lnRef idx="1">
-            <a:schemeClr val="accent1"/>
-          </a:lnRef>
-          <a:fillRef idx="3">
-            <a:schemeClr val="accent1"/>
-          </a:fillRef>
-          <a:effectRef idx="2">
-            <a:schemeClr val="accent1"/>
-          </a:effectRef>
-          <a:fontRef idx="minor">
-            <a:schemeClr val="lt1"/>
-          </a:fontRef>
-        </p:style>
-        <p:txBody>
-          <a:bodyPr rtlCol="0" anchor="ctr"/>
-          <a:lstStyle/>
-          <a:p>
-            <a:pPr algn="ctr"/>
-          </a:p>
-        </p:txBody>
-      </p:sp>
-      <p:sp>
-        <p:nvSpPr>
-          <p:cNvPr id="16" name="Rectangle 15"/>
-          <p:cNvSpPr/>
-          <p:nvPr/>
-        </p:nvSpPr>
-        <p:spPr>
-          <a:xfrm>
-            <a:off x="640080" y="2971800"/>
-            <a:ext cx="73152" cy="274320"/>
-          </a:xfrm>
-          <a:prstGeom prst="rect">
-            <a:avLst/>
-          </a:prstGeom>
-          <a:solidFill>
-            <a:srgbClr val="269CCB"/>
-          </a:solidFill>
-          <a:ln>
-            <a:noFill/>
-          </a:ln>
-        </p:spPr>
-        <p:style>
-          <a:lnRef idx="1">
-            <a:schemeClr val="accent1"/>
-          </a:lnRef>
-          <a:fillRef idx="3">
-            <a:schemeClr val="accent1"/>
-          </a:fillRef>
-          <a:effectRef idx="2">
-            <a:schemeClr val="accent1"/>
-          </a:effectRef>
-          <a:fontRef idx="minor">
-            <a:schemeClr val="lt1"/>
-          </a:fontRef>
-        </p:style>
-        <p:txBody>
-          <a:bodyPr rtlCol="0" anchor="ctr"/>
-          <a:lstStyle/>
-          <a:p>
-            <a:pPr algn="ctr"/>
-          </a:p>
-        </p:txBody>
-      </p:sp>
-      <p:sp>
-        <p:nvSpPr>
-          <p:cNvPr id="17" name="TextBox 16"/>
-          <p:cNvSpPr txBox="1"/>
-          <p:nvPr/>
-        </p:nvSpPr>
-        <p:spPr>
-          <a:xfrm>
-            <a:off x="1097280" y="2916936"/>
-            <a:ext cx="10362895" cy="402336"/>
-          </a:xfrm>
-          <a:prstGeom prst="rect">
-            <a:avLst/>
-          </a:prstGeom>
-          <a:noFill/>
-        </p:spPr>
-        <p:txBody>
-          <a:bodyPr wrap="square" anchor="ctr"/>
-          <a:lstStyle/>
-          <a:p>
-            <a:r>
-              <a:rPr sz="1500" b="1" i="0">
-                <a:solidFill>
-                  <a:srgbClr val="333333"/>
-                </a:solidFill>
-                <a:latin typeface="Calibri"/>
-              </a:rPr>
-              <a:t>LA ETAPA QUE MÁS PESA</a:t>
-            </a:r>
-            <a:r>
-              <a:rPr sz="1500" b="0" i="0">
-                <a:solidFill>
-                  <a:srgbClr val="333333"/>
-                </a:solidFill>
-                <a:latin typeface="Calibri"/>
-              </a:rPr>
-              <a:t> — Una sola etapa, con la razón. No hace falta un cálculo exacto: hace falta saber dónde apretar.</a:t>
-            </a:r>
-          </a:p>
-        </p:txBody>
-      </p:sp>
-      <p:sp>
-        <p:nvSpPr>
-          <p:cNvPr id="18" name="Rounded Rectangle 17"/>
-          <p:cNvSpPr/>
-          <p:nvPr/>
-        </p:nvSpPr>
-        <p:spPr>
-          <a:xfrm>
-            <a:off x="457200" y="3502152"/>
-            <a:ext cx="11277295" cy="566928"/>
-          </a:xfrm>
-          <a:prstGeom prst="roundRect">
-            <a:avLst>
-              <a:gd name="adj" fmla="val 12000"/>
-            </a:avLst>
-          </a:prstGeom>
-          <a:solidFill>
-            <a:srgbClr val="F2F2F2"/>
-          </a:solidFill>
-          <a:ln>
-            <a:noFill/>
-          </a:ln>
-        </p:spPr>
-        <p:style>
-          <a:lnRef idx="1">
-            <a:schemeClr val="accent1"/>
-          </a:lnRef>
-          <a:fillRef idx="3">
-            <a:schemeClr val="accent1"/>
-          </a:fillRef>
-          <a:effectRef idx="2">
-            <a:schemeClr val="accent1"/>
-          </a:effectRef>
-          <a:fontRef idx="minor">
-            <a:schemeClr val="lt1"/>
-          </a:fontRef>
-        </p:style>
-        <p:txBody>
-          <a:bodyPr rtlCol="0" anchor="ctr"/>
-          <a:lstStyle/>
-          <a:p>
-            <a:pPr algn="ctr"/>
-          </a:p>
-        </p:txBody>
-      </p:sp>
-      <p:sp>
-        <p:nvSpPr>
-          <p:cNvPr id="19" name="Rectangle 18"/>
-          <p:cNvSpPr/>
-          <p:nvPr/>
-        </p:nvSpPr>
-        <p:spPr>
-          <a:xfrm>
-            <a:off x="640080" y="3648456"/>
-            <a:ext cx="274320" cy="274320"/>
-          </a:xfrm>
-          <a:prstGeom prst="rect">
-            <a:avLst/>
-          </a:prstGeom>
-          <a:solidFill>
-            <a:srgbClr val="FFFFFF"/>
-          </a:solidFill>
-          <a:ln>
-            <a:solidFill>
-              <a:srgbClr val="333333"/>
-            </a:solidFill>
-          </a:ln>
-        </p:spPr>
-        <p:style>
-          <a:lnRef idx="1">
-            <a:schemeClr val="accent1"/>
-          </a:lnRef>
-          <a:fillRef idx="3">
-            <a:schemeClr val="accent1"/>
-          </a:fillRef>
-          <a:effectRef idx="2">
-            <a:schemeClr val="accent1"/>
-          </a:effectRef>
-          <a:fontRef idx="minor">
-            <a:schemeClr val="lt1"/>
-          </a:fontRef>
-        </p:style>
-        <p:txBody>
-          <a:bodyPr rtlCol="0" anchor="ctr"/>
-          <a:lstStyle/>
-          <a:p>
-            <a:pPr algn="ctr"/>
-          </a:p>
-        </p:txBody>
-      </p:sp>
-      <p:sp>
-        <p:nvSpPr>
-          <p:cNvPr id="20" name="Rectangle 19"/>
-          <p:cNvSpPr/>
-          <p:nvPr/>
-        </p:nvSpPr>
-        <p:spPr>
-          <a:xfrm>
-            <a:off x="640080" y="3648456"/>
-            <a:ext cx="73152" cy="274320"/>
-          </a:xfrm>
-          <a:prstGeom prst="rect">
-            <a:avLst/>
-          </a:prstGeom>
-          <a:solidFill>
-            <a:srgbClr val="269CCB"/>
-          </a:solidFill>
-          <a:ln>
-            <a:noFill/>
-          </a:ln>
-        </p:spPr>
-        <p:style>
-          <a:lnRef idx="1">
-            <a:schemeClr val="accent1"/>
-          </a:lnRef>
-          <a:fillRef idx="3">
-            <a:schemeClr val="accent1"/>
-          </a:fillRef>
-          <a:effectRef idx="2">
-            <a:schemeClr val="accent1"/>
-          </a:effectRef>
-          <a:fontRef idx="minor">
-            <a:schemeClr val="lt1"/>
-          </a:fontRef>
-        </p:style>
-        <p:txBody>
-          <a:bodyPr rtlCol="0" anchor="ctr"/>
-          <a:lstStyle/>
-          <a:p>
-            <a:pPr algn="ctr"/>
-          </a:p>
-        </p:txBody>
-      </p:sp>
-      <p:sp>
-        <p:nvSpPr>
-          <p:cNvPr id="21" name="TextBox 20"/>
-          <p:cNvSpPr txBox="1"/>
-          <p:nvPr/>
-        </p:nvSpPr>
-        <p:spPr>
-          <a:xfrm>
-            <a:off x="1097280" y="3593592"/>
-            <a:ext cx="10362895" cy="402336"/>
-          </a:xfrm>
-          <a:prstGeom prst="rect">
-            <a:avLst/>
-          </a:prstGeom>
-          <a:noFill/>
-        </p:spPr>
-        <p:txBody>
-          <a:bodyPr wrap="square" anchor="ctr"/>
-          <a:lstStyle/>
-          <a:p>
-            <a:r>
-              <a:rPr sz="1500" b="1" i="0">
-                <a:solidFill>
-                  <a:srgbClr val="333333"/>
-                </a:solidFill>
-                <a:latin typeface="Calibri"/>
-              </a:rPr>
-              <a:t>DOS DECISIONES DE DISEÑO</a:t>
-            </a:r>
-            <a:r>
-              <a:rPr sz="1500" b="0" i="0">
-                <a:solidFill>
-                  <a:srgbClr val="333333"/>
-                </a:solidFill>
-                <a:latin typeface="Calibri"/>
-              </a:rPr>
-              <a:t> — Dos cosas que </a:t>
-            </a:r>
-            <a:r>
-              <a:rPr sz="1500" b="1" i="0">
-                <a:solidFill>
-                  <a:srgbClr val="333333"/>
-                </a:solidFill>
-                <a:latin typeface="Calibri"/>
-              </a:rPr>
-              <a:t>ustedes</a:t>
-            </a:r>
-            <a:r>
-              <a:rPr sz="1500" b="0" i="0">
-                <a:solidFill>
-                  <a:srgbClr val="333333"/>
-                </a:solidFill>
-                <a:latin typeface="Calibri"/>
-              </a:rPr>
-              <a:t> pueden decidir en su sistema para bajar esa etapa. De diseño, no de comportamiento del usuario.</a:t>
-            </a:r>
-          </a:p>
-        </p:txBody>
-      </p:sp>
-      <p:sp>
-        <p:nvSpPr>
-          <p:cNvPr id="22" name="Rounded Rectangle 21"/>
-          <p:cNvSpPr/>
-          <p:nvPr/>
-        </p:nvSpPr>
-        <p:spPr>
-          <a:xfrm>
-            <a:off x="457200" y="4178808"/>
-            <a:ext cx="11277295" cy="566928"/>
-          </a:xfrm>
-          <a:prstGeom prst="roundRect">
-            <a:avLst>
-              <a:gd name="adj" fmla="val 12000"/>
-            </a:avLst>
-          </a:prstGeom>
-          <a:solidFill>
-            <a:srgbClr val="F2F2F2"/>
-          </a:solidFill>
-          <a:ln>
-            <a:noFill/>
-          </a:ln>
-        </p:spPr>
-        <p:style>
-          <a:lnRef idx="1">
-            <a:schemeClr val="accent1"/>
-          </a:lnRef>
-          <a:fillRef idx="3">
-            <a:schemeClr val="accent1"/>
-          </a:fillRef>
-          <a:effectRef idx="2">
-            <a:schemeClr val="accent1"/>
-          </a:effectRef>
-          <a:fontRef idx="minor">
-            <a:schemeClr val="lt1"/>
-          </a:fontRef>
-        </p:style>
-        <p:txBody>
-          <a:bodyPr rtlCol="0" anchor="ctr"/>
-          <a:lstStyle/>
-          <a:p>
-            <a:pPr algn="ctr"/>
-          </a:p>
-        </p:txBody>
-      </p:sp>
-      <p:sp>
-        <p:nvSpPr>
-          <p:cNvPr id="23" name="Rectangle 22"/>
-          <p:cNvSpPr/>
-          <p:nvPr/>
-        </p:nvSpPr>
-        <p:spPr>
-          <a:xfrm>
-            <a:off x="640080" y="4325112"/>
-            <a:ext cx="274320" cy="274320"/>
-          </a:xfrm>
-          <a:prstGeom prst="rect">
-            <a:avLst/>
-          </a:prstGeom>
-          <a:solidFill>
-            <a:srgbClr val="FFFFFF"/>
-          </a:solidFill>
-          <a:ln>
-            <a:solidFill>
-              <a:srgbClr val="333333"/>
-            </a:solidFill>
-          </a:ln>
-        </p:spPr>
-        <p:style>
-          <a:lnRef idx="1">
-            <a:schemeClr val="accent1"/>
-          </a:lnRef>
-          <a:fillRef idx="3">
-            <a:schemeClr val="accent1"/>
-          </a:fillRef>
-          <a:effectRef idx="2">
-            <a:schemeClr val="accent1"/>
-          </a:effectRef>
-          <a:fontRef idx="minor">
-            <a:schemeClr val="lt1"/>
-          </a:fontRef>
-        </p:style>
-        <p:txBody>
-          <a:bodyPr rtlCol="0" anchor="ctr"/>
-          <a:lstStyle/>
-          <a:p>
-            <a:pPr algn="ctr"/>
-          </a:p>
-        </p:txBody>
-      </p:sp>
-      <p:sp>
-        <p:nvSpPr>
-          <p:cNvPr id="24" name="Rectangle 23"/>
-          <p:cNvSpPr/>
-          <p:nvPr/>
-        </p:nvSpPr>
-        <p:spPr>
-          <a:xfrm>
-            <a:off x="640080" y="4325112"/>
-            <a:ext cx="73152" cy="274320"/>
-          </a:xfrm>
-          <a:prstGeom prst="rect">
-            <a:avLst/>
-          </a:prstGeom>
-          <a:solidFill>
-            <a:srgbClr val="269CCB"/>
-          </a:solidFill>
-          <a:ln>
-            <a:noFill/>
-          </a:ln>
-        </p:spPr>
-        <p:style>
-          <a:lnRef idx="1">
-            <a:schemeClr val="accent1"/>
-          </a:lnRef>
-          <a:fillRef idx="3">
-            <a:schemeClr val="accent1"/>
-          </a:fillRef>
-          <a:effectRef idx="2">
-            <a:schemeClr val="accent1"/>
-          </a:effectRef>
-          <a:fontRef idx="minor">
-            <a:schemeClr val="lt1"/>
-          </a:fontRef>
-        </p:style>
-        <p:txBody>
-          <a:bodyPr rtlCol="0" anchor="ctr"/>
-          <a:lstStyle/>
-          <a:p>
-            <a:pPr algn="ctr"/>
-          </a:p>
-        </p:txBody>
-      </p:sp>
-      <p:sp>
-        <p:nvSpPr>
-          <p:cNvPr id="25" name="TextBox 24"/>
-          <p:cNvSpPr txBox="1"/>
-          <p:nvPr/>
-        </p:nvSpPr>
-        <p:spPr>
-          <a:xfrm>
-            <a:off x="1097280" y="4270248"/>
-            <a:ext cx="10362895" cy="402336"/>
-          </a:xfrm>
-          <a:prstGeom prst="rect">
-            <a:avLst/>
-          </a:prstGeom>
-          <a:noFill/>
-        </p:spPr>
-        <p:txBody>
-          <a:bodyPr wrap="square" anchor="ctr"/>
-          <a:lstStyle/>
-          <a:p>
-            <a:r>
-              <a:rPr sz="1500" b="1" i="0">
-                <a:solidFill>
-                  <a:srgbClr val="333333"/>
-                </a:solidFill>
-                <a:latin typeface="Calibri"/>
-              </a:rPr>
-              <a:t>EL INDICADOR</a:t>
-            </a:r>
-            <a:r>
-              <a:rPr sz="1500" b="0" i="0">
-                <a:solidFill>
-                  <a:srgbClr val="333333"/>
-                </a:solidFill>
-                <a:latin typeface="Calibri"/>
-              </a:rPr>
-              <a:t> — Un número que se pueda medir al final del semestre para saber si la decisión funcionó. Con su unidad.</a:t>
-            </a:r>
-          </a:p>
-        </p:txBody>
-      </p:sp>
-      <p:sp>
-        <p:nvSpPr>
-          <p:cNvPr id="26" name="TextBox 25"/>
           <p:cNvSpPr txBox="1"/>
           <p:nvPr/>
         </p:nvSpPr>
@@ -9498,7 +8863,7 @@
         <p:spPr>
           <a:xfrm>
             <a:off x="0" y="0"/>
-            <a:ext cx="12191695" cy="1170432"/>
+            <a:ext cx="12191695" cy="960120"/>
           </a:xfrm>
           <a:prstGeom prst="rect">
             <a:avLst/>
@@ -9540,7 +8905,7 @@
         </p:nvSpPr>
         <p:spPr>
           <a:xfrm>
-            <a:off x="0" y="1170432"/>
+            <a:off x="0" y="960120"/>
             <a:ext cx="12191695" cy="41148"/>
           </a:xfrm>
           <a:prstGeom prst="rect">
@@ -9584,7 +8949,7 @@
         <p:spPr>
           <a:xfrm>
             <a:off x="457200" y="164592"/>
-            <a:ext cx="11277295" cy="384048"/>
+            <a:ext cx="11277295" cy="502920"/>
           </a:xfrm>
           <a:prstGeom prst="rect">
             <a:avLst/>
@@ -9604,55 +8969,21 @@
                 </a:solidFill>
                 <a:latin typeface="Calibri"/>
               </a:rPr>
-              <a:t>Cómo se expone en 3 minutos</a:t>
-            </a:r>
-          </a:p>
-        </p:txBody>
-      </p:sp>
-      <p:sp>
-        <p:nvSpPr>
-          <p:cNvPr id="5" name="TextBox 4"/>
-          <p:cNvSpPr txBox="1"/>
-          <p:nvPr/>
-        </p:nvSpPr>
-        <p:spPr>
-          <a:xfrm>
-            <a:off x="457200" y="566928"/>
-            <a:ext cx="11277295" cy="411480"/>
-          </a:xfrm>
-          <a:prstGeom prst="rect">
-            <a:avLst/>
-          </a:prstGeom>
-          <a:noFill/>
-        </p:spPr>
-        <p:txBody>
-          <a:bodyPr wrap="square">
-            <a:spAutoFit/>
-          </a:bodyPr>
-          <a:lstStyle/>
-          <a:p>
-            <a:r>
-              <a:rPr sz="1400" b="0" i="0">
-                <a:solidFill>
-                  <a:srgbClr val="B8D8EE"/>
-                </a:solidFill>
-                <a:latin typeface="Calibri"/>
-              </a:rPr>
-              <a:t>Habla el vocero con la pantalla ya compartida · cronómetro en pantalla · se corta al llegar a cero</a:t>
-            </a:r>
-          </a:p>
-        </p:txBody>
-      </p:sp>
-      <p:sp>
-        <p:nvSpPr>
-          <p:cNvPr id="6" name="Rounded Rectangle 5"/>
+              <a:t>Guion de la exposicion, con tiempos</a:t>
+            </a:r>
+          </a:p>
+        </p:txBody>
+      </p:sp>
+      <p:sp>
+        <p:nvSpPr>
+          <p:cNvPr id="5" name="Rounded Rectangle 4"/>
           <p:cNvSpPr/>
           <p:nvPr/>
         </p:nvSpPr>
         <p:spPr>
           <a:xfrm>
-            <a:off x="457200" y="1444752"/>
-            <a:ext cx="11277295" cy="908913"/>
+            <a:off x="457200" y="1261872"/>
+            <a:ext cx="11277295" cy="5093208"/>
           </a:xfrm>
           <a:prstGeom prst="roundRect">
             <a:avLst>
@@ -9660,7 +8991,7 @@
             </a:avLst>
           </a:prstGeom>
           <a:solidFill>
-            <a:srgbClr val="F2F2F2"/>
+            <a:srgbClr val="1E2A38"/>
           </a:solidFill>
           <a:ln>
             <a:noFill/>
@@ -9690,19 +9021,17 @@
       </p:sp>
       <p:sp>
         <p:nvSpPr>
-          <p:cNvPr id="7" name="Rounded Rectangle 6"/>
+          <p:cNvPr id="6" name="Rectangle 5"/>
           <p:cNvSpPr/>
           <p:nvPr/>
         </p:nvSpPr>
         <p:spPr>
           <a:xfrm>
-            <a:off x="594360" y="1679752"/>
-            <a:ext cx="438912" cy="438912"/>
-          </a:xfrm>
-          <a:prstGeom prst="roundRect">
-            <a:avLst>
-              <a:gd name="adj" fmla="val 12000"/>
-            </a:avLst>
+            <a:off x="457200" y="1261872"/>
+            <a:ext cx="11277295" cy="320040"/>
+          </a:xfrm>
+          <a:prstGeom prst="rect">
+            <a:avLst/>
           </a:prstGeom>
           <a:solidFill>
             <a:srgbClr val="095292"/>
@@ -9735,14 +9064,46 @@
       </p:sp>
       <p:sp>
         <p:nvSpPr>
+          <p:cNvPr id="7" name="TextBox 6"/>
+          <p:cNvSpPr txBox="1"/>
+          <p:nvPr/>
+        </p:nvSpPr>
+        <p:spPr>
+          <a:xfrm>
+            <a:off x="685800" y="1307592"/>
+            <a:ext cx="10820095" cy="256032"/>
+          </a:xfrm>
+          <a:prstGeom prst="rect">
+            <a:avLst/>
+          </a:prstGeom>
+          <a:noFill/>
+        </p:spPr>
+        <p:txBody>
+          <a:bodyPr wrap="square" anchor="ctr"/>
+          <a:lstStyle/>
+          <a:p>
+            <a:r>
+              <a:rPr sz="1000" b="1" i="0">
+                <a:solidFill>
+                  <a:srgbClr val="269CCB"/>
+                </a:solidFill>
+                <a:latin typeface="Calibri"/>
+              </a:rPr>
+              <a:t>● ● ●</a:t>
+            </a:r>
+          </a:p>
+        </p:txBody>
+      </p:sp>
+      <p:sp>
+        <p:nvSpPr>
           <p:cNvPr id="8" name="TextBox 7"/>
           <p:cNvSpPr txBox="1"/>
           <p:nvPr/>
         </p:nvSpPr>
         <p:spPr>
           <a:xfrm>
-            <a:off x="594360" y="1679752"/>
-            <a:ext cx="438912" cy="438912"/>
+            <a:off x="777240" y="1719072"/>
+            <a:ext cx="10637215" cy="4453128"/>
           </a:xfrm>
           <a:prstGeom prst="rect">
             <a:avLst/>
@@ -9750,18 +9111,168 @@
           <a:noFill/>
         </p:spPr>
         <p:txBody>
-          <a:bodyPr wrap="square" anchor="ctr"/>
-          <a:lstStyle/>
-          <a:p>
-            <a:pPr algn="ctr"/>
-            <a:r>
-              <a:rPr sz="1600" b="1" i="0">
+          <a:bodyPr wrap="square">
+            <a:spAutoFit/>
+          </a:bodyPr>
+          <a:lstStyle/>
+          <a:p>
+            <a:pPr>
+              <a:spcAft>
+                <a:spcPts val="400"/>
+              </a:spcAft>
+            </a:pPr>
+            <a:r>
+              <a:rPr sz="1400" b="0" i="0">
                 <a:solidFill>
                   <a:srgbClr val="FFFFFF"/>
                 </a:solidFill>
                 <a:latin typeface="Calibri"/>
               </a:rPr>
-              <a:t>1</a:t>
+              <a:t># Exposicion de hoy · lo que se califica es el reparto, no el total</a:t>
+            </a:r>
+          </a:p>
+          <a:p>
+            <a:pPr>
+              <a:spcAft>
+                <a:spcPts val="400"/>
+              </a:spcAft>
+            </a:pPr>
+            <a:r>
+              <a:rPr sz="1400" b="0" i="0">
+                <a:solidFill>
+                  <a:srgbClr val="FFFFFF"/>
+                </a:solidFill>
+                <a:latin typeface="Calibri"/>
+              </a:rPr>
+              <a:t/>
+            </a:r>
+          </a:p>
+          <a:p>
+            <a:pPr>
+              <a:spcAft>
+                <a:spcPts val="400"/>
+              </a:spcAft>
+            </a:pPr>
+            <a:r>
+              <a:rPr sz="1400" b="0" i="0">
+                <a:solidFill>
+                  <a:srgbClr val="FFFFFF"/>
+                </a:solidFill>
+                <a:latin typeface="Calibri"/>
+              </a:rPr>
+              <a:t>40 s · El recorrido                El diagrama, recorrido con el cursor. Dónde </a:t>
+            </a:r>
+          </a:p>
+          <a:p>
+            <a:pPr>
+              <a:spcAft>
+                <a:spcPts val="400"/>
+              </a:spcAft>
+            </a:pPr>
+            <a:r>
+              <a:rPr sz="1400" b="0" i="0">
+                <a:solidFill>
+                  <a:srgbClr val="FFFFFF"/>
+                </a:solidFill>
+                <a:latin typeface="Calibri"/>
+              </a:rPr>
+              <a:t>30 s · Lo que se repite            La operación repetida y cuántas veces al día</a:t>
+            </a:r>
+          </a:p>
+          <a:p>
+            <a:pPr>
+              <a:spcAft>
+                <a:spcPts val="400"/>
+              </a:spcAft>
+            </a:pPr>
+            <a:r>
+              <a:rPr sz="1400" b="0" i="0">
+                <a:solidFill>
+                  <a:srgbClr val="FFFFFF"/>
+                </a:solidFill>
+                <a:latin typeface="Calibri"/>
+              </a:rPr>
+              <a:t>50 s · La etapa que más pesa       Cuál y por qué. Es el minuto obligatorio.</a:t>
+            </a:r>
+          </a:p>
+          <a:p>
+            <a:pPr>
+              <a:spcAft>
+                <a:spcPts val="400"/>
+              </a:spcAft>
+            </a:pPr>
+            <a:r>
+              <a:rPr sz="1400" b="0" i="0">
+                <a:solidFill>
+                  <a:srgbClr val="FFFFFF"/>
+                </a:solidFill>
+                <a:latin typeface="Calibri"/>
+              </a:rPr>
+              <a:t>50 s · Las dos decisiones y el ind Qué van a cambiar y cómo se sabrá si sirvió.</a:t>
+            </a:r>
+          </a:p>
+          <a:p>
+            <a:pPr>
+              <a:spcAft>
+                <a:spcPts val="400"/>
+              </a:spcAft>
+            </a:pPr>
+            <a:r>
+              <a:rPr sz="1400" b="0" i="0">
+                <a:solidFill>
+                  <a:srgbClr val="FFFFFF"/>
+                </a:solidFill>
+                <a:latin typeface="Calibri"/>
+              </a:rPr>
+              <a:t>10 s · La fuente                   De dónde salió cualquier cifra que hayan dic</a:t>
+            </a:r>
+          </a:p>
+          <a:p>
+            <a:pPr>
+              <a:spcAft>
+                <a:spcPts val="400"/>
+              </a:spcAft>
+            </a:pPr>
+            <a:r>
+              <a:rPr sz="1400" b="0" i="0">
+                <a:solidFill>
+                  <a:srgbClr val="FFFFFF"/>
+                </a:solidFill>
+                <a:latin typeface="Calibri"/>
+              </a:rPr>
+              <a:t/>
+            </a:r>
+          </a:p>
+          <a:p>
+            <a:pPr>
+              <a:spcAft>
+                <a:spcPts val="400"/>
+              </a:spcAft>
+            </a:pPr>
+            <a:r>
+              <a:rPr sz="1400" b="0" i="0">
+                <a:solidFill>
+                  <a:srgbClr val="FFFFFF"/>
+                </a:solidFill>
+                <a:latin typeface="Calibri"/>
+              </a:rPr>
+              <a:t># El tramo marcado como obligatorio es el que el jurado califica:</a:t>
+            </a:r>
+          </a:p>
+          <a:p>
+            <a:pPr>
+              <a:spcAft>
+                <a:spcPts val="400"/>
+              </a:spcAft>
+            </a:pPr>
+            <a:r>
+              <a:rPr sz="1400" b="0" i="0">
+                <a:solidFill>
+                  <a:srgbClr val="FFFFFF"/>
+                </a:solidFill>
+                <a:latin typeface="Calibri"/>
+              </a:rPr>
+              <a:t># si el guion no esta cronometrado, es el que se queda sin tiempo.</a:t>
             </a:r>
           </a:p>
         </p:txBody>
@@ -9769,738 +9280,6 @@
       <p:sp>
         <p:nvSpPr>
           <p:cNvPr id="9" name="TextBox 8"/>
-          <p:cNvSpPr txBox="1"/>
-          <p:nvPr/>
-        </p:nvSpPr>
-        <p:spPr>
-          <a:xfrm>
-            <a:off x="1188720" y="1536192"/>
-            <a:ext cx="10271455" cy="744321"/>
-          </a:xfrm>
-          <a:prstGeom prst="rect">
-            <a:avLst/>
-          </a:prstGeom>
-          <a:noFill/>
-        </p:spPr>
-        <p:txBody>
-          <a:bodyPr wrap="square" anchor="ctr"/>
-          <a:lstStyle/>
-          <a:p>
-            <a:r>
-              <a:rPr sz="1500" b="1" i="0">
-                <a:solidFill>
-                  <a:srgbClr val="095292"/>
-                </a:solidFill>
-                <a:latin typeface="Calibri"/>
-              </a:rPr>
-              <a:t>40 s · El recorrido</a:t>
-            </a:r>
-          </a:p>
-          <a:p>
-            <a:pPr>
-              <a:spcBef>
-                <a:spcPts val="200"/>
-              </a:spcBef>
-            </a:pPr>
-            <a:r>
-              <a:rPr sz="1300" b="0" i="0">
-                <a:solidFill>
-                  <a:srgbClr val="333333"/>
-                </a:solidFill>
-                <a:latin typeface="Calibri"/>
-              </a:rPr>
-              <a:t>El diagrama, recorrido con el cursor. Dónde está cada etapa.</a:t>
-            </a:r>
-          </a:p>
-        </p:txBody>
-      </p:sp>
-      <p:sp>
-        <p:nvSpPr>
-          <p:cNvPr id="10" name="Rounded Rectangle 9"/>
-          <p:cNvSpPr/>
-          <p:nvPr/>
-        </p:nvSpPr>
-        <p:spPr>
-          <a:xfrm>
-            <a:off x="457200" y="2445105"/>
-            <a:ext cx="11277295" cy="908913"/>
-          </a:xfrm>
-          <a:prstGeom prst="roundRect">
-            <a:avLst>
-              <a:gd name="adj" fmla="val 12000"/>
-            </a:avLst>
-          </a:prstGeom>
-          <a:solidFill>
-            <a:srgbClr val="E8F4FA"/>
-          </a:solidFill>
-          <a:ln>
-            <a:noFill/>
-          </a:ln>
-        </p:spPr>
-        <p:style>
-          <a:lnRef idx="1">
-            <a:schemeClr val="accent1"/>
-          </a:lnRef>
-          <a:fillRef idx="3">
-            <a:schemeClr val="accent1"/>
-          </a:fillRef>
-          <a:effectRef idx="2">
-            <a:schemeClr val="accent1"/>
-          </a:effectRef>
-          <a:fontRef idx="minor">
-            <a:schemeClr val="lt1"/>
-          </a:fontRef>
-        </p:style>
-        <p:txBody>
-          <a:bodyPr rtlCol="0" anchor="ctr"/>
-          <a:lstStyle/>
-          <a:p>
-            <a:pPr algn="ctr"/>
-          </a:p>
-        </p:txBody>
-      </p:sp>
-      <p:sp>
-        <p:nvSpPr>
-          <p:cNvPr id="11" name="Rounded Rectangle 10"/>
-          <p:cNvSpPr/>
-          <p:nvPr/>
-        </p:nvSpPr>
-        <p:spPr>
-          <a:xfrm>
-            <a:off x="594360" y="2680106"/>
-            <a:ext cx="438912" cy="438912"/>
-          </a:xfrm>
-          <a:prstGeom prst="roundRect">
-            <a:avLst>
-              <a:gd name="adj" fmla="val 12000"/>
-            </a:avLst>
-          </a:prstGeom>
-          <a:solidFill>
-            <a:srgbClr val="095292"/>
-          </a:solidFill>
-          <a:ln>
-            <a:noFill/>
-          </a:ln>
-        </p:spPr>
-        <p:style>
-          <a:lnRef idx="1">
-            <a:schemeClr val="accent1"/>
-          </a:lnRef>
-          <a:fillRef idx="3">
-            <a:schemeClr val="accent1"/>
-          </a:fillRef>
-          <a:effectRef idx="2">
-            <a:schemeClr val="accent1"/>
-          </a:effectRef>
-          <a:fontRef idx="minor">
-            <a:schemeClr val="lt1"/>
-          </a:fontRef>
-        </p:style>
-        <p:txBody>
-          <a:bodyPr rtlCol="0" anchor="ctr"/>
-          <a:lstStyle/>
-          <a:p>
-            <a:pPr algn="ctr"/>
-          </a:p>
-        </p:txBody>
-      </p:sp>
-      <p:sp>
-        <p:nvSpPr>
-          <p:cNvPr id="12" name="TextBox 11"/>
-          <p:cNvSpPr txBox="1"/>
-          <p:nvPr/>
-        </p:nvSpPr>
-        <p:spPr>
-          <a:xfrm>
-            <a:off x="594360" y="2680106"/>
-            <a:ext cx="438912" cy="438912"/>
-          </a:xfrm>
-          <a:prstGeom prst="rect">
-            <a:avLst/>
-          </a:prstGeom>
-          <a:noFill/>
-        </p:spPr>
-        <p:txBody>
-          <a:bodyPr wrap="square" anchor="ctr"/>
-          <a:lstStyle/>
-          <a:p>
-            <a:pPr algn="ctr"/>
-            <a:r>
-              <a:rPr sz="1600" b="1" i="0">
-                <a:solidFill>
-                  <a:srgbClr val="FFFFFF"/>
-                </a:solidFill>
-                <a:latin typeface="Calibri"/>
-              </a:rPr>
-              <a:t>2</a:t>
-            </a:r>
-          </a:p>
-        </p:txBody>
-      </p:sp>
-      <p:sp>
-        <p:nvSpPr>
-          <p:cNvPr id="13" name="TextBox 12"/>
-          <p:cNvSpPr txBox="1"/>
-          <p:nvPr/>
-        </p:nvSpPr>
-        <p:spPr>
-          <a:xfrm>
-            <a:off x="1188720" y="2536545"/>
-            <a:ext cx="10271455" cy="744321"/>
-          </a:xfrm>
-          <a:prstGeom prst="rect">
-            <a:avLst/>
-          </a:prstGeom>
-          <a:noFill/>
-        </p:spPr>
-        <p:txBody>
-          <a:bodyPr wrap="square" anchor="ctr"/>
-          <a:lstStyle/>
-          <a:p>
-            <a:r>
-              <a:rPr sz="1500" b="1" i="0">
-                <a:solidFill>
-                  <a:srgbClr val="095292"/>
-                </a:solidFill>
-                <a:latin typeface="Calibri"/>
-              </a:rPr>
-              <a:t>30 s · Lo que se repite</a:t>
-            </a:r>
-          </a:p>
-          <a:p>
-            <a:pPr>
-              <a:spcBef>
-                <a:spcPts val="200"/>
-              </a:spcBef>
-            </a:pPr>
-            <a:r>
-              <a:rPr sz="1300" b="0" i="0">
-                <a:solidFill>
-                  <a:srgbClr val="333333"/>
-                </a:solidFill>
-                <a:latin typeface="Calibri"/>
-              </a:rPr>
-              <a:t>La operación repetida y cuántas veces al día.</a:t>
-            </a:r>
-          </a:p>
-        </p:txBody>
-      </p:sp>
-      <p:sp>
-        <p:nvSpPr>
-          <p:cNvPr id="14" name="Rounded Rectangle 13"/>
-          <p:cNvSpPr/>
-          <p:nvPr/>
-        </p:nvSpPr>
-        <p:spPr>
-          <a:xfrm>
-            <a:off x="457200" y="3445459"/>
-            <a:ext cx="11277295" cy="908913"/>
-          </a:xfrm>
-          <a:prstGeom prst="roundRect">
-            <a:avLst>
-              <a:gd name="adj" fmla="val 12000"/>
-            </a:avLst>
-          </a:prstGeom>
-          <a:solidFill>
-            <a:srgbClr val="F2F2F2"/>
-          </a:solidFill>
-          <a:ln>
-            <a:noFill/>
-          </a:ln>
-        </p:spPr>
-        <p:style>
-          <a:lnRef idx="1">
-            <a:schemeClr val="accent1"/>
-          </a:lnRef>
-          <a:fillRef idx="3">
-            <a:schemeClr val="accent1"/>
-          </a:fillRef>
-          <a:effectRef idx="2">
-            <a:schemeClr val="accent1"/>
-          </a:effectRef>
-          <a:fontRef idx="minor">
-            <a:schemeClr val="lt1"/>
-          </a:fontRef>
-        </p:style>
-        <p:txBody>
-          <a:bodyPr rtlCol="0" anchor="ctr"/>
-          <a:lstStyle/>
-          <a:p>
-            <a:pPr algn="ctr"/>
-          </a:p>
-        </p:txBody>
-      </p:sp>
-      <p:sp>
-        <p:nvSpPr>
-          <p:cNvPr id="15" name="Rounded Rectangle 14"/>
-          <p:cNvSpPr/>
-          <p:nvPr/>
-        </p:nvSpPr>
-        <p:spPr>
-          <a:xfrm>
-            <a:off x="594360" y="3680460"/>
-            <a:ext cx="438912" cy="438912"/>
-          </a:xfrm>
-          <a:prstGeom prst="roundRect">
-            <a:avLst>
-              <a:gd name="adj" fmla="val 12000"/>
-            </a:avLst>
-          </a:prstGeom>
-          <a:solidFill>
-            <a:srgbClr val="095292"/>
-          </a:solidFill>
-          <a:ln>
-            <a:noFill/>
-          </a:ln>
-        </p:spPr>
-        <p:style>
-          <a:lnRef idx="1">
-            <a:schemeClr val="accent1"/>
-          </a:lnRef>
-          <a:fillRef idx="3">
-            <a:schemeClr val="accent1"/>
-          </a:fillRef>
-          <a:effectRef idx="2">
-            <a:schemeClr val="accent1"/>
-          </a:effectRef>
-          <a:fontRef idx="minor">
-            <a:schemeClr val="lt1"/>
-          </a:fontRef>
-        </p:style>
-        <p:txBody>
-          <a:bodyPr rtlCol="0" anchor="ctr"/>
-          <a:lstStyle/>
-          <a:p>
-            <a:pPr algn="ctr"/>
-          </a:p>
-        </p:txBody>
-      </p:sp>
-      <p:sp>
-        <p:nvSpPr>
-          <p:cNvPr id="16" name="TextBox 15"/>
-          <p:cNvSpPr txBox="1"/>
-          <p:nvPr/>
-        </p:nvSpPr>
-        <p:spPr>
-          <a:xfrm>
-            <a:off x="594360" y="3680460"/>
-            <a:ext cx="438912" cy="438912"/>
-          </a:xfrm>
-          <a:prstGeom prst="rect">
-            <a:avLst/>
-          </a:prstGeom>
-          <a:noFill/>
-        </p:spPr>
-        <p:txBody>
-          <a:bodyPr wrap="square" anchor="ctr"/>
-          <a:lstStyle/>
-          <a:p>
-            <a:pPr algn="ctr"/>
-            <a:r>
-              <a:rPr sz="1600" b="1" i="0">
-                <a:solidFill>
-                  <a:srgbClr val="FFFFFF"/>
-                </a:solidFill>
-                <a:latin typeface="Calibri"/>
-              </a:rPr>
-              <a:t>3</a:t>
-            </a:r>
-          </a:p>
-        </p:txBody>
-      </p:sp>
-      <p:sp>
-        <p:nvSpPr>
-          <p:cNvPr id="17" name="TextBox 16"/>
-          <p:cNvSpPr txBox="1"/>
-          <p:nvPr/>
-        </p:nvSpPr>
-        <p:spPr>
-          <a:xfrm>
-            <a:off x="1188720" y="3536899"/>
-            <a:ext cx="10271455" cy="744321"/>
-          </a:xfrm>
-          <a:prstGeom prst="rect">
-            <a:avLst/>
-          </a:prstGeom>
-          <a:noFill/>
-        </p:spPr>
-        <p:txBody>
-          <a:bodyPr wrap="square" anchor="ctr"/>
-          <a:lstStyle/>
-          <a:p>
-            <a:r>
-              <a:rPr sz="1500" b="1" i="0">
-                <a:solidFill>
-                  <a:srgbClr val="095292"/>
-                </a:solidFill>
-                <a:latin typeface="Calibri"/>
-              </a:rPr>
-              <a:t>50 s · La etapa que más pesa</a:t>
-            </a:r>
-          </a:p>
-          <a:p>
-            <a:pPr>
-              <a:spcBef>
-                <a:spcPts val="200"/>
-              </a:spcBef>
-            </a:pPr>
-            <a:r>
-              <a:rPr sz="1300" b="0" i="0">
-                <a:solidFill>
-                  <a:srgbClr val="333333"/>
-                </a:solidFill>
-                <a:latin typeface="Calibri"/>
-              </a:rPr>
-              <a:t>Cuál y por qué. Es el minuto obligatorio.</a:t>
-            </a:r>
-          </a:p>
-        </p:txBody>
-      </p:sp>
-      <p:sp>
-        <p:nvSpPr>
-          <p:cNvPr id="18" name="Rounded Rectangle 17"/>
-          <p:cNvSpPr/>
-          <p:nvPr/>
-        </p:nvSpPr>
-        <p:spPr>
-          <a:xfrm>
-            <a:off x="457200" y="4445812"/>
-            <a:ext cx="11277295" cy="908913"/>
-          </a:xfrm>
-          <a:prstGeom prst="roundRect">
-            <a:avLst>
-              <a:gd name="adj" fmla="val 12000"/>
-            </a:avLst>
-          </a:prstGeom>
-          <a:solidFill>
-            <a:srgbClr val="E8F4FA"/>
-          </a:solidFill>
-          <a:ln>
-            <a:noFill/>
-          </a:ln>
-        </p:spPr>
-        <p:style>
-          <a:lnRef idx="1">
-            <a:schemeClr val="accent1"/>
-          </a:lnRef>
-          <a:fillRef idx="3">
-            <a:schemeClr val="accent1"/>
-          </a:fillRef>
-          <a:effectRef idx="2">
-            <a:schemeClr val="accent1"/>
-          </a:effectRef>
-          <a:fontRef idx="minor">
-            <a:schemeClr val="lt1"/>
-          </a:fontRef>
-        </p:style>
-        <p:txBody>
-          <a:bodyPr rtlCol="0" anchor="ctr"/>
-          <a:lstStyle/>
-          <a:p>
-            <a:pPr algn="ctr"/>
-          </a:p>
-        </p:txBody>
-      </p:sp>
-      <p:sp>
-        <p:nvSpPr>
-          <p:cNvPr id="19" name="Rounded Rectangle 18"/>
-          <p:cNvSpPr/>
-          <p:nvPr/>
-        </p:nvSpPr>
-        <p:spPr>
-          <a:xfrm>
-            <a:off x="594360" y="4680813"/>
-            <a:ext cx="438912" cy="438912"/>
-          </a:xfrm>
-          <a:prstGeom prst="roundRect">
-            <a:avLst>
-              <a:gd name="adj" fmla="val 12000"/>
-            </a:avLst>
-          </a:prstGeom>
-          <a:solidFill>
-            <a:srgbClr val="095292"/>
-          </a:solidFill>
-          <a:ln>
-            <a:noFill/>
-          </a:ln>
-        </p:spPr>
-        <p:style>
-          <a:lnRef idx="1">
-            <a:schemeClr val="accent1"/>
-          </a:lnRef>
-          <a:fillRef idx="3">
-            <a:schemeClr val="accent1"/>
-          </a:fillRef>
-          <a:effectRef idx="2">
-            <a:schemeClr val="accent1"/>
-          </a:effectRef>
-          <a:fontRef idx="minor">
-            <a:schemeClr val="lt1"/>
-          </a:fontRef>
-        </p:style>
-        <p:txBody>
-          <a:bodyPr rtlCol="0" anchor="ctr"/>
-          <a:lstStyle/>
-          <a:p>
-            <a:pPr algn="ctr"/>
-          </a:p>
-        </p:txBody>
-      </p:sp>
-      <p:sp>
-        <p:nvSpPr>
-          <p:cNvPr id="20" name="TextBox 19"/>
-          <p:cNvSpPr txBox="1"/>
-          <p:nvPr/>
-        </p:nvSpPr>
-        <p:spPr>
-          <a:xfrm>
-            <a:off x="594360" y="4680813"/>
-            <a:ext cx="438912" cy="438912"/>
-          </a:xfrm>
-          <a:prstGeom prst="rect">
-            <a:avLst/>
-          </a:prstGeom>
-          <a:noFill/>
-        </p:spPr>
-        <p:txBody>
-          <a:bodyPr wrap="square" anchor="ctr"/>
-          <a:lstStyle/>
-          <a:p>
-            <a:pPr algn="ctr"/>
-            <a:r>
-              <a:rPr sz="1600" b="1" i="0">
-                <a:solidFill>
-                  <a:srgbClr val="FFFFFF"/>
-                </a:solidFill>
-                <a:latin typeface="Calibri"/>
-              </a:rPr>
-              <a:t>4</a:t>
-            </a:r>
-          </a:p>
-        </p:txBody>
-      </p:sp>
-      <p:sp>
-        <p:nvSpPr>
-          <p:cNvPr id="21" name="TextBox 20"/>
-          <p:cNvSpPr txBox="1"/>
-          <p:nvPr/>
-        </p:nvSpPr>
-        <p:spPr>
-          <a:xfrm>
-            <a:off x="1188720" y="4537252"/>
-            <a:ext cx="10271455" cy="744321"/>
-          </a:xfrm>
-          <a:prstGeom prst="rect">
-            <a:avLst/>
-          </a:prstGeom>
-          <a:noFill/>
-        </p:spPr>
-        <p:txBody>
-          <a:bodyPr wrap="square" anchor="ctr"/>
-          <a:lstStyle/>
-          <a:p>
-            <a:r>
-              <a:rPr sz="1500" b="1" i="0">
-                <a:solidFill>
-                  <a:srgbClr val="095292"/>
-                </a:solidFill>
-                <a:latin typeface="Calibri"/>
-              </a:rPr>
-              <a:t>50 s · Las dos decisiones y el indicador</a:t>
-            </a:r>
-          </a:p>
-          <a:p>
-            <a:pPr>
-              <a:spcBef>
-                <a:spcPts val="200"/>
-              </a:spcBef>
-            </a:pPr>
-            <a:r>
-              <a:rPr sz="1300" b="0" i="0">
-                <a:solidFill>
-                  <a:srgbClr val="333333"/>
-                </a:solidFill>
-                <a:latin typeface="Calibri"/>
-              </a:rPr>
-              <a:t>Qué van a cambiar y cómo se sabrá si sirvió.</a:t>
-            </a:r>
-          </a:p>
-        </p:txBody>
-      </p:sp>
-      <p:sp>
-        <p:nvSpPr>
-          <p:cNvPr id="22" name="Rounded Rectangle 21"/>
-          <p:cNvSpPr/>
-          <p:nvPr/>
-        </p:nvSpPr>
-        <p:spPr>
-          <a:xfrm>
-            <a:off x="457200" y="5446166"/>
-            <a:ext cx="11277295" cy="908913"/>
-          </a:xfrm>
-          <a:prstGeom prst="roundRect">
-            <a:avLst>
-              <a:gd name="adj" fmla="val 12000"/>
-            </a:avLst>
-          </a:prstGeom>
-          <a:solidFill>
-            <a:srgbClr val="F2F2F2"/>
-          </a:solidFill>
-          <a:ln>
-            <a:noFill/>
-          </a:ln>
-        </p:spPr>
-        <p:style>
-          <a:lnRef idx="1">
-            <a:schemeClr val="accent1"/>
-          </a:lnRef>
-          <a:fillRef idx="3">
-            <a:schemeClr val="accent1"/>
-          </a:fillRef>
-          <a:effectRef idx="2">
-            <a:schemeClr val="accent1"/>
-          </a:effectRef>
-          <a:fontRef idx="minor">
-            <a:schemeClr val="lt1"/>
-          </a:fontRef>
-        </p:style>
-        <p:txBody>
-          <a:bodyPr rtlCol="0" anchor="ctr"/>
-          <a:lstStyle/>
-          <a:p>
-            <a:pPr algn="ctr"/>
-          </a:p>
-        </p:txBody>
-      </p:sp>
-      <p:sp>
-        <p:nvSpPr>
-          <p:cNvPr id="23" name="Rounded Rectangle 22"/>
-          <p:cNvSpPr/>
-          <p:nvPr/>
-        </p:nvSpPr>
-        <p:spPr>
-          <a:xfrm>
-            <a:off x="594360" y="5681167"/>
-            <a:ext cx="438912" cy="438912"/>
-          </a:xfrm>
-          <a:prstGeom prst="roundRect">
-            <a:avLst>
-              <a:gd name="adj" fmla="val 12000"/>
-            </a:avLst>
-          </a:prstGeom>
-          <a:solidFill>
-            <a:srgbClr val="095292"/>
-          </a:solidFill>
-          <a:ln>
-            <a:noFill/>
-          </a:ln>
-        </p:spPr>
-        <p:style>
-          <a:lnRef idx="1">
-            <a:schemeClr val="accent1"/>
-          </a:lnRef>
-          <a:fillRef idx="3">
-            <a:schemeClr val="accent1"/>
-          </a:fillRef>
-          <a:effectRef idx="2">
-            <a:schemeClr val="accent1"/>
-          </a:effectRef>
-          <a:fontRef idx="minor">
-            <a:schemeClr val="lt1"/>
-          </a:fontRef>
-        </p:style>
-        <p:txBody>
-          <a:bodyPr rtlCol="0" anchor="ctr"/>
-          <a:lstStyle/>
-          <a:p>
-            <a:pPr algn="ctr"/>
-          </a:p>
-        </p:txBody>
-      </p:sp>
-      <p:sp>
-        <p:nvSpPr>
-          <p:cNvPr id="24" name="TextBox 23"/>
-          <p:cNvSpPr txBox="1"/>
-          <p:nvPr/>
-        </p:nvSpPr>
-        <p:spPr>
-          <a:xfrm>
-            <a:off x="594360" y="5681167"/>
-            <a:ext cx="438912" cy="438912"/>
-          </a:xfrm>
-          <a:prstGeom prst="rect">
-            <a:avLst/>
-          </a:prstGeom>
-          <a:noFill/>
-        </p:spPr>
-        <p:txBody>
-          <a:bodyPr wrap="square" anchor="ctr"/>
-          <a:lstStyle/>
-          <a:p>
-            <a:pPr algn="ctr"/>
-            <a:r>
-              <a:rPr sz="1600" b="1" i="0">
-                <a:solidFill>
-                  <a:srgbClr val="FFFFFF"/>
-                </a:solidFill>
-                <a:latin typeface="Calibri"/>
-              </a:rPr>
-              <a:t>5</a:t>
-            </a:r>
-          </a:p>
-        </p:txBody>
-      </p:sp>
-      <p:sp>
-        <p:nvSpPr>
-          <p:cNvPr id="25" name="TextBox 24"/>
-          <p:cNvSpPr txBox="1"/>
-          <p:nvPr/>
-        </p:nvSpPr>
-        <p:spPr>
-          <a:xfrm>
-            <a:off x="1188720" y="5537606"/>
-            <a:ext cx="10271455" cy="744321"/>
-          </a:xfrm>
-          <a:prstGeom prst="rect">
-            <a:avLst/>
-          </a:prstGeom>
-          <a:noFill/>
-        </p:spPr>
-        <p:txBody>
-          <a:bodyPr wrap="square" anchor="ctr"/>
-          <a:lstStyle/>
-          <a:p>
-            <a:r>
-              <a:rPr sz="1500" b="1" i="0">
-                <a:solidFill>
-                  <a:srgbClr val="095292"/>
-                </a:solidFill>
-                <a:latin typeface="Calibri"/>
-              </a:rPr>
-              <a:t>10 s · La fuente</a:t>
-            </a:r>
-          </a:p>
-          <a:p>
-            <a:pPr>
-              <a:spcBef>
-                <a:spcPts val="200"/>
-              </a:spcBef>
-            </a:pPr>
-            <a:r>
-              <a:rPr sz="1300" b="0" i="0">
-                <a:solidFill>
-                  <a:srgbClr val="333333"/>
-                </a:solidFill>
-                <a:latin typeface="Calibri"/>
-              </a:rPr>
-              <a:t>De dónde salió cualquier cifra que hayan dicho.</a:t>
-            </a:r>
-          </a:p>
-        </p:txBody>
-      </p:sp>
-      <p:sp>
-        <p:nvSpPr>
-          <p:cNvPr id="26" name="TextBox 25"/>
           <p:cNvSpPr txBox="1"/>
           <p:nvPr/>
         </p:nvSpPr>
@@ -10568,7 +9347,7 @@
         <p:spPr>
           <a:xfrm>
             <a:off x="0" y="0"/>
-            <a:ext cx="12191695" cy="960120"/>
+            <a:ext cx="12191695" cy="1170432"/>
           </a:xfrm>
           <a:prstGeom prst="rect">
             <a:avLst/>
@@ -10610,7 +9389,7 @@
         </p:nvSpPr>
         <p:spPr>
           <a:xfrm>
-            <a:off x="0" y="960120"/>
+            <a:off x="0" y="1170432"/>
             <a:ext cx="12191695" cy="41148"/>
           </a:xfrm>
           <a:prstGeom prst="rect">
@@ -10654,7 +9433,7 @@
         <p:spPr>
           <a:xfrm>
             <a:off x="457200" y="164592"/>
-            <a:ext cx="11277295" cy="502920"/>
+            <a:ext cx="11277295" cy="384048"/>
           </a:xfrm>
           <a:prstGeom prst="rect">
             <a:avLst/>
@@ -10674,7 +9453,7 @@
                 </a:solidFill>
                 <a:latin typeface="Calibri"/>
               </a:rPr>
-              <a:t>Para la Clase 6</a:t>
+              <a:t>Taller de hoy: Huella del sistema</a:t>
             </a:r>
           </a:p>
         </p:txBody>
@@ -10687,8 +9466,8 @@
         </p:nvSpPr>
         <p:spPr>
           <a:xfrm>
-            <a:off x="457200" y="1170432"/>
-            <a:ext cx="11277295" cy="5230368"/>
+            <a:off x="457200" y="566928"/>
+            <a:ext cx="11277295" cy="411480"/>
           </a:xfrm>
           <a:prstGeom prst="rect">
             <a:avLst/>
@@ -10701,234 +9480,927 @@
           </a:bodyPr>
           <a:lstStyle/>
           <a:p>
-            <a:pPr>
-              <a:spcAft>
-                <a:spcPts val="800"/>
-              </a:spcAft>
-            </a:pPr>
-            <a:r>
-              <a:rPr sz="2000" b="0" i="0">
-                <a:solidFill>
-                  <a:srgbClr val="333333"/>
-                </a:solidFill>
-                <a:latin typeface="Calibri"/>
-              </a:rPr>
-              <a:t>–   </a:t>
-            </a:r>
-            <a:r>
-              <a:rPr sz="2000" b="1" i="0">
-                <a:solidFill>
-                  <a:srgbClr val="333333"/>
-                </a:solidFill>
-                <a:latin typeface="Calibri"/>
-              </a:rPr>
-              <a:t>Trabajo dirigido:</a:t>
-            </a:r>
-            <a:r>
-              <a:rPr sz="2000" b="0" i="0">
-                <a:solidFill>
-                  <a:srgbClr val="333333"/>
-                </a:solidFill>
-                <a:latin typeface="Calibri"/>
-              </a:rPr>
-              <a:t> Revisión de casos de impacto ambiental — un caso documentado de impacto ambiental de infraestructura digital, con fuente, año y alcance declarados.</a:t>
-            </a:r>
-          </a:p>
-          <a:p>
-            <a:pPr>
-              <a:spcAft>
-                <a:spcPts val="800"/>
-              </a:spcAft>
-            </a:pPr>
-            <a:r>
-              <a:rPr sz="2000" b="0" i="0">
-                <a:solidFill>
-                  <a:srgbClr val="333333"/>
-                </a:solidFill>
-                <a:latin typeface="Calibri"/>
-              </a:rPr>
-              <a:t>–   </a:t>
-            </a:r>
-            <a:r>
-              <a:rPr sz="2000" b="1" i="0">
-                <a:solidFill>
-                  <a:srgbClr val="333333"/>
-                </a:solidFill>
-                <a:latin typeface="Calibri"/>
-              </a:rPr>
-              <a:t>Trabajo independiente:</a:t>
-            </a:r>
-            <a:r>
-              <a:rPr sz="2000" b="0" i="0">
-                <a:solidFill>
-                  <a:srgbClr val="333333"/>
-                </a:solidFill>
-                <a:latin typeface="Calibri"/>
-              </a:rPr>
-              <a:t> Informe sobre sostenibilidad: una página con la huella de su sistema, las dos decisiones y el indicador, en la carpeta del equipo.</a:t>
-            </a:r>
-          </a:p>
-          <a:p>
-            <a:pPr>
-              <a:spcAft>
-                <a:spcPts val="800"/>
-              </a:spcAft>
-            </a:pPr>
-            <a:r>
-              <a:rPr sz="2000" b="0" i="0">
-                <a:solidFill>
-                  <a:srgbClr val="333333"/>
-                </a:solidFill>
-                <a:latin typeface="Calibri"/>
-              </a:rPr>
-              <a:t>–   </a:t>
-            </a:r>
-            <a:r>
-              <a:rPr sz="2000" b="1" i="0">
-                <a:solidFill>
-                  <a:srgbClr val="333333"/>
-                </a:solidFill>
-                <a:latin typeface="Calibri"/>
-              </a:rPr>
-              <a:t>Clase 6 · Análisis de problemas tecnológicos del entorno</a:t>
-            </a:r>
-            <a:r>
-              <a:rPr sz="2000" b="0" i="0">
-                <a:solidFill>
-                  <a:srgbClr val="333333"/>
-                </a:solidFill>
-                <a:latin typeface="Calibri"/>
-              </a:rPr>
-              <a:t> — </a:t>
-            </a:r>
-            <a:r>
-              <a:rPr sz="2000" b="1" i="0">
-                <a:solidFill>
-                  <a:srgbClr val="333333"/>
-                </a:solidFill>
-                <a:latin typeface="Calibri"/>
-              </a:rPr>
-              <a:t>cierra el corte 1</a:t>
-            </a:r>
-            <a:r>
-              <a:rPr sz="2000" b="0" i="0">
-                <a:solidFill>
-                  <a:srgbClr val="333333"/>
-                </a:solidFill>
-                <a:latin typeface="Calibri"/>
-              </a:rPr>
-              <a:t>: se arma la ficha del problema del proyecto del semestre y hay evaluación de corte en la plataforma del curso al final de la sesión.</a:t>
-            </a:r>
-          </a:p>
-          <a:p>
-            <a:pPr>
-              <a:spcAft>
-                <a:spcPts val="800"/>
-              </a:spcAft>
-            </a:pPr>
-            <a:r>
-              <a:rPr sz="2000" b="0" i="0">
-                <a:solidFill>
-                  <a:srgbClr val="333333"/>
-                </a:solidFill>
-                <a:latin typeface="Calibri"/>
-              </a:rPr>
-              <a:t>–   </a:t>
-            </a:r>
-            <a:r>
-              <a:rPr sz="2000" b="1" i="0">
-                <a:solidFill>
-                  <a:srgbClr val="333333"/>
-                </a:solidFill>
-                <a:latin typeface="Calibri"/>
-              </a:rPr>
-              <a:t>Aviso:</a:t>
-            </a:r>
-            <a:r>
-              <a:rPr sz="2000" b="0" i="0">
-                <a:solidFill>
-                  <a:srgbClr val="333333"/>
-                </a:solidFill>
-                <a:latin typeface="Calibri"/>
-              </a:rPr>
-              <a:t> La sesión 6 cierra el corte. Traigan </a:t>
-            </a:r>
-            <a:r>
-              <a:rPr sz="2000" b="1" i="0">
-                <a:solidFill>
-                  <a:srgbClr val="333333"/>
-                </a:solidFill>
-                <a:latin typeface="Calibri"/>
-              </a:rPr>
-              <a:t>el problema de la sesión 1, la ficha de sistema de la sesión 3, la regla ética de la sesión 4 y el indicador de hoy</a:t>
-            </a:r>
-            <a:r>
-              <a:rPr sz="2000" b="0" i="0">
-                <a:solidFill>
-                  <a:srgbClr val="333333"/>
-                </a:solidFill>
-                <a:latin typeface="Calibri"/>
-              </a:rPr>
-              <a:t>: la ficha del problema se arma con esas cuatro cosas y se entrega en clase. Y lean el documento </a:t>
-            </a:r>
-            <a:r>
-              <a:rPr sz="2000" b="1" i="0">
-                <a:solidFill>
-                  <a:srgbClr val="333333"/>
-                </a:solidFill>
-                <a:latin typeface="Calibri"/>
-              </a:rPr>
-              <a:t>«Evaluación del Corte 1 — cómo prepararse»</a:t>
-            </a:r>
-            <a:r>
-              <a:rPr sz="2000" b="0" i="0">
-                <a:solidFill>
-                  <a:srgbClr val="333333"/>
-                </a:solidFill>
-                <a:latin typeface="Calibri"/>
-              </a:rPr>
-              <a:t>: trae qué repasar de cada sesión para los 20 minutos de evaluación del final.</a:t>
-            </a:r>
-          </a:p>
-          <a:p>
-            <a:pPr>
-              <a:spcAft>
-                <a:spcPts val="800"/>
-              </a:spcAft>
-            </a:pPr>
-            <a:r>
-              <a:rPr sz="2000" b="0" i="0">
-                <a:solidFill>
-                  <a:srgbClr val="333333"/>
-                </a:solidFill>
-                <a:latin typeface="Calibri"/>
-              </a:rPr>
-              <a:t>–   </a:t>
-            </a:r>
-            <a:r>
-              <a:rPr sz="2000" b="1" i="0">
-                <a:solidFill>
-                  <a:srgbClr val="333333"/>
-                </a:solidFill>
-                <a:latin typeface="Calibri"/>
-              </a:rPr>
-              <a:t>Antes de salir:</a:t>
-            </a:r>
-            <a:r>
-              <a:rPr sz="2000" b="0" i="0">
-                <a:solidFill>
-                  <a:srgbClr val="333333"/>
-                </a:solidFill>
-                <a:latin typeface="Calibri"/>
-              </a:rPr>
-              <a:t> el enlace del documento del equipo en el chat, con permiso de lectura para el docente, y el nombre del vocero de hoy.</a:t>
-            </a:r>
-          </a:p>
-        </p:txBody>
-      </p:sp>
-      <p:sp>
-        <p:nvSpPr>
-          <p:cNvPr id="6" name="TextBox 5"/>
+            <a:r>
+              <a:rPr sz="1400" b="0" i="0">
+                <a:solidFill>
+                  <a:srgbClr val="B8D8EE"/>
+                </a:solidFill>
+                <a:latin typeface="Calibri"/>
+              </a:rPr>
+              <a:t>17 min en equipos · cada equipo, el sistema de su propio proyecto · diagrama de huella + 2 decisiones + 1 indicador</a:t>
+            </a:r>
+          </a:p>
+        </p:txBody>
+      </p:sp>
+      <p:sp>
+        <p:nvSpPr>
+          <p:cNvPr id="6" name="Rounded Rectangle 5"/>
+          <p:cNvSpPr/>
+          <p:nvPr/>
+        </p:nvSpPr>
+        <p:spPr>
+          <a:xfrm>
+            <a:off x="457200" y="1472184"/>
+            <a:ext cx="11277295" cy="566928"/>
+          </a:xfrm>
+          <a:prstGeom prst="roundRect">
+            <a:avLst>
+              <a:gd name="adj" fmla="val 12000"/>
+            </a:avLst>
+          </a:prstGeom>
+          <a:solidFill>
+            <a:srgbClr val="F2F2F2"/>
+          </a:solidFill>
+          <a:ln>
+            <a:noFill/>
+          </a:ln>
+        </p:spPr>
+        <p:style>
+          <a:lnRef idx="1">
+            <a:schemeClr val="accent1"/>
+          </a:lnRef>
+          <a:fillRef idx="3">
+            <a:schemeClr val="accent1"/>
+          </a:fillRef>
+          <a:effectRef idx="2">
+            <a:schemeClr val="accent1"/>
+          </a:effectRef>
+          <a:fontRef idx="minor">
+            <a:schemeClr val="lt1"/>
+          </a:fontRef>
+        </p:style>
+        <p:txBody>
+          <a:bodyPr rtlCol="0" anchor="ctr"/>
+          <a:lstStyle/>
+          <a:p>
+            <a:pPr algn="ctr"/>
+          </a:p>
+        </p:txBody>
+      </p:sp>
+      <p:sp>
+        <p:nvSpPr>
+          <p:cNvPr id="7" name="Rectangle 6"/>
+          <p:cNvSpPr/>
+          <p:nvPr/>
+        </p:nvSpPr>
+        <p:spPr>
+          <a:xfrm>
+            <a:off x="640080" y="1618487"/>
+            <a:ext cx="274320" cy="274320"/>
+          </a:xfrm>
+          <a:prstGeom prst="rect">
+            <a:avLst/>
+          </a:prstGeom>
+          <a:solidFill>
+            <a:srgbClr val="FFFFFF"/>
+          </a:solidFill>
+          <a:ln>
+            <a:solidFill>
+              <a:srgbClr val="333333"/>
+            </a:solidFill>
+          </a:ln>
+        </p:spPr>
+        <p:style>
+          <a:lnRef idx="1">
+            <a:schemeClr val="accent1"/>
+          </a:lnRef>
+          <a:fillRef idx="3">
+            <a:schemeClr val="accent1"/>
+          </a:fillRef>
+          <a:effectRef idx="2">
+            <a:schemeClr val="accent1"/>
+          </a:effectRef>
+          <a:fontRef idx="minor">
+            <a:schemeClr val="lt1"/>
+          </a:fontRef>
+        </p:style>
+        <p:txBody>
+          <a:bodyPr rtlCol="0" anchor="ctr"/>
+          <a:lstStyle/>
+          <a:p>
+            <a:pPr algn="ctr"/>
+          </a:p>
+        </p:txBody>
+      </p:sp>
+      <p:sp>
+        <p:nvSpPr>
+          <p:cNvPr id="8" name="Rectangle 7"/>
+          <p:cNvSpPr/>
+          <p:nvPr/>
+        </p:nvSpPr>
+        <p:spPr>
+          <a:xfrm>
+            <a:off x="640080" y="1618487"/>
+            <a:ext cx="73152" cy="274320"/>
+          </a:xfrm>
+          <a:prstGeom prst="rect">
+            <a:avLst/>
+          </a:prstGeom>
+          <a:solidFill>
+            <a:srgbClr val="269CCB"/>
+          </a:solidFill>
+          <a:ln>
+            <a:noFill/>
+          </a:ln>
+        </p:spPr>
+        <p:style>
+          <a:lnRef idx="1">
+            <a:schemeClr val="accent1"/>
+          </a:lnRef>
+          <a:fillRef idx="3">
+            <a:schemeClr val="accent1"/>
+          </a:fillRef>
+          <a:effectRef idx="2">
+            <a:schemeClr val="accent1"/>
+          </a:effectRef>
+          <a:fontRef idx="minor">
+            <a:schemeClr val="lt1"/>
+          </a:fontRef>
+        </p:style>
+        <p:txBody>
+          <a:bodyPr rtlCol="0" anchor="ctr"/>
+          <a:lstStyle/>
+          <a:p>
+            <a:pPr algn="ctr"/>
+          </a:p>
+        </p:txBody>
+      </p:sp>
+      <p:sp>
+        <p:nvSpPr>
+          <p:cNvPr id="9" name="TextBox 8"/>
+          <p:cNvSpPr txBox="1"/>
+          <p:nvPr/>
+        </p:nvSpPr>
+        <p:spPr>
+          <a:xfrm>
+            <a:off x="1097280" y="1563624"/>
+            <a:ext cx="10362895" cy="402336"/>
+          </a:xfrm>
+          <a:prstGeom prst="rect">
+            <a:avLst/>
+          </a:prstGeom>
+          <a:noFill/>
+        </p:spPr>
+        <p:txBody>
+          <a:bodyPr wrap="square" anchor="ctr"/>
+          <a:lstStyle/>
+          <a:p>
+            <a:r>
+              <a:rPr sz="1500" b="1" i="0">
+                <a:solidFill>
+                  <a:srgbClr val="333333"/>
+                </a:solidFill>
+                <a:latin typeface="Calibri"/>
+              </a:rPr>
+              <a:t>EL RECORRIDO DIBUJADO</a:t>
+            </a:r>
+            <a:r>
+              <a:rPr sz="1500" b="0" i="0">
+                <a:solidFill>
+                  <a:srgbClr val="333333"/>
+                </a:solidFill>
+                <a:latin typeface="Calibri"/>
+              </a:rPr>
+              <a:t> — El camino completo con flechas: dispositivo del usuario → red → servidor → almacenamiento, y todo lo que se prende para que el sistema funcione.</a:t>
+            </a:r>
+          </a:p>
+        </p:txBody>
+      </p:sp>
+      <p:sp>
+        <p:nvSpPr>
+          <p:cNvPr id="10" name="Rounded Rectangle 9"/>
+          <p:cNvSpPr/>
+          <p:nvPr/>
+        </p:nvSpPr>
+        <p:spPr>
+          <a:xfrm>
+            <a:off x="457200" y="2148839"/>
+            <a:ext cx="11277295" cy="566928"/>
+          </a:xfrm>
+          <a:prstGeom prst="roundRect">
+            <a:avLst>
+              <a:gd name="adj" fmla="val 12000"/>
+            </a:avLst>
+          </a:prstGeom>
+          <a:solidFill>
+            <a:srgbClr val="F2F2F2"/>
+          </a:solidFill>
+          <a:ln>
+            <a:noFill/>
+          </a:ln>
+        </p:spPr>
+        <p:style>
+          <a:lnRef idx="1">
+            <a:schemeClr val="accent1"/>
+          </a:lnRef>
+          <a:fillRef idx="3">
+            <a:schemeClr val="accent1"/>
+          </a:fillRef>
+          <a:effectRef idx="2">
+            <a:schemeClr val="accent1"/>
+          </a:effectRef>
+          <a:fontRef idx="minor">
+            <a:schemeClr val="lt1"/>
+          </a:fontRef>
+        </p:style>
+        <p:txBody>
+          <a:bodyPr rtlCol="0" anchor="ctr"/>
+          <a:lstStyle/>
+          <a:p>
+            <a:pPr algn="ctr"/>
+          </a:p>
+        </p:txBody>
+      </p:sp>
+      <p:sp>
+        <p:nvSpPr>
+          <p:cNvPr id="11" name="Rectangle 10"/>
+          <p:cNvSpPr/>
+          <p:nvPr/>
+        </p:nvSpPr>
+        <p:spPr>
+          <a:xfrm>
+            <a:off x="640080" y="2295144"/>
+            <a:ext cx="274320" cy="274320"/>
+          </a:xfrm>
+          <a:prstGeom prst="rect">
+            <a:avLst/>
+          </a:prstGeom>
+          <a:solidFill>
+            <a:srgbClr val="FFFFFF"/>
+          </a:solidFill>
+          <a:ln>
+            <a:solidFill>
+              <a:srgbClr val="333333"/>
+            </a:solidFill>
+          </a:ln>
+        </p:spPr>
+        <p:style>
+          <a:lnRef idx="1">
+            <a:schemeClr val="accent1"/>
+          </a:lnRef>
+          <a:fillRef idx="3">
+            <a:schemeClr val="accent1"/>
+          </a:fillRef>
+          <a:effectRef idx="2">
+            <a:schemeClr val="accent1"/>
+          </a:effectRef>
+          <a:fontRef idx="minor">
+            <a:schemeClr val="lt1"/>
+          </a:fontRef>
+        </p:style>
+        <p:txBody>
+          <a:bodyPr rtlCol="0" anchor="ctr"/>
+          <a:lstStyle/>
+          <a:p>
+            <a:pPr algn="ctr"/>
+          </a:p>
+        </p:txBody>
+      </p:sp>
+      <p:sp>
+        <p:nvSpPr>
+          <p:cNvPr id="12" name="Rectangle 11"/>
+          <p:cNvSpPr/>
+          <p:nvPr/>
+        </p:nvSpPr>
+        <p:spPr>
+          <a:xfrm>
+            <a:off x="640080" y="2295144"/>
+            <a:ext cx="73152" cy="274320"/>
+          </a:xfrm>
+          <a:prstGeom prst="rect">
+            <a:avLst/>
+          </a:prstGeom>
+          <a:solidFill>
+            <a:srgbClr val="269CCB"/>
+          </a:solidFill>
+          <a:ln>
+            <a:noFill/>
+          </a:ln>
+        </p:spPr>
+        <p:style>
+          <a:lnRef idx="1">
+            <a:schemeClr val="accent1"/>
+          </a:lnRef>
+          <a:fillRef idx="3">
+            <a:schemeClr val="accent1"/>
+          </a:fillRef>
+          <a:effectRef idx="2">
+            <a:schemeClr val="accent1"/>
+          </a:effectRef>
+          <a:fontRef idx="minor">
+            <a:schemeClr val="lt1"/>
+          </a:fontRef>
+        </p:style>
+        <p:txBody>
+          <a:bodyPr rtlCol="0" anchor="ctr"/>
+          <a:lstStyle/>
+          <a:p>
+            <a:pPr algn="ctr"/>
+          </a:p>
+        </p:txBody>
+      </p:sp>
+      <p:sp>
+        <p:nvSpPr>
+          <p:cNvPr id="13" name="TextBox 12"/>
+          <p:cNvSpPr txBox="1"/>
+          <p:nvPr/>
+        </p:nvSpPr>
+        <p:spPr>
+          <a:xfrm>
+            <a:off x="1097280" y="2240279"/>
+            <a:ext cx="10362895" cy="402336"/>
+          </a:xfrm>
+          <a:prstGeom prst="rect">
+            <a:avLst/>
+          </a:prstGeom>
+          <a:noFill/>
+        </p:spPr>
+        <p:txBody>
+          <a:bodyPr wrap="square" anchor="ctr"/>
+          <a:lstStyle/>
+          <a:p>
+            <a:r>
+              <a:rPr sz="1500" b="1" i="0">
+                <a:solidFill>
+                  <a:srgbClr val="333333"/>
+                </a:solidFill>
+                <a:latin typeface="Calibri"/>
+              </a:rPr>
+              <a:t>LO QUE SE REPITE</a:t>
+            </a:r>
+            <a:r>
+              <a:rPr sz="1500" b="0" i="0">
+                <a:solidFill>
+                  <a:srgbClr val="333333"/>
+                </a:solidFill>
+                <a:latin typeface="Calibri"/>
+              </a:rPr>
+              <a:t> — Qué operación ocurre </a:t>
+            </a:r>
+            <a:r>
+              <a:rPr sz="1500" b="1" i="0">
+                <a:solidFill>
+                  <a:srgbClr val="333333"/>
+                </a:solidFill>
+                <a:latin typeface="Calibri"/>
+              </a:rPr>
+              <a:t>muchas veces al día</a:t>
+            </a:r>
+            <a:r>
+              <a:rPr sz="1500" b="0" i="0">
+                <a:solidFill>
+                  <a:srgbClr val="333333"/>
+                </a:solidFill>
+                <a:latin typeface="Calibri"/>
+              </a:rPr>
+              <a:t> en su sistema, y una estimación gruesa de cuántas veces. Lo que pasa una vez no mueve nada.</a:t>
+            </a:r>
+          </a:p>
+        </p:txBody>
+      </p:sp>
+      <p:sp>
+        <p:nvSpPr>
+          <p:cNvPr id="14" name="Rounded Rectangle 13"/>
+          <p:cNvSpPr/>
+          <p:nvPr/>
+        </p:nvSpPr>
+        <p:spPr>
+          <a:xfrm>
+            <a:off x="457200" y="2825496"/>
+            <a:ext cx="11277295" cy="566928"/>
+          </a:xfrm>
+          <a:prstGeom prst="roundRect">
+            <a:avLst>
+              <a:gd name="adj" fmla="val 12000"/>
+            </a:avLst>
+          </a:prstGeom>
+          <a:solidFill>
+            <a:srgbClr val="F2F2F2"/>
+          </a:solidFill>
+          <a:ln>
+            <a:noFill/>
+          </a:ln>
+        </p:spPr>
+        <p:style>
+          <a:lnRef idx="1">
+            <a:schemeClr val="accent1"/>
+          </a:lnRef>
+          <a:fillRef idx="3">
+            <a:schemeClr val="accent1"/>
+          </a:fillRef>
+          <a:effectRef idx="2">
+            <a:schemeClr val="accent1"/>
+          </a:effectRef>
+          <a:fontRef idx="minor">
+            <a:schemeClr val="lt1"/>
+          </a:fontRef>
+        </p:style>
+        <p:txBody>
+          <a:bodyPr rtlCol="0" anchor="ctr"/>
+          <a:lstStyle/>
+          <a:p>
+            <a:pPr algn="ctr"/>
+          </a:p>
+        </p:txBody>
+      </p:sp>
+      <p:sp>
+        <p:nvSpPr>
+          <p:cNvPr id="15" name="Rectangle 14"/>
+          <p:cNvSpPr/>
+          <p:nvPr/>
+        </p:nvSpPr>
+        <p:spPr>
+          <a:xfrm>
+            <a:off x="640080" y="2971800"/>
+            <a:ext cx="274320" cy="274320"/>
+          </a:xfrm>
+          <a:prstGeom prst="rect">
+            <a:avLst/>
+          </a:prstGeom>
+          <a:solidFill>
+            <a:srgbClr val="FFFFFF"/>
+          </a:solidFill>
+          <a:ln>
+            <a:solidFill>
+              <a:srgbClr val="333333"/>
+            </a:solidFill>
+          </a:ln>
+        </p:spPr>
+        <p:style>
+          <a:lnRef idx="1">
+            <a:schemeClr val="accent1"/>
+          </a:lnRef>
+          <a:fillRef idx="3">
+            <a:schemeClr val="accent1"/>
+          </a:fillRef>
+          <a:effectRef idx="2">
+            <a:schemeClr val="accent1"/>
+          </a:effectRef>
+          <a:fontRef idx="minor">
+            <a:schemeClr val="lt1"/>
+          </a:fontRef>
+        </p:style>
+        <p:txBody>
+          <a:bodyPr rtlCol="0" anchor="ctr"/>
+          <a:lstStyle/>
+          <a:p>
+            <a:pPr algn="ctr"/>
+          </a:p>
+        </p:txBody>
+      </p:sp>
+      <p:sp>
+        <p:nvSpPr>
+          <p:cNvPr id="16" name="Rectangle 15"/>
+          <p:cNvSpPr/>
+          <p:nvPr/>
+        </p:nvSpPr>
+        <p:spPr>
+          <a:xfrm>
+            <a:off x="640080" y="2971800"/>
+            <a:ext cx="73152" cy="274320"/>
+          </a:xfrm>
+          <a:prstGeom prst="rect">
+            <a:avLst/>
+          </a:prstGeom>
+          <a:solidFill>
+            <a:srgbClr val="269CCB"/>
+          </a:solidFill>
+          <a:ln>
+            <a:noFill/>
+          </a:ln>
+        </p:spPr>
+        <p:style>
+          <a:lnRef idx="1">
+            <a:schemeClr val="accent1"/>
+          </a:lnRef>
+          <a:fillRef idx="3">
+            <a:schemeClr val="accent1"/>
+          </a:fillRef>
+          <a:effectRef idx="2">
+            <a:schemeClr val="accent1"/>
+          </a:effectRef>
+          <a:fontRef idx="minor">
+            <a:schemeClr val="lt1"/>
+          </a:fontRef>
+        </p:style>
+        <p:txBody>
+          <a:bodyPr rtlCol="0" anchor="ctr"/>
+          <a:lstStyle/>
+          <a:p>
+            <a:pPr algn="ctr"/>
+          </a:p>
+        </p:txBody>
+      </p:sp>
+      <p:sp>
+        <p:nvSpPr>
+          <p:cNvPr id="17" name="TextBox 16"/>
+          <p:cNvSpPr txBox="1"/>
+          <p:nvPr/>
+        </p:nvSpPr>
+        <p:spPr>
+          <a:xfrm>
+            <a:off x="1097280" y="2916936"/>
+            <a:ext cx="10362895" cy="402336"/>
+          </a:xfrm>
+          <a:prstGeom prst="rect">
+            <a:avLst/>
+          </a:prstGeom>
+          <a:noFill/>
+        </p:spPr>
+        <p:txBody>
+          <a:bodyPr wrap="square" anchor="ctr"/>
+          <a:lstStyle/>
+          <a:p>
+            <a:r>
+              <a:rPr sz="1500" b="1" i="0">
+                <a:solidFill>
+                  <a:srgbClr val="333333"/>
+                </a:solidFill>
+                <a:latin typeface="Calibri"/>
+              </a:rPr>
+              <a:t>LA ETAPA QUE MÁS PESA</a:t>
+            </a:r>
+            <a:r>
+              <a:rPr sz="1500" b="0" i="0">
+                <a:solidFill>
+                  <a:srgbClr val="333333"/>
+                </a:solidFill>
+                <a:latin typeface="Calibri"/>
+              </a:rPr>
+              <a:t> — Una sola etapa, con la razón. No hace falta un cálculo exacto: hace falta saber dónde apretar.</a:t>
+            </a:r>
+          </a:p>
+        </p:txBody>
+      </p:sp>
+      <p:sp>
+        <p:nvSpPr>
+          <p:cNvPr id="18" name="Rounded Rectangle 17"/>
+          <p:cNvSpPr/>
+          <p:nvPr/>
+        </p:nvSpPr>
+        <p:spPr>
+          <a:xfrm>
+            <a:off x="457200" y="3502152"/>
+            <a:ext cx="11277295" cy="566928"/>
+          </a:xfrm>
+          <a:prstGeom prst="roundRect">
+            <a:avLst>
+              <a:gd name="adj" fmla="val 12000"/>
+            </a:avLst>
+          </a:prstGeom>
+          <a:solidFill>
+            <a:srgbClr val="F2F2F2"/>
+          </a:solidFill>
+          <a:ln>
+            <a:noFill/>
+          </a:ln>
+        </p:spPr>
+        <p:style>
+          <a:lnRef idx="1">
+            <a:schemeClr val="accent1"/>
+          </a:lnRef>
+          <a:fillRef idx="3">
+            <a:schemeClr val="accent1"/>
+          </a:fillRef>
+          <a:effectRef idx="2">
+            <a:schemeClr val="accent1"/>
+          </a:effectRef>
+          <a:fontRef idx="minor">
+            <a:schemeClr val="lt1"/>
+          </a:fontRef>
+        </p:style>
+        <p:txBody>
+          <a:bodyPr rtlCol="0" anchor="ctr"/>
+          <a:lstStyle/>
+          <a:p>
+            <a:pPr algn="ctr"/>
+          </a:p>
+        </p:txBody>
+      </p:sp>
+      <p:sp>
+        <p:nvSpPr>
+          <p:cNvPr id="19" name="Rectangle 18"/>
+          <p:cNvSpPr/>
+          <p:nvPr/>
+        </p:nvSpPr>
+        <p:spPr>
+          <a:xfrm>
+            <a:off x="640080" y="3648456"/>
+            <a:ext cx="274320" cy="274320"/>
+          </a:xfrm>
+          <a:prstGeom prst="rect">
+            <a:avLst/>
+          </a:prstGeom>
+          <a:solidFill>
+            <a:srgbClr val="FFFFFF"/>
+          </a:solidFill>
+          <a:ln>
+            <a:solidFill>
+              <a:srgbClr val="333333"/>
+            </a:solidFill>
+          </a:ln>
+        </p:spPr>
+        <p:style>
+          <a:lnRef idx="1">
+            <a:schemeClr val="accent1"/>
+          </a:lnRef>
+          <a:fillRef idx="3">
+            <a:schemeClr val="accent1"/>
+          </a:fillRef>
+          <a:effectRef idx="2">
+            <a:schemeClr val="accent1"/>
+          </a:effectRef>
+          <a:fontRef idx="minor">
+            <a:schemeClr val="lt1"/>
+          </a:fontRef>
+        </p:style>
+        <p:txBody>
+          <a:bodyPr rtlCol="0" anchor="ctr"/>
+          <a:lstStyle/>
+          <a:p>
+            <a:pPr algn="ctr"/>
+          </a:p>
+        </p:txBody>
+      </p:sp>
+      <p:sp>
+        <p:nvSpPr>
+          <p:cNvPr id="20" name="Rectangle 19"/>
+          <p:cNvSpPr/>
+          <p:nvPr/>
+        </p:nvSpPr>
+        <p:spPr>
+          <a:xfrm>
+            <a:off x="640080" y="3648456"/>
+            <a:ext cx="73152" cy="274320"/>
+          </a:xfrm>
+          <a:prstGeom prst="rect">
+            <a:avLst/>
+          </a:prstGeom>
+          <a:solidFill>
+            <a:srgbClr val="269CCB"/>
+          </a:solidFill>
+          <a:ln>
+            <a:noFill/>
+          </a:ln>
+        </p:spPr>
+        <p:style>
+          <a:lnRef idx="1">
+            <a:schemeClr val="accent1"/>
+          </a:lnRef>
+          <a:fillRef idx="3">
+            <a:schemeClr val="accent1"/>
+          </a:fillRef>
+          <a:effectRef idx="2">
+            <a:schemeClr val="accent1"/>
+          </a:effectRef>
+          <a:fontRef idx="minor">
+            <a:schemeClr val="lt1"/>
+          </a:fontRef>
+        </p:style>
+        <p:txBody>
+          <a:bodyPr rtlCol="0" anchor="ctr"/>
+          <a:lstStyle/>
+          <a:p>
+            <a:pPr algn="ctr"/>
+          </a:p>
+        </p:txBody>
+      </p:sp>
+      <p:sp>
+        <p:nvSpPr>
+          <p:cNvPr id="21" name="TextBox 20"/>
+          <p:cNvSpPr txBox="1"/>
+          <p:nvPr/>
+        </p:nvSpPr>
+        <p:spPr>
+          <a:xfrm>
+            <a:off x="1097280" y="3593592"/>
+            <a:ext cx="10362895" cy="402336"/>
+          </a:xfrm>
+          <a:prstGeom prst="rect">
+            <a:avLst/>
+          </a:prstGeom>
+          <a:noFill/>
+        </p:spPr>
+        <p:txBody>
+          <a:bodyPr wrap="square" anchor="ctr"/>
+          <a:lstStyle/>
+          <a:p>
+            <a:r>
+              <a:rPr sz="1500" b="1" i="0">
+                <a:solidFill>
+                  <a:srgbClr val="333333"/>
+                </a:solidFill>
+                <a:latin typeface="Calibri"/>
+              </a:rPr>
+              <a:t>DOS DECISIONES DE DISEÑO</a:t>
+            </a:r>
+            <a:r>
+              <a:rPr sz="1500" b="0" i="0">
+                <a:solidFill>
+                  <a:srgbClr val="333333"/>
+                </a:solidFill>
+                <a:latin typeface="Calibri"/>
+              </a:rPr>
+              <a:t> — Dos cosas que </a:t>
+            </a:r>
+            <a:r>
+              <a:rPr sz="1500" b="1" i="0">
+                <a:solidFill>
+                  <a:srgbClr val="333333"/>
+                </a:solidFill>
+                <a:latin typeface="Calibri"/>
+              </a:rPr>
+              <a:t>ustedes</a:t>
+            </a:r>
+            <a:r>
+              <a:rPr sz="1500" b="0" i="0">
+                <a:solidFill>
+                  <a:srgbClr val="333333"/>
+                </a:solidFill>
+                <a:latin typeface="Calibri"/>
+              </a:rPr>
+              <a:t> pueden decidir en su sistema para bajar esa etapa. De diseño, no de comportamiento del usuario.</a:t>
+            </a:r>
+          </a:p>
+        </p:txBody>
+      </p:sp>
+      <p:sp>
+        <p:nvSpPr>
+          <p:cNvPr id="22" name="Rounded Rectangle 21"/>
+          <p:cNvSpPr/>
+          <p:nvPr/>
+        </p:nvSpPr>
+        <p:spPr>
+          <a:xfrm>
+            <a:off x="457200" y="4178808"/>
+            <a:ext cx="11277295" cy="566928"/>
+          </a:xfrm>
+          <a:prstGeom prst="roundRect">
+            <a:avLst>
+              <a:gd name="adj" fmla="val 12000"/>
+            </a:avLst>
+          </a:prstGeom>
+          <a:solidFill>
+            <a:srgbClr val="F2F2F2"/>
+          </a:solidFill>
+          <a:ln>
+            <a:noFill/>
+          </a:ln>
+        </p:spPr>
+        <p:style>
+          <a:lnRef idx="1">
+            <a:schemeClr val="accent1"/>
+          </a:lnRef>
+          <a:fillRef idx="3">
+            <a:schemeClr val="accent1"/>
+          </a:fillRef>
+          <a:effectRef idx="2">
+            <a:schemeClr val="accent1"/>
+          </a:effectRef>
+          <a:fontRef idx="minor">
+            <a:schemeClr val="lt1"/>
+          </a:fontRef>
+        </p:style>
+        <p:txBody>
+          <a:bodyPr rtlCol="0" anchor="ctr"/>
+          <a:lstStyle/>
+          <a:p>
+            <a:pPr algn="ctr"/>
+          </a:p>
+        </p:txBody>
+      </p:sp>
+      <p:sp>
+        <p:nvSpPr>
+          <p:cNvPr id="23" name="Rectangle 22"/>
+          <p:cNvSpPr/>
+          <p:nvPr/>
+        </p:nvSpPr>
+        <p:spPr>
+          <a:xfrm>
+            <a:off x="640080" y="4325112"/>
+            <a:ext cx="274320" cy="274320"/>
+          </a:xfrm>
+          <a:prstGeom prst="rect">
+            <a:avLst/>
+          </a:prstGeom>
+          <a:solidFill>
+            <a:srgbClr val="FFFFFF"/>
+          </a:solidFill>
+          <a:ln>
+            <a:solidFill>
+              <a:srgbClr val="333333"/>
+            </a:solidFill>
+          </a:ln>
+        </p:spPr>
+        <p:style>
+          <a:lnRef idx="1">
+            <a:schemeClr val="accent1"/>
+          </a:lnRef>
+          <a:fillRef idx="3">
+            <a:schemeClr val="accent1"/>
+          </a:fillRef>
+          <a:effectRef idx="2">
+            <a:schemeClr val="accent1"/>
+          </a:effectRef>
+          <a:fontRef idx="minor">
+            <a:schemeClr val="lt1"/>
+          </a:fontRef>
+        </p:style>
+        <p:txBody>
+          <a:bodyPr rtlCol="0" anchor="ctr"/>
+          <a:lstStyle/>
+          <a:p>
+            <a:pPr algn="ctr"/>
+          </a:p>
+        </p:txBody>
+      </p:sp>
+      <p:sp>
+        <p:nvSpPr>
+          <p:cNvPr id="24" name="Rectangle 23"/>
+          <p:cNvSpPr/>
+          <p:nvPr/>
+        </p:nvSpPr>
+        <p:spPr>
+          <a:xfrm>
+            <a:off x="640080" y="4325112"/>
+            <a:ext cx="73152" cy="274320"/>
+          </a:xfrm>
+          <a:prstGeom prst="rect">
+            <a:avLst/>
+          </a:prstGeom>
+          <a:solidFill>
+            <a:srgbClr val="269CCB"/>
+          </a:solidFill>
+          <a:ln>
+            <a:noFill/>
+          </a:ln>
+        </p:spPr>
+        <p:style>
+          <a:lnRef idx="1">
+            <a:schemeClr val="accent1"/>
+          </a:lnRef>
+          <a:fillRef idx="3">
+            <a:schemeClr val="accent1"/>
+          </a:fillRef>
+          <a:effectRef idx="2">
+            <a:schemeClr val="accent1"/>
+          </a:effectRef>
+          <a:fontRef idx="minor">
+            <a:schemeClr val="lt1"/>
+          </a:fontRef>
+        </p:style>
+        <p:txBody>
+          <a:bodyPr rtlCol="0" anchor="ctr"/>
+          <a:lstStyle/>
+          <a:p>
+            <a:pPr algn="ctr"/>
+          </a:p>
+        </p:txBody>
+      </p:sp>
+      <p:sp>
+        <p:nvSpPr>
+          <p:cNvPr id="25" name="TextBox 24"/>
+          <p:cNvSpPr txBox="1"/>
+          <p:nvPr/>
+        </p:nvSpPr>
+        <p:spPr>
+          <a:xfrm>
+            <a:off x="1097280" y="4270248"/>
+            <a:ext cx="10362895" cy="402336"/>
+          </a:xfrm>
+          <a:prstGeom prst="rect">
+            <a:avLst/>
+          </a:prstGeom>
+          <a:noFill/>
+        </p:spPr>
+        <p:txBody>
+          <a:bodyPr wrap="square" anchor="ctr"/>
+          <a:lstStyle/>
+          <a:p>
+            <a:r>
+              <a:rPr sz="1500" b="1" i="0">
+                <a:solidFill>
+                  <a:srgbClr val="333333"/>
+                </a:solidFill>
+                <a:latin typeface="Calibri"/>
+              </a:rPr>
+              <a:t>EL INDICADOR</a:t>
+            </a:r>
+            <a:r>
+              <a:rPr sz="1500" b="0" i="0">
+                <a:solidFill>
+                  <a:srgbClr val="333333"/>
+                </a:solidFill>
+                <a:latin typeface="Calibri"/>
+              </a:rPr>
+              <a:t> — Un número que se pueda medir al final del semestre para saber si la decisión funcionó. Con su unidad.</a:t>
+            </a:r>
+          </a:p>
+        </p:txBody>
+      </p:sp>
+      <p:sp>
+        <p:nvSpPr>
+          <p:cNvPr id="26" name="TextBox 25"/>
           <p:cNvSpPr txBox="1"/>
           <p:nvPr/>
         </p:nvSpPr>
@@ -10970,6 +10442,1504 @@
 </file>
 
 <file path=ppt/slides/slide25.xml><?xml version="1.0" encoding="utf-8"?>
+<p:sld xmlns:a="http://schemas.openxmlformats.org/drawingml/2006/main" xmlns:p="http://schemas.openxmlformats.org/presentationml/2006/main" xmlns:r="http://schemas.openxmlformats.org/officeDocument/2006/relationships">
+  <p:cSld>
+    <p:bg>
+      <p:bgPr>
+        <a:solidFill>
+          <a:srgbClr val="FFFFFF"/>
+        </a:solidFill>
+        <a:effectLst/>
+      </p:bgPr>
+    </p:bg>
+    <p:spTree>
+      <p:nvGrpSpPr>
+        <p:cNvPr id="1" name=""/>
+        <p:cNvGrpSpPr/>
+        <p:nvPr/>
+      </p:nvGrpSpPr>
+      <p:grpSpPr/>
+      <p:sp>
+        <p:nvSpPr>
+          <p:cNvPr id="2" name="Rectangle 1"/>
+          <p:cNvSpPr/>
+          <p:nvPr/>
+        </p:nvSpPr>
+        <p:spPr>
+          <a:xfrm>
+            <a:off x="0" y="0"/>
+            <a:ext cx="12191695" cy="1170432"/>
+          </a:xfrm>
+          <a:prstGeom prst="rect">
+            <a:avLst/>
+          </a:prstGeom>
+          <a:solidFill>
+            <a:srgbClr val="095292"/>
+          </a:solidFill>
+          <a:ln>
+            <a:noFill/>
+          </a:ln>
+        </p:spPr>
+        <p:style>
+          <a:lnRef idx="1">
+            <a:schemeClr val="accent1"/>
+          </a:lnRef>
+          <a:fillRef idx="3">
+            <a:schemeClr val="accent1"/>
+          </a:fillRef>
+          <a:effectRef idx="2">
+            <a:schemeClr val="accent1"/>
+          </a:effectRef>
+          <a:fontRef idx="minor">
+            <a:schemeClr val="lt1"/>
+          </a:fontRef>
+        </p:style>
+        <p:txBody>
+          <a:bodyPr rtlCol="0" anchor="ctr"/>
+          <a:lstStyle/>
+          <a:p>
+            <a:pPr algn="ctr"/>
+          </a:p>
+        </p:txBody>
+      </p:sp>
+      <p:sp>
+        <p:nvSpPr>
+          <p:cNvPr id="3" name="Rectangle 2"/>
+          <p:cNvSpPr/>
+          <p:nvPr/>
+        </p:nvSpPr>
+        <p:spPr>
+          <a:xfrm>
+            <a:off x="0" y="1170432"/>
+            <a:ext cx="12191695" cy="41148"/>
+          </a:xfrm>
+          <a:prstGeom prst="rect">
+            <a:avLst/>
+          </a:prstGeom>
+          <a:solidFill>
+            <a:srgbClr val="FFD000"/>
+          </a:solidFill>
+          <a:ln>
+            <a:noFill/>
+          </a:ln>
+        </p:spPr>
+        <p:style>
+          <a:lnRef idx="1">
+            <a:schemeClr val="accent1"/>
+          </a:lnRef>
+          <a:fillRef idx="3">
+            <a:schemeClr val="accent1"/>
+          </a:fillRef>
+          <a:effectRef idx="2">
+            <a:schemeClr val="accent1"/>
+          </a:effectRef>
+          <a:fontRef idx="minor">
+            <a:schemeClr val="lt1"/>
+          </a:fontRef>
+        </p:style>
+        <p:txBody>
+          <a:bodyPr rtlCol="0" anchor="ctr"/>
+          <a:lstStyle/>
+          <a:p>
+            <a:pPr algn="ctr"/>
+          </a:p>
+        </p:txBody>
+      </p:sp>
+      <p:sp>
+        <p:nvSpPr>
+          <p:cNvPr id="4" name="TextBox 3"/>
+          <p:cNvSpPr txBox="1"/>
+          <p:nvPr/>
+        </p:nvSpPr>
+        <p:spPr>
+          <a:xfrm>
+            <a:off x="457200" y="164592"/>
+            <a:ext cx="11277295" cy="384048"/>
+          </a:xfrm>
+          <a:prstGeom prst="rect">
+            <a:avLst/>
+          </a:prstGeom>
+          <a:noFill/>
+        </p:spPr>
+        <p:txBody>
+          <a:bodyPr wrap="square">
+            <a:spAutoFit/>
+          </a:bodyPr>
+          <a:lstStyle/>
+          <a:p>
+            <a:r>
+              <a:rPr sz="2600" b="1" i="0">
+                <a:solidFill>
+                  <a:srgbClr val="FFFFFF"/>
+                </a:solidFill>
+                <a:latin typeface="Calibri"/>
+              </a:rPr>
+              <a:t>Cómo se expone en 3 minutos</a:t>
+            </a:r>
+          </a:p>
+        </p:txBody>
+      </p:sp>
+      <p:sp>
+        <p:nvSpPr>
+          <p:cNvPr id="5" name="TextBox 4"/>
+          <p:cNvSpPr txBox="1"/>
+          <p:nvPr/>
+        </p:nvSpPr>
+        <p:spPr>
+          <a:xfrm>
+            <a:off x="457200" y="566928"/>
+            <a:ext cx="11277295" cy="411480"/>
+          </a:xfrm>
+          <a:prstGeom prst="rect">
+            <a:avLst/>
+          </a:prstGeom>
+          <a:noFill/>
+        </p:spPr>
+        <p:txBody>
+          <a:bodyPr wrap="square">
+            <a:spAutoFit/>
+          </a:bodyPr>
+          <a:lstStyle/>
+          <a:p>
+            <a:r>
+              <a:rPr sz="1400" b="0" i="0">
+                <a:solidFill>
+                  <a:srgbClr val="B8D8EE"/>
+                </a:solidFill>
+                <a:latin typeface="Calibri"/>
+              </a:rPr>
+              <a:t>Habla el vocero con la pantalla ya compartida · cronómetro en pantalla · se corta al llegar a cero</a:t>
+            </a:r>
+          </a:p>
+        </p:txBody>
+      </p:sp>
+      <p:sp>
+        <p:nvSpPr>
+          <p:cNvPr id="6" name="Rounded Rectangle 5"/>
+          <p:cNvSpPr/>
+          <p:nvPr/>
+        </p:nvSpPr>
+        <p:spPr>
+          <a:xfrm>
+            <a:off x="457200" y="1444752"/>
+            <a:ext cx="11277295" cy="908913"/>
+          </a:xfrm>
+          <a:prstGeom prst="roundRect">
+            <a:avLst>
+              <a:gd name="adj" fmla="val 12000"/>
+            </a:avLst>
+          </a:prstGeom>
+          <a:solidFill>
+            <a:srgbClr val="F2F2F2"/>
+          </a:solidFill>
+          <a:ln>
+            <a:noFill/>
+          </a:ln>
+        </p:spPr>
+        <p:style>
+          <a:lnRef idx="1">
+            <a:schemeClr val="accent1"/>
+          </a:lnRef>
+          <a:fillRef idx="3">
+            <a:schemeClr val="accent1"/>
+          </a:fillRef>
+          <a:effectRef idx="2">
+            <a:schemeClr val="accent1"/>
+          </a:effectRef>
+          <a:fontRef idx="minor">
+            <a:schemeClr val="lt1"/>
+          </a:fontRef>
+        </p:style>
+        <p:txBody>
+          <a:bodyPr rtlCol="0" anchor="ctr"/>
+          <a:lstStyle/>
+          <a:p>
+            <a:pPr algn="ctr"/>
+          </a:p>
+        </p:txBody>
+      </p:sp>
+      <p:sp>
+        <p:nvSpPr>
+          <p:cNvPr id="7" name="Rounded Rectangle 6"/>
+          <p:cNvSpPr/>
+          <p:nvPr/>
+        </p:nvSpPr>
+        <p:spPr>
+          <a:xfrm>
+            <a:off x="594360" y="1679752"/>
+            <a:ext cx="438912" cy="438912"/>
+          </a:xfrm>
+          <a:prstGeom prst="roundRect">
+            <a:avLst>
+              <a:gd name="adj" fmla="val 12000"/>
+            </a:avLst>
+          </a:prstGeom>
+          <a:solidFill>
+            <a:srgbClr val="095292"/>
+          </a:solidFill>
+          <a:ln>
+            <a:noFill/>
+          </a:ln>
+        </p:spPr>
+        <p:style>
+          <a:lnRef idx="1">
+            <a:schemeClr val="accent1"/>
+          </a:lnRef>
+          <a:fillRef idx="3">
+            <a:schemeClr val="accent1"/>
+          </a:fillRef>
+          <a:effectRef idx="2">
+            <a:schemeClr val="accent1"/>
+          </a:effectRef>
+          <a:fontRef idx="minor">
+            <a:schemeClr val="lt1"/>
+          </a:fontRef>
+        </p:style>
+        <p:txBody>
+          <a:bodyPr rtlCol="0" anchor="ctr"/>
+          <a:lstStyle/>
+          <a:p>
+            <a:pPr algn="ctr"/>
+          </a:p>
+        </p:txBody>
+      </p:sp>
+      <p:sp>
+        <p:nvSpPr>
+          <p:cNvPr id="8" name="TextBox 7"/>
+          <p:cNvSpPr txBox="1"/>
+          <p:nvPr/>
+        </p:nvSpPr>
+        <p:spPr>
+          <a:xfrm>
+            <a:off x="594360" y="1679752"/>
+            <a:ext cx="438912" cy="438912"/>
+          </a:xfrm>
+          <a:prstGeom prst="rect">
+            <a:avLst/>
+          </a:prstGeom>
+          <a:noFill/>
+        </p:spPr>
+        <p:txBody>
+          <a:bodyPr wrap="square" anchor="ctr"/>
+          <a:lstStyle/>
+          <a:p>
+            <a:pPr algn="ctr"/>
+            <a:r>
+              <a:rPr sz="1600" b="1" i="0">
+                <a:solidFill>
+                  <a:srgbClr val="FFFFFF"/>
+                </a:solidFill>
+                <a:latin typeface="Calibri"/>
+              </a:rPr>
+              <a:t>1</a:t>
+            </a:r>
+          </a:p>
+        </p:txBody>
+      </p:sp>
+      <p:sp>
+        <p:nvSpPr>
+          <p:cNvPr id="9" name="TextBox 8"/>
+          <p:cNvSpPr txBox="1"/>
+          <p:nvPr/>
+        </p:nvSpPr>
+        <p:spPr>
+          <a:xfrm>
+            <a:off x="1188720" y="1536192"/>
+            <a:ext cx="10271455" cy="744321"/>
+          </a:xfrm>
+          <a:prstGeom prst="rect">
+            <a:avLst/>
+          </a:prstGeom>
+          <a:noFill/>
+        </p:spPr>
+        <p:txBody>
+          <a:bodyPr wrap="square" anchor="ctr"/>
+          <a:lstStyle/>
+          <a:p>
+            <a:r>
+              <a:rPr sz="1500" b="1" i="0">
+                <a:solidFill>
+                  <a:srgbClr val="095292"/>
+                </a:solidFill>
+                <a:latin typeface="Calibri"/>
+              </a:rPr>
+              <a:t>40 s · El recorrido</a:t>
+            </a:r>
+          </a:p>
+          <a:p>
+            <a:pPr>
+              <a:spcBef>
+                <a:spcPts val="200"/>
+              </a:spcBef>
+            </a:pPr>
+            <a:r>
+              <a:rPr sz="1300" b="0" i="0">
+                <a:solidFill>
+                  <a:srgbClr val="333333"/>
+                </a:solidFill>
+                <a:latin typeface="Calibri"/>
+              </a:rPr>
+              <a:t>El diagrama, recorrido con el cursor. Dónde está cada etapa.</a:t>
+            </a:r>
+          </a:p>
+        </p:txBody>
+      </p:sp>
+      <p:sp>
+        <p:nvSpPr>
+          <p:cNvPr id="10" name="Rounded Rectangle 9"/>
+          <p:cNvSpPr/>
+          <p:nvPr/>
+        </p:nvSpPr>
+        <p:spPr>
+          <a:xfrm>
+            <a:off x="457200" y="2445105"/>
+            <a:ext cx="11277295" cy="908913"/>
+          </a:xfrm>
+          <a:prstGeom prst="roundRect">
+            <a:avLst>
+              <a:gd name="adj" fmla="val 12000"/>
+            </a:avLst>
+          </a:prstGeom>
+          <a:solidFill>
+            <a:srgbClr val="E8F4FA"/>
+          </a:solidFill>
+          <a:ln>
+            <a:noFill/>
+          </a:ln>
+        </p:spPr>
+        <p:style>
+          <a:lnRef idx="1">
+            <a:schemeClr val="accent1"/>
+          </a:lnRef>
+          <a:fillRef idx="3">
+            <a:schemeClr val="accent1"/>
+          </a:fillRef>
+          <a:effectRef idx="2">
+            <a:schemeClr val="accent1"/>
+          </a:effectRef>
+          <a:fontRef idx="minor">
+            <a:schemeClr val="lt1"/>
+          </a:fontRef>
+        </p:style>
+        <p:txBody>
+          <a:bodyPr rtlCol="0" anchor="ctr"/>
+          <a:lstStyle/>
+          <a:p>
+            <a:pPr algn="ctr"/>
+          </a:p>
+        </p:txBody>
+      </p:sp>
+      <p:sp>
+        <p:nvSpPr>
+          <p:cNvPr id="11" name="Rounded Rectangle 10"/>
+          <p:cNvSpPr/>
+          <p:nvPr/>
+        </p:nvSpPr>
+        <p:spPr>
+          <a:xfrm>
+            <a:off x="594360" y="2680106"/>
+            <a:ext cx="438912" cy="438912"/>
+          </a:xfrm>
+          <a:prstGeom prst="roundRect">
+            <a:avLst>
+              <a:gd name="adj" fmla="val 12000"/>
+            </a:avLst>
+          </a:prstGeom>
+          <a:solidFill>
+            <a:srgbClr val="095292"/>
+          </a:solidFill>
+          <a:ln>
+            <a:noFill/>
+          </a:ln>
+        </p:spPr>
+        <p:style>
+          <a:lnRef idx="1">
+            <a:schemeClr val="accent1"/>
+          </a:lnRef>
+          <a:fillRef idx="3">
+            <a:schemeClr val="accent1"/>
+          </a:fillRef>
+          <a:effectRef idx="2">
+            <a:schemeClr val="accent1"/>
+          </a:effectRef>
+          <a:fontRef idx="minor">
+            <a:schemeClr val="lt1"/>
+          </a:fontRef>
+        </p:style>
+        <p:txBody>
+          <a:bodyPr rtlCol="0" anchor="ctr"/>
+          <a:lstStyle/>
+          <a:p>
+            <a:pPr algn="ctr"/>
+          </a:p>
+        </p:txBody>
+      </p:sp>
+      <p:sp>
+        <p:nvSpPr>
+          <p:cNvPr id="12" name="TextBox 11"/>
+          <p:cNvSpPr txBox="1"/>
+          <p:nvPr/>
+        </p:nvSpPr>
+        <p:spPr>
+          <a:xfrm>
+            <a:off x="594360" y="2680106"/>
+            <a:ext cx="438912" cy="438912"/>
+          </a:xfrm>
+          <a:prstGeom prst="rect">
+            <a:avLst/>
+          </a:prstGeom>
+          <a:noFill/>
+        </p:spPr>
+        <p:txBody>
+          <a:bodyPr wrap="square" anchor="ctr"/>
+          <a:lstStyle/>
+          <a:p>
+            <a:pPr algn="ctr"/>
+            <a:r>
+              <a:rPr sz="1600" b="1" i="0">
+                <a:solidFill>
+                  <a:srgbClr val="FFFFFF"/>
+                </a:solidFill>
+                <a:latin typeface="Calibri"/>
+              </a:rPr>
+              <a:t>2</a:t>
+            </a:r>
+          </a:p>
+        </p:txBody>
+      </p:sp>
+      <p:sp>
+        <p:nvSpPr>
+          <p:cNvPr id="13" name="TextBox 12"/>
+          <p:cNvSpPr txBox="1"/>
+          <p:nvPr/>
+        </p:nvSpPr>
+        <p:spPr>
+          <a:xfrm>
+            <a:off x="1188720" y="2536545"/>
+            <a:ext cx="10271455" cy="744321"/>
+          </a:xfrm>
+          <a:prstGeom prst="rect">
+            <a:avLst/>
+          </a:prstGeom>
+          <a:noFill/>
+        </p:spPr>
+        <p:txBody>
+          <a:bodyPr wrap="square" anchor="ctr"/>
+          <a:lstStyle/>
+          <a:p>
+            <a:r>
+              <a:rPr sz="1500" b="1" i="0">
+                <a:solidFill>
+                  <a:srgbClr val="095292"/>
+                </a:solidFill>
+                <a:latin typeface="Calibri"/>
+              </a:rPr>
+              <a:t>30 s · Lo que se repite</a:t>
+            </a:r>
+          </a:p>
+          <a:p>
+            <a:pPr>
+              <a:spcBef>
+                <a:spcPts val="200"/>
+              </a:spcBef>
+            </a:pPr>
+            <a:r>
+              <a:rPr sz="1300" b="0" i="0">
+                <a:solidFill>
+                  <a:srgbClr val="333333"/>
+                </a:solidFill>
+                <a:latin typeface="Calibri"/>
+              </a:rPr>
+              <a:t>La operación repetida y cuántas veces al día.</a:t>
+            </a:r>
+          </a:p>
+        </p:txBody>
+      </p:sp>
+      <p:sp>
+        <p:nvSpPr>
+          <p:cNvPr id="14" name="Rounded Rectangle 13"/>
+          <p:cNvSpPr/>
+          <p:nvPr/>
+        </p:nvSpPr>
+        <p:spPr>
+          <a:xfrm>
+            <a:off x="457200" y="3445459"/>
+            <a:ext cx="11277295" cy="908913"/>
+          </a:xfrm>
+          <a:prstGeom prst="roundRect">
+            <a:avLst>
+              <a:gd name="adj" fmla="val 12000"/>
+            </a:avLst>
+          </a:prstGeom>
+          <a:solidFill>
+            <a:srgbClr val="F2F2F2"/>
+          </a:solidFill>
+          <a:ln>
+            <a:noFill/>
+          </a:ln>
+        </p:spPr>
+        <p:style>
+          <a:lnRef idx="1">
+            <a:schemeClr val="accent1"/>
+          </a:lnRef>
+          <a:fillRef idx="3">
+            <a:schemeClr val="accent1"/>
+          </a:fillRef>
+          <a:effectRef idx="2">
+            <a:schemeClr val="accent1"/>
+          </a:effectRef>
+          <a:fontRef idx="minor">
+            <a:schemeClr val="lt1"/>
+          </a:fontRef>
+        </p:style>
+        <p:txBody>
+          <a:bodyPr rtlCol="0" anchor="ctr"/>
+          <a:lstStyle/>
+          <a:p>
+            <a:pPr algn="ctr"/>
+          </a:p>
+        </p:txBody>
+      </p:sp>
+      <p:sp>
+        <p:nvSpPr>
+          <p:cNvPr id="15" name="Rounded Rectangle 14"/>
+          <p:cNvSpPr/>
+          <p:nvPr/>
+        </p:nvSpPr>
+        <p:spPr>
+          <a:xfrm>
+            <a:off x="594360" y="3680460"/>
+            <a:ext cx="438912" cy="438912"/>
+          </a:xfrm>
+          <a:prstGeom prst="roundRect">
+            <a:avLst>
+              <a:gd name="adj" fmla="val 12000"/>
+            </a:avLst>
+          </a:prstGeom>
+          <a:solidFill>
+            <a:srgbClr val="095292"/>
+          </a:solidFill>
+          <a:ln>
+            <a:noFill/>
+          </a:ln>
+        </p:spPr>
+        <p:style>
+          <a:lnRef idx="1">
+            <a:schemeClr val="accent1"/>
+          </a:lnRef>
+          <a:fillRef idx="3">
+            <a:schemeClr val="accent1"/>
+          </a:fillRef>
+          <a:effectRef idx="2">
+            <a:schemeClr val="accent1"/>
+          </a:effectRef>
+          <a:fontRef idx="minor">
+            <a:schemeClr val="lt1"/>
+          </a:fontRef>
+        </p:style>
+        <p:txBody>
+          <a:bodyPr rtlCol="0" anchor="ctr"/>
+          <a:lstStyle/>
+          <a:p>
+            <a:pPr algn="ctr"/>
+          </a:p>
+        </p:txBody>
+      </p:sp>
+      <p:sp>
+        <p:nvSpPr>
+          <p:cNvPr id="16" name="TextBox 15"/>
+          <p:cNvSpPr txBox="1"/>
+          <p:nvPr/>
+        </p:nvSpPr>
+        <p:spPr>
+          <a:xfrm>
+            <a:off x="594360" y="3680460"/>
+            <a:ext cx="438912" cy="438912"/>
+          </a:xfrm>
+          <a:prstGeom prst="rect">
+            <a:avLst/>
+          </a:prstGeom>
+          <a:noFill/>
+        </p:spPr>
+        <p:txBody>
+          <a:bodyPr wrap="square" anchor="ctr"/>
+          <a:lstStyle/>
+          <a:p>
+            <a:pPr algn="ctr"/>
+            <a:r>
+              <a:rPr sz="1600" b="1" i="0">
+                <a:solidFill>
+                  <a:srgbClr val="FFFFFF"/>
+                </a:solidFill>
+                <a:latin typeface="Calibri"/>
+              </a:rPr>
+              <a:t>3</a:t>
+            </a:r>
+          </a:p>
+        </p:txBody>
+      </p:sp>
+      <p:sp>
+        <p:nvSpPr>
+          <p:cNvPr id="17" name="TextBox 16"/>
+          <p:cNvSpPr txBox="1"/>
+          <p:nvPr/>
+        </p:nvSpPr>
+        <p:spPr>
+          <a:xfrm>
+            <a:off x="1188720" y="3536899"/>
+            <a:ext cx="10271455" cy="744321"/>
+          </a:xfrm>
+          <a:prstGeom prst="rect">
+            <a:avLst/>
+          </a:prstGeom>
+          <a:noFill/>
+        </p:spPr>
+        <p:txBody>
+          <a:bodyPr wrap="square" anchor="ctr"/>
+          <a:lstStyle/>
+          <a:p>
+            <a:r>
+              <a:rPr sz="1500" b="1" i="0">
+                <a:solidFill>
+                  <a:srgbClr val="095292"/>
+                </a:solidFill>
+                <a:latin typeface="Calibri"/>
+              </a:rPr>
+              <a:t>50 s · La etapa que más pesa</a:t>
+            </a:r>
+          </a:p>
+          <a:p>
+            <a:pPr>
+              <a:spcBef>
+                <a:spcPts val="200"/>
+              </a:spcBef>
+            </a:pPr>
+            <a:r>
+              <a:rPr sz="1300" b="0" i="0">
+                <a:solidFill>
+                  <a:srgbClr val="333333"/>
+                </a:solidFill>
+                <a:latin typeface="Calibri"/>
+              </a:rPr>
+              <a:t>Cuál y por qué. Es el minuto obligatorio.</a:t>
+            </a:r>
+          </a:p>
+        </p:txBody>
+      </p:sp>
+      <p:sp>
+        <p:nvSpPr>
+          <p:cNvPr id="18" name="Rounded Rectangle 17"/>
+          <p:cNvSpPr/>
+          <p:nvPr/>
+        </p:nvSpPr>
+        <p:spPr>
+          <a:xfrm>
+            <a:off x="457200" y="4445812"/>
+            <a:ext cx="11277295" cy="908913"/>
+          </a:xfrm>
+          <a:prstGeom prst="roundRect">
+            <a:avLst>
+              <a:gd name="adj" fmla="val 12000"/>
+            </a:avLst>
+          </a:prstGeom>
+          <a:solidFill>
+            <a:srgbClr val="E8F4FA"/>
+          </a:solidFill>
+          <a:ln>
+            <a:noFill/>
+          </a:ln>
+        </p:spPr>
+        <p:style>
+          <a:lnRef idx="1">
+            <a:schemeClr val="accent1"/>
+          </a:lnRef>
+          <a:fillRef idx="3">
+            <a:schemeClr val="accent1"/>
+          </a:fillRef>
+          <a:effectRef idx="2">
+            <a:schemeClr val="accent1"/>
+          </a:effectRef>
+          <a:fontRef idx="minor">
+            <a:schemeClr val="lt1"/>
+          </a:fontRef>
+        </p:style>
+        <p:txBody>
+          <a:bodyPr rtlCol="0" anchor="ctr"/>
+          <a:lstStyle/>
+          <a:p>
+            <a:pPr algn="ctr"/>
+          </a:p>
+        </p:txBody>
+      </p:sp>
+      <p:sp>
+        <p:nvSpPr>
+          <p:cNvPr id="19" name="Rounded Rectangle 18"/>
+          <p:cNvSpPr/>
+          <p:nvPr/>
+        </p:nvSpPr>
+        <p:spPr>
+          <a:xfrm>
+            <a:off x="594360" y="4680813"/>
+            <a:ext cx="438912" cy="438912"/>
+          </a:xfrm>
+          <a:prstGeom prst="roundRect">
+            <a:avLst>
+              <a:gd name="adj" fmla="val 12000"/>
+            </a:avLst>
+          </a:prstGeom>
+          <a:solidFill>
+            <a:srgbClr val="095292"/>
+          </a:solidFill>
+          <a:ln>
+            <a:noFill/>
+          </a:ln>
+        </p:spPr>
+        <p:style>
+          <a:lnRef idx="1">
+            <a:schemeClr val="accent1"/>
+          </a:lnRef>
+          <a:fillRef idx="3">
+            <a:schemeClr val="accent1"/>
+          </a:fillRef>
+          <a:effectRef idx="2">
+            <a:schemeClr val="accent1"/>
+          </a:effectRef>
+          <a:fontRef idx="minor">
+            <a:schemeClr val="lt1"/>
+          </a:fontRef>
+        </p:style>
+        <p:txBody>
+          <a:bodyPr rtlCol="0" anchor="ctr"/>
+          <a:lstStyle/>
+          <a:p>
+            <a:pPr algn="ctr"/>
+          </a:p>
+        </p:txBody>
+      </p:sp>
+      <p:sp>
+        <p:nvSpPr>
+          <p:cNvPr id="20" name="TextBox 19"/>
+          <p:cNvSpPr txBox="1"/>
+          <p:nvPr/>
+        </p:nvSpPr>
+        <p:spPr>
+          <a:xfrm>
+            <a:off x="594360" y="4680813"/>
+            <a:ext cx="438912" cy="438912"/>
+          </a:xfrm>
+          <a:prstGeom prst="rect">
+            <a:avLst/>
+          </a:prstGeom>
+          <a:noFill/>
+        </p:spPr>
+        <p:txBody>
+          <a:bodyPr wrap="square" anchor="ctr"/>
+          <a:lstStyle/>
+          <a:p>
+            <a:pPr algn="ctr"/>
+            <a:r>
+              <a:rPr sz="1600" b="1" i="0">
+                <a:solidFill>
+                  <a:srgbClr val="FFFFFF"/>
+                </a:solidFill>
+                <a:latin typeface="Calibri"/>
+              </a:rPr>
+              <a:t>4</a:t>
+            </a:r>
+          </a:p>
+        </p:txBody>
+      </p:sp>
+      <p:sp>
+        <p:nvSpPr>
+          <p:cNvPr id="21" name="TextBox 20"/>
+          <p:cNvSpPr txBox="1"/>
+          <p:nvPr/>
+        </p:nvSpPr>
+        <p:spPr>
+          <a:xfrm>
+            <a:off x="1188720" y="4537252"/>
+            <a:ext cx="10271455" cy="744321"/>
+          </a:xfrm>
+          <a:prstGeom prst="rect">
+            <a:avLst/>
+          </a:prstGeom>
+          <a:noFill/>
+        </p:spPr>
+        <p:txBody>
+          <a:bodyPr wrap="square" anchor="ctr"/>
+          <a:lstStyle/>
+          <a:p>
+            <a:r>
+              <a:rPr sz="1500" b="1" i="0">
+                <a:solidFill>
+                  <a:srgbClr val="095292"/>
+                </a:solidFill>
+                <a:latin typeface="Calibri"/>
+              </a:rPr>
+              <a:t>50 s · Las dos decisiones y el indicador</a:t>
+            </a:r>
+          </a:p>
+          <a:p>
+            <a:pPr>
+              <a:spcBef>
+                <a:spcPts val="200"/>
+              </a:spcBef>
+            </a:pPr>
+            <a:r>
+              <a:rPr sz="1300" b="0" i="0">
+                <a:solidFill>
+                  <a:srgbClr val="333333"/>
+                </a:solidFill>
+                <a:latin typeface="Calibri"/>
+              </a:rPr>
+              <a:t>Qué van a cambiar y cómo se sabrá si sirvió.</a:t>
+            </a:r>
+          </a:p>
+        </p:txBody>
+      </p:sp>
+      <p:sp>
+        <p:nvSpPr>
+          <p:cNvPr id="22" name="Rounded Rectangle 21"/>
+          <p:cNvSpPr/>
+          <p:nvPr/>
+        </p:nvSpPr>
+        <p:spPr>
+          <a:xfrm>
+            <a:off x="457200" y="5446166"/>
+            <a:ext cx="11277295" cy="908913"/>
+          </a:xfrm>
+          <a:prstGeom prst="roundRect">
+            <a:avLst>
+              <a:gd name="adj" fmla="val 12000"/>
+            </a:avLst>
+          </a:prstGeom>
+          <a:solidFill>
+            <a:srgbClr val="F2F2F2"/>
+          </a:solidFill>
+          <a:ln>
+            <a:noFill/>
+          </a:ln>
+        </p:spPr>
+        <p:style>
+          <a:lnRef idx="1">
+            <a:schemeClr val="accent1"/>
+          </a:lnRef>
+          <a:fillRef idx="3">
+            <a:schemeClr val="accent1"/>
+          </a:fillRef>
+          <a:effectRef idx="2">
+            <a:schemeClr val="accent1"/>
+          </a:effectRef>
+          <a:fontRef idx="minor">
+            <a:schemeClr val="lt1"/>
+          </a:fontRef>
+        </p:style>
+        <p:txBody>
+          <a:bodyPr rtlCol="0" anchor="ctr"/>
+          <a:lstStyle/>
+          <a:p>
+            <a:pPr algn="ctr"/>
+          </a:p>
+        </p:txBody>
+      </p:sp>
+      <p:sp>
+        <p:nvSpPr>
+          <p:cNvPr id="23" name="Rounded Rectangle 22"/>
+          <p:cNvSpPr/>
+          <p:nvPr/>
+        </p:nvSpPr>
+        <p:spPr>
+          <a:xfrm>
+            <a:off x="594360" y="5681167"/>
+            <a:ext cx="438912" cy="438912"/>
+          </a:xfrm>
+          <a:prstGeom prst="roundRect">
+            <a:avLst>
+              <a:gd name="adj" fmla="val 12000"/>
+            </a:avLst>
+          </a:prstGeom>
+          <a:solidFill>
+            <a:srgbClr val="095292"/>
+          </a:solidFill>
+          <a:ln>
+            <a:noFill/>
+          </a:ln>
+        </p:spPr>
+        <p:style>
+          <a:lnRef idx="1">
+            <a:schemeClr val="accent1"/>
+          </a:lnRef>
+          <a:fillRef idx="3">
+            <a:schemeClr val="accent1"/>
+          </a:fillRef>
+          <a:effectRef idx="2">
+            <a:schemeClr val="accent1"/>
+          </a:effectRef>
+          <a:fontRef idx="minor">
+            <a:schemeClr val="lt1"/>
+          </a:fontRef>
+        </p:style>
+        <p:txBody>
+          <a:bodyPr rtlCol="0" anchor="ctr"/>
+          <a:lstStyle/>
+          <a:p>
+            <a:pPr algn="ctr"/>
+          </a:p>
+        </p:txBody>
+      </p:sp>
+      <p:sp>
+        <p:nvSpPr>
+          <p:cNvPr id="24" name="TextBox 23"/>
+          <p:cNvSpPr txBox="1"/>
+          <p:nvPr/>
+        </p:nvSpPr>
+        <p:spPr>
+          <a:xfrm>
+            <a:off x="594360" y="5681167"/>
+            <a:ext cx="438912" cy="438912"/>
+          </a:xfrm>
+          <a:prstGeom prst="rect">
+            <a:avLst/>
+          </a:prstGeom>
+          <a:noFill/>
+        </p:spPr>
+        <p:txBody>
+          <a:bodyPr wrap="square" anchor="ctr"/>
+          <a:lstStyle/>
+          <a:p>
+            <a:pPr algn="ctr"/>
+            <a:r>
+              <a:rPr sz="1600" b="1" i="0">
+                <a:solidFill>
+                  <a:srgbClr val="FFFFFF"/>
+                </a:solidFill>
+                <a:latin typeface="Calibri"/>
+              </a:rPr>
+              <a:t>5</a:t>
+            </a:r>
+          </a:p>
+        </p:txBody>
+      </p:sp>
+      <p:sp>
+        <p:nvSpPr>
+          <p:cNvPr id="25" name="TextBox 24"/>
+          <p:cNvSpPr txBox="1"/>
+          <p:nvPr/>
+        </p:nvSpPr>
+        <p:spPr>
+          <a:xfrm>
+            <a:off x="1188720" y="5537606"/>
+            <a:ext cx="10271455" cy="744321"/>
+          </a:xfrm>
+          <a:prstGeom prst="rect">
+            <a:avLst/>
+          </a:prstGeom>
+          <a:noFill/>
+        </p:spPr>
+        <p:txBody>
+          <a:bodyPr wrap="square" anchor="ctr"/>
+          <a:lstStyle/>
+          <a:p>
+            <a:r>
+              <a:rPr sz="1500" b="1" i="0">
+                <a:solidFill>
+                  <a:srgbClr val="095292"/>
+                </a:solidFill>
+                <a:latin typeface="Calibri"/>
+              </a:rPr>
+              <a:t>10 s · La fuente</a:t>
+            </a:r>
+          </a:p>
+          <a:p>
+            <a:pPr>
+              <a:spcBef>
+                <a:spcPts val="200"/>
+              </a:spcBef>
+            </a:pPr>
+            <a:r>
+              <a:rPr sz="1300" b="0" i="0">
+                <a:solidFill>
+                  <a:srgbClr val="333333"/>
+                </a:solidFill>
+                <a:latin typeface="Calibri"/>
+              </a:rPr>
+              <a:t>De dónde salió cualquier cifra que hayan dicho.</a:t>
+            </a:r>
+          </a:p>
+        </p:txBody>
+      </p:sp>
+      <p:sp>
+        <p:nvSpPr>
+          <p:cNvPr id="26" name="TextBox 25"/>
+          <p:cNvSpPr txBox="1"/>
+          <p:nvPr/>
+        </p:nvSpPr>
+        <p:spPr>
+          <a:xfrm>
+            <a:off x="11185855" y="6473952"/>
+            <a:ext cx="640080" cy="274320"/>
+          </a:xfrm>
+          <a:prstGeom prst="rect">
+            <a:avLst/>
+          </a:prstGeom>
+          <a:noFill/>
+        </p:spPr>
+        <p:txBody>
+          <a:bodyPr wrap="square">
+            <a:spAutoFit/>
+          </a:bodyPr>
+          <a:lstStyle/>
+          <a:p>
+            <a:pPr algn="r"/>
+            <a:r>
+              <a:rPr sz="1100" b="0" i="0">
+                <a:solidFill>
+                  <a:srgbClr val="666666"/>
+                </a:solidFill>
+                <a:latin typeface="Calibri"/>
+              </a:rPr>
+              <a:t>25</a:t>
+            </a:r>
+          </a:p>
+        </p:txBody>
+      </p:sp>
+    </p:spTree>
+  </p:cSld>
+  <p:clrMapOvr>
+    <a:masterClrMapping/>
+  </p:clrMapOvr>
+</p:sld>
+</file>
+
+<file path=ppt/slides/slide26.xml><?xml version="1.0" encoding="utf-8"?>
+<p:sld xmlns:a="http://schemas.openxmlformats.org/drawingml/2006/main" xmlns:p="http://schemas.openxmlformats.org/presentationml/2006/main" xmlns:r="http://schemas.openxmlformats.org/officeDocument/2006/relationships">
+  <p:cSld>
+    <p:bg>
+      <p:bgPr>
+        <a:solidFill>
+          <a:srgbClr val="FFFFFF"/>
+        </a:solidFill>
+        <a:effectLst/>
+      </p:bgPr>
+    </p:bg>
+    <p:spTree>
+      <p:nvGrpSpPr>
+        <p:cNvPr id="1" name=""/>
+        <p:cNvGrpSpPr/>
+        <p:nvPr/>
+      </p:nvGrpSpPr>
+      <p:grpSpPr/>
+      <p:sp>
+        <p:nvSpPr>
+          <p:cNvPr id="2" name="Rectangle 1"/>
+          <p:cNvSpPr/>
+          <p:nvPr/>
+        </p:nvSpPr>
+        <p:spPr>
+          <a:xfrm>
+            <a:off x="0" y="0"/>
+            <a:ext cx="12191695" cy="960120"/>
+          </a:xfrm>
+          <a:prstGeom prst="rect">
+            <a:avLst/>
+          </a:prstGeom>
+          <a:solidFill>
+            <a:srgbClr val="095292"/>
+          </a:solidFill>
+          <a:ln>
+            <a:noFill/>
+          </a:ln>
+        </p:spPr>
+        <p:style>
+          <a:lnRef idx="1">
+            <a:schemeClr val="accent1"/>
+          </a:lnRef>
+          <a:fillRef idx="3">
+            <a:schemeClr val="accent1"/>
+          </a:fillRef>
+          <a:effectRef idx="2">
+            <a:schemeClr val="accent1"/>
+          </a:effectRef>
+          <a:fontRef idx="minor">
+            <a:schemeClr val="lt1"/>
+          </a:fontRef>
+        </p:style>
+        <p:txBody>
+          <a:bodyPr rtlCol="0" anchor="ctr"/>
+          <a:lstStyle/>
+          <a:p>
+            <a:pPr algn="ctr"/>
+          </a:p>
+        </p:txBody>
+      </p:sp>
+      <p:sp>
+        <p:nvSpPr>
+          <p:cNvPr id="3" name="Rectangle 2"/>
+          <p:cNvSpPr/>
+          <p:nvPr/>
+        </p:nvSpPr>
+        <p:spPr>
+          <a:xfrm>
+            <a:off x="0" y="960120"/>
+            <a:ext cx="12191695" cy="41148"/>
+          </a:xfrm>
+          <a:prstGeom prst="rect">
+            <a:avLst/>
+          </a:prstGeom>
+          <a:solidFill>
+            <a:srgbClr val="FFD000"/>
+          </a:solidFill>
+          <a:ln>
+            <a:noFill/>
+          </a:ln>
+        </p:spPr>
+        <p:style>
+          <a:lnRef idx="1">
+            <a:schemeClr val="accent1"/>
+          </a:lnRef>
+          <a:fillRef idx="3">
+            <a:schemeClr val="accent1"/>
+          </a:fillRef>
+          <a:effectRef idx="2">
+            <a:schemeClr val="accent1"/>
+          </a:effectRef>
+          <a:fontRef idx="minor">
+            <a:schemeClr val="lt1"/>
+          </a:fontRef>
+        </p:style>
+        <p:txBody>
+          <a:bodyPr rtlCol="0" anchor="ctr"/>
+          <a:lstStyle/>
+          <a:p>
+            <a:pPr algn="ctr"/>
+          </a:p>
+        </p:txBody>
+      </p:sp>
+      <p:sp>
+        <p:nvSpPr>
+          <p:cNvPr id="4" name="TextBox 3"/>
+          <p:cNvSpPr txBox="1"/>
+          <p:nvPr/>
+        </p:nvSpPr>
+        <p:spPr>
+          <a:xfrm>
+            <a:off x="457200" y="164592"/>
+            <a:ext cx="11277295" cy="502920"/>
+          </a:xfrm>
+          <a:prstGeom prst="rect">
+            <a:avLst/>
+          </a:prstGeom>
+          <a:noFill/>
+        </p:spPr>
+        <p:txBody>
+          <a:bodyPr wrap="square">
+            <a:spAutoFit/>
+          </a:bodyPr>
+          <a:lstStyle/>
+          <a:p>
+            <a:r>
+              <a:rPr sz="2600" b="1" i="0">
+                <a:solidFill>
+                  <a:srgbClr val="FFFFFF"/>
+                </a:solidFill>
+                <a:latin typeface="Calibri"/>
+              </a:rPr>
+              <a:t>Para la Clase 6</a:t>
+            </a:r>
+          </a:p>
+        </p:txBody>
+      </p:sp>
+      <p:sp>
+        <p:nvSpPr>
+          <p:cNvPr id="5" name="TextBox 4"/>
+          <p:cNvSpPr txBox="1"/>
+          <p:nvPr/>
+        </p:nvSpPr>
+        <p:spPr>
+          <a:xfrm>
+            <a:off x="457200" y="1170432"/>
+            <a:ext cx="11277295" cy="5230368"/>
+          </a:xfrm>
+          <a:prstGeom prst="rect">
+            <a:avLst/>
+          </a:prstGeom>
+          <a:noFill/>
+        </p:spPr>
+        <p:txBody>
+          <a:bodyPr wrap="square">
+            <a:spAutoFit/>
+          </a:bodyPr>
+          <a:lstStyle/>
+          <a:p>
+            <a:pPr>
+              <a:spcAft>
+                <a:spcPts val="800"/>
+              </a:spcAft>
+            </a:pPr>
+            <a:r>
+              <a:rPr sz="2000" b="0" i="0">
+                <a:solidFill>
+                  <a:srgbClr val="333333"/>
+                </a:solidFill>
+                <a:latin typeface="Calibri"/>
+              </a:rPr>
+              <a:t>–   </a:t>
+            </a:r>
+            <a:r>
+              <a:rPr sz="2000" b="1" i="0">
+                <a:solidFill>
+                  <a:srgbClr val="333333"/>
+                </a:solidFill>
+                <a:latin typeface="Calibri"/>
+              </a:rPr>
+              <a:t>Trabajo dirigido:</a:t>
+            </a:r>
+            <a:r>
+              <a:rPr sz="2000" b="0" i="0">
+                <a:solidFill>
+                  <a:srgbClr val="333333"/>
+                </a:solidFill>
+                <a:latin typeface="Calibri"/>
+              </a:rPr>
+              <a:t> Revisión de casos de impacto ambiental — un caso documentado de impacto ambiental de infraestructura digital, con fuente, año y alcance declarados.</a:t>
+            </a:r>
+          </a:p>
+          <a:p>
+            <a:pPr>
+              <a:spcAft>
+                <a:spcPts val="800"/>
+              </a:spcAft>
+            </a:pPr>
+            <a:r>
+              <a:rPr sz="2000" b="0" i="0">
+                <a:solidFill>
+                  <a:srgbClr val="333333"/>
+                </a:solidFill>
+                <a:latin typeface="Calibri"/>
+              </a:rPr>
+              <a:t>–   </a:t>
+            </a:r>
+            <a:r>
+              <a:rPr sz="2000" b="1" i="0">
+                <a:solidFill>
+                  <a:srgbClr val="333333"/>
+                </a:solidFill>
+                <a:latin typeface="Calibri"/>
+              </a:rPr>
+              <a:t>Trabajo independiente:</a:t>
+            </a:r>
+            <a:r>
+              <a:rPr sz="2000" b="0" i="0">
+                <a:solidFill>
+                  <a:srgbClr val="333333"/>
+                </a:solidFill>
+                <a:latin typeface="Calibri"/>
+              </a:rPr>
+              <a:t> Informe sobre sostenibilidad: una página con la huella de su sistema, las dos decisiones y el indicador, en la carpeta del equipo.</a:t>
+            </a:r>
+          </a:p>
+          <a:p>
+            <a:pPr>
+              <a:spcAft>
+                <a:spcPts val="800"/>
+              </a:spcAft>
+            </a:pPr>
+            <a:r>
+              <a:rPr sz="2000" b="0" i="0">
+                <a:solidFill>
+                  <a:srgbClr val="333333"/>
+                </a:solidFill>
+                <a:latin typeface="Calibri"/>
+              </a:rPr>
+              <a:t>–   </a:t>
+            </a:r>
+            <a:r>
+              <a:rPr sz="2000" b="1" i="0">
+                <a:solidFill>
+                  <a:srgbClr val="333333"/>
+                </a:solidFill>
+                <a:latin typeface="Calibri"/>
+              </a:rPr>
+              <a:t>Clase 6 · Análisis de problemas tecnológicos del entorno</a:t>
+            </a:r>
+            <a:r>
+              <a:rPr sz="2000" b="0" i="0">
+                <a:solidFill>
+                  <a:srgbClr val="333333"/>
+                </a:solidFill>
+                <a:latin typeface="Calibri"/>
+              </a:rPr>
+              <a:t> — </a:t>
+            </a:r>
+            <a:r>
+              <a:rPr sz="2000" b="1" i="0">
+                <a:solidFill>
+                  <a:srgbClr val="333333"/>
+                </a:solidFill>
+                <a:latin typeface="Calibri"/>
+              </a:rPr>
+              <a:t>cierra el corte 1</a:t>
+            </a:r>
+            <a:r>
+              <a:rPr sz="2000" b="0" i="0">
+                <a:solidFill>
+                  <a:srgbClr val="333333"/>
+                </a:solidFill>
+                <a:latin typeface="Calibri"/>
+              </a:rPr>
+              <a:t>: se arma la ficha del problema del proyecto del semestre y hay evaluación de corte en la plataforma del curso al final de la sesión.</a:t>
+            </a:r>
+          </a:p>
+          <a:p>
+            <a:pPr>
+              <a:spcAft>
+                <a:spcPts val="800"/>
+              </a:spcAft>
+            </a:pPr>
+            <a:r>
+              <a:rPr sz="2000" b="0" i="0">
+                <a:solidFill>
+                  <a:srgbClr val="333333"/>
+                </a:solidFill>
+                <a:latin typeface="Calibri"/>
+              </a:rPr>
+              <a:t>–   </a:t>
+            </a:r>
+            <a:r>
+              <a:rPr sz="2000" b="1" i="0">
+                <a:solidFill>
+                  <a:srgbClr val="333333"/>
+                </a:solidFill>
+                <a:latin typeface="Calibri"/>
+              </a:rPr>
+              <a:t>Aviso:</a:t>
+            </a:r>
+            <a:r>
+              <a:rPr sz="2000" b="0" i="0">
+                <a:solidFill>
+                  <a:srgbClr val="333333"/>
+                </a:solidFill>
+                <a:latin typeface="Calibri"/>
+              </a:rPr>
+              <a:t> La sesión 6 cierra el corte. Traigan </a:t>
+            </a:r>
+            <a:r>
+              <a:rPr sz="2000" b="1" i="0">
+                <a:solidFill>
+                  <a:srgbClr val="333333"/>
+                </a:solidFill>
+                <a:latin typeface="Calibri"/>
+              </a:rPr>
+              <a:t>el problema de la sesión 1, la ficha de sistema de la sesión 3, la regla ética de la sesión 4 y el indicador de hoy</a:t>
+            </a:r>
+            <a:r>
+              <a:rPr sz="2000" b="0" i="0">
+                <a:solidFill>
+                  <a:srgbClr val="333333"/>
+                </a:solidFill>
+                <a:latin typeface="Calibri"/>
+              </a:rPr>
+              <a:t>: la ficha del problema se arma con esas cuatro cosas y se entrega en clase. Y lean el documento </a:t>
+            </a:r>
+            <a:r>
+              <a:rPr sz="2000" b="1" i="0">
+                <a:solidFill>
+                  <a:srgbClr val="333333"/>
+                </a:solidFill>
+                <a:latin typeface="Calibri"/>
+              </a:rPr>
+              <a:t>«Evaluación del Corte 1 — cómo prepararse»</a:t>
+            </a:r>
+            <a:r>
+              <a:rPr sz="2000" b="0" i="0">
+                <a:solidFill>
+                  <a:srgbClr val="333333"/>
+                </a:solidFill>
+                <a:latin typeface="Calibri"/>
+              </a:rPr>
+              <a:t>: trae qué repasar de cada sesión para los 20 minutos de evaluación del final.</a:t>
+            </a:r>
+          </a:p>
+          <a:p>
+            <a:pPr>
+              <a:spcAft>
+                <a:spcPts val="800"/>
+              </a:spcAft>
+            </a:pPr>
+            <a:r>
+              <a:rPr sz="2000" b="0" i="0">
+                <a:solidFill>
+                  <a:srgbClr val="333333"/>
+                </a:solidFill>
+                <a:latin typeface="Calibri"/>
+              </a:rPr>
+              <a:t>–   </a:t>
+            </a:r>
+            <a:r>
+              <a:rPr sz="2000" b="1" i="0">
+                <a:solidFill>
+                  <a:srgbClr val="333333"/>
+                </a:solidFill>
+                <a:latin typeface="Calibri"/>
+              </a:rPr>
+              <a:t>Antes de salir:</a:t>
+            </a:r>
+            <a:r>
+              <a:rPr sz="2000" b="0" i="0">
+                <a:solidFill>
+                  <a:srgbClr val="333333"/>
+                </a:solidFill>
+                <a:latin typeface="Calibri"/>
+              </a:rPr>
+              <a:t> el enlace del documento del equipo en el chat, con permiso de lectura para el docente, y el nombre del vocero de hoy.</a:t>
+            </a:r>
+          </a:p>
+        </p:txBody>
+      </p:sp>
+      <p:sp>
+        <p:nvSpPr>
+          <p:cNvPr id="6" name="TextBox 5"/>
+          <p:cNvSpPr txBox="1"/>
+          <p:nvPr/>
+        </p:nvSpPr>
+        <p:spPr>
+          <a:xfrm>
+            <a:off x="11185855" y="6473952"/>
+            <a:ext cx="640080" cy="274320"/>
+          </a:xfrm>
+          <a:prstGeom prst="rect">
+            <a:avLst/>
+          </a:prstGeom>
+          <a:noFill/>
+        </p:spPr>
+        <p:txBody>
+          <a:bodyPr wrap="square">
+            <a:spAutoFit/>
+          </a:bodyPr>
+          <a:lstStyle/>
+          <a:p>
+            <a:pPr algn="r"/>
+            <a:r>
+              <a:rPr sz="1100" b="0" i="0">
+                <a:solidFill>
+                  <a:srgbClr val="666666"/>
+                </a:solidFill>
+                <a:latin typeface="Calibri"/>
+              </a:rPr>
+              <a:t>26</a:t>
+            </a:r>
+          </a:p>
+        </p:txBody>
+      </p:sp>
+    </p:spTree>
+  </p:cSld>
+  <p:clrMapOvr>
+    <a:masterClrMapping/>
+  </p:clrMapOvr>
+</p:sld>
+</file>
+
+<file path=ppt/slides/slide27.xml><?xml version="1.0" encoding="utf-8"?>
 <p:sld xmlns:a="http://schemas.openxmlformats.org/drawingml/2006/main" xmlns:p="http://schemas.openxmlformats.org/presentationml/2006/main" xmlns:r="http://schemas.openxmlformats.org/officeDocument/2006/relationships">
   <p:cSld>
     <p:bg>

--- a/Introduccion a la Ingenieria/Clases/Clase 5 - El rol del ingeniero en el contexto ambiental/Presentacion.pptx
+++ b/Introduccion a la Ingenieria/Clases/Clase 5 - El rol del ingeniero en el contexto ambiental/Presentacion.pptx
@@ -20,9 +20,6 @@
     <p:sldId id="268" r:id="rId20"/>
     <p:sldId id="269" r:id="rId21"/>
     <p:sldId id="270" r:id="rId22"/>
-    <p:sldId id="271" r:id="rId23"/>
-    <p:sldId id="272" r:id="rId24"/>
-    <p:sldId id="273" r:id="rId25"/>
   </p:sldIdLst>
   <p:sldSz cx="12191695" cy="6858000" type="screen4x3"/>
   <p:notesSz cx="6858000" cy="9144000"/>
@@ -8621,2625 +8618,6 @@
         <p:spPr>
           <a:xfrm>
             <a:off x="0" y="0"/>
-            <a:ext cx="12191695" cy="1170432"/>
-          </a:xfrm>
-          <a:prstGeom prst="rect">
-            <a:avLst/>
-          </a:prstGeom>
-          <a:solidFill>
-            <a:srgbClr val="095292"/>
-          </a:solidFill>
-          <a:ln>
-            <a:noFill/>
-          </a:ln>
-        </p:spPr>
-        <p:style>
-          <a:lnRef idx="1">
-            <a:schemeClr val="accent1"/>
-          </a:lnRef>
-          <a:fillRef idx="3">
-            <a:schemeClr val="accent1"/>
-          </a:fillRef>
-          <a:effectRef idx="2">
-            <a:schemeClr val="accent1"/>
-          </a:effectRef>
-          <a:fontRef idx="minor">
-            <a:schemeClr val="lt1"/>
-          </a:fontRef>
-        </p:style>
-        <p:txBody>
-          <a:bodyPr rtlCol="0" anchor="ctr"/>
-          <a:lstStyle/>
-          <a:p>
-            <a:pPr algn="ctr"/>
-          </a:p>
-        </p:txBody>
-      </p:sp>
-      <p:sp>
-        <p:nvSpPr>
-          <p:cNvPr id="3" name="Rectangle 2"/>
-          <p:cNvSpPr/>
-          <p:nvPr/>
-        </p:nvSpPr>
-        <p:spPr>
-          <a:xfrm>
-            <a:off x="0" y="1170432"/>
-            <a:ext cx="12191695" cy="41148"/>
-          </a:xfrm>
-          <a:prstGeom prst="rect">
-            <a:avLst/>
-          </a:prstGeom>
-          <a:solidFill>
-            <a:srgbClr val="FFD000"/>
-          </a:solidFill>
-          <a:ln>
-            <a:noFill/>
-          </a:ln>
-        </p:spPr>
-        <p:style>
-          <a:lnRef idx="1">
-            <a:schemeClr val="accent1"/>
-          </a:lnRef>
-          <a:fillRef idx="3">
-            <a:schemeClr val="accent1"/>
-          </a:fillRef>
-          <a:effectRef idx="2">
-            <a:schemeClr val="accent1"/>
-          </a:effectRef>
-          <a:fontRef idx="minor">
-            <a:schemeClr val="lt1"/>
-          </a:fontRef>
-        </p:style>
-        <p:txBody>
-          <a:bodyPr rtlCol="0" anchor="ctr"/>
-          <a:lstStyle/>
-          <a:p>
-            <a:pPr algn="ctr"/>
-          </a:p>
-        </p:txBody>
-      </p:sp>
-      <p:sp>
-        <p:nvSpPr>
-          <p:cNvPr id="4" name="TextBox 3"/>
-          <p:cNvSpPr txBox="1"/>
-          <p:nvPr/>
-        </p:nvSpPr>
-        <p:spPr>
-          <a:xfrm>
-            <a:off x="457200" y="164592"/>
-            <a:ext cx="11277295" cy="384048"/>
-          </a:xfrm>
-          <a:prstGeom prst="rect">
-            <a:avLst/>
-          </a:prstGeom>
-          <a:noFill/>
-        </p:spPr>
-        <p:txBody>
-          <a:bodyPr wrap="square">
-            <a:spAutoFit/>
-          </a:bodyPr>
-          <a:lstStyle/>
-          <a:p>
-            <a:r>
-              <a:rPr sz="2600" b="1" i="0">
-                <a:solidFill>
-                  <a:srgbClr val="FFFFFF"/>
-                </a:solidFill>
-                <a:latin typeface="Calibri"/>
-              </a:rPr>
-              <a:t>Taller de hoy: Huella del sistema</a:t>
-            </a:r>
-          </a:p>
-        </p:txBody>
-      </p:sp>
-      <p:sp>
-        <p:nvSpPr>
-          <p:cNvPr id="5" name="TextBox 4"/>
-          <p:cNvSpPr txBox="1"/>
-          <p:nvPr/>
-        </p:nvSpPr>
-        <p:spPr>
-          <a:xfrm>
-            <a:off x="457200" y="566928"/>
-            <a:ext cx="11277295" cy="411480"/>
-          </a:xfrm>
-          <a:prstGeom prst="rect">
-            <a:avLst/>
-          </a:prstGeom>
-          <a:noFill/>
-        </p:spPr>
-        <p:txBody>
-          <a:bodyPr wrap="square">
-            <a:spAutoFit/>
-          </a:bodyPr>
-          <a:lstStyle/>
-          <a:p>
-            <a:r>
-              <a:rPr sz="1400" b="0" i="0">
-                <a:solidFill>
-                  <a:srgbClr val="B8D8EE"/>
-                </a:solidFill>
-                <a:latin typeface="Calibri"/>
-              </a:rPr>
-              <a:t>17 min en equipos · cada equipo, el sistema de su propio proyecto · diagrama de huella + 2 decisiones + 1 indicador</a:t>
-            </a:r>
-          </a:p>
-        </p:txBody>
-      </p:sp>
-      <p:sp>
-        <p:nvSpPr>
-          <p:cNvPr id="6" name="Rounded Rectangle 5"/>
-          <p:cNvSpPr/>
-          <p:nvPr/>
-        </p:nvSpPr>
-        <p:spPr>
-          <a:xfrm>
-            <a:off x="457200" y="1472184"/>
-            <a:ext cx="11277295" cy="566928"/>
-          </a:xfrm>
-          <a:prstGeom prst="roundRect">
-            <a:avLst>
-              <a:gd name="adj" fmla="val 12000"/>
-            </a:avLst>
-          </a:prstGeom>
-          <a:solidFill>
-            <a:srgbClr val="F2F2F2"/>
-          </a:solidFill>
-          <a:ln>
-            <a:noFill/>
-          </a:ln>
-        </p:spPr>
-        <p:style>
-          <a:lnRef idx="1">
-            <a:schemeClr val="accent1"/>
-          </a:lnRef>
-          <a:fillRef idx="3">
-            <a:schemeClr val="accent1"/>
-          </a:fillRef>
-          <a:effectRef idx="2">
-            <a:schemeClr val="accent1"/>
-          </a:effectRef>
-          <a:fontRef idx="minor">
-            <a:schemeClr val="lt1"/>
-          </a:fontRef>
-        </p:style>
-        <p:txBody>
-          <a:bodyPr rtlCol="0" anchor="ctr"/>
-          <a:lstStyle/>
-          <a:p>
-            <a:pPr algn="ctr"/>
-          </a:p>
-        </p:txBody>
-      </p:sp>
-      <p:sp>
-        <p:nvSpPr>
-          <p:cNvPr id="7" name="Rectangle 6"/>
-          <p:cNvSpPr/>
-          <p:nvPr/>
-        </p:nvSpPr>
-        <p:spPr>
-          <a:xfrm>
-            <a:off x="640080" y="1618487"/>
-            <a:ext cx="274320" cy="274320"/>
-          </a:xfrm>
-          <a:prstGeom prst="rect">
-            <a:avLst/>
-          </a:prstGeom>
-          <a:solidFill>
-            <a:srgbClr val="FFFFFF"/>
-          </a:solidFill>
-          <a:ln>
-            <a:solidFill>
-              <a:srgbClr val="333333"/>
-            </a:solidFill>
-          </a:ln>
-        </p:spPr>
-        <p:style>
-          <a:lnRef idx="1">
-            <a:schemeClr val="accent1"/>
-          </a:lnRef>
-          <a:fillRef idx="3">
-            <a:schemeClr val="accent1"/>
-          </a:fillRef>
-          <a:effectRef idx="2">
-            <a:schemeClr val="accent1"/>
-          </a:effectRef>
-          <a:fontRef idx="minor">
-            <a:schemeClr val="lt1"/>
-          </a:fontRef>
-        </p:style>
-        <p:txBody>
-          <a:bodyPr rtlCol="0" anchor="ctr"/>
-          <a:lstStyle/>
-          <a:p>
-            <a:pPr algn="ctr"/>
-          </a:p>
-        </p:txBody>
-      </p:sp>
-      <p:sp>
-        <p:nvSpPr>
-          <p:cNvPr id="8" name="Rectangle 7"/>
-          <p:cNvSpPr/>
-          <p:nvPr/>
-        </p:nvSpPr>
-        <p:spPr>
-          <a:xfrm>
-            <a:off x="640080" y="1618487"/>
-            <a:ext cx="73152" cy="274320"/>
-          </a:xfrm>
-          <a:prstGeom prst="rect">
-            <a:avLst/>
-          </a:prstGeom>
-          <a:solidFill>
-            <a:srgbClr val="269CCB"/>
-          </a:solidFill>
-          <a:ln>
-            <a:noFill/>
-          </a:ln>
-        </p:spPr>
-        <p:style>
-          <a:lnRef idx="1">
-            <a:schemeClr val="accent1"/>
-          </a:lnRef>
-          <a:fillRef idx="3">
-            <a:schemeClr val="accent1"/>
-          </a:fillRef>
-          <a:effectRef idx="2">
-            <a:schemeClr val="accent1"/>
-          </a:effectRef>
-          <a:fontRef idx="minor">
-            <a:schemeClr val="lt1"/>
-          </a:fontRef>
-        </p:style>
-        <p:txBody>
-          <a:bodyPr rtlCol="0" anchor="ctr"/>
-          <a:lstStyle/>
-          <a:p>
-            <a:pPr algn="ctr"/>
-          </a:p>
-        </p:txBody>
-      </p:sp>
-      <p:sp>
-        <p:nvSpPr>
-          <p:cNvPr id="9" name="TextBox 8"/>
-          <p:cNvSpPr txBox="1"/>
-          <p:nvPr/>
-        </p:nvSpPr>
-        <p:spPr>
-          <a:xfrm>
-            <a:off x="1097280" y="1563624"/>
-            <a:ext cx="10362895" cy="402336"/>
-          </a:xfrm>
-          <a:prstGeom prst="rect">
-            <a:avLst/>
-          </a:prstGeom>
-          <a:noFill/>
-        </p:spPr>
-        <p:txBody>
-          <a:bodyPr wrap="square" anchor="ctr"/>
-          <a:lstStyle/>
-          <a:p>
-            <a:r>
-              <a:rPr sz="1500" b="1" i="0">
-                <a:solidFill>
-                  <a:srgbClr val="333333"/>
-                </a:solidFill>
-                <a:latin typeface="Calibri"/>
-              </a:rPr>
-              <a:t>EL RECORRIDO DIBUJADO</a:t>
-            </a:r>
-            <a:r>
-              <a:rPr sz="1500" b="0" i="0">
-                <a:solidFill>
-                  <a:srgbClr val="333333"/>
-                </a:solidFill>
-                <a:latin typeface="Calibri"/>
-              </a:rPr>
-              <a:t> — El camino completo con flechas: dispositivo del usuario → red → servidor → almacenamiento, y todo lo que se prende para que el sistema funcione.</a:t>
-            </a:r>
-          </a:p>
-        </p:txBody>
-      </p:sp>
-      <p:sp>
-        <p:nvSpPr>
-          <p:cNvPr id="10" name="Rounded Rectangle 9"/>
-          <p:cNvSpPr/>
-          <p:nvPr/>
-        </p:nvSpPr>
-        <p:spPr>
-          <a:xfrm>
-            <a:off x="457200" y="2148839"/>
-            <a:ext cx="11277295" cy="566928"/>
-          </a:xfrm>
-          <a:prstGeom prst="roundRect">
-            <a:avLst>
-              <a:gd name="adj" fmla="val 12000"/>
-            </a:avLst>
-          </a:prstGeom>
-          <a:solidFill>
-            <a:srgbClr val="F2F2F2"/>
-          </a:solidFill>
-          <a:ln>
-            <a:noFill/>
-          </a:ln>
-        </p:spPr>
-        <p:style>
-          <a:lnRef idx="1">
-            <a:schemeClr val="accent1"/>
-          </a:lnRef>
-          <a:fillRef idx="3">
-            <a:schemeClr val="accent1"/>
-          </a:fillRef>
-          <a:effectRef idx="2">
-            <a:schemeClr val="accent1"/>
-          </a:effectRef>
-          <a:fontRef idx="minor">
-            <a:schemeClr val="lt1"/>
-          </a:fontRef>
-        </p:style>
-        <p:txBody>
-          <a:bodyPr rtlCol="0" anchor="ctr"/>
-          <a:lstStyle/>
-          <a:p>
-            <a:pPr algn="ctr"/>
-          </a:p>
-        </p:txBody>
-      </p:sp>
-      <p:sp>
-        <p:nvSpPr>
-          <p:cNvPr id="11" name="Rectangle 10"/>
-          <p:cNvSpPr/>
-          <p:nvPr/>
-        </p:nvSpPr>
-        <p:spPr>
-          <a:xfrm>
-            <a:off x="640080" y="2295144"/>
-            <a:ext cx="274320" cy="274320"/>
-          </a:xfrm>
-          <a:prstGeom prst="rect">
-            <a:avLst/>
-          </a:prstGeom>
-          <a:solidFill>
-            <a:srgbClr val="FFFFFF"/>
-          </a:solidFill>
-          <a:ln>
-            <a:solidFill>
-              <a:srgbClr val="333333"/>
-            </a:solidFill>
-          </a:ln>
-        </p:spPr>
-        <p:style>
-          <a:lnRef idx="1">
-            <a:schemeClr val="accent1"/>
-          </a:lnRef>
-          <a:fillRef idx="3">
-            <a:schemeClr val="accent1"/>
-          </a:fillRef>
-          <a:effectRef idx="2">
-            <a:schemeClr val="accent1"/>
-          </a:effectRef>
-          <a:fontRef idx="minor">
-            <a:schemeClr val="lt1"/>
-          </a:fontRef>
-        </p:style>
-        <p:txBody>
-          <a:bodyPr rtlCol="0" anchor="ctr"/>
-          <a:lstStyle/>
-          <a:p>
-            <a:pPr algn="ctr"/>
-          </a:p>
-        </p:txBody>
-      </p:sp>
-      <p:sp>
-        <p:nvSpPr>
-          <p:cNvPr id="12" name="Rectangle 11"/>
-          <p:cNvSpPr/>
-          <p:nvPr/>
-        </p:nvSpPr>
-        <p:spPr>
-          <a:xfrm>
-            <a:off x="640080" y="2295144"/>
-            <a:ext cx="73152" cy="274320"/>
-          </a:xfrm>
-          <a:prstGeom prst="rect">
-            <a:avLst/>
-          </a:prstGeom>
-          <a:solidFill>
-            <a:srgbClr val="269CCB"/>
-          </a:solidFill>
-          <a:ln>
-            <a:noFill/>
-          </a:ln>
-        </p:spPr>
-        <p:style>
-          <a:lnRef idx="1">
-            <a:schemeClr val="accent1"/>
-          </a:lnRef>
-          <a:fillRef idx="3">
-            <a:schemeClr val="accent1"/>
-          </a:fillRef>
-          <a:effectRef idx="2">
-            <a:schemeClr val="accent1"/>
-          </a:effectRef>
-          <a:fontRef idx="minor">
-            <a:schemeClr val="lt1"/>
-          </a:fontRef>
-        </p:style>
-        <p:txBody>
-          <a:bodyPr rtlCol="0" anchor="ctr"/>
-          <a:lstStyle/>
-          <a:p>
-            <a:pPr algn="ctr"/>
-          </a:p>
-        </p:txBody>
-      </p:sp>
-      <p:sp>
-        <p:nvSpPr>
-          <p:cNvPr id="13" name="TextBox 12"/>
-          <p:cNvSpPr txBox="1"/>
-          <p:nvPr/>
-        </p:nvSpPr>
-        <p:spPr>
-          <a:xfrm>
-            <a:off x="1097280" y="2240279"/>
-            <a:ext cx="10362895" cy="402336"/>
-          </a:xfrm>
-          <a:prstGeom prst="rect">
-            <a:avLst/>
-          </a:prstGeom>
-          <a:noFill/>
-        </p:spPr>
-        <p:txBody>
-          <a:bodyPr wrap="square" anchor="ctr"/>
-          <a:lstStyle/>
-          <a:p>
-            <a:r>
-              <a:rPr sz="1500" b="1" i="0">
-                <a:solidFill>
-                  <a:srgbClr val="333333"/>
-                </a:solidFill>
-                <a:latin typeface="Calibri"/>
-              </a:rPr>
-              <a:t>LO QUE SE REPITE</a:t>
-            </a:r>
-            <a:r>
-              <a:rPr sz="1500" b="0" i="0">
-                <a:solidFill>
-                  <a:srgbClr val="333333"/>
-                </a:solidFill>
-                <a:latin typeface="Calibri"/>
-              </a:rPr>
-              <a:t> — Qué operación ocurre </a:t>
-            </a:r>
-            <a:r>
-              <a:rPr sz="1500" b="1" i="0">
-                <a:solidFill>
-                  <a:srgbClr val="333333"/>
-                </a:solidFill>
-                <a:latin typeface="Calibri"/>
-              </a:rPr>
-              <a:t>muchas veces al día</a:t>
-            </a:r>
-            <a:r>
-              <a:rPr sz="1500" b="0" i="0">
-                <a:solidFill>
-                  <a:srgbClr val="333333"/>
-                </a:solidFill>
-                <a:latin typeface="Calibri"/>
-              </a:rPr>
-              <a:t> en su sistema, y una estimación gruesa de cuántas veces. Lo que pasa una vez no mueve nada.</a:t>
-            </a:r>
-          </a:p>
-        </p:txBody>
-      </p:sp>
-      <p:sp>
-        <p:nvSpPr>
-          <p:cNvPr id="14" name="Rounded Rectangle 13"/>
-          <p:cNvSpPr/>
-          <p:nvPr/>
-        </p:nvSpPr>
-        <p:spPr>
-          <a:xfrm>
-            <a:off x="457200" y="2825496"/>
-            <a:ext cx="11277295" cy="566928"/>
-          </a:xfrm>
-          <a:prstGeom prst="roundRect">
-            <a:avLst>
-              <a:gd name="adj" fmla="val 12000"/>
-            </a:avLst>
-          </a:prstGeom>
-          <a:solidFill>
-            <a:srgbClr val="F2F2F2"/>
-          </a:solidFill>
-          <a:ln>
-            <a:noFill/>
-          </a:ln>
-        </p:spPr>
-        <p:style>
-          <a:lnRef idx="1">
-            <a:schemeClr val="accent1"/>
-          </a:lnRef>
-          <a:fillRef idx="3">
-            <a:schemeClr val="accent1"/>
-          </a:fillRef>
-          <a:effectRef idx="2">
-            <a:schemeClr val="accent1"/>
-          </a:effectRef>
-          <a:fontRef idx="minor">
-            <a:schemeClr val="lt1"/>
-          </a:fontRef>
-        </p:style>
-        <p:txBody>
-          <a:bodyPr rtlCol="0" anchor="ctr"/>
-          <a:lstStyle/>
-          <a:p>
-            <a:pPr algn="ctr"/>
-          </a:p>
-        </p:txBody>
-      </p:sp>
-      <p:sp>
-        <p:nvSpPr>
-          <p:cNvPr id="15" name="Rectangle 14"/>
-          <p:cNvSpPr/>
-          <p:nvPr/>
-        </p:nvSpPr>
-        <p:spPr>
-          <a:xfrm>
-            <a:off x="640080" y="2971800"/>
-            <a:ext cx="274320" cy="274320"/>
-          </a:xfrm>
-          <a:prstGeom prst="rect">
-            <a:avLst/>
-          </a:prstGeom>
-          <a:solidFill>
-            <a:srgbClr val="FFFFFF"/>
-          </a:solidFill>
-          <a:ln>
-            <a:solidFill>
-              <a:srgbClr val="333333"/>
-            </a:solidFill>
-          </a:ln>
-        </p:spPr>
-        <p:style>
-          <a:lnRef idx="1">
-            <a:schemeClr val="accent1"/>
-          </a:lnRef>
-          <a:fillRef idx="3">
-            <a:schemeClr val="accent1"/>
-          </a:fillRef>
-          <a:effectRef idx="2">
-            <a:schemeClr val="accent1"/>
-          </a:effectRef>
-          <a:fontRef idx="minor">
-            <a:schemeClr val="lt1"/>
-          </a:fontRef>
-        </p:style>
-        <p:txBody>
-          <a:bodyPr rtlCol="0" anchor="ctr"/>
-          <a:lstStyle/>
-          <a:p>
-            <a:pPr algn="ctr"/>
-          </a:p>
-        </p:txBody>
-      </p:sp>
-      <p:sp>
-        <p:nvSpPr>
-          <p:cNvPr id="16" name="Rectangle 15"/>
-          <p:cNvSpPr/>
-          <p:nvPr/>
-        </p:nvSpPr>
-        <p:spPr>
-          <a:xfrm>
-            <a:off x="640080" y="2971800"/>
-            <a:ext cx="73152" cy="274320"/>
-          </a:xfrm>
-          <a:prstGeom prst="rect">
-            <a:avLst/>
-          </a:prstGeom>
-          <a:solidFill>
-            <a:srgbClr val="269CCB"/>
-          </a:solidFill>
-          <a:ln>
-            <a:noFill/>
-          </a:ln>
-        </p:spPr>
-        <p:style>
-          <a:lnRef idx="1">
-            <a:schemeClr val="accent1"/>
-          </a:lnRef>
-          <a:fillRef idx="3">
-            <a:schemeClr val="accent1"/>
-          </a:fillRef>
-          <a:effectRef idx="2">
-            <a:schemeClr val="accent1"/>
-          </a:effectRef>
-          <a:fontRef idx="minor">
-            <a:schemeClr val="lt1"/>
-          </a:fontRef>
-        </p:style>
-        <p:txBody>
-          <a:bodyPr rtlCol="0" anchor="ctr"/>
-          <a:lstStyle/>
-          <a:p>
-            <a:pPr algn="ctr"/>
-          </a:p>
-        </p:txBody>
-      </p:sp>
-      <p:sp>
-        <p:nvSpPr>
-          <p:cNvPr id="17" name="TextBox 16"/>
-          <p:cNvSpPr txBox="1"/>
-          <p:nvPr/>
-        </p:nvSpPr>
-        <p:spPr>
-          <a:xfrm>
-            <a:off x="1097280" y="2916936"/>
-            <a:ext cx="10362895" cy="402336"/>
-          </a:xfrm>
-          <a:prstGeom prst="rect">
-            <a:avLst/>
-          </a:prstGeom>
-          <a:noFill/>
-        </p:spPr>
-        <p:txBody>
-          <a:bodyPr wrap="square" anchor="ctr"/>
-          <a:lstStyle/>
-          <a:p>
-            <a:r>
-              <a:rPr sz="1500" b="1" i="0">
-                <a:solidFill>
-                  <a:srgbClr val="333333"/>
-                </a:solidFill>
-                <a:latin typeface="Calibri"/>
-              </a:rPr>
-              <a:t>LA ETAPA QUE MÁS PESA</a:t>
-            </a:r>
-            <a:r>
-              <a:rPr sz="1500" b="0" i="0">
-                <a:solidFill>
-                  <a:srgbClr val="333333"/>
-                </a:solidFill>
-                <a:latin typeface="Calibri"/>
-              </a:rPr>
-              <a:t> — Una sola etapa, con la razón. No hace falta un cálculo exacto: hace falta saber dónde apretar.</a:t>
-            </a:r>
-          </a:p>
-        </p:txBody>
-      </p:sp>
-      <p:sp>
-        <p:nvSpPr>
-          <p:cNvPr id="18" name="Rounded Rectangle 17"/>
-          <p:cNvSpPr/>
-          <p:nvPr/>
-        </p:nvSpPr>
-        <p:spPr>
-          <a:xfrm>
-            <a:off x="457200" y="3502152"/>
-            <a:ext cx="11277295" cy="566928"/>
-          </a:xfrm>
-          <a:prstGeom prst="roundRect">
-            <a:avLst>
-              <a:gd name="adj" fmla="val 12000"/>
-            </a:avLst>
-          </a:prstGeom>
-          <a:solidFill>
-            <a:srgbClr val="F2F2F2"/>
-          </a:solidFill>
-          <a:ln>
-            <a:noFill/>
-          </a:ln>
-        </p:spPr>
-        <p:style>
-          <a:lnRef idx="1">
-            <a:schemeClr val="accent1"/>
-          </a:lnRef>
-          <a:fillRef idx="3">
-            <a:schemeClr val="accent1"/>
-          </a:fillRef>
-          <a:effectRef idx="2">
-            <a:schemeClr val="accent1"/>
-          </a:effectRef>
-          <a:fontRef idx="minor">
-            <a:schemeClr val="lt1"/>
-          </a:fontRef>
-        </p:style>
-        <p:txBody>
-          <a:bodyPr rtlCol="0" anchor="ctr"/>
-          <a:lstStyle/>
-          <a:p>
-            <a:pPr algn="ctr"/>
-          </a:p>
-        </p:txBody>
-      </p:sp>
-      <p:sp>
-        <p:nvSpPr>
-          <p:cNvPr id="19" name="Rectangle 18"/>
-          <p:cNvSpPr/>
-          <p:nvPr/>
-        </p:nvSpPr>
-        <p:spPr>
-          <a:xfrm>
-            <a:off x="640080" y="3648456"/>
-            <a:ext cx="274320" cy="274320"/>
-          </a:xfrm>
-          <a:prstGeom prst="rect">
-            <a:avLst/>
-          </a:prstGeom>
-          <a:solidFill>
-            <a:srgbClr val="FFFFFF"/>
-          </a:solidFill>
-          <a:ln>
-            <a:solidFill>
-              <a:srgbClr val="333333"/>
-            </a:solidFill>
-          </a:ln>
-        </p:spPr>
-        <p:style>
-          <a:lnRef idx="1">
-            <a:schemeClr val="accent1"/>
-          </a:lnRef>
-          <a:fillRef idx="3">
-            <a:schemeClr val="accent1"/>
-          </a:fillRef>
-          <a:effectRef idx="2">
-            <a:schemeClr val="accent1"/>
-          </a:effectRef>
-          <a:fontRef idx="minor">
-            <a:schemeClr val="lt1"/>
-          </a:fontRef>
-        </p:style>
-        <p:txBody>
-          <a:bodyPr rtlCol="0" anchor="ctr"/>
-          <a:lstStyle/>
-          <a:p>
-            <a:pPr algn="ctr"/>
-          </a:p>
-        </p:txBody>
-      </p:sp>
-      <p:sp>
-        <p:nvSpPr>
-          <p:cNvPr id="20" name="Rectangle 19"/>
-          <p:cNvSpPr/>
-          <p:nvPr/>
-        </p:nvSpPr>
-        <p:spPr>
-          <a:xfrm>
-            <a:off x="640080" y="3648456"/>
-            <a:ext cx="73152" cy="274320"/>
-          </a:xfrm>
-          <a:prstGeom prst="rect">
-            <a:avLst/>
-          </a:prstGeom>
-          <a:solidFill>
-            <a:srgbClr val="269CCB"/>
-          </a:solidFill>
-          <a:ln>
-            <a:noFill/>
-          </a:ln>
-        </p:spPr>
-        <p:style>
-          <a:lnRef idx="1">
-            <a:schemeClr val="accent1"/>
-          </a:lnRef>
-          <a:fillRef idx="3">
-            <a:schemeClr val="accent1"/>
-          </a:fillRef>
-          <a:effectRef idx="2">
-            <a:schemeClr val="accent1"/>
-          </a:effectRef>
-          <a:fontRef idx="minor">
-            <a:schemeClr val="lt1"/>
-          </a:fontRef>
-        </p:style>
-        <p:txBody>
-          <a:bodyPr rtlCol="0" anchor="ctr"/>
-          <a:lstStyle/>
-          <a:p>
-            <a:pPr algn="ctr"/>
-          </a:p>
-        </p:txBody>
-      </p:sp>
-      <p:sp>
-        <p:nvSpPr>
-          <p:cNvPr id="21" name="TextBox 20"/>
-          <p:cNvSpPr txBox="1"/>
-          <p:nvPr/>
-        </p:nvSpPr>
-        <p:spPr>
-          <a:xfrm>
-            <a:off x="1097280" y="3593592"/>
-            <a:ext cx="10362895" cy="402336"/>
-          </a:xfrm>
-          <a:prstGeom prst="rect">
-            <a:avLst/>
-          </a:prstGeom>
-          <a:noFill/>
-        </p:spPr>
-        <p:txBody>
-          <a:bodyPr wrap="square" anchor="ctr"/>
-          <a:lstStyle/>
-          <a:p>
-            <a:r>
-              <a:rPr sz="1500" b="1" i="0">
-                <a:solidFill>
-                  <a:srgbClr val="333333"/>
-                </a:solidFill>
-                <a:latin typeface="Calibri"/>
-              </a:rPr>
-              <a:t>DOS DECISIONES DE DISEÑO</a:t>
-            </a:r>
-            <a:r>
-              <a:rPr sz="1500" b="0" i="0">
-                <a:solidFill>
-                  <a:srgbClr val="333333"/>
-                </a:solidFill>
-                <a:latin typeface="Calibri"/>
-              </a:rPr>
-              <a:t> — Dos cosas que </a:t>
-            </a:r>
-            <a:r>
-              <a:rPr sz="1500" b="1" i="0">
-                <a:solidFill>
-                  <a:srgbClr val="333333"/>
-                </a:solidFill>
-                <a:latin typeface="Calibri"/>
-              </a:rPr>
-              <a:t>ustedes</a:t>
-            </a:r>
-            <a:r>
-              <a:rPr sz="1500" b="0" i="0">
-                <a:solidFill>
-                  <a:srgbClr val="333333"/>
-                </a:solidFill>
-                <a:latin typeface="Calibri"/>
-              </a:rPr>
-              <a:t> pueden decidir en su sistema para bajar esa etapa. De diseño, no de comportamiento del usuario.</a:t>
-            </a:r>
-          </a:p>
-        </p:txBody>
-      </p:sp>
-      <p:sp>
-        <p:nvSpPr>
-          <p:cNvPr id="22" name="Rounded Rectangle 21"/>
-          <p:cNvSpPr/>
-          <p:nvPr/>
-        </p:nvSpPr>
-        <p:spPr>
-          <a:xfrm>
-            <a:off x="457200" y="4178808"/>
-            <a:ext cx="11277295" cy="566928"/>
-          </a:xfrm>
-          <a:prstGeom prst="roundRect">
-            <a:avLst>
-              <a:gd name="adj" fmla="val 12000"/>
-            </a:avLst>
-          </a:prstGeom>
-          <a:solidFill>
-            <a:srgbClr val="F2F2F2"/>
-          </a:solidFill>
-          <a:ln>
-            <a:noFill/>
-          </a:ln>
-        </p:spPr>
-        <p:style>
-          <a:lnRef idx="1">
-            <a:schemeClr val="accent1"/>
-          </a:lnRef>
-          <a:fillRef idx="3">
-            <a:schemeClr val="accent1"/>
-          </a:fillRef>
-          <a:effectRef idx="2">
-            <a:schemeClr val="accent1"/>
-          </a:effectRef>
-          <a:fontRef idx="minor">
-            <a:schemeClr val="lt1"/>
-          </a:fontRef>
-        </p:style>
-        <p:txBody>
-          <a:bodyPr rtlCol="0" anchor="ctr"/>
-          <a:lstStyle/>
-          <a:p>
-            <a:pPr algn="ctr"/>
-          </a:p>
-        </p:txBody>
-      </p:sp>
-      <p:sp>
-        <p:nvSpPr>
-          <p:cNvPr id="23" name="Rectangle 22"/>
-          <p:cNvSpPr/>
-          <p:nvPr/>
-        </p:nvSpPr>
-        <p:spPr>
-          <a:xfrm>
-            <a:off x="640080" y="4325112"/>
-            <a:ext cx="274320" cy="274320"/>
-          </a:xfrm>
-          <a:prstGeom prst="rect">
-            <a:avLst/>
-          </a:prstGeom>
-          <a:solidFill>
-            <a:srgbClr val="FFFFFF"/>
-          </a:solidFill>
-          <a:ln>
-            <a:solidFill>
-              <a:srgbClr val="333333"/>
-            </a:solidFill>
-          </a:ln>
-        </p:spPr>
-        <p:style>
-          <a:lnRef idx="1">
-            <a:schemeClr val="accent1"/>
-          </a:lnRef>
-          <a:fillRef idx="3">
-            <a:schemeClr val="accent1"/>
-          </a:fillRef>
-          <a:effectRef idx="2">
-            <a:schemeClr val="accent1"/>
-          </a:effectRef>
-          <a:fontRef idx="minor">
-            <a:schemeClr val="lt1"/>
-          </a:fontRef>
-        </p:style>
-        <p:txBody>
-          <a:bodyPr rtlCol="0" anchor="ctr"/>
-          <a:lstStyle/>
-          <a:p>
-            <a:pPr algn="ctr"/>
-          </a:p>
-        </p:txBody>
-      </p:sp>
-      <p:sp>
-        <p:nvSpPr>
-          <p:cNvPr id="24" name="Rectangle 23"/>
-          <p:cNvSpPr/>
-          <p:nvPr/>
-        </p:nvSpPr>
-        <p:spPr>
-          <a:xfrm>
-            <a:off x="640080" y="4325112"/>
-            <a:ext cx="73152" cy="274320"/>
-          </a:xfrm>
-          <a:prstGeom prst="rect">
-            <a:avLst/>
-          </a:prstGeom>
-          <a:solidFill>
-            <a:srgbClr val="269CCB"/>
-          </a:solidFill>
-          <a:ln>
-            <a:noFill/>
-          </a:ln>
-        </p:spPr>
-        <p:style>
-          <a:lnRef idx="1">
-            <a:schemeClr val="accent1"/>
-          </a:lnRef>
-          <a:fillRef idx="3">
-            <a:schemeClr val="accent1"/>
-          </a:fillRef>
-          <a:effectRef idx="2">
-            <a:schemeClr val="accent1"/>
-          </a:effectRef>
-          <a:fontRef idx="minor">
-            <a:schemeClr val="lt1"/>
-          </a:fontRef>
-        </p:style>
-        <p:txBody>
-          <a:bodyPr rtlCol="0" anchor="ctr"/>
-          <a:lstStyle/>
-          <a:p>
-            <a:pPr algn="ctr"/>
-          </a:p>
-        </p:txBody>
-      </p:sp>
-      <p:sp>
-        <p:nvSpPr>
-          <p:cNvPr id="25" name="TextBox 24"/>
-          <p:cNvSpPr txBox="1"/>
-          <p:nvPr/>
-        </p:nvSpPr>
-        <p:spPr>
-          <a:xfrm>
-            <a:off x="1097280" y="4270248"/>
-            <a:ext cx="10362895" cy="402336"/>
-          </a:xfrm>
-          <a:prstGeom prst="rect">
-            <a:avLst/>
-          </a:prstGeom>
-          <a:noFill/>
-        </p:spPr>
-        <p:txBody>
-          <a:bodyPr wrap="square" anchor="ctr"/>
-          <a:lstStyle/>
-          <a:p>
-            <a:r>
-              <a:rPr sz="1500" b="1" i="0">
-                <a:solidFill>
-                  <a:srgbClr val="333333"/>
-                </a:solidFill>
-                <a:latin typeface="Calibri"/>
-              </a:rPr>
-              <a:t>EL INDICADOR</a:t>
-            </a:r>
-            <a:r>
-              <a:rPr sz="1500" b="0" i="0">
-                <a:solidFill>
-                  <a:srgbClr val="333333"/>
-                </a:solidFill>
-                <a:latin typeface="Calibri"/>
-              </a:rPr>
-              <a:t> — Un número que se pueda medir al final del semestre para saber si la decisión funcionó. Con su unidad.</a:t>
-            </a:r>
-          </a:p>
-        </p:txBody>
-      </p:sp>
-      <p:sp>
-        <p:nvSpPr>
-          <p:cNvPr id="26" name="TextBox 25"/>
-          <p:cNvSpPr txBox="1"/>
-          <p:nvPr/>
-        </p:nvSpPr>
-        <p:spPr>
-          <a:xfrm>
-            <a:off x="11185855" y="6473952"/>
-            <a:ext cx="640080" cy="274320"/>
-          </a:xfrm>
-          <a:prstGeom prst="rect">
-            <a:avLst/>
-          </a:prstGeom>
-          <a:noFill/>
-        </p:spPr>
-        <p:txBody>
-          <a:bodyPr wrap="square">
-            <a:spAutoFit/>
-          </a:bodyPr>
-          <a:lstStyle/>
-          <a:p>
-            <a:pPr algn="r"/>
-            <a:r>
-              <a:rPr sz="1100" b="0" i="0">
-                <a:solidFill>
-                  <a:srgbClr val="666666"/>
-                </a:solidFill>
-                <a:latin typeface="Calibri"/>
-              </a:rPr>
-              <a:t>15</a:t>
-            </a:r>
-          </a:p>
-        </p:txBody>
-      </p:sp>
-    </p:spTree>
-  </p:cSld>
-  <p:clrMapOvr>
-    <a:masterClrMapping/>
-  </p:clrMapOvr>
-</p:sld>
-</file>
-
-<file path=ppt/slides/slide16.xml><?xml version="1.0" encoding="utf-8"?>
-<p:sld xmlns:a="http://schemas.openxmlformats.org/drawingml/2006/main" xmlns:p="http://schemas.openxmlformats.org/presentationml/2006/main" xmlns:r="http://schemas.openxmlformats.org/officeDocument/2006/relationships">
-  <p:cSld>
-    <p:bg>
-      <p:bgPr>
-        <a:solidFill>
-          <a:srgbClr val="FFFFFF"/>
-        </a:solidFill>
-        <a:effectLst/>
-      </p:bgPr>
-    </p:bg>
-    <p:spTree>
-      <p:nvGrpSpPr>
-        <p:cNvPr id="1" name=""/>
-        <p:cNvGrpSpPr/>
-        <p:nvPr/>
-      </p:nvGrpSpPr>
-      <p:grpSpPr/>
-      <p:sp>
-        <p:nvSpPr>
-          <p:cNvPr id="2" name="Rectangle 1"/>
-          <p:cNvSpPr/>
-          <p:nvPr/>
-        </p:nvSpPr>
-        <p:spPr>
-          <a:xfrm>
-            <a:off x="0" y="0"/>
-            <a:ext cx="12191695" cy="1170432"/>
-          </a:xfrm>
-          <a:prstGeom prst="rect">
-            <a:avLst/>
-          </a:prstGeom>
-          <a:solidFill>
-            <a:srgbClr val="095292"/>
-          </a:solidFill>
-          <a:ln>
-            <a:noFill/>
-          </a:ln>
-        </p:spPr>
-        <p:style>
-          <a:lnRef idx="1">
-            <a:schemeClr val="accent1"/>
-          </a:lnRef>
-          <a:fillRef idx="3">
-            <a:schemeClr val="accent1"/>
-          </a:fillRef>
-          <a:effectRef idx="2">
-            <a:schemeClr val="accent1"/>
-          </a:effectRef>
-          <a:fontRef idx="minor">
-            <a:schemeClr val="lt1"/>
-          </a:fontRef>
-        </p:style>
-        <p:txBody>
-          <a:bodyPr rtlCol="0" anchor="ctr"/>
-          <a:lstStyle/>
-          <a:p>
-            <a:pPr algn="ctr"/>
-          </a:p>
-        </p:txBody>
-      </p:sp>
-      <p:sp>
-        <p:nvSpPr>
-          <p:cNvPr id="3" name="Rectangle 2"/>
-          <p:cNvSpPr/>
-          <p:nvPr/>
-        </p:nvSpPr>
-        <p:spPr>
-          <a:xfrm>
-            <a:off x="0" y="1170432"/>
-            <a:ext cx="12191695" cy="41148"/>
-          </a:xfrm>
-          <a:prstGeom prst="rect">
-            <a:avLst/>
-          </a:prstGeom>
-          <a:solidFill>
-            <a:srgbClr val="FFD000"/>
-          </a:solidFill>
-          <a:ln>
-            <a:noFill/>
-          </a:ln>
-        </p:spPr>
-        <p:style>
-          <a:lnRef idx="1">
-            <a:schemeClr val="accent1"/>
-          </a:lnRef>
-          <a:fillRef idx="3">
-            <a:schemeClr val="accent1"/>
-          </a:fillRef>
-          <a:effectRef idx="2">
-            <a:schemeClr val="accent1"/>
-          </a:effectRef>
-          <a:fontRef idx="minor">
-            <a:schemeClr val="lt1"/>
-          </a:fontRef>
-        </p:style>
-        <p:txBody>
-          <a:bodyPr rtlCol="0" anchor="ctr"/>
-          <a:lstStyle/>
-          <a:p>
-            <a:pPr algn="ctr"/>
-          </a:p>
-        </p:txBody>
-      </p:sp>
-      <p:sp>
-        <p:nvSpPr>
-          <p:cNvPr id="4" name="TextBox 3"/>
-          <p:cNvSpPr txBox="1"/>
-          <p:nvPr/>
-        </p:nvSpPr>
-        <p:spPr>
-          <a:xfrm>
-            <a:off x="457200" y="164592"/>
-            <a:ext cx="11277295" cy="384048"/>
-          </a:xfrm>
-          <a:prstGeom prst="rect">
-            <a:avLst/>
-          </a:prstGeom>
-          <a:noFill/>
-        </p:spPr>
-        <p:txBody>
-          <a:bodyPr wrap="square">
-            <a:spAutoFit/>
-          </a:bodyPr>
-          <a:lstStyle/>
-          <a:p>
-            <a:r>
-              <a:rPr sz="2600" b="1" i="0">
-                <a:solidFill>
-                  <a:srgbClr val="FFFFFF"/>
-                </a:solidFill>
-                <a:latin typeface="Calibri"/>
-              </a:rPr>
-              <a:t>Cómo se expone en 3 minutos</a:t>
-            </a:r>
-          </a:p>
-        </p:txBody>
-      </p:sp>
-      <p:sp>
-        <p:nvSpPr>
-          <p:cNvPr id="5" name="TextBox 4"/>
-          <p:cNvSpPr txBox="1"/>
-          <p:nvPr/>
-        </p:nvSpPr>
-        <p:spPr>
-          <a:xfrm>
-            <a:off x="457200" y="566928"/>
-            <a:ext cx="11277295" cy="411480"/>
-          </a:xfrm>
-          <a:prstGeom prst="rect">
-            <a:avLst/>
-          </a:prstGeom>
-          <a:noFill/>
-        </p:spPr>
-        <p:txBody>
-          <a:bodyPr wrap="square">
-            <a:spAutoFit/>
-          </a:bodyPr>
-          <a:lstStyle/>
-          <a:p>
-            <a:r>
-              <a:rPr sz="1400" b="0" i="0">
-                <a:solidFill>
-                  <a:srgbClr val="B8D8EE"/>
-                </a:solidFill>
-                <a:latin typeface="Calibri"/>
-              </a:rPr>
-              <a:t>Habla el vocero con la pantalla ya compartida · cronómetro en pantalla · se corta al llegar a cero</a:t>
-            </a:r>
-          </a:p>
-        </p:txBody>
-      </p:sp>
-      <p:sp>
-        <p:nvSpPr>
-          <p:cNvPr id="6" name="Rounded Rectangle 5"/>
-          <p:cNvSpPr/>
-          <p:nvPr/>
-        </p:nvSpPr>
-        <p:spPr>
-          <a:xfrm>
-            <a:off x="457200" y="1444752"/>
-            <a:ext cx="11277295" cy="908913"/>
-          </a:xfrm>
-          <a:prstGeom prst="roundRect">
-            <a:avLst>
-              <a:gd name="adj" fmla="val 12000"/>
-            </a:avLst>
-          </a:prstGeom>
-          <a:solidFill>
-            <a:srgbClr val="F2F2F2"/>
-          </a:solidFill>
-          <a:ln>
-            <a:noFill/>
-          </a:ln>
-        </p:spPr>
-        <p:style>
-          <a:lnRef idx="1">
-            <a:schemeClr val="accent1"/>
-          </a:lnRef>
-          <a:fillRef idx="3">
-            <a:schemeClr val="accent1"/>
-          </a:fillRef>
-          <a:effectRef idx="2">
-            <a:schemeClr val="accent1"/>
-          </a:effectRef>
-          <a:fontRef idx="minor">
-            <a:schemeClr val="lt1"/>
-          </a:fontRef>
-        </p:style>
-        <p:txBody>
-          <a:bodyPr rtlCol="0" anchor="ctr"/>
-          <a:lstStyle/>
-          <a:p>
-            <a:pPr algn="ctr"/>
-          </a:p>
-        </p:txBody>
-      </p:sp>
-      <p:sp>
-        <p:nvSpPr>
-          <p:cNvPr id="7" name="Rounded Rectangle 6"/>
-          <p:cNvSpPr/>
-          <p:nvPr/>
-        </p:nvSpPr>
-        <p:spPr>
-          <a:xfrm>
-            <a:off x="594360" y="1679752"/>
-            <a:ext cx="438912" cy="438912"/>
-          </a:xfrm>
-          <a:prstGeom prst="roundRect">
-            <a:avLst>
-              <a:gd name="adj" fmla="val 12000"/>
-            </a:avLst>
-          </a:prstGeom>
-          <a:solidFill>
-            <a:srgbClr val="095292"/>
-          </a:solidFill>
-          <a:ln>
-            <a:noFill/>
-          </a:ln>
-        </p:spPr>
-        <p:style>
-          <a:lnRef idx="1">
-            <a:schemeClr val="accent1"/>
-          </a:lnRef>
-          <a:fillRef idx="3">
-            <a:schemeClr val="accent1"/>
-          </a:fillRef>
-          <a:effectRef idx="2">
-            <a:schemeClr val="accent1"/>
-          </a:effectRef>
-          <a:fontRef idx="minor">
-            <a:schemeClr val="lt1"/>
-          </a:fontRef>
-        </p:style>
-        <p:txBody>
-          <a:bodyPr rtlCol="0" anchor="ctr"/>
-          <a:lstStyle/>
-          <a:p>
-            <a:pPr algn="ctr"/>
-          </a:p>
-        </p:txBody>
-      </p:sp>
-      <p:sp>
-        <p:nvSpPr>
-          <p:cNvPr id="8" name="TextBox 7"/>
-          <p:cNvSpPr txBox="1"/>
-          <p:nvPr/>
-        </p:nvSpPr>
-        <p:spPr>
-          <a:xfrm>
-            <a:off x="594360" y="1679752"/>
-            <a:ext cx="438912" cy="438912"/>
-          </a:xfrm>
-          <a:prstGeom prst="rect">
-            <a:avLst/>
-          </a:prstGeom>
-          <a:noFill/>
-        </p:spPr>
-        <p:txBody>
-          <a:bodyPr wrap="square" anchor="ctr"/>
-          <a:lstStyle/>
-          <a:p>
-            <a:pPr algn="ctr"/>
-            <a:r>
-              <a:rPr sz="1600" b="1" i="0">
-                <a:solidFill>
-                  <a:srgbClr val="FFFFFF"/>
-                </a:solidFill>
-                <a:latin typeface="Calibri"/>
-              </a:rPr>
-              <a:t>1</a:t>
-            </a:r>
-          </a:p>
-        </p:txBody>
-      </p:sp>
-      <p:sp>
-        <p:nvSpPr>
-          <p:cNvPr id="9" name="TextBox 8"/>
-          <p:cNvSpPr txBox="1"/>
-          <p:nvPr/>
-        </p:nvSpPr>
-        <p:spPr>
-          <a:xfrm>
-            <a:off x="1188720" y="1536192"/>
-            <a:ext cx="10271455" cy="744321"/>
-          </a:xfrm>
-          <a:prstGeom prst="rect">
-            <a:avLst/>
-          </a:prstGeom>
-          <a:noFill/>
-        </p:spPr>
-        <p:txBody>
-          <a:bodyPr wrap="square" anchor="ctr"/>
-          <a:lstStyle/>
-          <a:p>
-            <a:r>
-              <a:rPr sz="1500" b="1" i="0">
-                <a:solidFill>
-                  <a:srgbClr val="095292"/>
-                </a:solidFill>
-                <a:latin typeface="Calibri"/>
-              </a:rPr>
-              <a:t>40 s · El recorrido</a:t>
-            </a:r>
-          </a:p>
-          <a:p>
-            <a:pPr>
-              <a:spcBef>
-                <a:spcPts val="200"/>
-              </a:spcBef>
-            </a:pPr>
-            <a:r>
-              <a:rPr sz="1300" b="0" i="0">
-                <a:solidFill>
-                  <a:srgbClr val="333333"/>
-                </a:solidFill>
-                <a:latin typeface="Calibri"/>
-              </a:rPr>
-              <a:t>El diagrama, recorrido con el cursor. Dónde está cada etapa.</a:t>
-            </a:r>
-          </a:p>
-        </p:txBody>
-      </p:sp>
-      <p:sp>
-        <p:nvSpPr>
-          <p:cNvPr id="10" name="Rounded Rectangle 9"/>
-          <p:cNvSpPr/>
-          <p:nvPr/>
-        </p:nvSpPr>
-        <p:spPr>
-          <a:xfrm>
-            <a:off x="457200" y="2445105"/>
-            <a:ext cx="11277295" cy="908913"/>
-          </a:xfrm>
-          <a:prstGeom prst="roundRect">
-            <a:avLst>
-              <a:gd name="adj" fmla="val 12000"/>
-            </a:avLst>
-          </a:prstGeom>
-          <a:solidFill>
-            <a:srgbClr val="E8F4FA"/>
-          </a:solidFill>
-          <a:ln>
-            <a:noFill/>
-          </a:ln>
-        </p:spPr>
-        <p:style>
-          <a:lnRef idx="1">
-            <a:schemeClr val="accent1"/>
-          </a:lnRef>
-          <a:fillRef idx="3">
-            <a:schemeClr val="accent1"/>
-          </a:fillRef>
-          <a:effectRef idx="2">
-            <a:schemeClr val="accent1"/>
-          </a:effectRef>
-          <a:fontRef idx="minor">
-            <a:schemeClr val="lt1"/>
-          </a:fontRef>
-        </p:style>
-        <p:txBody>
-          <a:bodyPr rtlCol="0" anchor="ctr"/>
-          <a:lstStyle/>
-          <a:p>
-            <a:pPr algn="ctr"/>
-          </a:p>
-        </p:txBody>
-      </p:sp>
-      <p:sp>
-        <p:nvSpPr>
-          <p:cNvPr id="11" name="Rounded Rectangle 10"/>
-          <p:cNvSpPr/>
-          <p:nvPr/>
-        </p:nvSpPr>
-        <p:spPr>
-          <a:xfrm>
-            <a:off x="594360" y="2680106"/>
-            <a:ext cx="438912" cy="438912"/>
-          </a:xfrm>
-          <a:prstGeom prst="roundRect">
-            <a:avLst>
-              <a:gd name="adj" fmla="val 12000"/>
-            </a:avLst>
-          </a:prstGeom>
-          <a:solidFill>
-            <a:srgbClr val="095292"/>
-          </a:solidFill>
-          <a:ln>
-            <a:noFill/>
-          </a:ln>
-        </p:spPr>
-        <p:style>
-          <a:lnRef idx="1">
-            <a:schemeClr val="accent1"/>
-          </a:lnRef>
-          <a:fillRef idx="3">
-            <a:schemeClr val="accent1"/>
-          </a:fillRef>
-          <a:effectRef idx="2">
-            <a:schemeClr val="accent1"/>
-          </a:effectRef>
-          <a:fontRef idx="minor">
-            <a:schemeClr val="lt1"/>
-          </a:fontRef>
-        </p:style>
-        <p:txBody>
-          <a:bodyPr rtlCol="0" anchor="ctr"/>
-          <a:lstStyle/>
-          <a:p>
-            <a:pPr algn="ctr"/>
-          </a:p>
-        </p:txBody>
-      </p:sp>
-      <p:sp>
-        <p:nvSpPr>
-          <p:cNvPr id="12" name="TextBox 11"/>
-          <p:cNvSpPr txBox="1"/>
-          <p:nvPr/>
-        </p:nvSpPr>
-        <p:spPr>
-          <a:xfrm>
-            <a:off x="594360" y="2680106"/>
-            <a:ext cx="438912" cy="438912"/>
-          </a:xfrm>
-          <a:prstGeom prst="rect">
-            <a:avLst/>
-          </a:prstGeom>
-          <a:noFill/>
-        </p:spPr>
-        <p:txBody>
-          <a:bodyPr wrap="square" anchor="ctr"/>
-          <a:lstStyle/>
-          <a:p>
-            <a:pPr algn="ctr"/>
-            <a:r>
-              <a:rPr sz="1600" b="1" i="0">
-                <a:solidFill>
-                  <a:srgbClr val="FFFFFF"/>
-                </a:solidFill>
-                <a:latin typeface="Calibri"/>
-              </a:rPr>
-              <a:t>2</a:t>
-            </a:r>
-          </a:p>
-        </p:txBody>
-      </p:sp>
-      <p:sp>
-        <p:nvSpPr>
-          <p:cNvPr id="13" name="TextBox 12"/>
-          <p:cNvSpPr txBox="1"/>
-          <p:nvPr/>
-        </p:nvSpPr>
-        <p:spPr>
-          <a:xfrm>
-            <a:off x="1188720" y="2536545"/>
-            <a:ext cx="10271455" cy="744321"/>
-          </a:xfrm>
-          <a:prstGeom prst="rect">
-            <a:avLst/>
-          </a:prstGeom>
-          <a:noFill/>
-        </p:spPr>
-        <p:txBody>
-          <a:bodyPr wrap="square" anchor="ctr"/>
-          <a:lstStyle/>
-          <a:p>
-            <a:r>
-              <a:rPr sz="1500" b="1" i="0">
-                <a:solidFill>
-                  <a:srgbClr val="095292"/>
-                </a:solidFill>
-                <a:latin typeface="Calibri"/>
-              </a:rPr>
-              <a:t>30 s · Lo que se repite</a:t>
-            </a:r>
-          </a:p>
-          <a:p>
-            <a:pPr>
-              <a:spcBef>
-                <a:spcPts val="200"/>
-              </a:spcBef>
-            </a:pPr>
-            <a:r>
-              <a:rPr sz="1300" b="0" i="0">
-                <a:solidFill>
-                  <a:srgbClr val="333333"/>
-                </a:solidFill>
-                <a:latin typeface="Calibri"/>
-              </a:rPr>
-              <a:t>La operación repetida y cuántas veces al día.</a:t>
-            </a:r>
-          </a:p>
-        </p:txBody>
-      </p:sp>
-      <p:sp>
-        <p:nvSpPr>
-          <p:cNvPr id="14" name="Rounded Rectangle 13"/>
-          <p:cNvSpPr/>
-          <p:nvPr/>
-        </p:nvSpPr>
-        <p:spPr>
-          <a:xfrm>
-            <a:off x="457200" y="3445459"/>
-            <a:ext cx="11277295" cy="908913"/>
-          </a:xfrm>
-          <a:prstGeom prst="roundRect">
-            <a:avLst>
-              <a:gd name="adj" fmla="val 12000"/>
-            </a:avLst>
-          </a:prstGeom>
-          <a:solidFill>
-            <a:srgbClr val="F2F2F2"/>
-          </a:solidFill>
-          <a:ln>
-            <a:noFill/>
-          </a:ln>
-        </p:spPr>
-        <p:style>
-          <a:lnRef idx="1">
-            <a:schemeClr val="accent1"/>
-          </a:lnRef>
-          <a:fillRef idx="3">
-            <a:schemeClr val="accent1"/>
-          </a:fillRef>
-          <a:effectRef idx="2">
-            <a:schemeClr val="accent1"/>
-          </a:effectRef>
-          <a:fontRef idx="minor">
-            <a:schemeClr val="lt1"/>
-          </a:fontRef>
-        </p:style>
-        <p:txBody>
-          <a:bodyPr rtlCol="0" anchor="ctr"/>
-          <a:lstStyle/>
-          <a:p>
-            <a:pPr algn="ctr"/>
-          </a:p>
-        </p:txBody>
-      </p:sp>
-      <p:sp>
-        <p:nvSpPr>
-          <p:cNvPr id="15" name="Rounded Rectangle 14"/>
-          <p:cNvSpPr/>
-          <p:nvPr/>
-        </p:nvSpPr>
-        <p:spPr>
-          <a:xfrm>
-            <a:off x="594360" y="3680460"/>
-            <a:ext cx="438912" cy="438912"/>
-          </a:xfrm>
-          <a:prstGeom prst="roundRect">
-            <a:avLst>
-              <a:gd name="adj" fmla="val 12000"/>
-            </a:avLst>
-          </a:prstGeom>
-          <a:solidFill>
-            <a:srgbClr val="095292"/>
-          </a:solidFill>
-          <a:ln>
-            <a:noFill/>
-          </a:ln>
-        </p:spPr>
-        <p:style>
-          <a:lnRef idx="1">
-            <a:schemeClr val="accent1"/>
-          </a:lnRef>
-          <a:fillRef idx="3">
-            <a:schemeClr val="accent1"/>
-          </a:fillRef>
-          <a:effectRef idx="2">
-            <a:schemeClr val="accent1"/>
-          </a:effectRef>
-          <a:fontRef idx="minor">
-            <a:schemeClr val="lt1"/>
-          </a:fontRef>
-        </p:style>
-        <p:txBody>
-          <a:bodyPr rtlCol="0" anchor="ctr"/>
-          <a:lstStyle/>
-          <a:p>
-            <a:pPr algn="ctr"/>
-          </a:p>
-        </p:txBody>
-      </p:sp>
-      <p:sp>
-        <p:nvSpPr>
-          <p:cNvPr id="16" name="TextBox 15"/>
-          <p:cNvSpPr txBox="1"/>
-          <p:nvPr/>
-        </p:nvSpPr>
-        <p:spPr>
-          <a:xfrm>
-            <a:off x="594360" y="3680460"/>
-            <a:ext cx="438912" cy="438912"/>
-          </a:xfrm>
-          <a:prstGeom prst="rect">
-            <a:avLst/>
-          </a:prstGeom>
-          <a:noFill/>
-        </p:spPr>
-        <p:txBody>
-          <a:bodyPr wrap="square" anchor="ctr"/>
-          <a:lstStyle/>
-          <a:p>
-            <a:pPr algn="ctr"/>
-            <a:r>
-              <a:rPr sz="1600" b="1" i="0">
-                <a:solidFill>
-                  <a:srgbClr val="FFFFFF"/>
-                </a:solidFill>
-                <a:latin typeface="Calibri"/>
-              </a:rPr>
-              <a:t>3</a:t>
-            </a:r>
-          </a:p>
-        </p:txBody>
-      </p:sp>
-      <p:sp>
-        <p:nvSpPr>
-          <p:cNvPr id="17" name="TextBox 16"/>
-          <p:cNvSpPr txBox="1"/>
-          <p:nvPr/>
-        </p:nvSpPr>
-        <p:spPr>
-          <a:xfrm>
-            <a:off x="1188720" y="3536899"/>
-            <a:ext cx="10271455" cy="744321"/>
-          </a:xfrm>
-          <a:prstGeom prst="rect">
-            <a:avLst/>
-          </a:prstGeom>
-          <a:noFill/>
-        </p:spPr>
-        <p:txBody>
-          <a:bodyPr wrap="square" anchor="ctr"/>
-          <a:lstStyle/>
-          <a:p>
-            <a:r>
-              <a:rPr sz="1500" b="1" i="0">
-                <a:solidFill>
-                  <a:srgbClr val="095292"/>
-                </a:solidFill>
-                <a:latin typeface="Calibri"/>
-              </a:rPr>
-              <a:t>50 s · La etapa que más pesa</a:t>
-            </a:r>
-          </a:p>
-          <a:p>
-            <a:pPr>
-              <a:spcBef>
-                <a:spcPts val="200"/>
-              </a:spcBef>
-            </a:pPr>
-            <a:r>
-              <a:rPr sz="1300" b="0" i="0">
-                <a:solidFill>
-                  <a:srgbClr val="333333"/>
-                </a:solidFill>
-                <a:latin typeface="Calibri"/>
-              </a:rPr>
-              <a:t>Cuál y por qué. Es el minuto obligatorio.</a:t>
-            </a:r>
-          </a:p>
-        </p:txBody>
-      </p:sp>
-      <p:sp>
-        <p:nvSpPr>
-          <p:cNvPr id="18" name="Rounded Rectangle 17"/>
-          <p:cNvSpPr/>
-          <p:nvPr/>
-        </p:nvSpPr>
-        <p:spPr>
-          <a:xfrm>
-            <a:off x="457200" y="4445812"/>
-            <a:ext cx="11277295" cy="908913"/>
-          </a:xfrm>
-          <a:prstGeom prst="roundRect">
-            <a:avLst>
-              <a:gd name="adj" fmla="val 12000"/>
-            </a:avLst>
-          </a:prstGeom>
-          <a:solidFill>
-            <a:srgbClr val="E8F4FA"/>
-          </a:solidFill>
-          <a:ln>
-            <a:noFill/>
-          </a:ln>
-        </p:spPr>
-        <p:style>
-          <a:lnRef idx="1">
-            <a:schemeClr val="accent1"/>
-          </a:lnRef>
-          <a:fillRef idx="3">
-            <a:schemeClr val="accent1"/>
-          </a:fillRef>
-          <a:effectRef idx="2">
-            <a:schemeClr val="accent1"/>
-          </a:effectRef>
-          <a:fontRef idx="minor">
-            <a:schemeClr val="lt1"/>
-          </a:fontRef>
-        </p:style>
-        <p:txBody>
-          <a:bodyPr rtlCol="0" anchor="ctr"/>
-          <a:lstStyle/>
-          <a:p>
-            <a:pPr algn="ctr"/>
-          </a:p>
-        </p:txBody>
-      </p:sp>
-      <p:sp>
-        <p:nvSpPr>
-          <p:cNvPr id="19" name="Rounded Rectangle 18"/>
-          <p:cNvSpPr/>
-          <p:nvPr/>
-        </p:nvSpPr>
-        <p:spPr>
-          <a:xfrm>
-            <a:off x="594360" y="4680813"/>
-            <a:ext cx="438912" cy="438912"/>
-          </a:xfrm>
-          <a:prstGeom prst="roundRect">
-            <a:avLst>
-              <a:gd name="adj" fmla="val 12000"/>
-            </a:avLst>
-          </a:prstGeom>
-          <a:solidFill>
-            <a:srgbClr val="095292"/>
-          </a:solidFill>
-          <a:ln>
-            <a:noFill/>
-          </a:ln>
-        </p:spPr>
-        <p:style>
-          <a:lnRef idx="1">
-            <a:schemeClr val="accent1"/>
-          </a:lnRef>
-          <a:fillRef idx="3">
-            <a:schemeClr val="accent1"/>
-          </a:fillRef>
-          <a:effectRef idx="2">
-            <a:schemeClr val="accent1"/>
-          </a:effectRef>
-          <a:fontRef idx="minor">
-            <a:schemeClr val="lt1"/>
-          </a:fontRef>
-        </p:style>
-        <p:txBody>
-          <a:bodyPr rtlCol="0" anchor="ctr"/>
-          <a:lstStyle/>
-          <a:p>
-            <a:pPr algn="ctr"/>
-          </a:p>
-        </p:txBody>
-      </p:sp>
-      <p:sp>
-        <p:nvSpPr>
-          <p:cNvPr id="20" name="TextBox 19"/>
-          <p:cNvSpPr txBox="1"/>
-          <p:nvPr/>
-        </p:nvSpPr>
-        <p:spPr>
-          <a:xfrm>
-            <a:off x="594360" y="4680813"/>
-            <a:ext cx="438912" cy="438912"/>
-          </a:xfrm>
-          <a:prstGeom prst="rect">
-            <a:avLst/>
-          </a:prstGeom>
-          <a:noFill/>
-        </p:spPr>
-        <p:txBody>
-          <a:bodyPr wrap="square" anchor="ctr"/>
-          <a:lstStyle/>
-          <a:p>
-            <a:pPr algn="ctr"/>
-            <a:r>
-              <a:rPr sz="1600" b="1" i="0">
-                <a:solidFill>
-                  <a:srgbClr val="FFFFFF"/>
-                </a:solidFill>
-                <a:latin typeface="Calibri"/>
-              </a:rPr>
-              <a:t>4</a:t>
-            </a:r>
-          </a:p>
-        </p:txBody>
-      </p:sp>
-      <p:sp>
-        <p:nvSpPr>
-          <p:cNvPr id="21" name="TextBox 20"/>
-          <p:cNvSpPr txBox="1"/>
-          <p:nvPr/>
-        </p:nvSpPr>
-        <p:spPr>
-          <a:xfrm>
-            <a:off x="1188720" y="4537252"/>
-            <a:ext cx="10271455" cy="744321"/>
-          </a:xfrm>
-          <a:prstGeom prst="rect">
-            <a:avLst/>
-          </a:prstGeom>
-          <a:noFill/>
-        </p:spPr>
-        <p:txBody>
-          <a:bodyPr wrap="square" anchor="ctr"/>
-          <a:lstStyle/>
-          <a:p>
-            <a:r>
-              <a:rPr sz="1500" b="1" i="0">
-                <a:solidFill>
-                  <a:srgbClr val="095292"/>
-                </a:solidFill>
-                <a:latin typeface="Calibri"/>
-              </a:rPr>
-              <a:t>50 s · Las dos decisiones y el indicador</a:t>
-            </a:r>
-          </a:p>
-          <a:p>
-            <a:pPr>
-              <a:spcBef>
-                <a:spcPts val="200"/>
-              </a:spcBef>
-            </a:pPr>
-            <a:r>
-              <a:rPr sz="1300" b="0" i="0">
-                <a:solidFill>
-                  <a:srgbClr val="333333"/>
-                </a:solidFill>
-                <a:latin typeface="Calibri"/>
-              </a:rPr>
-              <a:t>Qué van a cambiar y cómo se sabrá si sirvió.</a:t>
-            </a:r>
-          </a:p>
-        </p:txBody>
-      </p:sp>
-      <p:sp>
-        <p:nvSpPr>
-          <p:cNvPr id="22" name="Rounded Rectangle 21"/>
-          <p:cNvSpPr/>
-          <p:nvPr/>
-        </p:nvSpPr>
-        <p:spPr>
-          <a:xfrm>
-            <a:off x="457200" y="5446166"/>
-            <a:ext cx="11277295" cy="908913"/>
-          </a:xfrm>
-          <a:prstGeom prst="roundRect">
-            <a:avLst>
-              <a:gd name="adj" fmla="val 12000"/>
-            </a:avLst>
-          </a:prstGeom>
-          <a:solidFill>
-            <a:srgbClr val="F2F2F2"/>
-          </a:solidFill>
-          <a:ln>
-            <a:noFill/>
-          </a:ln>
-        </p:spPr>
-        <p:style>
-          <a:lnRef idx="1">
-            <a:schemeClr val="accent1"/>
-          </a:lnRef>
-          <a:fillRef idx="3">
-            <a:schemeClr val="accent1"/>
-          </a:fillRef>
-          <a:effectRef idx="2">
-            <a:schemeClr val="accent1"/>
-          </a:effectRef>
-          <a:fontRef idx="minor">
-            <a:schemeClr val="lt1"/>
-          </a:fontRef>
-        </p:style>
-        <p:txBody>
-          <a:bodyPr rtlCol="0" anchor="ctr"/>
-          <a:lstStyle/>
-          <a:p>
-            <a:pPr algn="ctr"/>
-          </a:p>
-        </p:txBody>
-      </p:sp>
-      <p:sp>
-        <p:nvSpPr>
-          <p:cNvPr id="23" name="Rounded Rectangle 22"/>
-          <p:cNvSpPr/>
-          <p:nvPr/>
-        </p:nvSpPr>
-        <p:spPr>
-          <a:xfrm>
-            <a:off x="594360" y="5681167"/>
-            <a:ext cx="438912" cy="438912"/>
-          </a:xfrm>
-          <a:prstGeom prst="roundRect">
-            <a:avLst>
-              <a:gd name="adj" fmla="val 12000"/>
-            </a:avLst>
-          </a:prstGeom>
-          <a:solidFill>
-            <a:srgbClr val="095292"/>
-          </a:solidFill>
-          <a:ln>
-            <a:noFill/>
-          </a:ln>
-        </p:spPr>
-        <p:style>
-          <a:lnRef idx="1">
-            <a:schemeClr val="accent1"/>
-          </a:lnRef>
-          <a:fillRef idx="3">
-            <a:schemeClr val="accent1"/>
-          </a:fillRef>
-          <a:effectRef idx="2">
-            <a:schemeClr val="accent1"/>
-          </a:effectRef>
-          <a:fontRef idx="minor">
-            <a:schemeClr val="lt1"/>
-          </a:fontRef>
-        </p:style>
-        <p:txBody>
-          <a:bodyPr rtlCol="0" anchor="ctr"/>
-          <a:lstStyle/>
-          <a:p>
-            <a:pPr algn="ctr"/>
-          </a:p>
-        </p:txBody>
-      </p:sp>
-      <p:sp>
-        <p:nvSpPr>
-          <p:cNvPr id="24" name="TextBox 23"/>
-          <p:cNvSpPr txBox="1"/>
-          <p:nvPr/>
-        </p:nvSpPr>
-        <p:spPr>
-          <a:xfrm>
-            <a:off x="594360" y="5681167"/>
-            <a:ext cx="438912" cy="438912"/>
-          </a:xfrm>
-          <a:prstGeom prst="rect">
-            <a:avLst/>
-          </a:prstGeom>
-          <a:noFill/>
-        </p:spPr>
-        <p:txBody>
-          <a:bodyPr wrap="square" anchor="ctr"/>
-          <a:lstStyle/>
-          <a:p>
-            <a:pPr algn="ctr"/>
-            <a:r>
-              <a:rPr sz="1600" b="1" i="0">
-                <a:solidFill>
-                  <a:srgbClr val="FFFFFF"/>
-                </a:solidFill>
-                <a:latin typeface="Calibri"/>
-              </a:rPr>
-              <a:t>5</a:t>
-            </a:r>
-          </a:p>
-        </p:txBody>
-      </p:sp>
-      <p:sp>
-        <p:nvSpPr>
-          <p:cNvPr id="25" name="TextBox 24"/>
-          <p:cNvSpPr txBox="1"/>
-          <p:nvPr/>
-        </p:nvSpPr>
-        <p:spPr>
-          <a:xfrm>
-            <a:off x="1188720" y="5537606"/>
-            <a:ext cx="10271455" cy="744321"/>
-          </a:xfrm>
-          <a:prstGeom prst="rect">
-            <a:avLst/>
-          </a:prstGeom>
-          <a:noFill/>
-        </p:spPr>
-        <p:txBody>
-          <a:bodyPr wrap="square" anchor="ctr"/>
-          <a:lstStyle/>
-          <a:p>
-            <a:r>
-              <a:rPr sz="1500" b="1" i="0">
-                <a:solidFill>
-                  <a:srgbClr val="095292"/>
-                </a:solidFill>
-                <a:latin typeface="Calibri"/>
-              </a:rPr>
-              <a:t>10 s · La fuente</a:t>
-            </a:r>
-          </a:p>
-          <a:p>
-            <a:pPr>
-              <a:spcBef>
-                <a:spcPts val="200"/>
-              </a:spcBef>
-            </a:pPr>
-            <a:r>
-              <a:rPr sz="1300" b="0" i="0">
-                <a:solidFill>
-                  <a:srgbClr val="333333"/>
-                </a:solidFill>
-                <a:latin typeface="Calibri"/>
-              </a:rPr>
-              <a:t>De dónde salió cualquier cifra que hayan dicho.</a:t>
-            </a:r>
-          </a:p>
-        </p:txBody>
-      </p:sp>
-      <p:sp>
-        <p:nvSpPr>
-          <p:cNvPr id="26" name="TextBox 25"/>
-          <p:cNvSpPr txBox="1"/>
-          <p:nvPr/>
-        </p:nvSpPr>
-        <p:spPr>
-          <a:xfrm>
-            <a:off x="11185855" y="6473952"/>
-            <a:ext cx="640080" cy="274320"/>
-          </a:xfrm>
-          <a:prstGeom prst="rect">
-            <a:avLst/>
-          </a:prstGeom>
-          <a:noFill/>
-        </p:spPr>
-        <p:txBody>
-          <a:bodyPr wrap="square">
-            <a:spAutoFit/>
-          </a:bodyPr>
-          <a:lstStyle/>
-          <a:p>
-            <a:pPr algn="r"/>
-            <a:r>
-              <a:rPr sz="1100" b="0" i="0">
-                <a:solidFill>
-                  <a:srgbClr val="666666"/>
-                </a:solidFill>
-                <a:latin typeface="Calibri"/>
-              </a:rPr>
-              <a:t>16</a:t>
-            </a:r>
-          </a:p>
-        </p:txBody>
-      </p:sp>
-    </p:spTree>
-  </p:cSld>
-  <p:clrMapOvr>
-    <a:masterClrMapping/>
-  </p:clrMapOvr>
-</p:sld>
-</file>
-
-<file path=ppt/slides/slide17.xml><?xml version="1.0" encoding="utf-8"?>
-<p:sld xmlns:a="http://schemas.openxmlformats.org/drawingml/2006/main" xmlns:p="http://schemas.openxmlformats.org/presentationml/2006/main" xmlns:r="http://schemas.openxmlformats.org/officeDocument/2006/relationships">
-  <p:cSld>
-    <p:bg>
-      <p:bgPr>
-        <a:solidFill>
-          <a:srgbClr val="FFFFFF"/>
-        </a:solidFill>
-        <a:effectLst/>
-      </p:bgPr>
-    </p:bg>
-    <p:spTree>
-      <p:nvGrpSpPr>
-        <p:cNvPr id="1" name=""/>
-        <p:cNvGrpSpPr/>
-        <p:nvPr/>
-      </p:nvGrpSpPr>
-      <p:grpSpPr/>
-      <p:sp>
-        <p:nvSpPr>
-          <p:cNvPr id="2" name="Rectangle 1"/>
-          <p:cNvSpPr/>
-          <p:nvPr/>
-        </p:nvSpPr>
-        <p:spPr>
-          <a:xfrm>
-            <a:off x="0" y="0"/>
-            <a:ext cx="12191695" cy="960120"/>
-          </a:xfrm>
-          <a:prstGeom prst="rect">
-            <a:avLst/>
-          </a:prstGeom>
-          <a:solidFill>
-            <a:srgbClr val="095292"/>
-          </a:solidFill>
-          <a:ln>
-            <a:noFill/>
-          </a:ln>
-        </p:spPr>
-        <p:style>
-          <a:lnRef idx="1">
-            <a:schemeClr val="accent1"/>
-          </a:lnRef>
-          <a:fillRef idx="3">
-            <a:schemeClr val="accent1"/>
-          </a:fillRef>
-          <a:effectRef idx="2">
-            <a:schemeClr val="accent1"/>
-          </a:effectRef>
-          <a:fontRef idx="minor">
-            <a:schemeClr val="lt1"/>
-          </a:fontRef>
-        </p:style>
-        <p:txBody>
-          <a:bodyPr rtlCol="0" anchor="ctr"/>
-          <a:lstStyle/>
-          <a:p>
-            <a:pPr algn="ctr"/>
-          </a:p>
-        </p:txBody>
-      </p:sp>
-      <p:sp>
-        <p:nvSpPr>
-          <p:cNvPr id="3" name="Rectangle 2"/>
-          <p:cNvSpPr/>
-          <p:nvPr/>
-        </p:nvSpPr>
-        <p:spPr>
-          <a:xfrm>
-            <a:off x="0" y="960120"/>
-            <a:ext cx="12191695" cy="41148"/>
-          </a:xfrm>
-          <a:prstGeom prst="rect">
-            <a:avLst/>
-          </a:prstGeom>
-          <a:solidFill>
-            <a:srgbClr val="FFD000"/>
-          </a:solidFill>
-          <a:ln>
-            <a:noFill/>
-          </a:ln>
-        </p:spPr>
-        <p:style>
-          <a:lnRef idx="1">
-            <a:schemeClr val="accent1"/>
-          </a:lnRef>
-          <a:fillRef idx="3">
-            <a:schemeClr val="accent1"/>
-          </a:fillRef>
-          <a:effectRef idx="2">
-            <a:schemeClr val="accent1"/>
-          </a:effectRef>
-          <a:fontRef idx="minor">
-            <a:schemeClr val="lt1"/>
-          </a:fontRef>
-        </p:style>
-        <p:txBody>
-          <a:bodyPr rtlCol="0" anchor="ctr"/>
-          <a:lstStyle/>
-          <a:p>
-            <a:pPr algn="ctr"/>
-          </a:p>
-        </p:txBody>
-      </p:sp>
-      <p:sp>
-        <p:nvSpPr>
-          <p:cNvPr id="4" name="TextBox 3"/>
-          <p:cNvSpPr txBox="1"/>
-          <p:nvPr/>
-        </p:nvSpPr>
-        <p:spPr>
-          <a:xfrm>
-            <a:off x="457200" y="164592"/>
-            <a:ext cx="11277295" cy="502920"/>
-          </a:xfrm>
-          <a:prstGeom prst="rect">
-            <a:avLst/>
-          </a:prstGeom>
-          <a:noFill/>
-        </p:spPr>
-        <p:txBody>
-          <a:bodyPr wrap="square">
-            <a:spAutoFit/>
-          </a:bodyPr>
-          <a:lstStyle/>
-          <a:p>
-            <a:r>
-              <a:rPr sz="2600" b="1" i="0">
-                <a:solidFill>
-                  <a:srgbClr val="FFFFFF"/>
-                </a:solidFill>
-                <a:latin typeface="Calibri"/>
-              </a:rPr>
-              <a:t>Para la Clase 6</a:t>
-            </a:r>
-          </a:p>
-        </p:txBody>
-      </p:sp>
-      <p:sp>
-        <p:nvSpPr>
-          <p:cNvPr id="5" name="TextBox 4"/>
-          <p:cNvSpPr txBox="1"/>
-          <p:nvPr/>
-        </p:nvSpPr>
-        <p:spPr>
-          <a:xfrm>
-            <a:off x="457200" y="1170432"/>
-            <a:ext cx="11277295" cy="5230368"/>
-          </a:xfrm>
-          <a:prstGeom prst="rect">
-            <a:avLst/>
-          </a:prstGeom>
-          <a:noFill/>
-        </p:spPr>
-        <p:txBody>
-          <a:bodyPr wrap="square">
-            <a:spAutoFit/>
-          </a:bodyPr>
-          <a:lstStyle/>
-          <a:p>
-            <a:pPr>
-              <a:spcAft>
-                <a:spcPts val="800"/>
-              </a:spcAft>
-            </a:pPr>
-            <a:r>
-              <a:rPr sz="2000" b="0" i="0">
-                <a:solidFill>
-                  <a:srgbClr val="333333"/>
-                </a:solidFill>
-                <a:latin typeface="Calibri"/>
-              </a:rPr>
-              <a:t>–   </a:t>
-            </a:r>
-            <a:r>
-              <a:rPr sz="2000" b="1" i="0">
-                <a:solidFill>
-                  <a:srgbClr val="333333"/>
-                </a:solidFill>
-                <a:latin typeface="Calibri"/>
-              </a:rPr>
-              <a:t>Trabajo dirigido:</a:t>
-            </a:r>
-            <a:r>
-              <a:rPr sz="2000" b="0" i="0">
-                <a:solidFill>
-                  <a:srgbClr val="333333"/>
-                </a:solidFill>
-                <a:latin typeface="Calibri"/>
-              </a:rPr>
-              <a:t> Revisión de casos de impacto ambiental — un caso documentado de impacto ambiental de infraestructura digital, con fuente, año y alcance declarados.</a:t>
-            </a:r>
-          </a:p>
-          <a:p>
-            <a:pPr>
-              <a:spcAft>
-                <a:spcPts val="800"/>
-              </a:spcAft>
-            </a:pPr>
-            <a:r>
-              <a:rPr sz="2000" b="0" i="0">
-                <a:solidFill>
-                  <a:srgbClr val="333333"/>
-                </a:solidFill>
-                <a:latin typeface="Calibri"/>
-              </a:rPr>
-              <a:t>–   </a:t>
-            </a:r>
-            <a:r>
-              <a:rPr sz="2000" b="1" i="0">
-                <a:solidFill>
-                  <a:srgbClr val="333333"/>
-                </a:solidFill>
-                <a:latin typeface="Calibri"/>
-              </a:rPr>
-              <a:t>Trabajo independiente:</a:t>
-            </a:r>
-            <a:r>
-              <a:rPr sz="2000" b="0" i="0">
-                <a:solidFill>
-                  <a:srgbClr val="333333"/>
-                </a:solidFill>
-                <a:latin typeface="Calibri"/>
-              </a:rPr>
-              <a:t> Informe sobre sostenibilidad: una página con la huella de su sistema, las dos decisiones y el indicador, en la carpeta del equipo.</a:t>
-            </a:r>
-          </a:p>
-          <a:p>
-            <a:pPr>
-              <a:spcAft>
-                <a:spcPts val="800"/>
-              </a:spcAft>
-            </a:pPr>
-            <a:r>
-              <a:rPr sz="2000" b="0" i="0">
-                <a:solidFill>
-                  <a:srgbClr val="333333"/>
-                </a:solidFill>
-                <a:latin typeface="Calibri"/>
-              </a:rPr>
-              <a:t>–   </a:t>
-            </a:r>
-            <a:r>
-              <a:rPr sz="2000" b="1" i="0">
-                <a:solidFill>
-                  <a:srgbClr val="333333"/>
-                </a:solidFill>
-                <a:latin typeface="Calibri"/>
-              </a:rPr>
-              <a:t>Clase 6 · Análisis de problemas tecnológicos del entorno</a:t>
-            </a:r>
-            <a:r>
-              <a:rPr sz="2000" b="0" i="0">
-                <a:solidFill>
-                  <a:srgbClr val="333333"/>
-                </a:solidFill>
-                <a:latin typeface="Calibri"/>
-              </a:rPr>
-              <a:t> — </a:t>
-            </a:r>
-            <a:r>
-              <a:rPr sz="2000" b="1" i="0">
-                <a:solidFill>
-                  <a:srgbClr val="333333"/>
-                </a:solidFill>
-                <a:latin typeface="Calibri"/>
-              </a:rPr>
-              <a:t>cierra el corte 1</a:t>
-            </a:r>
-            <a:r>
-              <a:rPr sz="2000" b="0" i="0">
-                <a:solidFill>
-                  <a:srgbClr val="333333"/>
-                </a:solidFill>
-                <a:latin typeface="Calibri"/>
-              </a:rPr>
-              <a:t>: se arma la ficha del problema del proyecto del semestre y hay evaluación de corte en la plataforma del curso al final de la sesión.</a:t>
-            </a:r>
-          </a:p>
-          <a:p>
-            <a:pPr>
-              <a:spcAft>
-                <a:spcPts val="800"/>
-              </a:spcAft>
-            </a:pPr>
-            <a:r>
-              <a:rPr sz="2000" b="0" i="0">
-                <a:solidFill>
-                  <a:srgbClr val="333333"/>
-                </a:solidFill>
-                <a:latin typeface="Calibri"/>
-              </a:rPr>
-              <a:t>–   </a:t>
-            </a:r>
-            <a:r>
-              <a:rPr sz="2000" b="1" i="0">
-                <a:solidFill>
-                  <a:srgbClr val="333333"/>
-                </a:solidFill>
-                <a:latin typeface="Calibri"/>
-              </a:rPr>
-              <a:t>Aviso:</a:t>
-            </a:r>
-            <a:r>
-              <a:rPr sz="2000" b="0" i="0">
-                <a:solidFill>
-                  <a:srgbClr val="333333"/>
-                </a:solidFill>
-                <a:latin typeface="Calibri"/>
-              </a:rPr>
-              <a:t> La sesión 6 cierra el corte. Traigan </a:t>
-            </a:r>
-            <a:r>
-              <a:rPr sz="2000" b="1" i="0">
-                <a:solidFill>
-                  <a:srgbClr val="333333"/>
-                </a:solidFill>
-                <a:latin typeface="Calibri"/>
-              </a:rPr>
-              <a:t>el problema de la sesión 1, la ficha de sistema de la sesión 3, la regla ética de la sesión 4 y el indicador de hoy</a:t>
-            </a:r>
-            <a:r>
-              <a:rPr sz="2000" b="0" i="0">
-                <a:solidFill>
-                  <a:srgbClr val="333333"/>
-                </a:solidFill>
-                <a:latin typeface="Calibri"/>
-              </a:rPr>
-              <a:t>: la ficha del problema se arma con esas cuatro cosas y se entrega en clase. Y lean el documento </a:t>
-            </a:r>
-            <a:r>
-              <a:rPr sz="2000" b="1" i="0">
-                <a:solidFill>
-                  <a:srgbClr val="333333"/>
-                </a:solidFill>
-                <a:latin typeface="Calibri"/>
-              </a:rPr>
-              <a:t>«Evaluación del Corte 1 — cómo prepararse»</a:t>
-            </a:r>
-            <a:r>
-              <a:rPr sz="2000" b="0" i="0">
-                <a:solidFill>
-                  <a:srgbClr val="333333"/>
-                </a:solidFill>
-                <a:latin typeface="Calibri"/>
-              </a:rPr>
-              <a:t>: trae qué repasar de cada sesión para los 20 minutos de evaluación del final.</a:t>
-            </a:r>
-          </a:p>
-          <a:p>
-            <a:pPr>
-              <a:spcAft>
-                <a:spcPts val="800"/>
-              </a:spcAft>
-            </a:pPr>
-            <a:r>
-              <a:rPr sz="2000" b="0" i="0">
-                <a:solidFill>
-                  <a:srgbClr val="333333"/>
-                </a:solidFill>
-                <a:latin typeface="Calibri"/>
-              </a:rPr>
-              <a:t>–   </a:t>
-            </a:r>
-            <a:r>
-              <a:rPr sz="2000" b="1" i="0">
-                <a:solidFill>
-                  <a:srgbClr val="333333"/>
-                </a:solidFill>
-                <a:latin typeface="Calibri"/>
-              </a:rPr>
-              <a:t>Antes de salir:</a:t>
-            </a:r>
-            <a:r>
-              <a:rPr sz="2000" b="0" i="0">
-                <a:solidFill>
-                  <a:srgbClr val="333333"/>
-                </a:solidFill>
-                <a:latin typeface="Calibri"/>
-              </a:rPr>
-              <a:t> el enlace del documento del equipo en el chat, con permiso de lectura para el docente, y el nombre del vocero de hoy.</a:t>
-            </a:r>
-          </a:p>
-        </p:txBody>
-      </p:sp>
-      <p:sp>
-        <p:nvSpPr>
-          <p:cNvPr id="6" name="TextBox 5"/>
-          <p:cNvSpPr txBox="1"/>
-          <p:nvPr/>
-        </p:nvSpPr>
-        <p:spPr>
-          <a:xfrm>
-            <a:off x="11185855" y="6473952"/>
-            <a:ext cx="640080" cy="274320"/>
-          </a:xfrm>
-          <a:prstGeom prst="rect">
-            <a:avLst/>
-          </a:prstGeom>
-          <a:noFill/>
-        </p:spPr>
-        <p:txBody>
-          <a:bodyPr wrap="square">
-            <a:spAutoFit/>
-          </a:bodyPr>
-          <a:lstStyle/>
-          <a:p>
-            <a:pPr algn="r"/>
-            <a:r>
-              <a:rPr sz="1100" b="0" i="0">
-                <a:solidFill>
-                  <a:srgbClr val="666666"/>
-                </a:solidFill>
-                <a:latin typeface="Calibri"/>
-              </a:rPr>
-              <a:t>17</a:t>
-            </a:r>
-          </a:p>
-        </p:txBody>
-      </p:sp>
-    </p:spTree>
-  </p:cSld>
-  <p:clrMapOvr>
-    <a:masterClrMapping/>
-  </p:clrMapOvr>
-</p:sld>
-</file>
-
-<file path=ppt/slides/slide18.xml><?xml version="1.0" encoding="utf-8"?>
-<p:sld xmlns:a="http://schemas.openxmlformats.org/drawingml/2006/main" xmlns:p="http://schemas.openxmlformats.org/presentationml/2006/main" xmlns:r="http://schemas.openxmlformats.org/officeDocument/2006/relationships">
-  <p:cSld>
-    <p:bg>
-      <p:bgPr>
-        <a:solidFill>
-          <a:srgbClr val="FFFFFF"/>
-        </a:solidFill>
-        <a:effectLst/>
-      </p:bgPr>
-    </p:bg>
-    <p:spTree>
-      <p:nvGrpSpPr>
-        <p:cNvPr id="1" name=""/>
-        <p:cNvGrpSpPr/>
-        <p:nvPr/>
-      </p:nvGrpSpPr>
-      <p:grpSpPr/>
-      <p:sp>
-        <p:nvSpPr>
-          <p:cNvPr id="2" name="Rectangle 1"/>
-          <p:cNvSpPr/>
-          <p:nvPr/>
-        </p:nvSpPr>
-        <p:spPr>
-          <a:xfrm>
-            <a:off x="0" y="0"/>
             <a:ext cx="12191695" cy="164592"/>
           </a:xfrm>
           <a:prstGeom prst="rect">
@@ -11984,7 +9362,7 @@
                 </a:solidFill>
                 <a:latin typeface="Calibri"/>
               </a:rPr>
-              <a:t>Taller — huella del sistema, en Excalidraw</a:t>
+              <a:t>Práctica en equipos (opcional · la guía está en la carpeta de la clase)</a:t>
             </a:r>
           </a:p>
         </p:txBody>
@@ -12099,7 +9477,7 @@
                 </a:solidFill>
                 <a:latin typeface="Calibri"/>
               </a:rPr>
-              <a:t>5 equipos × 3 min — la etapa que más pesa y las dos decisiones que la bajan</a:t>
+              <a:t>Socialización de la práctica, si se hizo</a:t>
             </a:r>
           </a:p>
         </p:txBody>

--- a/Introduccion a la Ingenieria/Clases/Clase 5 - El rol del ingeniero en el contexto ambiental/Presentacion.pptx
+++ b/Introduccion a la Ingenieria/Clases/Clase 5 - El rol del ingeniero en el contexto ambiental/Presentacion.pptx
@@ -586,31 +586,25 @@
           <a:lstStyle/>
           <a:p>
             <a:r>
-              <a:t>COLOMBIA, Y LA HONESTIDAD CON LAS CIFRAS</a:t>
+              <a:t>DE LA CONCIENCIA A LA DECISIÓN: LA DIAPOSITIVA QUE CONVIERTE EL TEMA EN INGENIERÍA</a:t>
             </a:r>
           </a:p>
           <a:p/>
           <a:p>
             <a:r>
-              <a:t>El dato local más útil es la composición de la matriz eléctrica. Una parte importante de la generación en Colombia es hidráulica, lo que significa que un kilovatio-hora consumido aquí tiene un factor de emisiones distinto —menor— que en un país con generación a carbón. La consecuencia metodológica es la que hay que enseñar: no se copian factores de emisión de otro país; se usa el factor local, y el operador del sistema (XM) publica datos de generación. Un equipo que cite una fuente colombiana en vez de un blog extranjero ya está haciendo ingeniería.</a:t>
+              <a:t>Esta es la diapositiva que salva la clase de volverse un discurso. Las cinco parejas son decisiones reales de diseño, y en las cinco la versión de la derecha cumple la misma función. Eso hay que decirlo explícitamente: no se está pidiendo sacrificar calidad por ambiente, se está pidiendo no desperdiciar.</a:t>
             </a:r>
           </a:p>
           <a:p/>
           <a:p>
             <a:r>
-              <a:t>La contracara es igual de importante y menos conocida: cuando el fenómeno de El Niño reduce los aportes a los embalses, entran las plantas térmicas y el factor de emisiones del país sube. Es decir, la misma aplicación, sin cambiar una línea de código, emite más en un año seco. Eso enseña algo que vale para todo el curso: la huella de un sistema no es una propiedad del sistema, es una propiedad del sistema en su contexto.</a:t>
+              <a:t>La primera —pedir la ubicación cada cinco segundos o cada cinco minutos— es la más fácil de entender y toca batería y red a la vez. La tercera —guardar el resultado en vez de recalcular el reporte completo en cada consulta— es la que más sorprende, porque el estudiante todavía no tiene la intuición de que el cómputo cuesta energía; sirve para conectar con la sesión 7 y con la idea de que la eficiencia no es coquetería de programador. La cuarta —sostener dispositivos viejos— es la de mayor impacto real por lo dicho sobre la fabricación. Y la quinta es la más contemporánea y hay que decirla sin miedo: agregarle un asistente de IA a una función que resolvía una condición simple gasta energía en cada llamada, para siempre. Es una decisión de arquitectura, y hoy se toma con frecuencia por moda.</a:t>
             </a:r>
           </a:p>
           <a:p/>
           <a:p>
             <a:r>
-              <a:t>La diapositiva de las trampas es la más importante para el rigor y conviene dedicarle tiempo real. Las cifras ambientales del sector digital son un campo donde circulan números espectaculares sin alcance definido: litros de agua por consulta a un modelo de lenguaje, gramos de CO₂ por búsqueda, porcentajes del consumo mundial de electricidad. Muchos provienen de estimaciones legítimas pero con supuestos muy específicos, y se citan luego como hechos universales. La regla del curso a partir de hoy es simple y se aplica en la rúbrica: cifra con fuente, año y alcance, o no va. Y hay que decir en voz alta lo que sí se puede afirmar sin exagerar: que la huella existe, que tiene cuatro etapas, que se puede reducir con decisiones de diseño y que casi nadie la mide. Con eso alcanza para trabajar con seriedad, y es mucho más defendible que un número impresionante mal citado.</a:t>
-            </a:r>
-          </a:p>
-          <a:p/>
-          <a:p>
-            <a:r>
-              <a:t>Sobre la comparación «lo digital contra el papel»: alguien la va a proponer y la respuesta correcta es que depende del número de usos y de si obliga a comprar dispositivos. Un documento leído una vez en un computador nuevo no gana contra una hoja; el mismo documento leído por trescientas personas en aparatos que ya existen, sí. La lección es que comparar sin decir qué se comparó no es un argumento.</a:t>
+              <a:t>El método de cinco pasos es el del taller. El paso 2 —buscar lo que se repite— es el que enseña a estimar: lo que ocurre una vez no mueve la aguja, lo que ocurre mil veces al día sí. Y el paso 5 —definir un indicador medible— es el que separa una intención de una decisión de ingeniería. «Vamos a ser sostenibles» no se puede verificar; «vamos a mover menos de 200 KB por consulta» sí, y en la Clase 16 se puede mirar si se cumplió.</a:t>
             </a:r>
           </a:p>
         </p:txBody>
@@ -914,7 +908,61 @@
           <a:lstStyle/>
           <a:p>
             <a:r>
-              <a:t>El paso 5 es el que convierte la conciencia en ingeniería: un indicador que se puede medir al final del semestre. Sin indicador, la mejora es una opinión.</a:t>
+              <a:t>TEXTO COMPLETO DE LA LÁMINA (se proyecta resumido):</a:t>
+            </a:r>
+          </a:p>
+          <a:p/>
+          <a:p>
+            <a:r>
+              <a:t>La matriz eléctrica. Buena parte de la generación del país es hidráulica, así que un kilovatio-hora consumido en Colombia tiene menos emisiones asociadas que el mismo kilovatio en un país que quema carbón. Un análisis serio no copia cifras de emisiones de otro país: usa el factor local, que publica el operador del sistema (XM).</a:t>
+            </a:r>
+          </a:p>
+          <a:p/>
+          <a:p>
+            <a:r>
+              <a:t>Y su contracara. Cuando llega el fenómeno de El Niño y baja el nivel de los embalses, entran las plantas térmicas y la misma aplicación pasa a emitir más sin cambiar una línea de código. La huella de un sistema no es un número fijo: depende de cuándo y dónde corre.</a:t>
+            </a:r>
+          </a:p>
+          <a:p/>
+          <a:p>
+            <a:r>
+              <a:t>Residuos electrónicos. La Ley 1672 de 2013 fija los lineamientos de los RAEE en Colombia: el productor tiene que ofrecer puntos de recolección y el usuario tiene el deber de usarlos. Los informes internacionales (Global E-waste Monitor) muestran que la mayor parte del residuo electrónico del mundo no se recoge formalmente, y lo que no se recoge se desarma a mano, sin protección.</a:t>
+            </a:r>
+          </a:p>
+          <a:p/>
+          <a:p>
+            <a:r>
+              <a:t>Consecuencia práctica para su proyecto: la decisión ambiental más fuerte que puede tomar un equipo de este curso casi nunca es «consumir menos batería». Es no obligar a cambiar de aparato y no mover datos que no hacen falta.</a:t>
+            </a:r>
+          </a:p>
+          <a:p/>
+          <a:p>
+            <a:r>
+              <a:t>COLOMBIA, Y LA HONESTIDAD CON LAS CIFRAS</a:t>
+            </a:r>
+          </a:p>
+          <a:p/>
+          <a:p>
+            <a:r>
+              <a:t>El dato local más útil es la composición de la matriz eléctrica. Una parte importante de la generación en Colombia es hidráulica, lo que significa que un kilovatio-hora consumido aquí tiene un factor de emisiones distinto —menor— que en un país con generación a carbón. La consecuencia metodológica es la que hay que enseñar: no se copian factores de emisión de otro país; se usa el factor local, y el operador del sistema (XM) publica datos de generación. Un equipo que cite una fuente colombiana en vez de un blog extranjero ya está haciendo ingeniería.</a:t>
+            </a:r>
+          </a:p>
+          <a:p/>
+          <a:p>
+            <a:r>
+              <a:t>La contracara es igual de importante y menos conocida: cuando el fenómeno de El Niño reduce los aportes a los embalses, entran las plantas térmicas y el factor de emisiones del país sube. Es decir, la misma aplicación, sin cambiar una línea de código, emite más en un año seco. Eso enseña algo que vale para todo el curso: la huella de un sistema no es una propiedad del sistema, es una propiedad del sistema en su contexto.</a:t>
+            </a:r>
+          </a:p>
+          <a:p/>
+          <a:p>
+            <a:r>
+              <a:t>La diapositiva de las trampas es la más importante para el rigor y conviene dedicarle tiempo real. Las cifras ambientales del sector digital son un campo donde circulan números espectaculares sin alcance definido: litros de agua por consulta a un modelo de lenguaje, gramos de CO₂ por búsqueda, porcentajes del consumo mundial de electricidad. Muchos provienen de estimaciones legítimas pero con supuestos muy específicos, y se citan luego como hechos universales. La regla del curso a partir de hoy es simple y se aplica en la rúbrica: cifra con fuente, año y alcance, o no va. Y hay que decir en voz alta lo que sí se puede afirmar sin exagerar: que la huella existe, que tiene cuatro etapas, que se puede reducir con decisiones de diseño y que casi nadie la mide. Con eso alcanza para trabajar con seriedad, y es mucho más defendible que un número impresionante mal citado.</a:t>
+            </a:r>
+          </a:p>
+          <a:p/>
+          <a:p>
+            <a:r>
+              <a:t>Sobre la comparación «lo digital contra el papel»: alguien la va a proponer y la respuesta correcta es que depende del número de usos y de si obliga a comprar dispositivos. Un documento leído una vez en un computador nuevo no gana contra una hoja; el mismo documento leído por trescientas personas en aparatos que ya existen, sí. La lección es que comparar sin decir qué se comparó no es un argumento.</a:t>
             </a:r>
           </a:p>
         </p:txBody>
@@ -984,19 +1032,7 @@
           <a:lstStyle/>
           <a:p>
             <a:r>
-              <a:t>LA PREGUNTA DE ENTRADA: DARLE MATERIA A ALGO QUE PARECE NO TENERLA</a:t>
-            </a:r>
-          </a:p>
-          <a:p/>
-          <a:p>
-            <a:r>
-              <a:t>«¿Dónde está la nube?» funciona porque casi nadie ha visto un centro de datos y porque la metáfora está diseñada para que no se piense en el edificio. La segunda parte —cuánta agua se bebió una consulta a un asistente de IA— incomoda a propósito y hay que manejarla con cuidado: la respuesta honesta es que depende del centro de datos, del modelo, del clima y del año, y que las cifras que circulan varían por órdenes de magnitud. Eso no debilita la clase: es la clase. El objetivo no es que se lleven un número, es que entiendan que hay agua y electricidad detrás de algo que se siente inmaterial, y que quien afirme un número tiene que decir de dónde salió.</a:t>
-            </a:r>
-          </a:p>
-          <a:p/>
-          <a:p>
-            <a:r>
-              <a:t>Recoja las respuestas en el muro y no las corrija. En el minuto 20, al llegar al PUE y al enfriamiento, vuelva al muro: alguien va a haber escrito «en internet» o «en un servidor», y ahí se muestra que el servidor está en un edificio que consume tanto en enfriarse como en computar.</a:t>
+              <a:t>El paso 5 es el que convierte la conciencia en ingeniería: un indicador que se puede medir al final del semestre. Sin indicador, la mejora es una opinión.</a:t>
             </a:r>
           </a:p>
         </p:txBody>
@@ -1066,43 +1102,19 @@
           <a:lstStyle/>
           <a:p>
             <a:r>
-              <a:t>LAS CUATRO ETAPAS Y POR QUÉ LA FABRICACIÓN CAMBIA LA RECOMENDACIÓN</a:t>
+              <a:t>LA PREGUNTA DE ENTRADA: DARLE MATERIA A ALGO QUE PARECE NO TENERLA</a:t>
             </a:r>
           </a:p>
           <a:p/>
           <a:p>
             <a:r>
-              <a:t>La huella material de un sistema de software se reparte en cuatro etapas y conviene recorrerlas con un ejemplo único: una aplicación de citas médicas usada desde el celular.</a:t>
+              <a:t>«¿Dónde está la nube?» funciona porque casi nadie ha visto un centro de datos y porque la metáfora está diseñada para que no se piense en el edificio. La segunda parte —cuánta agua se bebió una consulta a un asistente de IA— incomoda a propósito y hay que manejarla con cuidado: la respuesta honesta es que depende del centro de datos, del modelo, del clima y del año, y que las cifras que circulan varían por órdenes de magnitud. Eso no debilita la clase: es la clase. El objetivo no es que se lleven un número, es que entiendan que hay agua y electricidad detrás de algo que se siente inmaterial, y que quien afirme un número tiene que decir de dónde salió.</a:t>
             </a:r>
           </a:p>
           <a:p/>
           <a:p>
             <a:r>
-              <a:t>Fabricación. El celular del paciente, el computador de la secretaria y los servidores donde corre el sistema tuvieron que ser fabricados: minería de metales —incluidos varios escasos y con extracción problemática—, ensamblaje y transporte. Este es el punto que más sorprende y el más importante para las decisiones: en muchos dispositivos personales la mayor parte de la huella de toda su vida ya está gastada cuando se enciende por primera vez. La consecuencia es contraintuitiva: optimizar el consumo de batería es útil, pero alargar la vida útil del aparato pesa mucho más, y eso depende de decisiones de software.</a:t>
-            </a:r>
-          </a:p>
-          <a:p/>
-          <a:p>
-            <a:r>
-              <a:t>Uso. Electricidad del dispositivo, del servidor y —esto es lo que se olvida— del enfriamiento del centro de datos. Aquí entra el PUE.</a:t>
-            </a:r>
-          </a:p>
-          <a:p/>
-          <a:p>
-            <a:r>
-              <a:t>Red. Cada byte que viaja pasa por antenas, cables, enrutadores y equipos que consumen. No es gratis y crece con el volumen: una pantalla que carga imágenes en tamaño original mil veces al día mueve un múltiplo de lo necesario.</a:t>
-            </a:r>
-          </a:p>
-          <a:p/>
-          <a:p>
-            <a:r>
-              <a:t>Fin de vida. El aparato se vuelve residuo electrónico. Tiene metales recuperables y sustancias peligrosas, y cuando no se recoge formalmente se desarma a mano, quemando plásticos, con daño directo a las personas que lo hacen.</a:t>
-            </a:r>
-          </a:p>
-          <a:p/>
-          <a:p>
-            <a:r>
-              <a:t>El punto pedagógico de la diapositiva es que las palabras «software» y «nube» están construidas para que uno no piense en nada de esto. Nombrar las cuatro etapas es lo que permite discutir el tema con seriedad.</a:t>
+              <a:t>Recoja las respuestas en el muro y no las corrija. En el minuto 20, al llegar al PUE y al enfriamiento, vuelva al muro: alguien va a haber escrito «en internet» o «en un servidor», y ahí se muestra que el servidor está en un edificio que consume tanto en enfriarse como en computar.</a:t>
             </a:r>
           </a:p>
         </p:txBody>
@@ -1172,31 +1184,43 @@
           <a:lstStyle/>
           <a:p>
             <a:r>
-              <a:t>PUE, AGUA, RAEE Y OBSOLESCENCIA: LOS CUATRO CONCEPTOS QUE HAY QUE DEJAR</a:t>
+              <a:t>LAS CUATRO ETAPAS Y POR QUÉ LA FABRICACIÓN CAMBIA LA RECOMENDACIÓN</a:t>
             </a:r>
           </a:p>
           <a:p/>
           <a:p>
             <a:r>
-              <a:t>PUE (Power Usage Effectiveness). Es la energía total que entra al centro de datos dividida por la energía que efectivamente llega a los servidores. Si fuera 1.0, todo lo que entra se usa en computar. Un PUE de 1.6 significa que por cada vatio de cómputo se gastan 0,6 en enfriar, iluminar y en pérdidas. Los centros de datos grandes y modernos operan bastante mejor que el promedio de las salas de servidores de empresa, que suelen estar en el rango de 1.5 a 1.6 según las encuestas del sector. La idea que hay que dejar no es el número exacto: es que una parte grande de la energía de un centro de datos no computa nada, y que existe una métrica con nombre para medirlo. Un ingeniero que sabe que el PUE existe puede preguntar por él.</a:t>
+              <a:t>La huella material de un sistema de software se reparte en cuatro etapas y conviene recorrerlas con un ejemplo único: una aplicación de citas médicas usada desde el celular.</a:t>
             </a:r>
           </a:p>
           <a:p/>
           <a:p>
             <a:r>
-              <a:t>El agua. Enfriar con evaporación de agua es más barato en electricidad que enfriar con máquinas, así que muchos centros de datos usan agua. Eso traslada el costo: baja la factura de luz y sube el consumo de una cuenca que normalmente abastece a población. Es un buen ejemplo de algo que el curso repite: optimizar una variable suele mover el problema a otra, y el ingeniero tiene que saber a cuál. Hay métricas para esto (WUE, litros por kilovatio-hora), y aquí también vale la advertencia de las cifras.</a:t>
+              <a:t>Fabricación. El celular del paciente, el computador de la secretaria y los servidores donde corre el sistema tuvieron que ser fabricados: minería de metales —incluidos varios escasos y con extracción problemática—, ensamblaje y transporte. Este es el punto que más sorprende y el más importante para las decisiones: en muchos dispositivos personales la mayor parte de la huella de toda su vida ya está gastada cuando se enciende por primera vez. La consecuencia es contraintuitiva: optimizar el consumo de batería es útil, pero alargar la vida útil del aparato pesa mucho más, y eso depende de decisiones de software.</a:t>
             </a:r>
           </a:p>
           <a:p/>
           <a:p>
             <a:r>
-              <a:t>RAEE y la Ley 1672 de 2013. Es la norma colombiana que fija los lineamientos para la gestión de residuos de aparatos eléctricos y electrónicos. Lo que hay que poder decir: obliga a los productores a establecer sistemas de recolección y gestión, y establece el deber del usuario de entregar el aparato en esos puntos en vez de tirarlo a la basura común. Los informes globales de residuos electrónicos (Global E-waste Monitor, de UNITAR e ITU) reportan decenas de millones de toneladas al año y una tasa de recolección formal baja: el orden de magnitud es que la mayor parte no se recoge. Si un equipo cita una cifra exacta, exija la edición del informe y el año, porque cambia entre ediciones.</a:t>
+              <a:t>Uso. Electricidad del dispositivo, del servidor y —esto es lo que se olvida— del enfriamiento del centro de datos. Aquí entra el PUE.</a:t>
             </a:r>
           </a:p>
           <a:p/>
           <a:p>
             <a:r>
-              <a:t>Obsolescencia inducida por software. Es el concepto que más les sirve porque está bajo su control profesional. Cuando una nueva versión de una aplicación —o de un sistema operativo— deja de funcionar en dispositivos que servían, el software convierte en basura un aparato que estaba bien. No hace falta discutir si hay intención: el efecto es material y medible. Y la contracara es una decisión concreta que un equipo de este curso puede tomar: sostener el soporte para dispositivos viejos, que además es lo correcto para el contexto de la universidad, donde muchos estudiantes trabajan con equipos de varios años.</a:t>
+              <a:t>Red. Cada byte que viaja pasa por antenas, cables, enrutadores y equipos que consumen. No es gratis y crece con el volumen: una pantalla que carga imágenes en tamaño original mil veces al día mueve un múltiplo de lo necesario.</a:t>
+            </a:r>
+          </a:p>
+          <a:p/>
+          <a:p>
+            <a:r>
+              <a:t>Fin de vida. El aparato se vuelve residuo electrónico. Tiene metales recuperables y sustancias peligrosas, y cuando no se recoge formalmente se desarma a mano, quemando plásticos, con daño directo a las personas que lo hacen.</a:t>
+            </a:r>
+          </a:p>
+          <a:p/>
+          <a:p>
+            <a:r>
+              <a:t>El punto pedagógico de la diapositiva es que las palabras «software» y «nube» están construidas para que uno no piense en nada de esto. Nombrar las cuatro etapas es lo que permite discutir el tema con seriedad.</a:t>
             </a:r>
           </a:p>
         </p:txBody>
@@ -1266,25 +1290,31 @@
           <a:lstStyle/>
           <a:p>
             <a:r>
-              <a:t>DE LA CONCIENCIA A LA DECISIÓN: LA DIAPOSITIVA QUE CONVIERTE EL TEMA EN INGENIERÍA</a:t>
+              <a:t>PUE, AGUA, RAEE Y OBSOLESCENCIA: LOS CUATRO CONCEPTOS QUE HAY QUE DEJAR</a:t>
             </a:r>
           </a:p>
           <a:p/>
           <a:p>
             <a:r>
-              <a:t>Esta es la diapositiva que salva la clase de volverse un discurso. Las cinco parejas son decisiones reales de diseño, y en las cinco la versión de la derecha cumple la misma función. Eso hay que decirlo explícitamente: no se está pidiendo sacrificar calidad por ambiente, se está pidiendo no desperdiciar.</a:t>
+              <a:t>PUE (Power Usage Effectiveness). Es la energía total que entra al centro de datos dividida por la energía que efectivamente llega a los servidores. Si fuera 1.0, todo lo que entra se usa en computar. Un PUE de 1.6 significa que por cada vatio de cómputo se gastan 0,6 en enfriar, iluminar y en pérdidas. Los centros de datos grandes y modernos operan bastante mejor que el promedio de las salas de servidores de empresa, que suelen estar en el rango de 1.5 a 1.6 según las encuestas del sector. La idea que hay que dejar no es el número exacto: es que una parte grande de la energía de un centro de datos no computa nada, y que existe una métrica con nombre para medirlo. Un ingeniero que sabe que el PUE existe puede preguntar por él.</a:t>
             </a:r>
           </a:p>
           <a:p/>
           <a:p>
             <a:r>
-              <a:t>La primera —pedir la ubicación cada cinco segundos o cada cinco minutos— es la más fácil de entender y toca batería y red a la vez. La tercera —guardar el resultado en vez de recalcular el reporte completo en cada consulta— es la que más sorprende, porque el estudiante todavía no tiene la intuición de que el cómputo cuesta energía; sirve para conectar con la sesión 7 y con la idea de que la eficiencia no es coquetería de programador. La cuarta —sostener dispositivos viejos— es la de mayor impacto real por lo dicho sobre la fabricación. Y la quinta es la más contemporánea y hay que decirla sin miedo: agregarle un asistente de IA a una función que resolvía una condición simple gasta energía en cada llamada, para siempre. Es una decisión de arquitectura, y hoy se toma con frecuencia por moda.</a:t>
+              <a:t>El agua. Enfriar con evaporación de agua es más barato en electricidad que enfriar con máquinas, así que muchos centros de datos usan agua. Eso traslada el costo: baja la factura de luz y sube el consumo de una cuenca que normalmente abastece a población. Es un buen ejemplo de algo que el curso repite: optimizar una variable suele mover el problema a otra, y el ingeniero tiene que saber a cuál. Hay métricas para esto (WUE, litros por kilovatio-hora), y aquí también vale la advertencia de las cifras.</a:t>
             </a:r>
           </a:p>
           <a:p/>
           <a:p>
             <a:r>
-              <a:t>El método de cinco pasos es el del taller. El paso 2 —buscar lo que se repite— es el que enseña a estimar: lo que ocurre una vez no mueve la aguja, lo que ocurre mil veces al día sí. Y el paso 5 —definir un indicador medible— es el que separa una intención de una decisión de ingeniería. «Vamos a ser sostenibles» no se puede verificar; «vamos a mover menos de 200 KB por consulta» sí, y en la Clase 16 se puede mirar si se cumplió.</a:t>
+              <a:t>RAEE y la Ley 1672 de 2013. Es la norma colombiana que fija los lineamientos para la gestión de residuos de aparatos eléctricos y electrónicos. Lo que hay que poder decir: obliga a los productores a establecer sistemas de recolección y gestión, y establece el deber del usuario de entregar el aparato en esos puntos en vez de tirarlo a la basura común. Los informes globales de residuos electrónicos (Global E-waste Monitor, de UNITAR e ITU) reportan decenas de millones de toneladas al año y una tasa de recolección formal baja: el orden de magnitud es que la mayor parte no se recoge. Si un equipo cita una cifra exacta, exija la edición del informe y el año, porque cambia entre ediciones.</a:t>
+            </a:r>
+          </a:p>
+          <a:p/>
+          <a:p>
+            <a:r>
+              <a:t>Obsolescencia inducida por software. Es el concepto que más les sirve porque está bajo su control profesional. Cuando una nueva versión de una aplicación —o de un sistema operativo— deja de funcionar en dispositivos que servían, el software convierte en basura un aparato que estaba bien. No hace falta discutir si hay intención: el efecto es material y medible. Y la contracara es una decisión concreta que un equipo de este curso puede tomar: sostener el soporte para dispositivos viejos, que además es lo correcto para el contexto de la universidad, donde muchos estudiantes trabajan con equipos de varios años.</a:t>
             </a:r>
           </a:p>
         </p:txBody>
@@ -5485,14 +5515,118 @@
       </p:sp>
       <p:sp>
         <p:nvSpPr>
-          <p:cNvPr id="5" name="TextBox 4"/>
+          <p:cNvPr id="5" name="Rounded Rectangle 4"/>
+          <p:cNvSpPr/>
+          <p:nvPr/>
+        </p:nvSpPr>
+        <p:spPr>
+          <a:xfrm>
+            <a:off x="5797149" y="1469191"/>
+            <a:ext cx="6010497" cy="4267088"/>
+          </a:xfrm>
+          <a:prstGeom prst="roundRect">
+            <a:avLst>
+              <a:gd name="adj" fmla="val 4000"/>
+            </a:avLst>
+          </a:prstGeom>
+          <a:solidFill>
+            <a:srgbClr val="E8EEF4"/>
+          </a:solidFill>
+          <a:ln>
+            <a:noFill/>
+          </a:ln>
+        </p:spPr>
+        <p:style>
+          <a:lnRef idx="1">
+            <a:schemeClr val="accent1"/>
+          </a:lnRef>
+          <a:fillRef idx="3">
+            <a:schemeClr val="accent1"/>
+          </a:fillRef>
+          <a:effectRef idx="2">
+            <a:schemeClr val="accent1"/>
+          </a:effectRef>
+          <a:fontRef idx="minor">
+            <a:schemeClr val="lt1"/>
+          </a:fontRef>
+        </p:style>
+        <p:txBody>
+          <a:bodyPr rtlCol="0" anchor="ctr"/>
+          <a:lstStyle/>
+          <a:p>
+            <a:pPr algn="ctr"/>
+          </a:p>
+        </p:txBody>
+      </p:sp>
+      <p:pic>
+        <p:nvPicPr>
+          <p:cNvPr id="6" name="Picture 5" descr="hydroelectric-dam.jpg"/>
+          <p:cNvPicPr>
+            <a:picLocks noChangeAspect="1"/>
+          </p:cNvPicPr>
+          <p:nvPr/>
+        </p:nvPicPr>
+        <p:blipFill>
+          <a:blip r:embed="rId2"/>
+          <a:stretch>
+            <a:fillRect/>
+          </a:stretch>
+        </p:blipFill>
+        <p:spPr>
+          <a:xfrm>
+            <a:off x="5870301" y="1542343"/>
+            <a:ext cx="5864193" cy="4120784"/>
+          </a:xfrm>
+          <a:prstGeom prst="rect">
+            <a:avLst/>
+          </a:prstGeom>
+        </p:spPr>
+      </p:pic>
+      <p:sp>
+        <p:nvSpPr>
+          <p:cNvPr id="7" name="TextBox 6"/>
           <p:cNvSpPr txBox="1"/>
           <p:nvPr/>
         </p:nvSpPr>
         <p:spPr>
           <a:xfrm>
-            <a:off x="457200" y="1170432"/>
-            <a:ext cx="11277295" cy="5230368"/>
+            <a:off x="5870301" y="5961888"/>
+            <a:ext cx="5864193" cy="320040"/>
+          </a:xfrm>
+          <a:prstGeom prst="rect">
+            <a:avLst/>
+          </a:prstGeom>
+          <a:noFill/>
+        </p:spPr>
+        <p:txBody>
+          <a:bodyPr wrap="square">
+            <a:spAutoFit/>
+          </a:bodyPr>
+          <a:lstStyle/>
+          <a:p>
+            <a:pPr algn="ctr"/>
+            <a:r>
+              <a:rPr sz="1100" b="0" i="1">
+                <a:solidFill>
+                  <a:srgbClr val="666666"/>
+                </a:solidFill>
+                <a:latin typeface="Calibri"/>
+              </a:rPr>
+              <a:t>Foto: Kris Møklebust · Pexels</a:t>
+            </a:r>
+          </a:p>
+        </p:txBody>
+      </p:sp>
+      <p:sp>
+        <p:nvSpPr>
+          <p:cNvPr id="8" name="TextBox 7"/>
+          <p:cNvSpPr txBox="1"/>
+          <p:nvPr/>
+        </p:nvSpPr>
+        <p:spPr>
+          <a:xfrm>
+            <a:off x="457200" y="1353312"/>
+            <a:ext cx="5093061" cy="5047488"/>
           </a:xfrm>
           <a:prstGeom prst="rect">
             <a:avLst/>
@@ -5528,51 +5662,6 @@
               </a:rPr>
               <a:t>La matriz eléctrica.</a:t>
             </a:r>
-            <a:r>
-              <a:rPr sz="2000" b="0" i="0">
-                <a:solidFill>
-                  <a:srgbClr val="333333"/>
-                </a:solidFill>
-                <a:latin typeface="Calibri"/>
-              </a:rPr>
-              <a:t> Buena parte de la generación del país es </a:t>
-            </a:r>
-            <a:r>
-              <a:rPr sz="2000" b="1" i="0">
-                <a:solidFill>
-                  <a:srgbClr val="333333"/>
-                </a:solidFill>
-                <a:latin typeface="Calibri"/>
-              </a:rPr>
-              <a:t>hidráulica</a:t>
-            </a:r>
-            <a:r>
-              <a:rPr sz="2000" b="0" i="0">
-                <a:solidFill>
-                  <a:srgbClr val="333333"/>
-                </a:solidFill>
-                <a:latin typeface="Calibri"/>
-              </a:rPr>
-              <a:t>, así que un kilovatio-hora consumido en Colombia tiene menos emisiones asociadas que el mismo kilovatio en un país que quema carbón. Un análisis serio no copia cifras de emisiones de otro país: </a:t>
-            </a:r>
-            <a:r>
-              <a:rPr sz="2000" b="1" i="0">
-                <a:solidFill>
-                  <a:srgbClr val="333333"/>
-                </a:solidFill>
-                <a:latin typeface="Calibri"/>
-              </a:rPr>
-              <a:t>usa el factor local</a:t>
-            </a:r>
-            <a:r>
-              <a:rPr sz="2000" b="0" i="0">
-                <a:solidFill>
-                  <a:srgbClr val="333333"/>
-                </a:solidFill>
-                <a:latin typeface="Calibri"/>
-              </a:rPr>
-              <a:t>, que publica el operador del sistema (XM).</a:t>
-            </a:r>
           </a:p>
           <a:p>
             <a:pPr>
@@ -5598,33 +5687,6 @@
               </a:rPr>
               <a:t>Y su contracara.</a:t>
             </a:r>
-            <a:r>
-              <a:rPr sz="2000" b="0" i="0">
-                <a:solidFill>
-                  <a:srgbClr val="333333"/>
-                </a:solidFill>
-                <a:latin typeface="Calibri"/>
-              </a:rPr>
-              <a:t> Cuando llega el fenómeno de El Niño y baja el nivel de los embalses, entran las plantas térmicas y </a:t>
-            </a:r>
-            <a:r>
-              <a:rPr sz="2000" b="1" i="0">
-                <a:solidFill>
-                  <a:srgbClr val="333333"/>
-                </a:solidFill>
-                <a:latin typeface="Calibri"/>
-              </a:rPr>
-              <a:t>la misma aplicación pasa a emitir más sin cambiar una línea de código</a:t>
-            </a:r>
-            <a:r>
-              <a:rPr sz="2000" b="0" i="0">
-                <a:solidFill>
-                  <a:srgbClr val="333333"/>
-                </a:solidFill>
-                <a:latin typeface="Calibri"/>
-              </a:rPr>
-              <a:t>. La huella de un sistema no es un número fijo: depende de cuándo y dónde corre.</a:t>
-            </a:r>
           </a:p>
           <a:p>
             <a:pPr>
@@ -5675,25 +5737,7 @@
                 </a:solidFill>
                 <a:latin typeface="Calibri"/>
               </a:rPr>
-              <a:t> fija los lineamientos de los RAEE en Colombia: el productor tiene que ofrecer puntos de recolección y el usuario tiene el deber de usarlos. Los informes internacionales (Global E-waste Monitor) muestran que </a:t>
-            </a:r>
-            <a:r>
-              <a:rPr sz="2000" b="1" i="0">
-                <a:solidFill>
-                  <a:srgbClr val="333333"/>
-                </a:solidFill>
-                <a:latin typeface="Calibri"/>
-              </a:rPr>
-              <a:t>la mayor parte del residuo electrónico del mundo no se recoge formalmente</a:t>
-            </a:r>
-            <a:r>
-              <a:rPr sz="2000" b="0" i="0">
-                <a:solidFill>
-                  <a:srgbClr val="333333"/>
-                </a:solidFill>
-                <a:latin typeface="Calibri"/>
-              </a:rPr>
-              <a:t>, y lo que no se recoge se desarma a mano, sin protección.</a:t>
+              <a:t> fija los lineamientos de los RAEE en Colombia:</a:t>
             </a:r>
           </a:p>
           <a:p>
@@ -5720,57 +5764,12 @@
               </a:rPr>
               <a:t>Consecuencia práctica para su proyecto:</a:t>
             </a:r>
-            <a:r>
-              <a:rPr sz="2000" b="0" i="0">
-                <a:solidFill>
-                  <a:srgbClr val="333333"/>
-                </a:solidFill>
-                <a:latin typeface="Calibri"/>
-              </a:rPr>
-              <a:t> la decisión ambiental más fuerte que puede tomar un equipo de este curso casi nunca es «consumir menos batería». Es </a:t>
-            </a:r>
-            <a:r>
-              <a:rPr sz="2000" b="1" i="0">
-                <a:solidFill>
-                  <a:srgbClr val="333333"/>
-                </a:solidFill>
-                <a:latin typeface="Calibri"/>
-              </a:rPr>
-              <a:t>no obligar a cambiar de aparato</a:t>
-            </a:r>
-            <a:r>
-              <a:rPr sz="2000" b="0" i="0">
-                <a:solidFill>
-                  <a:srgbClr val="333333"/>
-                </a:solidFill>
-                <a:latin typeface="Calibri"/>
-              </a:rPr>
-              <a:t> y </a:t>
-            </a:r>
-            <a:r>
-              <a:rPr sz="2000" b="1" i="0">
-                <a:solidFill>
-                  <a:srgbClr val="333333"/>
-                </a:solidFill>
-                <a:latin typeface="Calibri"/>
-              </a:rPr>
-              <a:t>no mover datos que no hacen falta</a:t>
-            </a:r>
-            <a:r>
-              <a:rPr sz="2000" b="0" i="0">
-                <a:solidFill>
-                  <a:srgbClr val="333333"/>
-                </a:solidFill>
-                <a:latin typeface="Calibri"/>
-              </a:rPr>
-              <a:t>.</a:t>
-            </a:r>
-          </a:p>
-        </p:txBody>
-      </p:sp>
-      <p:sp>
-        <p:nvSpPr>
-          <p:cNvPr id="6" name="TextBox 5"/>
+          </a:p>
+        </p:txBody>
+      </p:sp>
+      <p:sp>
+        <p:nvSpPr>
+          <p:cNvPr id="9" name="TextBox 8"/>
           <p:cNvSpPr txBox="1"/>
           <p:nvPr/>
         </p:nvSpPr>
@@ -7061,16 +7060,16 @@
         </p:nvSpPr>
         <p:spPr>
           <a:xfrm>
-            <a:off x="457200" y="1444752"/>
-            <a:ext cx="11277295" cy="908913"/>
+            <a:off x="5934611" y="1399031"/>
+            <a:ext cx="5735574" cy="4617720"/>
           </a:xfrm>
           <a:prstGeom prst="roundRect">
             <a:avLst>
-              <a:gd name="adj" fmla="val 12000"/>
+              <a:gd name="adj" fmla="val 4000"/>
             </a:avLst>
           </a:prstGeom>
           <a:solidFill>
-            <a:srgbClr val="F2F2F2"/>
+            <a:srgbClr val="E8EEF4"/>
           </a:solidFill>
           <a:ln>
             <a:noFill/>
@@ -7098,255 +7097,78 @@
           </a:p>
         </p:txBody>
       </p:sp>
-      <p:sp>
-        <p:nvSpPr>
-          <p:cNvPr id="7" name="Rounded Rectangle 6"/>
-          <p:cNvSpPr/>
-          <p:nvPr/>
-        </p:nvSpPr>
-        <p:spPr>
-          <a:xfrm>
-            <a:off x="594360" y="1679752"/>
-            <a:ext cx="438912" cy="438912"/>
-          </a:xfrm>
-          <a:prstGeom prst="roundRect">
-            <a:avLst>
-              <a:gd name="adj" fmla="val 12000"/>
-            </a:avLst>
-          </a:prstGeom>
-          <a:solidFill>
-            <a:srgbClr val="095292"/>
-          </a:solidFill>
-          <a:ln>
-            <a:noFill/>
-          </a:ln>
-        </p:spPr>
-        <p:style>
-          <a:lnRef idx="1">
-            <a:schemeClr val="accent1"/>
-          </a:lnRef>
-          <a:fillRef idx="3">
-            <a:schemeClr val="accent1"/>
-          </a:fillRef>
-          <a:effectRef idx="2">
-            <a:schemeClr val="accent1"/>
-          </a:effectRef>
-          <a:fontRef idx="minor">
-            <a:schemeClr val="lt1"/>
-          </a:fontRef>
-        </p:style>
-        <p:txBody>
-          <a:bodyPr rtlCol="0" anchor="ctr"/>
-          <a:lstStyle/>
-          <a:p>
-            <a:pPr algn="ctr"/>
-          </a:p>
-        </p:txBody>
-      </p:sp>
-      <p:sp>
-        <p:nvSpPr>
-          <p:cNvPr id="8" name="TextBox 7"/>
-          <p:cNvSpPr txBox="1"/>
-          <p:nvPr/>
-        </p:nvSpPr>
-        <p:spPr>
-          <a:xfrm>
-            <a:off x="594360" y="1679752"/>
-            <a:ext cx="438912" cy="438912"/>
-          </a:xfrm>
-          <a:prstGeom prst="rect">
-            <a:avLst/>
-          </a:prstGeom>
-          <a:noFill/>
-        </p:spPr>
-        <p:txBody>
-          <a:bodyPr wrap="square" anchor="ctr"/>
-          <a:lstStyle/>
-          <a:p>
-            <a:pPr algn="ctr"/>
-            <a:r>
-              <a:rPr sz="1600" b="1" i="0">
-                <a:solidFill>
-                  <a:srgbClr val="FFFFFF"/>
-                </a:solidFill>
-                <a:latin typeface="Calibri"/>
-              </a:rPr>
-              <a:t>1</a:t>
-            </a:r>
-          </a:p>
-        </p:txBody>
-      </p:sp>
-      <p:sp>
-        <p:nvSpPr>
-          <p:cNvPr id="9" name="TextBox 8"/>
-          <p:cNvSpPr txBox="1"/>
-          <p:nvPr/>
-        </p:nvSpPr>
-        <p:spPr>
-          <a:xfrm>
-            <a:off x="1188720" y="1536192"/>
-            <a:ext cx="10271455" cy="744321"/>
-          </a:xfrm>
-          <a:prstGeom prst="rect">
-            <a:avLst/>
-          </a:prstGeom>
-          <a:noFill/>
-        </p:spPr>
-        <p:txBody>
-          <a:bodyPr wrap="square" anchor="ctr"/>
-          <a:lstStyle/>
-          <a:p>
-            <a:r>
-              <a:rPr sz="1500" b="1" i="0">
-                <a:solidFill>
-                  <a:srgbClr val="095292"/>
-                </a:solidFill>
-                <a:latin typeface="Calibri"/>
-              </a:rPr>
-              <a:t>1 · El recorrido</a:t>
-            </a:r>
-          </a:p>
-          <a:p>
-            <a:pPr>
-              <a:spcBef>
-                <a:spcPts val="200"/>
-              </a:spcBef>
-            </a:pPr>
-            <a:r>
-              <a:rPr sz="1300" b="0" i="0">
-                <a:solidFill>
-                  <a:srgbClr val="333333"/>
-                </a:solidFill>
-                <a:latin typeface="Calibri"/>
-              </a:rPr>
-              <a:t>Computador de la tienda → internet → servidor → base de datos.</a:t>
-            </a:r>
-          </a:p>
-        </p:txBody>
-      </p:sp>
-      <p:sp>
-        <p:nvSpPr>
-          <p:cNvPr id="10" name="Rounded Rectangle 9"/>
-          <p:cNvSpPr/>
-          <p:nvPr/>
-        </p:nvSpPr>
-        <p:spPr>
-          <a:xfrm>
-            <a:off x="457200" y="2445105"/>
-            <a:ext cx="11277295" cy="908913"/>
-          </a:xfrm>
-          <a:prstGeom prst="roundRect">
-            <a:avLst>
-              <a:gd name="adj" fmla="val 12000"/>
-            </a:avLst>
-          </a:prstGeom>
-          <a:solidFill>
-            <a:srgbClr val="E8F4FA"/>
-          </a:solidFill>
-          <a:ln>
-            <a:noFill/>
-          </a:ln>
-        </p:spPr>
-        <p:style>
-          <a:lnRef idx="1">
-            <a:schemeClr val="accent1"/>
-          </a:lnRef>
-          <a:fillRef idx="3">
-            <a:schemeClr val="accent1"/>
-          </a:fillRef>
-          <a:effectRef idx="2">
-            <a:schemeClr val="accent1"/>
-          </a:effectRef>
-          <a:fontRef idx="minor">
-            <a:schemeClr val="lt1"/>
-          </a:fontRef>
-        </p:style>
-        <p:txBody>
-          <a:bodyPr rtlCol="0" anchor="ctr"/>
-          <a:lstStyle/>
-          <a:p>
-            <a:pPr algn="ctr"/>
-          </a:p>
-        </p:txBody>
-      </p:sp>
-      <p:sp>
-        <p:nvSpPr>
-          <p:cNvPr id="11" name="Rounded Rectangle 10"/>
-          <p:cNvSpPr/>
-          <p:nvPr/>
-        </p:nvSpPr>
-        <p:spPr>
-          <a:xfrm>
-            <a:off x="594360" y="2680106"/>
-            <a:ext cx="438912" cy="438912"/>
-          </a:xfrm>
-          <a:prstGeom prst="roundRect">
-            <a:avLst>
-              <a:gd name="adj" fmla="val 12000"/>
-            </a:avLst>
-          </a:prstGeom>
-          <a:solidFill>
-            <a:srgbClr val="095292"/>
-          </a:solidFill>
-          <a:ln>
-            <a:noFill/>
-          </a:ln>
-        </p:spPr>
-        <p:style>
-          <a:lnRef idx="1">
-            <a:schemeClr val="accent1"/>
-          </a:lnRef>
-          <a:fillRef idx="3">
-            <a:schemeClr val="accent1"/>
-          </a:fillRef>
-          <a:effectRef idx="2">
-            <a:schemeClr val="accent1"/>
-          </a:effectRef>
-          <a:fontRef idx="minor">
-            <a:schemeClr val="lt1"/>
-          </a:fontRef>
-        </p:style>
-        <p:txBody>
-          <a:bodyPr rtlCol="0" anchor="ctr"/>
-          <a:lstStyle/>
-          <a:p>
-            <a:pPr algn="ctr"/>
-          </a:p>
-        </p:txBody>
-      </p:sp>
-      <p:sp>
-        <p:nvSpPr>
-          <p:cNvPr id="12" name="TextBox 11"/>
-          <p:cNvSpPr txBox="1"/>
-          <p:nvPr/>
-        </p:nvSpPr>
-        <p:spPr>
-          <a:xfrm>
-            <a:off x="594360" y="2680106"/>
-            <a:ext cx="438912" cy="438912"/>
-          </a:xfrm>
-          <a:prstGeom prst="rect">
-            <a:avLst/>
-          </a:prstGeom>
-          <a:noFill/>
-        </p:spPr>
-        <p:txBody>
-          <a:bodyPr wrap="square" anchor="ctr"/>
-          <a:lstStyle/>
-          <a:p>
-            <a:pPr algn="ctr"/>
-            <a:r>
-              <a:rPr sz="1600" b="1" i="0">
-                <a:solidFill>
-                  <a:srgbClr val="FFFFFF"/>
-                </a:solidFill>
-                <a:latin typeface="Calibri"/>
-              </a:rPr>
-              <a:t>2</a:t>
-            </a:r>
-          </a:p>
-        </p:txBody>
-      </p:sp>
+      <p:pic>
+        <p:nvPicPr>
+          <p:cNvPr id="7" name="Picture 6" descr="reporte-tienda-paso1.png"/>
+          <p:cNvPicPr>
+            <a:picLocks noChangeAspect="1"/>
+          </p:cNvPicPr>
+          <p:nvPr/>
+        </p:nvPicPr>
+        <p:blipFill>
+          <a:blip r:embed="rId2"/>
+          <a:stretch>
+            <a:fillRect/>
+          </a:stretch>
+        </p:blipFill>
+        <p:spPr>
+          <a:xfrm>
+            <a:off x="6007763" y="1472184"/>
+            <a:ext cx="5589270" cy="4471416"/>
+          </a:xfrm>
+          <a:prstGeom prst="rect">
+            <a:avLst/>
+          </a:prstGeom>
+        </p:spPr>
+      </p:pic>
+      <p:pic>
+        <p:nvPicPr>
+          <p:cNvPr id="8" name="Picture 7" descr="reporte-tienda-paso2.png"/>
+          <p:cNvPicPr>
+            <a:picLocks noChangeAspect="1"/>
+          </p:cNvPicPr>
+          <p:nvPr/>
+        </p:nvPicPr>
+        <p:blipFill>
+          <a:blip r:embed="rId3"/>
+          <a:stretch>
+            <a:fillRect/>
+          </a:stretch>
+        </p:blipFill>
+        <p:spPr>
+          <a:xfrm>
+            <a:off x="6007763" y="1472184"/>
+            <a:ext cx="5589270" cy="4471416"/>
+          </a:xfrm>
+          <a:prstGeom prst="rect">
+            <a:avLst/>
+          </a:prstGeom>
+        </p:spPr>
+      </p:pic>
+      <p:pic>
+        <p:nvPicPr>
+          <p:cNvPr id="9" name="Picture 8" descr="reporte-tienda-paso3.png"/>
+          <p:cNvPicPr>
+            <a:picLocks noChangeAspect="1"/>
+          </p:cNvPicPr>
+          <p:nvPr/>
+        </p:nvPicPr>
+        <p:blipFill>
+          <a:blip r:embed="rId4"/>
+          <a:stretch>
+            <a:fillRect/>
+          </a:stretch>
+        </p:blipFill>
+        <p:spPr>
+          <a:xfrm>
+            <a:off x="6007763" y="1472184"/>
+            <a:ext cx="5589270" cy="4471416"/>
+          </a:xfrm>
+          <a:prstGeom prst="rect">
+            <a:avLst/>
+          </a:prstGeom>
+        </p:spPr>
+      </p:pic>
       <p:sp>
         <p:nvSpPr>
           <p:cNvPr id="13" name="TextBox 12"/>
@@ -7355,8 +7177,8 @@
         </p:nvSpPr>
         <p:spPr>
           <a:xfrm>
-            <a:off x="1188720" y="2536545"/>
-            <a:ext cx="10271455" cy="744321"/>
+            <a:off x="5870301" y="5961888"/>
+            <a:ext cx="5864193" cy="320040"/>
           </a:xfrm>
           <a:prstGeom prst="rect">
             <a:avLst/>
@@ -7364,553 +7186,186 @@
           <a:noFill/>
         </p:spPr>
         <p:txBody>
-          <a:bodyPr wrap="square" anchor="ctr"/>
-          <a:lstStyle/>
-          <a:p>
-            <a:r>
-              <a:rPr sz="1500" b="1" i="0">
-                <a:solidFill>
-                  <a:srgbClr val="095292"/>
-                </a:solidFill>
-                <a:latin typeface="Calibri"/>
-              </a:rPr>
-              <a:t>2 · Lo que se repite</a:t>
-            </a:r>
-          </a:p>
+          <a:bodyPr wrap="square">
+            <a:spAutoFit/>
+          </a:bodyPr>
+          <a:lstStyle/>
+          <a:p>
+            <a:pPr algn="ctr"/>
+            <a:r>
+              <a:rPr sz="1100" b="0" i="1">
+                <a:solidFill>
+                  <a:srgbClr val="666666"/>
+                </a:solidFill>
+                <a:latin typeface="Calibri"/>
+              </a:rPr>
+              <a:t>Clic para avanzar la animación</a:t>
+            </a:r>
+          </a:p>
+        </p:txBody>
+      </p:sp>
+      <p:sp>
+        <p:nvSpPr>
+          <p:cNvPr id="14" name="TextBox 13"/>
+          <p:cNvSpPr txBox="1"/>
+          <p:nvPr/>
+        </p:nvSpPr>
+        <p:spPr>
+          <a:xfrm>
+            <a:off x="457200" y="1563624"/>
+            <a:ext cx="5093061" cy="4837176"/>
+          </a:xfrm>
+          <a:prstGeom prst="rect">
+            <a:avLst/>
+          </a:prstGeom>
+          <a:noFill/>
+        </p:spPr>
+        <p:txBody>
+          <a:bodyPr wrap="square">
+            <a:spAutoFit/>
+          </a:bodyPr>
+          <a:lstStyle/>
           <a:p>
             <a:pPr>
-              <a:spcBef>
-                <a:spcPts val="200"/>
-              </a:spcBef>
+              <a:spcAft>
+                <a:spcPts val="800"/>
+              </a:spcAft>
             </a:pPr>
             <a:r>
-              <a:rPr sz="1300" b="0" i="0">
+              <a:rPr sz="2000" b="0" i="0">
                 <a:solidFill>
                   <a:srgbClr val="333333"/>
                 </a:solidFill>
                 <a:latin typeface="Calibri"/>
               </a:rPr>
-              <a:t>El reporte se genera completo cada vez que alguien lo abre: 40 veces al día.</a:t>
-            </a:r>
-          </a:p>
-        </p:txBody>
-      </p:sp>
-      <p:sp>
-        <p:nvSpPr>
-          <p:cNvPr id="14" name="Rounded Rectangle 13"/>
-          <p:cNvSpPr/>
-          <p:nvPr/>
-        </p:nvSpPr>
-        <p:spPr>
-          <a:xfrm>
-            <a:off x="457200" y="3445459"/>
-            <a:ext cx="11277295" cy="908913"/>
-          </a:xfrm>
-          <a:prstGeom prst="roundRect">
-            <a:avLst>
-              <a:gd name="adj" fmla="val 12000"/>
-            </a:avLst>
-          </a:prstGeom>
-          <a:solidFill>
-            <a:srgbClr val="F2F2F2"/>
-          </a:solidFill>
-          <a:ln>
-            <a:noFill/>
-          </a:ln>
-        </p:spPr>
-        <p:style>
-          <a:lnRef idx="1">
-            <a:schemeClr val="accent1"/>
-          </a:lnRef>
-          <a:fillRef idx="3">
-            <a:schemeClr val="accent1"/>
-          </a:fillRef>
-          <a:effectRef idx="2">
-            <a:schemeClr val="accent1"/>
-          </a:effectRef>
-          <a:fontRef idx="minor">
-            <a:schemeClr val="lt1"/>
-          </a:fontRef>
-        </p:style>
-        <p:txBody>
-          <a:bodyPr rtlCol="0" anchor="ctr"/>
-          <a:lstStyle/>
-          <a:p>
-            <a:pPr algn="ctr"/>
-          </a:p>
-        </p:txBody>
-      </p:sp>
-      <p:sp>
-        <p:nvSpPr>
-          <p:cNvPr id="15" name="Rounded Rectangle 14"/>
-          <p:cNvSpPr/>
-          <p:nvPr/>
-        </p:nvSpPr>
-        <p:spPr>
-          <a:xfrm>
-            <a:off x="594360" y="3680460"/>
-            <a:ext cx="438912" cy="438912"/>
-          </a:xfrm>
-          <a:prstGeom prst="roundRect">
-            <a:avLst>
-              <a:gd name="adj" fmla="val 12000"/>
-            </a:avLst>
-          </a:prstGeom>
-          <a:solidFill>
-            <a:srgbClr val="095292"/>
-          </a:solidFill>
-          <a:ln>
-            <a:noFill/>
-          </a:ln>
-        </p:spPr>
-        <p:style>
-          <a:lnRef idx="1">
-            <a:schemeClr val="accent1"/>
-          </a:lnRef>
-          <a:fillRef idx="3">
-            <a:schemeClr val="accent1"/>
-          </a:fillRef>
-          <a:effectRef idx="2">
-            <a:schemeClr val="accent1"/>
-          </a:effectRef>
-          <a:fontRef idx="minor">
-            <a:schemeClr val="lt1"/>
-          </a:fontRef>
-        </p:style>
-        <p:txBody>
-          <a:bodyPr rtlCol="0" anchor="ctr"/>
-          <a:lstStyle/>
-          <a:p>
-            <a:pPr algn="ctr"/>
-          </a:p>
-        </p:txBody>
-      </p:sp>
-      <p:sp>
-        <p:nvSpPr>
-          <p:cNvPr id="16" name="TextBox 15"/>
-          <p:cNvSpPr txBox="1"/>
-          <p:nvPr/>
-        </p:nvSpPr>
-        <p:spPr>
-          <a:xfrm>
-            <a:off x="594360" y="3680460"/>
-            <a:ext cx="438912" cy="438912"/>
-          </a:xfrm>
-          <a:prstGeom prst="rect">
-            <a:avLst/>
-          </a:prstGeom>
-          <a:noFill/>
-        </p:spPr>
-        <p:txBody>
-          <a:bodyPr wrap="square" anchor="ctr"/>
-          <a:lstStyle/>
-          <a:p>
-            <a:pPr algn="ctr"/>
-            <a:r>
-              <a:rPr sz="1600" b="1" i="0">
-                <a:solidFill>
-                  <a:srgbClr val="FFFFFF"/>
-                </a:solidFill>
-                <a:latin typeface="Calibri"/>
-              </a:rPr>
-              <a:t>3</a:t>
-            </a:r>
-          </a:p>
-        </p:txBody>
-      </p:sp>
-      <p:sp>
-        <p:nvSpPr>
-          <p:cNvPr id="17" name="TextBox 16"/>
-          <p:cNvSpPr txBox="1"/>
-          <p:nvPr/>
-        </p:nvSpPr>
-        <p:spPr>
-          <a:xfrm>
-            <a:off x="1188720" y="3536899"/>
-            <a:ext cx="10271455" cy="744321"/>
-          </a:xfrm>
-          <a:prstGeom prst="rect">
-            <a:avLst/>
-          </a:prstGeom>
-          <a:noFill/>
-        </p:spPr>
-        <p:txBody>
-          <a:bodyPr wrap="square" anchor="ctr"/>
-          <a:lstStyle/>
-          <a:p>
-            <a:r>
-              <a:rPr sz="1500" b="1" i="0">
-                <a:solidFill>
-                  <a:srgbClr val="095292"/>
-                </a:solidFill>
-                <a:latin typeface="Calibri"/>
-              </a:rPr>
-              <a:t>3 · La etapa más pesada</a:t>
+              <a:t>–   </a:t>
+            </a:r>
+            <a:r>
+              <a:rPr sz="2000" b="1" i="0">
+                <a:solidFill>
+                  <a:srgbClr val="333333"/>
+                </a:solidFill>
+                <a:latin typeface="Calibri"/>
+              </a:rPr>
+              <a:t>1 · El recorrido:</a:t>
+            </a:r>
+            <a:r>
+              <a:rPr sz="2000" b="0" i="0">
+                <a:solidFill>
+                  <a:srgbClr val="333333"/>
+                </a:solidFill>
+                <a:latin typeface="Calibri"/>
+              </a:rPr>
+              <a:t> Computador de la tienda → internet → servidor → base de datos.</a:t>
             </a:r>
           </a:p>
           <a:p>
             <a:pPr>
-              <a:spcBef>
-                <a:spcPts val="200"/>
-              </a:spcBef>
+              <a:spcAft>
+                <a:spcPts val="800"/>
+              </a:spcAft>
             </a:pPr>
             <a:r>
-              <a:rPr sz="1300" b="0" i="0">
+              <a:rPr sz="2000" b="0" i="0">
                 <a:solidFill>
                   <a:srgbClr val="333333"/>
                 </a:solidFill>
                 <a:latin typeface="Calibri"/>
               </a:rPr>
-              <a:t>El servidor: recalcula todo el mes, 40 veces, aunque nada cambió.</a:t>
-            </a:r>
-          </a:p>
-        </p:txBody>
-      </p:sp>
-      <p:sp>
-        <p:nvSpPr>
-          <p:cNvPr id="18" name="Rounded Rectangle 17"/>
-          <p:cNvSpPr/>
-          <p:nvPr/>
-        </p:nvSpPr>
-        <p:spPr>
-          <a:xfrm>
-            <a:off x="457200" y="4445812"/>
-            <a:ext cx="11277295" cy="908913"/>
-          </a:xfrm>
-          <a:prstGeom prst="roundRect">
-            <a:avLst>
-              <a:gd name="adj" fmla="val 12000"/>
-            </a:avLst>
-          </a:prstGeom>
-          <a:solidFill>
-            <a:srgbClr val="E8F4FA"/>
-          </a:solidFill>
-          <a:ln>
-            <a:noFill/>
-          </a:ln>
-        </p:spPr>
-        <p:style>
-          <a:lnRef idx="1">
-            <a:schemeClr val="accent1"/>
-          </a:lnRef>
-          <a:fillRef idx="3">
-            <a:schemeClr val="accent1"/>
-          </a:fillRef>
-          <a:effectRef idx="2">
-            <a:schemeClr val="accent1"/>
-          </a:effectRef>
-          <a:fontRef idx="minor">
-            <a:schemeClr val="lt1"/>
-          </a:fontRef>
-        </p:style>
-        <p:txBody>
-          <a:bodyPr rtlCol="0" anchor="ctr"/>
-          <a:lstStyle/>
-          <a:p>
-            <a:pPr algn="ctr"/>
-          </a:p>
-        </p:txBody>
-      </p:sp>
-      <p:sp>
-        <p:nvSpPr>
-          <p:cNvPr id="19" name="Rounded Rectangle 18"/>
-          <p:cNvSpPr/>
-          <p:nvPr/>
-        </p:nvSpPr>
-        <p:spPr>
-          <a:xfrm>
-            <a:off x="594360" y="4680813"/>
-            <a:ext cx="438912" cy="438912"/>
-          </a:xfrm>
-          <a:prstGeom prst="roundRect">
-            <a:avLst>
-              <a:gd name="adj" fmla="val 12000"/>
-            </a:avLst>
-          </a:prstGeom>
-          <a:solidFill>
-            <a:srgbClr val="095292"/>
-          </a:solidFill>
-          <a:ln>
-            <a:noFill/>
-          </a:ln>
-        </p:spPr>
-        <p:style>
-          <a:lnRef idx="1">
-            <a:schemeClr val="accent1"/>
-          </a:lnRef>
-          <a:fillRef idx="3">
-            <a:schemeClr val="accent1"/>
-          </a:fillRef>
-          <a:effectRef idx="2">
-            <a:schemeClr val="accent1"/>
-          </a:effectRef>
-          <a:fontRef idx="minor">
-            <a:schemeClr val="lt1"/>
-          </a:fontRef>
-        </p:style>
-        <p:txBody>
-          <a:bodyPr rtlCol="0" anchor="ctr"/>
-          <a:lstStyle/>
-          <a:p>
-            <a:pPr algn="ctr"/>
-          </a:p>
-        </p:txBody>
-      </p:sp>
-      <p:sp>
-        <p:nvSpPr>
-          <p:cNvPr id="20" name="TextBox 19"/>
-          <p:cNvSpPr txBox="1"/>
-          <p:nvPr/>
-        </p:nvSpPr>
-        <p:spPr>
-          <a:xfrm>
-            <a:off x="594360" y="4680813"/>
-            <a:ext cx="438912" cy="438912"/>
-          </a:xfrm>
-          <a:prstGeom prst="rect">
-            <a:avLst/>
-          </a:prstGeom>
-          <a:noFill/>
-        </p:spPr>
-        <p:txBody>
-          <a:bodyPr wrap="square" anchor="ctr"/>
-          <a:lstStyle/>
-          <a:p>
-            <a:pPr algn="ctr"/>
-            <a:r>
-              <a:rPr sz="1600" b="1" i="0">
-                <a:solidFill>
-                  <a:srgbClr val="FFFFFF"/>
-                </a:solidFill>
-                <a:latin typeface="Calibri"/>
-              </a:rPr>
-              <a:t>4</a:t>
-            </a:r>
-          </a:p>
-        </p:txBody>
-      </p:sp>
-      <p:sp>
-        <p:nvSpPr>
-          <p:cNvPr id="21" name="TextBox 20"/>
-          <p:cNvSpPr txBox="1"/>
-          <p:nvPr/>
-        </p:nvSpPr>
-        <p:spPr>
-          <a:xfrm>
-            <a:off x="1188720" y="4537252"/>
-            <a:ext cx="10271455" cy="744321"/>
-          </a:xfrm>
-          <a:prstGeom prst="rect">
-            <a:avLst/>
-          </a:prstGeom>
-          <a:noFill/>
-        </p:spPr>
-        <p:txBody>
-          <a:bodyPr wrap="square" anchor="ctr"/>
-          <a:lstStyle/>
-          <a:p>
-            <a:r>
-              <a:rPr sz="1500" b="1" i="0">
-                <a:solidFill>
-                  <a:srgbClr val="095292"/>
-                </a:solidFill>
-                <a:latin typeface="Calibri"/>
-              </a:rPr>
-              <a:t>4 · Dos decisiones</a:t>
+              <a:t>–   </a:t>
+            </a:r>
+            <a:r>
+              <a:rPr sz="2000" b="1" i="0">
+                <a:solidFill>
+                  <a:srgbClr val="333333"/>
+                </a:solidFill>
+                <a:latin typeface="Calibri"/>
+              </a:rPr>
+              <a:t>2 · Lo que se repite:</a:t>
+            </a:r>
+            <a:r>
+              <a:rPr sz="2000" b="0" i="0">
+                <a:solidFill>
+                  <a:srgbClr val="333333"/>
+                </a:solidFill>
+                <a:latin typeface="Calibri"/>
+              </a:rPr>
+              <a:t> El reporte se genera completo cada vez que alguien lo abre: 40 veces al día.</a:t>
             </a:r>
           </a:p>
           <a:p>
             <a:pPr>
-              <a:spcBef>
-                <a:spcPts val="200"/>
-              </a:spcBef>
+              <a:spcAft>
+                <a:spcPts val="800"/>
+              </a:spcAft>
             </a:pPr>
             <a:r>
-              <a:rPr sz="1300" b="0" i="0">
+              <a:rPr sz="2000" b="0" i="0">
                 <a:solidFill>
                   <a:srgbClr val="333333"/>
                 </a:solidFill>
                 <a:latin typeface="Calibri"/>
               </a:rPr>
-              <a:t>Guardar el resultado y recalcular solo si hay ventas nuevas. Abrir solo el día, no el mes.</a:t>
-            </a:r>
-          </a:p>
-        </p:txBody>
-      </p:sp>
-      <p:sp>
-        <p:nvSpPr>
-          <p:cNvPr id="22" name="Rounded Rectangle 21"/>
-          <p:cNvSpPr/>
-          <p:nvPr/>
-        </p:nvSpPr>
-        <p:spPr>
-          <a:xfrm>
-            <a:off x="457200" y="5446166"/>
-            <a:ext cx="11277295" cy="908913"/>
-          </a:xfrm>
-          <a:prstGeom prst="roundRect">
-            <a:avLst>
-              <a:gd name="adj" fmla="val 12000"/>
-            </a:avLst>
-          </a:prstGeom>
-          <a:solidFill>
-            <a:srgbClr val="F2F2F2"/>
-          </a:solidFill>
-          <a:ln>
-            <a:noFill/>
-          </a:ln>
-        </p:spPr>
-        <p:style>
-          <a:lnRef idx="1">
-            <a:schemeClr val="accent1"/>
-          </a:lnRef>
-          <a:fillRef idx="3">
-            <a:schemeClr val="accent1"/>
-          </a:fillRef>
-          <a:effectRef idx="2">
-            <a:schemeClr val="accent1"/>
-          </a:effectRef>
-          <a:fontRef idx="minor">
-            <a:schemeClr val="lt1"/>
-          </a:fontRef>
-        </p:style>
-        <p:txBody>
-          <a:bodyPr rtlCol="0" anchor="ctr"/>
-          <a:lstStyle/>
-          <a:p>
-            <a:pPr algn="ctr"/>
-          </a:p>
-        </p:txBody>
-      </p:sp>
-      <p:sp>
-        <p:nvSpPr>
-          <p:cNvPr id="23" name="Rounded Rectangle 22"/>
-          <p:cNvSpPr/>
-          <p:nvPr/>
-        </p:nvSpPr>
-        <p:spPr>
-          <a:xfrm>
-            <a:off x="594360" y="5681167"/>
-            <a:ext cx="438912" cy="438912"/>
-          </a:xfrm>
-          <a:prstGeom prst="roundRect">
-            <a:avLst>
-              <a:gd name="adj" fmla="val 12000"/>
-            </a:avLst>
-          </a:prstGeom>
-          <a:solidFill>
-            <a:srgbClr val="095292"/>
-          </a:solidFill>
-          <a:ln>
-            <a:noFill/>
-          </a:ln>
-        </p:spPr>
-        <p:style>
-          <a:lnRef idx="1">
-            <a:schemeClr val="accent1"/>
-          </a:lnRef>
-          <a:fillRef idx="3">
-            <a:schemeClr val="accent1"/>
-          </a:fillRef>
-          <a:effectRef idx="2">
-            <a:schemeClr val="accent1"/>
-          </a:effectRef>
-          <a:fontRef idx="minor">
-            <a:schemeClr val="lt1"/>
-          </a:fontRef>
-        </p:style>
-        <p:txBody>
-          <a:bodyPr rtlCol="0" anchor="ctr"/>
-          <a:lstStyle/>
-          <a:p>
-            <a:pPr algn="ctr"/>
-          </a:p>
-        </p:txBody>
-      </p:sp>
-      <p:sp>
-        <p:nvSpPr>
-          <p:cNvPr id="24" name="TextBox 23"/>
-          <p:cNvSpPr txBox="1"/>
-          <p:nvPr/>
-        </p:nvSpPr>
-        <p:spPr>
-          <a:xfrm>
-            <a:off x="594360" y="5681167"/>
-            <a:ext cx="438912" cy="438912"/>
-          </a:xfrm>
-          <a:prstGeom prst="rect">
-            <a:avLst/>
-          </a:prstGeom>
-          <a:noFill/>
-        </p:spPr>
-        <p:txBody>
-          <a:bodyPr wrap="square" anchor="ctr"/>
-          <a:lstStyle/>
-          <a:p>
-            <a:pPr algn="ctr"/>
-            <a:r>
-              <a:rPr sz="1600" b="1" i="0">
-                <a:solidFill>
-                  <a:srgbClr val="FFFFFF"/>
-                </a:solidFill>
-                <a:latin typeface="Calibri"/>
-              </a:rPr>
-              <a:t>5</a:t>
-            </a:r>
-          </a:p>
-        </p:txBody>
-      </p:sp>
-      <p:sp>
-        <p:nvSpPr>
-          <p:cNvPr id="25" name="TextBox 24"/>
-          <p:cNvSpPr txBox="1"/>
-          <p:nvPr/>
-        </p:nvSpPr>
-        <p:spPr>
-          <a:xfrm>
-            <a:off x="1188720" y="5537606"/>
-            <a:ext cx="10271455" cy="744321"/>
-          </a:xfrm>
-          <a:prstGeom prst="rect">
-            <a:avLst/>
-          </a:prstGeom>
-          <a:noFill/>
-        </p:spPr>
-        <p:txBody>
-          <a:bodyPr wrap="square" anchor="ctr"/>
-          <a:lstStyle/>
-          <a:p>
-            <a:r>
-              <a:rPr sz="1500" b="1" i="0">
-                <a:solidFill>
-                  <a:srgbClr val="095292"/>
-                </a:solidFill>
-                <a:latin typeface="Calibri"/>
-              </a:rPr>
-              <a:t>5 · Un indicador</a:t>
+              <a:t>–   </a:t>
+            </a:r>
+            <a:r>
+              <a:rPr sz="2000" b="1" i="0">
+                <a:solidFill>
+                  <a:srgbClr val="333333"/>
+                </a:solidFill>
+                <a:latin typeface="Calibri"/>
+              </a:rPr>
+              <a:t>3 · La etapa más pesada:</a:t>
+            </a:r>
+            <a:r>
+              <a:rPr sz="2000" b="0" i="0">
+                <a:solidFill>
+                  <a:srgbClr val="333333"/>
+                </a:solidFill>
+                <a:latin typeface="Calibri"/>
+              </a:rPr>
+              <a:t> El servidor: recalcula todo el mes, 40 veces, aunque nada cambió.</a:t>
             </a:r>
           </a:p>
           <a:p>
             <a:pPr>
-              <a:spcBef>
-                <a:spcPts val="200"/>
-              </a:spcBef>
+              <a:spcAft>
+                <a:spcPts val="800"/>
+              </a:spcAft>
             </a:pPr>
             <a:r>
-              <a:rPr sz="1300" b="0" i="0">
+              <a:rPr sz="2000" b="0" i="0">
                 <a:solidFill>
                   <a:srgbClr val="333333"/>
                 </a:solidFill>
                 <a:latin typeface="Calibri"/>
               </a:rPr>
-              <a:t>Veces que se recalcula el reporte al día: de 40 a 1.</a:t>
-            </a:r>
-          </a:p>
-        </p:txBody>
-      </p:sp>
-      <p:sp>
-        <p:nvSpPr>
-          <p:cNvPr id="26" name="TextBox 25"/>
+              <a:t>–   </a:t>
+            </a:r>
+            <a:r>
+              <a:rPr sz="2000" b="1" i="0">
+                <a:solidFill>
+                  <a:srgbClr val="333333"/>
+                </a:solidFill>
+                <a:latin typeface="Calibri"/>
+              </a:rPr>
+              <a:t>4 · Dos decisiones:</a:t>
+            </a:r>
+            <a:r>
+              <a:rPr sz="2000" b="0" i="0">
+                <a:solidFill>
+                  <a:srgbClr val="333333"/>
+                </a:solidFill>
+                <a:latin typeface="Calibri"/>
+              </a:rPr>
+              <a:t> Guardar el resultado y recalcular solo si hay ventas nuevas. Abrir solo el día, no el mes.</a:t>
+            </a:r>
+          </a:p>
+        </p:txBody>
+      </p:sp>
+      <p:sp>
+        <p:nvSpPr>
+          <p:cNvPr id="15" name="TextBox 14"/>
           <p:cNvSpPr txBox="1"/>
           <p:nvPr/>
         </p:nvSpPr>
@@ -7948,6 +7403,142 @@
   <p:clrMapOvr>
     <a:masterClrMapping/>
   </p:clrMapOvr>
+  <p:timing>
+    <p:tnLst>
+      <p:par>
+        <p:cTn id="1" dur="indefinite" restart="never" nodeType="tmRoot">
+          <p:childTnLst>
+            <p:seq concurrent="1" nextAc="seek">
+              <p:cTn id="2" dur="indefinite" nodeType="mainSeq">
+                <p:childTnLst>
+                  <p:par>
+                    <p:cTn id="3" fill="hold">
+                      <p:stCondLst>
+                        <p:cond delay="indefinite"/>
+                      </p:stCondLst>
+                      <p:childTnLst>
+                        <p:par>
+                          <p:cTn id="4" fill="hold">
+                            <p:stCondLst>
+                              <p:cond delay="0"/>
+                            </p:stCondLst>
+                            <p:childTnLst>
+                              <p:par>
+                                <p:cTn id="5" presetID="10" presetClass="entr" presetSubtype="0" fill="hold" nodeType="clickEffect">
+                                  <p:stCondLst>
+                                    <p:cond delay="0"/>
+                                  </p:stCondLst>
+                                  <p:childTnLst>
+                                    <p:set>
+                                      <p:cBhvr>
+                                        <p:cTn id="6" dur="1" fill="hold">
+                                          <p:stCondLst>
+                                            <p:cond delay="0"/>
+                                          </p:stCondLst>
+                                        </p:cTn>
+                                        <p:tgtEl>
+                                          <p:spTgt spid="8"/>
+                                        </p:tgtEl>
+                                        <p:attrNameLst>
+                                          <p:attrName>style.visibility</p:attrName>
+                                        </p:attrNameLst>
+                                      </p:cBhvr>
+                                      <p:to>
+                                        <p:strVal val="visible"/>
+                                      </p:to>
+                                    </p:set>
+                                    <p:animEffect transition="in" filter="fade">
+                                      <p:cBhvr>
+                                        <p:cTn id="7" dur="450"/>
+                                        <p:tgtEl>
+                                          <p:spTgt spid="8"/>
+                                        </p:tgtEl>
+                                      </p:cBhvr>
+                                    </p:animEffect>
+                                  </p:childTnLst>
+                                </p:cTn>
+                              </p:par>
+                            </p:childTnLst>
+                          </p:cTn>
+                        </p:par>
+                      </p:childTnLst>
+                    </p:cTn>
+                  </p:par>
+                  <p:par>
+                    <p:cTn id="8" fill="hold">
+                      <p:stCondLst>
+                        <p:cond delay="indefinite"/>
+                      </p:stCondLst>
+                      <p:childTnLst>
+                        <p:par>
+                          <p:cTn id="9" fill="hold">
+                            <p:stCondLst>
+                              <p:cond delay="0"/>
+                            </p:stCondLst>
+                            <p:childTnLst>
+                              <p:par>
+                                <p:cTn id="10" presetID="10" presetClass="entr" presetSubtype="0" fill="hold" nodeType="clickEffect">
+                                  <p:stCondLst>
+                                    <p:cond delay="0"/>
+                                  </p:stCondLst>
+                                  <p:childTnLst>
+                                    <p:set>
+                                      <p:cBhvr>
+                                        <p:cTn id="11" dur="1" fill="hold">
+                                          <p:stCondLst>
+                                            <p:cond delay="0"/>
+                                          </p:stCondLst>
+                                        </p:cTn>
+                                        <p:tgtEl>
+                                          <p:spTgt spid="9"/>
+                                        </p:tgtEl>
+                                        <p:attrNameLst>
+                                          <p:attrName>style.visibility</p:attrName>
+                                        </p:attrNameLst>
+                                      </p:cBhvr>
+                                      <p:to>
+                                        <p:strVal val="visible"/>
+                                      </p:to>
+                                    </p:set>
+                                    <p:animEffect transition="in" filter="fade">
+                                      <p:cBhvr>
+                                        <p:cTn id="12" dur="450"/>
+                                        <p:tgtEl>
+                                          <p:spTgt spid="9"/>
+                                        </p:tgtEl>
+                                      </p:cBhvr>
+                                    </p:animEffect>
+                                  </p:childTnLst>
+                                </p:cTn>
+                              </p:par>
+                            </p:childTnLst>
+                          </p:cTn>
+                        </p:par>
+                      </p:childTnLst>
+                    </p:cTn>
+                  </p:par>
+                </p:childTnLst>
+              </p:cTn>
+              <p:prevCondLst>
+                <p:cond evt="onPrev" delay="0">
+                  <p:tgtEl>
+                    <p:sldTgt/>
+                  </p:tgtEl>
+                </p:cond>
+              </p:prevCondLst>
+              <p:nextCondLst>
+                <p:cond evt="onNext" delay="0">
+                  <p:tgtEl>
+                    <p:sldTgt/>
+                  </p:tgtEl>
+                </p:cond>
+              </p:nextCondLst>
+            </p:seq>
+          </p:childTnLst>
+        </p:cTn>
+      </p:par>
+    </p:tnLst>
+  </p:timing>
 </p:sld>
 </file>
 
@@ -9833,14 +9424,118 @@
       </p:sp>
       <p:sp>
         <p:nvSpPr>
-          <p:cNvPr id="5" name="TextBox 4"/>
+          <p:cNvPr id="5" name="Rounded Rectangle 4"/>
+          <p:cNvSpPr/>
+          <p:nvPr/>
+        </p:nvSpPr>
+        <p:spPr>
+          <a:xfrm>
+            <a:off x="5797149" y="1573813"/>
+            <a:ext cx="6010497" cy="4057845"/>
+          </a:xfrm>
+          <a:prstGeom prst="roundRect">
+            <a:avLst>
+              <a:gd name="adj" fmla="val 4000"/>
+            </a:avLst>
+          </a:prstGeom>
+          <a:solidFill>
+            <a:srgbClr val="E8EEF4"/>
+          </a:solidFill>
+          <a:ln>
+            <a:noFill/>
+          </a:ln>
+        </p:spPr>
+        <p:style>
+          <a:lnRef idx="1">
+            <a:schemeClr val="accent1"/>
+          </a:lnRef>
+          <a:fillRef idx="3">
+            <a:schemeClr val="accent1"/>
+          </a:fillRef>
+          <a:effectRef idx="2">
+            <a:schemeClr val="accent1"/>
+          </a:effectRef>
+          <a:fontRef idx="minor">
+            <a:schemeClr val="lt1"/>
+          </a:fontRef>
+        </p:style>
+        <p:txBody>
+          <a:bodyPr rtlCol="0" anchor="ctr"/>
+          <a:lstStyle/>
+          <a:p>
+            <a:pPr algn="ctr"/>
+          </a:p>
+        </p:txBody>
+      </p:sp>
+      <p:pic>
+        <p:nvPicPr>
+          <p:cNvPr id="6" name="Picture 5" descr="students-learning-laptops-classroom.jpg"/>
+          <p:cNvPicPr>
+            <a:picLocks noChangeAspect="1"/>
+          </p:cNvPicPr>
+          <p:nvPr/>
+        </p:nvPicPr>
+        <p:blipFill>
+          <a:blip r:embed="rId2"/>
+          <a:stretch>
+            <a:fillRect/>
+          </a:stretch>
+        </p:blipFill>
+        <p:spPr>
+          <a:xfrm>
+            <a:off x="5870301" y="1646965"/>
+            <a:ext cx="5864193" cy="3911541"/>
+          </a:xfrm>
+          <a:prstGeom prst="rect">
+            <a:avLst/>
+          </a:prstGeom>
+        </p:spPr>
+      </p:pic>
+      <p:sp>
+        <p:nvSpPr>
+          <p:cNvPr id="7" name="TextBox 6"/>
           <p:cNvSpPr txBox="1"/>
           <p:nvPr/>
         </p:nvSpPr>
         <p:spPr>
           <a:xfrm>
-            <a:off x="457200" y="1170432"/>
-            <a:ext cx="11277295" cy="5230368"/>
+            <a:off x="5870301" y="5961888"/>
+            <a:ext cx="5864193" cy="320040"/>
+          </a:xfrm>
+          <a:prstGeom prst="rect">
+            <a:avLst/>
+          </a:prstGeom>
+          <a:noFill/>
+        </p:spPr>
+        <p:txBody>
+          <a:bodyPr wrap="square">
+            <a:spAutoFit/>
+          </a:bodyPr>
+          <a:lstStyle/>
+          <a:p>
+            <a:pPr algn="ctr"/>
+            <a:r>
+              <a:rPr sz="1100" b="0" i="1">
+                <a:solidFill>
+                  <a:srgbClr val="666666"/>
+                </a:solidFill>
+                <a:latin typeface="Calibri"/>
+              </a:rPr>
+              <a:t>Foto: Mikhail Nilov · Pexels</a:t>
+            </a:r>
+          </a:p>
+        </p:txBody>
+      </p:sp>
+      <p:sp>
+        <p:nvSpPr>
+          <p:cNvPr id="8" name="TextBox 7"/>
+          <p:cNvSpPr txBox="1"/>
+          <p:nvPr/>
+        </p:nvSpPr>
+        <p:spPr>
+          <a:xfrm>
+            <a:off x="457200" y="1353312"/>
+            <a:ext cx="5093061" cy="5047488"/>
           </a:xfrm>
           <a:prstGeom prst="rect">
             <a:avLst/>
@@ -9992,7 +9687,7 @@
       </p:sp>
       <p:sp>
         <p:nvSpPr>
-          <p:cNvPr id="6" name="TextBox 5"/>
+          <p:cNvPr id="9" name="TextBox 8"/>
           <p:cNvSpPr txBox="1"/>
           <p:nvPr/>
         </p:nvSpPr>
@@ -10507,16 +10202,16 @@
         </p:nvSpPr>
         <p:spPr>
           <a:xfrm>
-            <a:off x="457200" y="1659636"/>
-            <a:ext cx="11277295" cy="1051560"/>
+            <a:off x="5934611" y="1399031"/>
+            <a:ext cx="5735574" cy="4617720"/>
           </a:xfrm>
           <a:prstGeom prst="roundRect">
             <a:avLst>
-              <a:gd name="adj" fmla="val 12000"/>
+              <a:gd name="adj" fmla="val 4000"/>
             </a:avLst>
           </a:prstGeom>
           <a:solidFill>
-            <a:srgbClr val="F2F2F2"/>
+            <a:srgbClr val="E8EEF4"/>
           </a:solidFill>
           <a:ln>
             <a:noFill/>
@@ -10544,61 +10239,147 @@
           </a:p>
         </p:txBody>
       </p:sp>
-      <p:sp>
-        <p:nvSpPr>
-          <p:cNvPr id="7" name="Rounded Rectangle 6"/>
-          <p:cNvSpPr/>
-          <p:nvPr/>
-        </p:nvSpPr>
-        <p:spPr>
-          <a:xfrm>
-            <a:off x="594360" y="1965960"/>
-            <a:ext cx="438912" cy="438912"/>
-          </a:xfrm>
-          <a:prstGeom prst="roundRect">
-            <a:avLst>
-              <a:gd name="adj" fmla="val 12000"/>
-            </a:avLst>
-          </a:prstGeom>
-          <a:solidFill>
-            <a:srgbClr val="095292"/>
-          </a:solidFill>
-          <a:ln>
-            <a:noFill/>
-          </a:ln>
-        </p:spPr>
-        <p:style>
-          <a:lnRef idx="1">
-            <a:schemeClr val="accent1"/>
-          </a:lnRef>
-          <a:fillRef idx="3">
-            <a:schemeClr val="accent1"/>
-          </a:fillRef>
-          <a:effectRef idx="2">
-            <a:schemeClr val="accent1"/>
-          </a:effectRef>
-          <a:fontRef idx="minor">
-            <a:schemeClr val="lt1"/>
-          </a:fontRef>
-        </p:style>
-        <p:txBody>
-          <a:bodyPr rtlCol="0" anchor="ctr"/>
+      <p:pic>
+        <p:nvPicPr>
+          <p:cNvPr id="7" name="Picture 6" descr="etapas-huella-paso1.png"/>
+          <p:cNvPicPr>
+            <a:picLocks noChangeAspect="1"/>
+          </p:cNvPicPr>
+          <p:nvPr/>
+        </p:nvPicPr>
+        <p:blipFill>
+          <a:blip r:embed="rId2"/>
+          <a:stretch>
+            <a:fillRect/>
+          </a:stretch>
+        </p:blipFill>
+        <p:spPr>
+          <a:xfrm>
+            <a:off x="6007763" y="1472184"/>
+            <a:ext cx="5589270" cy="4471416"/>
+          </a:xfrm>
+          <a:prstGeom prst="rect">
+            <a:avLst/>
+          </a:prstGeom>
+        </p:spPr>
+      </p:pic>
+      <p:pic>
+        <p:nvPicPr>
+          <p:cNvPr id="8" name="Picture 7" descr="etapas-huella-paso2.png"/>
+          <p:cNvPicPr>
+            <a:picLocks noChangeAspect="1"/>
+          </p:cNvPicPr>
+          <p:nvPr/>
+        </p:nvPicPr>
+        <p:blipFill>
+          <a:blip r:embed="rId3"/>
+          <a:stretch>
+            <a:fillRect/>
+          </a:stretch>
+        </p:blipFill>
+        <p:spPr>
+          <a:xfrm>
+            <a:off x="6007763" y="1472184"/>
+            <a:ext cx="5589270" cy="4471416"/>
+          </a:xfrm>
+          <a:prstGeom prst="rect">
+            <a:avLst/>
+          </a:prstGeom>
+        </p:spPr>
+      </p:pic>
+      <p:pic>
+        <p:nvPicPr>
+          <p:cNvPr id="9" name="Picture 8" descr="etapas-huella-paso3.png"/>
+          <p:cNvPicPr>
+            <a:picLocks noChangeAspect="1"/>
+          </p:cNvPicPr>
+          <p:nvPr/>
+        </p:nvPicPr>
+        <p:blipFill>
+          <a:blip r:embed="rId4"/>
+          <a:stretch>
+            <a:fillRect/>
+          </a:stretch>
+        </p:blipFill>
+        <p:spPr>
+          <a:xfrm>
+            <a:off x="6007763" y="1472184"/>
+            <a:ext cx="5589270" cy="4471416"/>
+          </a:xfrm>
+          <a:prstGeom prst="rect">
+            <a:avLst/>
+          </a:prstGeom>
+        </p:spPr>
+      </p:pic>
+      <p:pic>
+        <p:nvPicPr>
+          <p:cNvPr id="10" name="Picture 9" descr="etapas-huella-paso4.png"/>
+          <p:cNvPicPr>
+            <a:picLocks noChangeAspect="1"/>
+          </p:cNvPicPr>
+          <p:nvPr/>
+        </p:nvPicPr>
+        <p:blipFill>
+          <a:blip r:embed="rId5"/>
+          <a:stretch>
+            <a:fillRect/>
+          </a:stretch>
+        </p:blipFill>
+        <p:spPr>
+          <a:xfrm>
+            <a:off x="6007763" y="1472184"/>
+            <a:ext cx="5589270" cy="4471416"/>
+          </a:xfrm>
+          <a:prstGeom prst="rect">
+            <a:avLst/>
+          </a:prstGeom>
+        </p:spPr>
+      </p:pic>
+      <p:sp>
+        <p:nvSpPr>
+          <p:cNvPr id="18" name="TextBox 17"/>
+          <p:cNvSpPr txBox="1"/>
+          <p:nvPr/>
+        </p:nvSpPr>
+        <p:spPr>
+          <a:xfrm>
+            <a:off x="5870301" y="5961888"/>
+            <a:ext cx="5864193" cy="320040"/>
+          </a:xfrm>
+          <a:prstGeom prst="rect">
+            <a:avLst/>
+          </a:prstGeom>
+          <a:noFill/>
+        </p:spPr>
+        <p:txBody>
+          <a:bodyPr wrap="square">
+            <a:spAutoFit/>
+          </a:bodyPr>
           <a:lstStyle/>
           <a:p>
             <a:pPr algn="ctr"/>
-          </a:p>
-        </p:txBody>
-      </p:sp>
-      <p:sp>
-        <p:nvSpPr>
-          <p:cNvPr id="8" name="TextBox 7"/>
+            <a:r>
+              <a:rPr sz="1100" b="0" i="1">
+                <a:solidFill>
+                  <a:srgbClr val="666666"/>
+                </a:solidFill>
+                <a:latin typeface="Calibri"/>
+              </a:rPr>
+              <a:t>Clic para avanzar la animación</a:t>
+            </a:r>
+          </a:p>
+        </p:txBody>
+      </p:sp>
+      <p:sp>
+        <p:nvSpPr>
+          <p:cNvPr id="19" name="TextBox 18"/>
           <p:cNvSpPr txBox="1"/>
           <p:nvPr/>
         </p:nvSpPr>
         <p:spPr>
           <a:xfrm>
-            <a:off x="594360" y="1965960"/>
-            <a:ext cx="438912" cy="438912"/>
+            <a:off x="457200" y="1563624"/>
+            <a:ext cx="5093061" cy="4837176"/>
           </a:xfrm>
           <a:prstGeom prst="rect">
             <a:avLst/>
@@ -10606,595 +10387,151 @@
           <a:noFill/>
         </p:spPr>
         <p:txBody>
-          <a:bodyPr wrap="square" anchor="ctr"/>
-          <a:lstStyle/>
-          <a:p>
-            <a:pPr algn="ctr"/>
-            <a:r>
-              <a:rPr sz="1600" b="1" i="0">
-                <a:solidFill>
-                  <a:srgbClr val="FFFFFF"/>
-                </a:solidFill>
-                <a:latin typeface="Calibri"/>
-              </a:rPr>
-              <a:t>1</a:t>
-            </a:r>
-          </a:p>
-        </p:txBody>
-      </p:sp>
-      <p:sp>
-        <p:nvSpPr>
-          <p:cNvPr id="9" name="TextBox 8"/>
-          <p:cNvSpPr txBox="1"/>
-          <p:nvPr/>
-        </p:nvSpPr>
-        <p:spPr>
-          <a:xfrm>
-            <a:off x="1188720" y="1751076"/>
-            <a:ext cx="10271455" cy="886968"/>
-          </a:xfrm>
-          <a:prstGeom prst="rect">
-            <a:avLst/>
-          </a:prstGeom>
-          <a:noFill/>
-        </p:spPr>
-        <p:txBody>
-          <a:bodyPr wrap="square" anchor="ctr"/>
-          <a:lstStyle/>
-          <a:p>
-            <a:r>
-              <a:rPr sz="1500" b="1" i="0">
-                <a:solidFill>
-                  <a:srgbClr val="095292"/>
-                </a:solidFill>
-                <a:latin typeface="Calibri"/>
-              </a:rPr>
-              <a:t>FABRICACIÓN</a:t>
-            </a:r>
-          </a:p>
+          <a:bodyPr wrap="square">
+            <a:spAutoFit/>
+          </a:bodyPr>
+          <a:lstStyle/>
           <a:p>
             <a:pPr>
-              <a:spcBef>
-                <a:spcPts val="200"/>
-              </a:spcBef>
+              <a:spcAft>
+                <a:spcPts val="800"/>
+              </a:spcAft>
             </a:pPr>
             <a:r>
-              <a:rPr sz="1300" b="0" i="0">
+              <a:rPr sz="2000" b="0" i="0">
                 <a:solidFill>
                   <a:srgbClr val="333333"/>
                 </a:solidFill>
                 <a:latin typeface="Calibri"/>
               </a:rPr>
-              <a:t>Minería, ensamblaje y transporte de dispositivos y servidores. </a:t>
-            </a:r>
-            <a:r>
-              <a:rPr sz="1300" b="1" i="0">
+              <a:t>–   </a:t>
+            </a:r>
+            <a:r>
+              <a:rPr sz="2000" b="1" i="0">
                 <a:solidFill>
                   <a:srgbClr val="333333"/>
                 </a:solidFill>
                 <a:latin typeface="Calibri"/>
               </a:rPr>
-              <a:t>En un celular, la mayor parte de la huella ya está gastada antes de encenderlo</a:t>
-            </a:r>
-          </a:p>
-        </p:txBody>
-      </p:sp>
-      <p:sp>
-        <p:nvSpPr>
-          <p:cNvPr id="10" name="Rounded Rectangle 9"/>
-          <p:cNvSpPr/>
-          <p:nvPr/>
-        </p:nvSpPr>
-        <p:spPr>
-          <a:xfrm>
-            <a:off x="457200" y="2802636"/>
-            <a:ext cx="11277295" cy="1051560"/>
-          </a:xfrm>
-          <a:prstGeom prst="roundRect">
-            <a:avLst>
-              <a:gd name="adj" fmla="val 12000"/>
-            </a:avLst>
-          </a:prstGeom>
-          <a:solidFill>
-            <a:srgbClr val="E8F4FA"/>
-          </a:solidFill>
-          <a:ln>
-            <a:noFill/>
-          </a:ln>
-        </p:spPr>
-        <p:style>
-          <a:lnRef idx="1">
-            <a:schemeClr val="accent1"/>
-          </a:lnRef>
-          <a:fillRef idx="3">
-            <a:schemeClr val="accent1"/>
-          </a:fillRef>
-          <a:effectRef idx="2">
-            <a:schemeClr val="accent1"/>
-          </a:effectRef>
-          <a:fontRef idx="minor">
-            <a:schemeClr val="lt1"/>
-          </a:fontRef>
-        </p:style>
-        <p:txBody>
-          <a:bodyPr rtlCol="0" anchor="ctr"/>
-          <a:lstStyle/>
-          <a:p>
-            <a:pPr algn="ctr"/>
-          </a:p>
-        </p:txBody>
-      </p:sp>
-      <p:sp>
-        <p:nvSpPr>
-          <p:cNvPr id="11" name="Rounded Rectangle 10"/>
-          <p:cNvSpPr/>
-          <p:nvPr/>
-        </p:nvSpPr>
-        <p:spPr>
-          <a:xfrm>
-            <a:off x="594360" y="3108960"/>
-            <a:ext cx="438912" cy="438912"/>
-          </a:xfrm>
-          <a:prstGeom prst="roundRect">
-            <a:avLst>
-              <a:gd name="adj" fmla="val 12000"/>
-            </a:avLst>
-          </a:prstGeom>
-          <a:solidFill>
-            <a:srgbClr val="095292"/>
-          </a:solidFill>
-          <a:ln>
-            <a:noFill/>
-          </a:ln>
-        </p:spPr>
-        <p:style>
-          <a:lnRef idx="1">
-            <a:schemeClr val="accent1"/>
-          </a:lnRef>
-          <a:fillRef idx="3">
-            <a:schemeClr val="accent1"/>
-          </a:fillRef>
-          <a:effectRef idx="2">
-            <a:schemeClr val="accent1"/>
-          </a:effectRef>
-          <a:fontRef idx="minor">
-            <a:schemeClr val="lt1"/>
-          </a:fontRef>
-        </p:style>
-        <p:txBody>
-          <a:bodyPr rtlCol="0" anchor="ctr"/>
-          <a:lstStyle/>
-          <a:p>
-            <a:pPr algn="ctr"/>
-          </a:p>
-        </p:txBody>
-      </p:sp>
-      <p:sp>
-        <p:nvSpPr>
-          <p:cNvPr id="12" name="TextBox 11"/>
-          <p:cNvSpPr txBox="1"/>
-          <p:nvPr/>
-        </p:nvSpPr>
-        <p:spPr>
-          <a:xfrm>
-            <a:off x="594360" y="3108960"/>
-            <a:ext cx="438912" cy="438912"/>
-          </a:xfrm>
-          <a:prstGeom prst="rect">
-            <a:avLst/>
-          </a:prstGeom>
-          <a:noFill/>
-        </p:spPr>
-        <p:txBody>
-          <a:bodyPr wrap="square" anchor="ctr"/>
-          <a:lstStyle/>
-          <a:p>
-            <a:pPr algn="ctr"/>
-            <a:r>
-              <a:rPr sz="1600" b="1" i="0">
-                <a:solidFill>
-                  <a:srgbClr val="FFFFFF"/>
-                </a:solidFill>
-                <a:latin typeface="Calibri"/>
-              </a:rPr>
-              <a:t>2</a:t>
-            </a:r>
-          </a:p>
-        </p:txBody>
-      </p:sp>
-      <p:sp>
-        <p:nvSpPr>
-          <p:cNvPr id="13" name="TextBox 12"/>
-          <p:cNvSpPr txBox="1"/>
-          <p:nvPr/>
-        </p:nvSpPr>
-        <p:spPr>
-          <a:xfrm>
-            <a:off x="1188720" y="2894076"/>
-            <a:ext cx="10271455" cy="886968"/>
-          </a:xfrm>
-          <a:prstGeom prst="rect">
-            <a:avLst/>
-          </a:prstGeom>
-          <a:noFill/>
-        </p:spPr>
-        <p:txBody>
-          <a:bodyPr wrap="square" anchor="ctr"/>
-          <a:lstStyle/>
-          <a:p>
-            <a:r>
-              <a:rPr sz="1500" b="1" i="0">
-                <a:solidFill>
-                  <a:srgbClr val="095292"/>
-                </a:solidFill>
-                <a:latin typeface="Calibri"/>
-              </a:rPr>
-              <a:t>USO</a:t>
+              <a:t>FABRICACIÓN:</a:t>
+            </a:r>
+            <a:r>
+              <a:rPr sz="2000" b="0" i="0">
+                <a:solidFill>
+                  <a:srgbClr val="333333"/>
+                </a:solidFill>
+                <a:latin typeface="Calibri"/>
+              </a:rPr>
+              <a:t> Minería, ensamblaje y transporte de dispositivos y servidores.</a:t>
             </a:r>
           </a:p>
           <a:p>
             <a:pPr>
-              <a:spcBef>
-                <a:spcPts val="200"/>
-              </a:spcBef>
+              <a:spcAft>
+                <a:spcPts val="800"/>
+              </a:spcAft>
             </a:pPr>
             <a:r>
-              <a:rPr sz="1300" b="0" i="0">
+              <a:rPr sz="2000" b="0" i="0">
                 <a:solidFill>
                   <a:srgbClr val="333333"/>
                 </a:solidFill>
                 <a:latin typeface="Calibri"/>
               </a:rPr>
-              <a:t>Electricidad del dispositivo, del servidor y del enfriamiento del centro de datos</a:t>
-            </a:r>
-          </a:p>
-        </p:txBody>
-      </p:sp>
-      <p:sp>
-        <p:nvSpPr>
-          <p:cNvPr id="14" name="Rounded Rectangle 13"/>
-          <p:cNvSpPr/>
-          <p:nvPr/>
-        </p:nvSpPr>
-        <p:spPr>
-          <a:xfrm>
-            <a:off x="457200" y="3945636"/>
-            <a:ext cx="11277295" cy="1051560"/>
-          </a:xfrm>
-          <a:prstGeom prst="roundRect">
-            <a:avLst>
-              <a:gd name="adj" fmla="val 12000"/>
-            </a:avLst>
-          </a:prstGeom>
-          <a:solidFill>
-            <a:srgbClr val="F2F2F2"/>
-          </a:solidFill>
-          <a:ln>
-            <a:noFill/>
-          </a:ln>
-        </p:spPr>
-        <p:style>
-          <a:lnRef idx="1">
-            <a:schemeClr val="accent1"/>
-          </a:lnRef>
-          <a:fillRef idx="3">
-            <a:schemeClr val="accent1"/>
-          </a:fillRef>
-          <a:effectRef idx="2">
-            <a:schemeClr val="accent1"/>
-          </a:effectRef>
-          <a:fontRef idx="minor">
-            <a:schemeClr val="lt1"/>
-          </a:fontRef>
-        </p:style>
-        <p:txBody>
-          <a:bodyPr rtlCol="0" anchor="ctr"/>
-          <a:lstStyle/>
-          <a:p>
-            <a:pPr algn="ctr"/>
-          </a:p>
-        </p:txBody>
-      </p:sp>
-      <p:sp>
-        <p:nvSpPr>
-          <p:cNvPr id="15" name="Rounded Rectangle 14"/>
-          <p:cNvSpPr/>
-          <p:nvPr/>
-        </p:nvSpPr>
-        <p:spPr>
-          <a:xfrm>
-            <a:off x="594360" y="4251960"/>
-            <a:ext cx="438912" cy="438912"/>
-          </a:xfrm>
-          <a:prstGeom prst="roundRect">
-            <a:avLst>
-              <a:gd name="adj" fmla="val 12000"/>
-            </a:avLst>
-          </a:prstGeom>
-          <a:solidFill>
-            <a:srgbClr val="095292"/>
-          </a:solidFill>
-          <a:ln>
-            <a:noFill/>
-          </a:ln>
-        </p:spPr>
-        <p:style>
-          <a:lnRef idx="1">
-            <a:schemeClr val="accent1"/>
-          </a:lnRef>
-          <a:fillRef idx="3">
-            <a:schemeClr val="accent1"/>
-          </a:fillRef>
-          <a:effectRef idx="2">
-            <a:schemeClr val="accent1"/>
-          </a:effectRef>
-          <a:fontRef idx="minor">
-            <a:schemeClr val="lt1"/>
-          </a:fontRef>
-        </p:style>
-        <p:txBody>
-          <a:bodyPr rtlCol="0" anchor="ctr"/>
-          <a:lstStyle/>
-          <a:p>
-            <a:pPr algn="ctr"/>
-          </a:p>
-        </p:txBody>
-      </p:sp>
-      <p:sp>
-        <p:nvSpPr>
-          <p:cNvPr id="16" name="TextBox 15"/>
-          <p:cNvSpPr txBox="1"/>
-          <p:nvPr/>
-        </p:nvSpPr>
-        <p:spPr>
-          <a:xfrm>
-            <a:off x="594360" y="4251960"/>
-            <a:ext cx="438912" cy="438912"/>
-          </a:xfrm>
-          <a:prstGeom prst="rect">
-            <a:avLst/>
-          </a:prstGeom>
-          <a:noFill/>
-        </p:spPr>
-        <p:txBody>
-          <a:bodyPr wrap="square" anchor="ctr"/>
-          <a:lstStyle/>
-          <a:p>
-            <a:pPr algn="ctr"/>
-            <a:r>
-              <a:rPr sz="1600" b="1" i="0">
-                <a:solidFill>
-                  <a:srgbClr val="FFFFFF"/>
-                </a:solidFill>
-                <a:latin typeface="Calibri"/>
-              </a:rPr>
-              <a:t>3</a:t>
-            </a:r>
-          </a:p>
-        </p:txBody>
-      </p:sp>
-      <p:sp>
-        <p:nvSpPr>
-          <p:cNvPr id="17" name="TextBox 16"/>
-          <p:cNvSpPr txBox="1"/>
-          <p:nvPr/>
-        </p:nvSpPr>
-        <p:spPr>
-          <a:xfrm>
-            <a:off x="1188720" y="4037076"/>
-            <a:ext cx="10271455" cy="886968"/>
-          </a:xfrm>
-          <a:prstGeom prst="rect">
-            <a:avLst/>
-          </a:prstGeom>
-          <a:noFill/>
-        </p:spPr>
-        <p:txBody>
-          <a:bodyPr wrap="square" anchor="ctr"/>
-          <a:lstStyle/>
-          <a:p>
-            <a:r>
-              <a:rPr sz="1500" b="1" i="0">
-                <a:solidFill>
-                  <a:srgbClr val="095292"/>
-                </a:solidFill>
-                <a:latin typeface="Calibri"/>
-              </a:rPr>
-              <a:t>RED</a:t>
+              <a:t>–   </a:t>
+            </a:r>
+            <a:r>
+              <a:rPr sz="2000" b="1" i="0">
+                <a:solidFill>
+                  <a:srgbClr val="333333"/>
+                </a:solidFill>
+                <a:latin typeface="Calibri"/>
+              </a:rPr>
+              <a:t>USO:</a:t>
+            </a:r>
+            <a:r>
+              <a:rPr sz="2000" b="0" i="0">
+                <a:solidFill>
+                  <a:srgbClr val="333333"/>
+                </a:solidFill>
+                <a:latin typeface="Calibri"/>
+              </a:rPr>
+              <a:t> Electricidad del dispositivo, del servidor y del enfriamiento del centro de datos</a:t>
             </a:r>
           </a:p>
           <a:p>
             <a:pPr>
-              <a:spcBef>
-                <a:spcPts val="200"/>
-              </a:spcBef>
+              <a:spcAft>
+                <a:spcPts val="800"/>
+              </a:spcAft>
             </a:pPr>
             <a:r>
-              <a:rPr sz="1300" b="0" i="0">
+              <a:rPr sz="2000" b="0" i="0">
                 <a:solidFill>
                   <a:srgbClr val="333333"/>
                 </a:solidFill>
                 <a:latin typeface="Calibri"/>
               </a:rPr>
-              <a:t>Cada byte viaja por antenas, cables y equipos que consumen</a:t>
-            </a:r>
-          </a:p>
-        </p:txBody>
-      </p:sp>
-      <p:sp>
-        <p:nvSpPr>
-          <p:cNvPr id="18" name="Rounded Rectangle 17"/>
-          <p:cNvSpPr/>
-          <p:nvPr/>
-        </p:nvSpPr>
-        <p:spPr>
-          <a:xfrm>
-            <a:off x="457200" y="5088636"/>
-            <a:ext cx="11277295" cy="1051560"/>
-          </a:xfrm>
-          <a:prstGeom prst="roundRect">
-            <a:avLst>
-              <a:gd name="adj" fmla="val 12000"/>
-            </a:avLst>
-          </a:prstGeom>
-          <a:solidFill>
-            <a:srgbClr val="E8F4FA"/>
-          </a:solidFill>
-          <a:ln>
-            <a:noFill/>
-          </a:ln>
-        </p:spPr>
-        <p:style>
-          <a:lnRef idx="1">
-            <a:schemeClr val="accent1"/>
-          </a:lnRef>
-          <a:fillRef idx="3">
-            <a:schemeClr val="accent1"/>
-          </a:fillRef>
-          <a:effectRef idx="2">
-            <a:schemeClr val="accent1"/>
-          </a:effectRef>
-          <a:fontRef idx="minor">
-            <a:schemeClr val="lt1"/>
-          </a:fontRef>
-        </p:style>
-        <p:txBody>
-          <a:bodyPr rtlCol="0" anchor="ctr"/>
-          <a:lstStyle/>
-          <a:p>
-            <a:pPr algn="ctr"/>
-          </a:p>
-        </p:txBody>
-      </p:sp>
-      <p:sp>
-        <p:nvSpPr>
-          <p:cNvPr id="19" name="Rounded Rectangle 18"/>
-          <p:cNvSpPr/>
-          <p:nvPr/>
-        </p:nvSpPr>
-        <p:spPr>
-          <a:xfrm>
-            <a:off x="594360" y="5394960"/>
-            <a:ext cx="438912" cy="438912"/>
-          </a:xfrm>
-          <a:prstGeom prst="roundRect">
-            <a:avLst>
-              <a:gd name="adj" fmla="val 12000"/>
-            </a:avLst>
-          </a:prstGeom>
-          <a:solidFill>
-            <a:srgbClr val="095292"/>
-          </a:solidFill>
-          <a:ln>
-            <a:noFill/>
-          </a:ln>
-        </p:spPr>
-        <p:style>
-          <a:lnRef idx="1">
-            <a:schemeClr val="accent1"/>
-          </a:lnRef>
-          <a:fillRef idx="3">
-            <a:schemeClr val="accent1"/>
-          </a:fillRef>
-          <a:effectRef idx="2">
-            <a:schemeClr val="accent1"/>
-          </a:effectRef>
-          <a:fontRef idx="minor">
-            <a:schemeClr val="lt1"/>
-          </a:fontRef>
-        </p:style>
-        <p:txBody>
-          <a:bodyPr rtlCol="0" anchor="ctr"/>
-          <a:lstStyle/>
-          <a:p>
-            <a:pPr algn="ctr"/>
+              <a:t>–   </a:t>
+            </a:r>
+            <a:r>
+              <a:rPr sz="2000" b="1" i="0">
+                <a:solidFill>
+                  <a:srgbClr val="333333"/>
+                </a:solidFill>
+                <a:latin typeface="Calibri"/>
+              </a:rPr>
+              <a:t>RED:</a:t>
+            </a:r>
+            <a:r>
+              <a:rPr sz="2000" b="0" i="0">
+                <a:solidFill>
+                  <a:srgbClr val="333333"/>
+                </a:solidFill>
+                <a:latin typeface="Calibri"/>
+              </a:rPr>
+              <a:t> Cada byte viaja por antenas, cables y equipos que consumen</a:t>
+            </a:r>
+          </a:p>
+          <a:p>
+            <a:pPr>
+              <a:spcAft>
+                <a:spcPts val="800"/>
+              </a:spcAft>
+            </a:pPr>
+            <a:r>
+              <a:rPr sz="2000" b="0" i="0">
+                <a:solidFill>
+                  <a:srgbClr val="333333"/>
+                </a:solidFill>
+                <a:latin typeface="Calibri"/>
+              </a:rPr>
+              <a:t>–   </a:t>
+            </a:r>
+            <a:r>
+              <a:rPr sz="2000" b="1" i="0">
+                <a:solidFill>
+                  <a:srgbClr val="333333"/>
+                </a:solidFill>
+                <a:latin typeface="Calibri"/>
+              </a:rPr>
+              <a:t>FIN DE VIDA:</a:t>
+            </a:r>
+            <a:r>
+              <a:rPr sz="2000" b="0" i="0">
+                <a:solidFill>
+                  <a:srgbClr val="333333"/>
+                </a:solidFill>
+                <a:latin typeface="Calibri"/>
+              </a:rPr>
+              <a:t> Residuo electrónico (RAEE): metales, plásticos y sustancias peligrosas</a:t>
+            </a:r>
           </a:p>
         </p:txBody>
       </p:sp>
       <p:sp>
         <p:nvSpPr>
           <p:cNvPr id="20" name="TextBox 19"/>
-          <p:cNvSpPr txBox="1"/>
-          <p:nvPr/>
-        </p:nvSpPr>
-        <p:spPr>
-          <a:xfrm>
-            <a:off x="594360" y="5394960"/>
-            <a:ext cx="438912" cy="438912"/>
-          </a:xfrm>
-          <a:prstGeom prst="rect">
-            <a:avLst/>
-          </a:prstGeom>
-          <a:noFill/>
-        </p:spPr>
-        <p:txBody>
-          <a:bodyPr wrap="square" anchor="ctr"/>
-          <a:lstStyle/>
-          <a:p>
-            <a:pPr algn="ctr"/>
-            <a:r>
-              <a:rPr sz="1600" b="1" i="0">
-                <a:solidFill>
-                  <a:srgbClr val="FFFFFF"/>
-                </a:solidFill>
-                <a:latin typeface="Calibri"/>
-              </a:rPr>
-              <a:t>4</a:t>
-            </a:r>
-          </a:p>
-        </p:txBody>
-      </p:sp>
-      <p:sp>
-        <p:nvSpPr>
-          <p:cNvPr id="21" name="TextBox 20"/>
-          <p:cNvSpPr txBox="1"/>
-          <p:nvPr/>
-        </p:nvSpPr>
-        <p:spPr>
-          <a:xfrm>
-            <a:off x="1188720" y="5180076"/>
-            <a:ext cx="10271455" cy="886968"/>
-          </a:xfrm>
-          <a:prstGeom prst="rect">
-            <a:avLst/>
-          </a:prstGeom>
-          <a:noFill/>
-        </p:spPr>
-        <p:txBody>
-          <a:bodyPr wrap="square" anchor="ctr"/>
-          <a:lstStyle/>
-          <a:p>
-            <a:r>
-              <a:rPr sz="1500" b="1" i="0">
-                <a:solidFill>
-                  <a:srgbClr val="095292"/>
-                </a:solidFill>
-                <a:latin typeface="Calibri"/>
-              </a:rPr>
-              <a:t>FIN DE VIDA</a:t>
-            </a:r>
-          </a:p>
-          <a:p>
-            <a:pPr>
-              <a:spcBef>
-                <a:spcPts val="200"/>
-              </a:spcBef>
-            </a:pPr>
-            <a:r>
-              <a:rPr sz="1300" b="0" i="0">
-                <a:solidFill>
-                  <a:srgbClr val="333333"/>
-                </a:solidFill>
-                <a:latin typeface="Calibri"/>
-              </a:rPr>
-              <a:t>Residuo electrónico (RAEE): metales, plásticos y sustancias peligrosas</a:t>
-            </a:r>
-          </a:p>
-        </p:txBody>
-      </p:sp>
-      <p:sp>
-        <p:nvSpPr>
-          <p:cNvPr id="22" name="TextBox 21"/>
           <p:cNvSpPr txBox="1"/>
           <p:nvPr/>
         </p:nvSpPr>
@@ -11232,6 +10569,195 @@
   <p:clrMapOvr>
     <a:masterClrMapping/>
   </p:clrMapOvr>
+  <p:timing>
+    <p:tnLst>
+      <p:par>
+        <p:cTn id="1" dur="indefinite" restart="never" nodeType="tmRoot">
+          <p:childTnLst>
+            <p:seq concurrent="1" nextAc="seek">
+              <p:cTn id="2" dur="indefinite" nodeType="mainSeq">
+                <p:childTnLst>
+                  <p:par>
+                    <p:cTn id="3" fill="hold">
+                      <p:stCondLst>
+                        <p:cond delay="indefinite"/>
+                      </p:stCondLst>
+                      <p:childTnLst>
+                        <p:par>
+                          <p:cTn id="4" fill="hold">
+                            <p:stCondLst>
+                              <p:cond delay="0"/>
+                            </p:stCondLst>
+                            <p:childTnLst>
+                              <p:par>
+                                <p:cTn id="5" presetID="10" presetClass="entr" presetSubtype="0" fill="hold" nodeType="clickEffect">
+                                  <p:stCondLst>
+                                    <p:cond delay="0"/>
+                                  </p:stCondLst>
+                                  <p:childTnLst>
+                                    <p:set>
+                                      <p:cBhvr>
+                                        <p:cTn id="6" dur="1" fill="hold">
+                                          <p:stCondLst>
+                                            <p:cond delay="0"/>
+                                          </p:stCondLst>
+                                        </p:cTn>
+                                        <p:tgtEl>
+                                          <p:spTgt spid="8"/>
+                                        </p:tgtEl>
+                                        <p:attrNameLst>
+                                          <p:attrName>style.visibility</p:attrName>
+                                        </p:attrNameLst>
+                                      </p:cBhvr>
+                                      <p:to>
+                                        <p:strVal val="visible"/>
+                                      </p:to>
+                                    </p:set>
+                                    <p:animEffect transition="in" filter="fade">
+                                      <p:cBhvr>
+                                        <p:cTn id="7" dur="450"/>
+                                        <p:tgtEl>
+                                          <p:spTgt spid="8"/>
+                                        </p:tgtEl>
+                                      </p:cBhvr>
+                                    </p:animEffect>
+                                  </p:childTnLst>
+                                </p:cTn>
+                              </p:par>
+                            </p:childTnLst>
+                          </p:cTn>
+                        </p:par>
+                      </p:childTnLst>
+                    </p:cTn>
+                  </p:par>
+                  <p:par>
+                    <p:cTn id="8" fill="hold">
+                      <p:stCondLst>
+                        <p:cond delay="indefinite"/>
+                      </p:stCondLst>
+                      <p:childTnLst>
+                        <p:par>
+                          <p:cTn id="9" fill="hold">
+                            <p:stCondLst>
+                              <p:cond delay="0"/>
+                            </p:stCondLst>
+                            <p:childTnLst>
+                              <p:par>
+                                <p:cTn id="10" presetID="10" presetClass="entr" presetSubtype="0" fill="hold" nodeType="clickEffect">
+                                  <p:stCondLst>
+                                    <p:cond delay="0"/>
+                                  </p:stCondLst>
+                                  <p:childTnLst>
+                                    <p:set>
+                                      <p:cBhvr>
+                                        <p:cTn id="11" dur="1" fill="hold">
+                                          <p:stCondLst>
+                                            <p:cond delay="0"/>
+                                          </p:stCondLst>
+                                        </p:cTn>
+                                        <p:tgtEl>
+                                          <p:spTgt spid="9"/>
+                                        </p:tgtEl>
+                                        <p:attrNameLst>
+                                          <p:attrName>style.visibility</p:attrName>
+                                        </p:attrNameLst>
+                                      </p:cBhvr>
+                                      <p:to>
+                                        <p:strVal val="visible"/>
+                                      </p:to>
+                                    </p:set>
+                                    <p:animEffect transition="in" filter="fade">
+                                      <p:cBhvr>
+                                        <p:cTn id="12" dur="450"/>
+                                        <p:tgtEl>
+                                          <p:spTgt spid="9"/>
+                                        </p:tgtEl>
+                                      </p:cBhvr>
+                                    </p:animEffect>
+                                  </p:childTnLst>
+                                </p:cTn>
+                              </p:par>
+                            </p:childTnLst>
+                          </p:cTn>
+                        </p:par>
+                      </p:childTnLst>
+                    </p:cTn>
+                  </p:par>
+                  <p:par>
+                    <p:cTn id="13" fill="hold">
+                      <p:stCondLst>
+                        <p:cond delay="indefinite"/>
+                      </p:stCondLst>
+                      <p:childTnLst>
+                        <p:par>
+                          <p:cTn id="14" fill="hold">
+                            <p:stCondLst>
+                              <p:cond delay="0"/>
+                            </p:stCondLst>
+                            <p:childTnLst>
+                              <p:par>
+                                <p:cTn id="15" presetID="10" presetClass="entr" presetSubtype="0" fill="hold" nodeType="clickEffect">
+                                  <p:stCondLst>
+                                    <p:cond delay="0"/>
+                                  </p:stCondLst>
+                                  <p:childTnLst>
+                                    <p:set>
+                                      <p:cBhvr>
+                                        <p:cTn id="16" dur="1" fill="hold">
+                                          <p:stCondLst>
+                                            <p:cond delay="0"/>
+                                          </p:stCondLst>
+                                        </p:cTn>
+                                        <p:tgtEl>
+                                          <p:spTgt spid="10"/>
+                                        </p:tgtEl>
+                                        <p:attrNameLst>
+                                          <p:attrName>style.visibility</p:attrName>
+                                        </p:attrNameLst>
+                                      </p:cBhvr>
+                                      <p:to>
+                                        <p:strVal val="visible"/>
+                                      </p:to>
+                                    </p:set>
+                                    <p:animEffect transition="in" filter="fade">
+                                      <p:cBhvr>
+                                        <p:cTn id="17" dur="450"/>
+                                        <p:tgtEl>
+                                          <p:spTgt spid="10"/>
+                                        </p:tgtEl>
+                                      </p:cBhvr>
+                                    </p:animEffect>
+                                  </p:childTnLst>
+                                </p:cTn>
+                              </p:par>
+                            </p:childTnLst>
+                          </p:cTn>
+                        </p:par>
+                      </p:childTnLst>
+                    </p:cTn>
+                  </p:par>
+                </p:childTnLst>
+              </p:cTn>
+              <p:prevCondLst>
+                <p:cond evt="onPrev" delay="0">
+                  <p:tgtEl>
+                    <p:sldTgt/>
+                  </p:tgtEl>
+                </p:cond>
+              </p:prevCondLst>
+              <p:nextCondLst>
+                <p:cond evt="onNext" delay="0">
+                  <p:tgtEl>
+                    <p:sldTgt/>
+                  </p:tgtEl>
+                </p:cond>
+              </p:nextCondLst>
+            </p:seq>
+          </p:childTnLst>
+        </p:cTn>
+      </p:par>
+    </p:tnLst>
+  </p:timing>
 </p:sld>
 </file>
 
@@ -13151,14 +12677,118 @@
       </p:sp>
       <p:sp>
         <p:nvSpPr>
-          <p:cNvPr id="5" name="TextBox 4"/>
+          <p:cNvPr id="5" name="Rounded Rectangle 4"/>
+          <p:cNvSpPr/>
+          <p:nvPr/>
+        </p:nvSpPr>
+        <p:spPr>
+          <a:xfrm>
+            <a:off x="5797149" y="1576932"/>
+            <a:ext cx="6010497" cy="4051607"/>
+          </a:xfrm>
+          <a:prstGeom prst="roundRect">
+            <a:avLst>
+              <a:gd name="adj" fmla="val 4000"/>
+            </a:avLst>
+          </a:prstGeom>
+          <a:solidFill>
+            <a:srgbClr val="E8EEF4"/>
+          </a:solidFill>
+          <a:ln>
+            <a:noFill/>
+          </a:ln>
+        </p:spPr>
+        <p:style>
+          <a:lnRef idx="1">
+            <a:schemeClr val="accent1"/>
+          </a:lnRef>
+          <a:fillRef idx="3">
+            <a:schemeClr val="accent1"/>
+          </a:fillRef>
+          <a:effectRef idx="2">
+            <a:schemeClr val="accent1"/>
+          </a:effectRef>
+          <a:fontRef idx="minor">
+            <a:schemeClr val="lt1"/>
+          </a:fontRef>
+        </p:style>
+        <p:txBody>
+          <a:bodyPr rtlCol="0" anchor="ctr"/>
+          <a:lstStyle/>
+          <a:p>
+            <a:pPr algn="ctr"/>
+          </a:p>
+        </p:txBody>
+      </p:sp>
+      <p:pic>
+        <p:nvPicPr>
+          <p:cNvPr id="6" name="Picture 5" descr="data-center-server-room.jpg"/>
+          <p:cNvPicPr>
+            <a:picLocks noChangeAspect="1"/>
+          </p:cNvPicPr>
+          <p:nvPr/>
+        </p:nvPicPr>
+        <p:blipFill>
+          <a:blip r:embed="rId2"/>
+          <a:stretch>
+            <a:fillRect/>
+          </a:stretch>
+        </p:blipFill>
+        <p:spPr>
+          <a:xfrm>
+            <a:off x="5870301" y="1650084"/>
+            <a:ext cx="5864193" cy="3905303"/>
+          </a:xfrm>
+          <a:prstGeom prst="rect">
+            <a:avLst/>
+          </a:prstGeom>
+        </p:spPr>
+      </p:pic>
+      <p:sp>
+        <p:nvSpPr>
+          <p:cNvPr id="7" name="TextBox 6"/>
           <p:cNvSpPr txBox="1"/>
           <p:nvPr/>
         </p:nvSpPr>
         <p:spPr>
           <a:xfrm>
-            <a:off x="457200" y="1170432"/>
-            <a:ext cx="11277295" cy="5230368"/>
+            <a:off x="5870301" y="5961888"/>
+            <a:ext cx="5864193" cy="320040"/>
+          </a:xfrm>
+          <a:prstGeom prst="rect">
+            <a:avLst/>
+          </a:prstGeom>
+          <a:noFill/>
+        </p:spPr>
+        <p:txBody>
+          <a:bodyPr wrap="square">
+            <a:spAutoFit/>
+          </a:bodyPr>
+          <a:lstStyle/>
+          <a:p>
+            <a:pPr algn="ctr"/>
+            <a:r>
+              <a:rPr sz="1100" b="0" i="1">
+                <a:solidFill>
+                  <a:srgbClr val="666666"/>
+                </a:solidFill>
+                <a:latin typeface="Calibri"/>
+              </a:rPr>
+              <a:t>Foto: panumas nikhomkhai · Pexels</a:t>
+            </a:r>
+          </a:p>
+        </p:txBody>
+      </p:sp>
+      <p:sp>
+        <p:nvSpPr>
+          <p:cNvPr id="8" name="TextBox 7"/>
+          <p:cNvSpPr txBox="1"/>
+          <p:nvPr/>
+        </p:nvSpPr>
+        <p:spPr>
+          <a:xfrm>
+            <a:off x="457200" y="1353312"/>
+            <a:ext cx="5093061" cy="5047488"/>
           </a:xfrm>
           <a:prstGeom prst="rect">
             <a:avLst/>
@@ -13306,79 +12936,11 @@
               <a:t>No computan nada.</a:t>
             </a:r>
           </a:p>
-          <a:p>
-            <a:pPr>
-              <a:spcAft>
-                <a:spcPts val="800"/>
-              </a:spcAft>
-            </a:pPr>
-            <a:r>
-              <a:rPr sz="2000" b="0" i="0">
-                <a:solidFill>
-                  <a:srgbClr val="333333"/>
-                </a:solidFill>
-                <a:latin typeface="Calibri"/>
-              </a:rPr>
-              <a:t>–   Un PUE de </a:t>
-            </a:r>
-            <a:r>
-              <a:rPr sz="2000" b="1" i="0">
-                <a:solidFill>
-                  <a:srgbClr val="333333"/>
-                </a:solidFill>
-                <a:latin typeface="Calibri"/>
-              </a:rPr>
-              <a:t>1,0</a:t>
-            </a:r>
-            <a:r>
-              <a:rPr sz="2000" b="0" i="0">
-                <a:solidFill>
-                  <a:srgbClr val="333333"/>
-                </a:solidFill>
-                <a:latin typeface="Calibri"/>
-              </a:rPr>
-              <a:t> sería perfecto. Uno de </a:t>
-            </a:r>
-            <a:r>
-              <a:rPr sz="2000" b="1" i="0">
-                <a:solidFill>
-                  <a:srgbClr val="333333"/>
-                </a:solidFill>
-                <a:latin typeface="Calibri"/>
-              </a:rPr>
-              <a:t>2,0</a:t>
-            </a:r>
-            <a:r>
-              <a:rPr sz="2000" b="0" i="0">
-                <a:solidFill>
-                  <a:srgbClr val="333333"/>
-                </a:solidFill>
-                <a:latin typeface="Calibri"/>
-              </a:rPr>
-              <a:t> gasta la mitad de la energía en no computar.</a:t>
-            </a:r>
-          </a:p>
-          <a:p>
-            <a:pPr>
-              <a:spcAft>
-                <a:spcPts val="800"/>
-              </a:spcAft>
-            </a:pPr>
-            <a:r>
-              <a:rPr sz="2000" b="0" i="0">
-                <a:solidFill>
-                  <a:srgbClr val="333333"/>
-                </a:solidFill>
-                <a:latin typeface="Calibri"/>
-              </a:rPr>
-              <a:t>–   Sirve para comparar: entre dos proveedores, el de PUE más bajo desperdicia menos.</a:t>
-            </a:r>
-          </a:p>
-        </p:txBody>
-      </p:sp>
-      <p:sp>
-        <p:nvSpPr>
-          <p:cNvPr id="6" name="TextBox 5"/>
+        </p:txBody>
+      </p:sp>
+      <p:sp>
+        <p:nvSpPr>
+          <p:cNvPr id="9" name="TextBox 8"/>
           <p:cNvSpPr txBox="1"/>
           <p:nvPr/>
         </p:nvSpPr>
@@ -14084,9 +13646,57 @@
           </a:p>
         </p:txBody>
       </p:sp>
-      <p:sp>
-        <p:nvSpPr>
-          <p:cNvPr id="14" name="TextBox 13"/>
+      <p:pic>
+        <p:nvPicPr>
+          <p:cNvPr id="14" name="Picture 13" descr="sello_mal.png"/>
+          <p:cNvPicPr>
+            <a:picLocks noChangeAspect="1"/>
+          </p:cNvPicPr>
+          <p:nvPr/>
+        </p:nvPicPr>
+        <p:blipFill>
+          <a:blip r:embed="rId2"/>
+          <a:stretch>
+            <a:fillRect/>
+          </a:stretch>
+        </p:blipFill>
+        <p:spPr>
+          <a:xfrm>
+            <a:off x="566928" y="1527048"/>
+            <a:ext cx="393192" cy="393192"/>
+          </a:xfrm>
+          <a:prstGeom prst="rect">
+            <a:avLst/>
+          </a:prstGeom>
+        </p:spPr>
+      </p:pic>
+      <p:pic>
+        <p:nvPicPr>
+          <p:cNvPr id="15" name="Picture 14" descr="sello_bien.png"/>
+          <p:cNvPicPr>
+            <a:picLocks noChangeAspect="1"/>
+          </p:cNvPicPr>
+          <p:nvPr/>
+        </p:nvPicPr>
+        <p:blipFill>
+          <a:blip r:embed="rId3"/>
+          <a:stretch>
+            <a:fillRect/>
+          </a:stretch>
+        </p:blipFill>
+        <p:spPr>
+          <a:xfrm>
+            <a:off x="6365595" y="1527048"/>
+            <a:ext cx="393192" cy="393192"/>
+          </a:xfrm>
+          <a:prstGeom prst="rect">
+            <a:avLst/>
+          </a:prstGeom>
+        </p:spPr>
+      </p:pic>
+      <p:sp>
+        <p:nvSpPr>
+          <p:cNvPr id="16" name="TextBox 15"/>
           <p:cNvSpPr txBox="1"/>
           <p:nvPr/>
         </p:nvSpPr>

--- a/Introduccion a la Ingenieria/Clases/Clase 5 - El rol del ingeniero en el contexto ambiental/Presentacion.pptx
+++ b/Introduccion a la Ingenieria/Clases/Clase 5 - El rol del ingeniero en el contexto ambiental/Presentacion.pptx
@@ -586,25 +586,31 @@
           <a:lstStyle/>
           <a:p>
             <a:r>
-              <a:t>DE LA CONCIENCIA A LA DECISIÓN: LA DIAPOSITIVA QUE CONVIERTE EL TEMA EN INGENIERÍA</a:t>
+              <a:t>COLOMBIA, Y LA HONESTIDAD CON LAS CIFRAS</a:t>
             </a:r>
           </a:p>
           <a:p/>
           <a:p>
             <a:r>
-              <a:t>Esta es la diapositiva que salva la clase de volverse un discurso. Las cinco parejas son decisiones reales de diseño, y en las cinco la versión de la derecha cumple la misma función. Eso hay que decirlo explícitamente: no se está pidiendo sacrificar calidad por ambiente, se está pidiendo no desperdiciar.</a:t>
+              <a:t>El dato local más útil es la composición de la matriz eléctrica. Una parte importante de la generación en Colombia es hidráulica, lo que significa que un kilovatio-hora consumido aquí tiene un factor de emisiones distinto —menor— que en un país con generación a carbón. La consecuencia metodológica es la que hay que enseñar: no se copian factores de emisión de otro país; se usa el factor local, y el operador del sistema (XM) publica datos de generación. Un equipo que cite una fuente colombiana en vez de un blog extranjero ya está haciendo ingeniería.</a:t>
             </a:r>
           </a:p>
           <a:p/>
           <a:p>
             <a:r>
-              <a:t>La primera —pedir la ubicación cada cinco segundos o cada cinco minutos— es la más fácil de entender y toca batería y red a la vez. La tercera —guardar el resultado en vez de recalcular el reporte completo en cada consulta— es la que más sorprende, porque el estudiante todavía no tiene la intuición de que el cómputo cuesta energía; sirve para conectar con la sesión 7 y con la idea de que la eficiencia no es coquetería de programador. La cuarta —sostener dispositivos viejos— es la de mayor impacto real por lo dicho sobre la fabricación. Y la quinta es la más contemporánea y hay que decirla sin miedo: agregarle un asistente de IA a una función que resolvía una condición simple gasta energía en cada llamada, para siempre. Es una decisión de arquitectura, y hoy se toma con frecuencia por moda.</a:t>
+              <a:t>La contracara es igual de importante y menos conocida: cuando el fenómeno de El Niño reduce los aportes a los embalses, entran las plantas térmicas y el factor de emisiones del país sube. Es decir, la misma aplicación, sin cambiar una línea de código, emite más en un año seco. Eso enseña algo que vale para todo el curso: la huella de un sistema no es una propiedad del sistema, es una propiedad del sistema en su contexto.</a:t>
             </a:r>
           </a:p>
           <a:p/>
           <a:p>
             <a:r>
-              <a:t>El método de cinco pasos es el del taller. El paso 2 —buscar lo que se repite— es el que enseña a estimar: lo que ocurre una vez no mueve la aguja, lo que ocurre mil veces al día sí. Y el paso 5 —definir un indicador medible— es el que separa una intención de una decisión de ingeniería. «Vamos a ser sostenibles» no se puede verificar; «vamos a mover menos de 200 KB por consulta» sí, y en la Clase 16 se puede mirar si se cumplió.</a:t>
+              <a:t>La diapositiva de las trampas es la más importante para el rigor y conviene dedicarle tiempo real. Las cifras ambientales del sector digital son un campo donde circulan números espectaculares sin alcance definido: litros de agua por consulta a un modelo de lenguaje, gramos de CO₂ por búsqueda, porcentajes del consumo mundial de electricidad. Muchos provienen de estimaciones legítimas pero con supuestos muy específicos, y se citan luego como hechos universales. La regla del curso a partir de hoy es simple y se aplica en la rúbrica: cifra con fuente, año y alcance, o no va. Y hay que decir en voz alta lo que sí se puede afirmar sin exagerar: que la huella existe, que tiene cuatro etapas, que se puede reducir con decisiones de diseño y que casi nadie la mide. Con eso alcanza para trabajar con seriedad, y es mucho más defendible que un número impresionante mal citado.</a:t>
+            </a:r>
+          </a:p>
+          <a:p/>
+          <a:p>
+            <a:r>
+              <a:t>Sobre la comparación «lo digital contra el papel»: alguien la va a proponer y la respuesta correcta es que depende del número de usos y de si obliga a comprar dispositivos. Un documento leído una vez en un computador nuevo no gana contra una hoja; el mismo documento leído por trescientas personas en aparatos que ya existen, sí. La lección es que comparar sin decir qué se comparó no es un argumento.</a:t>
             </a:r>
           </a:p>
         </p:txBody>
@@ -908,61 +914,7 @@
           <a:lstStyle/>
           <a:p>
             <a:r>
-              <a:t>TEXTO COMPLETO DE LA LÁMINA (se proyecta resumido):</a:t>
-            </a:r>
-          </a:p>
-          <a:p/>
-          <a:p>
-            <a:r>
-              <a:t>La matriz eléctrica. Buena parte de la generación del país es hidráulica, así que un kilovatio-hora consumido en Colombia tiene menos emisiones asociadas que el mismo kilovatio en un país que quema carbón. Un análisis serio no copia cifras de emisiones de otro país: usa el factor local, que publica el operador del sistema (XM).</a:t>
-            </a:r>
-          </a:p>
-          <a:p/>
-          <a:p>
-            <a:r>
-              <a:t>Y su contracara. Cuando llega el fenómeno de El Niño y baja el nivel de los embalses, entran las plantas térmicas y la misma aplicación pasa a emitir más sin cambiar una línea de código. La huella de un sistema no es un número fijo: depende de cuándo y dónde corre.</a:t>
-            </a:r>
-          </a:p>
-          <a:p/>
-          <a:p>
-            <a:r>
-              <a:t>Residuos electrónicos. La Ley 1672 de 2013 fija los lineamientos de los RAEE en Colombia: el productor tiene que ofrecer puntos de recolección y el usuario tiene el deber de usarlos. Los informes internacionales (Global E-waste Monitor) muestran que la mayor parte del residuo electrónico del mundo no se recoge formalmente, y lo que no se recoge se desarma a mano, sin protección.</a:t>
-            </a:r>
-          </a:p>
-          <a:p/>
-          <a:p>
-            <a:r>
-              <a:t>Consecuencia práctica para su proyecto: la decisión ambiental más fuerte que puede tomar un equipo de este curso casi nunca es «consumir menos batería». Es no obligar a cambiar de aparato y no mover datos que no hacen falta.</a:t>
-            </a:r>
-          </a:p>
-          <a:p/>
-          <a:p>
-            <a:r>
-              <a:t>COLOMBIA, Y LA HONESTIDAD CON LAS CIFRAS</a:t>
-            </a:r>
-          </a:p>
-          <a:p/>
-          <a:p>
-            <a:r>
-              <a:t>El dato local más útil es la composición de la matriz eléctrica. Una parte importante de la generación en Colombia es hidráulica, lo que significa que un kilovatio-hora consumido aquí tiene un factor de emisiones distinto —menor— que en un país con generación a carbón. La consecuencia metodológica es la que hay que enseñar: no se copian factores de emisión de otro país; se usa el factor local, y el operador del sistema (XM) publica datos de generación. Un equipo que cite una fuente colombiana en vez de un blog extranjero ya está haciendo ingeniería.</a:t>
-            </a:r>
-          </a:p>
-          <a:p/>
-          <a:p>
-            <a:r>
-              <a:t>La contracara es igual de importante y menos conocida: cuando el fenómeno de El Niño reduce los aportes a los embalses, entran las plantas térmicas y el factor de emisiones del país sube. Es decir, la misma aplicación, sin cambiar una línea de código, emite más en un año seco. Eso enseña algo que vale para todo el curso: la huella de un sistema no es una propiedad del sistema, es una propiedad del sistema en su contexto.</a:t>
-            </a:r>
-          </a:p>
-          <a:p/>
-          <a:p>
-            <a:r>
-              <a:t>La diapositiva de las trampas es la más importante para el rigor y conviene dedicarle tiempo real. Las cifras ambientales del sector digital son un campo donde circulan números espectaculares sin alcance definido: litros de agua por consulta a un modelo de lenguaje, gramos de CO₂ por búsqueda, porcentajes del consumo mundial de electricidad. Muchos provienen de estimaciones legítimas pero con supuestos muy específicos, y se citan luego como hechos universales. La regla del curso a partir de hoy es simple y se aplica en la rúbrica: cifra con fuente, año y alcance, o no va. Y hay que decir en voz alta lo que sí se puede afirmar sin exagerar: que la huella existe, que tiene cuatro etapas, que se puede reducir con decisiones de diseño y que casi nadie la mide. Con eso alcanza para trabajar con seriedad, y es mucho más defendible que un número impresionante mal citado.</a:t>
-            </a:r>
-          </a:p>
-          <a:p/>
-          <a:p>
-            <a:r>
-              <a:t>Sobre la comparación «lo digital contra el papel»: alguien la va a proponer y la respuesta correcta es que depende del número de usos y de si obliga a comprar dispositivos. Un documento leído una vez en un computador nuevo no gana contra una hoja; el mismo documento leído por trescientas personas en aparatos que ya existen, sí. La lección es que comparar sin decir qué se comparó no es un argumento.</a:t>
+              <a:t>El paso 5 es el que convierte la conciencia en ingeniería: un indicador que se puede medir al final del semestre. Sin indicador, la mejora es una opinión.</a:t>
             </a:r>
           </a:p>
         </p:txBody>
@@ -1032,7 +984,19 @@
           <a:lstStyle/>
           <a:p>
             <a:r>
-              <a:t>El paso 5 es el que convierte la conciencia en ingeniería: un indicador que se puede medir al final del semestre. Sin indicador, la mejora es una opinión.</a:t>
+              <a:t>LA PREGUNTA DE ENTRADA: DARLE MATERIA A ALGO QUE PARECE NO TENERLA</a:t>
+            </a:r>
+          </a:p>
+          <a:p/>
+          <a:p>
+            <a:r>
+              <a:t>«¿Dónde está la nube?» funciona porque casi nadie ha visto un centro de datos y porque la metáfora está diseñada para que no se piense en el edificio. La segunda parte —cuánta agua se bebió una consulta a un asistente de IA— incomoda a propósito y hay que manejarla con cuidado: la respuesta honesta es que depende del centro de datos, del modelo, del clima y del año, y que las cifras que circulan varían por órdenes de magnitud. Eso no debilita la clase: es la clase. El objetivo no es que se lleven un número, es que entiendan que hay agua y electricidad detrás de algo que se siente inmaterial, y que quien afirme un número tiene que decir de dónde salió.</a:t>
+            </a:r>
+          </a:p>
+          <a:p/>
+          <a:p>
+            <a:r>
+              <a:t>Recoja las respuestas en el muro y no las corrija. En el minuto 20, al llegar al PUE y al enfriamiento, vuelva al muro: alguien va a haber escrito «en internet» o «en un servidor», y ahí se muestra que el servidor está en un edificio que consume tanto en enfriarse como en computar.</a:t>
             </a:r>
           </a:p>
         </p:txBody>
@@ -1102,19 +1066,43 @@
           <a:lstStyle/>
           <a:p>
             <a:r>
-              <a:t>LA PREGUNTA DE ENTRADA: DARLE MATERIA A ALGO QUE PARECE NO TENERLA</a:t>
+              <a:t>LAS CUATRO ETAPAS Y POR QUÉ LA FABRICACIÓN CAMBIA LA RECOMENDACIÓN</a:t>
             </a:r>
           </a:p>
           <a:p/>
           <a:p>
             <a:r>
-              <a:t>«¿Dónde está la nube?» funciona porque casi nadie ha visto un centro de datos y porque la metáfora está diseñada para que no se piense en el edificio. La segunda parte —cuánta agua se bebió una consulta a un asistente de IA— incomoda a propósito y hay que manejarla con cuidado: la respuesta honesta es que depende del centro de datos, del modelo, del clima y del año, y que las cifras que circulan varían por órdenes de magnitud. Eso no debilita la clase: es la clase. El objetivo no es que se lleven un número, es que entiendan que hay agua y electricidad detrás de algo que se siente inmaterial, y que quien afirme un número tiene que decir de dónde salió.</a:t>
+              <a:t>La huella material de un sistema de software se reparte en cuatro etapas y conviene recorrerlas con un ejemplo único: una aplicación de citas médicas usada desde el celular.</a:t>
             </a:r>
           </a:p>
           <a:p/>
           <a:p>
             <a:r>
-              <a:t>Recoja las respuestas en el muro y no las corrija. En el minuto 20, al llegar al PUE y al enfriamiento, vuelva al muro: alguien va a haber escrito «en internet» o «en un servidor», y ahí se muestra que el servidor está en un edificio que consume tanto en enfriarse como en computar.</a:t>
+              <a:t>Fabricación. El celular del paciente, el computador de la secretaria y los servidores donde corre el sistema tuvieron que ser fabricados: minería de metales —incluidos varios escasos y con extracción problemática—, ensamblaje y transporte. Este es el punto que más sorprende y el más importante para las decisiones: en muchos dispositivos personales la mayor parte de la huella de toda su vida ya está gastada cuando se enciende por primera vez. La consecuencia es contraintuitiva: optimizar el consumo de batería es útil, pero alargar la vida útil del aparato pesa mucho más, y eso depende de decisiones de software.</a:t>
+            </a:r>
+          </a:p>
+          <a:p/>
+          <a:p>
+            <a:r>
+              <a:t>Uso. Electricidad del dispositivo, del servidor y —esto es lo que se olvida— del enfriamiento del centro de datos. Aquí entra el PUE.</a:t>
+            </a:r>
+          </a:p>
+          <a:p/>
+          <a:p>
+            <a:r>
+              <a:t>Red. Cada byte que viaja pasa por antenas, cables, enrutadores y equipos que consumen. No es gratis y crece con el volumen: una pantalla que carga imágenes en tamaño original mil veces al día mueve un múltiplo de lo necesario.</a:t>
+            </a:r>
+          </a:p>
+          <a:p/>
+          <a:p>
+            <a:r>
+              <a:t>Fin de vida. El aparato se vuelve residuo electrónico. Tiene metales recuperables y sustancias peligrosas, y cuando no se recoge formalmente se desarma a mano, quemando plásticos, con daño directo a las personas que lo hacen.</a:t>
+            </a:r>
+          </a:p>
+          <a:p/>
+          <a:p>
+            <a:r>
+              <a:t>El punto pedagógico de la diapositiva es que las palabras «software» y «nube» están construidas para que uno no piense en nada de esto. Nombrar las cuatro etapas es lo que permite discutir el tema con seriedad.</a:t>
             </a:r>
           </a:p>
         </p:txBody>
@@ -1184,43 +1172,31 @@
           <a:lstStyle/>
           <a:p>
             <a:r>
-              <a:t>LAS CUATRO ETAPAS Y POR QUÉ LA FABRICACIÓN CAMBIA LA RECOMENDACIÓN</a:t>
+              <a:t>PUE, AGUA, RAEE Y OBSOLESCENCIA: LOS CUATRO CONCEPTOS QUE HAY QUE DEJAR</a:t>
             </a:r>
           </a:p>
           <a:p/>
           <a:p>
             <a:r>
-              <a:t>La huella material de un sistema de software se reparte en cuatro etapas y conviene recorrerlas con un ejemplo único: una aplicación de citas médicas usada desde el celular.</a:t>
+              <a:t>PUE (Power Usage Effectiveness). Es la energía total que entra al centro de datos dividida por la energía que efectivamente llega a los servidores. Si fuera 1.0, todo lo que entra se usa en computar. Un PUE de 1.6 significa que por cada vatio de cómputo se gastan 0,6 en enfriar, iluminar y en pérdidas. Los centros de datos grandes y modernos operan bastante mejor que el promedio de las salas de servidores de empresa, que suelen estar en el rango de 1.5 a 1.6 según las encuestas del sector. La idea que hay que dejar no es el número exacto: es que una parte grande de la energía de un centro de datos no computa nada, y que existe una métrica con nombre para medirlo. Un ingeniero que sabe que el PUE existe puede preguntar por él.</a:t>
             </a:r>
           </a:p>
           <a:p/>
           <a:p>
             <a:r>
-              <a:t>Fabricación. El celular del paciente, el computador de la secretaria y los servidores donde corre el sistema tuvieron que ser fabricados: minería de metales —incluidos varios escasos y con extracción problemática—, ensamblaje y transporte. Este es el punto que más sorprende y el más importante para las decisiones: en muchos dispositivos personales la mayor parte de la huella de toda su vida ya está gastada cuando se enciende por primera vez. La consecuencia es contraintuitiva: optimizar el consumo de batería es útil, pero alargar la vida útil del aparato pesa mucho más, y eso depende de decisiones de software.</a:t>
+              <a:t>El agua. Enfriar con evaporación de agua es más barato en electricidad que enfriar con máquinas, así que muchos centros de datos usan agua. Eso traslada el costo: baja la factura de luz y sube el consumo de una cuenca que normalmente abastece a población. Es un buen ejemplo de algo que el curso repite: optimizar una variable suele mover el problema a otra, y el ingeniero tiene que saber a cuál. Hay métricas para esto (WUE, litros por kilovatio-hora), y aquí también vale la advertencia de las cifras.</a:t>
             </a:r>
           </a:p>
           <a:p/>
           <a:p>
             <a:r>
-              <a:t>Uso. Electricidad del dispositivo, del servidor y —esto es lo que se olvida— del enfriamiento del centro de datos. Aquí entra el PUE.</a:t>
+              <a:t>RAEE y la Ley 1672 de 2013. Es la norma colombiana que fija los lineamientos para la gestión de residuos de aparatos eléctricos y electrónicos. Lo que hay que poder decir: obliga a los productores a establecer sistemas de recolección y gestión, y establece el deber del usuario de entregar el aparato en esos puntos en vez de tirarlo a la basura común. Los informes globales de residuos electrónicos (Global E-waste Monitor, de UNITAR e ITU) reportan decenas de millones de toneladas al año y una tasa de recolección formal baja: el orden de magnitud es que la mayor parte no se recoge. Si un equipo cita una cifra exacta, exija la edición del informe y el año, porque cambia entre ediciones.</a:t>
             </a:r>
           </a:p>
           <a:p/>
           <a:p>
             <a:r>
-              <a:t>Red. Cada byte que viaja pasa por antenas, cables, enrutadores y equipos que consumen. No es gratis y crece con el volumen: una pantalla que carga imágenes en tamaño original mil veces al día mueve un múltiplo de lo necesario.</a:t>
-            </a:r>
-          </a:p>
-          <a:p/>
-          <a:p>
-            <a:r>
-              <a:t>Fin de vida. El aparato se vuelve residuo electrónico. Tiene metales recuperables y sustancias peligrosas, y cuando no se recoge formalmente se desarma a mano, quemando plásticos, con daño directo a las personas que lo hacen.</a:t>
-            </a:r>
-          </a:p>
-          <a:p/>
-          <a:p>
-            <a:r>
-              <a:t>El punto pedagógico de la diapositiva es que las palabras «software» y «nube» están construidas para que uno no piense en nada de esto. Nombrar las cuatro etapas es lo que permite discutir el tema con seriedad.</a:t>
+              <a:t>Obsolescencia inducida por software. Es el concepto que más les sirve porque está bajo su control profesional. Cuando una nueva versión de una aplicación —o de un sistema operativo— deja de funcionar en dispositivos que servían, el software convierte en basura un aparato que estaba bien. No hace falta discutir si hay intención: el efecto es material y medible. Y la contracara es una decisión concreta que un equipo de este curso puede tomar: sostener el soporte para dispositivos viejos, que además es lo correcto para el contexto de la universidad, donde muchos estudiantes trabajan con equipos de varios años.</a:t>
             </a:r>
           </a:p>
         </p:txBody>
@@ -1290,31 +1266,25 @@
           <a:lstStyle/>
           <a:p>
             <a:r>
-              <a:t>PUE, AGUA, RAEE Y OBSOLESCENCIA: LOS CUATRO CONCEPTOS QUE HAY QUE DEJAR</a:t>
+              <a:t>DE LA CONCIENCIA A LA DECISIÓN: LA DIAPOSITIVA QUE CONVIERTE EL TEMA EN INGENIERÍA</a:t>
             </a:r>
           </a:p>
           <a:p/>
           <a:p>
             <a:r>
-              <a:t>PUE (Power Usage Effectiveness). Es la energía total que entra al centro de datos dividida por la energía que efectivamente llega a los servidores. Si fuera 1.0, todo lo que entra se usa en computar. Un PUE de 1.6 significa que por cada vatio de cómputo se gastan 0,6 en enfriar, iluminar y en pérdidas. Los centros de datos grandes y modernos operan bastante mejor que el promedio de las salas de servidores de empresa, que suelen estar en el rango de 1.5 a 1.6 según las encuestas del sector. La idea que hay que dejar no es el número exacto: es que una parte grande de la energía de un centro de datos no computa nada, y que existe una métrica con nombre para medirlo. Un ingeniero que sabe que el PUE existe puede preguntar por él.</a:t>
+              <a:t>Esta es la diapositiva que salva la clase de volverse un discurso. Las cinco parejas son decisiones reales de diseño, y en las cinco la versión de la derecha cumple la misma función. Eso hay que decirlo explícitamente: no se está pidiendo sacrificar calidad por ambiente, se está pidiendo no desperdiciar.</a:t>
             </a:r>
           </a:p>
           <a:p/>
           <a:p>
             <a:r>
-              <a:t>El agua. Enfriar con evaporación de agua es más barato en electricidad que enfriar con máquinas, así que muchos centros de datos usan agua. Eso traslada el costo: baja la factura de luz y sube el consumo de una cuenca que normalmente abastece a población. Es un buen ejemplo de algo que el curso repite: optimizar una variable suele mover el problema a otra, y el ingeniero tiene que saber a cuál. Hay métricas para esto (WUE, litros por kilovatio-hora), y aquí también vale la advertencia de las cifras.</a:t>
+              <a:t>La primera —pedir la ubicación cada cinco segundos o cada cinco minutos— es la más fácil de entender y toca batería y red a la vez. La tercera —guardar el resultado en vez de recalcular el reporte completo en cada consulta— es la que más sorprende, porque el estudiante todavía no tiene la intuición de que el cómputo cuesta energía; sirve para conectar con la sesión 7 y con la idea de que la eficiencia no es coquetería de programador. La cuarta —sostener dispositivos viejos— es la de mayor impacto real por lo dicho sobre la fabricación. Y la quinta es la más contemporánea y hay que decirla sin miedo: agregarle un asistente de IA a una función que resolvía una condición simple gasta energía en cada llamada, para siempre. Es una decisión de arquitectura, y hoy se toma con frecuencia por moda.</a:t>
             </a:r>
           </a:p>
           <a:p/>
           <a:p>
             <a:r>
-              <a:t>RAEE y la Ley 1672 de 2013. Es la norma colombiana que fija los lineamientos para la gestión de residuos de aparatos eléctricos y electrónicos. Lo que hay que poder decir: obliga a los productores a establecer sistemas de recolección y gestión, y establece el deber del usuario de entregar el aparato en esos puntos en vez de tirarlo a la basura común. Los informes globales de residuos electrónicos (Global E-waste Monitor, de UNITAR e ITU) reportan decenas de millones de toneladas al año y una tasa de recolección formal baja: el orden de magnitud es que la mayor parte no se recoge. Si un equipo cita una cifra exacta, exija la edición del informe y el año, porque cambia entre ediciones.</a:t>
-            </a:r>
-          </a:p>
-          <a:p/>
-          <a:p>
-            <a:r>
-              <a:t>Obsolescencia inducida por software. Es el concepto que más les sirve porque está bajo su control profesional. Cuando una nueva versión de una aplicación —o de un sistema operativo— deja de funcionar en dispositivos que servían, el software convierte en basura un aparato que estaba bien. No hace falta discutir si hay intención: el efecto es material y medible. Y la contracara es una decisión concreta que un equipo de este curso puede tomar: sostener el soporte para dispositivos viejos, que además es lo correcto para el contexto de la universidad, donde muchos estudiantes trabajan con equipos de varios años.</a:t>
+              <a:t>El método de cinco pasos es el del taller. El paso 2 —buscar lo que se repite— es el que enseña a estimar: lo que ocurre una vez no mueve la aguja, lo que ocurre mil veces al día sí. Y el paso 5 —definir un indicador medible— es el que separa una intención de una decisión de ingeniería. «Vamos a ser sostenibles» no se puede verificar; «vamos a mover menos de 200 KB por consulta» sí, y en la Clase 16 se puede mirar si se cumplió.</a:t>
             </a:r>
           </a:p>
         </p:txBody>
@@ -5515,118 +5485,14 @@
       </p:sp>
       <p:sp>
         <p:nvSpPr>
-          <p:cNvPr id="5" name="Rounded Rectangle 4"/>
-          <p:cNvSpPr/>
-          <p:nvPr/>
-        </p:nvSpPr>
-        <p:spPr>
-          <a:xfrm>
-            <a:off x="5797149" y="1469191"/>
-            <a:ext cx="6010497" cy="4267088"/>
-          </a:xfrm>
-          <a:prstGeom prst="roundRect">
-            <a:avLst>
-              <a:gd name="adj" fmla="val 4000"/>
-            </a:avLst>
-          </a:prstGeom>
-          <a:solidFill>
-            <a:srgbClr val="E8EEF4"/>
-          </a:solidFill>
-          <a:ln>
-            <a:noFill/>
-          </a:ln>
-        </p:spPr>
-        <p:style>
-          <a:lnRef idx="1">
-            <a:schemeClr val="accent1"/>
-          </a:lnRef>
-          <a:fillRef idx="3">
-            <a:schemeClr val="accent1"/>
-          </a:fillRef>
-          <a:effectRef idx="2">
-            <a:schemeClr val="accent1"/>
-          </a:effectRef>
-          <a:fontRef idx="minor">
-            <a:schemeClr val="lt1"/>
-          </a:fontRef>
-        </p:style>
-        <p:txBody>
-          <a:bodyPr rtlCol="0" anchor="ctr"/>
-          <a:lstStyle/>
-          <a:p>
-            <a:pPr algn="ctr"/>
-          </a:p>
-        </p:txBody>
-      </p:sp>
-      <p:pic>
-        <p:nvPicPr>
-          <p:cNvPr id="6" name="Picture 5" descr="hydroelectric-dam.jpg"/>
-          <p:cNvPicPr>
-            <a:picLocks noChangeAspect="1"/>
-          </p:cNvPicPr>
-          <p:nvPr/>
-        </p:nvPicPr>
-        <p:blipFill>
-          <a:blip r:embed="rId2"/>
-          <a:stretch>
-            <a:fillRect/>
-          </a:stretch>
-        </p:blipFill>
-        <p:spPr>
-          <a:xfrm>
-            <a:off x="5870301" y="1542343"/>
-            <a:ext cx="5864193" cy="4120784"/>
-          </a:xfrm>
-          <a:prstGeom prst="rect">
-            <a:avLst/>
-          </a:prstGeom>
-        </p:spPr>
-      </p:pic>
-      <p:sp>
-        <p:nvSpPr>
-          <p:cNvPr id="7" name="TextBox 6"/>
+          <p:cNvPr id="5" name="TextBox 4"/>
           <p:cNvSpPr txBox="1"/>
           <p:nvPr/>
         </p:nvSpPr>
         <p:spPr>
           <a:xfrm>
-            <a:off x="5870301" y="5961888"/>
-            <a:ext cx="5864193" cy="320040"/>
-          </a:xfrm>
-          <a:prstGeom prst="rect">
-            <a:avLst/>
-          </a:prstGeom>
-          <a:noFill/>
-        </p:spPr>
-        <p:txBody>
-          <a:bodyPr wrap="square">
-            <a:spAutoFit/>
-          </a:bodyPr>
-          <a:lstStyle/>
-          <a:p>
-            <a:pPr algn="ctr"/>
-            <a:r>
-              <a:rPr sz="1100" b="0" i="1">
-                <a:solidFill>
-                  <a:srgbClr val="666666"/>
-                </a:solidFill>
-                <a:latin typeface="Calibri"/>
-              </a:rPr>
-              <a:t>Foto: Kris Møklebust · Pexels</a:t>
-            </a:r>
-          </a:p>
-        </p:txBody>
-      </p:sp>
-      <p:sp>
-        <p:nvSpPr>
-          <p:cNvPr id="8" name="TextBox 7"/>
-          <p:cNvSpPr txBox="1"/>
-          <p:nvPr/>
-        </p:nvSpPr>
-        <p:spPr>
-          <a:xfrm>
-            <a:off x="457200" y="1353312"/>
-            <a:ext cx="5093061" cy="5047488"/>
+            <a:off x="457200" y="1170432"/>
+            <a:ext cx="11277295" cy="5230368"/>
           </a:xfrm>
           <a:prstGeom prst="rect">
             <a:avLst/>
@@ -5662,6 +5528,51 @@
               </a:rPr>
               <a:t>La matriz eléctrica.</a:t>
             </a:r>
+            <a:r>
+              <a:rPr sz="2000" b="0" i="0">
+                <a:solidFill>
+                  <a:srgbClr val="333333"/>
+                </a:solidFill>
+                <a:latin typeface="Calibri"/>
+              </a:rPr>
+              <a:t> Buena parte de la generación del país es </a:t>
+            </a:r>
+            <a:r>
+              <a:rPr sz="2000" b="1" i="0">
+                <a:solidFill>
+                  <a:srgbClr val="333333"/>
+                </a:solidFill>
+                <a:latin typeface="Calibri"/>
+              </a:rPr>
+              <a:t>hidráulica</a:t>
+            </a:r>
+            <a:r>
+              <a:rPr sz="2000" b="0" i="0">
+                <a:solidFill>
+                  <a:srgbClr val="333333"/>
+                </a:solidFill>
+                <a:latin typeface="Calibri"/>
+              </a:rPr>
+              <a:t>, así que un kilovatio-hora consumido en Colombia tiene menos emisiones asociadas que el mismo kilovatio en un país que quema carbón. Un análisis serio no copia cifras de emisiones de otro país: </a:t>
+            </a:r>
+            <a:r>
+              <a:rPr sz="2000" b="1" i="0">
+                <a:solidFill>
+                  <a:srgbClr val="333333"/>
+                </a:solidFill>
+                <a:latin typeface="Calibri"/>
+              </a:rPr>
+              <a:t>usa el factor local</a:t>
+            </a:r>
+            <a:r>
+              <a:rPr sz="2000" b="0" i="0">
+                <a:solidFill>
+                  <a:srgbClr val="333333"/>
+                </a:solidFill>
+                <a:latin typeface="Calibri"/>
+              </a:rPr>
+              <a:t>, que publica el operador del sistema (XM).</a:t>
+            </a:r>
           </a:p>
           <a:p>
             <a:pPr>
@@ -5687,6 +5598,33 @@
               </a:rPr>
               <a:t>Y su contracara.</a:t>
             </a:r>
+            <a:r>
+              <a:rPr sz="2000" b="0" i="0">
+                <a:solidFill>
+                  <a:srgbClr val="333333"/>
+                </a:solidFill>
+                <a:latin typeface="Calibri"/>
+              </a:rPr>
+              <a:t> Cuando llega el fenómeno de El Niño y baja el nivel de los embalses, entran las plantas térmicas y </a:t>
+            </a:r>
+            <a:r>
+              <a:rPr sz="2000" b="1" i="0">
+                <a:solidFill>
+                  <a:srgbClr val="333333"/>
+                </a:solidFill>
+                <a:latin typeface="Calibri"/>
+              </a:rPr>
+              <a:t>la misma aplicación pasa a emitir más sin cambiar una línea de código</a:t>
+            </a:r>
+            <a:r>
+              <a:rPr sz="2000" b="0" i="0">
+                <a:solidFill>
+                  <a:srgbClr val="333333"/>
+                </a:solidFill>
+                <a:latin typeface="Calibri"/>
+              </a:rPr>
+              <a:t>. La huella de un sistema no es un número fijo: depende de cuándo y dónde corre.</a:t>
+            </a:r>
           </a:p>
           <a:p>
             <a:pPr>
@@ -5737,7 +5675,25 @@
                 </a:solidFill>
                 <a:latin typeface="Calibri"/>
               </a:rPr>
-              <a:t> fija los lineamientos de los RAEE en Colombia:</a:t>
+              <a:t> fija los lineamientos de los RAEE en Colombia: el productor tiene que ofrecer puntos de recolección y el usuario tiene el deber de usarlos. Los informes internacionales (Global E-waste Monitor) muestran que </a:t>
+            </a:r>
+            <a:r>
+              <a:rPr sz="2000" b="1" i="0">
+                <a:solidFill>
+                  <a:srgbClr val="333333"/>
+                </a:solidFill>
+                <a:latin typeface="Calibri"/>
+              </a:rPr>
+              <a:t>la mayor parte del residuo electrónico del mundo no se recoge formalmente</a:t>
+            </a:r>
+            <a:r>
+              <a:rPr sz="2000" b="0" i="0">
+                <a:solidFill>
+                  <a:srgbClr val="333333"/>
+                </a:solidFill>
+                <a:latin typeface="Calibri"/>
+              </a:rPr>
+              <a:t>, y lo que no se recoge se desarma a mano, sin protección.</a:t>
             </a:r>
           </a:p>
           <a:p>
@@ -5764,12 +5720,57 @@
               </a:rPr>
               <a:t>Consecuencia práctica para su proyecto:</a:t>
             </a:r>
-          </a:p>
-        </p:txBody>
-      </p:sp>
-      <p:sp>
-        <p:nvSpPr>
-          <p:cNvPr id="9" name="TextBox 8"/>
+            <a:r>
+              <a:rPr sz="2000" b="0" i="0">
+                <a:solidFill>
+                  <a:srgbClr val="333333"/>
+                </a:solidFill>
+                <a:latin typeface="Calibri"/>
+              </a:rPr>
+              <a:t> la decisión ambiental más fuerte que puede tomar un equipo de este curso casi nunca es «consumir menos batería». Es </a:t>
+            </a:r>
+            <a:r>
+              <a:rPr sz="2000" b="1" i="0">
+                <a:solidFill>
+                  <a:srgbClr val="333333"/>
+                </a:solidFill>
+                <a:latin typeface="Calibri"/>
+              </a:rPr>
+              <a:t>no obligar a cambiar de aparato</a:t>
+            </a:r>
+            <a:r>
+              <a:rPr sz="2000" b="0" i="0">
+                <a:solidFill>
+                  <a:srgbClr val="333333"/>
+                </a:solidFill>
+                <a:latin typeface="Calibri"/>
+              </a:rPr>
+              <a:t> y </a:t>
+            </a:r>
+            <a:r>
+              <a:rPr sz="2000" b="1" i="0">
+                <a:solidFill>
+                  <a:srgbClr val="333333"/>
+                </a:solidFill>
+                <a:latin typeface="Calibri"/>
+              </a:rPr>
+              <a:t>no mover datos que no hacen falta</a:t>
+            </a:r>
+            <a:r>
+              <a:rPr sz="2000" b="0" i="0">
+                <a:solidFill>
+                  <a:srgbClr val="333333"/>
+                </a:solidFill>
+                <a:latin typeface="Calibri"/>
+              </a:rPr>
+              <a:t>.</a:t>
+            </a:r>
+          </a:p>
+        </p:txBody>
+      </p:sp>
+      <p:sp>
+        <p:nvSpPr>
+          <p:cNvPr id="6" name="TextBox 5"/>
           <p:cNvSpPr txBox="1"/>
           <p:nvPr/>
         </p:nvSpPr>
@@ -9424,118 +9425,14 @@
       </p:sp>
       <p:sp>
         <p:nvSpPr>
-          <p:cNvPr id="5" name="Rounded Rectangle 4"/>
-          <p:cNvSpPr/>
-          <p:nvPr/>
-        </p:nvSpPr>
-        <p:spPr>
-          <a:xfrm>
-            <a:off x="5797149" y="1573813"/>
-            <a:ext cx="6010497" cy="4057845"/>
-          </a:xfrm>
-          <a:prstGeom prst="roundRect">
-            <a:avLst>
-              <a:gd name="adj" fmla="val 4000"/>
-            </a:avLst>
-          </a:prstGeom>
-          <a:solidFill>
-            <a:srgbClr val="E8EEF4"/>
-          </a:solidFill>
-          <a:ln>
-            <a:noFill/>
-          </a:ln>
-        </p:spPr>
-        <p:style>
-          <a:lnRef idx="1">
-            <a:schemeClr val="accent1"/>
-          </a:lnRef>
-          <a:fillRef idx="3">
-            <a:schemeClr val="accent1"/>
-          </a:fillRef>
-          <a:effectRef idx="2">
-            <a:schemeClr val="accent1"/>
-          </a:effectRef>
-          <a:fontRef idx="minor">
-            <a:schemeClr val="lt1"/>
-          </a:fontRef>
-        </p:style>
-        <p:txBody>
-          <a:bodyPr rtlCol="0" anchor="ctr"/>
-          <a:lstStyle/>
-          <a:p>
-            <a:pPr algn="ctr"/>
-          </a:p>
-        </p:txBody>
-      </p:sp>
-      <p:pic>
-        <p:nvPicPr>
-          <p:cNvPr id="6" name="Picture 5" descr="students-learning-laptops-classroom.jpg"/>
-          <p:cNvPicPr>
-            <a:picLocks noChangeAspect="1"/>
-          </p:cNvPicPr>
-          <p:nvPr/>
-        </p:nvPicPr>
-        <p:blipFill>
-          <a:blip r:embed="rId2"/>
-          <a:stretch>
-            <a:fillRect/>
-          </a:stretch>
-        </p:blipFill>
-        <p:spPr>
-          <a:xfrm>
-            <a:off x="5870301" y="1646965"/>
-            <a:ext cx="5864193" cy="3911541"/>
-          </a:xfrm>
-          <a:prstGeom prst="rect">
-            <a:avLst/>
-          </a:prstGeom>
-        </p:spPr>
-      </p:pic>
-      <p:sp>
-        <p:nvSpPr>
-          <p:cNvPr id="7" name="TextBox 6"/>
+          <p:cNvPr id="5" name="TextBox 4"/>
           <p:cNvSpPr txBox="1"/>
           <p:nvPr/>
         </p:nvSpPr>
         <p:spPr>
           <a:xfrm>
-            <a:off x="5870301" y="5961888"/>
-            <a:ext cx="5864193" cy="320040"/>
-          </a:xfrm>
-          <a:prstGeom prst="rect">
-            <a:avLst/>
-          </a:prstGeom>
-          <a:noFill/>
-        </p:spPr>
-        <p:txBody>
-          <a:bodyPr wrap="square">
-            <a:spAutoFit/>
-          </a:bodyPr>
-          <a:lstStyle/>
-          <a:p>
-            <a:pPr algn="ctr"/>
-            <a:r>
-              <a:rPr sz="1100" b="0" i="1">
-                <a:solidFill>
-                  <a:srgbClr val="666666"/>
-                </a:solidFill>
-                <a:latin typeface="Calibri"/>
-              </a:rPr>
-              <a:t>Foto: Mikhail Nilov · Pexels</a:t>
-            </a:r>
-          </a:p>
-        </p:txBody>
-      </p:sp>
-      <p:sp>
-        <p:nvSpPr>
-          <p:cNvPr id="8" name="TextBox 7"/>
-          <p:cNvSpPr txBox="1"/>
-          <p:nvPr/>
-        </p:nvSpPr>
-        <p:spPr>
-          <a:xfrm>
-            <a:off x="457200" y="1353312"/>
-            <a:ext cx="5093061" cy="5047488"/>
+            <a:off x="457200" y="1170432"/>
+            <a:ext cx="11277295" cy="5230368"/>
           </a:xfrm>
           <a:prstGeom prst="rect">
             <a:avLst/>
@@ -9687,7 +9584,7 @@
       </p:sp>
       <p:sp>
         <p:nvSpPr>
-          <p:cNvPr id="9" name="TextBox 8"/>
+          <p:cNvPr id="6" name="TextBox 5"/>
           <p:cNvSpPr txBox="1"/>
           <p:nvPr/>
         </p:nvSpPr>
@@ -12677,118 +12574,14 @@
       </p:sp>
       <p:sp>
         <p:nvSpPr>
-          <p:cNvPr id="5" name="Rounded Rectangle 4"/>
-          <p:cNvSpPr/>
-          <p:nvPr/>
-        </p:nvSpPr>
-        <p:spPr>
-          <a:xfrm>
-            <a:off x="5797149" y="1576932"/>
-            <a:ext cx="6010497" cy="4051607"/>
-          </a:xfrm>
-          <a:prstGeom prst="roundRect">
-            <a:avLst>
-              <a:gd name="adj" fmla="val 4000"/>
-            </a:avLst>
-          </a:prstGeom>
-          <a:solidFill>
-            <a:srgbClr val="E8EEF4"/>
-          </a:solidFill>
-          <a:ln>
-            <a:noFill/>
-          </a:ln>
-        </p:spPr>
-        <p:style>
-          <a:lnRef idx="1">
-            <a:schemeClr val="accent1"/>
-          </a:lnRef>
-          <a:fillRef idx="3">
-            <a:schemeClr val="accent1"/>
-          </a:fillRef>
-          <a:effectRef idx="2">
-            <a:schemeClr val="accent1"/>
-          </a:effectRef>
-          <a:fontRef idx="minor">
-            <a:schemeClr val="lt1"/>
-          </a:fontRef>
-        </p:style>
-        <p:txBody>
-          <a:bodyPr rtlCol="0" anchor="ctr"/>
-          <a:lstStyle/>
-          <a:p>
-            <a:pPr algn="ctr"/>
-          </a:p>
-        </p:txBody>
-      </p:sp>
-      <p:pic>
-        <p:nvPicPr>
-          <p:cNvPr id="6" name="Picture 5" descr="data-center-server-room.jpg"/>
-          <p:cNvPicPr>
-            <a:picLocks noChangeAspect="1"/>
-          </p:cNvPicPr>
-          <p:nvPr/>
-        </p:nvPicPr>
-        <p:blipFill>
-          <a:blip r:embed="rId2"/>
-          <a:stretch>
-            <a:fillRect/>
-          </a:stretch>
-        </p:blipFill>
-        <p:spPr>
-          <a:xfrm>
-            <a:off x="5870301" y="1650084"/>
-            <a:ext cx="5864193" cy="3905303"/>
-          </a:xfrm>
-          <a:prstGeom prst="rect">
-            <a:avLst/>
-          </a:prstGeom>
-        </p:spPr>
-      </p:pic>
-      <p:sp>
-        <p:nvSpPr>
-          <p:cNvPr id="7" name="TextBox 6"/>
+          <p:cNvPr id="5" name="TextBox 4"/>
           <p:cNvSpPr txBox="1"/>
           <p:nvPr/>
         </p:nvSpPr>
         <p:spPr>
           <a:xfrm>
-            <a:off x="5870301" y="5961888"/>
-            <a:ext cx="5864193" cy="320040"/>
-          </a:xfrm>
-          <a:prstGeom prst="rect">
-            <a:avLst/>
-          </a:prstGeom>
-          <a:noFill/>
-        </p:spPr>
-        <p:txBody>
-          <a:bodyPr wrap="square">
-            <a:spAutoFit/>
-          </a:bodyPr>
-          <a:lstStyle/>
-          <a:p>
-            <a:pPr algn="ctr"/>
-            <a:r>
-              <a:rPr sz="1100" b="0" i="1">
-                <a:solidFill>
-                  <a:srgbClr val="666666"/>
-                </a:solidFill>
-                <a:latin typeface="Calibri"/>
-              </a:rPr>
-              <a:t>Foto: panumas nikhomkhai · Pexels</a:t>
-            </a:r>
-          </a:p>
-        </p:txBody>
-      </p:sp>
-      <p:sp>
-        <p:nvSpPr>
-          <p:cNvPr id="8" name="TextBox 7"/>
-          <p:cNvSpPr txBox="1"/>
-          <p:nvPr/>
-        </p:nvSpPr>
-        <p:spPr>
-          <a:xfrm>
-            <a:off x="457200" y="1353312"/>
-            <a:ext cx="5093061" cy="5047488"/>
+            <a:off x="457200" y="1170432"/>
+            <a:ext cx="11277295" cy="5230368"/>
           </a:xfrm>
           <a:prstGeom prst="rect">
             <a:avLst/>
@@ -12936,11 +12729,79 @@
               <a:t>No computan nada.</a:t>
             </a:r>
           </a:p>
-        </p:txBody>
-      </p:sp>
-      <p:sp>
-        <p:nvSpPr>
-          <p:cNvPr id="9" name="TextBox 8"/>
+          <a:p>
+            <a:pPr>
+              <a:spcAft>
+                <a:spcPts val="800"/>
+              </a:spcAft>
+            </a:pPr>
+            <a:r>
+              <a:rPr sz="2000" b="0" i="0">
+                <a:solidFill>
+                  <a:srgbClr val="333333"/>
+                </a:solidFill>
+                <a:latin typeface="Calibri"/>
+              </a:rPr>
+              <a:t>–   Un PUE de </a:t>
+            </a:r>
+            <a:r>
+              <a:rPr sz="2000" b="1" i="0">
+                <a:solidFill>
+                  <a:srgbClr val="333333"/>
+                </a:solidFill>
+                <a:latin typeface="Calibri"/>
+              </a:rPr>
+              <a:t>1,0</a:t>
+            </a:r>
+            <a:r>
+              <a:rPr sz="2000" b="0" i="0">
+                <a:solidFill>
+                  <a:srgbClr val="333333"/>
+                </a:solidFill>
+                <a:latin typeface="Calibri"/>
+              </a:rPr>
+              <a:t> sería perfecto. Uno de </a:t>
+            </a:r>
+            <a:r>
+              <a:rPr sz="2000" b="1" i="0">
+                <a:solidFill>
+                  <a:srgbClr val="333333"/>
+                </a:solidFill>
+                <a:latin typeface="Calibri"/>
+              </a:rPr>
+              <a:t>2,0</a:t>
+            </a:r>
+            <a:r>
+              <a:rPr sz="2000" b="0" i="0">
+                <a:solidFill>
+                  <a:srgbClr val="333333"/>
+                </a:solidFill>
+                <a:latin typeface="Calibri"/>
+              </a:rPr>
+              <a:t> gasta la mitad de la energía en no computar.</a:t>
+            </a:r>
+          </a:p>
+          <a:p>
+            <a:pPr>
+              <a:spcAft>
+                <a:spcPts val="800"/>
+              </a:spcAft>
+            </a:pPr>
+            <a:r>
+              <a:rPr sz="2000" b="0" i="0">
+                <a:solidFill>
+                  <a:srgbClr val="333333"/>
+                </a:solidFill>
+                <a:latin typeface="Calibri"/>
+              </a:rPr>
+              <a:t>–   Sirve para comparar: entre dos proveedores, el de PUE más bajo desperdicia menos.</a:t>
+            </a:r>
+          </a:p>
+        </p:txBody>
+      </p:sp>
+      <p:sp>
+        <p:nvSpPr>
+          <p:cNvPr id="6" name="TextBox 5"/>
           <p:cNvSpPr txBox="1"/>
           <p:nvPr/>
         </p:nvSpPr>

--- a/Introduccion a la Ingenieria/Clases/Clase 5 - El rol del ingeniero en el contexto ambiental/Presentacion.pptx
+++ b/Introduccion a la Ingenieria/Clases/Clase 5 - El rol del ingeniero en el contexto ambiental/Presentacion.pptx
@@ -586,31 +586,25 @@
           <a:lstStyle/>
           <a:p>
             <a:r>
-              <a:t>COLOMBIA, Y LA HONESTIDAD CON LAS CIFRAS</a:t>
+              <a:t>DE LA CONCIENCIA A LA DECISIÓN: LA DIAPOSITIVA QUE CONVIERTE EL TEMA EN INGENIERÍA</a:t>
             </a:r>
           </a:p>
           <a:p/>
           <a:p>
             <a:r>
-              <a:t>El dato local más útil es la composición de la matriz eléctrica. Una parte importante de la generación en Colombia es hidráulica, lo que significa que un kilovatio-hora consumido aquí tiene un factor de emisiones distinto —menor— que en un país con generación a carbón. La consecuencia metodológica es la que hay que enseñar: no se copian factores de emisión de otro país; se usa el factor local, y el operador del sistema (XM) publica datos de generación. Un equipo que cite una fuente colombiana en vez de un blog extranjero ya está haciendo ingeniería.</a:t>
+              <a:t>Esta es la diapositiva que salva la clase de volverse un discurso. Las cinco parejas son decisiones reales de diseño, y en las cinco la versión de la derecha cumple la misma función. Eso hay que decirlo explícitamente: no se está pidiendo sacrificar calidad por ambiente, se está pidiendo no desperdiciar.</a:t>
             </a:r>
           </a:p>
           <a:p/>
           <a:p>
             <a:r>
-              <a:t>La contracara es igual de importante y menos conocida: cuando el fenómeno de El Niño reduce los aportes a los embalses, entran las plantas térmicas y el factor de emisiones del país sube. Es decir, la misma aplicación, sin cambiar una línea de código, emite más en un año seco. Eso enseña algo que vale para todo el curso: la huella de un sistema no es una propiedad del sistema, es una propiedad del sistema en su contexto.</a:t>
+              <a:t>La primera —pedir la ubicación cada cinco segundos o cada cinco minutos— es la más fácil de entender y toca batería y red a la vez. La tercera —guardar el resultado en vez de recalcular el reporte completo en cada consulta— es la que más sorprende, porque el estudiante todavía no tiene la intuición de que el cómputo cuesta energía; sirve para conectar con la sesión 7 y con la idea de que la eficiencia no es coquetería de programador. La cuarta —sostener dispositivos viejos— es la de mayor impacto real por lo dicho sobre la fabricación. Y la quinta es la más contemporánea y hay que decirla sin miedo: agregarle un asistente de IA a una función que resolvía una condición simple gasta energía en cada llamada, para siempre. Es una decisión de arquitectura, y hoy se toma con frecuencia por moda.</a:t>
             </a:r>
           </a:p>
           <a:p/>
           <a:p>
             <a:r>
-              <a:t>La diapositiva de las trampas es la más importante para el rigor y conviene dedicarle tiempo real. Las cifras ambientales del sector digital son un campo donde circulan números espectaculares sin alcance definido: litros de agua por consulta a un modelo de lenguaje, gramos de CO₂ por búsqueda, porcentajes del consumo mundial de electricidad. Muchos provienen de estimaciones legítimas pero con supuestos muy específicos, y se citan luego como hechos universales. La regla del curso a partir de hoy es simple y se aplica en la rúbrica: cifra con fuente, año y alcance, o no va. Y hay que decir en voz alta lo que sí se puede afirmar sin exagerar: que la huella existe, que tiene cuatro etapas, que se puede reducir con decisiones de diseño y que casi nadie la mide. Con eso alcanza para trabajar con seriedad, y es mucho más defendible que un número impresionante mal citado.</a:t>
-            </a:r>
-          </a:p>
-          <a:p/>
-          <a:p>
-            <a:r>
-              <a:t>Sobre la comparación «lo digital contra el papel»: alguien la va a proponer y la respuesta correcta es que depende del número de usos y de si obliga a comprar dispositivos. Un documento leído una vez en un computador nuevo no gana contra una hoja; el mismo documento leído por trescientas personas en aparatos que ya existen, sí. La lección es que comparar sin decir qué se comparó no es un argumento.</a:t>
+              <a:t>El método de cinco pasos es el del taller. El paso 2 —buscar lo que se repite— es el que enseña a estimar: lo que ocurre una vez no mueve la aguja, lo que ocurre mil veces al día sí. Y el paso 5 —definir un indicador medible— es el que separa una intención de una decisión de ingeniería. «Vamos a ser sostenibles» no se puede verificar; «vamos a mover menos de 200 KB por consulta» sí, y en la Clase 16 se puede mirar si se cumplió.</a:t>
             </a:r>
           </a:p>
         </p:txBody>
@@ -774,6 +768,48 @@
           <a:lstStyle/>
           <a:p>
             <a:r>
+              <a:t>TEXTO COMPLETO DE LA LÁMINA (se proyecta resumido):</a:t>
+            </a:r>
+          </a:p>
+          <a:p/>
+          <a:p>
+            <a:r>
+              <a:t>Un centro de datos consume 1.600 kWh en un día.</a:t>
+            </a:r>
+          </a:p>
+          <a:p/>
+          <a:p>
+            <a:r>
+              <a:t>De esos, a los servidores —los que computan— llegan 1.000 kWh.</a:t>
+            </a:r>
+          </a:p>
+          <a:p/>
+          <a:p>
+            <a:r>
+              <a:t>PUE = 1.600 ÷ 1.000 = 1,6</a:t>
+            </a:r>
+          </a:p>
+          <a:p/>
+          <a:p>
+            <a:r>
+              <a:t>Los otros 600 kWh se van en enfriar, iluminar y en pérdidas. No computan nada.</a:t>
+            </a:r>
+          </a:p>
+          <a:p/>
+          <a:p>
+            <a:r>
+              <a:t>Un PUE de 1,0 sería perfecto. Uno de 2,0 gasta la mitad de la energía en no computar.</a:t>
+            </a:r>
+          </a:p>
+          <a:p/>
+          <a:p>
+            <a:r>
+              <a:t>Sirve para comparar: entre dos proveedores, el de PUE más bajo desperdicia menos.</a:t>
+            </a:r>
+          </a:p>
+          <a:p/>
+          <a:p>
+            <a:r>
               <a:t>No hace falta que memoricen el número. Lo que tiene que quedar es que una parte grande de la energía de un centro de datos no computa, y que hay una métrica con nombre para medirlo.</a:t>
             </a:r>
           </a:p>
@@ -914,7 +950,61 @@
           <a:lstStyle/>
           <a:p>
             <a:r>
-              <a:t>El paso 5 es el que convierte la conciencia en ingeniería: un indicador que se puede medir al final del semestre. Sin indicador, la mejora es una opinión.</a:t>
+              <a:t>TEXTO COMPLETO DE LA LÁMINA (se proyecta resumido):</a:t>
+            </a:r>
+          </a:p>
+          <a:p/>
+          <a:p>
+            <a:r>
+              <a:t>La matriz eléctrica. Buena parte de la generación del país es hidráulica, así que un kilovatio-hora consumido en Colombia tiene menos emisiones asociadas que el mismo kilovatio en un país que quema carbón. Un análisis serio no copia cifras de emisiones de otro país: usa el factor local, que publica el operador del sistema (XM).</a:t>
+            </a:r>
+          </a:p>
+          <a:p/>
+          <a:p>
+            <a:r>
+              <a:t>Y su contracara. Cuando llega el fenómeno de El Niño y baja el nivel de los embalses, entran las plantas térmicas y la misma aplicación pasa a emitir más sin cambiar una línea de código. La huella de un sistema no es un número fijo: depende de cuándo y dónde corre.</a:t>
+            </a:r>
+          </a:p>
+          <a:p/>
+          <a:p>
+            <a:r>
+              <a:t>Residuos electrónicos. La Ley 1672 de 2013 fija los lineamientos de los RAEE en Colombia: el productor tiene que ofrecer puntos de recolección y el usuario tiene el deber de usarlos. Los informes internacionales (Global E-waste Monitor) muestran que la mayor parte del residuo electrónico del mundo no se recoge formalmente, y lo que no se recoge se desarma a mano, sin protección.</a:t>
+            </a:r>
+          </a:p>
+          <a:p/>
+          <a:p>
+            <a:r>
+              <a:t>Consecuencia práctica para su proyecto: la decisión ambiental más fuerte que puede tomar un equipo de este curso casi nunca es «consumir menos batería». Es no obligar a cambiar de aparato y no mover datos que no hacen falta.</a:t>
+            </a:r>
+          </a:p>
+          <a:p/>
+          <a:p>
+            <a:r>
+              <a:t>COLOMBIA, Y LA HONESTIDAD CON LAS CIFRAS</a:t>
+            </a:r>
+          </a:p>
+          <a:p/>
+          <a:p>
+            <a:r>
+              <a:t>El dato local más útil es la composición de la matriz eléctrica. Una parte importante de la generación en Colombia es hidráulica, lo que significa que un kilovatio-hora consumido aquí tiene un factor de emisiones distinto —menor— que en un país con generación a carbón. La consecuencia metodológica es la que hay que enseñar: no se copian factores de emisión de otro país; se usa el factor local, y el operador del sistema (XM) publica datos de generación. Un equipo que cite una fuente colombiana en vez de un blog extranjero ya está haciendo ingeniería.</a:t>
+            </a:r>
+          </a:p>
+          <a:p/>
+          <a:p>
+            <a:r>
+              <a:t>La contracara es igual de importante y menos conocida: cuando el fenómeno de El Niño reduce los aportes a los embalses, entran las plantas térmicas y el factor de emisiones del país sube. Es decir, la misma aplicación, sin cambiar una línea de código, emite más en un año seco. Eso enseña algo que vale para todo el curso: la huella de un sistema no es una propiedad del sistema, es una propiedad del sistema en su contexto.</a:t>
+            </a:r>
+          </a:p>
+          <a:p/>
+          <a:p>
+            <a:r>
+              <a:t>La diapositiva de las trampas es la más importante para el rigor y conviene dedicarle tiempo real. Las cifras ambientales del sector digital son un campo donde circulan números espectaculares sin alcance definido: litros de agua por consulta a un modelo de lenguaje, gramos de CO₂ por búsqueda, porcentajes del consumo mundial de electricidad. Muchos provienen de estimaciones legítimas pero con supuestos muy específicos, y se citan luego como hechos universales. La regla del curso a partir de hoy es simple y se aplica en la rúbrica: cifra con fuente, año y alcance, o no va. Y hay que decir en voz alta lo que sí se puede afirmar sin exagerar: que la huella existe, que tiene cuatro etapas, que se puede reducir con decisiones de diseño y que casi nadie la mide. Con eso alcanza para trabajar con seriedad, y es mucho más defendible que un número impresionante mal citado.</a:t>
+            </a:r>
+          </a:p>
+          <a:p/>
+          <a:p>
+            <a:r>
+              <a:t>Sobre la comparación «lo digital contra el papel»: alguien la va a proponer y la respuesta correcta es que depende del número de usos y de si obliga a comprar dispositivos. Un documento leído una vez en un computador nuevo no gana contra una hoja; el mismo documento leído por trescientas personas en aparatos que ya existen, sí. La lección es que comparar sin decir qué se comparó no es un argumento.</a:t>
             </a:r>
           </a:p>
         </p:txBody>
@@ -984,19 +1074,7 @@
           <a:lstStyle/>
           <a:p>
             <a:r>
-              <a:t>LA PREGUNTA DE ENTRADA: DARLE MATERIA A ALGO QUE PARECE NO TENERLA</a:t>
-            </a:r>
-          </a:p>
-          <a:p/>
-          <a:p>
-            <a:r>
-              <a:t>«¿Dónde está la nube?» funciona porque casi nadie ha visto un centro de datos y porque la metáfora está diseñada para que no se piense en el edificio. La segunda parte —cuánta agua se bebió una consulta a un asistente de IA— incomoda a propósito y hay que manejarla con cuidado: la respuesta honesta es que depende del centro de datos, del modelo, del clima y del año, y que las cifras que circulan varían por órdenes de magnitud. Eso no debilita la clase: es la clase. El objetivo no es que se lleven un número, es que entiendan que hay agua y electricidad detrás de algo que se siente inmaterial, y que quien afirme un número tiene que decir de dónde salió.</a:t>
-            </a:r>
-          </a:p>
-          <a:p/>
-          <a:p>
-            <a:r>
-              <a:t>Recoja las respuestas en el muro y no las corrija. En el minuto 20, al llegar al PUE y al enfriamiento, vuelva al muro: alguien va a haber escrito «en internet» o «en un servidor», y ahí se muestra que el servidor está en un edificio que consume tanto en enfriarse como en computar.</a:t>
+              <a:t>El paso 5 es el que convierte la conciencia en ingeniería: un indicador que se puede medir al final del semestre. Sin indicador, la mejora es una opinión.</a:t>
             </a:r>
           </a:p>
         </p:txBody>
@@ -1066,43 +1144,19 @@
           <a:lstStyle/>
           <a:p>
             <a:r>
-              <a:t>LAS CUATRO ETAPAS Y POR QUÉ LA FABRICACIÓN CAMBIA LA RECOMENDACIÓN</a:t>
+              <a:t>LA PREGUNTA DE ENTRADA: DARLE MATERIA A ALGO QUE PARECE NO TENERLA</a:t>
             </a:r>
           </a:p>
           <a:p/>
           <a:p>
             <a:r>
-              <a:t>La huella material de un sistema de software se reparte en cuatro etapas y conviene recorrerlas con un ejemplo único: una aplicación de citas médicas usada desde el celular.</a:t>
+              <a:t>«¿Dónde está la nube?» funciona porque casi nadie ha visto un centro de datos y porque la metáfora está diseñada para que no se piense en el edificio. La segunda parte —cuánta agua se bebió una consulta a un asistente de IA— incomoda a propósito y hay que manejarla con cuidado: la respuesta honesta es que depende del centro de datos, del modelo, del clima y del año, y que las cifras que circulan varían por órdenes de magnitud. Eso no debilita la clase: es la clase. El objetivo no es que se lleven un número, es que entiendan que hay agua y electricidad detrás de algo que se siente inmaterial, y que quien afirme un número tiene que decir de dónde salió.</a:t>
             </a:r>
           </a:p>
           <a:p/>
           <a:p>
             <a:r>
-              <a:t>Fabricación. El celular del paciente, el computador de la secretaria y los servidores donde corre el sistema tuvieron que ser fabricados: minería de metales —incluidos varios escasos y con extracción problemática—, ensamblaje y transporte. Este es el punto que más sorprende y el más importante para las decisiones: en muchos dispositivos personales la mayor parte de la huella de toda su vida ya está gastada cuando se enciende por primera vez. La consecuencia es contraintuitiva: optimizar el consumo de batería es útil, pero alargar la vida útil del aparato pesa mucho más, y eso depende de decisiones de software.</a:t>
-            </a:r>
-          </a:p>
-          <a:p/>
-          <a:p>
-            <a:r>
-              <a:t>Uso. Electricidad del dispositivo, del servidor y —esto es lo que se olvida— del enfriamiento del centro de datos. Aquí entra el PUE.</a:t>
-            </a:r>
-          </a:p>
-          <a:p/>
-          <a:p>
-            <a:r>
-              <a:t>Red. Cada byte que viaja pasa por antenas, cables, enrutadores y equipos que consumen. No es gratis y crece con el volumen: una pantalla que carga imágenes en tamaño original mil veces al día mueve un múltiplo de lo necesario.</a:t>
-            </a:r>
-          </a:p>
-          <a:p/>
-          <a:p>
-            <a:r>
-              <a:t>Fin de vida. El aparato se vuelve residuo electrónico. Tiene metales recuperables y sustancias peligrosas, y cuando no se recoge formalmente se desarma a mano, quemando plásticos, con daño directo a las personas que lo hacen.</a:t>
-            </a:r>
-          </a:p>
-          <a:p/>
-          <a:p>
-            <a:r>
-              <a:t>El punto pedagógico de la diapositiva es que las palabras «software» y «nube» están construidas para que uno no piense en nada de esto. Nombrar las cuatro etapas es lo que permite discutir el tema con seriedad.</a:t>
+              <a:t>Recoja las respuestas en el muro y no las corrija. En el minuto 20, al llegar al PUE y al enfriamiento, vuelva al muro: alguien va a haber escrito «en internet» o «en un servidor», y ahí se muestra que el servidor está en un edificio que consume tanto en enfriarse como en computar.</a:t>
             </a:r>
           </a:p>
         </p:txBody>
@@ -1172,31 +1226,43 @@
           <a:lstStyle/>
           <a:p>
             <a:r>
-              <a:t>PUE, AGUA, RAEE Y OBSOLESCENCIA: LOS CUATRO CONCEPTOS QUE HAY QUE DEJAR</a:t>
+              <a:t>LAS CUATRO ETAPAS Y POR QUÉ LA FABRICACIÓN CAMBIA LA RECOMENDACIÓN</a:t>
             </a:r>
           </a:p>
           <a:p/>
           <a:p>
             <a:r>
-              <a:t>PUE (Power Usage Effectiveness). Es la energía total que entra al centro de datos dividida por la energía que efectivamente llega a los servidores. Si fuera 1.0, todo lo que entra se usa en computar. Un PUE de 1.6 significa que por cada vatio de cómputo se gastan 0,6 en enfriar, iluminar y en pérdidas. Los centros de datos grandes y modernos operan bastante mejor que el promedio de las salas de servidores de empresa, que suelen estar en el rango de 1.5 a 1.6 según las encuestas del sector. La idea que hay que dejar no es el número exacto: es que una parte grande de la energía de un centro de datos no computa nada, y que existe una métrica con nombre para medirlo. Un ingeniero que sabe que el PUE existe puede preguntar por él.</a:t>
+              <a:t>La huella material de un sistema de software se reparte en cuatro etapas y conviene recorrerlas con un ejemplo único: una aplicación de citas médicas usada desde el celular.</a:t>
             </a:r>
           </a:p>
           <a:p/>
           <a:p>
             <a:r>
-              <a:t>El agua. Enfriar con evaporación de agua es más barato en electricidad que enfriar con máquinas, así que muchos centros de datos usan agua. Eso traslada el costo: baja la factura de luz y sube el consumo de una cuenca que normalmente abastece a población. Es un buen ejemplo de algo que el curso repite: optimizar una variable suele mover el problema a otra, y el ingeniero tiene que saber a cuál. Hay métricas para esto (WUE, litros por kilovatio-hora), y aquí también vale la advertencia de las cifras.</a:t>
+              <a:t>Fabricación. El celular del paciente, el computador de la secretaria y los servidores donde corre el sistema tuvieron que ser fabricados: minería de metales —incluidos varios escasos y con extracción problemática—, ensamblaje y transporte. Este es el punto que más sorprende y el más importante para las decisiones: en muchos dispositivos personales la mayor parte de la huella de toda su vida ya está gastada cuando se enciende por primera vez. La consecuencia es contraintuitiva: optimizar el consumo de batería es útil, pero alargar la vida útil del aparato pesa mucho más, y eso depende de decisiones de software.</a:t>
             </a:r>
           </a:p>
           <a:p/>
           <a:p>
             <a:r>
-              <a:t>RAEE y la Ley 1672 de 2013. Es la norma colombiana que fija los lineamientos para la gestión de residuos de aparatos eléctricos y electrónicos. Lo que hay que poder decir: obliga a los productores a establecer sistemas de recolección y gestión, y establece el deber del usuario de entregar el aparato en esos puntos en vez de tirarlo a la basura común. Los informes globales de residuos electrónicos (Global E-waste Monitor, de UNITAR e ITU) reportan decenas de millones de toneladas al año y una tasa de recolección formal baja: el orden de magnitud es que la mayor parte no se recoge. Si un equipo cita una cifra exacta, exija la edición del informe y el año, porque cambia entre ediciones.</a:t>
+              <a:t>Uso. Electricidad del dispositivo, del servidor y —esto es lo que se olvida— del enfriamiento del centro de datos. Aquí entra el PUE.</a:t>
             </a:r>
           </a:p>
           <a:p/>
           <a:p>
             <a:r>
-              <a:t>Obsolescencia inducida por software. Es el concepto que más les sirve porque está bajo su control profesional. Cuando una nueva versión de una aplicación —o de un sistema operativo— deja de funcionar en dispositivos que servían, el software convierte en basura un aparato que estaba bien. No hace falta discutir si hay intención: el efecto es material y medible. Y la contracara es una decisión concreta que un equipo de este curso puede tomar: sostener el soporte para dispositivos viejos, que además es lo correcto para el contexto de la universidad, donde muchos estudiantes trabajan con equipos de varios años.</a:t>
+              <a:t>Red. Cada byte que viaja pasa por antenas, cables, enrutadores y equipos que consumen. No es gratis y crece con el volumen: una pantalla que carga imágenes en tamaño original mil veces al día mueve un múltiplo de lo necesario.</a:t>
+            </a:r>
+          </a:p>
+          <a:p/>
+          <a:p>
+            <a:r>
+              <a:t>Fin de vida. El aparato se vuelve residuo electrónico. Tiene metales recuperables y sustancias peligrosas, y cuando no se recoge formalmente se desarma a mano, quemando plásticos, con daño directo a las personas que lo hacen.</a:t>
+            </a:r>
+          </a:p>
+          <a:p/>
+          <a:p>
+            <a:r>
+              <a:t>El punto pedagógico de la diapositiva es que las palabras «software» y «nube» están construidas para que uno no piense en nada de esto. Nombrar las cuatro etapas es lo que permite discutir el tema con seriedad.</a:t>
             </a:r>
           </a:p>
         </p:txBody>
@@ -1266,25 +1332,31 @@
           <a:lstStyle/>
           <a:p>
             <a:r>
-              <a:t>DE LA CONCIENCIA A LA DECISIÓN: LA DIAPOSITIVA QUE CONVIERTE EL TEMA EN INGENIERÍA</a:t>
+              <a:t>PUE, AGUA, RAEE Y OBSOLESCENCIA: LOS CUATRO CONCEPTOS QUE HAY QUE DEJAR</a:t>
             </a:r>
           </a:p>
           <a:p/>
           <a:p>
             <a:r>
-              <a:t>Esta es la diapositiva que salva la clase de volverse un discurso. Las cinco parejas son decisiones reales de diseño, y en las cinco la versión de la derecha cumple la misma función. Eso hay que decirlo explícitamente: no se está pidiendo sacrificar calidad por ambiente, se está pidiendo no desperdiciar.</a:t>
+              <a:t>PUE (Power Usage Effectiveness). Es la energía total que entra al centro de datos dividida por la energía que efectivamente llega a los servidores. Si fuera 1.0, todo lo que entra se usa en computar. Un PUE de 1.6 significa que por cada vatio de cómputo se gastan 0,6 en enfriar, iluminar y en pérdidas. Los centros de datos grandes y modernos operan bastante mejor que el promedio de las salas de servidores de empresa, que suelen estar en el rango de 1.5 a 1.6 según las encuestas del sector. La idea que hay que dejar no es el número exacto: es que una parte grande de la energía de un centro de datos no computa nada, y que existe una métrica con nombre para medirlo. Un ingeniero que sabe que el PUE existe puede preguntar por él.</a:t>
             </a:r>
           </a:p>
           <a:p/>
           <a:p>
             <a:r>
-              <a:t>La primera —pedir la ubicación cada cinco segundos o cada cinco minutos— es la más fácil de entender y toca batería y red a la vez. La tercera —guardar el resultado en vez de recalcular el reporte completo en cada consulta— es la que más sorprende, porque el estudiante todavía no tiene la intuición de que el cómputo cuesta energía; sirve para conectar con la sesión 7 y con la idea de que la eficiencia no es coquetería de programador. La cuarta —sostener dispositivos viejos— es la de mayor impacto real por lo dicho sobre la fabricación. Y la quinta es la más contemporánea y hay que decirla sin miedo: agregarle un asistente de IA a una función que resolvía una condición simple gasta energía en cada llamada, para siempre. Es una decisión de arquitectura, y hoy se toma con frecuencia por moda.</a:t>
+              <a:t>El agua. Enfriar con evaporación de agua es más barato en electricidad que enfriar con máquinas, así que muchos centros de datos usan agua. Eso traslada el costo: baja la factura de luz y sube el consumo de una cuenca que normalmente abastece a población. Es un buen ejemplo de algo que el curso repite: optimizar una variable suele mover el problema a otra, y el ingeniero tiene que saber a cuál. Hay métricas para esto (WUE, litros por kilovatio-hora), y aquí también vale la advertencia de las cifras.</a:t>
             </a:r>
           </a:p>
           <a:p/>
           <a:p>
             <a:r>
-              <a:t>El método de cinco pasos es el del taller. El paso 2 —buscar lo que se repite— es el que enseña a estimar: lo que ocurre una vez no mueve la aguja, lo que ocurre mil veces al día sí. Y el paso 5 —definir un indicador medible— es el que separa una intención de una decisión de ingeniería. «Vamos a ser sostenibles» no se puede verificar; «vamos a mover menos de 200 KB por consulta» sí, y en la Clase 16 se puede mirar si se cumplió.</a:t>
+              <a:t>RAEE y la Ley 1672 de 2013. Es la norma colombiana que fija los lineamientos para la gestión de residuos de aparatos eléctricos y electrónicos. Lo que hay que poder decir: obliga a los productores a establecer sistemas de recolección y gestión, y establece el deber del usuario de entregar el aparato en esos puntos en vez de tirarlo a la basura común. Los informes globales de residuos electrónicos (Global E-waste Monitor, de UNITAR e ITU) reportan decenas de millones de toneladas al año y una tasa de recolección formal baja: el orden de magnitud es que la mayor parte no se recoge. Si un equipo cita una cifra exacta, exija la edición del informe y el año, porque cambia entre ediciones.</a:t>
+            </a:r>
+          </a:p>
+          <a:p/>
+          <a:p>
+            <a:r>
+              <a:t>Obsolescencia inducida por software. Es el concepto que más les sirve porque está bajo su control profesional. Cuando una nueva versión de una aplicación —o de un sistema operativo— deja de funcionar en dispositivos que servían, el software convierte en basura un aparato que estaba bien. No hace falta discutir si hay intención: el efecto es material y medible. Y la contracara es una decisión concreta que un equipo de este curso puede tomar: sostener el soporte para dispositivos viejos, que además es lo correcto para el contexto de la universidad, donde muchos estudiantes trabajan con equipos de varios años.</a:t>
             </a:r>
           </a:p>
         </p:txBody>
@@ -5485,14 +5557,83 @@
       </p:sp>
       <p:sp>
         <p:nvSpPr>
-          <p:cNvPr id="5" name="TextBox 4"/>
+          <p:cNvPr id="5" name="Rounded Rectangle 4"/>
+          <p:cNvSpPr/>
+          <p:nvPr/>
+        </p:nvSpPr>
+        <p:spPr>
+          <a:xfrm>
+            <a:off x="5797149" y="1343926"/>
+            <a:ext cx="6010497" cy="4837658"/>
+          </a:xfrm>
+          <a:prstGeom prst="roundRect">
+            <a:avLst>
+              <a:gd name="adj" fmla="val 4000"/>
+            </a:avLst>
+          </a:prstGeom>
+          <a:solidFill>
+            <a:srgbClr val="E8EEF4"/>
+          </a:solidFill>
+          <a:ln>
+            <a:noFill/>
+          </a:ln>
+        </p:spPr>
+        <p:style>
+          <a:lnRef idx="1">
+            <a:schemeClr val="accent1"/>
+          </a:lnRef>
+          <a:fillRef idx="3">
+            <a:schemeClr val="accent1"/>
+          </a:fillRef>
+          <a:effectRef idx="2">
+            <a:schemeClr val="accent1"/>
+          </a:effectRef>
+          <a:fontRef idx="minor">
+            <a:schemeClr val="lt1"/>
+          </a:fontRef>
+        </p:style>
+        <p:txBody>
+          <a:bodyPr rtlCol="0" anchor="ctr"/>
+          <a:lstStyle/>
+          <a:p>
+            <a:pPr algn="ctr"/>
+          </a:p>
+        </p:txBody>
+      </p:sp>
+      <p:pic>
+        <p:nvPicPr>
+          <p:cNvPr id="6" name="Picture 5" descr="ilus-colombia-paso1.png"/>
+          <p:cNvPicPr>
+            <a:picLocks noChangeAspect="1"/>
+          </p:cNvPicPr>
+          <p:nvPr/>
+        </p:nvPicPr>
+        <p:blipFill>
+          <a:blip r:embed="rId2"/>
+          <a:stretch>
+            <a:fillRect/>
+          </a:stretch>
+        </p:blipFill>
+        <p:spPr>
+          <a:xfrm>
+            <a:off x="5870301" y="1417078"/>
+            <a:ext cx="5864193" cy="4691354"/>
+          </a:xfrm>
+          <a:prstGeom prst="rect">
+            <a:avLst/>
+          </a:prstGeom>
+        </p:spPr>
+      </p:pic>
+      <p:sp>
+        <p:nvSpPr>
+          <p:cNvPr id="7" name="TextBox 6"/>
           <p:cNvSpPr txBox="1"/>
           <p:nvPr/>
         </p:nvSpPr>
         <p:spPr>
           <a:xfrm>
-            <a:off x="457200" y="1170432"/>
-            <a:ext cx="11277295" cy="5230368"/>
+            <a:off x="457200" y="1353312"/>
+            <a:ext cx="5093061" cy="5047488"/>
           </a:xfrm>
           <a:prstGeom prst="rect">
             <a:avLst/>
@@ -5528,51 +5669,6 @@
               </a:rPr>
               <a:t>La matriz eléctrica.</a:t>
             </a:r>
-            <a:r>
-              <a:rPr sz="2000" b="0" i="0">
-                <a:solidFill>
-                  <a:srgbClr val="333333"/>
-                </a:solidFill>
-                <a:latin typeface="Calibri"/>
-              </a:rPr>
-              <a:t> Buena parte de la generación del país es </a:t>
-            </a:r>
-            <a:r>
-              <a:rPr sz="2000" b="1" i="0">
-                <a:solidFill>
-                  <a:srgbClr val="333333"/>
-                </a:solidFill>
-                <a:latin typeface="Calibri"/>
-              </a:rPr>
-              <a:t>hidráulica</a:t>
-            </a:r>
-            <a:r>
-              <a:rPr sz="2000" b="0" i="0">
-                <a:solidFill>
-                  <a:srgbClr val="333333"/>
-                </a:solidFill>
-                <a:latin typeface="Calibri"/>
-              </a:rPr>
-              <a:t>, así que un kilovatio-hora consumido en Colombia tiene menos emisiones asociadas que el mismo kilovatio en un país que quema carbón. Un análisis serio no copia cifras de emisiones de otro país: </a:t>
-            </a:r>
-            <a:r>
-              <a:rPr sz="2000" b="1" i="0">
-                <a:solidFill>
-                  <a:srgbClr val="333333"/>
-                </a:solidFill>
-                <a:latin typeface="Calibri"/>
-              </a:rPr>
-              <a:t>usa el factor local</a:t>
-            </a:r>
-            <a:r>
-              <a:rPr sz="2000" b="0" i="0">
-                <a:solidFill>
-                  <a:srgbClr val="333333"/>
-                </a:solidFill>
-                <a:latin typeface="Calibri"/>
-              </a:rPr>
-              <a:t>, que publica el operador del sistema (XM).</a:t>
-            </a:r>
           </a:p>
           <a:p>
             <a:pPr>
@@ -5598,33 +5694,6 @@
               </a:rPr>
               <a:t>Y su contracara.</a:t>
             </a:r>
-            <a:r>
-              <a:rPr sz="2000" b="0" i="0">
-                <a:solidFill>
-                  <a:srgbClr val="333333"/>
-                </a:solidFill>
-                <a:latin typeface="Calibri"/>
-              </a:rPr>
-              <a:t> Cuando llega el fenómeno de El Niño y baja el nivel de los embalses, entran las plantas térmicas y </a:t>
-            </a:r>
-            <a:r>
-              <a:rPr sz="2000" b="1" i="0">
-                <a:solidFill>
-                  <a:srgbClr val="333333"/>
-                </a:solidFill>
-                <a:latin typeface="Calibri"/>
-              </a:rPr>
-              <a:t>la misma aplicación pasa a emitir más sin cambiar una línea de código</a:t>
-            </a:r>
-            <a:r>
-              <a:rPr sz="2000" b="0" i="0">
-                <a:solidFill>
-                  <a:srgbClr val="333333"/>
-                </a:solidFill>
-                <a:latin typeface="Calibri"/>
-              </a:rPr>
-              <a:t>. La huella de un sistema no es un número fijo: depende de cuándo y dónde corre.</a:t>
-            </a:r>
           </a:p>
           <a:p>
             <a:pPr>
@@ -5675,25 +5744,7 @@
                 </a:solidFill>
                 <a:latin typeface="Calibri"/>
               </a:rPr>
-              <a:t> fija los lineamientos de los RAEE en Colombia: el productor tiene que ofrecer puntos de recolección y el usuario tiene el deber de usarlos. Los informes internacionales (Global E-waste Monitor) muestran que </a:t>
-            </a:r>
-            <a:r>
-              <a:rPr sz="2000" b="1" i="0">
-                <a:solidFill>
-                  <a:srgbClr val="333333"/>
-                </a:solidFill>
-                <a:latin typeface="Calibri"/>
-              </a:rPr>
-              <a:t>la mayor parte del residuo electrónico del mundo no se recoge formalmente</a:t>
-            </a:r>
-            <a:r>
-              <a:rPr sz="2000" b="0" i="0">
-                <a:solidFill>
-                  <a:srgbClr val="333333"/>
-                </a:solidFill>
-                <a:latin typeface="Calibri"/>
-              </a:rPr>
-              <a:t>, y lo que no se recoge se desarma a mano, sin protección.</a:t>
+              <a:t> fija los lineamientos de los RAEE en Colombia:</a:t>
             </a:r>
           </a:p>
           <a:p>
@@ -5727,50 +5778,14 @@
                 </a:solidFill>
                 <a:latin typeface="Calibri"/>
               </a:rPr>
-              <a:t> la decisión ambiental más fuerte que puede tomar un equipo de este curso casi nunca es «consumir menos batería». Es </a:t>
-            </a:r>
-            <a:r>
-              <a:rPr sz="2000" b="1" i="0">
-                <a:solidFill>
-                  <a:srgbClr val="333333"/>
-                </a:solidFill>
-                <a:latin typeface="Calibri"/>
-              </a:rPr>
-              <a:t>no obligar a cambiar de aparato</a:t>
-            </a:r>
-            <a:r>
-              <a:rPr sz="2000" b="0" i="0">
-                <a:solidFill>
-                  <a:srgbClr val="333333"/>
-                </a:solidFill>
-                <a:latin typeface="Calibri"/>
-              </a:rPr>
-              <a:t> y </a:t>
-            </a:r>
-            <a:r>
-              <a:rPr sz="2000" b="1" i="0">
-                <a:solidFill>
-                  <a:srgbClr val="333333"/>
-                </a:solidFill>
-                <a:latin typeface="Calibri"/>
-              </a:rPr>
-              <a:t>no mover datos que no hacen falta</a:t>
-            </a:r>
-            <a:r>
-              <a:rPr sz="2000" b="0" i="0">
-                <a:solidFill>
-                  <a:srgbClr val="333333"/>
-                </a:solidFill>
-                <a:latin typeface="Calibri"/>
-              </a:rPr>
-              <a:t>.</a:t>
-            </a:r>
-          </a:p>
-        </p:txBody>
-      </p:sp>
-      <p:sp>
-        <p:nvSpPr>
-          <p:cNvPr id="6" name="TextBox 5"/>
+              <a:t> la decisión ambiental más fuerte que puede tomar un equipo de este curso casi nunca es…</a:t>
+            </a:r>
+          </a:p>
+        </p:txBody>
+      </p:sp>
+      <p:sp>
+        <p:nvSpPr>
+          <p:cNvPr id="8" name="TextBox 7"/>
           <p:cNvSpPr txBox="1"/>
           <p:nvPr/>
         </p:nvSpPr>
@@ -7170,3047 +7185,9 @@
           </a:prstGeom>
         </p:spPr>
       </p:pic>
-      <p:sp>
-        <p:nvSpPr>
-          <p:cNvPr id="13" name="TextBox 12"/>
-          <p:cNvSpPr txBox="1"/>
-          <p:nvPr/>
-        </p:nvSpPr>
-        <p:spPr>
-          <a:xfrm>
-            <a:off x="5870301" y="5961888"/>
-            <a:ext cx="5864193" cy="320040"/>
-          </a:xfrm>
-          <a:prstGeom prst="rect">
-            <a:avLst/>
-          </a:prstGeom>
-          <a:noFill/>
-        </p:spPr>
-        <p:txBody>
-          <a:bodyPr wrap="square">
-            <a:spAutoFit/>
-          </a:bodyPr>
-          <a:lstStyle/>
-          <a:p>
-            <a:pPr algn="ctr"/>
-            <a:r>
-              <a:rPr sz="1100" b="0" i="1">
-                <a:solidFill>
-                  <a:srgbClr val="666666"/>
-                </a:solidFill>
-                <a:latin typeface="Calibri"/>
-              </a:rPr>
-              <a:t>Clic para avanzar la animación</a:t>
-            </a:r>
-          </a:p>
-        </p:txBody>
-      </p:sp>
-      <p:sp>
-        <p:nvSpPr>
-          <p:cNvPr id="14" name="TextBox 13"/>
-          <p:cNvSpPr txBox="1"/>
-          <p:nvPr/>
-        </p:nvSpPr>
-        <p:spPr>
-          <a:xfrm>
-            <a:off x="457200" y="1563624"/>
-            <a:ext cx="5093061" cy="4837176"/>
-          </a:xfrm>
-          <a:prstGeom prst="rect">
-            <a:avLst/>
-          </a:prstGeom>
-          <a:noFill/>
-        </p:spPr>
-        <p:txBody>
-          <a:bodyPr wrap="square">
-            <a:spAutoFit/>
-          </a:bodyPr>
-          <a:lstStyle/>
-          <a:p>
-            <a:pPr>
-              <a:spcAft>
-                <a:spcPts val="800"/>
-              </a:spcAft>
-            </a:pPr>
-            <a:r>
-              <a:rPr sz="2000" b="0" i="0">
-                <a:solidFill>
-                  <a:srgbClr val="333333"/>
-                </a:solidFill>
-                <a:latin typeface="Calibri"/>
-              </a:rPr>
-              <a:t>–   </a:t>
-            </a:r>
-            <a:r>
-              <a:rPr sz="2000" b="1" i="0">
-                <a:solidFill>
-                  <a:srgbClr val="333333"/>
-                </a:solidFill>
-                <a:latin typeface="Calibri"/>
-              </a:rPr>
-              <a:t>1 · El recorrido:</a:t>
-            </a:r>
-            <a:r>
-              <a:rPr sz="2000" b="0" i="0">
-                <a:solidFill>
-                  <a:srgbClr val="333333"/>
-                </a:solidFill>
-                <a:latin typeface="Calibri"/>
-              </a:rPr>
-              <a:t> Computador de la tienda → internet → servidor → base de datos.</a:t>
-            </a:r>
-          </a:p>
-          <a:p>
-            <a:pPr>
-              <a:spcAft>
-                <a:spcPts val="800"/>
-              </a:spcAft>
-            </a:pPr>
-            <a:r>
-              <a:rPr sz="2000" b="0" i="0">
-                <a:solidFill>
-                  <a:srgbClr val="333333"/>
-                </a:solidFill>
-                <a:latin typeface="Calibri"/>
-              </a:rPr>
-              <a:t>–   </a:t>
-            </a:r>
-            <a:r>
-              <a:rPr sz="2000" b="1" i="0">
-                <a:solidFill>
-                  <a:srgbClr val="333333"/>
-                </a:solidFill>
-                <a:latin typeface="Calibri"/>
-              </a:rPr>
-              <a:t>2 · Lo que se repite:</a:t>
-            </a:r>
-            <a:r>
-              <a:rPr sz="2000" b="0" i="0">
-                <a:solidFill>
-                  <a:srgbClr val="333333"/>
-                </a:solidFill>
-                <a:latin typeface="Calibri"/>
-              </a:rPr>
-              <a:t> El reporte se genera completo cada vez que alguien lo abre: 40 veces al día.</a:t>
-            </a:r>
-          </a:p>
-          <a:p>
-            <a:pPr>
-              <a:spcAft>
-                <a:spcPts val="800"/>
-              </a:spcAft>
-            </a:pPr>
-            <a:r>
-              <a:rPr sz="2000" b="0" i="0">
-                <a:solidFill>
-                  <a:srgbClr val="333333"/>
-                </a:solidFill>
-                <a:latin typeface="Calibri"/>
-              </a:rPr>
-              <a:t>–   </a:t>
-            </a:r>
-            <a:r>
-              <a:rPr sz="2000" b="1" i="0">
-                <a:solidFill>
-                  <a:srgbClr val="333333"/>
-                </a:solidFill>
-                <a:latin typeface="Calibri"/>
-              </a:rPr>
-              <a:t>3 · La etapa más pesada:</a:t>
-            </a:r>
-            <a:r>
-              <a:rPr sz="2000" b="0" i="0">
-                <a:solidFill>
-                  <a:srgbClr val="333333"/>
-                </a:solidFill>
-                <a:latin typeface="Calibri"/>
-              </a:rPr>
-              <a:t> El servidor: recalcula todo el mes, 40 veces, aunque nada cambió.</a:t>
-            </a:r>
-          </a:p>
-          <a:p>
-            <a:pPr>
-              <a:spcAft>
-                <a:spcPts val="800"/>
-              </a:spcAft>
-            </a:pPr>
-            <a:r>
-              <a:rPr sz="2000" b="0" i="0">
-                <a:solidFill>
-                  <a:srgbClr val="333333"/>
-                </a:solidFill>
-                <a:latin typeface="Calibri"/>
-              </a:rPr>
-              <a:t>–   </a:t>
-            </a:r>
-            <a:r>
-              <a:rPr sz="2000" b="1" i="0">
-                <a:solidFill>
-                  <a:srgbClr val="333333"/>
-                </a:solidFill>
-                <a:latin typeface="Calibri"/>
-              </a:rPr>
-              <a:t>4 · Dos decisiones:</a:t>
-            </a:r>
-            <a:r>
-              <a:rPr sz="2000" b="0" i="0">
-                <a:solidFill>
-                  <a:srgbClr val="333333"/>
-                </a:solidFill>
-                <a:latin typeface="Calibri"/>
-              </a:rPr>
-              <a:t> Guardar el resultado y recalcular solo si hay ventas nuevas. Abrir solo el día, no el mes.</a:t>
-            </a:r>
-          </a:p>
-        </p:txBody>
-      </p:sp>
-      <p:sp>
-        <p:nvSpPr>
-          <p:cNvPr id="15" name="TextBox 14"/>
-          <p:cNvSpPr txBox="1"/>
-          <p:nvPr/>
-        </p:nvSpPr>
-        <p:spPr>
-          <a:xfrm>
-            <a:off x="11185855" y="6473952"/>
-            <a:ext cx="640080" cy="274320"/>
-          </a:xfrm>
-          <a:prstGeom prst="rect">
-            <a:avLst/>
-          </a:prstGeom>
-          <a:noFill/>
-        </p:spPr>
-        <p:txBody>
-          <a:bodyPr wrap="square">
-            <a:spAutoFit/>
-          </a:bodyPr>
-          <a:lstStyle/>
-          <a:p>
-            <a:pPr algn="r"/>
-            <a:r>
-              <a:rPr sz="1100" b="0" i="0">
-                <a:solidFill>
-                  <a:srgbClr val="666666"/>
-                </a:solidFill>
-                <a:latin typeface="Calibri"/>
-              </a:rPr>
-              <a:t>13</a:t>
-            </a:r>
-          </a:p>
-        </p:txBody>
-      </p:sp>
-    </p:spTree>
-  </p:cSld>
-  <p:clrMapOvr>
-    <a:masterClrMapping/>
-  </p:clrMapOvr>
-  <p:timing>
-    <p:tnLst>
-      <p:par>
-        <p:cTn id="1" dur="indefinite" restart="never" nodeType="tmRoot">
-          <p:childTnLst>
-            <p:seq concurrent="1" nextAc="seek">
-              <p:cTn id="2" dur="indefinite" nodeType="mainSeq">
-                <p:childTnLst>
-                  <p:par>
-                    <p:cTn id="3" fill="hold">
-                      <p:stCondLst>
-                        <p:cond delay="indefinite"/>
-                      </p:stCondLst>
-                      <p:childTnLst>
-                        <p:par>
-                          <p:cTn id="4" fill="hold">
-                            <p:stCondLst>
-                              <p:cond delay="0"/>
-                            </p:stCondLst>
-                            <p:childTnLst>
-                              <p:par>
-                                <p:cTn id="5" presetID="10" presetClass="entr" presetSubtype="0" fill="hold" nodeType="clickEffect">
-                                  <p:stCondLst>
-                                    <p:cond delay="0"/>
-                                  </p:stCondLst>
-                                  <p:childTnLst>
-                                    <p:set>
-                                      <p:cBhvr>
-                                        <p:cTn id="6" dur="1" fill="hold">
-                                          <p:stCondLst>
-                                            <p:cond delay="0"/>
-                                          </p:stCondLst>
-                                        </p:cTn>
-                                        <p:tgtEl>
-                                          <p:spTgt spid="8"/>
-                                        </p:tgtEl>
-                                        <p:attrNameLst>
-                                          <p:attrName>style.visibility</p:attrName>
-                                        </p:attrNameLst>
-                                      </p:cBhvr>
-                                      <p:to>
-                                        <p:strVal val="visible"/>
-                                      </p:to>
-                                    </p:set>
-                                    <p:animEffect transition="in" filter="fade">
-                                      <p:cBhvr>
-                                        <p:cTn id="7" dur="450"/>
-                                        <p:tgtEl>
-                                          <p:spTgt spid="8"/>
-                                        </p:tgtEl>
-                                      </p:cBhvr>
-                                    </p:animEffect>
-                                  </p:childTnLst>
-                                </p:cTn>
-                              </p:par>
-                            </p:childTnLst>
-                          </p:cTn>
-                        </p:par>
-                      </p:childTnLst>
-                    </p:cTn>
-                  </p:par>
-                  <p:par>
-                    <p:cTn id="8" fill="hold">
-                      <p:stCondLst>
-                        <p:cond delay="indefinite"/>
-                      </p:stCondLst>
-                      <p:childTnLst>
-                        <p:par>
-                          <p:cTn id="9" fill="hold">
-                            <p:stCondLst>
-                              <p:cond delay="0"/>
-                            </p:stCondLst>
-                            <p:childTnLst>
-                              <p:par>
-                                <p:cTn id="10" presetID="10" presetClass="entr" presetSubtype="0" fill="hold" nodeType="clickEffect">
-                                  <p:stCondLst>
-                                    <p:cond delay="0"/>
-                                  </p:stCondLst>
-                                  <p:childTnLst>
-                                    <p:set>
-                                      <p:cBhvr>
-                                        <p:cTn id="11" dur="1" fill="hold">
-                                          <p:stCondLst>
-                                            <p:cond delay="0"/>
-                                          </p:stCondLst>
-                                        </p:cTn>
-                                        <p:tgtEl>
-                                          <p:spTgt spid="9"/>
-                                        </p:tgtEl>
-                                        <p:attrNameLst>
-                                          <p:attrName>style.visibility</p:attrName>
-                                        </p:attrNameLst>
-                                      </p:cBhvr>
-                                      <p:to>
-                                        <p:strVal val="visible"/>
-                                      </p:to>
-                                    </p:set>
-                                    <p:animEffect transition="in" filter="fade">
-                                      <p:cBhvr>
-                                        <p:cTn id="12" dur="450"/>
-                                        <p:tgtEl>
-                                          <p:spTgt spid="9"/>
-                                        </p:tgtEl>
-                                      </p:cBhvr>
-                                    </p:animEffect>
-                                  </p:childTnLst>
-                                </p:cTn>
-                              </p:par>
-                            </p:childTnLst>
-                          </p:cTn>
-                        </p:par>
-                      </p:childTnLst>
-                    </p:cTn>
-                  </p:par>
-                </p:childTnLst>
-              </p:cTn>
-              <p:prevCondLst>
-                <p:cond evt="onPrev" delay="0">
-                  <p:tgtEl>
-                    <p:sldTgt/>
-                  </p:tgtEl>
-                </p:cond>
-              </p:prevCondLst>
-              <p:nextCondLst>
-                <p:cond evt="onNext" delay="0">
-                  <p:tgtEl>
-                    <p:sldTgt/>
-                  </p:tgtEl>
-                </p:cond>
-              </p:nextCondLst>
-            </p:seq>
-          </p:childTnLst>
-        </p:cTn>
-      </p:par>
-    </p:tnLst>
-  </p:timing>
-</p:sld>
-</file>
-
-<file path=ppt/slides/slide14.xml><?xml version="1.0" encoding="utf-8"?>
-<p:sld xmlns:a="http://schemas.openxmlformats.org/drawingml/2006/main" xmlns:p="http://schemas.openxmlformats.org/presentationml/2006/main" xmlns:r="http://schemas.openxmlformats.org/officeDocument/2006/relationships">
-  <p:cSld>
-    <p:bg>
-      <p:bgPr>
-        <a:solidFill>
-          <a:srgbClr val="FFFFFF"/>
-        </a:solidFill>
-        <a:effectLst/>
-      </p:bgPr>
-    </p:bg>
-    <p:spTree>
-      <p:nvGrpSpPr>
-        <p:cNvPr id="1" name=""/>
-        <p:cNvGrpSpPr/>
-        <p:nvPr/>
-      </p:nvGrpSpPr>
-      <p:grpSpPr/>
-      <p:sp>
-        <p:nvSpPr>
-          <p:cNvPr id="2" name="Rectangle 1"/>
-          <p:cNvSpPr/>
-          <p:nvPr/>
-        </p:nvSpPr>
-        <p:spPr>
-          <a:xfrm>
-            <a:off x="0" y="0"/>
-            <a:ext cx="12191695" cy="960120"/>
-          </a:xfrm>
-          <a:prstGeom prst="rect">
-            <a:avLst/>
-          </a:prstGeom>
-          <a:solidFill>
-            <a:srgbClr val="095292"/>
-          </a:solidFill>
-          <a:ln>
-            <a:noFill/>
-          </a:ln>
-        </p:spPr>
-        <p:style>
-          <a:lnRef idx="1">
-            <a:schemeClr val="accent1"/>
-          </a:lnRef>
-          <a:fillRef idx="3">
-            <a:schemeClr val="accent1"/>
-          </a:fillRef>
-          <a:effectRef idx="2">
-            <a:schemeClr val="accent1"/>
-          </a:effectRef>
-          <a:fontRef idx="minor">
-            <a:schemeClr val="lt1"/>
-          </a:fontRef>
-        </p:style>
-        <p:txBody>
-          <a:bodyPr rtlCol="0" anchor="ctr"/>
-          <a:lstStyle/>
-          <a:p>
-            <a:pPr algn="ctr"/>
-          </a:p>
-        </p:txBody>
-      </p:sp>
-      <p:sp>
-        <p:nvSpPr>
-          <p:cNvPr id="3" name="Rectangle 2"/>
-          <p:cNvSpPr/>
-          <p:nvPr/>
-        </p:nvSpPr>
-        <p:spPr>
-          <a:xfrm>
-            <a:off x="0" y="960120"/>
-            <a:ext cx="12191695" cy="41148"/>
-          </a:xfrm>
-          <a:prstGeom prst="rect">
-            <a:avLst/>
-          </a:prstGeom>
-          <a:solidFill>
-            <a:srgbClr val="FFD000"/>
-          </a:solidFill>
-          <a:ln>
-            <a:noFill/>
-          </a:ln>
-        </p:spPr>
-        <p:style>
-          <a:lnRef idx="1">
-            <a:schemeClr val="accent1"/>
-          </a:lnRef>
-          <a:fillRef idx="3">
-            <a:schemeClr val="accent1"/>
-          </a:fillRef>
-          <a:effectRef idx="2">
-            <a:schemeClr val="accent1"/>
-          </a:effectRef>
-          <a:fontRef idx="minor">
-            <a:schemeClr val="lt1"/>
-          </a:fontRef>
-        </p:style>
-        <p:txBody>
-          <a:bodyPr rtlCol="0" anchor="ctr"/>
-          <a:lstStyle/>
-          <a:p>
-            <a:pPr algn="ctr"/>
-          </a:p>
-        </p:txBody>
-      </p:sp>
-      <p:sp>
-        <p:nvSpPr>
-          <p:cNvPr id="4" name="TextBox 3"/>
-          <p:cNvSpPr txBox="1"/>
-          <p:nvPr/>
-        </p:nvSpPr>
-        <p:spPr>
-          <a:xfrm>
-            <a:off x="457200" y="164592"/>
-            <a:ext cx="11277295" cy="502920"/>
-          </a:xfrm>
-          <a:prstGeom prst="rect">
-            <a:avLst/>
-          </a:prstGeom>
-          <a:noFill/>
-        </p:spPr>
-        <p:txBody>
-          <a:bodyPr wrap="square">
-            <a:spAutoFit/>
-          </a:bodyPr>
-          <a:lstStyle/>
-          <a:p>
-            <a:r>
-              <a:rPr sz="2600" b="1" i="0">
-                <a:solidFill>
-                  <a:srgbClr val="FFFFFF"/>
-                </a:solidFill>
-                <a:latin typeface="Calibri"/>
-              </a:rPr>
-              <a:t>Dos trampas de esta clase</a:t>
-            </a:r>
-          </a:p>
-        </p:txBody>
-      </p:sp>
-      <p:sp>
-        <p:nvSpPr>
-          <p:cNvPr id="5" name="Rounded Rectangle 4"/>
-          <p:cNvSpPr/>
-          <p:nvPr/>
-        </p:nvSpPr>
-        <p:spPr>
-          <a:xfrm>
-            <a:off x="457200" y="1261872"/>
-            <a:ext cx="11277295" cy="1051560"/>
-          </a:xfrm>
-          <a:prstGeom prst="roundRect">
-            <a:avLst>
-              <a:gd name="adj" fmla="val 12000"/>
-            </a:avLst>
-          </a:prstGeom>
-          <a:solidFill>
-            <a:srgbClr val="FBE4E4"/>
-          </a:solidFill>
-          <a:ln>
-            <a:noFill/>
-          </a:ln>
-        </p:spPr>
-        <p:style>
-          <a:lnRef idx="1">
-            <a:schemeClr val="accent1"/>
-          </a:lnRef>
-          <a:fillRef idx="3">
-            <a:schemeClr val="accent1"/>
-          </a:fillRef>
-          <a:effectRef idx="2">
-            <a:schemeClr val="accent1"/>
-          </a:effectRef>
-          <a:fontRef idx="minor">
-            <a:schemeClr val="lt1"/>
-          </a:fontRef>
-        </p:style>
-        <p:txBody>
-          <a:bodyPr rtlCol="0" anchor="ctr"/>
-          <a:lstStyle/>
-          <a:p>
-            <a:pPr algn="ctr"/>
-          </a:p>
-        </p:txBody>
-      </p:sp>
-      <p:sp>
-        <p:nvSpPr>
-          <p:cNvPr id="6" name="Rectangle 5"/>
-          <p:cNvSpPr/>
-          <p:nvPr/>
-        </p:nvSpPr>
-        <p:spPr>
-          <a:xfrm>
-            <a:off x="457200" y="1261872"/>
-            <a:ext cx="128016" cy="1051560"/>
-          </a:xfrm>
-          <a:prstGeom prst="rect">
-            <a:avLst/>
-          </a:prstGeom>
-          <a:solidFill>
-            <a:srgbClr val="A02030"/>
-          </a:solidFill>
-          <a:ln>
-            <a:noFill/>
-          </a:ln>
-        </p:spPr>
-        <p:style>
-          <a:lnRef idx="1">
-            <a:schemeClr val="accent1"/>
-          </a:lnRef>
-          <a:fillRef idx="3">
-            <a:schemeClr val="accent1"/>
-          </a:fillRef>
-          <a:effectRef idx="2">
-            <a:schemeClr val="accent1"/>
-          </a:effectRef>
-          <a:fontRef idx="minor">
-            <a:schemeClr val="lt1"/>
-          </a:fontRef>
-        </p:style>
-        <p:txBody>
-          <a:bodyPr rtlCol="0" anchor="ctr"/>
-          <a:lstStyle/>
-          <a:p>
-            <a:pPr algn="ctr"/>
-          </a:p>
-        </p:txBody>
-      </p:sp>
-      <p:sp>
-        <p:nvSpPr>
-          <p:cNvPr id="7" name="TextBox 6"/>
-          <p:cNvSpPr txBox="1"/>
-          <p:nvPr/>
-        </p:nvSpPr>
-        <p:spPr>
-          <a:xfrm>
-            <a:off x="777240" y="1399031"/>
-            <a:ext cx="10774375" cy="822959"/>
-          </a:xfrm>
-          <a:prstGeom prst="rect">
-            <a:avLst/>
-          </a:prstGeom>
-          <a:noFill/>
-        </p:spPr>
-        <p:txBody>
-          <a:bodyPr wrap="square">
-            <a:spAutoFit/>
-          </a:bodyPr>
-          <a:lstStyle/>
-          <a:p>
-            <a:r>
-              <a:rPr sz="1200" b="1" i="0">
-                <a:solidFill>
-                  <a:srgbClr val="A02030"/>
-                </a:solidFill>
-                <a:latin typeface="Calibri"/>
-              </a:rPr>
-              <a:t>Atención</a:t>
-            </a:r>
-          </a:p>
-          <a:p>
-            <a:pPr>
-              <a:spcBef>
-                <a:spcPts val="400"/>
-              </a:spcBef>
-            </a:pPr>
-            <a:r>
-              <a:rPr sz="1400" b="1" i="0">
-                <a:solidFill>
-                  <a:srgbClr val="333333"/>
-                </a:solidFill>
-                <a:latin typeface="Calibri"/>
-              </a:rPr>
-              <a:t>Las cifras ambientales son el terreno favorito de la invención.</a:t>
-            </a:r>
-            <a:r>
-              <a:rPr sz="1400" b="0" i="0">
-                <a:solidFill>
-                  <a:srgbClr val="333333"/>
-                </a:solidFill>
-                <a:latin typeface="Calibri"/>
-              </a:rPr>
-              <a:t> Circulan números de litros de agua por consulta y de gramos de CO₂ por búsqueda que cambian por órdenes de magnitud entre fuentes, y muchos se citan sin decir de qué sistema ni de qué año son. Hoy </a:t>
-            </a:r>
-            <a:r>
-              <a:rPr sz="1400" b="1" i="0">
-                <a:solidFill>
-                  <a:srgbClr val="333333"/>
-                </a:solidFill>
-                <a:latin typeface="Calibri"/>
-              </a:rPr>
-              <a:t>toda cifra va con fuente, año y alcance</a:t>
-            </a:r>
-            <a:r>
-              <a:rPr sz="1400" b="0" i="0">
-                <a:solidFill>
-                  <a:srgbClr val="333333"/>
-                </a:solidFill>
-                <a:latin typeface="Calibri"/>
-              </a:rPr>
-              <a:t> — o no va.</a:t>
-            </a:r>
-          </a:p>
-        </p:txBody>
-      </p:sp>
-      <p:sp>
-        <p:nvSpPr>
-          <p:cNvPr id="8" name="Rounded Rectangle 7"/>
-          <p:cNvSpPr/>
-          <p:nvPr/>
-        </p:nvSpPr>
-        <p:spPr>
-          <a:xfrm>
-            <a:off x="457200" y="2478024"/>
-            <a:ext cx="11277295" cy="1051560"/>
-          </a:xfrm>
-          <a:prstGeom prst="roundRect">
-            <a:avLst>
-              <a:gd name="adj" fmla="val 12000"/>
-            </a:avLst>
-          </a:prstGeom>
-          <a:solidFill>
-            <a:srgbClr val="FFF8E1"/>
-          </a:solidFill>
-          <a:ln>
-            <a:noFill/>
-          </a:ln>
-        </p:spPr>
-        <p:style>
-          <a:lnRef idx="1">
-            <a:schemeClr val="accent1"/>
-          </a:lnRef>
-          <a:fillRef idx="3">
-            <a:schemeClr val="accent1"/>
-          </a:fillRef>
-          <a:effectRef idx="2">
-            <a:schemeClr val="accent1"/>
-          </a:effectRef>
-          <a:fontRef idx="minor">
-            <a:schemeClr val="lt1"/>
-          </a:fontRef>
-        </p:style>
-        <p:txBody>
-          <a:bodyPr rtlCol="0" anchor="ctr"/>
-          <a:lstStyle/>
-          <a:p>
-            <a:pPr algn="ctr"/>
-          </a:p>
-        </p:txBody>
-      </p:sp>
-      <p:sp>
-        <p:nvSpPr>
-          <p:cNvPr id="9" name="Rectangle 8"/>
-          <p:cNvSpPr/>
-          <p:nvPr/>
-        </p:nvSpPr>
-        <p:spPr>
-          <a:xfrm>
-            <a:off x="457200" y="2478024"/>
-            <a:ext cx="128016" cy="1051560"/>
-          </a:xfrm>
-          <a:prstGeom prst="rect">
-            <a:avLst/>
-          </a:prstGeom>
-          <a:solidFill>
-            <a:srgbClr val="FFD000"/>
-          </a:solidFill>
-          <a:ln>
-            <a:noFill/>
-          </a:ln>
-        </p:spPr>
-        <p:style>
-          <a:lnRef idx="1">
-            <a:schemeClr val="accent1"/>
-          </a:lnRef>
-          <a:fillRef idx="3">
-            <a:schemeClr val="accent1"/>
-          </a:fillRef>
-          <a:effectRef idx="2">
-            <a:schemeClr val="accent1"/>
-          </a:effectRef>
-          <a:fontRef idx="minor">
-            <a:schemeClr val="lt1"/>
-          </a:fontRef>
-        </p:style>
-        <p:txBody>
-          <a:bodyPr rtlCol="0" anchor="ctr"/>
-          <a:lstStyle/>
-          <a:p>
-            <a:pPr algn="ctr"/>
-          </a:p>
-        </p:txBody>
-      </p:sp>
-      <p:sp>
-        <p:nvSpPr>
-          <p:cNvPr id="10" name="TextBox 9"/>
-          <p:cNvSpPr txBox="1"/>
-          <p:nvPr/>
-        </p:nvSpPr>
-        <p:spPr>
-          <a:xfrm>
-            <a:off x="777240" y="2615184"/>
-            <a:ext cx="10774375" cy="822959"/>
-          </a:xfrm>
-          <a:prstGeom prst="rect">
-            <a:avLst/>
-          </a:prstGeom>
-          <a:noFill/>
-        </p:spPr>
-        <p:txBody>
-          <a:bodyPr wrap="square">
-            <a:spAutoFit/>
-          </a:bodyPr>
-          <a:lstStyle/>
-          <a:p>
-            <a:r>
-              <a:rPr sz="1200" b="1" i="0">
-                <a:solidFill>
-                  <a:srgbClr val="FFD000"/>
-                </a:solidFill>
-                <a:latin typeface="Calibri"/>
-              </a:rPr>
-              <a:t>Aclaración</a:t>
-            </a:r>
-          </a:p>
-          <a:p>
-            <a:pPr>
-              <a:spcBef>
-                <a:spcPts val="400"/>
-              </a:spcBef>
-            </a:pPr>
-            <a:r>
-              <a:rPr sz="1400" b="1" i="0">
-                <a:solidFill>
-                  <a:srgbClr val="333333"/>
-                </a:solidFill>
-                <a:latin typeface="Calibri"/>
-              </a:rPr>
-              <a:t>«Lo digital contamina menos que el papel» no es una respuesta.</a:t>
-            </a:r>
-            <a:r>
-              <a:rPr sz="1400" b="0" i="0">
-                <a:solidFill>
-                  <a:srgbClr val="333333"/>
-                </a:solidFill>
-                <a:latin typeface="Calibri"/>
-              </a:rPr>
-              <a:t> A veces sí y a veces no: depende del número de usos, del dispositivo y de si obliga a comprar aparatos nuevos. Comparar sirve solo si se dice qué se comparó.</a:t>
-            </a:r>
-          </a:p>
-        </p:txBody>
-      </p:sp>
-      <p:sp>
-        <p:nvSpPr>
-          <p:cNvPr id="11" name="Rounded Rectangle 10"/>
-          <p:cNvSpPr/>
-          <p:nvPr/>
-        </p:nvSpPr>
-        <p:spPr>
-          <a:xfrm>
-            <a:off x="457200" y="3694176"/>
-            <a:ext cx="11277295" cy="1051560"/>
-          </a:xfrm>
-          <a:prstGeom prst="roundRect">
-            <a:avLst>
-              <a:gd name="adj" fmla="val 12000"/>
-            </a:avLst>
-          </a:prstGeom>
-          <a:solidFill>
-            <a:srgbClr val="E8F4FA"/>
-          </a:solidFill>
-          <a:ln>
-            <a:noFill/>
-          </a:ln>
-        </p:spPr>
-        <p:style>
-          <a:lnRef idx="1">
-            <a:schemeClr val="accent1"/>
-          </a:lnRef>
-          <a:fillRef idx="3">
-            <a:schemeClr val="accent1"/>
-          </a:fillRef>
-          <a:effectRef idx="2">
-            <a:schemeClr val="accent1"/>
-          </a:effectRef>
-          <a:fontRef idx="minor">
-            <a:schemeClr val="lt1"/>
-          </a:fontRef>
-        </p:style>
-        <p:txBody>
-          <a:bodyPr rtlCol="0" anchor="ctr"/>
-          <a:lstStyle/>
-          <a:p>
-            <a:pPr algn="ctr"/>
-          </a:p>
-        </p:txBody>
-      </p:sp>
-      <p:sp>
-        <p:nvSpPr>
-          <p:cNvPr id="12" name="Rectangle 11"/>
-          <p:cNvSpPr/>
-          <p:nvPr/>
-        </p:nvSpPr>
-        <p:spPr>
-          <a:xfrm>
-            <a:off x="457200" y="3694176"/>
-            <a:ext cx="128016" cy="1051560"/>
-          </a:xfrm>
-          <a:prstGeom prst="rect">
-            <a:avLst/>
-          </a:prstGeom>
-          <a:solidFill>
-            <a:srgbClr val="269CCB"/>
-          </a:solidFill>
-          <a:ln>
-            <a:noFill/>
-          </a:ln>
-        </p:spPr>
-        <p:style>
-          <a:lnRef idx="1">
-            <a:schemeClr val="accent1"/>
-          </a:lnRef>
-          <a:fillRef idx="3">
-            <a:schemeClr val="accent1"/>
-          </a:fillRef>
-          <a:effectRef idx="2">
-            <a:schemeClr val="accent1"/>
-          </a:effectRef>
-          <a:fontRef idx="minor">
-            <a:schemeClr val="lt1"/>
-          </a:fontRef>
-        </p:style>
-        <p:txBody>
-          <a:bodyPr rtlCol="0" anchor="ctr"/>
-          <a:lstStyle/>
-          <a:p>
-            <a:pPr algn="ctr"/>
-          </a:p>
-        </p:txBody>
-      </p:sp>
-      <p:sp>
-        <p:nvSpPr>
-          <p:cNvPr id="13" name="TextBox 12"/>
-          <p:cNvSpPr txBox="1"/>
-          <p:nvPr/>
-        </p:nvSpPr>
-        <p:spPr>
-          <a:xfrm>
-            <a:off x="777240" y="3831336"/>
-            <a:ext cx="10774375" cy="822959"/>
-          </a:xfrm>
-          <a:prstGeom prst="rect">
-            <a:avLst/>
-          </a:prstGeom>
-          <a:noFill/>
-        </p:spPr>
-        <p:txBody>
-          <a:bodyPr wrap="square">
-            <a:spAutoFit/>
-          </a:bodyPr>
-          <a:lstStyle/>
-          <a:p>
-            <a:r>
-              <a:rPr sz="1200" b="1" i="0">
-                <a:solidFill>
-                  <a:srgbClr val="269CCB"/>
-                </a:solidFill>
-                <a:latin typeface="Calibri"/>
-              </a:rPr>
-              <a:t>Info</a:t>
-            </a:r>
-          </a:p>
-          <a:p>
-            <a:pPr>
-              <a:spcBef>
-                <a:spcPts val="400"/>
-              </a:spcBef>
-            </a:pPr>
-            <a:r>
-              <a:rPr sz="1400" b="1" i="0">
-                <a:solidFill>
-                  <a:srgbClr val="333333"/>
-                </a:solidFill>
-                <a:latin typeface="Calibri"/>
-              </a:rPr>
-              <a:t>Lo que sí se puede afirmar sin exagerar:</a:t>
-            </a:r>
-            <a:r>
-              <a:rPr sz="1400" b="0" i="0">
-                <a:solidFill>
-                  <a:srgbClr val="333333"/>
-                </a:solidFill>
-                <a:latin typeface="Calibri"/>
-              </a:rPr>
-              <a:t> que la huella existe, que tiene cuatro etapas, que se puede reducir con decisiones de diseño y que casi nadie la mide. Eso alcanza para trabajar con rigor en primer semestre.</a:t>
-            </a:r>
-          </a:p>
-        </p:txBody>
-      </p:sp>
-      <p:sp>
-        <p:nvSpPr>
-          <p:cNvPr id="14" name="TextBox 13"/>
-          <p:cNvSpPr txBox="1"/>
-          <p:nvPr/>
-        </p:nvSpPr>
-        <p:spPr>
-          <a:xfrm>
-            <a:off x="11185855" y="6473952"/>
-            <a:ext cx="640080" cy="274320"/>
-          </a:xfrm>
-          <a:prstGeom prst="rect">
-            <a:avLst/>
-          </a:prstGeom>
-          <a:noFill/>
-        </p:spPr>
-        <p:txBody>
-          <a:bodyPr wrap="square">
-            <a:spAutoFit/>
-          </a:bodyPr>
-          <a:lstStyle/>
-          <a:p>
-            <a:pPr algn="r"/>
-            <a:r>
-              <a:rPr sz="1100" b="0" i="0">
-                <a:solidFill>
-                  <a:srgbClr val="666666"/>
-                </a:solidFill>
-                <a:latin typeface="Calibri"/>
-              </a:rPr>
-              <a:t>14</a:t>
-            </a:r>
-          </a:p>
-        </p:txBody>
-      </p:sp>
-    </p:spTree>
-  </p:cSld>
-  <p:clrMapOvr>
-    <a:masterClrMapping/>
-  </p:clrMapOvr>
-</p:sld>
-</file>
-
-<file path=ppt/slides/slide15.xml><?xml version="1.0" encoding="utf-8"?>
-<p:sld xmlns:a="http://schemas.openxmlformats.org/drawingml/2006/main" xmlns:p="http://schemas.openxmlformats.org/presentationml/2006/main" xmlns:r="http://schemas.openxmlformats.org/officeDocument/2006/relationships">
-  <p:cSld>
-    <p:bg>
-      <p:bgPr>
-        <a:solidFill>
-          <a:srgbClr val="FFFFFF"/>
-        </a:solidFill>
-        <a:effectLst/>
-      </p:bgPr>
-    </p:bg>
-    <p:spTree>
-      <p:nvGrpSpPr>
-        <p:cNvPr id="1" name=""/>
-        <p:cNvGrpSpPr/>
-        <p:nvPr/>
-      </p:nvGrpSpPr>
-      <p:grpSpPr/>
-      <p:sp>
-        <p:nvSpPr>
-          <p:cNvPr id="2" name="Rectangle 1"/>
-          <p:cNvSpPr/>
-          <p:nvPr/>
-        </p:nvSpPr>
-        <p:spPr>
-          <a:xfrm>
-            <a:off x="0" y="0"/>
-            <a:ext cx="12191695" cy="164592"/>
-          </a:xfrm>
-          <a:prstGeom prst="rect">
-            <a:avLst/>
-          </a:prstGeom>
-          <a:solidFill>
-            <a:srgbClr val="269CCB"/>
-          </a:solidFill>
-          <a:ln>
-            <a:noFill/>
-          </a:ln>
-        </p:spPr>
-        <p:style>
-          <a:lnRef idx="1">
-            <a:schemeClr val="accent1"/>
-          </a:lnRef>
-          <a:fillRef idx="3">
-            <a:schemeClr val="accent1"/>
-          </a:fillRef>
-          <a:effectRef idx="2">
-            <a:schemeClr val="accent1"/>
-          </a:effectRef>
-          <a:fontRef idx="minor">
-            <a:schemeClr val="lt1"/>
-          </a:fontRef>
-        </p:style>
-        <p:txBody>
-          <a:bodyPr rtlCol="0" anchor="ctr"/>
-          <a:lstStyle/>
-          <a:p>
-            <a:pPr algn="ctr"/>
-          </a:p>
-        </p:txBody>
-      </p:sp>
       <p:pic>
         <p:nvPicPr>
-          <p:cNvPr id="3" name="Picture 2" descr="logo_uniajc_color.png"/>
-          <p:cNvPicPr>
-            <a:picLocks noChangeAspect="1"/>
-          </p:cNvPicPr>
-          <p:nvPr/>
-        </p:nvPicPr>
-        <p:blipFill>
-          <a:blip r:embed="rId2"/>
-          <a:stretch>
-            <a:fillRect/>
-          </a:stretch>
-        </p:blipFill>
-        <p:spPr>
-          <a:xfrm>
-            <a:off x="10271455" y="5998464"/>
-            <a:ext cx="1463040" cy="643233"/>
-          </a:xfrm>
-          <a:prstGeom prst="rect">
-            <a:avLst/>
-          </a:prstGeom>
-        </p:spPr>
-      </p:pic>
-      <p:sp>
-        <p:nvSpPr>
-          <p:cNvPr id="4" name="TextBox 3"/>
-          <p:cNvSpPr txBox="1"/>
-          <p:nvPr/>
-        </p:nvSpPr>
-        <p:spPr>
-          <a:xfrm>
-            <a:off x="457200" y="1737360"/>
-            <a:ext cx="11277295" cy="1097280"/>
-          </a:xfrm>
-          <a:prstGeom prst="rect">
-            <a:avLst/>
-          </a:prstGeom>
-          <a:noFill/>
-        </p:spPr>
-        <p:txBody>
-          <a:bodyPr wrap="square" anchor="ctr"/>
-          <a:lstStyle/>
-          <a:p>
-            <a:pPr algn="ctr"/>
-            <a:r>
-              <a:rPr sz="3400" b="1" i="0">
-                <a:solidFill>
-                  <a:srgbClr val="095292"/>
-                </a:solidFill>
-                <a:latin typeface="Calibri"/>
-              </a:rPr>
-              <a:t>Nos vemos en la sesión 6 — cierra el corte 1</a:t>
-            </a:r>
-          </a:p>
-        </p:txBody>
-      </p:sp>
-      <p:sp>
-        <p:nvSpPr>
-          <p:cNvPr id="5" name="TextBox 4"/>
-          <p:cNvSpPr txBox="1"/>
-          <p:nvPr/>
-        </p:nvSpPr>
-        <p:spPr>
-          <a:xfrm>
-            <a:off x="457200" y="3017520"/>
-            <a:ext cx="11277295" cy="1645920"/>
-          </a:xfrm>
-          <a:prstGeom prst="rect">
-            <a:avLst/>
-          </a:prstGeom>
-          <a:noFill/>
-        </p:spPr>
-        <p:txBody>
-          <a:bodyPr wrap="square">
-            <a:spAutoFit/>
-          </a:bodyPr>
-          <a:lstStyle/>
-          <a:p>
-            <a:pPr algn="ctr">
-              <a:spcAft>
-                <a:spcPts val="600"/>
-              </a:spcAft>
-            </a:pPr>
-            <a:r>
-              <a:rPr sz="1600" b="0" i="0">
-                <a:solidFill>
-                  <a:srgbClr val="333333"/>
-                </a:solidFill>
-                <a:latin typeface="Calibri"/>
-              </a:rPr>
-              <a:t>El rol del ingeniero en el contexto ambiental · Clase 5</a:t>
-            </a:r>
-          </a:p>
-          <a:p>
-            <a:pPr algn="ctr">
-              <a:spcAft>
-                <a:spcPts val="600"/>
-              </a:spcAft>
-            </a:pPr>
-            <a:r>
-              <a:rPr sz="1600" b="0" i="0">
-                <a:solidFill>
-                  <a:srgbClr val="333333"/>
-                </a:solidFill>
-                <a:latin typeface="Calibri"/>
-              </a:rPr>
-              <a:t>FI300101 · UNIAJC · Ingeniería de Sistemas</a:t>
-            </a:r>
-          </a:p>
-        </p:txBody>
-      </p:sp>
-      <p:sp>
-        <p:nvSpPr>
-          <p:cNvPr id="6" name="TextBox 5"/>
-          <p:cNvSpPr txBox="1"/>
-          <p:nvPr/>
-        </p:nvSpPr>
-        <p:spPr>
-          <a:xfrm>
-            <a:off x="457200" y="4754880"/>
-            <a:ext cx="11277295" cy="640080"/>
-          </a:xfrm>
-          <a:prstGeom prst="rect">
-            <a:avLst/>
-          </a:prstGeom>
-          <a:noFill/>
-        </p:spPr>
-        <p:txBody>
-          <a:bodyPr wrap="square">
-            <a:spAutoFit/>
-          </a:bodyPr>
-          <a:lstStyle/>
-          <a:p>
-            <a:pPr algn="ctr"/>
-            <a:r>
-              <a:rPr sz="2000" b="1" i="0">
-                <a:solidFill>
-                  <a:srgbClr val="269CCB"/>
-                </a:solidFill>
-                <a:latin typeface="Calibri"/>
-              </a:rPr>
-              <a:t>El software no es inmaterial: pesa, consume y termina en basura</a:t>
-            </a:r>
-          </a:p>
-        </p:txBody>
-      </p:sp>
-    </p:spTree>
-  </p:cSld>
-  <p:clrMapOvr>
-    <a:masterClrMapping/>
-  </p:clrMapOvr>
-</p:sld>
-</file>
-
-<file path=ppt/slides/slide2.xml><?xml version="1.0" encoding="utf-8"?>
-<p:sld xmlns:a="http://schemas.openxmlformats.org/drawingml/2006/main" xmlns:p="http://schemas.openxmlformats.org/presentationml/2006/main" xmlns:r="http://schemas.openxmlformats.org/officeDocument/2006/relationships">
-  <p:cSld>
-    <p:bg>
-      <p:bgPr>
-        <a:solidFill>
-          <a:srgbClr val="FFFFFF"/>
-        </a:solidFill>
-        <a:effectLst/>
-      </p:bgPr>
-    </p:bg>
-    <p:spTree>
-      <p:nvGrpSpPr>
-        <p:cNvPr id="1" name=""/>
-        <p:cNvGrpSpPr/>
-        <p:nvPr/>
-      </p:nvGrpSpPr>
-      <p:grpSpPr/>
-      <p:sp>
-        <p:nvSpPr>
-          <p:cNvPr id="2" name="Rectangle 1"/>
-          <p:cNvSpPr/>
-          <p:nvPr/>
-        </p:nvSpPr>
-        <p:spPr>
-          <a:xfrm>
-            <a:off x="0" y="0"/>
-            <a:ext cx="12191695" cy="1170432"/>
-          </a:xfrm>
-          <a:prstGeom prst="rect">
-            <a:avLst/>
-          </a:prstGeom>
-          <a:solidFill>
-            <a:srgbClr val="095292"/>
-          </a:solidFill>
-          <a:ln>
-            <a:noFill/>
-          </a:ln>
-        </p:spPr>
-        <p:style>
-          <a:lnRef idx="1">
-            <a:schemeClr val="accent1"/>
-          </a:lnRef>
-          <a:fillRef idx="3">
-            <a:schemeClr val="accent1"/>
-          </a:fillRef>
-          <a:effectRef idx="2">
-            <a:schemeClr val="accent1"/>
-          </a:effectRef>
-          <a:fontRef idx="minor">
-            <a:schemeClr val="lt1"/>
-          </a:fontRef>
-        </p:style>
-        <p:txBody>
-          <a:bodyPr rtlCol="0" anchor="ctr"/>
-          <a:lstStyle/>
-          <a:p>
-            <a:pPr algn="ctr"/>
-          </a:p>
-        </p:txBody>
-      </p:sp>
-      <p:sp>
-        <p:nvSpPr>
-          <p:cNvPr id="3" name="Rectangle 2"/>
-          <p:cNvSpPr/>
-          <p:nvPr/>
-        </p:nvSpPr>
-        <p:spPr>
-          <a:xfrm>
-            <a:off x="0" y="1170432"/>
-            <a:ext cx="12191695" cy="41148"/>
-          </a:xfrm>
-          <a:prstGeom prst="rect">
-            <a:avLst/>
-          </a:prstGeom>
-          <a:solidFill>
-            <a:srgbClr val="FFD000"/>
-          </a:solidFill>
-          <a:ln>
-            <a:noFill/>
-          </a:ln>
-        </p:spPr>
-        <p:style>
-          <a:lnRef idx="1">
-            <a:schemeClr val="accent1"/>
-          </a:lnRef>
-          <a:fillRef idx="3">
-            <a:schemeClr val="accent1"/>
-          </a:fillRef>
-          <a:effectRef idx="2">
-            <a:schemeClr val="accent1"/>
-          </a:effectRef>
-          <a:fontRef idx="minor">
-            <a:schemeClr val="lt1"/>
-          </a:fontRef>
-        </p:style>
-        <p:txBody>
-          <a:bodyPr rtlCol="0" anchor="ctr"/>
-          <a:lstStyle/>
-          <a:p>
-            <a:pPr algn="ctr"/>
-          </a:p>
-        </p:txBody>
-      </p:sp>
-      <p:sp>
-        <p:nvSpPr>
-          <p:cNvPr id="4" name="TextBox 3"/>
-          <p:cNvSpPr txBox="1"/>
-          <p:nvPr/>
-        </p:nvSpPr>
-        <p:spPr>
-          <a:xfrm>
-            <a:off x="457200" y="164592"/>
-            <a:ext cx="11277295" cy="384048"/>
-          </a:xfrm>
-          <a:prstGeom prst="rect">
-            <a:avLst/>
-          </a:prstGeom>
-          <a:noFill/>
-        </p:spPr>
-        <p:txBody>
-          <a:bodyPr wrap="square">
-            <a:spAutoFit/>
-          </a:bodyPr>
-          <a:lstStyle/>
-          <a:p>
-            <a:r>
-              <a:rPr sz="2600" b="1" i="0">
-                <a:solidFill>
-                  <a:srgbClr val="FFFFFF"/>
-                </a:solidFill>
-                <a:latin typeface="Calibri"/>
-              </a:rPr>
-              <a:t>Agenda de hoy (90 min)</a:t>
-            </a:r>
-          </a:p>
-        </p:txBody>
-      </p:sp>
-      <p:sp>
-        <p:nvSpPr>
-          <p:cNvPr id="5" name="TextBox 4"/>
-          <p:cNvSpPr txBox="1"/>
-          <p:nvPr/>
-        </p:nvSpPr>
-        <p:spPr>
-          <a:xfrm>
-            <a:off x="457200" y="566928"/>
-            <a:ext cx="11277295" cy="411480"/>
-          </a:xfrm>
-          <a:prstGeom prst="rect">
-            <a:avLst/>
-          </a:prstGeom>
-          <a:noFill/>
-        </p:spPr>
-        <p:txBody>
-          <a:bodyPr wrap="square">
-            <a:spAutoFit/>
-          </a:bodyPr>
-          <a:lstStyle/>
-          <a:p>
-            <a:r>
-              <a:rPr sz="1400" b="0" i="0">
-                <a:solidFill>
-                  <a:srgbClr val="B8D8EE"/>
-                </a:solidFill>
-                <a:latin typeface="Calibri"/>
-              </a:rPr>
-              <a:t>La misma estructura de las 16 sesiones. El reloj de pared de su grupo está en el calendario del curso.</a:t>
-            </a:r>
-          </a:p>
-        </p:txBody>
-      </p:sp>
-      <p:sp>
-        <p:nvSpPr>
-          <p:cNvPr id="6" name="Rectangle 5"/>
-          <p:cNvSpPr/>
-          <p:nvPr/>
-        </p:nvSpPr>
-        <p:spPr>
-          <a:xfrm>
-            <a:off x="457200" y="2386584"/>
-            <a:ext cx="11277295" cy="73152"/>
-          </a:xfrm>
-          <a:prstGeom prst="rect">
-            <a:avLst/>
-          </a:prstGeom>
-          <a:solidFill>
-            <a:srgbClr val="269CCB"/>
-          </a:solidFill>
-          <a:ln>
-            <a:noFill/>
-          </a:ln>
-        </p:spPr>
-        <p:style>
-          <a:lnRef idx="1">
-            <a:schemeClr val="accent1"/>
-          </a:lnRef>
-          <a:fillRef idx="3">
-            <a:schemeClr val="accent1"/>
-          </a:fillRef>
-          <a:effectRef idx="2">
-            <a:schemeClr val="accent1"/>
-          </a:effectRef>
-          <a:fontRef idx="minor">
-            <a:schemeClr val="lt1"/>
-          </a:fontRef>
-        </p:style>
-        <p:txBody>
-          <a:bodyPr rtlCol="0" anchor="ctr"/>
-          <a:lstStyle/>
-          <a:p>
-            <a:pPr algn="ctr"/>
-          </a:p>
-        </p:txBody>
-      </p:sp>
-      <p:sp>
-        <p:nvSpPr>
-          <p:cNvPr id="7" name="Rounded Rectangle 6"/>
-          <p:cNvSpPr/>
-          <p:nvPr/>
-        </p:nvSpPr>
-        <p:spPr>
-          <a:xfrm>
-            <a:off x="1438625" y="2276856"/>
-            <a:ext cx="292608" cy="292608"/>
-          </a:xfrm>
-          <a:prstGeom prst="roundRect">
-            <a:avLst>
-              <a:gd name="adj" fmla="val 12000"/>
-            </a:avLst>
-          </a:prstGeom>
-          <a:solidFill>
-            <a:srgbClr val="095292"/>
-          </a:solidFill>
-          <a:ln>
-            <a:noFill/>
-          </a:ln>
-        </p:spPr>
-        <p:style>
-          <a:lnRef idx="1">
-            <a:schemeClr val="accent1"/>
-          </a:lnRef>
-          <a:fillRef idx="3">
-            <a:schemeClr val="accent1"/>
-          </a:fillRef>
-          <a:effectRef idx="2">
-            <a:schemeClr val="accent1"/>
-          </a:effectRef>
-          <a:fontRef idx="minor">
-            <a:schemeClr val="lt1"/>
-          </a:fontRef>
-        </p:style>
-        <p:txBody>
-          <a:bodyPr rtlCol="0" anchor="ctr"/>
-          <a:lstStyle/>
-          <a:p>
-            <a:pPr algn="ctr"/>
-          </a:p>
-        </p:txBody>
-      </p:sp>
-      <p:sp>
-        <p:nvSpPr>
-          <p:cNvPr id="8" name="TextBox 7"/>
-          <p:cNvSpPr txBox="1"/>
-          <p:nvPr/>
-        </p:nvSpPr>
-        <p:spPr>
-          <a:xfrm>
-            <a:off x="457200" y="1563624"/>
-            <a:ext cx="2255459" cy="502920"/>
-          </a:xfrm>
-          <a:prstGeom prst="rect">
-            <a:avLst/>
-          </a:prstGeom>
-          <a:noFill/>
-        </p:spPr>
-        <p:txBody>
-          <a:bodyPr wrap="square">
-            <a:spAutoFit/>
-          </a:bodyPr>
-          <a:lstStyle/>
-          <a:p>
-            <a:pPr algn="ctr"/>
-            <a:r>
-              <a:rPr sz="1300" b="1" i="0">
-                <a:solidFill>
-                  <a:srgbClr val="095292"/>
-                </a:solidFill>
-                <a:latin typeface="Calibri"/>
-              </a:rPr>
-              <a:t>00:00–00:10 · 10 min</a:t>
-            </a:r>
-          </a:p>
-        </p:txBody>
-      </p:sp>
-      <p:sp>
-        <p:nvSpPr>
-          <p:cNvPr id="9" name="TextBox 8"/>
-          <p:cNvSpPr txBox="1"/>
-          <p:nvPr/>
-        </p:nvSpPr>
-        <p:spPr>
-          <a:xfrm>
-            <a:off x="502920" y="2798064"/>
-            <a:ext cx="2164019" cy="3099816"/>
-          </a:xfrm>
-          <a:prstGeom prst="rect">
-            <a:avLst/>
-          </a:prstGeom>
-          <a:noFill/>
-        </p:spPr>
-        <p:txBody>
-          <a:bodyPr wrap="square">
-            <a:spAutoFit/>
-          </a:bodyPr>
-          <a:lstStyle/>
-          <a:p>
-            <a:pPr algn="ctr"/>
-            <a:r>
-              <a:rPr sz="1300" b="0" i="0">
-                <a:solidFill>
-                  <a:srgbClr val="333333"/>
-                </a:solidFill>
-                <a:latin typeface="Calibri"/>
-              </a:rPr>
-              <a:t>Pregunta de entrada en el muro mientras se conectan</a:t>
-            </a:r>
-          </a:p>
-        </p:txBody>
-      </p:sp>
-      <p:sp>
-        <p:nvSpPr>
-          <p:cNvPr id="10" name="Rounded Rectangle 9"/>
-          <p:cNvSpPr/>
-          <p:nvPr/>
-        </p:nvSpPr>
-        <p:spPr>
-          <a:xfrm>
-            <a:off x="3694084" y="2276856"/>
-            <a:ext cx="292608" cy="292608"/>
-          </a:xfrm>
-          <a:prstGeom prst="roundRect">
-            <a:avLst>
-              <a:gd name="adj" fmla="val 12000"/>
-            </a:avLst>
-          </a:prstGeom>
-          <a:solidFill>
-            <a:srgbClr val="269CCB"/>
-          </a:solidFill>
-          <a:ln>
-            <a:noFill/>
-          </a:ln>
-        </p:spPr>
-        <p:style>
-          <a:lnRef idx="1">
-            <a:schemeClr val="accent1"/>
-          </a:lnRef>
-          <a:fillRef idx="3">
-            <a:schemeClr val="accent1"/>
-          </a:fillRef>
-          <a:effectRef idx="2">
-            <a:schemeClr val="accent1"/>
-          </a:effectRef>
-          <a:fontRef idx="minor">
-            <a:schemeClr val="lt1"/>
-          </a:fontRef>
-        </p:style>
-        <p:txBody>
-          <a:bodyPr rtlCol="0" anchor="ctr"/>
-          <a:lstStyle/>
-          <a:p>
-            <a:pPr algn="ctr"/>
-          </a:p>
-        </p:txBody>
-      </p:sp>
-      <p:sp>
-        <p:nvSpPr>
-          <p:cNvPr id="11" name="TextBox 10"/>
-          <p:cNvSpPr txBox="1"/>
-          <p:nvPr/>
-        </p:nvSpPr>
-        <p:spPr>
-          <a:xfrm>
-            <a:off x="2712659" y="1563624"/>
-            <a:ext cx="2255459" cy="502920"/>
-          </a:xfrm>
-          <a:prstGeom prst="rect">
-            <a:avLst/>
-          </a:prstGeom>
-          <a:noFill/>
-        </p:spPr>
-        <p:txBody>
-          <a:bodyPr wrap="square">
-            <a:spAutoFit/>
-          </a:bodyPr>
-          <a:lstStyle/>
-          <a:p>
-            <a:pPr algn="ctr"/>
-            <a:r>
-              <a:rPr sz="1300" b="1" i="0">
-                <a:solidFill>
-                  <a:srgbClr val="095292"/>
-                </a:solidFill>
-                <a:latin typeface="Calibri"/>
-              </a:rPr>
-              <a:t>00:10–00:55 · 45 min</a:t>
-            </a:r>
-          </a:p>
-        </p:txBody>
-      </p:sp>
-      <p:sp>
-        <p:nvSpPr>
-          <p:cNvPr id="12" name="TextBox 11"/>
-          <p:cNvSpPr txBox="1"/>
-          <p:nvPr/>
-        </p:nvSpPr>
-        <p:spPr>
-          <a:xfrm>
-            <a:off x="2758379" y="2798064"/>
-            <a:ext cx="2164019" cy="3099816"/>
-          </a:xfrm>
-          <a:prstGeom prst="rect">
-            <a:avLst/>
-          </a:prstGeom>
-          <a:noFill/>
-        </p:spPr>
-        <p:txBody>
-          <a:bodyPr wrap="square">
-            <a:spAutoFit/>
-          </a:bodyPr>
-          <a:lstStyle/>
-          <a:p>
-            <a:pPr algn="ctr"/>
-            <a:r>
-              <a:rPr sz="1300" b="0" i="0">
-                <a:solidFill>
-                  <a:srgbClr val="333333"/>
-                </a:solidFill>
-                <a:latin typeface="Calibri"/>
-              </a:rPr>
-              <a:t>Teoría — huella material, centros de datos, RAEE y matriz eléctrica colombiana</a:t>
-            </a:r>
-          </a:p>
-        </p:txBody>
-      </p:sp>
-      <p:sp>
-        <p:nvSpPr>
-          <p:cNvPr id="13" name="Rounded Rectangle 12"/>
-          <p:cNvSpPr/>
-          <p:nvPr/>
-        </p:nvSpPr>
-        <p:spPr>
-          <a:xfrm>
-            <a:off x="5949543" y="2276856"/>
-            <a:ext cx="292608" cy="292608"/>
-          </a:xfrm>
-          <a:prstGeom prst="roundRect">
-            <a:avLst>
-              <a:gd name="adj" fmla="val 12000"/>
-            </a:avLst>
-          </a:prstGeom>
-          <a:solidFill>
-            <a:srgbClr val="095292"/>
-          </a:solidFill>
-          <a:ln>
-            <a:noFill/>
-          </a:ln>
-        </p:spPr>
-        <p:style>
-          <a:lnRef idx="1">
-            <a:schemeClr val="accent1"/>
-          </a:lnRef>
-          <a:fillRef idx="3">
-            <a:schemeClr val="accent1"/>
-          </a:fillRef>
-          <a:effectRef idx="2">
-            <a:schemeClr val="accent1"/>
-          </a:effectRef>
-          <a:fontRef idx="minor">
-            <a:schemeClr val="lt1"/>
-          </a:fontRef>
-        </p:style>
-        <p:txBody>
-          <a:bodyPr rtlCol="0" anchor="ctr"/>
-          <a:lstStyle/>
-          <a:p>
-            <a:pPr algn="ctr"/>
-          </a:p>
-        </p:txBody>
-      </p:sp>
-      <p:sp>
-        <p:nvSpPr>
-          <p:cNvPr id="14" name="TextBox 13"/>
-          <p:cNvSpPr txBox="1"/>
-          <p:nvPr/>
-        </p:nvSpPr>
-        <p:spPr>
-          <a:xfrm>
-            <a:off x="4968118" y="1563624"/>
-            <a:ext cx="2255459" cy="502920"/>
-          </a:xfrm>
-          <a:prstGeom prst="rect">
-            <a:avLst/>
-          </a:prstGeom>
-          <a:noFill/>
-        </p:spPr>
-        <p:txBody>
-          <a:bodyPr wrap="square">
-            <a:spAutoFit/>
-          </a:bodyPr>
-          <a:lstStyle/>
-          <a:p>
-            <a:pPr algn="ctr"/>
-            <a:r>
-              <a:rPr sz="1300" b="1" i="0">
-                <a:solidFill>
-                  <a:srgbClr val="095292"/>
-                </a:solidFill>
-                <a:latin typeface="Calibri"/>
-              </a:rPr>
-              <a:t>00:55–01:12 · 17 min</a:t>
-            </a:r>
-          </a:p>
-        </p:txBody>
-      </p:sp>
-      <p:sp>
-        <p:nvSpPr>
-          <p:cNvPr id="15" name="TextBox 14"/>
-          <p:cNvSpPr txBox="1"/>
-          <p:nvPr/>
-        </p:nvSpPr>
-        <p:spPr>
-          <a:xfrm>
-            <a:off x="5013838" y="2798064"/>
-            <a:ext cx="2164019" cy="3099816"/>
-          </a:xfrm>
-          <a:prstGeom prst="rect">
-            <a:avLst/>
-          </a:prstGeom>
-          <a:noFill/>
-        </p:spPr>
-        <p:txBody>
-          <a:bodyPr wrap="square">
-            <a:spAutoFit/>
-          </a:bodyPr>
-          <a:lstStyle/>
-          <a:p>
-            <a:pPr algn="ctr"/>
-            <a:r>
-              <a:rPr sz="1300" b="0" i="0">
-                <a:solidFill>
-                  <a:srgbClr val="333333"/>
-                </a:solidFill>
-                <a:latin typeface="Calibri"/>
-              </a:rPr>
-              <a:t>Práctica en equipos (opcional · la guía está en la carpeta de la clase)</a:t>
-            </a:r>
-          </a:p>
-        </p:txBody>
-      </p:sp>
-      <p:sp>
-        <p:nvSpPr>
-          <p:cNvPr id="16" name="Rounded Rectangle 15"/>
-          <p:cNvSpPr/>
-          <p:nvPr/>
-        </p:nvSpPr>
-        <p:spPr>
-          <a:xfrm>
-            <a:off x="8205002" y="2276856"/>
-            <a:ext cx="292608" cy="292608"/>
-          </a:xfrm>
-          <a:prstGeom prst="roundRect">
-            <a:avLst>
-              <a:gd name="adj" fmla="val 12000"/>
-            </a:avLst>
-          </a:prstGeom>
-          <a:solidFill>
-            <a:srgbClr val="269CCB"/>
-          </a:solidFill>
-          <a:ln>
-            <a:noFill/>
-          </a:ln>
-        </p:spPr>
-        <p:style>
-          <a:lnRef idx="1">
-            <a:schemeClr val="accent1"/>
-          </a:lnRef>
-          <a:fillRef idx="3">
-            <a:schemeClr val="accent1"/>
-          </a:fillRef>
-          <a:effectRef idx="2">
-            <a:schemeClr val="accent1"/>
-          </a:effectRef>
-          <a:fontRef idx="minor">
-            <a:schemeClr val="lt1"/>
-          </a:fontRef>
-        </p:style>
-        <p:txBody>
-          <a:bodyPr rtlCol="0" anchor="ctr"/>
-          <a:lstStyle/>
-          <a:p>
-            <a:pPr algn="ctr"/>
-          </a:p>
-        </p:txBody>
-      </p:sp>
-      <p:sp>
-        <p:nvSpPr>
-          <p:cNvPr id="17" name="TextBox 16"/>
-          <p:cNvSpPr txBox="1"/>
-          <p:nvPr/>
-        </p:nvSpPr>
-        <p:spPr>
-          <a:xfrm>
-            <a:off x="7223577" y="1563624"/>
-            <a:ext cx="2255459" cy="502920"/>
-          </a:xfrm>
-          <a:prstGeom prst="rect">
-            <a:avLst/>
-          </a:prstGeom>
-          <a:noFill/>
-        </p:spPr>
-        <p:txBody>
-          <a:bodyPr wrap="square">
-            <a:spAutoFit/>
-          </a:bodyPr>
-          <a:lstStyle/>
-          <a:p>
-            <a:pPr algn="ctr"/>
-            <a:r>
-              <a:rPr sz="1300" b="1" i="0">
-                <a:solidFill>
-                  <a:srgbClr val="095292"/>
-                </a:solidFill>
-                <a:latin typeface="Calibri"/>
-              </a:rPr>
-              <a:t>01:12–01:27 · 15 min</a:t>
-            </a:r>
-          </a:p>
-        </p:txBody>
-      </p:sp>
-      <p:sp>
-        <p:nvSpPr>
-          <p:cNvPr id="18" name="TextBox 17"/>
-          <p:cNvSpPr txBox="1"/>
-          <p:nvPr/>
-        </p:nvSpPr>
-        <p:spPr>
-          <a:xfrm>
-            <a:off x="7269297" y="2798064"/>
-            <a:ext cx="2164019" cy="3099816"/>
-          </a:xfrm>
-          <a:prstGeom prst="rect">
-            <a:avLst/>
-          </a:prstGeom>
-          <a:noFill/>
-        </p:spPr>
-        <p:txBody>
-          <a:bodyPr wrap="square">
-            <a:spAutoFit/>
-          </a:bodyPr>
-          <a:lstStyle/>
-          <a:p>
-            <a:pPr algn="ctr"/>
-            <a:r>
-              <a:rPr sz="1300" b="0" i="0">
-                <a:solidFill>
-                  <a:srgbClr val="333333"/>
-                </a:solidFill>
-                <a:latin typeface="Calibri"/>
-              </a:rPr>
-              <a:t>Socialización de la práctica, si se hizo</a:t>
-            </a:r>
-          </a:p>
-        </p:txBody>
-      </p:sp>
-      <p:sp>
-        <p:nvSpPr>
-          <p:cNvPr id="19" name="Rounded Rectangle 18"/>
-          <p:cNvSpPr/>
-          <p:nvPr/>
-        </p:nvSpPr>
-        <p:spPr>
-          <a:xfrm>
-            <a:off x="10460461" y="2276856"/>
-            <a:ext cx="292608" cy="292608"/>
-          </a:xfrm>
-          <a:prstGeom prst="roundRect">
-            <a:avLst>
-              <a:gd name="adj" fmla="val 12000"/>
-            </a:avLst>
-          </a:prstGeom>
-          <a:solidFill>
-            <a:srgbClr val="095292"/>
-          </a:solidFill>
-          <a:ln>
-            <a:noFill/>
-          </a:ln>
-        </p:spPr>
-        <p:style>
-          <a:lnRef idx="1">
-            <a:schemeClr val="accent1"/>
-          </a:lnRef>
-          <a:fillRef idx="3">
-            <a:schemeClr val="accent1"/>
-          </a:fillRef>
-          <a:effectRef idx="2">
-            <a:schemeClr val="accent1"/>
-          </a:effectRef>
-          <a:fontRef idx="minor">
-            <a:schemeClr val="lt1"/>
-          </a:fontRef>
-        </p:style>
-        <p:txBody>
-          <a:bodyPr rtlCol="0" anchor="ctr"/>
-          <a:lstStyle/>
-          <a:p>
-            <a:pPr algn="ctr"/>
-          </a:p>
-        </p:txBody>
-      </p:sp>
-      <p:sp>
-        <p:nvSpPr>
-          <p:cNvPr id="20" name="TextBox 19"/>
-          <p:cNvSpPr txBox="1"/>
-          <p:nvPr/>
-        </p:nvSpPr>
-        <p:spPr>
-          <a:xfrm>
-            <a:off x="9479036" y="1563624"/>
-            <a:ext cx="2255459" cy="502920"/>
-          </a:xfrm>
-          <a:prstGeom prst="rect">
-            <a:avLst/>
-          </a:prstGeom>
-          <a:noFill/>
-        </p:spPr>
-        <p:txBody>
-          <a:bodyPr wrap="square">
-            <a:spAutoFit/>
-          </a:bodyPr>
-          <a:lstStyle/>
-          <a:p>
-            <a:pPr algn="ctr"/>
-            <a:r>
-              <a:rPr sz="1300" b="1" i="0">
-                <a:solidFill>
-                  <a:srgbClr val="095292"/>
-                </a:solidFill>
-                <a:latin typeface="Calibri"/>
-              </a:rPr>
-              <a:t>01:27–01:30 · 3 min</a:t>
-            </a:r>
-          </a:p>
-        </p:txBody>
-      </p:sp>
-      <p:sp>
-        <p:nvSpPr>
-          <p:cNvPr id="21" name="TextBox 20"/>
-          <p:cNvSpPr txBox="1"/>
-          <p:nvPr/>
-        </p:nvSpPr>
-        <p:spPr>
-          <a:xfrm>
-            <a:off x="9524756" y="2798064"/>
-            <a:ext cx="2164019" cy="3099816"/>
-          </a:xfrm>
-          <a:prstGeom prst="rect">
-            <a:avLst/>
-          </a:prstGeom>
-          <a:noFill/>
-        </p:spPr>
-        <p:txBody>
-          <a:bodyPr wrap="square">
-            <a:spAutoFit/>
-          </a:bodyPr>
-          <a:lstStyle/>
-          <a:p>
-            <a:pPr algn="ctr"/>
-            <a:r>
-              <a:rPr sz="1300" b="0" i="0">
-                <a:solidFill>
-                  <a:srgbClr val="333333"/>
-                </a:solidFill>
-                <a:latin typeface="Calibri"/>
-              </a:rPr>
-              <a:t>Una idea, la tarea y los enlaces en el chat</a:t>
-            </a:r>
-          </a:p>
-        </p:txBody>
-      </p:sp>
-      <p:sp>
-        <p:nvSpPr>
-          <p:cNvPr id="22" name="TextBox 21"/>
-          <p:cNvSpPr txBox="1"/>
-          <p:nvPr/>
-        </p:nvSpPr>
-        <p:spPr>
-          <a:xfrm>
-            <a:off x="457200" y="5806440"/>
-            <a:ext cx="11277295" cy="640080"/>
-          </a:xfrm>
-          <a:prstGeom prst="rect">
-            <a:avLst/>
-          </a:prstGeom>
-          <a:noFill/>
-        </p:spPr>
-        <p:txBody>
-          <a:bodyPr wrap="square">
-            <a:spAutoFit/>
-          </a:bodyPr>
-          <a:lstStyle/>
-          <a:p>
-            <a:pPr algn="ctr"/>
-            <a:r>
-              <a:rPr sz="1200" b="0" i="1">
-                <a:solidFill>
-                  <a:srgbClr val="666666"/>
-                </a:solidFill>
-                <a:latin typeface="Calibri"/>
-              </a:rPr>
-              <a:t>Solo el bloque de </a:t>
-            </a:r>
-            <a:r>
-              <a:rPr sz="1200" b="1" i="1">
-                <a:solidFill>
-                  <a:srgbClr val="666666"/>
-                </a:solidFill>
-                <a:latin typeface="Calibri"/>
-              </a:rPr>
-              <a:t>esta</a:t>
-            </a:r>
-            <a:r>
-              <a:rPr sz="1200" b="0" i="1">
-                <a:solidFill>
-                  <a:srgbClr val="666666"/>
-                </a:solidFill>
-                <a:latin typeface="Calibri"/>
-              </a:rPr>
-              <a:t> clase · 120 min</a:t>
-            </a:r>
-          </a:p>
-        </p:txBody>
-      </p:sp>
-      <p:sp>
-        <p:nvSpPr>
-          <p:cNvPr id="23" name="TextBox 22"/>
-          <p:cNvSpPr txBox="1"/>
-          <p:nvPr/>
-        </p:nvSpPr>
-        <p:spPr>
-          <a:xfrm>
-            <a:off x="11185855" y="6473952"/>
-            <a:ext cx="640080" cy="274320"/>
-          </a:xfrm>
-          <a:prstGeom prst="rect">
-            <a:avLst/>
-          </a:prstGeom>
-          <a:noFill/>
-        </p:spPr>
-        <p:txBody>
-          <a:bodyPr wrap="square">
-            <a:spAutoFit/>
-          </a:bodyPr>
-          <a:lstStyle/>
-          <a:p>
-            <a:pPr algn="r"/>
-            <a:r>
-              <a:rPr sz="1100" b="0" i="0">
-                <a:solidFill>
-                  <a:srgbClr val="666666"/>
-                </a:solidFill>
-                <a:latin typeface="Calibri"/>
-              </a:rPr>
-              <a:t>2</a:t>
-            </a:r>
-          </a:p>
-        </p:txBody>
-      </p:sp>
-    </p:spTree>
-  </p:cSld>
-  <p:clrMapOvr>
-    <a:masterClrMapping/>
-  </p:clrMapOvr>
-</p:sld>
-</file>
-
-<file path=ppt/slides/slide3.xml><?xml version="1.0" encoding="utf-8"?>
-<p:sld xmlns:a="http://schemas.openxmlformats.org/drawingml/2006/main" xmlns:p="http://schemas.openxmlformats.org/presentationml/2006/main" xmlns:r="http://schemas.openxmlformats.org/officeDocument/2006/relationships">
-  <p:cSld>
-    <p:bg>
-      <p:bgPr>
-        <a:solidFill>
-          <a:srgbClr val="FFFFFF"/>
-        </a:solidFill>
-        <a:effectLst/>
-      </p:bgPr>
-    </p:bg>
-    <p:spTree>
-      <p:nvGrpSpPr>
-        <p:cNvPr id="1" name=""/>
-        <p:cNvGrpSpPr/>
-        <p:nvPr/>
-      </p:nvGrpSpPr>
-      <p:grpSpPr/>
-      <p:sp>
-        <p:nvSpPr>
-          <p:cNvPr id="2" name="Rectangle 1"/>
-          <p:cNvSpPr/>
-          <p:nvPr/>
-        </p:nvSpPr>
-        <p:spPr>
-          <a:xfrm>
-            <a:off x="0" y="0"/>
-            <a:ext cx="12191695" cy="960120"/>
-          </a:xfrm>
-          <a:prstGeom prst="rect">
-            <a:avLst/>
-          </a:prstGeom>
-          <a:solidFill>
-            <a:srgbClr val="095292"/>
-          </a:solidFill>
-          <a:ln>
-            <a:noFill/>
-          </a:ln>
-        </p:spPr>
-        <p:style>
-          <a:lnRef idx="1">
-            <a:schemeClr val="accent1"/>
-          </a:lnRef>
-          <a:fillRef idx="3">
-            <a:schemeClr val="accent1"/>
-          </a:fillRef>
-          <a:effectRef idx="2">
-            <a:schemeClr val="accent1"/>
-          </a:effectRef>
-          <a:fontRef idx="minor">
-            <a:schemeClr val="lt1"/>
-          </a:fontRef>
-        </p:style>
-        <p:txBody>
-          <a:bodyPr rtlCol="0" anchor="ctr"/>
-          <a:lstStyle/>
-          <a:p>
-            <a:pPr algn="ctr"/>
-          </a:p>
-        </p:txBody>
-      </p:sp>
-      <p:sp>
-        <p:nvSpPr>
-          <p:cNvPr id="3" name="Rectangle 2"/>
-          <p:cNvSpPr/>
-          <p:nvPr/>
-        </p:nvSpPr>
-        <p:spPr>
-          <a:xfrm>
-            <a:off x="0" y="960120"/>
-            <a:ext cx="12191695" cy="41148"/>
-          </a:xfrm>
-          <a:prstGeom prst="rect">
-            <a:avLst/>
-          </a:prstGeom>
-          <a:solidFill>
-            <a:srgbClr val="FFD000"/>
-          </a:solidFill>
-          <a:ln>
-            <a:noFill/>
-          </a:ln>
-        </p:spPr>
-        <p:style>
-          <a:lnRef idx="1">
-            <a:schemeClr val="accent1"/>
-          </a:lnRef>
-          <a:fillRef idx="3">
-            <a:schemeClr val="accent1"/>
-          </a:fillRef>
-          <a:effectRef idx="2">
-            <a:schemeClr val="accent1"/>
-          </a:effectRef>
-          <a:fontRef idx="minor">
-            <a:schemeClr val="lt1"/>
-          </a:fontRef>
-        </p:style>
-        <p:txBody>
-          <a:bodyPr rtlCol="0" anchor="ctr"/>
-          <a:lstStyle/>
-          <a:p>
-            <a:pPr algn="ctr"/>
-          </a:p>
-        </p:txBody>
-      </p:sp>
-      <p:sp>
-        <p:nvSpPr>
-          <p:cNvPr id="4" name="TextBox 3"/>
-          <p:cNvSpPr txBox="1"/>
-          <p:nvPr/>
-        </p:nvSpPr>
-        <p:spPr>
-          <a:xfrm>
-            <a:off x="457200" y="164592"/>
-            <a:ext cx="11277295" cy="502920"/>
-          </a:xfrm>
-          <a:prstGeom prst="rect">
-            <a:avLst/>
-          </a:prstGeom>
-          <a:noFill/>
-        </p:spPr>
-        <p:txBody>
-          <a:bodyPr wrap="square">
-            <a:spAutoFit/>
-          </a:bodyPr>
-          <a:lstStyle/>
-          <a:p>
-            <a:r>
-              <a:rPr sz="2600" b="1" i="0">
-                <a:solidFill>
-                  <a:srgbClr val="FFFFFF"/>
-                </a:solidFill>
-                <a:latin typeface="Calibri"/>
-              </a:rPr>
-              <a:t>Objetivos de la sesión</a:t>
-            </a:r>
-          </a:p>
-        </p:txBody>
-      </p:sp>
-      <p:sp>
-        <p:nvSpPr>
-          <p:cNvPr id="5" name="TextBox 4"/>
-          <p:cNvSpPr txBox="1"/>
-          <p:nvPr/>
-        </p:nvSpPr>
-        <p:spPr>
-          <a:xfrm>
-            <a:off x="457200" y="1170432"/>
-            <a:ext cx="11277295" cy="5230368"/>
-          </a:xfrm>
-          <a:prstGeom prst="rect">
-            <a:avLst/>
-          </a:prstGeom>
-          <a:noFill/>
-        </p:spPr>
-        <p:txBody>
-          <a:bodyPr wrap="square">
-            <a:spAutoFit/>
-          </a:bodyPr>
-          <a:lstStyle/>
-          <a:p>
-            <a:pPr>
-              <a:spcAft>
-                <a:spcPts val="800"/>
-              </a:spcAft>
-            </a:pPr>
-            <a:r>
-              <a:rPr sz="2000" b="0" i="0">
-                <a:solidFill>
-                  <a:srgbClr val="333333"/>
-                </a:solidFill>
-                <a:latin typeface="Calibri"/>
-              </a:rPr>
-              <a:t>–   Nombrar las </a:t>
-            </a:r>
-            <a:r>
-              <a:rPr sz="2000" b="1" i="0">
-                <a:solidFill>
-                  <a:srgbClr val="333333"/>
-                </a:solidFill>
-                <a:latin typeface="Calibri"/>
-              </a:rPr>
-              <a:t>cuatro etapas</a:t>
-            </a:r>
-            <a:r>
-              <a:rPr sz="2000" b="0" i="0">
-                <a:solidFill>
-                  <a:srgbClr val="333333"/>
-                </a:solidFill>
-                <a:latin typeface="Calibri"/>
-              </a:rPr>
-              <a:t> de la huella material de un sistema de software: fabricación, uso, red y fin de vida.</a:t>
-            </a:r>
-          </a:p>
-          <a:p>
-            <a:pPr>
-              <a:spcAft>
-                <a:spcPts val="800"/>
-              </a:spcAft>
-            </a:pPr>
-            <a:r>
-              <a:rPr sz="2000" b="0" i="0">
-                <a:solidFill>
-                  <a:srgbClr val="333333"/>
-                </a:solidFill>
-                <a:latin typeface="Calibri"/>
-              </a:rPr>
-              <a:t>–   Explicar qué mide el </a:t>
-            </a:r>
-            <a:r>
-              <a:rPr sz="2000" b="1" i="0">
-                <a:solidFill>
-                  <a:srgbClr val="333333"/>
-                </a:solidFill>
-                <a:latin typeface="Calibri"/>
-              </a:rPr>
-              <a:t>PUE</a:t>
-            </a:r>
-            <a:r>
-              <a:rPr sz="2000" b="0" i="0">
-                <a:solidFill>
-                  <a:srgbClr val="333333"/>
-                </a:solidFill>
-                <a:latin typeface="Calibri"/>
-              </a:rPr>
-              <a:t> de un centro de datos y por qué el enfriamiento cambia la cuenta.</a:t>
-            </a:r>
-          </a:p>
-          <a:p>
-            <a:pPr>
-              <a:spcAft>
-                <a:spcPts val="800"/>
-              </a:spcAft>
-            </a:pPr>
-            <a:r>
-              <a:rPr sz="2000" b="0" i="0">
-                <a:solidFill>
-                  <a:srgbClr val="333333"/>
-                </a:solidFill>
-                <a:latin typeface="Calibri"/>
-              </a:rPr>
-              <a:t>–   Relacionar una decisión de diseño con un </a:t>
-            </a:r>
-            <a:r>
-              <a:rPr sz="2000" b="1" i="0">
-                <a:solidFill>
-                  <a:srgbClr val="333333"/>
-                </a:solidFill>
-                <a:latin typeface="Calibri"/>
-              </a:rPr>
-              <a:t>efecto ambiental medible</a:t>
-            </a:r>
-            <a:r>
-              <a:rPr sz="2000" b="0" i="0">
-                <a:solidFill>
-                  <a:srgbClr val="333333"/>
-                </a:solidFill>
-                <a:latin typeface="Calibri"/>
-              </a:rPr>
-              <a:t>.</a:t>
-            </a:r>
-          </a:p>
-          <a:p>
-            <a:pPr>
-              <a:spcAft>
-                <a:spcPts val="800"/>
-              </a:spcAft>
-            </a:pPr>
-            <a:r>
-              <a:rPr sz="2000" b="0" i="0">
-                <a:solidFill>
-                  <a:srgbClr val="333333"/>
-                </a:solidFill>
-                <a:latin typeface="Calibri"/>
-              </a:rPr>
-              <a:t>–   Nombrar la norma colombiana de </a:t>
-            </a:r>
-            <a:r>
-              <a:rPr sz="2000" b="1" i="0">
-                <a:solidFill>
-                  <a:srgbClr val="333333"/>
-                </a:solidFill>
-                <a:latin typeface="Calibri"/>
-              </a:rPr>
-              <a:t>residuos electrónicos</a:t>
-            </a:r>
-            <a:r>
-              <a:rPr sz="2000" b="0" i="0">
-                <a:solidFill>
-                  <a:srgbClr val="333333"/>
-                </a:solidFill>
-                <a:latin typeface="Calibri"/>
-              </a:rPr>
-              <a:t> y qué obliga.</a:t>
-            </a:r>
-          </a:p>
-        </p:txBody>
-      </p:sp>
-      <p:sp>
-        <p:nvSpPr>
-          <p:cNvPr id="6" name="TextBox 5"/>
-          <p:cNvSpPr txBox="1"/>
-          <p:nvPr/>
-        </p:nvSpPr>
-        <p:spPr>
-          <a:xfrm>
-            <a:off x="11185855" y="6473952"/>
-            <a:ext cx="640080" cy="274320"/>
-          </a:xfrm>
-          <a:prstGeom prst="rect">
-            <a:avLst/>
-          </a:prstGeom>
-          <a:noFill/>
-        </p:spPr>
-        <p:txBody>
-          <a:bodyPr wrap="square">
-            <a:spAutoFit/>
-          </a:bodyPr>
-          <a:lstStyle/>
-          <a:p>
-            <a:pPr algn="r"/>
-            <a:r>
-              <a:rPr sz="1100" b="0" i="0">
-                <a:solidFill>
-                  <a:srgbClr val="666666"/>
-                </a:solidFill>
-                <a:latin typeface="Calibri"/>
-              </a:rPr>
-              <a:t>3</a:t>
-            </a:r>
-          </a:p>
-        </p:txBody>
-      </p:sp>
-    </p:spTree>
-  </p:cSld>
-  <p:clrMapOvr>
-    <a:masterClrMapping/>
-  </p:clrMapOvr>
-</p:sld>
-</file>
-
-<file path=ppt/slides/slide4.xml><?xml version="1.0" encoding="utf-8"?>
-<p:sld xmlns:a="http://schemas.openxmlformats.org/drawingml/2006/main" xmlns:p="http://schemas.openxmlformats.org/presentationml/2006/main" xmlns:r="http://schemas.openxmlformats.org/officeDocument/2006/relationships">
-  <p:cSld>
-    <p:bg>
-      <p:bgPr>
-        <a:solidFill>
-          <a:srgbClr val="FFFFFF"/>
-        </a:solidFill>
-        <a:effectLst/>
-      </p:bgPr>
-    </p:bg>
-    <p:spTree>
-      <p:nvGrpSpPr>
-        <p:cNvPr id="1" name=""/>
-        <p:cNvGrpSpPr/>
-        <p:nvPr/>
-      </p:nvGrpSpPr>
-      <p:grpSpPr/>
-      <p:sp>
-        <p:nvSpPr>
-          <p:cNvPr id="2" name="Rectangle 1"/>
-          <p:cNvSpPr/>
-          <p:nvPr/>
-        </p:nvSpPr>
-        <p:spPr>
-          <a:xfrm>
-            <a:off x="0" y="0"/>
-            <a:ext cx="12191695" cy="6858000"/>
-          </a:xfrm>
-          <a:prstGeom prst="rect">
-            <a:avLst/>
-          </a:prstGeom>
-          <a:solidFill>
-            <a:srgbClr val="095292"/>
-          </a:solidFill>
-          <a:ln>
-            <a:noFill/>
-          </a:ln>
-        </p:spPr>
-        <p:style>
-          <a:lnRef idx="1">
-            <a:schemeClr val="accent1"/>
-          </a:lnRef>
-          <a:fillRef idx="3">
-            <a:schemeClr val="accent1"/>
-          </a:fillRef>
-          <a:effectRef idx="2">
-            <a:schemeClr val="accent1"/>
-          </a:effectRef>
-          <a:fontRef idx="minor">
-            <a:schemeClr val="lt1"/>
-          </a:fontRef>
-        </p:style>
-        <p:txBody>
-          <a:bodyPr rtlCol="0" anchor="ctr"/>
-          <a:lstStyle/>
-          <a:p>
-            <a:pPr algn="ctr"/>
-          </a:p>
-        </p:txBody>
-      </p:sp>
-      <p:sp>
-        <p:nvSpPr>
-          <p:cNvPr id="3" name="Rectangle 2"/>
-          <p:cNvSpPr/>
-          <p:nvPr/>
-        </p:nvSpPr>
-        <p:spPr>
-          <a:xfrm>
-            <a:off x="0" y="0"/>
-            <a:ext cx="164592" cy="6858000"/>
-          </a:xfrm>
-          <a:prstGeom prst="rect">
-            <a:avLst/>
-          </a:prstGeom>
-          <a:solidFill>
-            <a:srgbClr val="FFD000"/>
-          </a:solidFill>
-          <a:ln>
-            <a:noFill/>
-          </a:ln>
-        </p:spPr>
-        <p:style>
-          <a:lnRef idx="1">
-            <a:schemeClr val="accent1"/>
-          </a:lnRef>
-          <a:fillRef idx="3">
-            <a:schemeClr val="accent1"/>
-          </a:fillRef>
-          <a:effectRef idx="2">
-            <a:schemeClr val="accent1"/>
-          </a:effectRef>
-          <a:fontRef idx="minor">
-            <a:schemeClr val="lt1"/>
-          </a:fontRef>
-        </p:style>
-        <p:txBody>
-          <a:bodyPr rtlCol="0" anchor="ctr"/>
-          <a:lstStyle/>
-          <a:p>
-            <a:pPr algn="ctr"/>
-          </a:p>
-        </p:txBody>
-      </p:sp>
-      <p:pic>
-        <p:nvPicPr>
-          <p:cNvPr id="4" name="Picture 3" descr="logo_uniajc_blanco.png"/>
-          <p:cNvPicPr>
-            <a:picLocks noChangeAspect="1"/>
-          </p:cNvPicPr>
-          <p:nvPr/>
-        </p:nvPicPr>
-        <p:blipFill>
-          <a:blip r:embed="rId2"/>
-          <a:stretch>
-            <a:fillRect/>
-          </a:stretch>
-        </p:blipFill>
-        <p:spPr>
-          <a:xfrm>
-            <a:off x="10134295" y="320040"/>
-            <a:ext cx="1645920" cy="717394"/>
-          </a:xfrm>
-          <a:prstGeom prst="rect">
-            <a:avLst/>
-          </a:prstGeom>
-        </p:spPr>
-      </p:pic>
-      <p:sp>
-        <p:nvSpPr>
-          <p:cNvPr id="5" name="TextBox 4"/>
-          <p:cNvSpPr txBox="1"/>
-          <p:nvPr/>
-        </p:nvSpPr>
-        <p:spPr>
-          <a:xfrm>
-            <a:off x="685800" y="1280160"/>
-            <a:ext cx="10820095" cy="365760"/>
-          </a:xfrm>
-          <a:prstGeom prst="rect">
-            <a:avLst/>
-          </a:prstGeom>
-          <a:noFill/>
-        </p:spPr>
-        <p:txBody>
-          <a:bodyPr wrap="square">
-            <a:spAutoFit/>
-          </a:bodyPr>
-          <a:lstStyle/>
-          <a:p>
-            <a:pPr algn="ctr"/>
-            <a:r>
-              <a:rPr sz="1400" b="1" i="0">
-                <a:solidFill>
-                  <a:srgbClr val="269CCB"/>
-                </a:solidFill>
-                <a:latin typeface="Calibri"/>
-              </a:rPr>
-              <a:t>Pregunta de entrada</a:t>
-            </a:r>
-          </a:p>
-        </p:txBody>
-      </p:sp>
-      <p:sp>
-        <p:nvSpPr>
-          <p:cNvPr id="6" name="TextBox 5"/>
-          <p:cNvSpPr txBox="1"/>
-          <p:nvPr/>
-        </p:nvSpPr>
-        <p:spPr>
-          <a:xfrm>
-            <a:off x="685800" y="1828800"/>
-            <a:ext cx="10820095" cy="2011680"/>
-          </a:xfrm>
-          <a:prstGeom prst="rect">
-            <a:avLst/>
-          </a:prstGeom>
-          <a:noFill/>
-        </p:spPr>
-        <p:txBody>
-          <a:bodyPr wrap="square" anchor="ctr"/>
-          <a:lstStyle/>
-          <a:p>
-            <a:pPr algn="ctr"/>
-            <a:r>
-              <a:rPr sz="2800" b="1" i="0">
-                <a:solidFill>
-                  <a:srgbClr val="FFFFFF"/>
-                </a:solidFill>
-                <a:latin typeface="Calibri"/>
-              </a:rPr>
-              <a:t>¿Dónde está «la nube»? Y más incómodo: ¿cuánta agua se bebió su última consulta a un asistente de IA?</a:t>
-            </a:r>
-          </a:p>
-        </p:txBody>
-      </p:sp>
-      <p:sp>
-        <p:nvSpPr>
-          <p:cNvPr id="7" name="TextBox 6"/>
-          <p:cNvSpPr txBox="1"/>
-          <p:nvPr/>
-        </p:nvSpPr>
-        <p:spPr>
-          <a:xfrm>
-            <a:off x="822960" y="4114800"/>
-            <a:ext cx="10545775" cy="1645920"/>
-          </a:xfrm>
-          <a:prstGeom prst="rect">
-            <a:avLst/>
-          </a:prstGeom>
-          <a:noFill/>
-        </p:spPr>
-        <p:txBody>
-          <a:bodyPr wrap="square">
-            <a:spAutoFit/>
-          </a:bodyPr>
-          <a:lstStyle/>
-          <a:p>
-            <a:pPr algn="ctr">
-              <a:spcAft>
-                <a:spcPts val="600"/>
-              </a:spcAft>
-            </a:pPr>
-            <a:r>
-              <a:rPr sz="1500" b="0" i="0">
-                <a:solidFill>
-                  <a:srgbClr val="269CCB"/>
-                </a:solidFill>
-                <a:latin typeface="Calibri"/>
-              </a:rPr>
-              <a:t>La nube es un edificio con servidores, electricidad y un sistema de enfriamiento.</a:t>
-            </a:r>
-          </a:p>
-          <a:p>
-            <a:pPr algn="ctr">
-              <a:spcAft>
-                <a:spcPts val="600"/>
-              </a:spcAft>
-            </a:pPr>
-            <a:r>
-              <a:rPr sz="1500" b="0" i="0">
-                <a:solidFill>
-                  <a:srgbClr val="269CCB"/>
-                </a:solidFill>
-                <a:latin typeface="Calibri"/>
-              </a:rPr>
-              <a:t>Hoy le ponemos materia, energía y residuos a algo que parece que no tiene ninguna.</a:t>
-            </a:r>
-          </a:p>
-        </p:txBody>
-      </p:sp>
-      <p:sp>
-        <p:nvSpPr>
-          <p:cNvPr id="8" name="TextBox 7"/>
-          <p:cNvSpPr txBox="1"/>
-          <p:nvPr/>
-        </p:nvSpPr>
-        <p:spPr>
-          <a:xfrm>
-            <a:off x="11185855" y="6473952"/>
-            <a:ext cx="640080" cy="274320"/>
-          </a:xfrm>
-          <a:prstGeom prst="rect">
-            <a:avLst/>
-          </a:prstGeom>
-          <a:noFill/>
-        </p:spPr>
-        <p:txBody>
-          <a:bodyPr wrap="square">
-            <a:spAutoFit/>
-          </a:bodyPr>
-          <a:lstStyle/>
-          <a:p>
-            <a:pPr algn="r"/>
-            <a:r>
-              <a:rPr sz="1100" b="0" i="0">
-                <a:solidFill>
-                  <a:srgbClr val="666666"/>
-                </a:solidFill>
-                <a:latin typeface="Calibri"/>
-              </a:rPr>
-              <a:t>4</a:t>
-            </a:r>
-          </a:p>
-        </p:txBody>
-      </p:sp>
-    </p:spTree>
-  </p:cSld>
-  <p:clrMapOvr>
-    <a:masterClrMapping/>
-  </p:clrMapOvr>
-</p:sld>
-</file>
-
-<file path=ppt/slides/slide5.xml><?xml version="1.0" encoding="utf-8"?>
-<p:sld xmlns:a="http://schemas.openxmlformats.org/drawingml/2006/main" xmlns:p="http://schemas.openxmlformats.org/presentationml/2006/main" xmlns:r="http://schemas.openxmlformats.org/officeDocument/2006/relationships">
-  <p:cSld>
-    <p:bg>
-      <p:bgPr>
-        <a:solidFill>
-          <a:srgbClr val="FFFFFF"/>
-        </a:solidFill>
-        <a:effectLst/>
-      </p:bgPr>
-    </p:bg>
-    <p:spTree>
-      <p:nvGrpSpPr>
-        <p:cNvPr id="1" name=""/>
-        <p:cNvGrpSpPr/>
-        <p:nvPr/>
-      </p:nvGrpSpPr>
-      <p:grpSpPr/>
-      <p:sp>
-        <p:nvSpPr>
-          <p:cNvPr id="2" name="Rectangle 1"/>
-          <p:cNvSpPr/>
-          <p:nvPr/>
-        </p:nvSpPr>
-        <p:spPr>
-          <a:xfrm>
-            <a:off x="0" y="0"/>
-            <a:ext cx="12191695" cy="1170432"/>
-          </a:xfrm>
-          <a:prstGeom prst="rect">
-            <a:avLst/>
-          </a:prstGeom>
-          <a:solidFill>
-            <a:srgbClr val="095292"/>
-          </a:solidFill>
-          <a:ln>
-            <a:noFill/>
-          </a:ln>
-        </p:spPr>
-        <p:style>
-          <a:lnRef idx="1">
-            <a:schemeClr val="accent1"/>
-          </a:lnRef>
-          <a:fillRef idx="3">
-            <a:schemeClr val="accent1"/>
-          </a:fillRef>
-          <a:effectRef idx="2">
-            <a:schemeClr val="accent1"/>
-          </a:effectRef>
-          <a:fontRef idx="minor">
-            <a:schemeClr val="lt1"/>
-          </a:fontRef>
-        </p:style>
-        <p:txBody>
-          <a:bodyPr rtlCol="0" anchor="ctr"/>
-          <a:lstStyle/>
-          <a:p>
-            <a:pPr algn="ctr"/>
-          </a:p>
-        </p:txBody>
-      </p:sp>
-      <p:sp>
-        <p:nvSpPr>
-          <p:cNvPr id="3" name="Rectangle 2"/>
-          <p:cNvSpPr/>
-          <p:nvPr/>
-        </p:nvSpPr>
-        <p:spPr>
-          <a:xfrm>
-            <a:off x="0" y="1170432"/>
-            <a:ext cx="12191695" cy="41148"/>
-          </a:xfrm>
-          <a:prstGeom prst="rect">
-            <a:avLst/>
-          </a:prstGeom>
-          <a:solidFill>
-            <a:srgbClr val="FFD000"/>
-          </a:solidFill>
-          <a:ln>
-            <a:noFill/>
-          </a:ln>
-        </p:spPr>
-        <p:style>
-          <a:lnRef idx="1">
-            <a:schemeClr val="accent1"/>
-          </a:lnRef>
-          <a:fillRef idx="3">
-            <a:schemeClr val="accent1"/>
-          </a:fillRef>
-          <a:effectRef idx="2">
-            <a:schemeClr val="accent1"/>
-          </a:effectRef>
-          <a:fontRef idx="minor">
-            <a:schemeClr val="lt1"/>
-          </a:fontRef>
-        </p:style>
-        <p:txBody>
-          <a:bodyPr rtlCol="0" anchor="ctr"/>
-          <a:lstStyle/>
-          <a:p>
-            <a:pPr algn="ctr"/>
-          </a:p>
-        </p:txBody>
-      </p:sp>
-      <p:sp>
-        <p:nvSpPr>
-          <p:cNvPr id="4" name="TextBox 3"/>
-          <p:cNvSpPr txBox="1"/>
-          <p:nvPr/>
-        </p:nvSpPr>
-        <p:spPr>
-          <a:xfrm>
-            <a:off x="457200" y="164592"/>
-            <a:ext cx="11277295" cy="384048"/>
-          </a:xfrm>
-          <a:prstGeom prst="rect">
-            <a:avLst/>
-          </a:prstGeom>
-          <a:noFill/>
-        </p:spPr>
-        <p:txBody>
-          <a:bodyPr wrap="square">
-            <a:spAutoFit/>
-          </a:bodyPr>
-          <a:lstStyle/>
-          <a:p>
-            <a:r>
-              <a:rPr sz="2600" b="1" i="0">
-                <a:solidFill>
-                  <a:srgbClr val="FFFFFF"/>
-                </a:solidFill>
-                <a:latin typeface="Calibri"/>
-              </a:rPr>
-              <a:t>Las cuatro etapas de la huella de un sistema</a:t>
-            </a:r>
-          </a:p>
-        </p:txBody>
-      </p:sp>
-      <p:sp>
-        <p:nvSpPr>
-          <p:cNvPr id="5" name="TextBox 4"/>
-          <p:cNvSpPr txBox="1"/>
-          <p:nvPr/>
-        </p:nvSpPr>
-        <p:spPr>
-          <a:xfrm>
-            <a:off x="457200" y="566928"/>
-            <a:ext cx="11277295" cy="411480"/>
-          </a:xfrm>
-          <a:prstGeom prst="rect">
-            <a:avLst/>
-          </a:prstGeom>
-          <a:noFill/>
-        </p:spPr>
-        <p:txBody>
-          <a:bodyPr wrap="square">
-            <a:spAutoFit/>
-          </a:bodyPr>
-          <a:lstStyle/>
-          <a:p>
-            <a:r>
-              <a:rPr sz="1400" b="0" i="0">
-                <a:solidFill>
-                  <a:srgbClr val="B8D8EE"/>
-                </a:solidFill>
-                <a:latin typeface="Calibri"/>
-              </a:rPr>
-              <a:t>«Software» y «nube» son palabras que suenan inmateriales. Las cuatro etapas son materia, energía y residuo — y la etapa 1 cambia la recomendación: alargar la vida útil pesa más que ahorrar batería</a:t>
-            </a:r>
-          </a:p>
-        </p:txBody>
-      </p:sp>
-      <p:sp>
-        <p:nvSpPr>
-          <p:cNvPr id="6" name="Rounded Rectangle 5"/>
-          <p:cNvSpPr/>
-          <p:nvPr/>
-        </p:nvSpPr>
-        <p:spPr>
-          <a:xfrm>
-            <a:off x="5934611" y="1399031"/>
-            <a:ext cx="5735574" cy="4617720"/>
-          </a:xfrm>
-          <a:prstGeom prst="roundRect">
-            <a:avLst>
-              <a:gd name="adj" fmla="val 4000"/>
-            </a:avLst>
-          </a:prstGeom>
-          <a:solidFill>
-            <a:srgbClr val="E8EEF4"/>
-          </a:solidFill>
-          <a:ln>
-            <a:noFill/>
-          </a:ln>
-        </p:spPr>
-        <p:style>
-          <a:lnRef idx="1">
-            <a:schemeClr val="accent1"/>
-          </a:lnRef>
-          <a:fillRef idx="3">
-            <a:schemeClr val="accent1"/>
-          </a:fillRef>
-          <a:effectRef idx="2">
-            <a:schemeClr val="accent1"/>
-          </a:effectRef>
-          <a:fontRef idx="minor">
-            <a:schemeClr val="lt1"/>
-          </a:fontRef>
-        </p:style>
-        <p:txBody>
-          <a:bodyPr rtlCol="0" anchor="ctr"/>
-          <a:lstStyle/>
-          <a:p>
-            <a:pPr algn="ctr"/>
-          </a:p>
-        </p:txBody>
-      </p:sp>
-      <p:pic>
-        <p:nvPicPr>
-          <p:cNvPr id="7" name="Picture 6" descr="etapas-huella-paso1.png"/>
-          <p:cNvPicPr>
-            <a:picLocks noChangeAspect="1"/>
-          </p:cNvPicPr>
-          <p:nvPr/>
-        </p:nvPicPr>
-        <p:blipFill>
-          <a:blip r:embed="rId2"/>
-          <a:stretch>
-            <a:fillRect/>
-          </a:stretch>
-        </p:blipFill>
-        <p:spPr>
-          <a:xfrm>
-            <a:off x="6007763" y="1472184"/>
-            <a:ext cx="5589270" cy="4471416"/>
-          </a:xfrm>
-          <a:prstGeom prst="rect">
-            <a:avLst/>
-          </a:prstGeom>
-        </p:spPr>
-      </p:pic>
-      <p:pic>
-        <p:nvPicPr>
-          <p:cNvPr id="8" name="Picture 7" descr="etapas-huella-paso2.png"/>
-          <p:cNvPicPr>
-            <a:picLocks noChangeAspect="1"/>
-          </p:cNvPicPr>
-          <p:nvPr/>
-        </p:nvPicPr>
-        <p:blipFill>
-          <a:blip r:embed="rId3"/>
-          <a:stretch>
-            <a:fillRect/>
-          </a:stretch>
-        </p:blipFill>
-        <p:spPr>
-          <a:xfrm>
-            <a:off x="6007763" y="1472184"/>
-            <a:ext cx="5589270" cy="4471416"/>
-          </a:xfrm>
-          <a:prstGeom prst="rect">
-            <a:avLst/>
-          </a:prstGeom>
-        </p:spPr>
-      </p:pic>
-      <p:pic>
-        <p:nvPicPr>
-          <p:cNvPr id="9" name="Picture 8" descr="etapas-huella-paso3.png"/>
-          <p:cNvPicPr>
-            <a:picLocks noChangeAspect="1"/>
-          </p:cNvPicPr>
-          <p:nvPr/>
-        </p:nvPicPr>
-        <p:blipFill>
-          <a:blip r:embed="rId4"/>
-          <a:stretch>
-            <a:fillRect/>
-          </a:stretch>
-        </p:blipFill>
-        <p:spPr>
-          <a:xfrm>
-            <a:off x="6007763" y="1472184"/>
-            <a:ext cx="5589270" cy="4471416"/>
-          </a:xfrm>
-          <a:prstGeom prst="rect">
-            <a:avLst/>
-          </a:prstGeom>
-        </p:spPr>
-      </p:pic>
-      <p:pic>
-        <p:nvPicPr>
-          <p:cNvPr id="10" name="Picture 9" descr="etapas-huella-paso4.png"/>
+          <p:cNvPr id="10" name="Picture 9" descr="reporte-tienda-paso4.png"/>
           <p:cNvPicPr>
             <a:picLocks noChangeAspect="1"/>
           </p:cNvPicPr>
@@ -10232,9 +7209,33 @@
           </a:prstGeom>
         </p:spPr>
       </p:pic>
-      <p:sp>
-        <p:nvSpPr>
-          <p:cNvPr id="18" name="TextBox 17"/>
+      <p:pic>
+        <p:nvPicPr>
+          <p:cNvPr id="11" name="Picture 10" descr="reporte-tienda-paso5.png"/>
+          <p:cNvPicPr>
+            <a:picLocks noChangeAspect="1"/>
+          </p:cNvPicPr>
+          <p:nvPr/>
+        </p:nvPicPr>
+        <p:blipFill>
+          <a:blip r:embed="rId6"/>
+          <a:stretch>
+            <a:fillRect/>
+          </a:stretch>
+        </p:blipFill>
+        <p:spPr>
+          <a:xfrm>
+            <a:off x="6007763" y="1472184"/>
+            <a:ext cx="5589270" cy="4471416"/>
+          </a:xfrm>
+          <a:prstGeom prst="rect">
+            <a:avLst/>
+          </a:prstGeom>
+        </p:spPr>
+      </p:pic>
+      <p:sp>
+        <p:nvSpPr>
+          <p:cNvPr id="23" name="TextBox 22"/>
           <p:cNvSpPr txBox="1"/>
           <p:nvPr/>
         </p:nvSpPr>
@@ -10269,7 +7270,7 @@
       </p:sp>
       <p:sp>
         <p:nvSpPr>
-          <p:cNvPr id="19" name="TextBox 18"/>
+          <p:cNvPr id="24" name="TextBox 23"/>
           <p:cNvSpPr txBox="1"/>
           <p:nvPr/>
         </p:nvSpPr>
@@ -10310,7 +7311,7 @@
                 </a:solidFill>
                 <a:latin typeface="Calibri"/>
               </a:rPr>
-              <a:t>FABRICACIÓN:</a:t>
+              <a:t>1 · El recorrido:</a:t>
             </a:r>
             <a:r>
               <a:rPr sz="2000" b="0" i="0">
@@ -10319,7 +7320,7 @@
                 </a:solidFill>
                 <a:latin typeface="Calibri"/>
               </a:rPr>
-              <a:t> Minería, ensamblaje y transporte de dispositivos y servidores.</a:t>
+              <a:t> Computador de la tienda → internet → servidor → base de datos.</a:t>
             </a:r>
           </a:p>
           <a:p>
@@ -10344,7 +7345,7 @@
                 </a:solidFill>
                 <a:latin typeface="Calibri"/>
               </a:rPr>
-              <a:t>USO:</a:t>
+              <a:t>2 · Lo que se repite:</a:t>
             </a:r>
             <a:r>
               <a:rPr sz="2000" b="0" i="0">
@@ -10353,7 +7354,7 @@
                 </a:solidFill>
                 <a:latin typeface="Calibri"/>
               </a:rPr>
-              <a:t> Electricidad del dispositivo, del servidor y del enfriamiento del centro de datos</a:t>
+              <a:t> El reporte se genera completo cada vez que alguien lo abre: 40 veces al día.</a:t>
             </a:r>
           </a:p>
           <a:p>
@@ -10378,7 +7379,7 @@
                 </a:solidFill>
                 <a:latin typeface="Calibri"/>
               </a:rPr>
-              <a:t>RED:</a:t>
+              <a:t>3 · La etapa más pesada:</a:t>
             </a:r>
             <a:r>
               <a:rPr sz="2000" b="0" i="0">
@@ -10387,7 +7388,7 @@
                 </a:solidFill>
                 <a:latin typeface="Calibri"/>
               </a:rPr>
-              <a:t> Cada byte viaja por antenas, cables y equipos que consumen</a:t>
+              <a:t> El servidor: recalcula todo el mes, 40 veces, aunque nada cambió.</a:t>
             </a:r>
           </a:p>
           <a:p>
@@ -10412,7 +7413,7 @@
                 </a:solidFill>
                 <a:latin typeface="Calibri"/>
               </a:rPr>
-              <a:t>FIN DE VIDA:</a:t>
+              <a:t>4 · Dos decisiones:</a:t>
             </a:r>
             <a:r>
               <a:rPr sz="2000" b="0" i="0">
@@ -10421,14 +7422,14 @@
                 </a:solidFill>
                 <a:latin typeface="Calibri"/>
               </a:rPr>
-              <a:t> Residuo electrónico (RAEE): metales, plásticos y sustancias peligrosas</a:t>
-            </a:r>
-          </a:p>
-        </p:txBody>
-      </p:sp>
-      <p:sp>
-        <p:nvSpPr>
-          <p:cNvPr id="20" name="TextBox 19"/>
+              <a:t> Guardar el resultado y recalcular solo si hay ventas nuevas. Abrir solo el día, no el mes.</a:t>
+            </a:r>
+          </a:p>
+        </p:txBody>
+      </p:sp>
+      <p:sp>
+        <p:nvSpPr>
+          <p:cNvPr id="25" name="TextBox 24"/>
           <p:cNvSpPr txBox="1"/>
           <p:nvPr/>
         </p:nvSpPr>
@@ -10456,7 +7457,7 @@
                 </a:solidFill>
                 <a:latin typeface="Calibri"/>
               </a:rPr>
-              <a:t>5</a:t>
+              <a:t>13</a:t>
             </a:r>
           </a:p>
         </p:txBody>
@@ -10633,6 +7634,3251 @@
                       </p:childTnLst>
                     </p:cTn>
                   </p:par>
+                  <p:par>
+                    <p:cTn id="18" fill="hold">
+                      <p:stCondLst>
+                        <p:cond delay="indefinite"/>
+                      </p:stCondLst>
+                      <p:childTnLst>
+                        <p:par>
+                          <p:cTn id="19" fill="hold">
+                            <p:stCondLst>
+                              <p:cond delay="0"/>
+                            </p:stCondLst>
+                            <p:childTnLst>
+                              <p:par>
+                                <p:cTn id="20" presetID="10" presetClass="entr" presetSubtype="0" fill="hold" nodeType="clickEffect">
+                                  <p:stCondLst>
+                                    <p:cond delay="0"/>
+                                  </p:stCondLst>
+                                  <p:childTnLst>
+                                    <p:set>
+                                      <p:cBhvr>
+                                        <p:cTn id="21" dur="1" fill="hold">
+                                          <p:stCondLst>
+                                            <p:cond delay="0"/>
+                                          </p:stCondLst>
+                                        </p:cTn>
+                                        <p:tgtEl>
+                                          <p:spTgt spid="11"/>
+                                        </p:tgtEl>
+                                        <p:attrNameLst>
+                                          <p:attrName>style.visibility</p:attrName>
+                                        </p:attrNameLst>
+                                      </p:cBhvr>
+                                      <p:to>
+                                        <p:strVal val="visible"/>
+                                      </p:to>
+                                    </p:set>
+                                    <p:animEffect transition="in" filter="fade">
+                                      <p:cBhvr>
+                                        <p:cTn id="22" dur="450"/>
+                                        <p:tgtEl>
+                                          <p:spTgt spid="11"/>
+                                        </p:tgtEl>
+                                      </p:cBhvr>
+                                    </p:animEffect>
+                                  </p:childTnLst>
+                                </p:cTn>
+                              </p:par>
+                            </p:childTnLst>
+                          </p:cTn>
+                        </p:par>
+                      </p:childTnLst>
+                    </p:cTn>
+                  </p:par>
+                </p:childTnLst>
+              </p:cTn>
+              <p:prevCondLst>
+                <p:cond evt="onPrev" delay="0">
+                  <p:tgtEl>
+                    <p:sldTgt/>
+                  </p:tgtEl>
+                </p:cond>
+              </p:prevCondLst>
+              <p:nextCondLst>
+                <p:cond evt="onNext" delay="0">
+                  <p:tgtEl>
+                    <p:sldTgt/>
+                  </p:tgtEl>
+                </p:cond>
+              </p:nextCondLst>
+            </p:seq>
+          </p:childTnLst>
+        </p:cTn>
+      </p:par>
+    </p:tnLst>
+  </p:timing>
+</p:sld>
+</file>
+
+<file path=ppt/slides/slide14.xml><?xml version="1.0" encoding="utf-8"?>
+<p:sld xmlns:a="http://schemas.openxmlformats.org/drawingml/2006/main" xmlns:p="http://schemas.openxmlformats.org/presentationml/2006/main" xmlns:r="http://schemas.openxmlformats.org/officeDocument/2006/relationships">
+  <p:cSld>
+    <p:bg>
+      <p:bgPr>
+        <a:solidFill>
+          <a:srgbClr val="FFFFFF"/>
+        </a:solidFill>
+        <a:effectLst/>
+      </p:bgPr>
+    </p:bg>
+    <p:spTree>
+      <p:nvGrpSpPr>
+        <p:cNvPr id="1" name=""/>
+        <p:cNvGrpSpPr/>
+        <p:nvPr/>
+      </p:nvGrpSpPr>
+      <p:grpSpPr/>
+      <p:sp>
+        <p:nvSpPr>
+          <p:cNvPr id="2" name="Rectangle 1"/>
+          <p:cNvSpPr/>
+          <p:nvPr/>
+        </p:nvSpPr>
+        <p:spPr>
+          <a:xfrm>
+            <a:off x="0" y="0"/>
+            <a:ext cx="12191695" cy="960120"/>
+          </a:xfrm>
+          <a:prstGeom prst="rect">
+            <a:avLst/>
+          </a:prstGeom>
+          <a:solidFill>
+            <a:srgbClr val="095292"/>
+          </a:solidFill>
+          <a:ln>
+            <a:noFill/>
+          </a:ln>
+        </p:spPr>
+        <p:style>
+          <a:lnRef idx="1">
+            <a:schemeClr val="accent1"/>
+          </a:lnRef>
+          <a:fillRef idx="3">
+            <a:schemeClr val="accent1"/>
+          </a:fillRef>
+          <a:effectRef idx="2">
+            <a:schemeClr val="accent1"/>
+          </a:effectRef>
+          <a:fontRef idx="minor">
+            <a:schemeClr val="lt1"/>
+          </a:fontRef>
+        </p:style>
+        <p:txBody>
+          <a:bodyPr rtlCol="0" anchor="ctr"/>
+          <a:lstStyle/>
+          <a:p>
+            <a:pPr algn="ctr"/>
+          </a:p>
+        </p:txBody>
+      </p:sp>
+      <p:sp>
+        <p:nvSpPr>
+          <p:cNvPr id="3" name="Rectangle 2"/>
+          <p:cNvSpPr/>
+          <p:nvPr/>
+        </p:nvSpPr>
+        <p:spPr>
+          <a:xfrm>
+            <a:off x="0" y="960120"/>
+            <a:ext cx="12191695" cy="41148"/>
+          </a:xfrm>
+          <a:prstGeom prst="rect">
+            <a:avLst/>
+          </a:prstGeom>
+          <a:solidFill>
+            <a:srgbClr val="FFD000"/>
+          </a:solidFill>
+          <a:ln>
+            <a:noFill/>
+          </a:ln>
+        </p:spPr>
+        <p:style>
+          <a:lnRef idx="1">
+            <a:schemeClr val="accent1"/>
+          </a:lnRef>
+          <a:fillRef idx="3">
+            <a:schemeClr val="accent1"/>
+          </a:fillRef>
+          <a:effectRef idx="2">
+            <a:schemeClr val="accent1"/>
+          </a:effectRef>
+          <a:fontRef idx="minor">
+            <a:schemeClr val="lt1"/>
+          </a:fontRef>
+        </p:style>
+        <p:txBody>
+          <a:bodyPr rtlCol="0" anchor="ctr"/>
+          <a:lstStyle/>
+          <a:p>
+            <a:pPr algn="ctr"/>
+          </a:p>
+        </p:txBody>
+      </p:sp>
+      <p:sp>
+        <p:nvSpPr>
+          <p:cNvPr id="4" name="TextBox 3"/>
+          <p:cNvSpPr txBox="1"/>
+          <p:nvPr/>
+        </p:nvSpPr>
+        <p:spPr>
+          <a:xfrm>
+            <a:off x="457200" y="164592"/>
+            <a:ext cx="11277295" cy="502920"/>
+          </a:xfrm>
+          <a:prstGeom prst="rect">
+            <a:avLst/>
+          </a:prstGeom>
+          <a:noFill/>
+        </p:spPr>
+        <p:txBody>
+          <a:bodyPr wrap="square">
+            <a:spAutoFit/>
+          </a:bodyPr>
+          <a:lstStyle/>
+          <a:p>
+            <a:r>
+              <a:rPr sz="2600" b="1" i="0">
+                <a:solidFill>
+                  <a:srgbClr val="FFFFFF"/>
+                </a:solidFill>
+                <a:latin typeface="Calibri"/>
+              </a:rPr>
+              <a:t>Dos trampas de esta clase</a:t>
+            </a:r>
+          </a:p>
+        </p:txBody>
+      </p:sp>
+      <p:sp>
+        <p:nvSpPr>
+          <p:cNvPr id="5" name="Rounded Rectangle 4"/>
+          <p:cNvSpPr/>
+          <p:nvPr/>
+        </p:nvSpPr>
+        <p:spPr>
+          <a:xfrm>
+            <a:off x="457200" y="1261872"/>
+            <a:ext cx="11277295" cy="1051560"/>
+          </a:xfrm>
+          <a:prstGeom prst="roundRect">
+            <a:avLst>
+              <a:gd name="adj" fmla="val 12000"/>
+            </a:avLst>
+          </a:prstGeom>
+          <a:solidFill>
+            <a:srgbClr val="FBE4E4"/>
+          </a:solidFill>
+          <a:ln>
+            <a:noFill/>
+          </a:ln>
+        </p:spPr>
+        <p:style>
+          <a:lnRef idx="1">
+            <a:schemeClr val="accent1"/>
+          </a:lnRef>
+          <a:fillRef idx="3">
+            <a:schemeClr val="accent1"/>
+          </a:fillRef>
+          <a:effectRef idx="2">
+            <a:schemeClr val="accent1"/>
+          </a:effectRef>
+          <a:fontRef idx="minor">
+            <a:schemeClr val="lt1"/>
+          </a:fontRef>
+        </p:style>
+        <p:txBody>
+          <a:bodyPr rtlCol="0" anchor="ctr"/>
+          <a:lstStyle/>
+          <a:p>
+            <a:pPr algn="ctr"/>
+          </a:p>
+        </p:txBody>
+      </p:sp>
+      <p:sp>
+        <p:nvSpPr>
+          <p:cNvPr id="6" name="Rectangle 5"/>
+          <p:cNvSpPr/>
+          <p:nvPr/>
+        </p:nvSpPr>
+        <p:spPr>
+          <a:xfrm>
+            <a:off x="457200" y="1261872"/>
+            <a:ext cx="128016" cy="1051560"/>
+          </a:xfrm>
+          <a:prstGeom prst="rect">
+            <a:avLst/>
+          </a:prstGeom>
+          <a:solidFill>
+            <a:srgbClr val="A02030"/>
+          </a:solidFill>
+          <a:ln>
+            <a:noFill/>
+          </a:ln>
+        </p:spPr>
+        <p:style>
+          <a:lnRef idx="1">
+            <a:schemeClr val="accent1"/>
+          </a:lnRef>
+          <a:fillRef idx="3">
+            <a:schemeClr val="accent1"/>
+          </a:fillRef>
+          <a:effectRef idx="2">
+            <a:schemeClr val="accent1"/>
+          </a:effectRef>
+          <a:fontRef idx="minor">
+            <a:schemeClr val="lt1"/>
+          </a:fontRef>
+        </p:style>
+        <p:txBody>
+          <a:bodyPr rtlCol="0" anchor="ctr"/>
+          <a:lstStyle/>
+          <a:p>
+            <a:pPr algn="ctr"/>
+          </a:p>
+        </p:txBody>
+      </p:sp>
+      <p:sp>
+        <p:nvSpPr>
+          <p:cNvPr id="7" name="TextBox 6"/>
+          <p:cNvSpPr txBox="1"/>
+          <p:nvPr/>
+        </p:nvSpPr>
+        <p:spPr>
+          <a:xfrm>
+            <a:off x="777240" y="1399031"/>
+            <a:ext cx="10774375" cy="822959"/>
+          </a:xfrm>
+          <a:prstGeom prst="rect">
+            <a:avLst/>
+          </a:prstGeom>
+          <a:noFill/>
+        </p:spPr>
+        <p:txBody>
+          <a:bodyPr wrap="square">
+            <a:spAutoFit/>
+          </a:bodyPr>
+          <a:lstStyle/>
+          <a:p>
+            <a:r>
+              <a:rPr sz="1200" b="1" i="0">
+                <a:solidFill>
+                  <a:srgbClr val="A02030"/>
+                </a:solidFill>
+                <a:latin typeface="Calibri"/>
+              </a:rPr>
+              <a:t>Atención</a:t>
+            </a:r>
+          </a:p>
+          <a:p>
+            <a:pPr>
+              <a:spcBef>
+                <a:spcPts val="400"/>
+              </a:spcBef>
+            </a:pPr>
+            <a:r>
+              <a:rPr sz="1400" b="1" i="0">
+                <a:solidFill>
+                  <a:srgbClr val="333333"/>
+                </a:solidFill>
+                <a:latin typeface="Calibri"/>
+              </a:rPr>
+              <a:t>Las cifras ambientales son el terreno favorito de la invención.</a:t>
+            </a:r>
+            <a:r>
+              <a:rPr sz="1400" b="0" i="0">
+                <a:solidFill>
+                  <a:srgbClr val="333333"/>
+                </a:solidFill>
+                <a:latin typeface="Calibri"/>
+              </a:rPr>
+              <a:t> Circulan números de litros de agua por consulta y de gramos de CO₂ por búsqueda que cambian por órdenes de magnitud entre fuentes, y muchos se citan sin decir de qué sistema ni de qué año son. Hoy </a:t>
+            </a:r>
+            <a:r>
+              <a:rPr sz="1400" b="1" i="0">
+                <a:solidFill>
+                  <a:srgbClr val="333333"/>
+                </a:solidFill>
+                <a:latin typeface="Calibri"/>
+              </a:rPr>
+              <a:t>toda cifra va con fuente, año y alcance</a:t>
+            </a:r>
+            <a:r>
+              <a:rPr sz="1400" b="0" i="0">
+                <a:solidFill>
+                  <a:srgbClr val="333333"/>
+                </a:solidFill>
+                <a:latin typeface="Calibri"/>
+              </a:rPr>
+              <a:t> — o no va.</a:t>
+            </a:r>
+          </a:p>
+        </p:txBody>
+      </p:sp>
+      <p:sp>
+        <p:nvSpPr>
+          <p:cNvPr id="8" name="Rounded Rectangle 7"/>
+          <p:cNvSpPr/>
+          <p:nvPr/>
+        </p:nvSpPr>
+        <p:spPr>
+          <a:xfrm>
+            <a:off x="457200" y="2478024"/>
+            <a:ext cx="11277295" cy="1051560"/>
+          </a:xfrm>
+          <a:prstGeom prst="roundRect">
+            <a:avLst>
+              <a:gd name="adj" fmla="val 12000"/>
+            </a:avLst>
+          </a:prstGeom>
+          <a:solidFill>
+            <a:srgbClr val="FFF8E1"/>
+          </a:solidFill>
+          <a:ln>
+            <a:noFill/>
+          </a:ln>
+        </p:spPr>
+        <p:style>
+          <a:lnRef idx="1">
+            <a:schemeClr val="accent1"/>
+          </a:lnRef>
+          <a:fillRef idx="3">
+            <a:schemeClr val="accent1"/>
+          </a:fillRef>
+          <a:effectRef idx="2">
+            <a:schemeClr val="accent1"/>
+          </a:effectRef>
+          <a:fontRef idx="minor">
+            <a:schemeClr val="lt1"/>
+          </a:fontRef>
+        </p:style>
+        <p:txBody>
+          <a:bodyPr rtlCol="0" anchor="ctr"/>
+          <a:lstStyle/>
+          <a:p>
+            <a:pPr algn="ctr"/>
+          </a:p>
+        </p:txBody>
+      </p:sp>
+      <p:sp>
+        <p:nvSpPr>
+          <p:cNvPr id="9" name="Rectangle 8"/>
+          <p:cNvSpPr/>
+          <p:nvPr/>
+        </p:nvSpPr>
+        <p:spPr>
+          <a:xfrm>
+            <a:off x="457200" y="2478024"/>
+            <a:ext cx="128016" cy="1051560"/>
+          </a:xfrm>
+          <a:prstGeom prst="rect">
+            <a:avLst/>
+          </a:prstGeom>
+          <a:solidFill>
+            <a:srgbClr val="FFD000"/>
+          </a:solidFill>
+          <a:ln>
+            <a:noFill/>
+          </a:ln>
+        </p:spPr>
+        <p:style>
+          <a:lnRef idx="1">
+            <a:schemeClr val="accent1"/>
+          </a:lnRef>
+          <a:fillRef idx="3">
+            <a:schemeClr val="accent1"/>
+          </a:fillRef>
+          <a:effectRef idx="2">
+            <a:schemeClr val="accent1"/>
+          </a:effectRef>
+          <a:fontRef idx="minor">
+            <a:schemeClr val="lt1"/>
+          </a:fontRef>
+        </p:style>
+        <p:txBody>
+          <a:bodyPr rtlCol="0" anchor="ctr"/>
+          <a:lstStyle/>
+          <a:p>
+            <a:pPr algn="ctr"/>
+          </a:p>
+        </p:txBody>
+      </p:sp>
+      <p:sp>
+        <p:nvSpPr>
+          <p:cNvPr id="10" name="TextBox 9"/>
+          <p:cNvSpPr txBox="1"/>
+          <p:nvPr/>
+        </p:nvSpPr>
+        <p:spPr>
+          <a:xfrm>
+            <a:off x="777240" y="2615184"/>
+            <a:ext cx="10774375" cy="822959"/>
+          </a:xfrm>
+          <a:prstGeom prst="rect">
+            <a:avLst/>
+          </a:prstGeom>
+          <a:noFill/>
+        </p:spPr>
+        <p:txBody>
+          <a:bodyPr wrap="square">
+            <a:spAutoFit/>
+          </a:bodyPr>
+          <a:lstStyle/>
+          <a:p>
+            <a:r>
+              <a:rPr sz="1200" b="1" i="0">
+                <a:solidFill>
+                  <a:srgbClr val="FFD000"/>
+                </a:solidFill>
+                <a:latin typeface="Calibri"/>
+              </a:rPr>
+              <a:t>Aclaración</a:t>
+            </a:r>
+          </a:p>
+          <a:p>
+            <a:pPr>
+              <a:spcBef>
+                <a:spcPts val="400"/>
+              </a:spcBef>
+            </a:pPr>
+            <a:r>
+              <a:rPr sz="1400" b="1" i="0">
+                <a:solidFill>
+                  <a:srgbClr val="333333"/>
+                </a:solidFill>
+                <a:latin typeface="Calibri"/>
+              </a:rPr>
+              <a:t>«Lo digital contamina menos que el papel» no es una respuesta.</a:t>
+            </a:r>
+            <a:r>
+              <a:rPr sz="1400" b="0" i="0">
+                <a:solidFill>
+                  <a:srgbClr val="333333"/>
+                </a:solidFill>
+                <a:latin typeface="Calibri"/>
+              </a:rPr>
+              <a:t> A veces sí y a veces no: depende del número de usos, del dispositivo y de si obliga a comprar aparatos nuevos. Comparar sirve solo si se dice qué se comparó.</a:t>
+            </a:r>
+          </a:p>
+        </p:txBody>
+      </p:sp>
+      <p:sp>
+        <p:nvSpPr>
+          <p:cNvPr id="11" name="Rounded Rectangle 10"/>
+          <p:cNvSpPr/>
+          <p:nvPr/>
+        </p:nvSpPr>
+        <p:spPr>
+          <a:xfrm>
+            <a:off x="457200" y="3694176"/>
+            <a:ext cx="11277295" cy="1051560"/>
+          </a:xfrm>
+          <a:prstGeom prst="roundRect">
+            <a:avLst>
+              <a:gd name="adj" fmla="val 12000"/>
+            </a:avLst>
+          </a:prstGeom>
+          <a:solidFill>
+            <a:srgbClr val="E8F4FA"/>
+          </a:solidFill>
+          <a:ln>
+            <a:noFill/>
+          </a:ln>
+        </p:spPr>
+        <p:style>
+          <a:lnRef idx="1">
+            <a:schemeClr val="accent1"/>
+          </a:lnRef>
+          <a:fillRef idx="3">
+            <a:schemeClr val="accent1"/>
+          </a:fillRef>
+          <a:effectRef idx="2">
+            <a:schemeClr val="accent1"/>
+          </a:effectRef>
+          <a:fontRef idx="minor">
+            <a:schemeClr val="lt1"/>
+          </a:fontRef>
+        </p:style>
+        <p:txBody>
+          <a:bodyPr rtlCol="0" anchor="ctr"/>
+          <a:lstStyle/>
+          <a:p>
+            <a:pPr algn="ctr"/>
+          </a:p>
+        </p:txBody>
+      </p:sp>
+      <p:sp>
+        <p:nvSpPr>
+          <p:cNvPr id="12" name="Rectangle 11"/>
+          <p:cNvSpPr/>
+          <p:nvPr/>
+        </p:nvSpPr>
+        <p:spPr>
+          <a:xfrm>
+            <a:off x="457200" y="3694176"/>
+            <a:ext cx="128016" cy="1051560"/>
+          </a:xfrm>
+          <a:prstGeom prst="rect">
+            <a:avLst/>
+          </a:prstGeom>
+          <a:solidFill>
+            <a:srgbClr val="269CCB"/>
+          </a:solidFill>
+          <a:ln>
+            <a:noFill/>
+          </a:ln>
+        </p:spPr>
+        <p:style>
+          <a:lnRef idx="1">
+            <a:schemeClr val="accent1"/>
+          </a:lnRef>
+          <a:fillRef idx="3">
+            <a:schemeClr val="accent1"/>
+          </a:fillRef>
+          <a:effectRef idx="2">
+            <a:schemeClr val="accent1"/>
+          </a:effectRef>
+          <a:fontRef idx="minor">
+            <a:schemeClr val="lt1"/>
+          </a:fontRef>
+        </p:style>
+        <p:txBody>
+          <a:bodyPr rtlCol="0" anchor="ctr"/>
+          <a:lstStyle/>
+          <a:p>
+            <a:pPr algn="ctr"/>
+          </a:p>
+        </p:txBody>
+      </p:sp>
+      <p:sp>
+        <p:nvSpPr>
+          <p:cNvPr id="13" name="TextBox 12"/>
+          <p:cNvSpPr txBox="1"/>
+          <p:nvPr/>
+        </p:nvSpPr>
+        <p:spPr>
+          <a:xfrm>
+            <a:off x="777240" y="3831336"/>
+            <a:ext cx="10774375" cy="822959"/>
+          </a:xfrm>
+          <a:prstGeom prst="rect">
+            <a:avLst/>
+          </a:prstGeom>
+          <a:noFill/>
+        </p:spPr>
+        <p:txBody>
+          <a:bodyPr wrap="square">
+            <a:spAutoFit/>
+          </a:bodyPr>
+          <a:lstStyle/>
+          <a:p>
+            <a:r>
+              <a:rPr sz="1200" b="1" i="0">
+                <a:solidFill>
+                  <a:srgbClr val="269CCB"/>
+                </a:solidFill>
+                <a:latin typeface="Calibri"/>
+              </a:rPr>
+              <a:t>Info</a:t>
+            </a:r>
+          </a:p>
+          <a:p>
+            <a:pPr>
+              <a:spcBef>
+                <a:spcPts val="400"/>
+              </a:spcBef>
+            </a:pPr>
+            <a:r>
+              <a:rPr sz="1400" b="1" i="0">
+                <a:solidFill>
+                  <a:srgbClr val="333333"/>
+                </a:solidFill>
+                <a:latin typeface="Calibri"/>
+              </a:rPr>
+              <a:t>Lo que sí se puede afirmar sin exagerar:</a:t>
+            </a:r>
+            <a:r>
+              <a:rPr sz="1400" b="0" i="0">
+                <a:solidFill>
+                  <a:srgbClr val="333333"/>
+                </a:solidFill>
+                <a:latin typeface="Calibri"/>
+              </a:rPr>
+              <a:t> que la huella existe, que tiene cuatro etapas, que se puede reducir con decisiones de diseño y que casi nadie la mide. Eso alcanza para trabajar con rigor en primer semestre.</a:t>
+            </a:r>
+          </a:p>
+        </p:txBody>
+      </p:sp>
+      <p:sp>
+        <p:nvSpPr>
+          <p:cNvPr id="14" name="TextBox 13"/>
+          <p:cNvSpPr txBox="1"/>
+          <p:nvPr/>
+        </p:nvSpPr>
+        <p:spPr>
+          <a:xfrm>
+            <a:off x="11185855" y="6473952"/>
+            <a:ext cx="640080" cy="274320"/>
+          </a:xfrm>
+          <a:prstGeom prst="rect">
+            <a:avLst/>
+          </a:prstGeom>
+          <a:noFill/>
+        </p:spPr>
+        <p:txBody>
+          <a:bodyPr wrap="square">
+            <a:spAutoFit/>
+          </a:bodyPr>
+          <a:lstStyle/>
+          <a:p>
+            <a:pPr algn="r"/>
+            <a:r>
+              <a:rPr sz="1100" b="0" i="0">
+                <a:solidFill>
+                  <a:srgbClr val="666666"/>
+                </a:solidFill>
+                <a:latin typeface="Calibri"/>
+              </a:rPr>
+              <a:t>14</a:t>
+            </a:r>
+          </a:p>
+        </p:txBody>
+      </p:sp>
+    </p:spTree>
+  </p:cSld>
+  <p:clrMapOvr>
+    <a:masterClrMapping/>
+  </p:clrMapOvr>
+</p:sld>
+</file>
+
+<file path=ppt/slides/slide15.xml><?xml version="1.0" encoding="utf-8"?>
+<p:sld xmlns:a="http://schemas.openxmlformats.org/drawingml/2006/main" xmlns:p="http://schemas.openxmlformats.org/presentationml/2006/main" xmlns:r="http://schemas.openxmlformats.org/officeDocument/2006/relationships">
+  <p:cSld>
+    <p:bg>
+      <p:bgPr>
+        <a:solidFill>
+          <a:srgbClr val="FFFFFF"/>
+        </a:solidFill>
+        <a:effectLst/>
+      </p:bgPr>
+    </p:bg>
+    <p:spTree>
+      <p:nvGrpSpPr>
+        <p:cNvPr id="1" name=""/>
+        <p:cNvGrpSpPr/>
+        <p:nvPr/>
+      </p:nvGrpSpPr>
+      <p:grpSpPr/>
+      <p:sp>
+        <p:nvSpPr>
+          <p:cNvPr id="2" name="Rectangle 1"/>
+          <p:cNvSpPr/>
+          <p:nvPr/>
+        </p:nvSpPr>
+        <p:spPr>
+          <a:xfrm>
+            <a:off x="0" y="0"/>
+            <a:ext cx="12191695" cy="164592"/>
+          </a:xfrm>
+          <a:prstGeom prst="rect">
+            <a:avLst/>
+          </a:prstGeom>
+          <a:solidFill>
+            <a:srgbClr val="269CCB"/>
+          </a:solidFill>
+          <a:ln>
+            <a:noFill/>
+          </a:ln>
+        </p:spPr>
+        <p:style>
+          <a:lnRef idx="1">
+            <a:schemeClr val="accent1"/>
+          </a:lnRef>
+          <a:fillRef idx="3">
+            <a:schemeClr val="accent1"/>
+          </a:fillRef>
+          <a:effectRef idx="2">
+            <a:schemeClr val="accent1"/>
+          </a:effectRef>
+          <a:fontRef idx="minor">
+            <a:schemeClr val="lt1"/>
+          </a:fontRef>
+        </p:style>
+        <p:txBody>
+          <a:bodyPr rtlCol="0" anchor="ctr"/>
+          <a:lstStyle/>
+          <a:p>
+            <a:pPr algn="ctr"/>
+          </a:p>
+        </p:txBody>
+      </p:sp>
+      <p:pic>
+        <p:nvPicPr>
+          <p:cNvPr id="3" name="Picture 2" descr="logo_uniajc_color.png"/>
+          <p:cNvPicPr>
+            <a:picLocks noChangeAspect="1"/>
+          </p:cNvPicPr>
+          <p:nvPr/>
+        </p:nvPicPr>
+        <p:blipFill>
+          <a:blip r:embed="rId2"/>
+          <a:stretch>
+            <a:fillRect/>
+          </a:stretch>
+        </p:blipFill>
+        <p:spPr>
+          <a:xfrm>
+            <a:off x="10271455" y="5998464"/>
+            <a:ext cx="1463040" cy="643233"/>
+          </a:xfrm>
+          <a:prstGeom prst="rect">
+            <a:avLst/>
+          </a:prstGeom>
+        </p:spPr>
+      </p:pic>
+      <p:sp>
+        <p:nvSpPr>
+          <p:cNvPr id="4" name="TextBox 3"/>
+          <p:cNvSpPr txBox="1"/>
+          <p:nvPr/>
+        </p:nvSpPr>
+        <p:spPr>
+          <a:xfrm>
+            <a:off x="457200" y="1737360"/>
+            <a:ext cx="11277295" cy="1097280"/>
+          </a:xfrm>
+          <a:prstGeom prst="rect">
+            <a:avLst/>
+          </a:prstGeom>
+          <a:noFill/>
+        </p:spPr>
+        <p:txBody>
+          <a:bodyPr wrap="square" anchor="ctr"/>
+          <a:lstStyle/>
+          <a:p>
+            <a:pPr algn="ctr"/>
+            <a:r>
+              <a:rPr sz="3400" b="1" i="0">
+                <a:solidFill>
+                  <a:srgbClr val="095292"/>
+                </a:solidFill>
+                <a:latin typeface="Calibri"/>
+              </a:rPr>
+              <a:t>Nos vemos en la sesión 6 — cierra el corte 1</a:t>
+            </a:r>
+          </a:p>
+        </p:txBody>
+      </p:sp>
+      <p:sp>
+        <p:nvSpPr>
+          <p:cNvPr id="5" name="TextBox 4"/>
+          <p:cNvSpPr txBox="1"/>
+          <p:nvPr/>
+        </p:nvSpPr>
+        <p:spPr>
+          <a:xfrm>
+            <a:off x="457200" y="3017520"/>
+            <a:ext cx="11277295" cy="1645920"/>
+          </a:xfrm>
+          <a:prstGeom prst="rect">
+            <a:avLst/>
+          </a:prstGeom>
+          <a:noFill/>
+        </p:spPr>
+        <p:txBody>
+          <a:bodyPr wrap="square">
+            <a:spAutoFit/>
+          </a:bodyPr>
+          <a:lstStyle/>
+          <a:p>
+            <a:pPr algn="ctr">
+              <a:spcAft>
+                <a:spcPts val="600"/>
+              </a:spcAft>
+            </a:pPr>
+            <a:r>
+              <a:rPr sz="1600" b="0" i="0">
+                <a:solidFill>
+                  <a:srgbClr val="333333"/>
+                </a:solidFill>
+                <a:latin typeface="Calibri"/>
+              </a:rPr>
+              <a:t>El rol del ingeniero en el contexto ambiental · Clase 5</a:t>
+            </a:r>
+          </a:p>
+          <a:p>
+            <a:pPr algn="ctr">
+              <a:spcAft>
+                <a:spcPts val="600"/>
+              </a:spcAft>
+            </a:pPr>
+            <a:r>
+              <a:rPr sz="1600" b="0" i="0">
+                <a:solidFill>
+                  <a:srgbClr val="333333"/>
+                </a:solidFill>
+                <a:latin typeface="Calibri"/>
+              </a:rPr>
+              <a:t>FI300101 · UNIAJC · Ingeniería de Sistemas</a:t>
+            </a:r>
+          </a:p>
+        </p:txBody>
+      </p:sp>
+      <p:sp>
+        <p:nvSpPr>
+          <p:cNvPr id="6" name="TextBox 5"/>
+          <p:cNvSpPr txBox="1"/>
+          <p:nvPr/>
+        </p:nvSpPr>
+        <p:spPr>
+          <a:xfrm>
+            <a:off x="457200" y="4754880"/>
+            <a:ext cx="11277295" cy="640080"/>
+          </a:xfrm>
+          <a:prstGeom prst="rect">
+            <a:avLst/>
+          </a:prstGeom>
+          <a:noFill/>
+        </p:spPr>
+        <p:txBody>
+          <a:bodyPr wrap="square">
+            <a:spAutoFit/>
+          </a:bodyPr>
+          <a:lstStyle/>
+          <a:p>
+            <a:pPr algn="ctr"/>
+            <a:r>
+              <a:rPr sz="2000" b="1" i="0">
+                <a:solidFill>
+                  <a:srgbClr val="269CCB"/>
+                </a:solidFill>
+                <a:latin typeface="Calibri"/>
+              </a:rPr>
+              <a:t>El software no es inmaterial: pesa, consume y termina en basura</a:t>
+            </a:r>
+          </a:p>
+        </p:txBody>
+      </p:sp>
+    </p:spTree>
+  </p:cSld>
+  <p:clrMapOvr>
+    <a:masterClrMapping/>
+  </p:clrMapOvr>
+</p:sld>
+</file>
+
+<file path=ppt/slides/slide2.xml><?xml version="1.0" encoding="utf-8"?>
+<p:sld xmlns:a="http://schemas.openxmlformats.org/drawingml/2006/main" xmlns:p="http://schemas.openxmlformats.org/presentationml/2006/main" xmlns:r="http://schemas.openxmlformats.org/officeDocument/2006/relationships">
+  <p:cSld>
+    <p:bg>
+      <p:bgPr>
+        <a:solidFill>
+          <a:srgbClr val="FFFFFF"/>
+        </a:solidFill>
+        <a:effectLst/>
+      </p:bgPr>
+    </p:bg>
+    <p:spTree>
+      <p:nvGrpSpPr>
+        <p:cNvPr id="1" name=""/>
+        <p:cNvGrpSpPr/>
+        <p:nvPr/>
+      </p:nvGrpSpPr>
+      <p:grpSpPr/>
+      <p:sp>
+        <p:nvSpPr>
+          <p:cNvPr id="2" name="Rectangle 1"/>
+          <p:cNvSpPr/>
+          <p:nvPr/>
+        </p:nvSpPr>
+        <p:spPr>
+          <a:xfrm>
+            <a:off x="0" y="0"/>
+            <a:ext cx="12191695" cy="1170432"/>
+          </a:xfrm>
+          <a:prstGeom prst="rect">
+            <a:avLst/>
+          </a:prstGeom>
+          <a:solidFill>
+            <a:srgbClr val="095292"/>
+          </a:solidFill>
+          <a:ln>
+            <a:noFill/>
+          </a:ln>
+        </p:spPr>
+        <p:style>
+          <a:lnRef idx="1">
+            <a:schemeClr val="accent1"/>
+          </a:lnRef>
+          <a:fillRef idx="3">
+            <a:schemeClr val="accent1"/>
+          </a:fillRef>
+          <a:effectRef idx="2">
+            <a:schemeClr val="accent1"/>
+          </a:effectRef>
+          <a:fontRef idx="minor">
+            <a:schemeClr val="lt1"/>
+          </a:fontRef>
+        </p:style>
+        <p:txBody>
+          <a:bodyPr rtlCol="0" anchor="ctr"/>
+          <a:lstStyle/>
+          <a:p>
+            <a:pPr algn="ctr"/>
+          </a:p>
+        </p:txBody>
+      </p:sp>
+      <p:sp>
+        <p:nvSpPr>
+          <p:cNvPr id="3" name="Rectangle 2"/>
+          <p:cNvSpPr/>
+          <p:nvPr/>
+        </p:nvSpPr>
+        <p:spPr>
+          <a:xfrm>
+            <a:off x="0" y="1170432"/>
+            <a:ext cx="12191695" cy="41148"/>
+          </a:xfrm>
+          <a:prstGeom prst="rect">
+            <a:avLst/>
+          </a:prstGeom>
+          <a:solidFill>
+            <a:srgbClr val="FFD000"/>
+          </a:solidFill>
+          <a:ln>
+            <a:noFill/>
+          </a:ln>
+        </p:spPr>
+        <p:style>
+          <a:lnRef idx="1">
+            <a:schemeClr val="accent1"/>
+          </a:lnRef>
+          <a:fillRef idx="3">
+            <a:schemeClr val="accent1"/>
+          </a:fillRef>
+          <a:effectRef idx="2">
+            <a:schemeClr val="accent1"/>
+          </a:effectRef>
+          <a:fontRef idx="minor">
+            <a:schemeClr val="lt1"/>
+          </a:fontRef>
+        </p:style>
+        <p:txBody>
+          <a:bodyPr rtlCol="0" anchor="ctr"/>
+          <a:lstStyle/>
+          <a:p>
+            <a:pPr algn="ctr"/>
+          </a:p>
+        </p:txBody>
+      </p:sp>
+      <p:sp>
+        <p:nvSpPr>
+          <p:cNvPr id="4" name="TextBox 3"/>
+          <p:cNvSpPr txBox="1"/>
+          <p:nvPr/>
+        </p:nvSpPr>
+        <p:spPr>
+          <a:xfrm>
+            <a:off x="457200" y="164592"/>
+            <a:ext cx="11277295" cy="384048"/>
+          </a:xfrm>
+          <a:prstGeom prst="rect">
+            <a:avLst/>
+          </a:prstGeom>
+          <a:noFill/>
+        </p:spPr>
+        <p:txBody>
+          <a:bodyPr wrap="square">
+            <a:spAutoFit/>
+          </a:bodyPr>
+          <a:lstStyle/>
+          <a:p>
+            <a:r>
+              <a:rPr sz="2600" b="1" i="0">
+                <a:solidFill>
+                  <a:srgbClr val="FFFFFF"/>
+                </a:solidFill>
+                <a:latin typeface="Calibri"/>
+              </a:rPr>
+              <a:t>Agenda de hoy (90 min)</a:t>
+            </a:r>
+          </a:p>
+        </p:txBody>
+      </p:sp>
+      <p:sp>
+        <p:nvSpPr>
+          <p:cNvPr id="5" name="TextBox 4"/>
+          <p:cNvSpPr txBox="1"/>
+          <p:nvPr/>
+        </p:nvSpPr>
+        <p:spPr>
+          <a:xfrm>
+            <a:off x="457200" y="566928"/>
+            <a:ext cx="11277295" cy="411480"/>
+          </a:xfrm>
+          <a:prstGeom prst="rect">
+            <a:avLst/>
+          </a:prstGeom>
+          <a:noFill/>
+        </p:spPr>
+        <p:txBody>
+          <a:bodyPr wrap="square">
+            <a:spAutoFit/>
+          </a:bodyPr>
+          <a:lstStyle/>
+          <a:p>
+            <a:r>
+              <a:rPr sz="1400" b="0" i="0">
+                <a:solidFill>
+                  <a:srgbClr val="B8D8EE"/>
+                </a:solidFill>
+                <a:latin typeface="Calibri"/>
+              </a:rPr>
+              <a:t>La misma estructura de las 16 sesiones. El reloj de pared de su grupo está en el calendario del curso.</a:t>
+            </a:r>
+          </a:p>
+        </p:txBody>
+      </p:sp>
+      <p:sp>
+        <p:nvSpPr>
+          <p:cNvPr id="6" name="Rectangle 5"/>
+          <p:cNvSpPr/>
+          <p:nvPr/>
+        </p:nvSpPr>
+        <p:spPr>
+          <a:xfrm>
+            <a:off x="457200" y="2386584"/>
+            <a:ext cx="11277295" cy="73152"/>
+          </a:xfrm>
+          <a:prstGeom prst="rect">
+            <a:avLst/>
+          </a:prstGeom>
+          <a:solidFill>
+            <a:srgbClr val="269CCB"/>
+          </a:solidFill>
+          <a:ln>
+            <a:noFill/>
+          </a:ln>
+        </p:spPr>
+        <p:style>
+          <a:lnRef idx="1">
+            <a:schemeClr val="accent1"/>
+          </a:lnRef>
+          <a:fillRef idx="3">
+            <a:schemeClr val="accent1"/>
+          </a:fillRef>
+          <a:effectRef idx="2">
+            <a:schemeClr val="accent1"/>
+          </a:effectRef>
+          <a:fontRef idx="minor">
+            <a:schemeClr val="lt1"/>
+          </a:fontRef>
+        </p:style>
+        <p:txBody>
+          <a:bodyPr rtlCol="0" anchor="ctr"/>
+          <a:lstStyle/>
+          <a:p>
+            <a:pPr algn="ctr"/>
+          </a:p>
+        </p:txBody>
+      </p:sp>
+      <p:sp>
+        <p:nvSpPr>
+          <p:cNvPr id="7" name="Rounded Rectangle 6"/>
+          <p:cNvSpPr/>
+          <p:nvPr/>
+        </p:nvSpPr>
+        <p:spPr>
+          <a:xfrm>
+            <a:off x="1438625" y="2276856"/>
+            <a:ext cx="292608" cy="292608"/>
+          </a:xfrm>
+          <a:prstGeom prst="roundRect">
+            <a:avLst>
+              <a:gd name="adj" fmla="val 12000"/>
+            </a:avLst>
+          </a:prstGeom>
+          <a:solidFill>
+            <a:srgbClr val="095292"/>
+          </a:solidFill>
+          <a:ln>
+            <a:noFill/>
+          </a:ln>
+        </p:spPr>
+        <p:style>
+          <a:lnRef idx="1">
+            <a:schemeClr val="accent1"/>
+          </a:lnRef>
+          <a:fillRef idx="3">
+            <a:schemeClr val="accent1"/>
+          </a:fillRef>
+          <a:effectRef idx="2">
+            <a:schemeClr val="accent1"/>
+          </a:effectRef>
+          <a:fontRef idx="minor">
+            <a:schemeClr val="lt1"/>
+          </a:fontRef>
+        </p:style>
+        <p:txBody>
+          <a:bodyPr rtlCol="0" anchor="ctr"/>
+          <a:lstStyle/>
+          <a:p>
+            <a:pPr algn="ctr"/>
+          </a:p>
+        </p:txBody>
+      </p:sp>
+      <p:sp>
+        <p:nvSpPr>
+          <p:cNvPr id="8" name="TextBox 7"/>
+          <p:cNvSpPr txBox="1"/>
+          <p:nvPr/>
+        </p:nvSpPr>
+        <p:spPr>
+          <a:xfrm>
+            <a:off x="457200" y="1563624"/>
+            <a:ext cx="2255459" cy="502920"/>
+          </a:xfrm>
+          <a:prstGeom prst="rect">
+            <a:avLst/>
+          </a:prstGeom>
+          <a:noFill/>
+        </p:spPr>
+        <p:txBody>
+          <a:bodyPr wrap="square">
+            <a:spAutoFit/>
+          </a:bodyPr>
+          <a:lstStyle/>
+          <a:p>
+            <a:pPr algn="ctr"/>
+            <a:r>
+              <a:rPr sz="1300" b="1" i="0">
+                <a:solidFill>
+                  <a:srgbClr val="095292"/>
+                </a:solidFill>
+                <a:latin typeface="Calibri"/>
+              </a:rPr>
+              <a:t>00:00–00:10 · 10 min</a:t>
+            </a:r>
+          </a:p>
+        </p:txBody>
+      </p:sp>
+      <p:sp>
+        <p:nvSpPr>
+          <p:cNvPr id="9" name="TextBox 8"/>
+          <p:cNvSpPr txBox="1"/>
+          <p:nvPr/>
+        </p:nvSpPr>
+        <p:spPr>
+          <a:xfrm>
+            <a:off x="502920" y="2798064"/>
+            <a:ext cx="2164019" cy="3099816"/>
+          </a:xfrm>
+          <a:prstGeom prst="rect">
+            <a:avLst/>
+          </a:prstGeom>
+          <a:noFill/>
+        </p:spPr>
+        <p:txBody>
+          <a:bodyPr wrap="square">
+            <a:spAutoFit/>
+          </a:bodyPr>
+          <a:lstStyle/>
+          <a:p>
+            <a:pPr algn="ctr"/>
+            <a:r>
+              <a:rPr sz="1300" b="0" i="0">
+                <a:solidFill>
+                  <a:srgbClr val="333333"/>
+                </a:solidFill>
+                <a:latin typeface="Calibri"/>
+              </a:rPr>
+              <a:t>Pregunta de entrada en el muro mientras se conectan</a:t>
+            </a:r>
+          </a:p>
+        </p:txBody>
+      </p:sp>
+      <p:sp>
+        <p:nvSpPr>
+          <p:cNvPr id="10" name="Rounded Rectangle 9"/>
+          <p:cNvSpPr/>
+          <p:nvPr/>
+        </p:nvSpPr>
+        <p:spPr>
+          <a:xfrm>
+            <a:off x="3694084" y="2276856"/>
+            <a:ext cx="292608" cy="292608"/>
+          </a:xfrm>
+          <a:prstGeom prst="roundRect">
+            <a:avLst>
+              <a:gd name="adj" fmla="val 12000"/>
+            </a:avLst>
+          </a:prstGeom>
+          <a:solidFill>
+            <a:srgbClr val="269CCB"/>
+          </a:solidFill>
+          <a:ln>
+            <a:noFill/>
+          </a:ln>
+        </p:spPr>
+        <p:style>
+          <a:lnRef idx="1">
+            <a:schemeClr val="accent1"/>
+          </a:lnRef>
+          <a:fillRef idx="3">
+            <a:schemeClr val="accent1"/>
+          </a:fillRef>
+          <a:effectRef idx="2">
+            <a:schemeClr val="accent1"/>
+          </a:effectRef>
+          <a:fontRef idx="minor">
+            <a:schemeClr val="lt1"/>
+          </a:fontRef>
+        </p:style>
+        <p:txBody>
+          <a:bodyPr rtlCol="0" anchor="ctr"/>
+          <a:lstStyle/>
+          <a:p>
+            <a:pPr algn="ctr"/>
+          </a:p>
+        </p:txBody>
+      </p:sp>
+      <p:sp>
+        <p:nvSpPr>
+          <p:cNvPr id="11" name="TextBox 10"/>
+          <p:cNvSpPr txBox="1"/>
+          <p:nvPr/>
+        </p:nvSpPr>
+        <p:spPr>
+          <a:xfrm>
+            <a:off x="2712659" y="1563624"/>
+            <a:ext cx="2255459" cy="502920"/>
+          </a:xfrm>
+          <a:prstGeom prst="rect">
+            <a:avLst/>
+          </a:prstGeom>
+          <a:noFill/>
+        </p:spPr>
+        <p:txBody>
+          <a:bodyPr wrap="square">
+            <a:spAutoFit/>
+          </a:bodyPr>
+          <a:lstStyle/>
+          <a:p>
+            <a:pPr algn="ctr"/>
+            <a:r>
+              <a:rPr sz="1300" b="1" i="0">
+                <a:solidFill>
+                  <a:srgbClr val="095292"/>
+                </a:solidFill>
+                <a:latin typeface="Calibri"/>
+              </a:rPr>
+              <a:t>00:10–00:55 · 45 min</a:t>
+            </a:r>
+          </a:p>
+        </p:txBody>
+      </p:sp>
+      <p:sp>
+        <p:nvSpPr>
+          <p:cNvPr id="12" name="TextBox 11"/>
+          <p:cNvSpPr txBox="1"/>
+          <p:nvPr/>
+        </p:nvSpPr>
+        <p:spPr>
+          <a:xfrm>
+            <a:off x="2758379" y="2798064"/>
+            <a:ext cx="2164019" cy="3099816"/>
+          </a:xfrm>
+          <a:prstGeom prst="rect">
+            <a:avLst/>
+          </a:prstGeom>
+          <a:noFill/>
+        </p:spPr>
+        <p:txBody>
+          <a:bodyPr wrap="square">
+            <a:spAutoFit/>
+          </a:bodyPr>
+          <a:lstStyle/>
+          <a:p>
+            <a:pPr algn="ctr"/>
+            <a:r>
+              <a:rPr sz="1300" b="0" i="0">
+                <a:solidFill>
+                  <a:srgbClr val="333333"/>
+                </a:solidFill>
+                <a:latin typeface="Calibri"/>
+              </a:rPr>
+              <a:t>Teoría — huella material, centros de datos, RAEE y matriz eléctrica colombiana</a:t>
+            </a:r>
+          </a:p>
+        </p:txBody>
+      </p:sp>
+      <p:sp>
+        <p:nvSpPr>
+          <p:cNvPr id="13" name="Rounded Rectangle 12"/>
+          <p:cNvSpPr/>
+          <p:nvPr/>
+        </p:nvSpPr>
+        <p:spPr>
+          <a:xfrm>
+            <a:off x="5949543" y="2276856"/>
+            <a:ext cx="292608" cy="292608"/>
+          </a:xfrm>
+          <a:prstGeom prst="roundRect">
+            <a:avLst>
+              <a:gd name="adj" fmla="val 12000"/>
+            </a:avLst>
+          </a:prstGeom>
+          <a:solidFill>
+            <a:srgbClr val="095292"/>
+          </a:solidFill>
+          <a:ln>
+            <a:noFill/>
+          </a:ln>
+        </p:spPr>
+        <p:style>
+          <a:lnRef idx="1">
+            <a:schemeClr val="accent1"/>
+          </a:lnRef>
+          <a:fillRef idx="3">
+            <a:schemeClr val="accent1"/>
+          </a:fillRef>
+          <a:effectRef idx="2">
+            <a:schemeClr val="accent1"/>
+          </a:effectRef>
+          <a:fontRef idx="minor">
+            <a:schemeClr val="lt1"/>
+          </a:fontRef>
+        </p:style>
+        <p:txBody>
+          <a:bodyPr rtlCol="0" anchor="ctr"/>
+          <a:lstStyle/>
+          <a:p>
+            <a:pPr algn="ctr"/>
+          </a:p>
+        </p:txBody>
+      </p:sp>
+      <p:sp>
+        <p:nvSpPr>
+          <p:cNvPr id="14" name="TextBox 13"/>
+          <p:cNvSpPr txBox="1"/>
+          <p:nvPr/>
+        </p:nvSpPr>
+        <p:spPr>
+          <a:xfrm>
+            <a:off x="4968118" y="1563624"/>
+            <a:ext cx="2255459" cy="502920"/>
+          </a:xfrm>
+          <a:prstGeom prst="rect">
+            <a:avLst/>
+          </a:prstGeom>
+          <a:noFill/>
+        </p:spPr>
+        <p:txBody>
+          <a:bodyPr wrap="square">
+            <a:spAutoFit/>
+          </a:bodyPr>
+          <a:lstStyle/>
+          <a:p>
+            <a:pPr algn="ctr"/>
+            <a:r>
+              <a:rPr sz="1300" b="1" i="0">
+                <a:solidFill>
+                  <a:srgbClr val="095292"/>
+                </a:solidFill>
+                <a:latin typeface="Calibri"/>
+              </a:rPr>
+              <a:t>00:55–01:12 · 17 min</a:t>
+            </a:r>
+          </a:p>
+        </p:txBody>
+      </p:sp>
+      <p:sp>
+        <p:nvSpPr>
+          <p:cNvPr id="15" name="TextBox 14"/>
+          <p:cNvSpPr txBox="1"/>
+          <p:nvPr/>
+        </p:nvSpPr>
+        <p:spPr>
+          <a:xfrm>
+            <a:off x="5013838" y="2798064"/>
+            <a:ext cx="2164019" cy="3099816"/>
+          </a:xfrm>
+          <a:prstGeom prst="rect">
+            <a:avLst/>
+          </a:prstGeom>
+          <a:noFill/>
+        </p:spPr>
+        <p:txBody>
+          <a:bodyPr wrap="square">
+            <a:spAutoFit/>
+          </a:bodyPr>
+          <a:lstStyle/>
+          <a:p>
+            <a:pPr algn="ctr"/>
+            <a:r>
+              <a:rPr sz="1300" b="0" i="0">
+                <a:solidFill>
+                  <a:srgbClr val="333333"/>
+                </a:solidFill>
+                <a:latin typeface="Calibri"/>
+              </a:rPr>
+              <a:t>Práctica en equipos (opcional · la guía está en la carpeta de la clase)</a:t>
+            </a:r>
+          </a:p>
+        </p:txBody>
+      </p:sp>
+      <p:sp>
+        <p:nvSpPr>
+          <p:cNvPr id="16" name="Rounded Rectangle 15"/>
+          <p:cNvSpPr/>
+          <p:nvPr/>
+        </p:nvSpPr>
+        <p:spPr>
+          <a:xfrm>
+            <a:off x="8205002" y="2276856"/>
+            <a:ext cx="292608" cy="292608"/>
+          </a:xfrm>
+          <a:prstGeom prst="roundRect">
+            <a:avLst>
+              <a:gd name="adj" fmla="val 12000"/>
+            </a:avLst>
+          </a:prstGeom>
+          <a:solidFill>
+            <a:srgbClr val="269CCB"/>
+          </a:solidFill>
+          <a:ln>
+            <a:noFill/>
+          </a:ln>
+        </p:spPr>
+        <p:style>
+          <a:lnRef idx="1">
+            <a:schemeClr val="accent1"/>
+          </a:lnRef>
+          <a:fillRef idx="3">
+            <a:schemeClr val="accent1"/>
+          </a:fillRef>
+          <a:effectRef idx="2">
+            <a:schemeClr val="accent1"/>
+          </a:effectRef>
+          <a:fontRef idx="minor">
+            <a:schemeClr val="lt1"/>
+          </a:fontRef>
+        </p:style>
+        <p:txBody>
+          <a:bodyPr rtlCol="0" anchor="ctr"/>
+          <a:lstStyle/>
+          <a:p>
+            <a:pPr algn="ctr"/>
+          </a:p>
+        </p:txBody>
+      </p:sp>
+      <p:sp>
+        <p:nvSpPr>
+          <p:cNvPr id="17" name="TextBox 16"/>
+          <p:cNvSpPr txBox="1"/>
+          <p:nvPr/>
+        </p:nvSpPr>
+        <p:spPr>
+          <a:xfrm>
+            <a:off x="7223577" y="1563624"/>
+            <a:ext cx="2255459" cy="502920"/>
+          </a:xfrm>
+          <a:prstGeom prst="rect">
+            <a:avLst/>
+          </a:prstGeom>
+          <a:noFill/>
+        </p:spPr>
+        <p:txBody>
+          <a:bodyPr wrap="square">
+            <a:spAutoFit/>
+          </a:bodyPr>
+          <a:lstStyle/>
+          <a:p>
+            <a:pPr algn="ctr"/>
+            <a:r>
+              <a:rPr sz="1300" b="1" i="0">
+                <a:solidFill>
+                  <a:srgbClr val="095292"/>
+                </a:solidFill>
+                <a:latin typeface="Calibri"/>
+              </a:rPr>
+              <a:t>01:12–01:27 · 15 min</a:t>
+            </a:r>
+          </a:p>
+        </p:txBody>
+      </p:sp>
+      <p:sp>
+        <p:nvSpPr>
+          <p:cNvPr id="18" name="TextBox 17"/>
+          <p:cNvSpPr txBox="1"/>
+          <p:nvPr/>
+        </p:nvSpPr>
+        <p:spPr>
+          <a:xfrm>
+            <a:off x="7269297" y="2798064"/>
+            <a:ext cx="2164019" cy="3099816"/>
+          </a:xfrm>
+          <a:prstGeom prst="rect">
+            <a:avLst/>
+          </a:prstGeom>
+          <a:noFill/>
+        </p:spPr>
+        <p:txBody>
+          <a:bodyPr wrap="square">
+            <a:spAutoFit/>
+          </a:bodyPr>
+          <a:lstStyle/>
+          <a:p>
+            <a:pPr algn="ctr"/>
+            <a:r>
+              <a:rPr sz="1300" b="0" i="0">
+                <a:solidFill>
+                  <a:srgbClr val="333333"/>
+                </a:solidFill>
+                <a:latin typeface="Calibri"/>
+              </a:rPr>
+              <a:t>Socialización de la práctica, si se hizo</a:t>
+            </a:r>
+          </a:p>
+        </p:txBody>
+      </p:sp>
+      <p:sp>
+        <p:nvSpPr>
+          <p:cNvPr id="19" name="Rounded Rectangle 18"/>
+          <p:cNvSpPr/>
+          <p:nvPr/>
+        </p:nvSpPr>
+        <p:spPr>
+          <a:xfrm>
+            <a:off x="10460461" y="2276856"/>
+            <a:ext cx="292608" cy="292608"/>
+          </a:xfrm>
+          <a:prstGeom prst="roundRect">
+            <a:avLst>
+              <a:gd name="adj" fmla="val 12000"/>
+            </a:avLst>
+          </a:prstGeom>
+          <a:solidFill>
+            <a:srgbClr val="095292"/>
+          </a:solidFill>
+          <a:ln>
+            <a:noFill/>
+          </a:ln>
+        </p:spPr>
+        <p:style>
+          <a:lnRef idx="1">
+            <a:schemeClr val="accent1"/>
+          </a:lnRef>
+          <a:fillRef idx="3">
+            <a:schemeClr val="accent1"/>
+          </a:fillRef>
+          <a:effectRef idx="2">
+            <a:schemeClr val="accent1"/>
+          </a:effectRef>
+          <a:fontRef idx="minor">
+            <a:schemeClr val="lt1"/>
+          </a:fontRef>
+        </p:style>
+        <p:txBody>
+          <a:bodyPr rtlCol="0" anchor="ctr"/>
+          <a:lstStyle/>
+          <a:p>
+            <a:pPr algn="ctr"/>
+          </a:p>
+        </p:txBody>
+      </p:sp>
+      <p:sp>
+        <p:nvSpPr>
+          <p:cNvPr id="20" name="TextBox 19"/>
+          <p:cNvSpPr txBox="1"/>
+          <p:nvPr/>
+        </p:nvSpPr>
+        <p:spPr>
+          <a:xfrm>
+            <a:off x="9479036" y="1563624"/>
+            <a:ext cx="2255459" cy="502920"/>
+          </a:xfrm>
+          <a:prstGeom prst="rect">
+            <a:avLst/>
+          </a:prstGeom>
+          <a:noFill/>
+        </p:spPr>
+        <p:txBody>
+          <a:bodyPr wrap="square">
+            <a:spAutoFit/>
+          </a:bodyPr>
+          <a:lstStyle/>
+          <a:p>
+            <a:pPr algn="ctr"/>
+            <a:r>
+              <a:rPr sz="1300" b="1" i="0">
+                <a:solidFill>
+                  <a:srgbClr val="095292"/>
+                </a:solidFill>
+                <a:latin typeface="Calibri"/>
+              </a:rPr>
+              <a:t>01:27–01:30 · 3 min</a:t>
+            </a:r>
+          </a:p>
+        </p:txBody>
+      </p:sp>
+      <p:sp>
+        <p:nvSpPr>
+          <p:cNvPr id="21" name="TextBox 20"/>
+          <p:cNvSpPr txBox="1"/>
+          <p:nvPr/>
+        </p:nvSpPr>
+        <p:spPr>
+          <a:xfrm>
+            <a:off x="9524756" y="2798064"/>
+            <a:ext cx="2164019" cy="3099816"/>
+          </a:xfrm>
+          <a:prstGeom prst="rect">
+            <a:avLst/>
+          </a:prstGeom>
+          <a:noFill/>
+        </p:spPr>
+        <p:txBody>
+          <a:bodyPr wrap="square">
+            <a:spAutoFit/>
+          </a:bodyPr>
+          <a:lstStyle/>
+          <a:p>
+            <a:pPr algn="ctr"/>
+            <a:r>
+              <a:rPr sz="1300" b="0" i="0">
+                <a:solidFill>
+                  <a:srgbClr val="333333"/>
+                </a:solidFill>
+                <a:latin typeface="Calibri"/>
+              </a:rPr>
+              <a:t>Una idea, la tarea y los enlaces en el chat</a:t>
+            </a:r>
+          </a:p>
+        </p:txBody>
+      </p:sp>
+      <p:sp>
+        <p:nvSpPr>
+          <p:cNvPr id="22" name="TextBox 21"/>
+          <p:cNvSpPr txBox="1"/>
+          <p:nvPr/>
+        </p:nvSpPr>
+        <p:spPr>
+          <a:xfrm>
+            <a:off x="457200" y="5806440"/>
+            <a:ext cx="11277295" cy="640080"/>
+          </a:xfrm>
+          <a:prstGeom prst="rect">
+            <a:avLst/>
+          </a:prstGeom>
+          <a:noFill/>
+        </p:spPr>
+        <p:txBody>
+          <a:bodyPr wrap="square">
+            <a:spAutoFit/>
+          </a:bodyPr>
+          <a:lstStyle/>
+          <a:p>
+            <a:pPr algn="ctr"/>
+            <a:r>
+              <a:rPr sz="1200" b="0" i="1">
+                <a:solidFill>
+                  <a:srgbClr val="666666"/>
+                </a:solidFill>
+                <a:latin typeface="Calibri"/>
+              </a:rPr>
+              <a:t>Solo el bloque de </a:t>
+            </a:r>
+            <a:r>
+              <a:rPr sz="1200" b="1" i="1">
+                <a:solidFill>
+                  <a:srgbClr val="666666"/>
+                </a:solidFill>
+                <a:latin typeface="Calibri"/>
+              </a:rPr>
+              <a:t>esta</a:t>
+            </a:r>
+            <a:r>
+              <a:rPr sz="1200" b="0" i="1">
+                <a:solidFill>
+                  <a:srgbClr val="666666"/>
+                </a:solidFill>
+                <a:latin typeface="Calibri"/>
+              </a:rPr>
+              <a:t> clase · 120 min</a:t>
+            </a:r>
+          </a:p>
+        </p:txBody>
+      </p:sp>
+      <p:sp>
+        <p:nvSpPr>
+          <p:cNvPr id="23" name="TextBox 22"/>
+          <p:cNvSpPr txBox="1"/>
+          <p:nvPr/>
+        </p:nvSpPr>
+        <p:spPr>
+          <a:xfrm>
+            <a:off x="11185855" y="6473952"/>
+            <a:ext cx="640080" cy="274320"/>
+          </a:xfrm>
+          <a:prstGeom prst="rect">
+            <a:avLst/>
+          </a:prstGeom>
+          <a:noFill/>
+        </p:spPr>
+        <p:txBody>
+          <a:bodyPr wrap="square">
+            <a:spAutoFit/>
+          </a:bodyPr>
+          <a:lstStyle/>
+          <a:p>
+            <a:pPr algn="r"/>
+            <a:r>
+              <a:rPr sz="1100" b="0" i="0">
+                <a:solidFill>
+                  <a:srgbClr val="666666"/>
+                </a:solidFill>
+                <a:latin typeface="Calibri"/>
+              </a:rPr>
+              <a:t>2</a:t>
+            </a:r>
+          </a:p>
+        </p:txBody>
+      </p:sp>
+    </p:spTree>
+  </p:cSld>
+  <p:clrMapOvr>
+    <a:masterClrMapping/>
+  </p:clrMapOvr>
+</p:sld>
+</file>
+
+<file path=ppt/slides/slide3.xml><?xml version="1.0" encoding="utf-8"?>
+<p:sld xmlns:a="http://schemas.openxmlformats.org/drawingml/2006/main" xmlns:p="http://schemas.openxmlformats.org/presentationml/2006/main" xmlns:r="http://schemas.openxmlformats.org/officeDocument/2006/relationships">
+  <p:cSld>
+    <p:bg>
+      <p:bgPr>
+        <a:solidFill>
+          <a:srgbClr val="FFFFFF"/>
+        </a:solidFill>
+        <a:effectLst/>
+      </p:bgPr>
+    </p:bg>
+    <p:spTree>
+      <p:nvGrpSpPr>
+        <p:cNvPr id="1" name=""/>
+        <p:cNvGrpSpPr/>
+        <p:nvPr/>
+      </p:nvGrpSpPr>
+      <p:grpSpPr/>
+      <p:sp>
+        <p:nvSpPr>
+          <p:cNvPr id="2" name="Rectangle 1"/>
+          <p:cNvSpPr/>
+          <p:nvPr/>
+        </p:nvSpPr>
+        <p:spPr>
+          <a:xfrm>
+            <a:off x="0" y="0"/>
+            <a:ext cx="12191695" cy="960120"/>
+          </a:xfrm>
+          <a:prstGeom prst="rect">
+            <a:avLst/>
+          </a:prstGeom>
+          <a:solidFill>
+            <a:srgbClr val="095292"/>
+          </a:solidFill>
+          <a:ln>
+            <a:noFill/>
+          </a:ln>
+        </p:spPr>
+        <p:style>
+          <a:lnRef idx="1">
+            <a:schemeClr val="accent1"/>
+          </a:lnRef>
+          <a:fillRef idx="3">
+            <a:schemeClr val="accent1"/>
+          </a:fillRef>
+          <a:effectRef idx="2">
+            <a:schemeClr val="accent1"/>
+          </a:effectRef>
+          <a:fontRef idx="minor">
+            <a:schemeClr val="lt1"/>
+          </a:fontRef>
+        </p:style>
+        <p:txBody>
+          <a:bodyPr rtlCol="0" anchor="ctr"/>
+          <a:lstStyle/>
+          <a:p>
+            <a:pPr algn="ctr"/>
+          </a:p>
+        </p:txBody>
+      </p:sp>
+      <p:sp>
+        <p:nvSpPr>
+          <p:cNvPr id="3" name="Rectangle 2"/>
+          <p:cNvSpPr/>
+          <p:nvPr/>
+        </p:nvSpPr>
+        <p:spPr>
+          <a:xfrm>
+            <a:off x="0" y="960120"/>
+            <a:ext cx="12191695" cy="41148"/>
+          </a:xfrm>
+          <a:prstGeom prst="rect">
+            <a:avLst/>
+          </a:prstGeom>
+          <a:solidFill>
+            <a:srgbClr val="FFD000"/>
+          </a:solidFill>
+          <a:ln>
+            <a:noFill/>
+          </a:ln>
+        </p:spPr>
+        <p:style>
+          <a:lnRef idx="1">
+            <a:schemeClr val="accent1"/>
+          </a:lnRef>
+          <a:fillRef idx="3">
+            <a:schemeClr val="accent1"/>
+          </a:fillRef>
+          <a:effectRef idx="2">
+            <a:schemeClr val="accent1"/>
+          </a:effectRef>
+          <a:fontRef idx="minor">
+            <a:schemeClr val="lt1"/>
+          </a:fontRef>
+        </p:style>
+        <p:txBody>
+          <a:bodyPr rtlCol="0" anchor="ctr"/>
+          <a:lstStyle/>
+          <a:p>
+            <a:pPr algn="ctr"/>
+          </a:p>
+        </p:txBody>
+      </p:sp>
+      <p:sp>
+        <p:nvSpPr>
+          <p:cNvPr id="4" name="TextBox 3"/>
+          <p:cNvSpPr txBox="1"/>
+          <p:nvPr/>
+        </p:nvSpPr>
+        <p:spPr>
+          <a:xfrm>
+            <a:off x="457200" y="164592"/>
+            <a:ext cx="11277295" cy="502920"/>
+          </a:xfrm>
+          <a:prstGeom prst="rect">
+            <a:avLst/>
+          </a:prstGeom>
+          <a:noFill/>
+        </p:spPr>
+        <p:txBody>
+          <a:bodyPr wrap="square">
+            <a:spAutoFit/>
+          </a:bodyPr>
+          <a:lstStyle/>
+          <a:p>
+            <a:r>
+              <a:rPr sz="2600" b="1" i="0">
+                <a:solidFill>
+                  <a:srgbClr val="FFFFFF"/>
+                </a:solidFill>
+                <a:latin typeface="Calibri"/>
+              </a:rPr>
+              <a:t>Objetivos de la sesión</a:t>
+            </a:r>
+          </a:p>
+        </p:txBody>
+      </p:sp>
+      <p:sp>
+        <p:nvSpPr>
+          <p:cNvPr id="5" name="TextBox 4"/>
+          <p:cNvSpPr txBox="1"/>
+          <p:nvPr/>
+        </p:nvSpPr>
+        <p:spPr>
+          <a:xfrm>
+            <a:off x="457200" y="1170432"/>
+            <a:ext cx="11277295" cy="5230368"/>
+          </a:xfrm>
+          <a:prstGeom prst="rect">
+            <a:avLst/>
+          </a:prstGeom>
+          <a:noFill/>
+        </p:spPr>
+        <p:txBody>
+          <a:bodyPr wrap="square">
+            <a:spAutoFit/>
+          </a:bodyPr>
+          <a:lstStyle/>
+          <a:p>
+            <a:pPr>
+              <a:spcAft>
+                <a:spcPts val="800"/>
+              </a:spcAft>
+            </a:pPr>
+            <a:r>
+              <a:rPr sz="2000" b="0" i="0">
+                <a:solidFill>
+                  <a:srgbClr val="333333"/>
+                </a:solidFill>
+                <a:latin typeface="Calibri"/>
+              </a:rPr>
+              <a:t>–   Nombrar las </a:t>
+            </a:r>
+            <a:r>
+              <a:rPr sz="2000" b="1" i="0">
+                <a:solidFill>
+                  <a:srgbClr val="333333"/>
+                </a:solidFill>
+                <a:latin typeface="Calibri"/>
+              </a:rPr>
+              <a:t>cuatro etapas</a:t>
+            </a:r>
+            <a:r>
+              <a:rPr sz="2000" b="0" i="0">
+                <a:solidFill>
+                  <a:srgbClr val="333333"/>
+                </a:solidFill>
+                <a:latin typeface="Calibri"/>
+              </a:rPr>
+              <a:t> de la huella material de un sistema de software: fabricación, uso, red y fin de vida.</a:t>
+            </a:r>
+          </a:p>
+          <a:p>
+            <a:pPr>
+              <a:spcAft>
+                <a:spcPts val="800"/>
+              </a:spcAft>
+            </a:pPr>
+            <a:r>
+              <a:rPr sz="2000" b="0" i="0">
+                <a:solidFill>
+                  <a:srgbClr val="333333"/>
+                </a:solidFill>
+                <a:latin typeface="Calibri"/>
+              </a:rPr>
+              <a:t>–   Explicar qué mide el </a:t>
+            </a:r>
+            <a:r>
+              <a:rPr sz="2000" b="1" i="0">
+                <a:solidFill>
+                  <a:srgbClr val="333333"/>
+                </a:solidFill>
+                <a:latin typeface="Calibri"/>
+              </a:rPr>
+              <a:t>PUE</a:t>
+            </a:r>
+            <a:r>
+              <a:rPr sz="2000" b="0" i="0">
+                <a:solidFill>
+                  <a:srgbClr val="333333"/>
+                </a:solidFill>
+                <a:latin typeface="Calibri"/>
+              </a:rPr>
+              <a:t> de un centro de datos y por qué el enfriamiento cambia la cuenta.</a:t>
+            </a:r>
+          </a:p>
+          <a:p>
+            <a:pPr>
+              <a:spcAft>
+                <a:spcPts val="800"/>
+              </a:spcAft>
+            </a:pPr>
+            <a:r>
+              <a:rPr sz="2000" b="0" i="0">
+                <a:solidFill>
+                  <a:srgbClr val="333333"/>
+                </a:solidFill>
+                <a:latin typeface="Calibri"/>
+              </a:rPr>
+              <a:t>–   Relacionar una decisión de diseño con un </a:t>
+            </a:r>
+            <a:r>
+              <a:rPr sz="2000" b="1" i="0">
+                <a:solidFill>
+                  <a:srgbClr val="333333"/>
+                </a:solidFill>
+                <a:latin typeface="Calibri"/>
+              </a:rPr>
+              <a:t>efecto ambiental medible</a:t>
+            </a:r>
+            <a:r>
+              <a:rPr sz="2000" b="0" i="0">
+                <a:solidFill>
+                  <a:srgbClr val="333333"/>
+                </a:solidFill>
+                <a:latin typeface="Calibri"/>
+              </a:rPr>
+              <a:t>.</a:t>
+            </a:r>
+          </a:p>
+          <a:p>
+            <a:pPr>
+              <a:spcAft>
+                <a:spcPts val="800"/>
+              </a:spcAft>
+            </a:pPr>
+            <a:r>
+              <a:rPr sz="2000" b="0" i="0">
+                <a:solidFill>
+                  <a:srgbClr val="333333"/>
+                </a:solidFill>
+                <a:latin typeface="Calibri"/>
+              </a:rPr>
+              <a:t>–   Nombrar la norma colombiana de </a:t>
+            </a:r>
+            <a:r>
+              <a:rPr sz="2000" b="1" i="0">
+                <a:solidFill>
+                  <a:srgbClr val="333333"/>
+                </a:solidFill>
+                <a:latin typeface="Calibri"/>
+              </a:rPr>
+              <a:t>residuos electrónicos</a:t>
+            </a:r>
+            <a:r>
+              <a:rPr sz="2000" b="0" i="0">
+                <a:solidFill>
+                  <a:srgbClr val="333333"/>
+                </a:solidFill>
+                <a:latin typeface="Calibri"/>
+              </a:rPr>
+              <a:t> y qué obliga.</a:t>
+            </a:r>
+          </a:p>
+        </p:txBody>
+      </p:sp>
+      <p:sp>
+        <p:nvSpPr>
+          <p:cNvPr id="6" name="TextBox 5"/>
+          <p:cNvSpPr txBox="1"/>
+          <p:nvPr/>
+        </p:nvSpPr>
+        <p:spPr>
+          <a:xfrm>
+            <a:off x="11185855" y="6473952"/>
+            <a:ext cx="640080" cy="274320"/>
+          </a:xfrm>
+          <a:prstGeom prst="rect">
+            <a:avLst/>
+          </a:prstGeom>
+          <a:noFill/>
+        </p:spPr>
+        <p:txBody>
+          <a:bodyPr wrap="square">
+            <a:spAutoFit/>
+          </a:bodyPr>
+          <a:lstStyle/>
+          <a:p>
+            <a:pPr algn="r"/>
+            <a:r>
+              <a:rPr sz="1100" b="0" i="0">
+                <a:solidFill>
+                  <a:srgbClr val="666666"/>
+                </a:solidFill>
+                <a:latin typeface="Calibri"/>
+              </a:rPr>
+              <a:t>3</a:t>
+            </a:r>
+          </a:p>
+        </p:txBody>
+      </p:sp>
+    </p:spTree>
+  </p:cSld>
+  <p:clrMapOvr>
+    <a:masterClrMapping/>
+  </p:clrMapOvr>
+</p:sld>
+</file>
+
+<file path=ppt/slides/slide4.xml><?xml version="1.0" encoding="utf-8"?>
+<p:sld xmlns:a="http://schemas.openxmlformats.org/drawingml/2006/main" xmlns:p="http://schemas.openxmlformats.org/presentationml/2006/main" xmlns:r="http://schemas.openxmlformats.org/officeDocument/2006/relationships">
+  <p:cSld>
+    <p:bg>
+      <p:bgPr>
+        <a:solidFill>
+          <a:srgbClr val="FFFFFF"/>
+        </a:solidFill>
+        <a:effectLst/>
+      </p:bgPr>
+    </p:bg>
+    <p:spTree>
+      <p:nvGrpSpPr>
+        <p:cNvPr id="1" name=""/>
+        <p:cNvGrpSpPr/>
+        <p:nvPr/>
+      </p:nvGrpSpPr>
+      <p:grpSpPr/>
+      <p:sp>
+        <p:nvSpPr>
+          <p:cNvPr id="2" name="Rectangle 1"/>
+          <p:cNvSpPr/>
+          <p:nvPr/>
+        </p:nvSpPr>
+        <p:spPr>
+          <a:xfrm>
+            <a:off x="0" y="0"/>
+            <a:ext cx="12191695" cy="6858000"/>
+          </a:xfrm>
+          <a:prstGeom prst="rect">
+            <a:avLst/>
+          </a:prstGeom>
+          <a:solidFill>
+            <a:srgbClr val="095292"/>
+          </a:solidFill>
+          <a:ln>
+            <a:noFill/>
+          </a:ln>
+        </p:spPr>
+        <p:style>
+          <a:lnRef idx="1">
+            <a:schemeClr val="accent1"/>
+          </a:lnRef>
+          <a:fillRef idx="3">
+            <a:schemeClr val="accent1"/>
+          </a:fillRef>
+          <a:effectRef idx="2">
+            <a:schemeClr val="accent1"/>
+          </a:effectRef>
+          <a:fontRef idx="minor">
+            <a:schemeClr val="lt1"/>
+          </a:fontRef>
+        </p:style>
+        <p:txBody>
+          <a:bodyPr rtlCol="0" anchor="ctr"/>
+          <a:lstStyle/>
+          <a:p>
+            <a:pPr algn="ctr"/>
+          </a:p>
+        </p:txBody>
+      </p:sp>
+      <p:sp>
+        <p:nvSpPr>
+          <p:cNvPr id="3" name="Rectangle 2"/>
+          <p:cNvSpPr/>
+          <p:nvPr/>
+        </p:nvSpPr>
+        <p:spPr>
+          <a:xfrm>
+            <a:off x="0" y="0"/>
+            <a:ext cx="164592" cy="6858000"/>
+          </a:xfrm>
+          <a:prstGeom prst="rect">
+            <a:avLst/>
+          </a:prstGeom>
+          <a:solidFill>
+            <a:srgbClr val="FFD000"/>
+          </a:solidFill>
+          <a:ln>
+            <a:noFill/>
+          </a:ln>
+        </p:spPr>
+        <p:style>
+          <a:lnRef idx="1">
+            <a:schemeClr val="accent1"/>
+          </a:lnRef>
+          <a:fillRef idx="3">
+            <a:schemeClr val="accent1"/>
+          </a:fillRef>
+          <a:effectRef idx="2">
+            <a:schemeClr val="accent1"/>
+          </a:effectRef>
+          <a:fontRef idx="minor">
+            <a:schemeClr val="lt1"/>
+          </a:fontRef>
+        </p:style>
+        <p:txBody>
+          <a:bodyPr rtlCol="0" anchor="ctr"/>
+          <a:lstStyle/>
+          <a:p>
+            <a:pPr algn="ctr"/>
+          </a:p>
+        </p:txBody>
+      </p:sp>
+      <p:pic>
+        <p:nvPicPr>
+          <p:cNvPr id="4" name="Picture 3" descr="logo_uniajc_blanco.png"/>
+          <p:cNvPicPr>
+            <a:picLocks noChangeAspect="1"/>
+          </p:cNvPicPr>
+          <p:nvPr/>
+        </p:nvPicPr>
+        <p:blipFill>
+          <a:blip r:embed="rId2"/>
+          <a:stretch>
+            <a:fillRect/>
+          </a:stretch>
+        </p:blipFill>
+        <p:spPr>
+          <a:xfrm>
+            <a:off x="10134295" y="320040"/>
+            <a:ext cx="1645920" cy="717394"/>
+          </a:xfrm>
+          <a:prstGeom prst="rect">
+            <a:avLst/>
+          </a:prstGeom>
+        </p:spPr>
+      </p:pic>
+      <p:sp>
+        <p:nvSpPr>
+          <p:cNvPr id="5" name="TextBox 4"/>
+          <p:cNvSpPr txBox="1"/>
+          <p:nvPr/>
+        </p:nvSpPr>
+        <p:spPr>
+          <a:xfrm>
+            <a:off x="685800" y="1280160"/>
+            <a:ext cx="10820095" cy="365760"/>
+          </a:xfrm>
+          <a:prstGeom prst="rect">
+            <a:avLst/>
+          </a:prstGeom>
+          <a:noFill/>
+        </p:spPr>
+        <p:txBody>
+          <a:bodyPr wrap="square">
+            <a:spAutoFit/>
+          </a:bodyPr>
+          <a:lstStyle/>
+          <a:p>
+            <a:pPr algn="ctr"/>
+            <a:r>
+              <a:rPr sz="1400" b="1" i="0">
+                <a:solidFill>
+                  <a:srgbClr val="269CCB"/>
+                </a:solidFill>
+                <a:latin typeface="Calibri"/>
+              </a:rPr>
+              <a:t>Pregunta de entrada</a:t>
+            </a:r>
+          </a:p>
+        </p:txBody>
+      </p:sp>
+      <p:sp>
+        <p:nvSpPr>
+          <p:cNvPr id="6" name="TextBox 5"/>
+          <p:cNvSpPr txBox="1"/>
+          <p:nvPr/>
+        </p:nvSpPr>
+        <p:spPr>
+          <a:xfrm>
+            <a:off x="685800" y="1828800"/>
+            <a:ext cx="10820095" cy="2011680"/>
+          </a:xfrm>
+          <a:prstGeom prst="rect">
+            <a:avLst/>
+          </a:prstGeom>
+          <a:noFill/>
+        </p:spPr>
+        <p:txBody>
+          <a:bodyPr wrap="square" anchor="ctr"/>
+          <a:lstStyle/>
+          <a:p>
+            <a:pPr algn="ctr"/>
+            <a:r>
+              <a:rPr sz="2800" b="1" i="0">
+                <a:solidFill>
+                  <a:srgbClr val="FFFFFF"/>
+                </a:solidFill>
+                <a:latin typeface="Calibri"/>
+              </a:rPr>
+              <a:t>¿Dónde está «la nube»? Y más incómodo: ¿cuánta agua se bebió su última consulta a un asistente de IA?</a:t>
+            </a:r>
+          </a:p>
+        </p:txBody>
+      </p:sp>
+      <p:sp>
+        <p:nvSpPr>
+          <p:cNvPr id="7" name="TextBox 6"/>
+          <p:cNvSpPr txBox="1"/>
+          <p:nvPr/>
+        </p:nvSpPr>
+        <p:spPr>
+          <a:xfrm>
+            <a:off x="822960" y="4114800"/>
+            <a:ext cx="10545775" cy="1645920"/>
+          </a:xfrm>
+          <a:prstGeom prst="rect">
+            <a:avLst/>
+          </a:prstGeom>
+          <a:noFill/>
+        </p:spPr>
+        <p:txBody>
+          <a:bodyPr wrap="square">
+            <a:spAutoFit/>
+          </a:bodyPr>
+          <a:lstStyle/>
+          <a:p>
+            <a:pPr algn="ctr">
+              <a:spcAft>
+                <a:spcPts val="600"/>
+              </a:spcAft>
+            </a:pPr>
+            <a:r>
+              <a:rPr sz="1500" b="0" i="0">
+                <a:solidFill>
+                  <a:srgbClr val="269CCB"/>
+                </a:solidFill>
+                <a:latin typeface="Calibri"/>
+              </a:rPr>
+              <a:t>La nube es un edificio con servidores, electricidad y un sistema de enfriamiento.</a:t>
+            </a:r>
+          </a:p>
+          <a:p>
+            <a:pPr algn="ctr">
+              <a:spcAft>
+                <a:spcPts val="600"/>
+              </a:spcAft>
+            </a:pPr>
+            <a:r>
+              <a:rPr sz="1500" b="0" i="0">
+                <a:solidFill>
+                  <a:srgbClr val="269CCB"/>
+                </a:solidFill>
+                <a:latin typeface="Calibri"/>
+              </a:rPr>
+              <a:t>Hoy le ponemos materia, energía y residuos a algo que parece que no tiene ninguna.</a:t>
+            </a:r>
+          </a:p>
+        </p:txBody>
+      </p:sp>
+      <p:sp>
+        <p:nvSpPr>
+          <p:cNvPr id="8" name="TextBox 7"/>
+          <p:cNvSpPr txBox="1"/>
+          <p:nvPr/>
+        </p:nvSpPr>
+        <p:spPr>
+          <a:xfrm>
+            <a:off x="11185855" y="6473952"/>
+            <a:ext cx="640080" cy="274320"/>
+          </a:xfrm>
+          <a:prstGeom prst="rect">
+            <a:avLst/>
+          </a:prstGeom>
+          <a:noFill/>
+        </p:spPr>
+        <p:txBody>
+          <a:bodyPr wrap="square">
+            <a:spAutoFit/>
+          </a:bodyPr>
+          <a:lstStyle/>
+          <a:p>
+            <a:pPr algn="r"/>
+            <a:r>
+              <a:rPr sz="1100" b="0" i="0">
+                <a:solidFill>
+                  <a:srgbClr val="666666"/>
+                </a:solidFill>
+                <a:latin typeface="Calibri"/>
+              </a:rPr>
+              <a:t>4</a:t>
+            </a:r>
+          </a:p>
+        </p:txBody>
+      </p:sp>
+    </p:spTree>
+  </p:cSld>
+  <p:clrMapOvr>
+    <a:masterClrMapping/>
+  </p:clrMapOvr>
+</p:sld>
+</file>
+
+<file path=ppt/slides/slide5.xml><?xml version="1.0" encoding="utf-8"?>
+<p:sld xmlns:a="http://schemas.openxmlformats.org/drawingml/2006/main" xmlns:p="http://schemas.openxmlformats.org/presentationml/2006/main" xmlns:r="http://schemas.openxmlformats.org/officeDocument/2006/relationships">
+  <p:cSld>
+    <p:bg>
+      <p:bgPr>
+        <a:solidFill>
+          <a:srgbClr val="FFFFFF"/>
+        </a:solidFill>
+        <a:effectLst/>
+      </p:bgPr>
+    </p:bg>
+    <p:spTree>
+      <p:nvGrpSpPr>
+        <p:cNvPr id="1" name=""/>
+        <p:cNvGrpSpPr/>
+        <p:nvPr/>
+      </p:nvGrpSpPr>
+      <p:grpSpPr/>
+      <p:sp>
+        <p:nvSpPr>
+          <p:cNvPr id="2" name="Rectangle 1"/>
+          <p:cNvSpPr/>
+          <p:nvPr/>
+        </p:nvSpPr>
+        <p:spPr>
+          <a:xfrm>
+            <a:off x="0" y="0"/>
+            <a:ext cx="12191695" cy="1170432"/>
+          </a:xfrm>
+          <a:prstGeom prst="rect">
+            <a:avLst/>
+          </a:prstGeom>
+          <a:solidFill>
+            <a:srgbClr val="095292"/>
+          </a:solidFill>
+          <a:ln>
+            <a:noFill/>
+          </a:ln>
+        </p:spPr>
+        <p:style>
+          <a:lnRef idx="1">
+            <a:schemeClr val="accent1"/>
+          </a:lnRef>
+          <a:fillRef idx="3">
+            <a:schemeClr val="accent1"/>
+          </a:fillRef>
+          <a:effectRef idx="2">
+            <a:schemeClr val="accent1"/>
+          </a:effectRef>
+          <a:fontRef idx="minor">
+            <a:schemeClr val="lt1"/>
+          </a:fontRef>
+        </p:style>
+        <p:txBody>
+          <a:bodyPr rtlCol="0" anchor="ctr"/>
+          <a:lstStyle/>
+          <a:p>
+            <a:pPr algn="ctr"/>
+          </a:p>
+        </p:txBody>
+      </p:sp>
+      <p:sp>
+        <p:nvSpPr>
+          <p:cNvPr id="3" name="Rectangle 2"/>
+          <p:cNvSpPr/>
+          <p:nvPr/>
+        </p:nvSpPr>
+        <p:spPr>
+          <a:xfrm>
+            <a:off x="0" y="1170432"/>
+            <a:ext cx="12191695" cy="41148"/>
+          </a:xfrm>
+          <a:prstGeom prst="rect">
+            <a:avLst/>
+          </a:prstGeom>
+          <a:solidFill>
+            <a:srgbClr val="FFD000"/>
+          </a:solidFill>
+          <a:ln>
+            <a:noFill/>
+          </a:ln>
+        </p:spPr>
+        <p:style>
+          <a:lnRef idx="1">
+            <a:schemeClr val="accent1"/>
+          </a:lnRef>
+          <a:fillRef idx="3">
+            <a:schemeClr val="accent1"/>
+          </a:fillRef>
+          <a:effectRef idx="2">
+            <a:schemeClr val="accent1"/>
+          </a:effectRef>
+          <a:fontRef idx="minor">
+            <a:schemeClr val="lt1"/>
+          </a:fontRef>
+        </p:style>
+        <p:txBody>
+          <a:bodyPr rtlCol="0" anchor="ctr"/>
+          <a:lstStyle/>
+          <a:p>
+            <a:pPr algn="ctr"/>
+          </a:p>
+        </p:txBody>
+      </p:sp>
+      <p:sp>
+        <p:nvSpPr>
+          <p:cNvPr id="4" name="TextBox 3"/>
+          <p:cNvSpPr txBox="1"/>
+          <p:nvPr/>
+        </p:nvSpPr>
+        <p:spPr>
+          <a:xfrm>
+            <a:off x="457200" y="164592"/>
+            <a:ext cx="11277295" cy="384048"/>
+          </a:xfrm>
+          <a:prstGeom prst="rect">
+            <a:avLst/>
+          </a:prstGeom>
+          <a:noFill/>
+        </p:spPr>
+        <p:txBody>
+          <a:bodyPr wrap="square">
+            <a:spAutoFit/>
+          </a:bodyPr>
+          <a:lstStyle/>
+          <a:p>
+            <a:r>
+              <a:rPr sz="2600" b="1" i="0">
+                <a:solidFill>
+                  <a:srgbClr val="FFFFFF"/>
+                </a:solidFill>
+                <a:latin typeface="Calibri"/>
+              </a:rPr>
+              <a:t>Las cuatro etapas de la huella de un sistema</a:t>
+            </a:r>
+          </a:p>
+        </p:txBody>
+      </p:sp>
+      <p:sp>
+        <p:nvSpPr>
+          <p:cNvPr id="5" name="TextBox 4"/>
+          <p:cNvSpPr txBox="1"/>
+          <p:nvPr/>
+        </p:nvSpPr>
+        <p:spPr>
+          <a:xfrm>
+            <a:off x="457200" y="566928"/>
+            <a:ext cx="11277295" cy="411480"/>
+          </a:xfrm>
+          <a:prstGeom prst="rect">
+            <a:avLst/>
+          </a:prstGeom>
+          <a:noFill/>
+        </p:spPr>
+        <p:txBody>
+          <a:bodyPr wrap="square">
+            <a:spAutoFit/>
+          </a:bodyPr>
+          <a:lstStyle/>
+          <a:p>
+            <a:r>
+              <a:rPr sz="1400" b="0" i="0">
+                <a:solidFill>
+                  <a:srgbClr val="B8D8EE"/>
+                </a:solidFill>
+                <a:latin typeface="Calibri"/>
+              </a:rPr>
+              <a:t>«Software» y «nube» son palabras que suenan inmateriales. Las cuatro etapas son materia, energía y residuo — y la etapa 1 cambia la recomendación: alargar la vida útil pesa más que ahorrar batería</a:t>
+            </a:r>
+          </a:p>
+        </p:txBody>
+      </p:sp>
+      <p:sp>
+        <p:nvSpPr>
+          <p:cNvPr id="6" name="Rounded Rectangle 5"/>
+          <p:cNvSpPr/>
+          <p:nvPr/>
+        </p:nvSpPr>
+        <p:spPr>
+          <a:xfrm>
+            <a:off x="5934611" y="1399031"/>
+            <a:ext cx="5735574" cy="4617720"/>
+          </a:xfrm>
+          <a:prstGeom prst="roundRect">
+            <a:avLst>
+              <a:gd name="adj" fmla="val 4000"/>
+            </a:avLst>
+          </a:prstGeom>
+          <a:solidFill>
+            <a:srgbClr val="E8EEF4"/>
+          </a:solidFill>
+          <a:ln>
+            <a:noFill/>
+          </a:ln>
+        </p:spPr>
+        <p:style>
+          <a:lnRef idx="1">
+            <a:schemeClr val="accent1"/>
+          </a:lnRef>
+          <a:fillRef idx="3">
+            <a:schemeClr val="accent1"/>
+          </a:fillRef>
+          <a:effectRef idx="2">
+            <a:schemeClr val="accent1"/>
+          </a:effectRef>
+          <a:fontRef idx="minor">
+            <a:schemeClr val="lt1"/>
+          </a:fontRef>
+        </p:style>
+        <p:txBody>
+          <a:bodyPr rtlCol="0" anchor="ctr"/>
+          <a:lstStyle/>
+          <a:p>
+            <a:pPr algn="ctr"/>
+          </a:p>
+        </p:txBody>
+      </p:sp>
+      <p:pic>
+        <p:nvPicPr>
+          <p:cNvPr id="7" name="Picture 6" descr="etapas-huella-paso1.png"/>
+          <p:cNvPicPr>
+            <a:picLocks noChangeAspect="1"/>
+          </p:cNvPicPr>
+          <p:nvPr/>
+        </p:nvPicPr>
+        <p:blipFill>
+          <a:blip r:embed="rId2"/>
+          <a:stretch>
+            <a:fillRect/>
+          </a:stretch>
+        </p:blipFill>
+        <p:spPr>
+          <a:xfrm>
+            <a:off x="6007763" y="1472184"/>
+            <a:ext cx="5589270" cy="4471416"/>
+          </a:xfrm>
+          <a:prstGeom prst="rect">
+            <a:avLst/>
+          </a:prstGeom>
+        </p:spPr>
+      </p:pic>
+      <p:pic>
+        <p:nvPicPr>
+          <p:cNvPr id="8" name="Picture 7" descr="etapas-huella-paso2.png"/>
+          <p:cNvPicPr>
+            <a:picLocks noChangeAspect="1"/>
+          </p:cNvPicPr>
+          <p:nvPr/>
+        </p:nvPicPr>
+        <p:blipFill>
+          <a:blip r:embed="rId3"/>
+          <a:stretch>
+            <a:fillRect/>
+          </a:stretch>
+        </p:blipFill>
+        <p:spPr>
+          <a:xfrm>
+            <a:off x="6007763" y="1472184"/>
+            <a:ext cx="5589270" cy="4471416"/>
+          </a:xfrm>
+          <a:prstGeom prst="rect">
+            <a:avLst/>
+          </a:prstGeom>
+        </p:spPr>
+      </p:pic>
+      <p:pic>
+        <p:nvPicPr>
+          <p:cNvPr id="9" name="Picture 8" descr="etapas-huella-paso3.png"/>
+          <p:cNvPicPr>
+            <a:picLocks noChangeAspect="1"/>
+          </p:cNvPicPr>
+          <p:nvPr/>
+        </p:nvPicPr>
+        <p:blipFill>
+          <a:blip r:embed="rId4"/>
+          <a:stretch>
+            <a:fillRect/>
+          </a:stretch>
+        </p:blipFill>
+        <p:spPr>
+          <a:xfrm>
+            <a:off x="6007763" y="1472184"/>
+            <a:ext cx="5589270" cy="4471416"/>
+          </a:xfrm>
+          <a:prstGeom prst="rect">
+            <a:avLst/>
+          </a:prstGeom>
+        </p:spPr>
+      </p:pic>
+      <p:pic>
+        <p:nvPicPr>
+          <p:cNvPr id="10" name="Picture 9" descr="etapas-huella-paso4.png"/>
+          <p:cNvPicPr>
+            <a:picLocks noChangeAspect="1"/>
+          </p:cNvPicPr>
+          <p:nvPr/>
+        </p:nvPicPr>
+        <p:blipFill>
+          <a:blip r:embed="rId5"/>
+          <a:stretch>
+            <a:fillRect/>
+          </a:stretch>
+        </p:blipFill>
+        <p:spPr>
+          <a:xfrm>
+            <a:off x="6007763" y="1472184"/>
+            <a:ext cx="5589270" cy="4471416"/>
+          </a:xfrm>
+          <a:prstGeom prst="rect">
+            <a:avLst/>
+          </a:prstGeom>
+        </p:spPr>
+      </p:pic>
+      <p:pic>
+        <p:nvPicPr>
+          <p:cNvPr id="11" name="Picture 10" descr="etapas-huella-paso5.png"/>
+          <p:cNvPicPr>
+            <a:picLocks noChangeAspect="1"/>
+          </p:cNvPicPr>
+          <p:nvPr/>
+        </p:nvPicPr>
+        <p:blipFill>
+          <a:blip r:embed="rId6"/>
+          <a:stretch>
+            <a:fillRect/>
+          </a:stretch>
+        </p:blipFill>
+        <p:spPr>
+          <a:xfrm>
+            <a:off x="6007763" y="1472184"/>
+            <a:ext cx="5589270" cy="4471416"/>
+          </a:xfrm>
+          <a:prstGeom prst="rect">
+            <a:avLst/>
+          </a:prstGeom>
+        </p:spPr>
+      </p:pic>
+      <p:sp>
+        <p:nvSpPr>
+          <p:cNvPr id="23" name="TextBox 22"/>
+          <p:cNvSpPr txBox="1"/>
+          <p:nvPr/>
+        </p:nvSpPr>
+        <p:spPr>
+          <a:xfrm>
+            <a:off x="5870301" y="5961888"/>
+            <a:ext cx="5864193" cy="320040"/>
+          </a:xfrm>
+          <a:prstGeom prst="rect">
+            <a:avLst/>
+          </a:prstGeom>
+          <a:noFill/>
+        </p:spPr>
+        <p:txBody>
+          <a:bodyPr wrap="square">
+            <a:spAutoFit/>
+          </a:bodyPr>
+          <a:lstStyle/>
+          <a:p>
+            <a:pPr algn="ctr"/>
+            <a:r>
+              <a:rPr sz="1100" b="0" i="1">
+                <a:solidFill>
+                  <a:srgbClr val="666666"/>
+                </a:solidFill>
+                <a:latin typeface="Calibri"/>
+              </a:rPr>
+              <a:t>Clic para avanzar la animación</a:t>
+            </a:r>
+          </a:p>
+        </p:txBody>
+      </p:sp>
+      <p:sp>
+        <p:nvSpPr>
+          <p:cNvPr id="24" name="TextBox 23"/>
+          <p:cNvSpPr txBox="1"/>
+          <p:nvPr/>
+        </p:nvSpPr>
+        <p:spPr>
+          <a:xfrm>
+            <a:off x="457200" y="1563624"/>
+            <a:ext cx="5093061" cy="4837176"/>
+          </a:xfrm>
+          <a:prstGeom prst="rect">
+            <a:avLst/>
+          </a:prstGeom>
+          <a:noFill/>
+        </p:spPr>
+        <p:txBody>
+          <a:bodyPr wrap="square">
+            <a:spAutoFit/>
+          </a:bodyPr>
+          <a:lstStyle/>
+          <a:p>
+            <a:pPr>
+              <a:spcAft>
+                <a:spcPts val="800"/>
+              </a:spcAft>
+            </a:pPr>
+            <a:r>
+              <a:rPr sz="2000" b="0" i="0">
+                <a:solidFill>
+                  <a:srgbClr val="333333"/>
+                </a:solidFill>
+                <a:latin typeface="Calibri"/>
+              </a:rPr>
+              <a:t>–   </a:t>
+            </a:r>
+            <a:r>
+              <a:rPr sz="2000" b="1" i="0">
+                <a:solidFill>
+                  <a:srgbClr val="333333"/>
+                </a:solidFill>
+                <a:latin typeface="Calibri"/>
+              </a:rPr>
+              <a:t>FABRICACIÓN:</a:t>
+            </a:r>
+            <a:r>
+              <a:rPr sz="2000" b="0" i="0">
+                <a:solidFill>
+                  <a:srgbClr val="333333"/>
+                </a:solidFill>
+                <a:latin typeface="Calibri"/>
+              </a:rPr>
+              <a:t> Minería, ensamblaje y transporte de dispositivos y servidores.</a:t>
+            </a:r>
+          </a:p>
+          <a:p>
+            <a:pPr>
+              <a:spcAft>
+                <a:spcPts val="800"/>
+              </a:spcAft>
+            </a:pPr>
+            <a:r>
+              <a:rPr sz="2000" b="0" i="0">
+                <a:solidFill>
+                  <a:srgbClr val="333333"/>
+                </a:solidFill>
+                <a:latin typeface="Calibri"/>
+              </a:rPr>
+              <a:t>–   </a:t>
+            </a:r>
+            <a:r>
+              <a:rPr sz="2000" b="1" i="0">
+                <a:solidFill>
+                  <a:srgbClr val="333333"/>
+                </a:solidFill>
+                <a:latin typeface="Calibri"/>
+              </a:rPr>
+              <a:t>USO:</a:t>
+            </a:r>
+            <a:r>
+              <a:rPr sz="2000" b="0" i="0">
+                <a:solidFill>
+                  <a:srgbClr val="333333"/>
+                </a:solidFill>
+                <a:latin typeface="Calibri"/>
+              </a:rPr>
+              <a:t> Electricidad del dispositivo, del servidor y del enfriamiento del centro de datos</a:t>
+            </a:r>
+          </a:p>
+          <a:p>
+            <a:pPr>
+              <a:spcAft>
+                <a:spcPts val="800"/>
+              </a:spcAft>
+            </a:pPr>
+            <a:r>
+              <a:rPr sz="2000" b="0" i="0">
+                <a:solidFill>
+                  <a:srgbClr val="333333"/>
+                </a:solidFill>
+                <a:latin typeface="Calibri"/>
+              </a:rPr>
+              <a:t>–   </a:t>
+            </a:r>
+            <a:r>
+              <a:rPr sz="2000" b="1" i="0">
+                <a:solidFill>
+                  <a:srgbClr val="333333"/>
+                </a:solidFill>
+                <a:latin typeface="Calibri"/>
+              </a:rPr>
+              <a:t>RED:</a:t>
+            </a:r>
+            <a:r>
+              <a:rPr sz="2000" b="0" i="0">
+                <a:solidFill>
+                  <a:srgbClr val="333333"/>
+                </a:solidFill>
+                <a:latin typeface="Calibri"/>
+              </a:rPr>
+              <a:t> Cada byte viaja por antenas, cables y equipos que consumen</a:t>
+            </a:r>
+          </a:p>
+          <a:p>
+            <a:pPr>
+              <a:spcAft>
+                <a:spcPts val="800"/>
+              </a:spcAft>
+            </a:pPr>
+            <a:r>
+              <a:rPr sz="2000" b="0" i="0">
+                <a:solidFill>
+                  <a:srgbClr val="333333"/>
+                </a:solidFill>
+                <a:latin typeface="Calibri"/>
+              </a:rPr>
+              <a:t>–   </a:t>
+            </a:r>
+            <a:r>
+              <a:rPr sz="2000" b="1" i="0">
+                <a:solidFill>
+                  <a:srgbClr val="333333"/>
+                </a:solidFill>
+                <a:latin typeface="Calibri"/>
+              </a:rPr>
+              <a:t>FIN DE VIDA:</a:t>
+            </a:r>
+            <a:r>
+              <a:rPr sz="2000" b="0" i="0">
+                <a:solidFill>
+                  <a:srgbClr val="333333"/>
+                </a:solidFill>
+                <a:latin typeface="Calibri"/>
+              </a:rPr>
+              <a:t> Residuo electrónico (RAEE): metales, plásticos y sustancias peligrosas</a:t>
+            </a:r>
+          </a:p>
+        </p:txBody>
+      </p:sp>
+      <p:sp>
+        <p:nvSpPr>
+          <p:cNvPr id="25" name="TextBox 24"/>
+          <p:cNvSpPr txBox="1"/>
+          <p:nvPr/>
+        </p:nvSpPr>
+        <p:spPr>
+          <a:xfrm>
+            <a:off x="11185855" y="6473952"/>
+            <a:ext cx="640080" cy="274320"/>
+          </a:xfrm>
+          <a:prstGeom prst="rect">
+            <a:avLst/>
+          </a:prstGeom>
+          <a:noFill/>
+        </p:spPr>
+        <p:txBody>
+          <a:bodyPr wrap="square">
+            <a:spAutoFit/>
+          </a:bodyPr>
+          <a:lstStyle/>
+          <a:p>
+            <a:pPr algn="r"/>
+            <a:r>
+              <a:rPr sz="1100" b="0" i="0">
+                <a:solidFill>
+                  <a:srgbClr val="666666"/>
+                </a:solidFill>
+                <a:latin typeface="Calibri"/>
+              </a:rPr>
+              <a:t>5</a:t>
+            </a:r>
+          </a:p>
+        </p:txBody>
+      </p:sp>
+    </p:spTree>
+  </p:cSld>
+  <p:clrMapOvr>
+    <a:masterClrMapping/>
+  </p:clrMapOvr>
+  <p:timing>
+    <p:tnLst>
+      <p:par>
+        <p:cTn id="1" dur="indefinite" restart="never" nodeType="tmRoot">
+          <p:childTnLst>
+            <p:seq concurrent="1" nextAc="seek">
+              <p:cTn id="2" dur="indefinite" nodeType="mainSeq">
+                <p:childTnLst>
+                  <p:par>
+                    <p:cTn id="3" fill="hold">
+                      <p:stCondLst>
+                        <p:cond delay="indefinite"/>
+                      </p:stCondLst>
+                      <p:childTnLst>
+                        <p:par>
+                          <p:cTn id="4" fill="hold">
+                            <p:stCondLst>
+                              <p:cond delay="0"/>
+                            </p:stCondLst>
+                            <p:childTnLst>
+                              <p:par>
+                                <p:cTn id="5" presetID="10" presetClass="entr" presetSubtype="0" fill="hold" nodeType="clickEffect">
+                                  <p:stCondLst>
+                                    <p:cond delay="0"/>
+                                  </p:stCondLst>
+                                  <p:childTnLst>
+                                    <p:set>
+                                      <p:cBhvr>
+                                        <p:cTn id="6" dur="1" fill="hold">
+                                          <p:stCondLst>
+                                            <p:cond delay="0"/>
+                                          </p:stCondLst>
+                                        </p:cTn>
+                                        <p:tgtEl>
+                                          <p:spTgt spid="8"/>
+                                        </p:tgtEl>
+                                        <p:attrNameLst>
+                                          <p:attrName>style.visibility</p:attrName>
+                                        </p:attrNameLst>
+                                      </p:cBhvr>
+                                      <p:to>
+                                        <p:strVal val="visible"/>
+                                      </p:to>
+                                    </p:set>
+                                    <p:animEffect transition="in" filter="fade">
+                                      <p:cBhvr>
+                                        <p:cTn id="7" dur="450"/>
+                                        <p:tgtEl>
+                                          <p:spTgt spid="8"/>
+                                        </p:tgtEl>
+                                      </p:cBhvr>
+                                    </p:animEffect>
+                                  </p:childTnLst>
+                                </p:cTn>
+                              </p:par>
+                            </p:childTnLst>
+                          </p:cTn>
+                        </p:par>
+                      </p:childTnLst>
+                    </p:cTn>
+                  </p:par>
+                  <p:par>
+                    <p:cTn id="8" fill="hold">
+                      <p:stCondLst>
+                        <p:cond delay="indefinite"/>
+                      </p:stCondLst>
+                      <p:childTnLst>
+                        <p:par>
+                          <p:cTn id="9" fill="hold">
+                            <p:stCondLst>
+                              <p:cond delay="0"/>
+                            </p:stCondLst>
+                            <p:childTnLst>
+                              <p:par>
+                                <p:cTn id="10" presetID="10" presetClass="entr" presetSubtype="0" fill="hold" nodeType="clickEffect">
+                                  <p:stCondLst>
+                                    <p:cond delay="0"/>
+                                  </p:stCondLst>
+                                  <p:childTnLst>
+                                    <p:set>
+                                      <p:cBhvr>
+                                        <p:cTn id="11" dur="1" fill="hold">
+                                          <p:stCondLst>
+                                            <p:cond delay="0"/>
+                                          </p:stCondLst>
+                                        </p:cTn>
+                                        <p:tgtEl>
+                                          <p:spTgt spid="9"/>
+                                        </p:tgtEl>
+                                        <p:attrNameLst>
+                                          <p:attrName>style.visibility</p:attrName>
+                                        </p:attrNameLst>
+                                      </p:cBhvr>
+                                      <p:to>
+                                        <p:strVal val="visible"/>
+                                      </p:to>
+                                    </p:set>
+                                    <p:animEffect transition="in" filter="fade">
+                                      <p:cBhvr>
+                                        <p:cTn id="12" dur="450"/>
+                                        <p:tgtEl>
+                                          <p:spTgt spid="9"/>
+                                        </p:tgtEl>
+                                      </p:cBhvr>
+                                    </p:animEffect>
+                                  </p:childTnLst>
+                                </p:cTn>
+                              </p:par>
+                            </p:childTnLst>
+                          </p:cTn>
+                        </p:par>
+                      </p:childTnLst>
+                    </p:cTn>
+                  </p:par>
+                  <p:par>
+                    <p:cTn id="13" fill="hold">
+                      <p:stCondLst>
+                        <p:cond delay="indefinite"/>
+                      </p:stCondLst>
+                      <p:childTnLst>
+                        <p:par>
+                          <p:cTn id="14" fill="hold">
+                            <p:stCondLst>
+                              <p:cond delay="0"/>
+                            </p:stCondLst>
+                            <p:childTnLst>
+                              <p:par>
+                                <p:cTn id="15" presetID="10" presetClass="entr" presetSubtype="0" fill="hold" nodeType="clickEffect">
+                                  <p:stCondLst>
+                                    <p:cond delay="0"/>
+                                  </p:stCondLst>
+                                  <p:childTnLst>
+                                    <p:set>
+                                      <p:cBhvr>
+                                        <p:cTn id="16" dur="1" fill="hold">
+                                          <p:stCondLst>
+                                            <p:cond delay="0"/>
+                                          </p:stCondLst>
+                                        </p:cTn>
+                                        <p:tgtEl>
+                                          <p:spTgt spid="10"/>
+                                        </p:tgtEl>
+                                        <p:attrNameLst>
+                                          <p:attrName>style.visibility</p:attrName>
+                                        </p:attrNameLst>
+                                      </p:cBhvr>
+                                      <p:to>
+                                        <p:strVal val="visible"/>
+                                      </p:to>
+                                    </p:set>
+                                    <p:animEffect transition="in" filter="fade">
+                                      <p:cBhvr>
+                                        <p:cTn id="17" dur="450"/>
+                                        <p:tgtEl>
+                                          <p:spTgt spid="10"/>
+                                        </p:tgtEl>
+                                      </p:cBhvr>
+                                    </p:animEffect>
+                                  </p:childTnLst>
+                                </p:cTn>
+                              </p:par>
+                            </p:childTnLst>
+                          </p:cTn>
+                        </p:par>
+                      </p:childTnLst>
+                    </p:cTn>
+                  </p:par>
+                  <p:par>
+                    <p:cTn id="18" fill="hold">
+                      <p:stCondLst>
+                        <p:cond delay="indefinite"/>
+                      </p:stCondLst>
+                      <p:childTnLst>
+                        <p:par>
+                          <p:cTn id="19" fill="hold">
+                            <p:stCondLst>
+                              <p:cond delay="0"/>
+                            </p:stCondLst>
+                            <p:childTnLst>
+                              <p:par>
+                                <p:cTn id="20" presetID="10" presetClass="entr" presetSubtype="0" fill="hold" nodeType="clickEffect">
+                                  <p:stCondLst>
+                                    <p:cond delay="0"/>
+                                  </p:stCondLst>
+                                  <p:childTnLst>
+                                    <p:set>
+                                      <p:cBhvr>
+                                        <p:cTn id="21" dur="1" fill="hold">
+                                          <p:stCondLst>
+                                            <p:cond delay="0"/>
+                                          </p:stCondLst>
+                                        </p:cTn>
+                                        <p:tgtEl>
+                                          <p:spTgt spid="11"/>
+                                        </p:tgtEl>
+                                        <p:attrNameLst>
+                                          <p:attrName>style.visibility</p:attrName>
+                                        </p:attrNameLst>
+                                      </p:cBhvr>
+                                      <p:to>
+                                        <p:strVal val="visible"/>
+                                      </p:to>
+                                    </p:set>
+                                    <p:animEffect transition="in" filter="fade">
+                                      <p:cBhvr>
+                                        <p:cTn id="22" dur="450"/>
+                                        <p:tgtEl>
+                                          <p:spTgt spid="11"/>
+                                        </p:tgtEl>
+                                      </p:cBhvr>
+                                    </p:animEffect>
+                                  </p:childTnLst>
+                                </p:cTn>
+                              </p:par>
+                            </p:childTnLst>
+                          </p:cTn>
+                        </p:par>
+                      </p:childTnLst>
+                    </p:cTn>
+                  </p:par>
                 </p:childTnLst>
               </p:cTn>
               <p:prevCondLst>
@@ -12574,14 +12820,83 @@
       </p:sp>
       <p:sp>
         <p:nvSpPr>
-          <p:cNvPr id="5" name="TextBox 4"/>
+          <p:cNvPr id="5" name="Rounded Rectangle 4"/>
+          <p:cNvSpPr/>
+          <p:nvPr/>
+        </p:nvSpPr>
+        <p:spPr>
+          <a:xfrm>
+            <a:off x="5797149" y="1343926"/>
+            <a:ext cx="6010497" cy="4837658"/>
+          </a:xfrm>
+          <a:prstGeom prst="roundRect">
+            <a:avLst>
+              <a:gd name="adj" fmla="val 4000"/>
+            </a:avLst>
+          </a:prstGeom>
+          <a:solidFill>
+            <a:srgbClr val="E8EEF4"/>
+          </a:solidFill>
+          <a:ln>
+            <a:noFill/>
+          </a:ln>
+        </p:spPr>
+        <p:style>
+          <a:lnRef idx="1">
+            <a:schemeClr val="accent1"/>
+          </a:lnRef>
+          <a:fillRef idx="3">
+            <a:schemeClr val="accent1"/>
+          </a:fillRef>
+          <a:effectRef idx="2">
+            <a:schemeClr val="accent1"/>
+          </a:effectRef>
+          <a:fontRef idx="minor">
+            <a:schemeClr val="lt1"/>
+          </a:fontRef>
+        </p:style>
+        <p:txBody>
+          <a:bodyPr rtlCol="0" anchor="ctr"/>
+          <a:lstStyle/>
+          <a:p>
+            <a:pPr algn="ctr"/>
+          </a:p>
+        </p:txBody>
+      </p:sp>
+      <p:pic>
+        <p:nvPicPr>
+          <p:cNvPr id="6" name="Picture 5" descr="ilus-pue-paso1.png"/>
+          <p:cNvPicPr>
+            <a:picLocks noChangeAspect="1"/>
+          </p:cNvPicPr>
+          <p:nvPr/>
+        </p:nvPicPr>
+        <p:blipFill>
+          <a:blip r:embed="rId2"/>
+          <a:stretch>
+            <a:fillRect/>
+          </a:stretch>
+        </p:blipFill>
+        <p:spPr>
+          <a:xfrm>
+            <a:off x="5870301" y="1417078"/>
+            <a:ext cx="5864193" cy="4691354"/>
+          </a:xfrm>
+          <a:prstGeom prst="rect">
+            <a:avLst/>
+          </a:prstGeom>
+        </p:spPr>
+      </p:pic>
+      <p:sp>
+        <p:nvSpPr>
+          <p:cNvPr id="7" name="TextBox 6"/>
           <p:cNvSpPr txBox="1"/>
           <p:nvPr/>
         </p:nvSpPr>
         <p:spPr>
           <a:xfrm>
-            <a:off x="457200" y="1170432"/>
-            <a:ext cx="11277295" cy="5230368"/>
+            <a:off x="457200" y="1353312"/>
+            <a:ext cx="5093061" cy="5047488"/>
           </a:xfrm>
           <a:prstGeom prst="rect">
             <a:avLst/>
@@ -12729,79 +13044,11 @@
               <a:t>No computan nada.</a:t>
             </a:r>
           </a:p>
-          <a:p>
-            <a:pPr>
-              <a:spcAft>
-                <a:spcPts val="800"/>
-              </a:spcAft>
-            </a:pPr>
-            <a:r>
-              <a:rPr sz="2000" b="0" i="0">
-                <a:solidFill>
-                  <a:srgbClr val="333333"/>
-                </a:solidFill>
-                <a:latin typeface="Calibri"/>
-              </a:rPr>
-              <a:t>–   Un PUE de </a:t>
-            </a:r>
-            <a:r>
-              <a:rPr sz="2000" b="1" i="0">
-                <a:solidFill>
-                  <a:srgbClr val="333333"/>
-                </a:solidFill>
-                <a:latin typeface="Calibri"/>
-              </a:rPr>
-              <a:t>1,0</a:t>
-            </a:r>
-            <a:r>
-              <a:rPr sz="2000" b="0" i="0">
-                <a:solidFill>
-                  <a:srgbClr val="333333"/>
-                </a:solidFill>
-                <a:latin typeface="Calibri"/>
-              </a:rPr>
-              <a:t> sería perfecto. Uno de </a:t>
-            </a:r>
-            <a:r>
-              <a:rPr sz="2000" b="1" i="0">
-                <a:solidFill>
-                  <a:srgbClr val="333333"/>
-                </a:solidFill>
-                <a:latin typeface="Calibri"/>
-              </a:rPr>
-              <a:t>2,0</a:t>
-            </a:r>
-            <a:r>
-              <a:rPr sz="2000" b="0" i="0">
-                <a:solidFill>
-                  <a:srgbClr val="333333"/>
-                </a:solidFill>
-                <a:latin typeface="Calibri"/>
-              </a:rPr>
-              <a:t> gasta la mitad de la energía en no computar.</a:t>
-            </a:r>
-          </a:p>
-          <a:p>
-            <a:pPr>
-              <a:spcAft>
-                <a:spcPts val="800"/>
-              </a:spcAft>
-            </a:pPr>
-            <a:r>
-              <a:rPr sz="2000" b="0" i="0">
-                <a:solidFill>
-                  <a:srgbClr val="333333"/>
-                </a:solidFill>
-                <a:latin typeface="Calibri"/>
-              </a:rPr>
-              <a:t>–   Sirve para comparar: entre dos proveedores, el de PUE más bajo desperdicia menos.</a:t>
-            </a:r>
-          </a:p>
-        </p:txBody>
-      </p:sp>
-      <p:sp>
-        <p:nvSpPr>
-          <p:cNvPr id="6" name="TextBox 5"/>
+        </p:txBody>
+      </p:sp>
+      <p:sp>
+        <p:nvSpPr>
+          <p:cNvPr id="8" name="TextBox 7"/>
           <p:cNvSpPr txBox="1"/>
           <p:nvPr/>
         </p:nvSpPr>

--- a/Introduccion a la Ingenieria/Clases/Clase 5 - El rol del ingeniero en el contexto ambiental/Presentacion.pptx
+++ b/Introduccion a la Ingenieria/Clases/Clase 5 - El rol del ingeniero en el contexto ambiental/Presentacion.pptx
@@ -598,7 +598,7 @@
           <a:p/>
           <a:p>
             <a:r>
-              <a:t>La primera —pedir la ubicación cada cinco segundos o cada cinco minutos— es la más fácil de entender y toca batería y red a la vez. La tercera —guardar el resultado en vez de recalcular el reporte completo en cada consulta— es la que más sorprende, porque el estudiante todavía no tiene la intuición de que el cómputo cuesta energía; sirve para conectar con la sesión 7 y con la idea de que la eficiencia no es coquetería de programador. La cuarta —sostener dispositivos viejos— es la de mayor impacto real por lo dicho sobre la fabricación. Y la quinta es la más contemporánea y hay que decirla sin miedo: agregarle un asistente de IA a una función que resolvía una condición simple gasta energía en cada llamada, para siempre. Es una decisión de arquitectura, y hoy se toma con frecuencia por moda.</a:t>
+              <a:t>La primera —pedir la ubicación cada cinco segundos o cada cinco minutos— es la más fácil de entender y toca batería y red a la vez. La tercera —guardar el resultado en vez de recalcular el reporte completo en cada consulta— es la que más sorprende, porque el estudiante todavía no tiene la intuición de que procesar datos cuesta energía; sirve para conectar con la sesión 7 y con la idea de que la eficiencia no es un capricho de programador. La cuarta —sostener dispositivos viejos— es la de mayor impacto real por lo dicho sobre la fabricación. Y la quinta es la más contemporánea y hay que decirla sin miedo: agregarle un asistente de IA a una función que resolvía una condición simple gasta energía en cada llamada, para siempre. Es una decisión de arquitectura, y hoy se toma con frecuencia por moda.</a:t>
             </a:r>
           </a:p>
           <a:p/>
@@ -686,7 +686,7 @@
           <a:p/>
           <a:p>
             <a:r>
-              <a:t>La contracara es igual de importante y menos conocida: cuando el fenómeno de El Niño reduce los aportes a los embalses, entran las plantas térmicas y el factor de emisiones del país sube. Es decir, la misma aplicación, sin cambiar una línea de código, emite más en un año seco. Eso enseña algo que vale para todo el curso: la huella de un sistema no es una propiedad del sistema, es una propiedad del sistema en su contexto.</a:t>
+              <a:t>La otra cara es igual de importante y menos conocida: cuando el fenómeno de El Niño reduce los aportes a los embalses, entran las plantas térmicas y el factor de emisiones del país sube. Es decir, la misma aplicación, sin cambiar una línea de código, emite más en un año seco. Eso enseña algo que vale para todo el curso: la huella de un sistema no es una propiedad del sistema, es una propiedad del sistema en su contexto.</a:t>
             </a:r>
           </a:p>
           <a:p/>
@@ -780,7 +780,7 @@
           <a:p/>
           <a:p>
             <a:r>
-              <a:t>De esos, a los servidores —los que computan— llegan 1.000 kWh.</a:t>
+              <a:t>De esos, a los servidores —los que procesan los datos— llegan 1.000 kWh.</a:t>
             </a:r>
           </a:p>
           <a:p/>
@@ -792,13 +792,13 @@
           <a:p/>
           <a:p>
             <a:r>
-              <a:t>Los otros 600 kWh se van en enfriar, iluminar y en pérdidas. No computan nada.</a:t>
+              <a:t>Los otros 600 kWh se van en enfriar, iluminar y en pérdidas. No procesan ningún dato.</a:t>
             </a:r>
           </a:p>
           <a:p/>
           <a:p>
             <a:r>
-              <a:t>Un PUE de 1,0 sería perfecto. Uno de 2,0 gasta la mitad de la energía en no computar.</a:t>
+              <a:t>Un PUE de 1,0 sería perfecto. Uno de 2,0 gasta la mitad de la energía en cosas distintas de procesar datos.</a:t>
             </a:r>
           </a:p>
           <a:p/>
@@ -810,7 +810,7 @@
           <a:p/>
           <a:p>
             <a:r>
-              <a:t>No hace falta que memoricen el número. Lo que tiene que quedar es que una parte grande de la energía de un centro de datos no computa, y que hay una métrica con nombre para medirlo.</a:t>
+              <a:t>No hace falta que memoricen el número. Lo que tiene que quedar es que una parte grande de la energía de un centro de datos no se usa para procesar datos, y que hay una métrica con nombre para medirlo.</a:t>
             </a:r>
           </a:p>
         </p:txBody>
@@ -962,7 +962,7 @@
           <a:p/>
           <a:p>
             <a:r>
-              <a:t>Y su contracara. Cuando llega el fenómeno de El Niño y baja el nivel de los embalses, entran las plantas térmicas y la misma aplicación pasa a emitir más sin cambiar una línea de código. La huella de un sistema no es un número fijo: depende de cuándo y dónde corre.</a:t>
+              <a:t>Y su otra cara. Cuando llega el fenómeno de El Niño y baja el nivel de los embalses, entran las plantas térmicas y la misma aplicación pasa a emitir más sin cambiar una línea de código. La huella de un sistema no es un número fijo: depende de cuándo y dónde corre.</a:t>
             </a:r>
           </a:p>
           <a:p/>
@@ -992,7 +992,7 @@
           <a:p/>
           <a:p>
             <a:r>
-              <a:t>La contracara es igual de importante y menos conocida: cuando el fenómeno de El Niño reduce los aportes a los embalses, entran las plantas térmicas y el factor de emisiones del país sube. Es decir, la misma aplicación, sin cambiar una línea de código, emite más en un año seco. Eso enseña algo que vale para todo el curso: la huella de un sistema no es una propiedad del sistema, es una propiedad del sistema en su contexto.</a:t>
+              <a:t>La otra cara es igual de importante y menos conocida: cuando el fenómeno de El Niño reduce los aportes a los embalses, entran las plantas térmicas y el factor de emisiones del país sube. Es decir, la misma aplicación, sin cambiar una línea de código, emite más en un año seco. Eso enseña algo que vale para todo el curso: la huella de un sistema no es una propiedad del sistema, es una propiedad del sistema en su contexto.</a:t>
             </a:r>
           </a:p>
           <a:p/>
@@ -1156,7 +1156,7 @@
           <a:p/>
           <a:p>
             <a:r>
-              <a:t>Recoja las respuestas en el muro y no las corrija. En el minuto 20, al llegar al PUE y al enfriamiento, vuelva al muro: alguien va a haber escrito «en internet» o «en un servidor», y ahí se muestra que el servidor está en un edificio que consume tanto en enfriarse como en computar.</a:t>
+              <a:t>Recoja las respuestas en el muro y no las corrija. En el minuto 20, al llegar al PUE y al enfriamiento, vuelva al muro: alguien va a haber escrito «en internet» o «en un servidor», y ahí se muestra que el servidor está en un edificio que consume tanto en enfriarse como en procesar datos.</a:t>
             </a:r>
           </a:p>
         </p:txBody>
@@ -1238,7 +1238,7 @@
           <a:p/>
           <a:p>
             <a:r>
-              <a:t>Fabricación. El celular del paciente, el computador de la secretaria y los servidores donde corre el sistema tuvieron que ser fabricados: minería de metales —incluidos varios escasos y con extracción problemática—, ensamblaje y transporte. Este es el punto que más sorprende y el más importante para las decisiones: en muchos dispositivos personales la mayor parte de la huella de toda su vida ya está gastada cuando se enciende por primera vez. La consecuencia es contraintuitiva: optimizar el consumo de batería es útil, pero alargar la vida útil del aparato pesa mucho más, y eso depende de decisiones de software.</a:t>
+              <a:t>Fabricación. El celular del paciente, el computador de la secretaria y los servidores donde corre el sistema tuvieron que ser fabricados: minería de metales —incluidos varios escasos y con extracción problemática—, ensamblaje y transporte. Este es el punto que más sorprende y el más importante para las decisiones: en muchos dispositivos personales la mayor parte de la huella de toda su vida ya está gastada cuando se enciende por primera vez. La consecuencia sorprende: optimizar el consumo de batería es útil, pero alargar la vida útil del aparato pesa mucho más, y eso depende de decisiones de software.</a:t>
             </a:r>
           </a:p>
           <a:p/>
@@ -1338,7 +1338,7 @@
           <a:p/>
           <a:p>
             <a:r>
-              <a:t>PUE (Power Usage Effectiveness). Es la energía total que entra al centro de datos dividida por la energía que efectivamente llega a los servidores. Si fuera 1.0, todo lo que entra se usa en computar. Un PUE de 1.6 significa que por cada vatio de cómputo se gastan 0,6 en enfriar, iluminar y en pérdidas. Los centros de datos grandes y modernos operan bastante mejor que el promedio de las salas de servidores de empresa, que suelen estar en el rango de 1.5 a 1.6 según las encuestas del sector. La idea que hay que dejar no es el número exacto: es que una parte grande de la energía de un centro de datos no computa nada, y que existe una métrica con nombre para medirlo. Un ingeniero que sabe que el PUE existe puede preguntar por él.</a:t>
+              <a:t>PUE (Power Usage Effectiveness). Es la energía total que entra al centro de datos dividida por la energía que efectivamente llega a los servidores. Si fuera 1.0, todo lo que entra lo usan los servidores. Un PUE de 1.6 significa que por cada vatio que usan los servidores se gastan 0,6 en enfriar, iluminar y en pérdidas. Los centros de datos grandes y modernos operan bastante mejor que el promedio de las salas de servidores de empresa, que suelen estar en el rango de 1.5 a 1.6 según las encuestas del sector. La idea que hay que dejar no es el número exacto: es que una parte grande de la energía de un centro de datos no procesa ningún dato, y que existe una métrica con nombre para medirlo. Un ingeniero que sabe que el PUE existe puede preguntar por él.</a:t>
             </a:r>
           </a:p>
           <a:p/>
@@ -1356,7 +1356,7 @@
           <a:p/>
           <a:p>
             <a:r>
-              <a:t>Obsolescencia inducida por software. Es el concepto que más les sirve porque está bajo su control profesional. Cuando una nueva versión de una aplicación —o de un sistema operativo— deja de funcionar en dispositivos que servían, el software convierte en basura un aparato que estaba bien. No hace falta discutir si hay intención: el efecto es material y medible. Y la contracara es una decisión concreta que un equipo de este curso puede tomar: sostener el soporte para dispositivos viejos, que además es lo correcto para el contexto de la universidad, donde muchos estudiantes trabajan con equipos de varios años.</a:t>
+              <a:t>Obsolescencia inducida por software. Es el concepto que más les sirve porque está bajo su control profesional. Cuando una nueva versión de una aplicación —o de un sistema operativo— deja de funcionar en dispositivos que servían, el software convierte en basura un aparato que estaba bien. No hace falta discutir si hay intención: el efecto es material y medible. Y la otra cara es una decisión concreta que un equipo de este curso puede tomar: sostener el soporte para dispositivos viejos, que además es lo correcto para el contexto de la universidad, donde muchos estudiantes trabajan con equipos de varios años.</a:t>
             </a:r>
           </a:p>
         </p:txBody>
@@ -1438,7 +1438,7 @@
           <a:p/>
           <a:p>
             <a:r>
-              <a:t>La primera —pedir la ubicación cada cinco segundos o cada cinco minutos— es la más fácil de entender y toca batería y red a la vez. La tercera —guardar el resultado en vez de recalcular el reporte completo en cada consulta— es la que más sorprende, porque el estudiante todavía no tiene la intuición de que el cómputo cuesta energía; sirve para conectar con la sesión 7 y con la idea de que la eficiencia no es coquetería de programador. La cuarta —sostener dispositivos viejos— es la de mayor impacto real por lo dicho sobre la fabricación. Y la quinta es la más contemporánea y hay que decirla sin miedo: agregarle un asistente de IA a una función que resolvía una condición simple gasta energía en cada llamada, para siempre. Es una decisión de arquitectura, y hoy se toma con frecuencia por moda.</a:t>
+              <a:t>La primera —pedir la ubicación cada cinco segundos o cada cinco minutos— es la más fácil de entender y toca batería y red a la vez. La tercera —guardar el resultado en vez de recalcular el reporte completo en cada consulta— es la que más sorprende, porque el estudiante todavía no tiene la intuición de que procesar datos cuesta energía; sirve para conectar con la sesión 7 y con la idea de que la eficiencia no es un capricho de programador. La cuarta —sostener dispositivos viejos— es la de mayor impacto real por lo dicho sobre la fabricación. Y la quinta es la más contemporánea y hay que decirla sin miedo: agregarle un asistente de IA a una función que resolvía una condición simple gasta energía en cada llamada, para siempre. Es una decisión de arquitectura, y hoy se toma con frecuencia por moda.</a:t>
             </a:r>
           </a:p>
           <a:p/>
@@ -5692,7 +5692,7 @@
                 </a:solidFill>
                 <a:latin typeface="Calibri"/>
               </a:rPr>
-              <a:t>Y su contracara.</a:t>
+              <a:t>Y su otra cara.</a:t>
             </a:r>
           </a:p>
           <a:p>
@@ -12110,7 +12110,7 @@
                 </a:solidFill>
                 <a:latin typeface="Calibri"/>
               </a:rPr>
-              <a:t>: todo va a computar. Un valor de 1.6 significa que por cada vatio de cómputo se gastan 0,6 en enfriar, iluminar y perder.</a:t>
+              <a:t>: todo llega a los servidores. Un valor de 1.6 significa que por cada vatio que usan los servidores se gastan 0,6 en enfriar, iluminar y perder.</a:t>
             </a:r>
           </a:p>
         </p:txBody>
@@ -12955,7 +12955,7 @@
                 </a:solidFill>
                 <a:latin typeface="Calibri"/>
               </a:rPr>
-              <a:t>–   De esos, a los servidores —los que computan— llegan </a:t>
+              <a:t>–   De esos, a los servidores —los que procesan los datos— llegan </a:t>
             </a:r>
             <a:r>
               <a:rPr sz="2000" b="1" i="0">
@@ -13041,7 +13041,7 @@
                 </a:solidFill>
                 <a:latin typeface="Calibri"/>
               </a:rPr>
-              <a:t>No computan nada.</a:t>
+              <a:t>No procesan ningún dato.</a:t>
             </a:r>
           </a:p>
         </p:txBody>
@@ -13699,7 +13699,7 @@
                 </a:solidFill>
                 <a:latin typeface="Calibri"/>
               </a:rPr>
-              <a:t>Menos cómputo.</a:t>
+              <a:t>Menos trabajo para los servidores.</a:t>
             </a:r>
           </a:p>
           <a:p>
